--- a/docs/RUDP_Presentation.pptx
+++ b/docs/RUDP_Presentation.pptx
@@ -27,9 +27,10 @@
     <p:sldId id="275" r:id="rId21"/>
     <p:sldId id="276" r:id="rId22"/>
     <p:sldId id="277" r:id="rId23"/>
+    <p:sldId id="278" r:id="rId24"/>
   </p:sldIdLst>
   <p:notesMasterIdLst>
-    <p:notesMasterId r:id="rId24"/>
+    <p:notesMasterId r:id="rId25"/>
   </p:notesMasterIdLst>
   <p:sldSz cx="12192000" cy="6858000"/>
   <p:notesSz cx="6858000" cy="12192000"/>
@@ -1779,6 +1780,94 @@
             <a:fld id="{F7021451-1387-4CA6-816F-3879F97B5CBC}" type="slidenum">
               <a:rPr lang="en-US"/>
               <a:t>22</a:t>
+            </a:fld>
+            <a:endParaRPr lang="en-US"/>
+          </a:p>
+        </p:txBody>
+      </p:sp>
+    </p:spTree>
+    <p:extLst>
+      <p:ext uri="{BB962C8B-B14F-4D97-AF65-F5344CB8AC3E}">
+        <p14:creationId xmlns:p14="http://schemas.microsoft.com/office/powerpoint/2010/main" val="1024086991"/>
+      </p:ext>
+    </p:extLst>
+  </p:cSld>
+  <p:clrMapOvr>
+    <a:masterClrMapping/>
+  </p:clrMapOvr>
+</p:notes>
+</file>
+
+<file path=ppt/notesSlides/notesSlide23.xml><?xml version="1.0" encoding="utf-8"?>
+<p:notes xmlns:a="http://schemas.openxmlformats.org/drawingml/2006/main" xmlns:r="http://schemas.openxmlformats.org/officeDocument/2006/relationships" xmlns:p="http://schemas.openxmlformats.org/presentationml/2006/main">
+  <p:cSld>
+    <p:spTree>
+      <p:nvGrpSpPr>
+        <p:cNvPr id="1" name=""/>
+        <p:cNvGrpSpPr/>
+        <p:nvPr/>
+      </p:nvGrpSpPr>
+      <p:grpSpPr>
+        <a:xfrm>
+          <a:off x="0" y="0"/>
+          <a:ext cx="0" cy="0"/>
+          <a:chOff x="0" y="0"/>
+          <a:chExt cx="0" cy="0"/>
+        </a:xfrm>
+      </p:grpSpPr>
+      <p:sp>
+        <p:nvSpPr>
+          <p:cNvPr id="2" name="Slide Image Placeholder 1"/>
+          <p:cNvSpPr>
+            <a:spLocks noGrp="1" noRot="1" noChangeAspect="1"/>
+          </p:cNvSpPr>
+          <p:nvPr>
+            <p:ph type="sldImg"/>
+          </p:nvPr>
+        </p:nvSpPr>
+        <p:spPr/>
+      </p:sp>
+      <p:sp>
+        <p:nvSpPr>
+          <p:cNvPr id="3" name="Notes Placeholder 2"/>
+          <p:cNvSpPr>
+            <a:spLocks noGrp="1"/>
+          </p:cNvSpPr>
+          <p:nvPr>
+            <p:ph type="body" idx="1"/>
+          </p:nvPr>
+        </p:nvSpPr>
+        <p:spPr/>
+        <p:txBody>
+          <a:bodyPr/>
+          <a:lstStyle/>
+          <a:p>
+            <a:r>
+              <a:rPr lang="en-US" dirty="0"/>
+              <a:t/>
+            </a:r>
+            <a:endParaRPr lang="en-US" dirty="0"/>
+          </a:p>
+        </p:txBody>
+      </p:sp>
+      <p:sp>
+        <p:nvSpPr>
+          <p:cNvPr id="4" name="Slide Number Placeholder 3"/>
+          <p:cNvSpPr>
+            <a:spLocks noGrp="1"/>
+          </p:cNvSpPr>
+          <p:nvPr>
+            <p:ph type="sldNum" sz="quarter" idx="10"/>
+          </p:nvPr>
+        </p:nvSpPr>
+        <p:spPr/>
+        <p:txBody>
+          <a:bodyPr/>
+          <a:lstStyle/>
+          <a:p>
+            <a:fld id="{F7021451-1387-4CA6-816F-3879F97B5CBC}" type="slidenum">
+              <a:rPr lang="en-US"/>
+              <a:t>23</a:t>
             </a:fld>
             <a:endParaRPr lang="en-US"/>
           </a:p>
@@ -3004,7 +3093,7 @@
                 <a:ea typeface="Courier New" pitchFamily="34" charset="-122"/>
                 <a:cs typeface="Courier New" pitchFamily="34" charset="-120"/>
               </a:rPr>
-              <a:t>10 / 21   Smart-RUDP</a:t>
+              <a:t>10 / 22   Smart-RUDP</a:t>
             </a:r>
             <a:endParaRPr lang="en-US" sz="1000" dirty="0"/>
           </a:p>
@@ -3201,7 +3290,7 @@
                 <a:ea typeface="Courier New" pitchFamily="34" charset="-122"/>
                 <a:cs typeface="Courier New" pitchFamily="34" charset="-120"/>
               </a:rPr>
-              <a:t>11 / 21   Smart-RUDP</a:t>
+              <a:t>11 / 22   Smart-RUDP</a:t>
             </a:r>
             <a:endParaRPr lang="en-US" sz="1000" dirty="0"/>
           </a:p>
@@ -4031,7 +4120,7 @@
                 <a:ea typeface="Courier New" pitchFamily="34" charset="-122"/>
                 <a:cs typeface="Courier New" pitchFamily="34" charset="-120"/>
               </a:rPr>
-              <a:t>12 / 21   Smart-RUDP</a:t>
+              <a:t>12 / 22   Smart-RUDP</a:t>
             </a:r>
             <a:endParaRPr lang="en-US" sz="1000" dirty="0"/>
           </a:p>
@@ -4328,7 +4417,7 @@
                 <a:ea typeface="Courier New" pitchFamily="34" charset="-122"/>
                 <a:cs typeface="Courier New" pitchFamily="34" charset="-120"/>
               </a:rPr>
-              <a:t>13 / 21   Smart-RUDP</a:t>
+              <a:t>13 / 22   Smart-RUDP</a:t>
             </a:r>
             <a:endParaRPr lang="en-US" sz="1000" dirty="0"/>
           </a:p>
@@ -4628,7 +4717,7 @@
                 <a:ea typeface="Courier New" pitchFamily="34" charset="-122"/>
                 <a:cs typeface="Courier New" pitchFamily="34" charset="-120"/>
               </a:rPr>
-              <a:t>14 / 21   Smart-RUDP</a:t>
+              <a:t>14 / 22   Smart-RUDP</a:t>
             </a:r>
             <a:endParaRPr lang="en-US" sz="1000" dirty="0"/>
           </a:p>
@@ -5012,7 +5101,7 @@
                 <a:ea typeface="Courier New" pitchFamily="34" charset="-122"/>
                 <a:cs typeface="Courier New" pitchFamily="34" charset="-120"/>
               </a:rPr>
-              <a:t>15 / 21   Smart-RUDP</a:t>
+              <a:t>15 / 22   Smart-RUDP</a:t>
             </a:r>
             <a:endParaRPr lang="en-US" sz="1000" dirty="0"/>
           </a:p>
@@ -5431,7 +5520,7 @@
                 <a:ea typeface="Courier New" pitchFamily="34" charset="-122"/>
                 <a:cs typeface="Courier New" pitchFamily="34" charset="-120"/>
               </a:rPr>
-              <a:t>Smart-RUDP vs AIMD: honest result</a:t>
+              <a:t>The AI agent in our code</a:t>
             </a:r>
             <a:endParaRPr lang="en-US" sz="3000" dirty="0"/>
           </a:p>
@@ -5470,46 +5559,86 @@
                 <a:ea typeface="Courier New" pitchFamily="34" charset="-122"/>
                 <a:cs typeface="Courier New" pitchFamily="34" charset="-120"/>
               </a:rPr>
-              <a:t>16 / 21   Smart-RUDP</a:t>
+              <a:t>16 / 22   Smart-RUDP</a:t>
             </a:r>
             <a:endParaRPr lang="en-US" sz="1000" dirty="0"/>
           </a:p>
         </p:txBody>
       </p:sp>
-      <p:pic>
-        <p:nvPicPr>
-          <p:cNvPr id="4" name="Image 0" descr="sm_fig1_comparison.png">    </p:cNvPr>
-          <p:cNvPicPr>
-            <a:picLocks noChangeAspect="1"/>
-          </p:cNvPicPr>
-          <p:nvPr/>
-        </p:nvPicPr>
-        <p:blipFill>
-          <a:blip r:embed="rId1"/>
-          <a:stretch>
-            <a:fillRect/>
-          </a:stretch>
-        </p:blipFill>
-        <p:spPr>
-          <a:xfrm>
-            <a:off x="548640" y="1097280"/>
-            <a:ext cx="11064240" cy="3621024"/>
-          </a:xfrm>
-          <a:prstGeom prst="rect">
-            <a:avLst/>
-          </a:prstGeom>
-        </p:spPr>
-      </p:pic>
-      <p:sp>
-        <p:nvSpPr>
-          <p:cNvPr id="5" name="Text 2"/>
-          <p:cNvSpPr/>
-          <p:nvPr/>
-        </p:nvSpPr>
-        <p:spPr>
-          <a:xfrm>
-            <a:off x="548640" y="4937760"/>
-            <a:ext cx="11064240" cy="1463040"/>
+      <p:sp>
+        <p:nvSpPr>
+          <p:cNvPr id="4" name="Shape 2"/>
+          <p:cNvSpPr/>
+          <p:nvPr/>
+        </p:nvSpPr>
+        <p:spPr>
+          <a:xfrm>
+            <a:off x="457200" y="1188720"/>
+            <a:ext cx="5669280" cy="4206240"/>
+          </a:xfrm>
+          <a:prstGeom prst="rect">
+            <a:avLst/>
+          </a:prstGeom>
+          <a:solidFill>
+            <a:srgbClr val="141B24"/>
+          </a:solidFill>
+          <a:ln w="12700">
+            <a:solidFill>
+              <a:srgbClr val="39FF88"/>
+            </a:solidFill>
+            <a:prstDash val="solid"/>
+          </a:ln>
+        </p:spPr>
+      </p:sp>
+      <p:sp>
+        <p:nvSpPr>
+          <p:cNvPr id="5" name="Text 3"/>
+          <p:cNvSpPr/>
+          <p:nvPr/>
+        </p:nvSpPr>
+        <p:spPr>
+          <a:xfrm>
+            <a:off x="594360" y="1234440"/>
+            <a:ext cx="5394960" cy="320040"/>
+          </a:xfrm>
+          <a:prstGeom prst="rect">
+            <a:avLst/>
+          </a:prstGeom>
+          <a:noFill/>
+          <a:ln/>
+        </p:spPr>
+        <p:txBody>
+          <a:bodyPr wrap="square" lIns="0" tIns="0" rIns="0" bIns="0" rtlCol="0" anchor="ctr"/>
+          <a:lstStyle/>
+          <a:p>
+            <a:pPr indent="0" marL="0">
+              <a:buNone/>
+            </a:pPr>
+            <a:r>
+              <a:rPr lang="en-US" sz="1300" b="1" dirty="0">
+                <a:solidFill>
+                  <a:srgbClr val="39FF88"/>
+                </a:solidFill>
+                <a:latin typeface="Courier New" pitchFamily="34" charset="0"/>
+                <a:ea typeface="Courier New" pitchFamily="34" charset="-122"/>
+                <a:cs typeface="Courier New" pitchFamily="34" charset="-120"/>
+              </a:rPr>
+              <a:t>src/rl_cc.h  (agent, simplified)</a:t>
+            </a:r>
+            <a:endParaRPr lang="en-US" sz="1300" dirty="0"/>
+          </a:p>
+        </p:txBody>
+      </p:sp>
+      <p:sp>
+        <p:nvSpPr>
+          <p:cNvPr id="6" name="Text 4"/>
+          <p:cNvSpPr/>
+          <p:nvPr/>
+        </p:nvSpPr>
+        <p:spPr>
+          <a:xfrm>
+            <a:off x="594360" y="1600200"/>
+            <a:ext cx="5394960" cy="3749040"/>
           </a:xfrm>
           <a:prstGeom prst="rect">
             <a:avLst/>
@@ -5521,86 +5650,491 @@
           <a:bodyPr wrap="square" lIns="0" tIns="0" rIns="0" bIns="0" rtlCol="0" anchor="t"/>
           <a:lstStyle/>
           <a:p>
-            <a:pPr marL="342900" indent="-342900">
-              <a:spcAft>
-                <a:spcPts val="800"/>
-              </a:spcAft>
-              <a:buSzPct val="100000"/>
-              <a:buChar char="•"/>
+            <a:pPr indent="0" marL="0">
+              <a:buNone/>
+            </a:pPr>
+            <a:r>
+              <a:rPr lang="en-US" sz="1400" dirty="0">
+                <a:solidFill>
+                  <a:srgbClr val="E6EDF3"/>
+                </a:solidFill>
+                <a:latin typeface="Courier New" pitchFamily="34" charset="0"/>
+                <a:ea typeface="Courier New" pitchFamily="34" charset="-122"/>
+                <a:cs typeface="Courier New" pitchFamily="34" charset="-120"/>
+              </a:rPr>
+              <a:t>// state: 4 x 4 x 5 = 80 buckets</a:t>
+            </a:r>
+            <a:endParaRPr lang="en-US" sz="1400" dirty="0"/>
+          </a:p>
+          <a:p>
+            <a:pPr indent="0" marL="0">
+              <a:buNone/>
+            </a:pPr>
+            <a:r>
+              <a:rPr lang="en-US" sz="1400" dirty="0">
+                <a:solidFill>
+                  <a:srgbClr val="E6EDF3"/>
+                </a:solidFill>
+                <a:latin typeface="Courier New" pitchFamily="34" charset="0"/>
+                <a:ea typeface="Courier New" pitchFamily="34" charset="-122"/>
+                <a:cs typeface="Courier New" pitchFamily="34" charset="-120"/>
+              </a:rPr>
+              <a:t>s = (rtt_bucket*4 + loss_bucket)*5 + cwnd_bucket;</a:t>
+            </a:r>
+            <a:endParaRPr lang="en-US" sz="1400" dirty="0"/>
+          </a:p>
+          <a:p>
+            <a:pPr indent="0" marL="0">
+              <a:buNone/>
+            </a:pPr>
+            <a:endParaRPr lang="en-US" sz="1400" dirty="0"/>
+          </a:p>
+          <a:p>
+            <a:pPr indent="0" marL="0">
+              <a:buNone/>
+            </a:pPr>
+            <a:r>
+              <a:rPr lang="en-US" sz="1400" dirty="0">
+                <a:solidFill>
+                  <a:srgbClr val="E6EDF3"/>
+                </a:solidFill>
+                <a:latin typeface="Courier New" pitchFamily="34" charset="0"/>
+                <a:ea typeface="Courier New" pitchFamily="34" charset="-122"/>
+                <a:cs typeface="Courier New" pitchFamily="34" charset="-120"/>
+              </a:rPr>
+              <a:t>// choose: explore with prob. eps, else best</a:t>
+            </a:r>
+            <a:endParaRPr lang="en-US" sz="1400" dirty="0"/>
+          </a:p>
+          <a:p>
+            <a:pPr indent="0" marL="0">
+              <a:buNone/>
+            </a:pPr>
+            <a:r>
+              <a:rPr lang="en-US" sz="1400" dirty="0">
+                <a:solidFill>
+                  <a:srgbClr val="E6EDF3"/>
+                </a:solidFill>
+                <a:latin typeface="Courier New" pitchFamily="34" charset="0"/>
+                <a:ea typeface="Courier New" pitchFamily="34" charset="-122"/>
+                <a:cs typeface="Courier New" pitchFamily="34" charset="-120"/>
+              </a:rPr>
+              <a:t>int rl_choose(a, s) {</a:t>
+            </a:r>
+            <a:endParaRPr lang="en-US" sz="1400" dirty="0"/>
+          </a:p>
+          <a:p>
+            <a:pPr indent="0" marL="0">
+              <a:buNone/>
+            </a:pPr>
+            <a:r>
+              <a:rPr lang="en-US" sz="1400" dirty="0">
+                <a:solidFill>
+                  <a:srgbClr val="E6EDF3"/>
+                </a:solidFill>
+                <a:latin typeface="Courier New" pitchFamily="34" charset="0"/>
+                <a:ea typeface="Courier New" pitchFamily="34" charset="-122"/>
+                <a:cs typeface="Courier New" pitchFamily="34" charset="-120"/>
+              </a:rPr>
+              <a:t>  if (rand01() &lt; a-&gt;eps) return rand() % 5;</a:t>
+            </a:r>
+            <a:endParaRPr lang="en-US" sz="1400" dirty="0"/>
+          </a:p>
+          <a:p>
+            <a:pPr indent="0" marL="0">
+              <a:buNone/>
+            </a:pPr>
+            <a:r>
+              <a:rPr lang="en-US" sz="1400" dirty="0">
+                <a:solidFill>
+                  <a:srgbClr val="E6EDF3"/>
+                </a:solidFill>
+                <a:latin typeface="Courier New" pitchFamily="34" charset="0"/>
+                <a:ea typeface="Courier New" pitchFamily="34" charset="-122"/>
+                <a:cs typeface="Courier New" pitchFamily="34" charset="-120"/>
+              </a:rPr>
+              <a:t>  return argmax(a-&gt;q[s]);        // 5 actions</a:t>
+            </a:r>
+            <a:endParaRPr lang="en-US" sz="1400" dirty="0"/>
+          </a:p>
+          <a:p>
+            <a:pPr indent="0" marL="0">
+              <a:buNone/>
+            </a:pPr>
+            <a:r>
+              <a:rPr lang="en-US" sz="1400" dirty="0">
+                <a:solidFill>
+                  <a:srgbClr val="E6EDF3"/>
+                </a:solidFill>
+                <a:latin typeface="Courier New" pitchFamily="34" charset="0"/>
+                <a:ea typeface="Courier New" pitchFamily="34" charset="-122"/>
+                <a:cs typeface="Courier New" pitchFamily="34" charset="-120"/>
+              </a:rPr>
+              <a:t>}</a:t>
+            </a:r>
+            <a:endParaRPr lang="en-US" sz="1400" dirty="0"/>
+          </a:p>
+          <a:p>
+            <a:pPr indent="0" marL="0">
+              <a:buNone/>
+            </a:pPr>
+            <a:endParaRPr lang="en-US" sz="1400" dirty="0"/>
+          </a:p>
+          <a:p>
+            <a:pPr indent="0" marL="0">
+              <a:buNone/>
+            </a:pPr>
+            <a:r>
+              <a:rPr lang="en-US" sz="1400" dirty="0">
+                <a:solidFill>
+                  <a:srgbClr val="E6EDF3"/>
+                </a:solidFill>
+                <a:latin typeface="Courier New" pitchFamily="34" charset="0"/>
+                <a:ea typeface="Courier New" pitchFamily="34" charset="-122"/>
+                <a:cs typeface="Courier New" pitchFamily="34" charset="-120"/>
+              </a:rPr>
+              <a:t>// learn: the Q-learning update</a:t>
+            </a:r>
+            <a:endParaRPr lang="en-US" sz="1400" dirty="0"/>
+          </a:p>
+          <a:p>
+            <a:pPr indent="0" marL="0">
+              <a:buNone/>
+            </a:pPr>
+            <a:r>
+              <a:rPr lang="en-US" sz="1400" dirty="0">
+                <a:solidFill>
+                  <a:srgbClr val="E6EDF3"/>
+                </a:solidFill>
+                <a:latin typeface="Courier New" pitchFamily="34" charset="0"/>
+                <a:ea typeface="Courier New" pitchFamily="34" charset="-122"/>
+                <a:cs typeface="Courier New" pitchFamily="34" charset="-120"/>
+              </a:rPr>
+              <a:t>void rl_update(a, s, act, r, s2) {</a:t>
+            </a:r>
+            <a:endParaRPr lang="en-US" sz="1400" dirty="0"/>
+          </a:p>
+          <a:p>
+            <a:pPr indent="0" marL="0">
+              <a:buNone/>
+            </a:pPr>
+            <a:r>
+              <a:rPr lang="en-US" sz="1400" dirty="0">
+                <a:solidFill>
+                  <a:srgbClr val="E6EDF3"/>
+                </a:solidFill>
+                <a:latin typeface="Courier New" pitchFamily="34" charset="0"/>
+                <a:ea typeface="Courier New" pitchFamily="34" charset="-122"/>
+                <a:cs typeface="Courier New" pitchFamily="34" charset="-120"/>
+              </a:rPr>
+              <a:t>  target = r + a-&gt;gamma * max(a-&gt;q[s2]);</a:t>
+            </a:r>
+            <a:endParaRPr lang="en-US" sz="1400" dirty="0"/>
+          </a:p>
+          <a:p>
+            <a:pPr indent="0" marL="0">
+              <a:buNone/>
+            </a:pPr>
+            <a:r>
+              <a:rPr lang="en-US" sz="1400" dirty="0">
+                <a:solidFill>
+                  <a:srgbClr val="E6EDF3"/>
+                </a:solidFill>
+                <a:latin typeface="Courier New" pitchFamily="34" charset="0"/>
+                <a:ea typeface="Courier New" pitchFamily="34" charset="-122"/>
+                <a:cs typeface="Courier New" pitchFamily="34" charset="-120"/>
+              </a:rPr>
+              <a:t>  a-&gt;q[s][act] += a-&gt;alpha * (target - a-&gt;q[s][act]);</a:t>
+            </a:r>
+            <a:endParaRPr lang="en-US" sz="1400" dirty="0"/>
+          </a:p>
+          <a:p>
+            <a:pPr indent="0" marL="0">
+              <a:buNone/>
+            </a:pPr>
+            <a:r>
+              <a:rPr lang="en-US" sz="1400" dirty="0">
+                <a:solidFill>
+                  <a:srgbClr val="E6EDF3"/>
+                </a:solidFill>
+                <a:latin typeface="Courier New" pitchFamily="34" charset="0"/>
+                <a:ea typeface="Courier New" pitchFamily="34" charset="-122"/>
+                <a:cs typeface="Courier New" pitchFamily="34" charset="-120"/>
+              </a:rPr>
+              <a:t>}</a:t>
+            </a:r>
+            <a:endParaRPr lang="en-US" sz="1400" dirty="0"/>
+          </a:p>
+        </p:txBody>
+      </p:sp>
+      <p:sp>
+        <p:nvSpPr>
+          <p:cNvPr id="7" name="Shape 5"/>
+          <p:cNvSpPr/>
+          <p:nvPr/>
+        </p:nvSpPr>
+        <p:spPr>
+          <a:xfrm>
+            <a:off x="6309360" y="1188720"/>
+            <a:ext cx="5394960" cy="4206240"/>
+          </a:xfrm>
+          <a:prstGeom prst="rect">
+            <a:avLst/>
+          </a:prstGeom>
+          <a:solidFill>
+            <a:srgbClr val="141B24"/>
+          </a:solidFill>
+          <a:ln w="12700">
+            <a:solidFill>
+              <a:srgbClr val="FFB000"/>
+            </a:solidFill>
+            <a:prstDash val="solid"/>
+          </a:ln>
+        </p:spPr>
+      </p:sp>
+      <p:sp>
+        <p:nvSpPr>
+          <p:cNvPr id="8" name="Text 6"/>
+          <p:cNvSpPr/>
+          <p:nvPr/>
+        </p:nvSpPr>
+        <p:spPr>
+          <a:xfrm>
+            <a:off x="6446520" y="1234440"/>
+            <a:ext cx="5120640" cy="320040"/>
+          </a:xfrm>
+          <a:prstGeom prst="rect">
+            <a:avLst/>
+          </a:prstGeom>
+          <a:noFill/>
+          <a:ln/>
+        </p:spPr>
+        <p:txBody>
+          <a:bodyPr wrap="square" lIns="0" tIns="0" rIns="0" bIns="0" rtlCol="0" anchor="ctr"/>
+          <a:lstStyle/>
+          <a:p>
+            <a:pPr indent="0" marL="0">
+              <a:buNone/>
+            </a:pPr>
+            <a:r>
+              <a:rPr lang="en-US" sz="1300" b="1" dirty="0">
+                <a:solidFill>
+                  <a:srgbClr val="FFB000"/>
+                </a:solidFill>
+                <a:latin typeface="Courier New" pitchFamily="34" charset="0"/>
+                <a:ea typeface="Courier New" pitchFamily="34" charset="-122"/>
+                <a:cs typeface="Courier New" pitchFamily="34" charset="-120"/>
+              </a:rPr>
+              <a:t>src/smart_client.c  (decision loop, simplified)</a:t>
+            </a:r>
+            <a:endParaRPr lang="en-US" sz="1300" dirty="0"/>
+          </a:p>
+        </p:txBody>
+      </p:sp>
+      <p:sp>
+        <p:nvSpPr>
+          <p:cNvPr id="9" name="Text 7"/>
+          <p:cNvSpPr/>
+          <p:nvPr/>
+        </p:nvSpPr>
+        <p:spPr>
+          <a:xfrm>
+            <a:off x="6446520" y="1600200"/>
+            <a:ext cx="5120640" cy="3749040"/>
+          </a:xfrm>
+          <a:prstGeom prst="rect">
+            <a:avLst/>
+          </a:prstGeom>
+          <a:noFill/>
+          <a:ln/>
+        </p:spPr>
+        <p:txBody>
+          <a:bodyPr wrap="square" lIns="0" tIns="0" rIns="0" bIns="0" rtlCol="0" anchor="t"/>
+          <a:lstStyle/>
+          <a:p>
+            <a:pPr indent="0" marL="0">
+              <a:buNone/>
+            </a:pPr>
+            <a:r>
+              <a:rPr lang="en-US" sz="1400" dirty="0">
+                <a:solidFill>
+                  <a:srgbClr val="E6EDF3"/>
+                </a:solidFill>
+                <a:latin typeface="Courier New" pitchFamily="34" charset="0"/>
+                <a:ea typeface="Courier New" pitchFamily="34" charset="-122"/>
+                <a:cs typeface="Courier New" pitchFamily="34" charset="-120"/>
+              </a:rPr>
+              <a:t>// once per RTT, in smart_client.c</a:t>
+            </a:r>
+            <a:endParaRPr lang="en-US" sz="1400" dirty="0"/>
+          </a:p>
+          <a:p>
+            <a:pPr indent="0" marL="0">
+              <a:buNone/>
+            </a:pPr>
+            <a:r>
+              <a:rPr lang="en-US" sz="1400" dirty="0">
+                <a:solidFill>
+                  <a:srgbClr val="E6EDF3"/>
+                </a:solidFill>
+                <a:latin typeface="Courier New" pitchFamily="34" charset="0"/>
+                <a:ea typeface="Courier New" pitchFamily="34" charset="-122"/>
+                <a:cs typeface="Courier New" pitchFamily="34" charset="-120"/>
+              </a:rPr>
+              <a:t>ratio = rtt / base_rtt;   lossf = losses / sent;</a:t>
+            </a:r>
+            <a:endParaRPr lang="en-US" sz="1400" dirty="0"/>
+          </a:p>
+          <a:p>
+            <a:pPr indent="0" marL="0">
+              <a:buNone/>
+            </a:pPr>
+            <a:endParaRPr lang="en-US" sz="1400" dirty="0"/>
+          </a:p>
+          <a:p>
+            <a:pPr indent="0" marL="0">
+              <a:buNone/>
+            </a:pPr>
+            <a:r>
+              <a:rPr lang="en-US" sz="1400" dirty="0">
+                <a:solidFill>
+                  <a:srgbClr val="E6EDF3"/>
+                </a:solidFill>
+                <a:latin typeface="Courier New" pitchFamily="34" charset="0"/>
+                <a:ea typeface="Courier New" pitchFamily="34" charset="-122"/>
+                <a:cs typeface="Courier New" pitchFamily="34" charset="-120"/>
+              </a:rPr>
+              <a:t>reward = sqrt(throughput_norm)</a:t>
+            </a:r>
+            <a:endParaRPr lang="en-US" sz="1400" dirty="0"/>
+          </a:p>
+          <a:p>
+            <a:pPr indent="0" marL="0">
+              <a:buNone/>
+            </a:pPr>
+            <a:r>
+              <a:rPr lang="en-US" sz="1400" dirty="0">
+                <a:solidFill>
+                  <a:srgbClr val="E6EDF3"/>
+                </a:solidFill>
+                <a:latin typeface="Courier New" pitchFamily="34" charset="0"/>
+                <a:ea typeface="Courier New" pitchFamily="34" charset="-122"/>
+                <a:cs typeface="Courier New" pitchFamily="34" charset="-120"/>
+              </a:rPr>
+              <a:t>       - 0.5 * max(0, ratio - 1)   // delay growth</a:t>
+            </a:r>
+            <a:endParaRPr lang="en-US" sz="1400" dirty="0"/>
+          </a:p>
+          <a:p>
+            <a:pPr indent="0" marL="0">
+              <a:buNone/>
+            </a:pPr>
+            <a:r>
+              <a:rPr lang="en-US" sz="1400" dirty="0">
+                <a:solidFill>
+                  <a:srgbClr val="E6EDF3"/>
+                </a:solidFill>
+                <a:latin typeface="Courier New" pitchFamily="34" charset="0"/>
+                <a:ea typeface="Courier New" pitchFamily="34" charset="-122"/>
+                <a:cs typeface="Courier New" pitchFamily="34" charset="-120"/>
+              </a:rPr>
+              <a:t>       - 4.0 * lossf;              // loss</a:t>
+            </a:r>
+            <a:endParaRPr lang="en-US" sz="1400" dirty="0"/>
+          </a:p>
+          <a:p>
+            <a:pPr indent="0" marL="0">
+              <a:buNone/>
+            </a:pPr>
+            <a:endParaRPr lang="en-US" sz="1400" dirty="0"/>
+          </a:p>
+          <a:p>
+            <a:pPr indent="0" marL="0">
+              <a:buNone/>
+            </a:pPr>
+            <a:r>
+              <a:rPr lang="en-US" sz="1400" dirty="0">
+                <a:solidFill>
+                  <a:srgbClr val="E6EDF3"/>
+                </a:solidFill>
+                <a:latin typeface="Courier New" pitchFamily="34" charset="0"/>
+                <a:ea typeface="Courier New" pitchFamily="34" charset="-122"/>
+                <a:cs typeface="Courier New" pitchFamily="34" charset="-120"/>
+              </a:rPr>
+              <a:t>rl_update(&amp;ag, prev_s, prev_a, reward, s2);</a:t>
+            </a:r>
+            <a:endParaRPr lang="en-US" sz="1400" dirty="0"/>
+          </a:p>
+          <a:p>
+            <a:pPr indent="0" marL="0">
+              <a:buNone/>
+            </a:pPr>
+            <a:r>
+              <a:rPr lang="en-US" sz="1400" dirty="0">
+                <a:solidFill>
+                  <a:srgbClr val="E6EDF3"/>
+                </a:solidFill>
+                <a:latin typeface="Courier New" pitchFamily="34" charset="0"/>
+                <a:ea typeface="Courier New" pitchFamily="34" charset="-122"/>
+                <a:cs typeface="Courier New" pitchFamily="34" charset="-120"/>
+              </a:rPr>
+              <a:t>act   = rl_choose(&amp;ag, s2);</a:t>
+            </a:r>
+            <a:endParaRPr lang="en-US" sz="1400" dirty="0"/>
+          </a:p>
+          <a:p>
+            <a:pPr indent="0" marL="0">
+              <a:buNone/>
+            </a:pPr>
+            <a:r>
+              <a:rPr lang="en-US" sz="1400" dirty="0">
+                <a:solidFill>
+                  <a:srgbClr val="E6EDF3"/>
+                </a:solidFill>
+                <a:latin typeface="Courier New" pitchFamily="34" charset="0"/>
+                <a:ea typeface="Courier New" pitchFamily="34" charset="-122"/>
+                <a:cs typeface="Courier New" pitchFamily="34" charset="-120"/>
+              </a:rPr>
+              <a:t>cwnd *= {0.5, 0.85, 1.0, 1.15, 1.5}[act];</a:t>
+            </a:r>
+            <a:endParaRPr lang="en-US" sz="1400" dirty="0"/>
+          </a:p>
+        </p:txBody>
+      </p:sp>
+      <p:sp>
+        <p:nvSpPr>
+          <p:cNvPr id="10" name="Text 8"/>
+          <p:cNvSpPr/>
+          <p:nvPr/>
+        </p:nvSpPr>
+        <p:spPr>
+          <a:xfrm>
+            <a:off x="457200" y="5577840"/>
+            <a:ext cx="11247120" cy="731520"/>
+          </a:xfrm>
+          <a:prstGeom prst="rect">
+            <a:avLst/>
+          </a:prstGeom>
+          <a:noFill/>
+          <a:ln/>
+        </p:spPr>
+        <p:txBody>
+          <a:bodyPr wrap="square" lIns="0" tIns="0" rIns="0" bIns="0" rtlCol="0" anchor="ctr"/>
+          <a:lstStyle/>
+          <a:p>
+            <a:pPr indent="0" marL="0">
+              <a:buNone/>
             </a:pPr>
             <a:r>
               <a:rPr lang="en-US" sz="1500" dirty="0">
                 <a:solidFill>
-                  <a:srgbClr val="E6EDF3"/>
+                  <a:srgbClr val="8B98A5"/>
                 </a:solidFill>
                 <a:latin typeface="Calibri" pitchFamily="34" charset="0"/>
                 <a:ea typeface="Calibri" pitchFamily="34" charset="-122"/>
                 <a:cs typeface="Calibri" pitchFamily="34" charset="-120"/>
               </a:rPr>
-              <a:t>6 evaluation runs per scenario after 40 training episodes</a:t>
-            </a:r>
-            <a:endParaRPr lang="en-US" sz="1500" dirty="0"/>
-          </a:p>
-          <a:p>
-            <a:pPr marL="342900" indent="-342900">
-              <a:spcAft>
-                <a:spcPts val="800"/>
-              </a:spcAft>
-              <a:buSzPct val="100000"/>
-              <a:buChar char="•"/>
-            </a:pPr>
-            <a:r>
-              <a:rPr lang="en-US" sz="1500" dirty="0">
-                <a:solidFill>
-                  <a:srgbClr val="E6EDF3"/>
-                </a:solidFill>
-                <a:latin typeface="Calibri" pitchFamily="34" charset="0"/>
-                <a:ea typeface="Calibri" pitchFamily="34" charset="-122"/>
-                <a:cs typeface="Calibri" pitchFamily="34" charset="-120"/>
-              </a:rPr>
-              <a:t>Not faster: +63% time on 5G-like, +10% on satellite, tie on lossy</a:t>
-            </a:r>
-            <a:endParaRPr lang="en-US" sz="1500" dirty="0"/>
-          </a:p>
-          <a:p>
-            <a:pPr marL="342900" indent="-342900">
-              <a:spcAft>
-                <a:spcPts val="800"/>
-              </a:spcAft>
-              <a:buSzPct val="100000"/>
-              <a:buChar char="•"/>
-            </a:pPr>
-            <a:r>
-              <a:rPr lang="en-US" sz="1500" dirty="0">
-                <a:solidFill>
-                  <a:srgbClr val="E6EDF3"/>
-                </a:solidFill>
-                <a:latin typeface="Calibri" pitchFamily="34" charset="0"/>
-                <a:ea typeface="Calibri" pitchFamily="34" charset="-122"/>
-                <a:cs typeface="Calibri" pitchFamily="34" charset="-120"/>
-              </a:rPr>
-              <a:t>Fewer retransmissions on 5G-like and satellite, but within run-to-run noise</a:t>
-            </a:r>
-            <a:endParaRPr lang="en-US" sz="1500" dirty="0"/>
-          </a:p>
-          <a:p>
-            <a:pPr marL="342900" indent="-342900">
-              <a:spcAft>
-                <a:spcPts val="800"/>
-              </a:spcAft>
-              <a:buSzPct val="100000"/>
-              <a:buChar char="•"/>
-            </a:pPr>
-            <a:r>
-              <a:rPr lang="en-US" sz="1500" dirty="0">
-                <a:solidFill>
-                  <a:srgbClr val="E6EDF3"/>
-                </a:solidFill>
-                <a:latin typeface="Calibri" pitchFamily="34" charset="0"/>
-                <a:ea typeface="Calibri" pitchFamily="34" charset="-122"/>
-                <a:cs typeface="Calibri" pitchFamily="34" charset="-120"/>
-              </a:rPr>
-              <a:t>Earlier training rounds were much worse; reported run is the final configuration</a:t>
+              <a:t>Tabular Q-learning: alpha 0.15, gamma 0.9. The chat version (web/cc.py) uses the same state and actions; trained offline in web/train.py, table saved in results/q_chat.txt. A neural network (deep RL) is future work: 80 states do not need one.</a:t>
             </a:r>
             <a:endParaRPr lang="en-US" sz="1500" dirty="0"/>
           </a:p>
@@ -5671,7 +6205,7 @@
                 <a:ea typeface="Courier New" pitchFamily="34" charset="-122"/>
                 <a:cs typeface="Courier New" pitchFamily="34" charset="-120"/>
               </a:rPr>
-              <a:t>Wireshark: RUDP dissector and traces</a:t>
+              <a:t>Smart-RUDP vs AIMD: honest result</a:t>
             </a:r>
             <a:endParaRPr lang="en-US" sz="3000" dirty="0"/>
           </a:p>
@@ -5710,7 +6244,7 @@
                 <a:ea typeface="Courier New" pitchFamily="34" charset="-122"/>
                 <a:cs typeface="Courier New" pitchFamily="34" charset="-120"/>
               </a:rPr>
-              <a:t>17 / 21   Smart-RUDP</a:t>
+              <a:t>17 / 22   Smart-RUDP</a:t>
             </a:r>
             <a:endParaRPr lang="en-US" sz="1000" dirty="0"/>
           </a:p>
@@ -5718,7 +6252,7 @@
       </p:sp>
       <p:pic>
         <p:nvPicPr>
-          <p:cNvPr id="4" name="Image 0" descr="wireshark_seq_time.png">    </p:cNvPr>
+          <p:cNvPr id="4" name="Image 0" descr="sm_fig1_comparison.png">    </p:cNvPr>
           <p:cNvPicPr>
             <a:picLocks noChangeAspect="1"/>
           </p:cNvPicPr>
@@ -5733,7 +6267,7 @@
         <p:spPr>
           <a:xfrm>
             <a:off x="548640" y="1097280"/>
-            <a:ext cx="7863840" cy="2716599"/>
+            <a:ext cx="11064240" cy="3621024"/>
           </a:xfrm>
           <a:prstGeom prst="rect">
             <a:avLst/>
@@ -5748,8 +6282,8 @@
         </p:nvSpPr>
         <p:spPr>
           <a:xfrm>
-            <a:off x="8595360" y="1280160"/>
-            <a:ext cx="3200400" cy="4114800"/>
+            <a:off x="548640" y="4937760"/>
+            <a:ext cx="11064240" cy="1463040"/>
           </a:xfrm>
           <a:prstGeom prst="rect">
             <a:avLst/>
@@ -5769,7 +6303,7 @@
               <a:buChar char="•"/>
             </a:pPr>
             <a:r>
-              <a:rPr lang="en-US" sz="1400" dirty="0">
+              <a:rPr lang="en-US" sz="1500" dirty="0">
                 <a:solidFill>
                   <a:srgbClr val="E6EDF3"/>
                 </a:solidFill>
@@ -5777,9 +6311,9 @@
                 <a:ea typeface="Calibri" pitchFamily="34" charset="-122"/>
                 <a:cs typeface="Calibri" pitchFamily="34" charset="-120"/>
               </a:rPr>
-              <a:t>rudp.lua decodes seq, ack, flags, checksum, length</a:t>
-            </a:r>
-            <a:endParaRPr lang="en-US" sz="1400" dirty="0"/>
+              <a:t>6 evaluation runs per scenario after 40 training episodes</a:t>
+            </a:r>
+            <a:endParaRPr lang="en-US" sz="1500" dirty="0"/>
           </a:p>
           <a:p>
             <a:pPr marL="342900" indent="-342900">
@@ -5790,7 +6324,7 @@
               <a:buChar char="•"/>
             </a:pPr>
             <a:r>
-              <a:rPr lang="en-US" sz="1400" dirty="0">
+              <a:rPr lang="en-US" sz="1500" dirty="0">
                 <a:solidFill>
                   <a:srgbClr val="E6EDF3"/>
                 </a:solidFill>
@@ -5798,9 +6332,9 @@
                 <a:ea typeface="Calibri" pitchFamily="34" charset="-122"/>
                 <a:cs typeface="Calibri" pitchFamily="34" charset="-120"/>
               </a:rPr>
-              <a:t>Filters: smartrudp.flags.data == 1, smartrudp.seq == N</a:t>
-            </a:r>
-            <a:endParaRPr lang="en-US" sz="1400" dirty="0"/>
+              <a:t>Not faster: +63% time on 5G-like, +10% on satellite, tie on lossy</a:t>
+            </a:r>
+            <a:endParaRPr lang="en-US" sz="1500" dirty="0"/>
           </a:p>
           <a:p>
             <a:pPr marL="342900" indent="-342900">
@@ -5811,7 +6345,7 @@
               <a:buChar char="•"/>
             </a:pPr>
             <a:r>
-              <a:rPr lang="en-US" sz="1400" dirty="0">
+              <a:rPr lang="en-US" sz="1500" dirty="0">
                 <a:solidFill>
                   <a:srgbClr val="E6EDF3"/>
                 </a:solidFill>
@@ -5819,9 +6353,9 @@
                 <a:ea typeface="Calibri" pitchFamily="34" charset="-122"/>
                 <a:cs typeface="Calibri" pitchFamily="34" charset="-120"/>
               </a:rPr>
-              <a:t>400 packets, lossy path: 87 (AIMD) and 95 (Smart) repeated data segments seen at the receiver</a:t>
-            </a:r>
-            <a:endParaRPr lang="en-US" sz="1400" dirty="0"/>
+              <a:t>Fewer retransmissions on 5G-like and satellite, but within run-to-run noise</a:t>
+            </a:r>
+            <a:endParaRPr lang="en-US" sz="1500" dirty="0"/>
           </a:p>
           <a:p>
             <a:pPr marL="342900" indent="-342900">
@@ -5832,7 +6366,7 @@
               <a:buChar char="•"/>
             </a:pPr>
             <a:r>
-              <a:rPr lang="en-US" sz="1400" dirty="0">
+              <a:rPr lang="en-US" sz="1500" dirty="0">
                 <a:solidFill>
                   <a:srgbClr val="E6EDF3"/>
                 </a:solidFill>
@@ -5840,9 +6374,9 @@
                 <a:ea typeface="Calibri" pitchFamily="34" charset="-122"/>
                 <a:cs typeface="Calibri" pitchFamily="34" charset="-120"/>
               </a:rPr>
-              <a:t>Trace exported by the program, topology addresses, handshake not included</a:t>
-            </a:r>
-            <a:endParaRPr lang="en-US" sz="1400" dirty="0"/>
+              <a:t>Earlier training rounds were much worse; reported run is the final configuration</a:t>
+            </a:r>
+            <a:endParaRPr lang="en-US" sz="1500" dirty="0"/>
           </a:p>
         </p:txBody>
       </p:sp>
@@ -5911,7 +6445,7 @@
                 <a:ea typeface="Courier New" pitchFamily="34" charset="-122"/>
                 <a:cs typeface="Courier New" pitchFamily="34" charset="-120"/>
               </a:rPr>
-              <a:t>Wireshark: real capture</a:t>
+              <a:t>Wireshark: RUDP dissector and traces</a:t>
             </a:r>
             <a:endParaRPr lang="en-US" sz="3000" dirty="0"/>
           </a:p>
@@ -5950,7 +6484,7 @@
                 <a:ea typeface="Courier New" pitchFamily="34" charset="-122"/>
                 <a:cs typeface="Courier New" pitchFamily="34" charset="-120"/>
               </a:rPr>
-              <a:t>18 / 21   Smart-RUDP</a:t>
+              <a:t>18 / 22   Smart-RUDP</a:t>
             </a:r>
             <a:endParaRPr lang="en-US" sz="1000" dirty="0"/>
           </a:p>
@@ -5958,7 +6492,7 @@
       </p:sp>
       <p:pic>
         <p:nvPicPr>
-          <p:cNvPr id="4" name="Image 0" descr="ws_handshake.png">    </p:cNvPr>
+          <p:cNvPr id="4" name="Image 0" descr="wireshark_seq_time.png">    </p:cNvPr>
           <p:cNvPicPr>
             <a:picLocks noChangeAspect="1"/>
           </p:cNvPicPr>
@@ -5973,47 +6507,23 @@
         <p:spPr>
           <a:xfrm>
             <a:off x="548640" y="1097280"/>
-            <a:ext cx="3840480" cy="4456406"/>
+            <a:ext cx="7863840" cy="2716599"/>
           </a:xfrm>
           <a:prstGeom prst="rect">
             <a:avLst/>
           </a:prstGeom>
         </p:spPr>
       </p:pic>
-      <p:pic>
-        <p:nvPicPr>
-          <p:cNvPr id="5" name="Image 1" descr="ws_retx.png">    </p:cNvPr>
-          <p:cNvPicPr>
-            <a:picLocks noChangeAspect="1"/>
-          </p:cNvPicPr>
-          <p:nvPr/>
-        </p:nvPicPr>
-        <p:blipFill>
-          <a:blip r:embed="rId2"/>
-          <a:stretch>
-            <a:fillRect/>
-          </a:stretch>
-        </p:blipFill>
-        <p:spPr>
-          <a:xfrm>
-            <a:off x="4663440" y="1097280"/>
-            <a:ext cx="6949440" cy="3431286"/>
-          </a:xfrm>
-          <a:prstGeom prst="rect">
-            <a:avLst/>
-          </a:prstGeom>
-        </p:spPr>
-      </p:pic>
-      <p:sp>
-        <p:nvSpPr>
-          <p:cNvPr id="6" name="Text 2"/>
-          <p:cNvSpPr/>
-          <p:nvPr/>
-        </p:nvSpPr>
-        <p:spPr>
-          <a:xfrm>
-            <a:off x="4663440" y="4663440"/>
-            <a:ext cx="6949440" cy="1645920"/>
+      <p:sp>
+        <p:nvSpPr>
+          <p:cNvPr id="5" name="Text 2"/>
+          <p:cNvSpPr/>
+          <p:nvPr/>
+        </p:nvSpPr>
+        <p:spPr>
+          <a:xfrm>
+            <a:off x="8595360" y="1280160"/>
+            <a:ext cx="3200400" cy="4114800"/>
           </a:xfrm>
           <a:prstGeom prst="rect">
             <a:avLst/>
@@ -6033,7 +6543,7 @@
               <a:buChar char="•"/>
             </a:pPr>
             <a:r>
-              <a:rPr lang="en-US" sz="1500" dirty="0">
+              <a:rPr lang="en-US" sz="1400" dirty="0">
                 <a:solidFill>
                   <a:srgbClr val="E6EDF3"/>
                 </a:solidFill>
@@ -6041,9 +6551,9 @@
                 <a:ea typeface="Calibri" pitchFamily="34" charset="-122"/>
                 <a:cs typeface="Calibri" pitchFamily="34" charset="-120"/>
               </a:rPr>
-              <a:t>Left: SYN, SYN-ACK, ACK decoded by the smartrudp dissector (filter frame.number &lt;= 3)</a:t>
-            </a:r>
-            <a:endParaRPr lang="en-US" sz="1500" dirty="0"/>
+              <a:t>rudp.lua decodes seq, ack, flags, checksum, length</a:t>
+            </a:r>
+            <a:endParaRPr lang="en-US" sz="1400" dirty="0"/>
           </a:p>
           <a:p>
             <a:pPr marL="342900" indent="-342900">
@@ -6054,7 +6564,7 @@
               <a:buChar char="•"/>
             </a:pPr>
             <a:r>
-              <a:rPr lang="en-US" sz="1500" dirty="0">
+              <a:rPr lang="en-US" sz="1400" dirty="0">
                 <a:solidFill>
                   <a:srgbClr val="E6EDF3"/>
                 </a:solidFill>
@@ -6062,9 +6572,51 @@
                 <a:ea typeface="Calibri" pitchFamily="34" charset="-122"/>
                 <a:cs typeface="Calibri" pitchFamily="34" charset="-120"/>
               </a:rPr>
-              <a:t>Right: smartrudp.seq == N shows the same segment sent twice, a retransmission</a:t>
-            </a:r>
-            <a:endParaRPr lang="en-US" sz="1500" dirty="0"/>
+              <a:t>Filters: smartrudp.flags.data == 1, smartrudp.seq == N</a:t>
+            </a:r>
+            <a:endParaRPr lang="en-US" sz="1400" dirty="0"/>
+          </a:p>
+          <a:p>
+            <a:pPr marL="342900" indent="-342900">
+              <a:spcAft>
+                <a:spcPts val="800"/>
+              </a:spcAft>
+              <a:buSzPct val="100000"/>
+              <a:buChar char="•"/>
+            </a:pPr>
+            <a:r>
+              <a:rPr lang="en-US" sz="1400" dirty="0">
+                <a:solidFill>
+                  <a:srgbClr val="E6EDF3"/>
+                </a:solidFill>
+                <a:latin typeface="Calibri" pitchFamily="34" charset="0"/>
+                <a:ea typeface="Calibri" pitchFamily="34" charset="-122"/>
+                <a:cs typeface="Calibri" pitchFamily="34" charset="-120"/>
+              </a:rPr>
+              <a:t>400 packets, lossy path: 87 (AIMD) and 95 (Smart) repeated data segments seen at the receiver</a:t>
+            </a:r>
+            <a:endParaRPr lang="en-US" sz="1400" dirty="0"/>
+          </a:p>
+          <a:p>
+            <a:pPr marL="342900" indent="-342900">
+              <a:spcAft>
+                <a:spcPts val="800"/>
+              </a:spcAft>
+              <a:buSzPct val="100000"/>
+              <a:buChar char="•"/>
+            </a:pPr>
+            <a:r>
+              <a:rPr lang="en-US" sz="1400" dirty="0">
+                <a:solidFill>
+                  <a:srgbClr val="E6EDF3"/>
+                </a:solidFill>
+                <a:latin typeface="Calibri" pitchFamily="34" charset="0"/>
+                <a:ea typeface="Calibri" pitchFamily="34" charset="-122"/>
+                <a:cs typeface="Calibri" pitchFamily="34" charset="-120"/>
+              </a:rPr>
+              <a:t>Trace exported by the program, topology addresses, handshake not included</a:t>
+            </a:r>
+            <a:endParaRPr lang="en-US" sz="1400" dirty="0"/>
           </a:p>
         </p:txBody>
       </p:sp>
@@ -6133,7 +6685,7 @@
                 <a:ea typeface="Courier New" pitchFamily="34" charset="-122"/>
                 <a:cs typeface="Courier New" pitchFamily="34" charset="-120"/>
               </a:rPr>
-              <a:t>Demo: RUDP Chat over the internet</a:t>
+              <a:t>Wireshark: real capture</a:t>
             </a:r>
             <a:endParaRPr lang="en-US" sz="3000" dirty="0"/>
           </a:p>
@@ -6172,7 +6724,7 @@
                 <a:ea typeface="Courier New" pitchFamily="34" charset="-122"/>
                 <a:cs typeface="Courier New" pitchFamily="34" charset="-120"/>
               </a:rPr>
-              <a:t>19 / 21   Smart-RUDP</a:t>
+              <a:t>19 / 22   Smart-RUDP</a:t>
             </a:r>
             <a:endParaRPr lang="en-US" sz="1000" dirty="0"/>
           </a:p>
@@ -6180,7 +6732,7 @@
       </p:sp>
       <p:pic>
         <p:nvPicPr>
-          <p:cNvPr id="4" name="Image 0" descr="web_chat.png">    </p:cNvPr>
+          <p:cNvPr id="4" name="Image 0" descr="ws_handshake.png">    </p:cNvPr>
           <p:cNvPicPr>
             <a:picLocks noChangeAspect="1"/>
           </p:cNvPicPr>
@@ -6194,24 +6746,48 @@
         </p:blipFill>
         <p:spPr>
           <a:xfrm>
-            <a:off x="457200" y="1097280"/>
-            <a:ext cx="7223760" cy="4465597"/>
+            <a:off x="548640" y="1097280"/>
+            <a:ext cx="3840480" cy="4456406"/>
           </a:xfrm>
           <a:prstGeom prst="rect">
             <a:avLst/>
           </a:prstGeom>
         </p:spPr>
       </p:pic>
-      <p:sp>
-        <p:nvSpPr>
-          <p:cNvPr id="5" name="Text 2"/>
-          <p:cNvSpPr/>
-          <p:nvPr/>
-        </p:nvSpPr>
-        <p:spPr>
-          <a:xfrm>
-            <a:off x="7955280" y="1188720"/>
-            <a:ext cx="3840480" cy="4389120"/>
+      <p:pic>
+        <p:nvPicPr>
+          <p:cNvPr id="5" name="Image 1" descr="ws_retx.png">    </p:cNvPr>
+          <p:cNvPicPr>
+            <a:picLocks noChangeAspect="1"/>
+          </p:cNvPicPr>
+          <p:nvPr/>
+        </p:nvPicPr>
+        <p:blipFill>
+          <a:blip r:embed="rId2"/>
+          <a:stretch>
+            <a:fillRect/>
+          </a:stretch>
+        </p:blipFill>
+        <p:spPr>
+          <a:xfrm>
+            <a:off x="4663440" y="1097280"/>
+            <a:ext cx="6949440" cy="3431286"/>
+          </a:xfrm>
+          <a:prstGeom prst="rect">
+            <a:avLst/>
+          </a:prstGeom>
+        </p:spPr>
+      </p:pic>
+      <p:sp>
+        <p:nvSpPr>
+          <p:cNvPr id="6" name="Text 2"/>
+          <p:cNvSpPr/>
+          <p:nvPr/>
+        </p:nvSpPr>
+        <p:spPr>
+          <a:xfrm>
+            <a:off x="4663440" y="4663440"/>
+            <a:ext cx="6949440" cy="1645920"/>
           </a:xfrm>
           <a:prstGeom prst="rect">
             <a:avLst/>
@@ -6231,7 +6807,7 @@
               <a:buChar char="•"/>
             </a:pPr>
             <a:r>
-              <a:rPr lang="en-US" sz="1600" dirty="0">
+              <a:rPr lang="en-US" sz="1500" dirty="0">
                 <a:solidFill>
                   <a:srgbClr val="E6EDF3"/>
                 </a:solidFill>
@@ -6239,9 +6815,9 @@
                 <a:ea typeface="Calibri" pitchFamily="34" charset="-122"/>
                 <a:cs typeface="Calibri" pitchFamily="34" charset="-120"/>
               </a:rPr>
-              <a:t>Each message is one RUDP segment: numbered, checksummed, ACKed in order</a:t>
-            </a:r>
-            <a:endParaRPr lang="en-US" sz="1600" dirty="0"/>
+              <a:t>Left: SYN, SYN-ACK, ACK decoded by the smartrudp dissector (filter frame.number &lt;= 3)</a:t>
+            </a:r>
+            <a:endParaRPr lang="en-US" sz="1500" dirty="0"/>
           </a:p>
           <a:p>
             <a:pPr marL="342900" indent="-342900">
@@ -6252,7 +6828,7 @@
               <a:buChar char="•"/>
             </a:pPr>
             <a:r>
-              <a:rPr lang="en-US" sz="1600" dirty="0">
+              <a:rPr lang="en-US" sz="1500" dirty="0">
                 <a:solidFill>
                   <a:srgbClr val="E6EDF3"/>
                 </a:solidFill>
@@ -6260,114 +6836,9 @@
                 <a:ea typeface="Calibri" pitchFamily="34" charset="-122"/>
                 <a:cs typeface="Calibri" pitchFamily="34" charset="-120"/>
               </a:rPr>
-              <a:t>Browser UI via a small gateway; terminal version too</a:t>
-            </a:r>
-            <a:endParaRPr lang="en-US" sz="1600" dirty="0"/>
-          </a:p>
-          <a:p>
-            <a:pPr marL="342900" indent="-342900">
-              <a:spcAft>
-                <a:spcPts val="800"/>
-              </a:spcAft>
-              <a:buSzPct val="100000"/>
-              <a:buChar char="•"/>
-            </a:pPr>
-            <a:r>
-              <a:rPr lang="en-US" sz="1600" dirty="0">
-                <a:solidFill>
-                  <a:srgbClr val="E6EDF3"/>
-                </a:solidFill>
-                <a:latin typeface="Calibri" pitchFamily="34" charset="0"/>
-                <a:ea typeface="Calibri" pitchFamily="34" charset="-122"/>
-                <a:cs typeface="Calibri" pitchFamily="34" charset="-120"/>
-              </a:rPr>
-              <a:t>Two machines linked over Tailscale (laptop and phone)</a:t>
-            </a:r>
-            <a:endParaRPr lang="en-US" sz="1600" dirty="0"/>
-          </a:p>
-          <a:p>
-            <a:pPr marL="342900" indent="-342900">
-              <a:spcAft>
-                <a:spcPts val="800"/>
-              </a:spcAft>
-              <a:buSzPct val="100000"/>
-              <a:buChar char="•"/>
-            </a:pPr>
-            <a:r>
-              <a:rPr lang="en-US" sz="1600" dirty="0">
-                <a:solidFill>
-                  <a:srgbClr val="E6EDF3"/>
-                </a:solidFill>
-                <a:latin typeface="Calibri" pitchFamily="34" charset="0"/>
-                <a:ea typeface="Calibri" pitchFamily="34" charset="-122"/>
-                <a:cs typeface="Calibri" pitchFamily="34" charset="-120"/>
-              </a:rPr>
-              <a:t>Loss slider: lost messages are resent and still arrive in order</a:t>
-            </a:r>
-            <a:endParaRPr lang="en-US" sz="1600" dirty="0"/>
-          </a:p>
-          <a:p>
-            <a:pPr marL="342900" indent="-342900">
-              <a:spcAft>
-                <a:spcPts val="800"/>
-              </a:spcAft>
-              <a:buSzPct val="100000"/>
-              <a:buChar char="•"/>
-            </a:pPr>
-            <a:r>
-              <a:rPr lang="en-US" sz="1600" dirty="0">
-                <a:solidFill>
-                  <a:srgbClr val="E6EDF3"/>
-                </a:solidFill>
-                <a:latin typeface="Calibri" pitchFamily="34" charset="0"/>
-                <a:ea typeface="Calibri" pitchFamily="34" charset="-122"/>
-                <a:cs typeface="Calibri" pitchFamily="34" charset="-120"/>
-              </a:rPr>
-              <a:t>Window controller switch: fixed, AIMD or Smart-RUDP (Q-learning, learns live)</a:t>
-            </a:r>
-            <a:endParaRPr lang="en-US" sz="1600" dirty="0"/>
-          </a:p>
-          <a:p>
-            <a:pPr marL="342900" indent="-342900">
-              <a:spcAft>
-                <a:spcPts val="800"/>
-              </a:spcAft>
-              <a:buSzPct val="100000"/>
-              <a:buChar char="•"/>
-            </a:pPr>
-            <a:r>
-              <a:rPr lang="en-US" sz="1600" dirty="0">
-                <a:solidFill>
-                  <a:srgbClr val="E6EDF3"/>
-                </a:solidFill>
-                <a:latin typeface="Calibri" pitchFamily="34" charset="0"/>
-                <a:ea typeface="Calibri" pitchFamily="34" charset="-122"/>
-                <a:cs typeface="Calibri" pitchFamily="34" charset="-120"/>
-              </a:rPr>
-              <a:t>Retrained for the chat: faster than AIMD on 5 of 6 held-out paths, equal on 1 (Table 11)</a:t>
-            </a:r>
-            <a:endParaRPr lang="en-US" sz="1600" dirty="0"/>
-          </a:p>
-          <a:p>
-            <a:pPr marL="342900" indent="-342900">
-              <a:spcAft>
-                <a:spcPts val="800"/>
-              </a:spcAft>
-              <a:buSzPct val="100000"/>
-              <a:buChar char="•"/>
-            </a:pPr>
-            <a:r>
-              <a:rPr lang="en-US" sz="1600" dirty="0">
-                <a:solidFill>
-                  <a:srgbClr val="E6EDF3"/>
-                </a:solidFill>
-                <a:latin typeface="Calibri" pitchFamily="34" charset="0"/>
-                <a:ea typeface="Calibri" pitchFamily="34" charset="-122"/>
-                <a:cs typeface="Calibri" pitchFamily="34" charset="-120"/>
-              </a:rPr>
-              <a:t>Stress test, 48 unseen random paths: Smart 3.73 s, AIMD 7.16 s mean; faster than AIMD on 27, slower on 5</a:t>
-            </a:r>
-            <a:endParaRPr lang="en-US" sz="1600" dirty="0"/>
+              <a:t>Right: smartrudp.seq == N shows the same segment sent twice, a retransmission</a:t>
+            </a:r>
+            <a:endParaRPr lang="en-US" sz="1500" dirty="0"/>
           </a:p>
         </p:txBody>
       </p:sp>
@@ -6475,7 +6946,7 @@
                 <a:ea typeface="Courier New" pitchFamily="34" charset="-122"/>
                 <a:cs typeface="Courier New" pitchFamily="34" charset="-120"/>
               </a:rPr>
-              <a:t>2 / 21   Smart-RUDP</a:t>
+              <a:t>2 / 22   Smart-RUDP</a:t>
             </a:r>
             <a:endParaRPr lang="en-US" sz="1000" dirty="0"/>
           </a:p>
@@ -6830,7 +7301,7 @@
                 <a:ea typeface="Courier New" pitchFamily="34" charset="-122"/>
                 <a:cs typeface="Courier New" pitchFamily="34" charset="-120"/>
               </a:rPr>
-              <a:t>Learnings and future work</a:t>
+              <a:t>Demo: RUDP Chat over the internet</a:t>
             </a:r>
             <a:endParaRPr lang="en-US" sz="3000" dirty="0"/>
           </a:p>
@@ -6869,86 +7340,46 @@
                 <a:ea typeface="Courier New" pitchFamily="34" charset="-122"/>
                 <a:cs typeface="Courier New" pitchFamily="34" charset="-120"/>
               </a:rPr>
-              <a:t>20 / 21   Smart-RUDP</a:t>
+              <a:t>20 / 22   Smart-RUDP</a:t>
             </a:r>
             <a:endParaRPr lang="en-US" sz="1000" dirty="0"/>
           </a:p>
         </p:txBody>
       </p:sp>
-      <p:sp>
-        <p:nvSpPr>
-          <p:cNvPr id="4" name="Shape 2"/>
-          <p:cNvSpPr/>
-          <p:nvPr/>
-        </p:nvSpPr>
-        <p:spPr>
-          <a:xfrm>
-            <a:off x="548640" y="1371600"/>
-            <a:ext cx="5394960" cy="4206240"/>
-          </a:xfrm>
-          <a:prstGeom prst="rect">
-            <a:avLst/>
-          </a:prstGeom>
-          <a:solidFill>
-            <a:srgbClr val="141B24"/>
-          </a:solidFill>
-          <a:ln w="12700">
-            <a:solidFill>
-              <a:srgbClr val="39FF88"/>
-            </a:solidFill>
-            <a:prstDash val="solid"/>
-          </a:ln>
-        </p:spPr>
-      </p:sp>
-      <p:sp>
-        <p:nvSpPr>
-          <p:cNvPr id="5" name="Text 3"/>
-          <p:cNvSpPr/>
-          <p:nvPr/>
-        </p:nvSpPr>
-        <p:spPr>
-          <a:xfrm>
-            <a:off x="731520" y="1508760"/>
-            <a:ext cx="5029200" cy="457200"/>
-          </a:xfrm>
-          <a:prstGeom prst="rect">
-            <a:avLst/>
-          </a:prstGeom>
-          <a:noFill/>
-          <a:ln/>
-        </p:spPr>
-        <p:txBody>
-          <a:bodyPr wrap="square" lIns="0" tIns="0" rIns="0" bIns="0" rtlCol="0" anchor="ctr"/>
-          <a:lstStyle/>
-          <a:p>
-            <a:pPr indent="0" marL="0">
-              <a:buNone/>
-            </a:pPr>
-            <a:r>
-              <a:rPr lang="en-US" sz="2000" b="1" dirty="0">
-                <a:solidFill>
-                  <a:srgbClr val="39FF88"/>
-                </a:solidFill>
-                <a:latin typeface="Courier New" pitchFamily="34" charset="0"/>
-                <a:ea typeface="Courier New" pitchFamily="34" charset="-122"/>
-                <a:cs typeface="Courier New" pitchFamily="34" charset="-120"/>
-              </a:rPr>
-              <a:t>Learned</a:t>
-            </a:r>
-            <a:endParaRPr lang="en-US" sz="2000" dirty="0"/>
-          </a:p>
-        </p:txBody>
-      </p:sp>
-      <p:sp>
-        <p:nvSpPr>
-          <p:cNvPr id="6" name="Text 4"/>
-          <p:cNvSpPr/>
-          <p:nvPr/>
-        </p:nvSpPr>
-        <p:spPr>
-          <a:xfrm>
-            <a:off x="731520" y="2011680"/>
-            <a:ext cx="5029200" cy="3429000"/>
+      <p:pic>
+        <p:nvPicPr>
+          <p:cNvPr id="4" name="Image 0" descr="web_chat.png">    </p:cNvPr>
+          <p:cNvPicPr>
+            <a:picLocks noChangeAspect="1"/>
+          </p:cNvPicPr>
+          <p:nvPr/>
+        </p:nvPicPr>
+        <p:blipFill>
+          <a:blip r:embed="rId1"/>
+          <a:stretch>
+            <a:fillRect/>
+          </a:stretch>
+        </p:blipFill>
+        <p:spPr>
+          <a:xfrm>
+            <a:off x="457200" y="1097280"/>
+            <a:ext cx="7223760" cy="4465597"/>
+          </a:xfrm>
+          <a:prstGeom prst="rect">
+            <a:avLst/>
+          </a:prstGeom>
+        </p:spPr>
+      </p:pic>
+      <p:sp>
+        <p:nvSpPr>
+          <p:cNvPr id="5" name="Text 2"/>
+          <p:cNvSpPr/>
+          <p:nvPr/>
+        </p:nvSpPr>
+        <p:spPr>
+          <a:xfrm>
+            <a:off x="7955280" y="1188720"/>
+            <a:ext cx="3840480" cy="4389120"/>
           </a:xfrm>
           <a:prstGeom prst="rect">
             <a:avLst/>
@@ -6960,11 +7391,15 @@
           <a:bodyPr wrap="square" lIns="0" tIns="0" rIns="0" bIns="0" rtlCol="0" anchor="t"/>
           <a:lstStyle/>
           <a:p>
-            <a:pPr indent="0" marL="0">
-              <a:buNone/>
-            </a:pPr>
-            <a:r>
-              <a:rPr lang="en-US" sz="2000" dirty="0">
+            <a:pPr marL="342900" indent="-342900">
+              <a:spcAft>
+                <a:spcPts val="800"/>
+              </a:spcAft>
+              <a:buSzPct val="100000"/>
+              <a:buChar char="•"/>
+            </a:pPr>
+            <a:r>
+              <a:rPr lang="en-US" sz="1600" dirty="0">
                 <a:solidFill>
                   <a:srgbClr val="E6EDF3"/>
                 </a:solidFill>
@@ -6972,16 +7407,20 @@
                 <a:ea typeface="Calibri" pitchFamily="34" charset="-122"/>
                 <a:cs typeface="Calibri" pitchFamily="34" charset="-120"/>
               </a:rPr>
-              <a:t>Reliability is a set of simple rules working together.</a:t>
-            </a:r>
-            <a:endParaRPr lang="en-US" sz="2000" dirty="0"/>
-          </a:p>
-          <a:p>
-            <a:pPr indent="0" marL="0">
-              <a:buNone/>
-            </a:pPr>
-            <a:r>
-              <a:rPr lang="en-US" sz="2000" dirty="0">
+              <a:t>Each message is one RUDP segment: numbered, checksummed, ACKed in order</a:t>
+            </a:r>
+            <a:endParaRPr lang="en-US" sz="1600" dirty="0"/>
+          </a:p>
+          <a:p>
+            <a:pPr marL="342900" indent="-342900">
+              <a:spcAft>
+                <a:spcPts val="800"/>
+              </a:spcAft>
+              <a:buSzPct val="100000"/>
+              <a:buChar char="•"/>
+            </a:pPr>
+            <a:r>
+              <a:rPr lang="en-US" sz="1600" dirty="0">
                 <a:solidFill>
                   <a:srgbClr val="E6EDF3"/>
                 </a:solidFill>
@@ -6989,16 +7428,20 @@
                 <a:ea typeface="Calibri" pitchFamily="34" charset="-122"/>
                 <a:cs typeface="Calibri" pitchFamily="34" charset="-120"/>
               </a:rPr>
-              <a:t>Congestion control matters as much as retransmission.</a:t>
-            </a:r>
-            <a:endParaRPr lang="en-US" sz="2000" dirty="0"/>
-          </a:p>
-          <a:p>
-            <a:pPr indent="0" marL="0">
-              <a:buNone/>
-            </a:pPr>
-            <a:r>
-              <a:rPr lang="en-US" sz="2000" dirty="0">
+              <a:t>Browser UI via a small gateway; terminal version too</a:t>
+            </a:r>
+            <a:endParaRPr lang="en-US" sz="1600" dirty="0"/>
+          </a:p>
+          <a:p>
+            <a:pPr marL="342900" indent="-342900">
+              <a:spcAft>
+                <a:spcPts val="800"/>
+              </a:spcAft>
+              <a:buSzPct val="100000"/>
+              <a:buChar char="•"/>
+            </a:pPr>
+            <a:r>
+              <a:rPr lang="en-US" sz="1600" dirty="0">
                 <a:solidFill>
                   <a:srgbClr val="E6EDF3"/>
                 </a:solidFill>
@@ -7006,102 +7449,20 @@
                 <a:ea typeface="Calibri" pitchFamily="34" charset="-122"/>
                 <a:cs typeface="Calibri" pitchFamily="34" charset="-120"/>
               </a:rPr>
-              <a:t>Testing tools fail in surprising ways.</a:t>
-            </a:r>
-            <a:endParaRPr lang="en-US" sz="2000" dirty="0"/>
-          </a:p>
-        </p:txBody>
-      </p:sp>
-      <p:sp>
-        <p:nvSpPr>
-          <p:cNvPr id="7" name="Shape 5"/>
-          <p:cNvSpPr/>
-          <p:nvPr/>
-        </p:nvSpPr>
-        <p:spPr>
-          <a:xfrm>
-            <a:off x="6217920" y="1371600"/>
-            <a:ext cx="5394960" cy="4206240"/>
-          </a:xfrm>
-          <a:prstGeom prst="rect">
-            <a:avLst/>
-          </a:prstGeom>
-          <a:solidFill>
-            <a:srgbClr val="141B24"/>
-          </a:solidFill>
-          <a:ln w="12700">
-            <a:solidFill>
-              <a:srgbClr val="FFB000"/>
-            </a:solidFill>
-            <a:prstDash val="solid"/>
-          </a:ln>
-        </p:spPr>
-      </p:sp>
-      <p:sp>
-        <p:nvSpPr>
-          <p:cNvPr id="8" name="Text 6"/>
-          <p:cNvSpPr/>
-          <p:nvPr/>
-        </p:nvSpPr>
-        <p:spPr>
-          <a:xfrm>
-            <a:off x="6400800" y="1508760"/>
-            <a:ext cx="5029200" cy="457200"/>
-          </a:xfrm>
-          <a:prstGeom prst="rect">
-            <a:avLst/>
-          </a:prstGeom>
-          <a:noFill/>
-          <a:ln/>
-        </p:spPr>
-        <p:txBody>
-          <a:bodyPr wrap="square" lIns="0" tIns="0" rIns="0" bIns="0" rtlCol="0" anchor="ctr"/>
-          <a:lstStyle/>
-          <a:p>
-            <a:pPr indent="0" marL="0">
-              <a:buNone/>
-            </a:pPr>
-            <a:r>
-              <a:rPr lang="en-US" sz="2000" b="1" dirty="0">
-                <a:solidFill>
-                  <a:srgbClr val="FFB000"/>
-                </a:solidFill>
-                <a:latin typeface="Courier New" pitchFamily="34" charset="0"/>
-                <a:ea typeface="Courier New" pitchFamily="34" charset="-122"/>
-                <a:cs typeface="Courier New" pitchFamily="34" charset="-120"/>
-              </a:rPr>
-              <a:t>Next</a:t>
-            </a:r>
-            <a:endParaRPr lang="en-US" sz="2000" dirty="0"/>
-          </a:p>
-        </p:txBody>
-      </p:sp>
-      <p:sp>
-        <p:nvSpPr>
-          <p:cNvPr id="9" name="Text 7"/>
-          <p:cNvSpPr/>
-          <p:nvPr/>
-        </p:nvSpPr>
-        <p:spPr>
-          <a:xfrm>
-            <a:off x="6400800" y="2011680"/>
-            <a:ext cx="5029200" cy="3429000"/>
-          </a:xfrm>
-          <a:prstGeom prst="rect">
-            <a:avLst/>
-          </a:prstGeom>
-          <a:noFill/>
-          <a:ln/>
-        </p:spPr>
-        <p:txBody>
-          <a:bodyPr wrap="square" lIns="0" tIns="0" rIns="0" bIns="0" rtlCol="0" anchor="t"/>
-          <a:lstStyle/>
-          <a:p>
-            <a:pPr indent="0" marL="0">
-              <a:buNone/>
-            </a:pPr>
-            <a:r>
-              <a:rPr lang="en-US" sz="2000" dirty="0">
+              <a:t>Two machines linked over Tailscale (laptop and phone)</a:t>
+            </a:r>
+            <a:endParaRPr lang="en-US" sz="1600" dirty="0"/>
+          </a:p>
+          <a:p>
+            <a:pPr marL="342900" indent="-342900">
+              <a:spcAft>
+                <a:spcPts val="800"/>
+              </a:spcAft>
+              <a:buSzPct val="100000"/>
+              <a:buChar char="•"/>
+            </a:pPr>
+            <a:r>
+              <a:rPr lang="en-US" sz="1600" dirty="0">
                 <a:solidFill>
                   <a:srgbClr val="E6EDF3"/>
                 </a:solidFill>
@@ -7109,16 +7470,20 @@
                 <a:ea typeface="Calibri" pitchFamily="34" charset="-122"/>
                 <a:cs typeface="Calibri" pitchFamily="34" charset="-120"/>
               </a:rPr>
-              <a:t>Selective Repeat / SACK</a:t>
-            </a:r>
-            <a:endParaRPr lang="en-US" sz="2000" dirty="0"/>
-          </a:p>
-          <a:p>
-            <a:pPr indent="0" marL="0">
-              <a:buNone/>
-            </a:pPr>
-            <a:r>
-              <a:rPr lang="en-US" sz="2000" dirty="0">
+              <a:t>Loss slider: lost messages are resent and still arrive in order</a:t>
+            </a:r>
+            <a:endParaRPr lang="en-US" sz="1600" dirty="0"/>
+          </a:p>
+          <a:p>
+            <a:pPr marL="342900" indent="-342900">
+              <a:spcAft>
+                <a:spcPts val="800"/>
+              </a:spcAft>
+              <a:buSzPct val="100000"/>
+              <a:buChar char="•"/>
+            </a:pPr>
+            <a:r>
+              <a:rPr lang="en-US" sz="1600" dirty="0">
                 <a:solidFill>
                   <a:srgbClr val="E6EDF3"/>
                 </a:solidFill>
@@ -7126,16 +7491,20 @@
                 <a:ea typeface="Calibri" pitchFamily="34" charset="-122"/>
                 <a:cs typeface="Calibri" pitchFamily="34" charset="-120"/>
               </a:rPr>
-              <a:t>A stronger learning agent</a:t>
-            </a:r>
-            <a:endParaRPr lang="en-US" sz="2000" dirty="0"/>
-          </a:p>
-          <a:p>
-            <a:pPr indent="0" marL="0">
-              <a:buNone/>
-            </a:pPr>
-            <a:r>
-              <a:rPr lang="en-US" sz="2000" dirty="0">
+              <a:t>Window controller switch: fixed, AIMD or Smart-RUDP (Q-learning, learns live)</a:t>
+            </a:r>
+            <a:endParaRPr lang="en-US" sz="1600" dirty="0"/>
+          </a:p>
+          <a:p>
+            <a:pPr marL="342900" indent="-342900">
+              <a:spcAft>
+                <a:spcPts val="800"/>
+              </a:spcAft>
+              <a:buSzPct val="100000"/>
+              <a:buChar char="•"/>
+            </a:pPr>
+            <a:r>
+              <a:rPr lang="en-US" sz="1600" dirty="0">
                 <a:solidFill>
                   <a:srgbClr val="E6EDF3"/>
                 </a:solidFill>
@@ -7143,16 +7512,20 @@
                 <a:ea typeface="Calibri" pitchFamily="34" charset="-122"/>
                 <a:cs typeface="Calibri" pitchFamily="34" charset="-120"/>
               </a:rPr>
-              <a:t>Kernel netem and real multi-machine tests</a:t>
-            </a:r>
-            <a:endParaRPr lang="en-US" sz="2000" dirty="0"/>
-          </a:p>
-          <a:p>
-            <a:pPr indent="0" marL="0">
-              <a:buNone/>
-            </a:pPr>
-            <a:r>
-              <a:rPr lang="en-US" sz="2000" dirty="0">
+              <a:t>Retrained for the chat: faster than AIMD on 5 of 6 held-out paths, equal on 1 (Table 11)</a:t>
+            </a:r>
+            <a:endParaRPr lang="en-US" sz="1600" dirty="0"/>
+          </a:p>
+          <a:p>
+            <a:pPr marL="342900" indent="-342900">
+              <a:spcAft>
+                <a:spcPts val="800"/>
+              </a:spcAft>
+              <a:buSzPct val="100000"/>
+              <a:buChar char="•"/>
+            </a:pPr>
+            <a:r>
+              <a:rPr lang="en-US" sz="1600" dirty="0">
                 <a:solidFill>
                   <a:srgbClr val="E6EDF3"/>
                 </a:solidFill>
@@ -7160,48 +7533,9 @@
                 <a:ea typeface="Calibri" pitchFamily="34" charset="-122"/>
                 <a:cs typeface="Calibri" pitchFamily="34" charset="-120"/>
               </a:rPr>
-              <a:t>Run RUDP across a real multi-machine network</a:t>
-            </a:r>
-            <a:endParaRPr lang="en-US" sz="2000" dirty="0"/>
-          </a:p>
-        </p:txBody>
-      </p:sp>
-      <p:sp>
-        <p:nvSpPr>
-          <p:cNvPr id="10" name="Text 8"/>
-          <p:cNvSpPr/>
-          <p:nvPr/>
-        </p:nvSpPr>
-        <p:spPr>
-          <a:xfrm>
-            <a:off x="548640" y="5852160"/>
-            <a:ext cx="10972800" cy="365760"/>
-          </a:xfrm>
-          <a:prstGeom prst="rect">
-            <a:avLst/>
-          </a:prstGeom>
-          <a:noFill/>
-          <a:ln/>
-        </p:spPr>
-        <p:txBody>
-          <a:bodyPr wrap="square" lIns="0" tIns="0" rIns="0" bIns="0" rtlCol="0" anchor="ctr"/>
-          <a:lstStyle/>
-          <a:p>
-            <a:pPr indent="0" marL="0">
-              <a:buNone/>
-            </a:pPr>
-            <a:r>
-              <a:rPr lang="en-US" sz="1400" dirty="0">
-                <a:solidFill>
-                  <a:srgbClr val="8B98A5"/>
-                </a:solidFill>
-                <a:latin typeface="Calibri" pitchFamily="34" charset="0"/>
-                <a:ea typeface="Calibri" pitchFamily="34" charset="-122"/>
-                <a:cs typeface="Calibri" pitchFamily="34" charset="-120"/>
-              </a:rPr>
-              <a:t>Limits: Go-Back-N wastes bandwidth; emulated (not kernel) paths; Smart-RUDP did not beat AIMD.</a:t>
-            </a:r>
-            <a:endParaRPr lang="en-US" sz="1400" dirty="0"/>
+              <a:t>Stress test, 48 unseen random paths: Smart 3.73 s, AIMD 7.16 s mean; faster than AIMD on 27, slower on 5</a:t>
+            </a:r>
+            <a:endParaRPr lang="en-US" sz="1600" dirty="0"/>
           </a:p>
         </p:txBody>
       </p:sp>
@@ -7245,8 +7579,8 @@
         </p:nvSpPr>
         <p:spPr>
           <a:xfrm>
-            <a:off x="731520" y="2103120"/>
-            <a:ext cx="10058400" cy="1097280"/>
+            <a:off x="548640" y="320040"/>
+            <a:ext cx="11064240" cy="731520"/>
           </a:xfrm>
           <a:prstGeom prst="rect">
             <a:avLst/>
@@ -7262,7 +7596,7 @@
               <a:buNone/>
             </a:pPr>
             <a:r>
-              <a:rPr lang="en-US" sz="6400" b="1" dirty="0">
+              <a:rPr lang="en-US" sz="3000" b="1" dirty="0">
                 <a:solidFill>
                   <a:srgbClr val="39FF88"/>
                 </a:solidFill>
@@ -7270,9 +7604,9 @@
                 <a:ea typeface="Courier New" pitchFamily="34" charset="-122"/>
                 <a:cs typeface="Courier New" pitchFamily="34" charset="-120"/>
               </a:rPr>
-              <a:t>Thank you</a:t>
-            </a:r>
-            <a:endParaRPr lang="en-US" sz="6400" dirty="0"/>
+              <a:t>Learnings and future work</a:t>
+            </a:r>
+            <a:endParaRPr lang="en-US" sz="3000" dirty="0"/>
           </a:p>
         </p:txBody>
       </p:sp>
@@ -7284,8 +7618,8 @@
         </p:nvSpPr>
         <p:spPr>
           <a:xfrm>
-            <a:off x="731520" y="3474720"/>
-            <a:ext cx="10058400" cy="548640"/>
+            <a:off x="9418320" y="6446520"/>
+            <a:ext cx="2377440" cy="274320"/>
           </a:xfrm>
           <a:prstGeom prst="rect">
             <a:avLst/>
@@ -7297,34 +7631,59 @@
           <a:bodyPr wrap="square" lIns="0" tIns="0" rIns="0" bIns="0" rtlCol="0" anchor="ctr"/>
           <a:lstStyle/>
           <a:p>
-            <a:pPr indent="0" marL="0">
-              <a:buNone/>
-            </a:pPr>
-            <a:r>
-              <a:rPr lang="en-US" sz="2600" dirty="0">
-                <a:solidFill>
-                  <a:srgbClr val="E6EDF3"/>
+            <a:pPr algn="r" indent="0" marL="0">
+              <a:buNone/>
+            </a:pPr>
+            <a:r>
+              <a:rPr lang="en-US" sz="1000" dirty="0">
+                <a:solidFill>
+                  <a:srgbClr val="8B98A5"/>
                 </a:solidFill>
                 <a:latin typeface="Courier New" pitchFamily="34" charset="0"/>
                 <a:ea typeface="Courier New" pitchFamily="34" charset="-122"/>
                 <a:cs typeface="Courier New" pitchFamily="34" charset="-120"/>
               </a:rPr>
-              <a:t>github.com/Capsturrrr/rudp</a:t>
-            </a:r>
-            <a:endParaRPr lang="en-US" sz="2600" dirty="0"/>
-          </a:p>
-        </p:txBody>
-      </p:sp>
-      <p:sp>
-        <p:nvSpPr>
-          <p:cNvPr id="4" name="Text 2"/>
-          <p:cNvSpPr/>
-          <p:nvPr/>
-        </p:nvSpPr>
-        <p:spPr>
-          <a:xfrm>
-            <a:off x="731520" y="4206240"/>
-            <a:ext cx="10058400" cy="457200"/>
+              <a:t>21 / 22   Smart-RUDP</a:t>
+            </a:r>
+            <a:endParaRPr lang="en-US" sz="1000" dirty="0"/>
+          </a:p>
+        </p:txBody>
+      </p:sp>
+      <p:sp>
+        <p:nvSpPr>
+          <p:cNvPr id="4" name="Shape 2"/>
+          <p:cNvSpPr/>
+          <p:nvPr/>
+        </p:nvSpPr>
+        <p:spPr>
+          <a:xfrm>
+            <a:off x="548640" y="1371600"/>
+            <a:ext cx="5394960" cy="4206240"/>
+          </a:xfrm>
+          <a:prstGeom prst="rect">
+            <a:avLst/>
+          </a:prstGeom>
+          <a:solidFill>
+            <a:srgbClr val="141B24"/>
+          </a:solidFill>
+          <a:ln w="12700">
+            <a:solidFill>
+              <a:srgbClr val="39FF88"/>
+            </a:solidFill>
+            <a:prstDash val="solid"/>
+          </a:ln>
+        </p:spPr>
+      </p:sp>
+      <p:sp>
+        <p:nvSpPr>
+          <p:cNvPr id="5" name="Text 3"/>
+          <p:cNvSpPr/>
+          <p:nvPr/>
+        </p:nvSpPr>
+        <p:spPr>
+          <a:xfrm>
+            <a:off x="731520" y="1508760"/>
+            <a:ext cx="5029200" cy="457200"/>
           </a:xfrm>
           <a:prstGeom prst="rect">
             <a:avLst/>
@@ -7340,17 +7699,283 @@
               <a:buNone/>
             </a:pPr>
             <a:r>
-              <a:rPr lang="en-US" sz="1800" dirty="0">
-                <a:solidFill>
-                  <a:srgbClr val="8B98A5"/>
+              <a:rPr lang="en-US" sz="2000" b="1" dirty="0">
+                <a:solidFill>
+                  <a:srgbClr val="39FF88"/>
+                </a:solidFill>
+                <a:latin typeface="Courier New" pitchFamily="34" charset="0"/>
+                <a:ea typeface="Courier New" pitchFamily="34" charset="-122"/>
+                <a:cs typeface="Courier New" pitchFamily="34" charset="-120"/>
+              </a:rPr>
+              <a:t>Learned</a:t>
+            </a:r>
+            <a:endParaRPr lang="en-US" sz="2000" dirty="0"/>
+          </a:p>
+        </p:txBody>
+      </p:sp>
+      <p:sp>
+        <p:nvSpPr>
+          <p:cNvPr id="6" name="Text 4"/>
+          <p:cNvSpPr/>
+          <p:nvPr/>
+        </p:nvSpPr>
+        <p:spPr>
+          <a:xfrm>
+            <a:off x="731520" y="2011680"/>
+            <a:ext cx="5029200" cy="3429000"/>
+          </a:xfrm>
+          <a:prstGeom prst="rect">
+            <a:avLst/>
+          </a:prstGeom>
+          <a:noFill/>
+          <a:ln/>
+        </p:spPr>
+        <p:txBody>
+          <a:bodyPr wrap="square" lIns="0" tIns="0" rIns="0" bIns="0" rtlCol="0" anchor="t"/>
+          <a:lstStyle/>
+          <a:p>
+            <a:pPr indent="0" marL="0">
+              <a:buNone/>
+            </a:pPr>
+            <a:r>
+              <a:rPr lang="en-US" sz="2000" dirty="0">
+                <a:solidFill>
+                  <a:srgbClr val="E6EDF3"/>
                 </a:solidFill>
                 <a:latin typeface="Calibri" pitchFamily="34" charset="0"/>
                 <a:ea typeface="Calibri" pitchFamily="34" charset="-122"/>
                 <a:cs typeface="Calibri" pitchFamily="34" charset="-120"/>
               </a:rPr>
-              <a:t>Harshavardhan Mallela   Rohit Arya   Shloak Sinha</a:t>
-            </a:r>
-            <a:endParaRPr lang="en-US" sz="1800" dirty="0"/>
+              <a:t>Reliability is a set of simple rules working together.</a:t>
+            </a:r>
+            <a:endParaRPr lang="en-US" sz="2000" dirty="0"/>
+          </a:p>
+          <a:p>
+            <a:pPr indent="0" marL="0">
+              <a:buNone/>
+            </a:pPr>
+            <a:r>
+              <a:rPr lang="en-US" sz="2000" dirty="0">
+                <a:solidFill>
+                  <a:srgbClr val="E6EDF3"/>
+                </a:solidFill>
+                <a:latin typeface="Calibri" pitchFamily="34" charset="0"/>
+                <a:ea typeface="Calibri" pitchFamily="34" charset="-122"/>
+                <a:cs typeface="Calibri" pitchFamily="34" charset="-120"/>
+              </a:rPr>
+              <a:t>Congestion control matters as much as retransmission.</a:t>
+            </a:r>
+            <a:endParaRPr lang="en-US" sz="2000" dirty="0"/>
+          </a:p>
+          <a:p>
+            <a:pPr indent="0" marL="0">
+              <a:buNone/>
+            </a:pPr>
+            <a:r>
+              <a:rPr lang="en-US" sz="2000" dirty="0">
+                <a:solidFill>
+                  <a:srgbClr val="E6EDF3"/>
+                </a:solidFill>
+                <a:latin typeface="Calibri" pitchFamily="34" charset="0"/>
+                <a:ea typeface="Calibri" pitchFamily="34" charset="-122"/>
+                <a:cs typeface="Calibri" pitchFamily="34" charset="-120"/>
+              </a:rPr>
+              <a:t>Testing tools fail in surprising ways.</a:t>
+            </a:r>
+            <a:endParaRPr lang="en-US" sz="2000" dirty="0"/>
+          </a:p>
+        </p:txBody>
+      </p:sp>
+      <p:sp>
+        <p:nvSpPr>
+          <p:cNvPr id="7" name="Shape 5"/>
+          <p:cNvSpPr/>
+          <p:nvPr/>
+        </p:nvSpPr>
+        <p:spPr>
+          <a:xfrm>
+            <a:off x="6217920" y="1371600"/>
+            <a:ext cx="5394960" cy="4206240"/>
+          </a:xfrm>
+          <a:prstGeom prst="rect">
+            <a:avLst/>
+          </a:prstGeom>
+          <a:solidFill>
+            <a:srgbClr val="141B24"/>
+          </a:solidFill>
+          <a:ln w="12700">
+            <a:solidFill>
+              <a:srgbClr val="FFB000"/>
+            </a:solidFill>
+            <a:prstDash val="solid"/>
+          </a:ln>
+        </p:spPr>
+      </p:sp>
+      <p:sp>
+        <p:nvSpPr>
+          <p:cNvPr id="8" name="Text 6"/>
+          <p:cNvSpPr/>
+          <p:nvPr/>
+        </p:nvSpPr>
+        <p:spPr>
+          <a:xfrm>
+            <a:off x="6400800" y="1508760"/>
+            <a:ext cx="5029200" cy="457200"/>
+          </a:xfrm>
+          <a:prstGeom prst="rect">
+            <a:avLst/>
+          </a:prstGeom>
+          <a:noFill/>
+          <a:ln/>
+        </p:spPr>
+        <p:txBody>
+          <a:bodyPr wrap="square" lIns="0" tIns="0" rIns="0" bIns="0" rtlCol="0" anchor="ctr"/>
+          <a:lstStyle/>
+          <a:p>
+            <a:pPr indent="0" marL="0">
+              <a:buNone/>
+            </a:pPr>
+            <a:r>
+              <a:rPr lang="en-US" sz="2000" b="1" dirty="0">
+                <a:solidFill>
+                  <a:srgbClr val="FFB000"/>
+                </a:solidFill>
+                <a:latin typeface="Courier New" pitchFamily="34" charset="0"/>
+                <a:ea typeface="Courier New" pitchFamily="34" charset="-122"/>
+                <a:cs typeface="Courier New" pitchFamily="34" charset="-120"/>
+              </a:rPr>
+              <a:t>Next</a:t>
+            </a:r>
+            <a:endParaRPr lang="en-US" sz="2000" dirty="0"/>
+          </a:p>
+        </p:txBody>
+      </p:sp>
+      <p:sp>
+        <p:nvSpPr>
+          <p:cNvPr id="9" name="Text 7"/>
+          <p:cNvSpPr/>
+          <p:nvPr/>
+        </p:nvSpPr>
+        <p:spPr>
+          <a:xfrm>
+            <a:off x="6400800" y="2011680"/>
+            <a:ext cx="5029200" cy="3429000"/>
+          </a:xfrm>
+          <a:prstGeom prst="rect">
+            <a:avLst/>
+          </a:prstGeom>
+          <a:noFill/>
+          <a:ln/>
+        </p:spPr>
+        <p:txBody>
+          <a:bodyPr wrap="square" lIns="0" tIns="0" rIns="0" bIns="0" rtlCol="0" anchor="t"/>
+          <a:lstStyle/>
+          <a:p>
+            <a:pPr indent="0" marL="0">
+              <a:buNone/>
+            </a:pPr>
+            <a:r>
+              <a:rPr lang="en-US" sz="2000" dirty="0">
+                <a:solidFill>
+                  <a:srgbClr val="E6EDF3"/>
+                </a:solidFill>
+                <a:latin typeface="Calibri" pitchFamily="34" charset="0"/>
+                <a:ea typeface="Calibri" pitchFamily="34" charset="-122"/>
+                <a:cs typeface="Calibri" pitchFamily="34" charset="-120"/>
+              </a:rPr>
+              <a:t>Selective Repeat / SACK</a:t>
+            </a:r>
+            <a:endParaRPr lang="en-US" sz="2000" dirty="0"/>
+          </a:p>
+          <a:p>
+            <a:pPr indent="0" marL="0">
+              <a:buNone/>
+            </a:pPr>
+            <a:r>
+              <a:rPr lang="en-US" sz="2000" dirty="0">
+                <a:solidFill>
+                  <a:srgbClr val="E6EDF3"/>
+                </a:solidFill>
+                <a:latin typeface="Calibri" pitchFamily="34" charset="0"/>
+                <a:ea typeface="Calibri" pitchFamily="34" charset="-122"/>
+                <a:cs typeface="Calibri" pitchFamily="34" charset="-120"/>
+              </a:rPr>
+              <a:t>A stronger learning agent</a:t>
+            </a:r>
+            <a:endParaRPr lang="en-US" sz="2000" dirty="0"/>
+          </a:p>
+          <a:p>
+            <a:pPr indent="0" marL="0">
+              <a:buNone/>
+            </a:pPr>
+            <a:r>
+              <a:rPr lang="en-US" sz="2000" dirty="0">
+                <a:solidFill>
+                  <a:srgbClr val="E6EDF3"/>
+                </a:solidFill>
+                <a:latin typeface="Calibri" pitchFamily="34" charset="0"/>
+                <a:ea typeface="Calibri" pitchFamily="34" charset="-122"/>
+                <a:cs typeface="Calibri" pitchFamily="34" charset="-120"/>
+              </a:rPr>
+              <a:t>Kernel netem and real multi-machine tests</a:t>
+            </a:r>
+            <a:endParaRPr lang="en-US" sz="2000" dirty="0"/>
+          </a:p>
+          <a:p>
+            <a:pPr indent="0" marL="0">
+              <a:buNone/>
+            </a:pPr>
+            <a:r>
+              <a:rPr lang="en-US" sz="2000" dirty="0">
+                <a:solidFill>
+                  <a:srgbClr val="E6EDF3"/>
+                </a:solidFill>
+                <a:latin typeface="Calibri" pitchFamily="34" charset="0"/>
+                <a:ea typeface="Calibri" pitchFamily="34" charset="-122"/>
+                <a:cs typeface="Calibri" pitchFamily="34" charset="-120"/>
+              </a:rPr>
+              <a:t>Run RUDP across a real multi-machine network</a:t>
+            </a:r>
+            <a:endParaRPr lang="en-US" sz="2000" dirty="0"/>
+          </a:p>
+        </p:txBody>
+      </p:sp>
+      <p:sp>
+        <p:nvSpPr>
+          <p:cNvPr id="10" name="Text 8"/>
+          <p:cNvSpPr/>
+          <p:nvPr/>
+        </p:nvSpPr>
+        <p:spPr>
+          <a:xfrm>
+            <a:off x="548640" y="5852160"/>
+            <a:ext cx="10972800" cy="365760"/>
+          </a:xfrm>
+          <a:prstGeom prst="rect">
+            <a:avLst/>
+          </a:prstGeom>
+          <a:noFill/>
+          <a:ln/>
+        </p:spPr>
+        <p:txBody>
+          <a:bodyPr wrap="square" lIns="0" tIns="0" rIns="0" bIns="0" rtlCol="0" anchor="ctr"/>
+          <a:lstStyle/>
+          <a:p>
+            <a:pPr indent="0" marL="0">
+              <a:buNone/>
+            </a:pPr>
+            <a:r>
+              <a:rPr lang="en-US" sz="1400" dirty="0">
+                <a:solidFill>
+                  <a:srgbClr val="8B98A5"/>
+                </a:solidFill>
+                <a:latin typeface="Calibri" pitchFamily="34" charset="0"/>
+                <a:ea typeface="Calibri" pitchFamily="34" charset="-122"/>
+                <a:cs typeface="Calibri" pitchFamily="34" charset="-120"/>
+              </a:rPr>
+              <a:t>Limits: Go-Back-N wastes bandwidth; emulated (not kernel) paths; Smart-RUDP did not beat AIMD.</a:t>
+            </a:r>
+            <a:endParaRPr lang="en-US" sz="1400" dirty="0"/>
           </a:p>
         </p:txBody>
       </p:sp>
@@ -7394,6 +8019,155 @@
         </p:nvSpPr>
         <p:spPr>
           <a:xfrm>
+            <a:off x="731520" y="2103120"/>
+            <a:ext cx="10058400" cy="1097280"/>
+          </a:xfrm>
+          <a:prstGeom prst="rect">
+            <a:avLst/>
+          </a:prstGeom>
+          <a:noFill/>
+          <a:ln/>
+        </p:spPr>
+        <p:txBody>
+          <a:bodyPr wrap="square" lIns="0" tIns="0" rIns="0" bIns="0" rtlCol="0" anchor="ctr"/>
+          <a:lstStyle/>
+          <a:p>
+            <a:pPr indent="0" marL="0">
+              <a:buNone/>
+            </a:pPr>
+            <a:r>
+              <a:rPr lang="en-US" sz="6400" b="1" dirty="0">
+                <a:solidFill>
+                  <a:srgbClr val="39FF88"/>
+                </a:solidFill>
+                <a:latin typeface="Courier New" pitchFamily="34" charset="0"/>
+                <a:ea typeface="Courier New" pitchFamily="34" charset="-122"/>
+                <a:cs typeface="Courier New" pitchFamily="34" charset="-120"/>
+              </a:rPr>
+              <a:t>Thank you</a:t>
+            </a:r>
+            <a:endParaRPr lang="en-US" sz="6400" dirty="0"/>
+          </a:p>
+        </p:txBody>
+      </p:sp>
+      <p:sp>
+        <p:nvSpPr>
+          <p:cNvPr id="3" name="Text 1"/>
+          <p:cNvSpPr/>
+          <p:nvPr/>
+        </p:nvSpPr>
+        <p:spPr>
+          <a:xfrm>
+            <a:off x="731520" y="3474720"/>
+            <a:ext cx="10058400" cy="548640"/>
+          </a:xfrm>
+          <a:prstGeom prst="rect">
+            <a:avLst/>
+          </a:prstGeom>
+          <a:noFill/>
+          <a:ln/>
+        </p:spPr>
+        <p:txBody>
+          <a:bodyPr wrap="square" lIns="0" tIns="0" rIns="0" bIns="0" rtlCol="0" anchor="ctr"/>
+          <a:lstStyle/>
+          <a:p>
+            <a:pPr indent="0" marL="0">
+              <a:buNone/>
+            </a:pPr>
+            <a:r>
+              <a:rPr lang="en-US" sz="2600" dirty="0">
+                <a:solidFill>
+                  <a:srgbClr val="E6EDF3"/>
+                </a:solidFill>
+                <a:latin typeface="Courier New" pitchFamily="34" charset="0"/>
+                <a:ea typeface="Courier New" pitchFamily="34" charset="-122"/>
+                <a:cs typeface="Courier New" pitchFamily="34" charset="-120"/>
+              </a:rPr>
+              <a:t>github.com/Capsturrrr/rudp</a:t>
+            </a:r>
+            <a:endParaRPr lang="en-US" sz="2600" dirty="0"/>
+          </a:p>
+        </p:txBody>
+      </p:sp>
+      <p:sp>
+        <p:nvSpPr>
+          <p:cNvPr id="4" name="Text 2"/>
+          <p:cNvSpPr/>
+          <p:nvPr/>
+        </p:nvSpPr>
+        <p:spPr>
+          <a:xfrm>
+            <a:off x="731520" y="4206240"/>
+            <a:ext cx="10058400" cy="457200"/>
+          </a:xfrm>
+          <a:prstGeom prst="rect">
+            <a:avLst/>
+          </a:prstGeom>
+          <a:noFill/>
+          <a:ln/>
+        </p:spPr>
+        <p:txBody>
+          <a:bodyPr wrap="square" lIns="0" tIns="0" rIns="0" bIns="0" rtlCol="0" anchor="ctr"/>
+          <a:lstStyle/>
+          <a:p>
+            <a:pPr indent="0" marL="0">
+              <a:buNone/>
+            </a:pPr>
+            <a:r>
+              <a:rPr lang="en-US" sz="1800" dirty="0">
+                <a:solidFill>
+                  <a:srgbClr val="8B98A5"/>
+                </a:solidFill>
+                <a:latin typeface="Calibri" pitchFamily="34" charset="0"/>
+                <a:ea typeface="Calibri" pitchFamily="34" charset="-122"/>
+                <a:cs typeface="Calibri" pitchFamily="34" charset="-120"/>
+              </a:rPr>
+              <a:t>Harshavardhan Mallela   Rohit Arya   Shloak Sinha</a:t>
+            </a:r>
+            <a:endParaRPr lang="en-US" sz="1800" dirty="0"/>
+          </a:p>
+        </p:txBody>
+      </p:sp>
+    </p:spTree>
+  </p:cSld>
+  <p:clrMapOvr>
+    <a:masterClrMapping/>
+  </p:clrMapOvr>
+</p:sld>
+</file>
+
+<file path=ppt/slides/slide23.xml><?xml version="1.0" encoding="utf-8"?>
+<p:sld xmlns:a="http://schemas.openxmlformats.org/drawingml/2006/main" xmlns:r="http://schemas.openxmlformats.org/officeDocument/2006/relationships" xmlns:p="http://schemas.openxmlformats.org/presentationml/2006/main">
+  <p:cSld name="Slide 23">
+    <p:bg>
+      <p:bgPr>
+        <a:solidFill>
+          <a:srgbClr val="0B0F14"/>
+        </a:solidFill>
+      </p:bgPr>
+    </p:bg>
+    <p:spTree>
+      <p:nvGrpSpPr>
+        <p:cNvPr id="1" name=""/>
+        <p:cNvGrpSpPr/>
+        <p:nvPr/>
+      </p:nvGrpSpPr>
+      <p:grpSpPr>
+        <a:xfrm>
+          <a:off x="0" y="0"/>
+          <a:ext cx="0" cy="0"/>
+          <a:chOff x="0" y="0"/>
+          <a:chExt cx="0" cy="0"/>
+        </a:xfrm>
+      </p:grpSpPr>
+      <p:sp>
+        <p:nvSpPr>
+          <p:cNvPr id="2" name="Text 0"/>
+          <p:cNvSpPr/>
+          <p:nvPr/>
+        </p:nvSpPr>
+        <p:spPr>
+          <a:xfrm>
             <a:off x="548640" y="320040"/>
             <a:ext cx="11064240" cy="731520"/>
           </a:xfrm>
@@ -7698,7 +8472,7 @@
                 <a:ea typeface="Courier New" pitchFamily="34" charset="-122"/>
                 <a:cs typeface="Courier New" pitchFamily="34" charset="-120"/>
               </a:rPr>
-              <a:t>3 / 21   Smart-RUDP</a:t>
+              <a:t>3 / 22   Smart-RUDP</a:t>
             </a:r>
             <a:endParaRPr lang="en-US" sz="1000" dirty="0"/>
           </a:p>
@@ -8092,7 +8866,7 @@
                 <a:ea typeface="Courier New" pitchFamily="34" charset="-122"/>
                 <a:cs typeface="Courier New" pitchFamily="34" charset="-120"/>
               </a:rPr>
-              <a:t>4 / 21   Smart-RUDP</a:t>
+              <a:t>4 / 22   Smart-RUDP</a:t>
             </a:r>
             <a:endParaRPr lang="en-US" sz="1000" dirty="0"/>
           </a:p>
@@ -8653,7 +9427,7 @@
                 <a:ea typeface="Courier New" pitchFamily="34" charset="-122"/>
                 <a:cs typeface="Courier New" pitchFamily="34" charset="-120"/>
               </a:rPr>
-              <a:t>5 / 21   Smart-RUDP</a:t>
+              <a:t>5 / 22   Smart-RUDP</a:t>
             </a:r>
             <a:endParaRPr lang="en-US" sz="1000" dirty="0"/>
           </a:p>
@@ -10092,7 +10866,7 @@
                 <a:ea typeface="Courier New" pitchFamily="34" charset="-122"/>
                 <a:cs typeface="Courier New" pitchFamily="34" charset="-120"/>
               </a:rPr>
-              <a:t>6 / 21   Smart-RUDP</a:t>
+              <a:t>6 / 22   Smart-RUDP</a:t>
             </a:r>
             <a:endParaRPr lang="en-US" sz="1000" dirty="0"/>
           </a:p>
@@ -11327,7 +12101,7 @@
                 <a:ea typeface="Courier New" pitchFamily="34" charset="-122"/>
                 <a:cs typeface="Courier New" pitchFamily="34" charset="-120"/>
               </a:rPr>
-              <a:t>7 / 21   Smart-RUDP</a:t>
+              <a:t>7 / 22   Smart-RUDP</a:t>
             </a:r>
             <a:endParaRPr lang="en-US" sz="1000" dirty="0"/>
           </a:p>
@@ -11770,7 +12544,7 @@
                 <a:ea typeface="Courier New" pitchFamily="34" charset="-122"/>
                 <a:cs typeface="Courier New" pitchFamily="34" charset="-120"/>
               </a:rPr>
-              <a:t>8 / 21   Smart-RUDP</a:t>
+              <a:t>8 / 22   Smart-RUDP</a:t>
             </a:r>
             <a:endParaRPr lang="en-US" sz="1000" dirty="0"/>
           </a:p>
@@ -12070,7 +12844,7 @@
                 <a:ea typeface="Courier New" pitchFamily="34" charset="-122"/>
                 <a:cs typeface="Courier New" pitchFamily="34" charset="-120"/>
               </a:rPr>
-              <a:t>9 / 21   Smart-RUDP</a:t>
+              <a:t>9 / 22   Smart-RUDP</a:t>
             </a:r>
             <a:endParaRPr lang="en-US" sz="1000" dirty="0"/>
           </a:p>

--- a/docs/RUDP_Presentation.pptx
+++ b/docs/RUDP_Presentation.pptx
@@ -5654,7 +5654,7 @@
               <a:buNone/>
             </a:pPr>
             <a:r>
-              <a:rPr lang="en-US" sz="1400" dirty="0">
+              <a:rPr lang="en-US" sz="1300" dirty="0">
                 <a:solidFill>
                   <a:srgbClr val="E6EDF3"/>
                 </a:solidFill>
@@ -5664,14 +5664,14 @@
               </a:rPr>
               <a:t>// state: 4 x 4 x 5 = 80 buckets</a:t>
             </a:r>
-            <a:endParaRPr lang="en-US" sz="1400" dirty="0"/>
-          </a:p>
-          <a:p>
-            <a:pPr indent="0" marL="0">
-              <a:buNone/>
-            </a:pPr>
-            <a:r>
-              <a:rPr lang="en-US" sz="1400" dirty="0">
+            <a:endParaRPr lang="en-US" sz="1300" dirty="0"/>
+          </a:p>
+          <a:p>
+            <a:pPr indent="0" marL="0">
+              <a:buNone/>
+            </a:pPr>
+            <a:r>
+              <a:rPr lang="en-US" sz="1300" dirty="0">
                 <a:solidFill>
                   <a:srgbClr val="E6EDF3"/>
                 </a:solidFill>
@@ -5681,20 +5681,20 @@
               </a:rPr>
               <a:t>s = (rtt_bucket*4 + loss_bucket)*5 + cwnd_bucket;</a:t>
             </a:r>
-            <a:endParaRPr lang="en-US" sz="1400" dirty="0"/>
-          </a:p>
-          <a:p>
-            <a:pPr indent="0" marL="0">
-              <a:buNone/>
-            </a:pPr>
-            <a:endParaRPr lang="en-US" sz="1400" dirty="0"/>
-          </a:p>
-          <a:p>
-            <a:pPr indent="0" marL="0">
-              <a:buNone/>
-            </a:pPr>
-            <a:r>
-              <a:rPr lang="en-US" sz="1400" dirty="0">
+            <a:endParaRPr lang="en-US" sz="1300" dirty="0"/>
+          </a:p>
+          <a:p>
+            <a:pPr indent="0" marL="0">
+              <a:buNone/>
+            </a:pPr>
+            <a:endParaRPr lang="en-US" sz="1300" dirty="0"/>
+          </a:p>
+          <a:p>
+            <a:pPr indent="0" marL="0">
+              <a:buNone/>
+            </a:pPr>
+            <a:r>
+              <a:rPr lang="en-US" sz="1300" dirty="0">
                 <a:solidFill>
                   <a:srgbClr val="E6EDF3"/>
                 </a:solidFill>
@@ -5704,14 +5704,14 @@
               </a:rPr>
               <a:t>// choose: explore with prob. eps, else best</a:t>
             </a:r>
-            <a:endParaRPr lang="en-US" sz="1400" dirty="0"/>
-          </a:p>
-          <a:p>
-            <a:pPr indent="0" marL="0">
-              <a:buNone/>
-            </a:pPr>
-            <a:r>
-              <a:rPr lang="en-US" sz="1400" dirty="0">
+            <a:endParaRPr lang="en-US" sz="1300" dirty="0"/>
+          </a:p>
+          <a:p>
+            <a:pPr indent="0" marL="0">
+              <a:buNone/>
+            </a:pPr>
+            <a:r>
+              <a:rPr lang="en-US" sz="1300" dirty="0">
                 <a:solidFill>
                   <a:srgbClr val="E6EDF3"/>
                 </a:solidFill>
@@ -5721,14 +5721,14 @@
               </a:rPr>
               <a:t>int rl_choose(a, s) {</a:t>
             </a:r>
-            <a:endParaRPr lang="en-US" sz="1400" dirty="0"/>
-          </a:p>
-          <a:p>
-            <a:pPr indent="0" marL="0">
-              <a:buNone/>
-            </a:pPr>
-            <a:r>
-              <a:rPr lang="en-US" sz="1400" dirty="0">
+            <a:endParaRPr lang="en-US" sz="1300" dirty="0"/>
+          </a:p>
+          <a:p>
+            <a:pPr indent="0" marL="0">
+              <a:buNone/>
+            </a:pPr>
+            <a:r>
+              <a:rPr lang="en-US" sz="1300" dirty="0">
                 <a:solidFill>
                   <a:srgbClr val="E6EDF3"/>
                 </a:solidFill>
@@ -5738,14 +5738,14 @@
               </a:rPr>
               <a:t>  if (rand01() &lt; a-&gt;eps) return rand() % 5;</a:t>
             </a:r>
-            <a:endParaRPr lang="en-US" sz="1400" dirty="0"/>
-          </a:p>
-          <a:p>
-            <a:pPr indent="0" marL="0">
-              <a:buNone/>
-            </a:pPr>
-            <a:r>
-              <a:rPr lang="en-US" sz="1400" dirty="0">
+            <a:endParaRPr lang="en-US" sz="1300" dirty="0"/>
+          </a:p>
+          <a:p>
+            <a:pPr indent="0" marL="0">
+              <a:buNone/>
+            </a:pPr>
+            <a:r>
+              <a:rPr lang="en-US" sz="1300" dirty="0">
                 <a:solidFill>
                   <a:srgbClr val="E6EDF3"/>
                 </a:solidFill>
@@ -5755,14 +5755,14 @@
               </a:rPr>
               <a:t>  return argmax(a-&gt;q[s]);        // 5 actions</a:t>
             </a:r>
-            <a:endParaRPr lang="en-US" sz="1400" dirty="0"/>
-          </a:p>
-          <a:p>
-            <a:pPr indent="0" marL="0">
-              <a:buNone/>
-            </a:pPr>
-            <a:r>
-              <a:rPr lang="en-US" sz="1400" dirty="0">
+            <a:endParaRPr lang="en-US" sz="1300" dirty="0"/>
+          </a:p>
+          <a:p>
+            <a:pPr indent="0" marL="0">
+              <a:buNone/>
+            </a:pPr>
+            <a:r>
+              <a:rPr lang="en-US" sz="1300" dirty="0">
                 <a:solidFill>
                   <a:srgbClr val="E6EDF3"/>
                 </a:solidFill>
@@ -5772,20 +5772,20 @@
               </a:rPr>
               <a:t>}</a:t>
             </a:r>
-            <a:endParaRPr lang="en-US" sz="1400" dirty="0"/>
-          </a:p>
-          <a:p>
-            <a:pPr indent="0" marL="0">
-              <a:buNone/>
-            </a:pPr>
-            <a:endParaRPr lang="en-US" sz="1400" dirty="0"/>
-          </a:p>
-          <a:p>
-            <a:pPr indent="0" marL="0">
-              <a:buNone/>
-            </a:pPr>
-            <a:r>
-              <a:rPr lang="en-US" sz="1400" dirty="0">
+            <a:endParaRPr lang="en-US" sz="1300" dirty="0"/>
+          </a:p>
+          <a:p>
+            <a:pPr indent="0" marL="0">
+              <a:buNone/>
+            </a:pPr>
+            <a:endParaRPr lang="en-US" sz="1300" dirty="0"/>
+          </a:p>
+          <a:p>
+            <a:pPr indent="0" marL="0">
+              <a:buNone/>
+            </a:pPr>
+            <a:r>
+              <a:rPr lang="en-US" sz="1300" dirty="0">
                 <a:solidFill>
                   <a:srgbClr val="E6EDF3"/>
                 </a:solidFill>
@@ -5795,14 +5795,14 @@
               </a:rPr>
               <a:t>// learn: the Q-learning update</a:t>
             </a:r>
-            <a:endParaRPr lang="en-US" sz="1400" dirty="0"/>
-          </a:p>
-          <a:p>
-            <a:pPr indent="0" marL="0">
-              <a:buNone/>
-            </a:pPr>
-            <a:r>
-              <a:rPr lang="en-US" sz="1400" dirty="0">
+            <a:endParaRPr lang="en-US" sz="1300" dirty="0"/>
+          </a:p>
+          <a:p>
+            <a:pPr indent="0" marL="0">
+              <a:buNone/>
+            </a:pPr>
+            <a:r>
+              <a:rPr lang="en-US" sz="1300" dirty="0">
                 <a:solidFill>
                   <a:srgbClr val="E6EDF3"/>
                 </a:solidFill>
@@ -5812,14 +5812,14 @@
               </a:rPr>
               <a:t>void rl_update(a, s, act, r, s2) {</a:t>
             </a:r>
-            <a:endParaRPr lang="en-US" sz="1400" dirty="0"/>
-          </a:p>
-          <a:p>
-            <a:pPr indent="0" marL="0">
-              <a:buNone/>
-            </a:pPr>
-            <a:r>
-              <a:rPr lang="en-US" sz="1400" dirty="0">
+            <a:endParaRPr lang="en-US" sz="1300" dirty="0"/>
+          </a:p>
+          <a:p>
+            <a:pPr indent="0" marL="0">
+              <a:buNone/>
+            </a:pPr>
+            <a:r>
+              <a:rPr lang="en-US" sz="1300" dirty="0">
                 <a:solidFill>
                   <a:srgbClr val="E6EDF3"/>
                 </a:solidFill>
@@ -5829,14 +5829,14 @@
               </a:rPr>
               <a:t>  target = r + a-&gt;gamma * max(a-&gt;q[s2]);</a:t>
             </a:r>
-            <a:endParaRPr lang="en-US" sz="1400" dirty="0"/>
-          </a:p>
-          <a:p>
-            <a:pPr indent="0" marL="0">
-              <a:buNone/>
-            </a:pPr>
-            <a:r>
-              <a:rPr lang="en-US" sz="1400" dirty="0">
+            <a:endParaRPr lang="en-US" sz="1300" dirty="0"/>
+          </a:p>
+          <a:p>
+            <a:pPr indent="0" marL="0">
+              <a:buNone/>
+            </a:pPr>
+            <a:r>
+              <a:rPr lang="en-US" sz="1300" dirty="0">
                 <a:solidFill>
                   <a:srgbClr val="E6EDF3"/>
                 </a:solidFill>
@@ -5846,14 +5846,14 @@
               </a:rPr>
               <a:t>  a-&gt;q[s][act] += a-&gt;alpha * (target - a-&gt;q[s][act]);</a:t>
             </a:r>
-            <a:endParaRPr lang="en-US" sz="1400" dirty="0"/>
-          </a:p>
-          <a:p>
-            <a:pPr indent="0" marL="0">
-              <a:buNone/>
-            </a:pPr>
-            <a:r>
-              <a:rPr lang="en-US" sz="1400" dirty="0">
+            <a:endParaRPr lang="en-US" sz="1300" dirty="0"/>
+          </a:p>
+          <a:p>
+            <a:pPr indent="0" marL="0">
+              <a:buNone/>
+            </a:pPr>
+            <a:r>
+              <a:rPr lang="en-US" sz="1300" dirty="0">
                 <a:solidFill>
                   <a:srgbClr val="E6EDF3"/>
                 </a:solidFill>
@@ -5863,7 +5863,7 @@
               </a:rPr>
               <a:t>}</a:t>
             </a:r>
-            <a:endParaRPr lang="en-US" sz="1400" dirty="0"/>
+            <a:endParaRPr lang="en-US" sz="1300" dirty="0"/>
           </a:p>
         </p:txBody>
       </p:sp>
@@ -5956,7 +5956,7 @@
               <a:buNone/>
             </a:pPr>
             <a:r>
-              <a:rPr lang="en-US" sz="1400" dirty="0">
+              <a:rPr lang="en-US" sz="1300" dirty="0">
                 <a:solidFill>
                   <a:srgbClr val="E6EDF3"/>
                 </a:solidFill>
@@ -5966,14 +5966,14 @@
               </a:rPr>
               <a:t>// once per RTT, in smart_client.c</a:t>
             </a:r>
-            <a:endParaRPr lang="en-US" sz="1400" dirty="0"/>
-          </a:p>
-          <a:p>
-            <a:pPr indent="0" marL="0">
-              <a:buNone/>
-            </a:pPr>
-            <a:r>
-              <a:rPr lang="en-US" sz="1400" dirty="0">
+            <a:endParaRPr lang="en-US" sz="1300" dirty="0"/>
+          </a:p>
+          <a:p>
+            <a:pPr indent="0" marL="0">
+              <a:buNone/>
+            </a:pPr>
+            <a:r>
+              <a:rPr lang="en-US" sz="1300" dirty="0">
                 <a:solidFill>
                   <a:srgbClr val="E6EDF3"/>
                 </a:solidFill>
@@ -5983,20 +5983,20 @@
               </a:rPr>
               <a:t>ratio = rtt / base_rtt;   lossf = losses / sent;</a:t>
             </a:r>
-            <a:endParaRPr lang="en-US" sz="1400" dirty="0"/>
-          </a:p>
-          <a:p>
-            <a:pPr indent="0" marL="0">
-              <a:buNone/>
-            </a:pPr>
-            <a:endParaRPr lang="en-US" sz="1400" dirty="0"/>
-          </a:p>
-          <a:p>
-            <a:pPr indent="0" marL="0">
-              <a:buNone/>
-            </a:pPr>
-            <a:r>
-              <a:rPr lang="en-US" sz="1400" dirty="0">
+            <a:endParaRPr lang="en-US" sz="1300" dirty="0"/>
+          </a:p>
+          <a:p>
+            <a:pPr indent="0" marL="0">
+              <a:buNone/>
+            </a:pPr>
+            <a:endParaRPr lang="en-US" sz="1300" dirty="0"/>
+          </a:p>
+          <a:p>
+            <a:pPr indent="0" marL="0">
+              <a:buNone/>
+            </a:pPr>
+            <a:r>
+              <a:rPr lang="en-US" sz="1300" dirty="0">
                 <a:solidFill>
                   <a:srgbClr val="E6EDF3"/>
                 </a:solidFill>
@@ -6006,14 +6006,14 @@
               </a:rPr>
               <a:t>reward = sqrt(throughput_norm)</a:t>
             </a:r>
-            <a:endParaRPr lang="en-US" sz="1400" dirty="0"/>
-          </a:p>
-          <a:p>
-            <a:pPr indent="0" marL="0">
-              <a:buNone/>
-            </a:pPr>
-            <a:r>
-              <a:rPr lang="en-US" sz="1400" dirty="0">
+            <a:endParaRPr lang="en-US" sz="1300" dirty="0"/>
+          </a:p>
+          <a:p>
+            <a:pPr indent="0" marL="0">
+              <a:buNone/>
+            </a:pPr>
+            <a:r>
+              <a:rPr lang="en-US" sz="1300" dirty="0">
                 <a:solidFill>
                   <a:srgbClr val="E6EDF3"/>
                 </a:solidFill>
@@ -6023,14 +6023,14 @@
               </a:rPr>
               <a:t>       - 0.5 * max(0, ratio - 1)   // delay growth</a:t>
             </a:r>
-            <a:endParaRPr lang="en-US" sz="1400" dirty="0"/>
-          </a:p>
-          <a:p>
-            <a:pPr indent="0" marL="0">
-              <a:buNone/>
-            </a:pPr>
-            <a:r>
-              <a:rPr lang="en-US" sz="1400" dirty="0">
+            <a:endParaRPr lang="en-US" sz="1300" dirty="0"/>
+          </a:p>
+          <a:p>
+            <a:pPr indent="0" marL="0">
+              <a:buNone/>
+            </a:pPr>
+            <a:r>
+              <a:rPr lang="en-US" sz="1300" dirty="0">
                 <a:solidFill>
                   <a:srgbClr val="E6EDF3"/>
                 </a:solidFill>
@@ -6040,20 +6040,20 @@
               </a:rPr>
               <a:t>       - 4.0 * lossf;              // loss</a:t>
             </a:r>
-            <a:endParaRPr lang="en-US" sz="1400" dirty="0"/>
-          </a:p>
-          <a:p>
-            <a:pPr indent="0" marL="0">
-              <a:buNone/>
-            </a:pPr>
-            <a:endParaRPr lang="en-US" sz="1400" dirty="0"/>
-          </a:p>
-          <a:p>
-            <a:pPr indent="0" marL="0">
-              <a:buNone/>
-            </a:pPr>
-            <a:r>
-              <a:rPr lang="en-US" sz="1400" dirty="0">
+            <a:endParaRPr lang="en-US" sz="1300" dirty="0"/>
+          </a:p>
+          <a:p>
+            <a:pPr indent="0" marL="0">
+              <a:buNone/>
+            </a:pPr>
+            <a:endParaRPr lang="en-US" sz="1300" dirty="0"/>
+          </a:p>
+          <a:p>
+            <a:pPr indent="0" marL="0">
+              <a:buNone/>
+            </a:pPr>
+            <a:r>
+              <a:rPr lang="en-US" sz="1300" dirty="0">
                 <a:solidFill>
                   <a:srgbClr val="E6EDF3"/>
                 </a:solidFill>
@@ -6063,14 +6063,14 @@
               </a:rPr>
               <a:t>rl_update(&amp;ag, prev_s, prev_a, reward, s2);</a:t>
             </a:r>
-            <a:endParaRPr lang="en-US" sz="1400" dirty="0"/>
-          </a:p>
-          <a:p>
-            <a:pPr indent="0" marL="0">
-              <a:buNone/>
-            </a:pPr>
-            <a:r>
-              <a:rPr lang="en-US" sz="1400" dirty="0">
+            <a:endParaRPr lang="en-US" sz="1300" dirty="0"/>
+          </a:p>
+          <a:p>
+            <a:pPr indent="0" marL="0">
+              <a:buNone/>
+            </a:pPr>
+            <a:r>
+              <a:rPr lang="en-US" sz="1300" dirty="0">
                 <a:solidFill>
                   <a:srgbClr val="E6EDF3"/>
                 </a:solidFill>
@@ -6080,14 +6080,14 @@
               </a:rPr>
               <a:t>act   = rl_choose(&amp;ag, s2);</a:t>
             </a:r>
-            <a:endParaRPr lang="en-US" sz="1400" dirty="0"/>
-          </a:p>
-          <a:p>
-            <a:pPr indent="0" marL="0">
-              <a:buNone/>
-            </a:pPr>
-            <a:r>
-              <a:rPr lang="en-US" sz="1400" dirty="0">
+            <a:endParaRPr lang="en-US" sz="1300" dirty="0"/>
+          </a:p>
+          <a:p>
+            <a:pPr indent="0" marL="0">
+              <a:buNone/>
+            </a:pPr>
+            <a:r>
+              <a:rPr lang="en-US" sz="1300" dirty="0">
                 <a:solidFill>
                   <a:srgbClr val="E6EDF3"/>
                 </a:solidFill>
@@ -6097,7 +6097,7 @@
               </a:rPr>
               <a:t>cwnd *= {0.5, 0.85, 1.0, 1.15, 1.5}[act];</a:t>
             </a:r>
-            <a:endParaRPr lang="en-US" sz="1400" dirty="0"/>
+            <a:endParaRPr lang="en-US" sz="1300" dirty="0"/>
           </a:p>
         </p:txBody>
       </p:sp>
@@ -6134,7 +6134,7 @@
                 <a:ea typeface="Calibri" pitchFamily="34" charset="-122"/>
                 <a:cs typeface="Calibri" pitchFamily="34" charset="-120"/>
               </a:rPr>
-              <a:t>Tabular Q-learning: alpha 0.15, gamma 0.9. The chat version (web/cc.py) uses the same state and actions; trained offline in web/train.py, table saved in results/q_chat.txt. A neural network (deep RL) is future work: 80 states do not need one.</a:t>
+              <a:t>Tabular Q-learning: alpha 0.15, gamma 0.9. Chat version: web/cc.py, trained in web/train.py (results/q_chat.txt). Deep version: web/dqn.py, a small neural network (5-32-32-5) trained by DQN in web/train_deep.py.</a:t>
             </a:r>
             <a:endParaRPr lang="en-US" sz="1500" dirty="0"/>
           </a:p>
@@ -7379,7 +7379,7 @@
         <p:spPr>
           <a:xfrm>
             <a:off x="7955280" y="1188720"/>
-            <a:ext cx="3840480" cy="4389120"/>
+            <a:ext cx="3840480" cy="4937760"/>
           </a:xfrm>
           <a:prstGeom prst="rect">
             <a:avLst/>
@@ -7399,7 +7399,7 @@
               <a:buChar char="•"/>
             </a:pPr>
             <a:r>
-              <a:rPr lang="en-US" sz="1600" dirty="0">
+              <a:rPr lang="en-US" sz="1400" dirty="0">
                 <a:solidFill>
                   <a:srgbClr val="E6EDF3"/>
                 </a:solidFill>
@@ -7409,7 +7409,7 @@
               </a:rPr>
               <a:t>Each message is one RUDP segment: numbered, checksummed, ACKed in order</a:t>
             </a:r>
-            <a:endParaRPr lang="en-US" sz="1600" dirty="0"/>
+            <a:endParaRPr lang="en-US" sz="1400" dirty="0"/>
           </a:p>
           <a:p>
             <a:pPr marL="342900" indent="-342900">
@@ -7420,7 +7420,7 @@
               <a:buChar char="•"/>
             </a:pPr>
             <a:r>
-              <a:rPr lang="en-US" sz="1600" dirty="0">
+              <a:rPr lang="en-US" sz="1400" dirty="0">
                 <a:solidFill>
                   <a:srgbClr val="E6EDF3"/>
                 </a:solidFill>
@@ -7430,7 +7430,7 @@
               </a:rPr>
               <a:t>Browser UI via a small gateway; terminal version too</a:t>
             </a:r>
-            <a:endParaRPr lang="en-US" sz="1600" dirty="0"/>
+            <a:endParaRPr lang="en-US" sz="1400" dirty="0"/>
           </a:p>
           <a:p>
             <a:pPr marL="342900" indent="-342900">
@@ -7441,7 +7441,7 @@
               <a:buChar char="•"/>
             </a:pPr>
             <a:r>
-              <a:rPr lang="en-US" sz="1600" dirty="0">
+              <a:rPr lang="en-US" sz="1400" dirty="0">
                 <a:solidFill>
                   <a:srgbClr val="E6EDF3"/>
                 </a:solidFill>
@@ -7451,7 +7451,7 @@
               </a:rPr>
               <a:t>Two machines linked over Tailscale (laptop and phone)</a:t>
             </a:r>
-            <a:endParaRPr lang="en-US" sz="1600" dirty="0"/>
+            <a:endParaRPr lang="en-US" sz="1400" dirty="0"/>
           </a:p>
           <a:p>
             <a:pPr marL="342900" indent="-342900">
@@ -7462,7 +7462,7 @@
               <a:buChar char="•"/>
             </a:pPr>
             <a:r>
-              <a:rPr lang="en-US" sz="1600" dirty="0">
+              <a:rPr lang="en-US" sz="1400" dirty="0">
                 <a:solidFill>
                   <a:srgbClr val="E6EDF3"/>
                 </a:solidFill>
@@ -7472,7 +7472,7 @@
               </a:rPr>
               <a:t>Loss slider: lost messages are resent and still arrive in order</a:t>
             </a:r>
-            <a:endParaRPr lang="en-US" sz="1600" dirty="0"/>
+            <a:endParaRPr lang="en-US" sz="1400" dirty="0"/>
           </a:p>
           <a:p>
             <a:pPr marL="342900" indent="-342900">
@@ -7483,7 +7483,7 @@
               <a:buChar char="•"/>
             </a:pPr>
             <a:r>
-              <a:rPr lang="en-US" sz="1600" dirty="0">
+              <a:rPr lang="en-US" sz="1400" dirty="0">
                 <a:solidFill>
                   <a:srgbClr val="E6EDF3"/>
                 </a:solidFill>
@@ -7493,7 +7493,7 @@
               </a:rPr>
               <a:t>Window controller switch: fixed, AIMD or Smart-RUDP (Q-learning, learns live)</a:t>
             </a:r>
-            <a:endParaRPr lang="en-US" sz="1600" dirty="0"/>
+            <a:endParaRPr lang="en-US" sz="1400" dirty="0"/>
           </a:p>
           <a:p>
             <a:pPr marL="342900" indent="-342900">
@@ -7504,7 +7504,7 @@
               <a:buChar char="•"/>
             </a:pPr>
             <a:r>
-              <a:rPr lang="en-US" sz="1600" dirty="0">
+              <a:rPr lang="en-US" sz="1400" dirty="0">
                 <a:solidFill>
                   <a:srgbClr val="E6EDF3"/>
                 </a:solidFill>
@@ -7514,7 +7514,7 @@
               </a:rPr>
               <a:t>Retrained for the chat: faster than AIMD on 5 of 6 held-out paths, equal on 1 (Table 11)</a:t>
             </a:r>
-            <a:endParaRPr lang="en-US" sz="1600" dirty="0"/>
+            <a:endParaRPr lang="en-US" sz="1400" dirty="0"/>
           </a:p>
           <a:p>
             <a:pPr marL="342900" indent="-342900">
@@ -7525,7 +7525,7 @@
               <a:buChar char="•"/>
             </a:pPr>
             <a:r>
-              <a:rPr lang="en-US" sz="1600" dirty="0">
+              <a:rPr lang="en-US" sz="1400" dirty="0">
                 <a:solidFill>
                   <a:srgbClr val="E6EDF3"/>
                 </a:solidFill>
@@ -7533,9 +7533,30 @@
                 <a:ea typeface="Calibri" pitchFamily="34" charset="-122"/>
                 <a:cs typeface="Calibri" pitchFamily="34" charset="-120"/>
               </a:rPr>
-              <a:t>Stress test, 48 unseen random paths: Smart 3.73 s, AIMD 7.16 s mean; faster than AIMD on 27, slower on 5</a:t>
-            </a:r>
-            <a:endParaRPr lang="en-US" sz="1600" dirty="0"/>
+              <a:t>Stress test, 48 unseen paths: table 3.73 s, deep (DQN) 3.20 s, AIMD 7.16 s</a:t>
+            </a:r>
+            <a:endParaRPr lang="en-US" sz="1400" dirty="0"/>
+          </a:p>
+          <a:p>
+            <a:pPr marL="342900" indent="-342900">
+              <a:spcAft>
+                <a:spcPts val="800"/>
+              </a:spcAft>
+              <a:buSzPct val="100000"/>
+              <a:buChar char="•"/>
+            </a:pPr>
+            <a:r>
+              <a:rPr lang="en-US" sz="1400" dirty="0">
+                <a:solidFill>
+                  <a:srgbClr val="E6EDF3"/>
+                </a:solidFill>
+                <a:latin typeface="Calibri" pitchFamily="34" charset="0"/>
+                <a:ea typeface="Calibri" pitchFamily="34" charset="-122"/>
+                <a:cs typeface="Calibri" pitchFamily="34" charset="-120"/>
+              </a:rPr>
+              <a:t>Deep agent is seed-sensitive, so picked on validation paths</a:t>
+            </a:r>
+            <a:endParaRPr lang="en-US" sz="1400" dirty="0"/>
           </a:p>
         </p:txBody>
       </p:sp>

--- a/docs/RUDP_Presentation.pptx
+++ b/docs/RUDP_Presentation.pptx
@@ -28,9 +28,10 @@
     <p:sldId id="276" r:id="rId22"/>
     <p:sldId id="277" r:id="rId23"/>
     <p:sldId id="278" r:id="rId24"/>
+    <p:sldId id="279" r:id="rId25"/>
   </p:sldIdLst>
   <p:notesMasterIdLst>
-    <p:notesMasterId r:id="rId25"/>
+    <p:notesMasterId r:id="rId26"/>
   </p:notesMasterIdLst>
   <p:sldSz cx="12192000" cy="6858000"/>
   <p:notesSz cx="6858000" cy="12192000"/>
@@ -1868,6 +1869,94 @@
             <a:fld id="{F7021451-1387-4CA6-816F-3879F97B5CBC}" type="slidenum">
               <a:rPr lang="en-US"/>
               <a:t>23</a:t>
+            </a:fld>
+            <a:endParaRPr lang="en-US"/>
+          </a:p>
+        </p:txBody>
+      </p:sp>
+    </p:spTree>
+    <p:extLst>
+      <p:ext uri="{BB962C8B-B14F-4D97-AF65-F5344CB8AC3E}">
+        <p14:creationId xmlns:p14="http://schemas.microsoft.com/office/powerpoint/2010/main" val="1024086991"/>
+      </p:ext>
+    </p:extLst>
+  </p:cSld>
+  <p:clrMapOvr>
+    <a:masterClrMapping/>
+  </p:clrMapOvr>
+</p:notes>
+</file>
+
+<file path=ppt/notesSlides/notesSlide24.xml><?xml version="1.0" encoding="utf-8"?>
+<p:notes xmlns:a="http://schemas.openxmlformats.org/drawingml/2006/main" xmlns:r="http://schemas.openxmlformats.org/officeDocument/2006/relationships" xmlns:p="http://schemas.openxmlformats.org/presentationml/2006/main">
+  <p:cSld>
+    <p:spTree>
+      <p:nvGrpSpPr>
+        <p:cNvPr id="1" name=""/>
+        <p:cNvGrpSpPr/>
+        <p:nvPr/>
+      </p:nvGrpSpPr>
+      <p:grpSpPr>
+        <a:xfrm>
+          <a:off x="0" y="0"/>
+          <a:ext cx="0" cy="0"/>
+          <a:chOff x="0" y="0"/>
+          <a:chExt cx="0" cy="0"/>
+        </a:xfrm>
+      </p:grpSpPr>
+      <p:sp>
+        <p:nvSpPr>
+          <p:cNvPr id="2" name="Slide Image Placeholder 1"/>
+          <p:cNvSpPr>
+            <a:spLocks noGrp="1" noRot="1" noChangeAspect="1"/>
+          </p:cNvSpPr>
+          <p:nvPr>
+            <p:ph type="sldImg"/>
+          </p:nvPr>
+        </p:nvSpPr>
+        <p:spPr/>
+      </p:sp>
+      <p:sp>
+        <p:nvSpPr>
+          <p:cNvPr id="3" name="Notes Placeholder 2"/>
+          <p:cNvSpPr>
+            <a:spLocks noGrp="1"/>
+          </p:cNvSpPr>
+          <p:nvPr>
+            <p:ph type="body" idx="1"/>
+          </p:nvPr>
+        </p:nvSpPr>
+        <p:spPr/>
+        <p:txBody>
+          <a:bodyPr/>
+          <a:lstStyle/>
+          <a:p>
+            <a:r>
+              <a:rPr lang="en-US" dirty="0"/>
+              <a:t/>
+            </a:r>
+            <a:endParaRPr lang="en-US" dirty="0"/>
+          </a:p>
+        </p:txBody>
+      </p:sp>
+      <p:sp>
+        <p:nvSpPr>
+          <p:cNvPr id="4" name="Slide Number Placeholder 3"/>
+          <p:cNvSpPr>
+            <a:spLocks noGrp="1"/>
+          </p:cNvSpPr>
+          <p:nvPr>
+            <p:ph type="sldNum" sz="quarter" idx="10"/>
+          </p:nvPr>
+        </p:nvSpPr>
+        <p:spPr/>
+        <p:txBody>
+          <a:bodyPr/>
+          <a:lstStyle/>
+          <a:p>
+            <a:fld id="{F7021451-1387-4CA6-816F-3879F97B5CBC}" type="slidenum">
+              <a:rPr lang="en-US"/>
+              <a:t>24</a:t>
             </a:fld>
             <a:endParaRPr lang="en-US"/>
           </a:p>
@@ -3093,7 +3182,7 @@
                 <a:ea typeface="Courier New" pitchFamily="34" charset="-122"/>
                 <a:cs typeface="Courier New" pitchFamily="34" charset="-120"/>
               </a:rPr>
-              <a:t>10 / 22   Smart-RUDP</a:t>
+              <a:t>10 / 23   Smart-RUDP</a:t>
             </a:r>
             <a:endParaRPr lang="en-US" sz="1000" dirty="0"/>
           </a:p>
@@ -3290,7 +3379,7 @@
                 <a:ea typeface="Courier New" pitchFamily="34" charset="-122"/>
                 <a:cs typeface="Courier New" pitchFamily="34" charset="-120"/>
               </a:rPr>
-              <a:t>11 / 22   Smart-RUDP</a:t>
+              <a:t>11 / 23   Smart-RUDP</a:t>
             </a:r>
             <a:endParaRPr lang="en-US" sz="1000" dirty="0"/>
           </a:p>
@@ -4120,7 +4209,7 @@
                 <a:ea typeface="Courier New" pitchFamily="34" charset="-122"/>
                 <a:cs typeface="Courier New" pitchFamily="34" charset="-120"/>
               </a:rPr>
-              <a:t>12 / 22   Smart-RUDP</a:t>
+              <a:t>12 / 23   Smart-RUDP</a:t>
             </a:r>
             <a:endParaRPr lang="en-US" sz="1000" dirty="0"/>
           </a:p>
@@ -4417,7 +4506,7 @@
                 <a:ea typeface="Courier New" pitchFamily="34" charset="-122"/>
                 <a:cs typeface="Courier New" pitchFamily="34" charset="-120"/>
               </a:rPr>
-              <a:t>13 / 22   Smart-RUDP</a:t>
+              <a:t>13 / 23   Smart-RUDP</a:t>
             </a:r>
             <a:endParaRPr lang="en-US" sz="1000" dirty="0"/>
           </a:p>
@@ -4717,7 +4806,7 @@
                 <a:ea typeface="Courier New" pitchFamily="34" charset="-122"/>
                 <a:cs typeface="Courier New" pitchFamily="34" charset="-120"/>
               </a:rPr>
-              <a:t>14 / 22   Smart-RUDP</a:t>
+              <a:t>14 / 23   Smart-RUDP</a:t>
             </a:r>
             <a:endParaRPr lang="en-US" sz="1000" dirty="0"/>
           </a:p>
@@ -5101,7 +5190,7 @@
                 <a:ea typeface="Courier New" pitchFamily="34" charset="-122"/>
                 <a:cs typeface="Courier New" pitchFamily="34" charset="-120"/>
               </a:rPr>
-              <a:t>15 / 22   Smart-RUDP</a:t>
+              <a:t>15 / 23   Smart-RUDP</a:t>
             </a:r>
             <a:endParaRPr lang="en-US" sz="1000" dirty="0"/>
           </a:p>
@@ -5559,7 +5648,7 @@
                 <a:ea typeface="Courier New" pitchFamily="34" charset="-122"/>
                 <a:cs typeface="Courier New" pitchFamily="34" charset="-120"/>
               </a:rPr>
-              <a:t>16 / 22   Smart-RUDP</a:t>
+              <a:t>16 / 23   Smart-RUDP</a:t>
             </a:r>
             <a:endParaRPr lang="en-US" sz="1000" dirty="0"/>
           </a:p>
@@ -6244,7 +6333,7 @@
                 <a:ea typeface="Courier New" pitchFamily="34" charset="-122"/>
                 <a:cs typeface="Courier New" pitchFamily="34" charset="-120"/>
               </a:rPr>
-              <a:t>17 / 22   Smart-RUDP</a:t>
+              <a:t>17 / 23   Smart-RUDP</a:t>
             </a:r>
             <a:endParaRPr lang="en-US" sz="1000" dirty="0"/>
           </a:p>
@@ -6484,7 +6573,7 @@
                 <a:ea typeface="Courier New" pitchFamily="34" charset="-122"/>
                 <a:cs typeface="Courier New" pitchFamily="34" charset="-120"/>
               </a:rPr>
-              <a:t>18 / 22   Smart-RUDP</a:t>
+              <a:t>18 / 23   Smart-RUDP</a:t>
             </a:r>
             <a:endParaRPr lang="en-US" sz="1000" dirty="0"/>
           </a:p>
@@ -6724,7 +6813,7 @@
                 <a:ea typeface="Courier New" pitchFamily="34" charset="-122"/>
                 <a:cs typeface="Courier New" pitchFamily="34" charset="-120"/>
               </a:rPr>
-              <a:t>19 / 22   Smart-RUDP</a:t>
+              <a:t>19 / 23   Smart-RUDP</a:t>
             </a:r>
             <a:endParaRPr lang="en-US" sz="1000" dirty="0"/>
           </a:p>
@@ -6946,7 +7035,7 @@
                 <a:ea typeface="Courier New" pitchFamily="34" charset="-122"/>
                 <a:cs typeface="Courier New" pitchFamily="34" charset="-120"/>
               </a:rPr>
-              <a:t>2 / 22   Smart-RUDP</a:t>
+              <a:t>2 / 23   Smart-RUDP</a:t>
             </a:r>
             <a:endParaRPr lang="en-US" sz="1000" dirty="0"/>
           </a:p>
@@ -7340,7 +7429,7 @@
                 <a:ea typeface="Courier New" pitchFamily="34" charset="-122"/>
                 <a:cs typeface="Courier New" pitchFamily="34" charset="-120"/>
               </a:rPr>
-              <a:t>20 / 22   Smart-RUDP</a:t>
+              <a:t>20 / 23   Smart-RUDP</a:t>
             </a:r>
             <a:endParaRPr lang="en-US" sz="1000" dirty="0"/>
           </a:p>
@@ -7625,7 +7714,7 @@
                 <a:ea typeface="Courier New" pitchFamily="34" charset="-122"/>
                 <a:cs typeface="Courier New" pitchFamily="34" charset="-120"/>
               </a:rPr>
-              <a:t>Learnings and future work</a:t>
+              <a:t>More evidence: baselines, SACK, reordering</a:t>
             </a:r>
             <a:endParaRPr lang="en-US" sz="3000" dirty="0"/>
           </a:p>
@@ -7664,47 +7753,1495 @@
                 <a:ea typeface="Courier New" pitchFamily="34" charset="-122"/>
                 <a:cs typeface="Courier New" pitchFamily="34" charset="-120"/>
               </a:rPr>
-              <a:t>21 / 22   Smart-RUDP</a:t>
+              <a:t>21 / 23   Smart-RUDP</a:t>
             </a:r>
             <a:endParaRPr lang="en-US" sz="1000" dirty="0"/>
           </a:p>
         </p:txBody>
       </p:sp>
-      <p:sp>
-        <p:nvSpPr>
-          <p:cNvPr id="4" name="Shape 2"/>
-          <p:cNvSpPr/>
-          <p:nvPr/>
-        </p:nvSpPr>
-        <p:spPr>
-          <a:xfrm>
-            <a:off x="548640" y="1371600"/>
+      <p:graphicFrame>
+        <p:nvGraphicFramePr>
+          <p:cNvPr id="22" name="Table 0"/>
+          <p:cNvGraphicFramePr>
+            <a:graphicFrameLocks noGrp="1"/>
+          </p:cNvGraphicFramePr>
+          <p:nvPr>
+            <p:extLst>
+              <p:ext uri="{D42A27DB-BD31-4B8C-83A1-F6EECF244321}">
+                <p14:modId xmlns:p14="http://schemas.microsoft.com/office/powerpoint/2010/main" val="1579011935"/>
+              </p:ext>
+            </p:extLst>
+          </p:nvPr>
+        </p:nvGraphicFramePr>
+        <p:xfrm>
+          <a:off x="548640" y="1188720"/>
+          <a:ext cx="5486400" cy="914400"/>
+        </p:xfrm>
+        <a:graphic>
+          <a:graphicData uri="http://schemas.openxmlformats.org/drawingml/2006/table">
+            <a:tbl>
+              <a:tblPr/>
+              <a:tblGrid>
+                <a:gridCol w="2926080"/>
+                <a:gridCol w="1371600"/>
+                <a:gridCol w="1188720"/>
+              </a:tblGrid>
+              <a:tr h="384048">
+                <a:tc>
+                  <a:txBody>
+                    <a:bodyPr/>
+                    <a:lstStyle/>
+                    <a:p>
+                      <a:pPr indent="0" marL="0">
+                        <a:buNone/>
+                      </a:pPr>
+                      <a:r>
+                        <a:rPr lang="en-US" sz="1300" b="1" dirty="0">
+                          <a:solidFill>
+                            <a:srgbClr val="0B0F14"/>
+                          </a:solidFill>
+                          <a:latin typeface="Courier New" pitchFamily="34" charset="0"/>
+                          <a:ea typeface="Courier New" pitchFamily="34" charset="-122"/>
+                          <a:cs typeface="Courier New" pitchFamily="34" charset="-120"/>
+                        </a:rPr>
+                        <a:t>48 unseen paths (simulated)</a:t>
+                      </a:r>
+                      <a:endParaRPr lang="en-US" sz="1300" dirty="0">
+                        <a:latin typeface="Courier New" charset="0"/>
+                        <a:ea typeface="Courier New" charset="0"/>
+                        <a:cs typeface="Courier New" charset="0"/>
+                      </a:endParaRPr>
+                    </a:p>
+                  </a:txBody>
+                  <a:tcPr marL="91440" marR="91440" marT="45720" marB="45720">
+                    <a:lnL w="12700" cap="flat" cmpd="sng" algn="ctr">
+                      <a:solidFill>
+                        <a:srgbClr val="2A3441"/>
+                      </a:solidFill>
+                      <a:prstDash val="solid"/>
+                      <a:round/>
+                      <a:headEnd type="none" w="med" len="med"/>
+                      <a:tailEnd type="none" w="med" len="med"/>
+                    </a:lnL>
+                    <a:lnR w="12700" cap="flat" cmpd="sng" algn="ctr">
+                      <a:solidFill>
+                        <a:srgbClr val="2A3441"/>
+                      </a:solidFill>
+                      <a:prstDash val="solid"/>
+                      <a:round/>
+                      <a:headEnd type="none" w="med" len="med"/>
+                      <a:tailEnd type="none" w="med" len="med"/>
+                    </a:lnR>
+                    <a:lnT w="12700" cap="flat" cmpd="sng" algn="ctr">
+                      <a:solidFill>
+                        <a:srgbClr val="2A3441"/>
+                      </a:solidFill>
+                      <a:prstDash val="solid"/>
+                      <a:round/>
+                      <a:headEnd type="none" w="med" len="med"/>
+                      <a:tailEnd type="none" w="med" len="med"/>
+                    </a:lnT>
+                    <a:lnB w="12700" cap="flat" cmpd="sng" algn="ctr">
+                      <a:solidFill>
+                        <a:srgbClr val="2A3441"/>
+                      </a:solidFill>
+                      <a:prstDash val="solid"/>
+                      <a:round/>
+                      <a:headEnd type="none" w="med" len="med"/>
+                      <a:tailEnd type="none" w="med" len="med"/>
+                    </a:lnB>
+                    <a:solidFill>
+                      <a:srgbClr val="39FF88"/>
+                    </a:solidFill>
+                  </a:tcPr>
+                </a:tc>
+                <a:tc>
+                  <a:txBody>
+                    <a:bodyPr/>
+                    <a:lstStyle/>
+                    <a:p>
+                      <a:pPr indent="0" marL="0">
+                        <a:buNone/>
+                      </a:pPr>
+                      <a:r>
+                        <a:rPr lang="en-US" sz="1300" b="1" dirty="0">
+                          <a:solidFill>
+                            <a:srgbClr val="0B0F14"/>
+                          </a:solidFill>
+                          <a:latin typeface="Courier New" pitchFamily="34" charset="0"/>
+                          <a:ea typeface="Courier New" pitchFamily="34" charset="-122"/>
+                          <a:cs typeface="Courier New" pitchFamily="34" charset="-120"/>
+                        </a:rPr>
+                        <a:t>Mean</a:t>
+                      </a:r>
+                      <a:endParaRPr lang="en-US" sz="1300" dirty="0">
+                        <a:latin typeface="Courier New" charset="0"/>
+                        <a:ea typeface="Courier New" charset="0"/>
+                        <a:cs typeface="Courier New" charset="0"/>
+                      </a:endParaRPr>
+                    </a:p>
+                  </a:txBody>
+                  <a:tcPr marL="91440" marR="91440" marT="45720" marB="45720">
+                    <a:lnL w="12700" cap="flat" cmpd="sng" algn="ctr">
+                      <a:solidFill>
+                        <a:srgbClr val="2A3441"/>
+                      </a:solidFill>
+                      <a:prstDash val="solid"/>
+                      <a:round/>
+                      <a:headEnd type="none" w="med" len="med"/>
+                      <a:tailEnd type="none" w="med" len="med"/>
+                    </a:lnL>
+                    <a:lnR w="12700" cap="flat" cmpd="sng" algn="ctr">
+                      <a:solidFill>
+                        <a:srgbClr val="2A3441"/>
+                      </a:solidFill>
+                      <a:prstDash val="solid"/>
+                      <a:round/>
+                      <a:headEnd type="none" w="med" len="med"/>
+                      <a:tailEnd type="none" w="med" len="med"/>
+                    </a:lnR>
+                    <a:lnT w="12700" cap="flat" cmpd="sng" algn="ctr">
+                      <a:solidFill>
+                        <a:srgbClr val="2A3441"/>
+                      </a:solidFill>
+                      <a:prstDash val="solid"/>
+                      <a:round/>
+                      <a:headEnd type="none" w="med" len="med"/>
+                      <a:tailEnd type="none" w="med" len="med"/>
+                    </a:lnT>
+                    <a:lnB w="12700" cap="flat" cmpd="sng" algn="ctr">
+                      <a:solidFill>
+                        <a:srgbClr val="2A3441"/>
+                      </a:solidFill>
+                      <a:prstDash val="solid"/>
+                      <a:round/>
+                      <a:headEnd type="none" w="med" len="med"/>
+                      <a:tailEnd type="none" w="med" len="med"/>
+                    </a:lnB>
+                    <a:solidFill>
+                      <a:srgbClr val="39FF88"/>
+                    </a:solidFill>
+                  </a:tcPr>
+                </a:tc>
+                <a:tc>
+                  <a:txBody>
+                    <a:bodyPr/>
+                    <a:lstStyle/>
+                    <a:p>
+                      <a:pPr indent="0" marL="0">
+                        <a:buNone/>
+                      </a:pPr>
+                      <a:r>
+                        <a:rPr lang="en-US" sz="1300" b="1" dirty="0">
+                          <a:solidFill>
+                            <a:srgbClr val="0B0F14"/>
+                          </a:solidFill>
+                          <a:latin typeface="Courier New" pitchFamily="34" charset="0"/>
+                          <a:ea typeface="Courier New" pitchFamily="34" charset="-122"/>
+                          <a:cs typeface="Courier New" pitchFamily="34" charset="-120"/>
+                        </a:rPr>
+                        <a:t>Median</a:t>
+                      </a:r>
+                      <a:endParaRPr lang="en-US" sz="1300" dirty="0">
+                        <a:latin typeface="Courier New" charset="0"/>
+                        <a:ea typeface="Courier New" charset="0"/>
+                        <a:cs typeface="Courier New" charset="0"/>
+                      </a:endParaRPr>
+                    </a:p>
+                  </a:txBody>
+                  <a:tcPr marL="91440" marR="91440" marT="45720" marB="45720">
+                    <a:lnL w="12700" cap="flat" cmpd="sng" algn="ctr">
+                      <a:solidFill>
+                        <a:srgbClr val="2A3441"/>
+                      </a:solidFill>
+                      <a:prstDash val="solid"/>
+                      <a:round/>
+                      <a:headEnd type="none" w="med" len="med"/>
+                      <a:tailEnd type="none" w="med" len="med"/>
+                    </a:lnL>
+                    <a:lnR w="12700" cap="flat" cmpd="sng" algn="ctr">
+                      <a:solidFill>
+                        <a:srgbClr val="2A3441"/>
+                      </a:solidFill>
+                      <a:prstDash val="solid"/>
+                      <a:round/>
+                      <a:headEnd type="none" w="med" len="med"/>
+                      <a:tailEnd type="none" w="med" len="med"/>
+                    </a:lnR>
+                    <a:lnT w="12700" cap="flat" cmpd="sng" algn="ctr">
+                      <a:solidFill>
+                        <a:srgbClr val="2A3441"/>
+                      </a:solidFill>
+                      <a:prstDash val="solid"/>
+                      <a:round/>
+                      <a:headEnd type="none" w="med" len="med"/>
+                      <a:tailEnd type="none" w="med" len="med"/>
+                    </a:lnT>
+                    <a:lnB w="12700" cap="flat" cmpd="sng" algn="ctr">
+                      <a:solidFill>
+                        <a:srgbClr val="2A3441"/>
+                      </a:solidFill>
+                      <a:prstDash val="solid"/>
+                      <a:round/>
+                      <a:headEnd type="none" w="med" len="med"/>
+                      <a:tailEnd type="none" w="med" len="med"/>
+                    </a:lnB>
+                    <a:solidFill>
+                      <a:srgbClr val="39FF88"/>
+                    </a:solidFill>
+                  </a:tcPr>
+                </a:tc>
+              </a:tr>
+              <a:tr h="384048">
+                <a:tc>
+                  <a:txBody>
+                    <a:bodyPr/>
+                    <a:lstStyle/>
+                    <a:p>
+                      <a:pPr indent="0" marL="0">
+                        <a:buNone/>
+                      </a:pPr>
+                      <a:r>
+                        <a:rPr lang="en-US" sz="1300" dirty="0">
+                          <a:solidFill>
+                            <a:srgbClr val="E6EDF3"/>
+                          </a:solidFill>
+                          <a:latin typeface="Calibri" pitchFamily="34" charset="0"/>
+                          <a:ea typeface="Calibri" pitchFamily="34" charset="-122"/>
+                          <a:cs typeface="Calibri" pitchFamily="34" charset="-120"/>
+                        </a:rPr>
+                        <a:t>Plain UDP</a:t>
+                      </a:r>
+                      <a:endParaRPr lang="en-US" sz="1300" dirty="0">
+                        <a:latin typeface="Calibri" charset="0"/>
+                        <a:ea typeface="Calibri" charset="0"/>
+                        <a:cs typeface="Calibri" charset="0"/>
+                      </a:endParaRPr>
+                    </a:p>
+                  </a:txBody>
+                  <a:tcPr marL="91440" marR="91440" marT="45720" marB="45720">
+                    <a:lnL w="12700" cap="flat" cmpd="sng" algn="ctr">
+                      <a:solidFill>
+                        <a:srgbClr val="2A3441"/>
+                      </a:solidFill>
+                      <a:prstDash val="solid"/>
+                      <a:round/>
+                      <a:headEnd type="none" w="med" len="med"/>
+                      <a:tailEnd type="none" w="med" len="med"/>
+                    </a:lnL>
+                    <a:lnR w="12700" cap="flat" cmpd="sng" algn="ctr">
+                      <a:solidFill>
+                        <a:srgbClr val="2A3441"/>
+                      </a:solidFill>
+                      <a:prstDash val="solid"/>
+                      <a:round/>
+                      <a:headEnd type="none" w="med" len="med"/>
+                      <a:tailEnd type="none" w="med" len="med"/>
+                    </a:lnR>
+                    <a:lnT w="12700" cap="flat" cmpd="sng" algn="ctr">
+                      <a:solidFill>
+                        <a:srgbClr val="2A3441"/>
+                      </a:solidFill>
+                      <a:prstDash val="solid"/>
+                      <a:round/>
+                      <a:headEnd type="none" w="med" len="med"/>
+                      <a:tailEnd type="none" w="med" len="med"/>
+                    </a:lnT>
+                    <a:lnB w="12700" cap="flat" cmpd="sng" algn="ctr">
+                      <a:solidFill>
+                        <a:srgbClr val="2A3441"/>
+                      </a:solidFill>
+                      <a:prstDash val="solid"/>
+                      <a:round/>
+                      <a:headEnd type="none" w="med" len="med"/>
+                      <a:tailEnd type="none" w="med" len="med"/>
+                    </a:lnB>
+                    <a:solidFill>
+                      <a:srgbClr val="141B24"/>
+                    </a:solidFill>
+                  </a:tcPr>
+                </a:tc>
+                <a:tc>
+                  <a:txBody>
+                    <a:bodyPr/>
+                    <a:lstStyle/>
+                    <a:p>
+                      <a:pPr indent="0" marL="0">
+                        <a:buNone/>
+                      </a:pPr>
+                      <a:r>
+                        <a:rPr lang="en-US" sz="1300" dirty="0">
+                          <a:solidFill>
+                            <a:srgbClr val="E6EDF3"/>
+                          </a:solidFill>
+                          <a:latin typeface="Calibri" pitchFamily="34" charset="0"/>
+                          <a:ea typeface="Calibri" pitchFamily="34" charset="-122"/>
+                          <a:cs typeface="Calibri" pitchFamily="34" charset="-120"/>
+                        </a:rPr>
+                        <a:t>68% delivered</a:t>
+                      </a:r>
+                      <a:endParaRPr lang="en-US" sz="1300" dirty="0">
+                        <a:latin typeface="Calibri" charset="0"/>
+                        <a:ea typeface="Calibri" charset="0"/>
+                        <a:cs typeface="Calibri" charset="0"/>
+                      </a:endParaRPr>
+                    </a:p>
+                  </a:txBody>
+                  <a:tcPr marL="91440" marR="91440" marT="45720" marB="45720">
+                    <a:lnL w="12700" cap="flat" cmpd="sng" algn="ctr">
+                      <a:solidFill>
+                        <a:srgbClr val="2A3441"/>
+                      </a:solidFill>
+                      <a:prstDash val="solid"/>
+                      <a:round/>
+                      <a:headEnd type="none" w="med" len="med"/>
+                      <a:tailEnd type="none" w="med" len="med"/>
+                    </a:lnL>
+                    <a:lnR w="12700" cap="flat" cmpd="sng" algn="ctr">
+                      <a:solidFill>
+                        <a:srgbClr val="2A3441"/>
+                      </a:solidFill>
+                      <a:prstDash val="solid"/>
+                      <a:round/>
+                      <a:headEnd type="none" w="med" len="med"/>
+                      <a:tailEnd type="none" w="med" len="med"/>
+                    </a:lnR>
+                    <a:lnT w="12700" cap="flat" cmpd="sng" algn="ctr">
+                      <a:solidFill>
+                        <a:srgbClr val="2A3441"/>
+                      </a:solidFill>
+                      <a:prstDash val="solid"/>
+                      <a:round/>
+                      <a:headEnd type="none" w="med" len="med"/>
+                      <a:tailEnd type="none" w="med" len="med"/>
+                    </a:lnT>
+                    <a:lnB w="12700" cap="flat" cmpd="sng" algn="ctr">
+                      <a:solidFill>
+                        <a:srgbClr val="2A3441"/>
+                      </a:solidFill>
+                      <a:prstDash val="solid"/>
+                      <a:round/>
+                      <a:headEnd type="none" w="med" len="med"/>
+                      <a:tailEnd type="none" w="med" len="med"/>
+                    </a:lnB>
+                    <a:solidFill>
+                      <a:srgbClr val="141B24"/>
+                    </a:solidFill>
+                  </a:tcPr>
+                </a:tc>
+                <a:tc>
+                  <a:txBody>
+                    <a:bodyPr/>
+                    <a:lstStyle/>
+                    <a:p>
+                      <a:pPr indent="0" marL="0">
+                        <a:buNone/>
+                      </a:pPr>
+                      <a:r>
+                        <a:rPr lang="en-US" sz="1300" dirty="0">
+                          <a:solidFill>
+                            <a:srgbClr val="E6EDF3"/>
+                          </a:solidFill>
+                          <a:latin typeface="Calibri" pitchFamily="34" charset="0"/>
+                          <a:ea typeface="Calibri" pitchFamily="34" charset="-122"/>
+                          <a:cs typeface="Calibri" pitchFamily="34" charset="-120"/>
+                        </a:rPr>
+                        <a:t>-</a:t>
+                      </a:r>
+                      <a:endParaRPr lang="en-US" sz="1300" dirty="0">
+                        <a:latin typeface="Calibri" charset="0"/>
+                        <a:ea typeface="Calibri" charset="0"/>
+                        <a:cs typeface="Calibri" charset="0"/>
+                      </a:endParaRPr>
+                    </a:p>
+                  </a:txBody>
+                  <a:tcPr marL="91440" marR="91440" marT="45720" marB="45720">
+                    <a:lnL w="12700" cap="flat" cmpd="sng" algn="ctr">
+                      <a:solidFill>
+                        <a:srgbClr val="2A3441"/>
+                      </a:solidFill>
+                      <a:prstDash val="solid"/>
+                      <a:round/>
+                      <a:headEnd type="none" w="med" len="med"/>
+                      <a:tailEnd type="none" w="med" len="med"/>
+                    </a:lnL>
+                    <a:lnR w="12700" cap="flat" cmpd="sng" algn="ctr">
+                      <a:solidFill>
+                        <a:srgbClr val="2A3441"/>
+                      </a:solidFill>
+                      <a:prstDash val="solid"/>
+                      <a:round/>
+                      <a:headEnd type="none" w="med" len="med"/>
+                      <a:tailEnd type="none" w="med" len="med"/>
+                    </a:lnR>
+                    <a:lnT w="12700" cap="flat" cmpd="sng" algn="ctr">
+                      <a:solidFill>
+                        <a:srgbClr val="2A3441"/>
+                      </a:solidFill>
+                      <a:prstDash val="solid"/>
+                      <a:round/>
+                      <a:headEnd type="none" w="med" len="med"/>
+                      <a:tailEnd type="none" w="med" len="med"/>
+                    </a:lnT>
+                    <a:lnB w="12700" cap="flat" cmpd="sng" algn="ctr">
+                      <a:solidFill>
+                        <a:srgbClr val="2A3441"/>
+                      </a:solidFill>
+                      <a:prstDash val="solid"/>
+                      <a:round/>
+                      <a:headEnd type="none" w="med" len="med"/>
+                      <a:tailEnd type="none" w="med" len="med"/>
+                    </a:lnB>
+                    <a:solidFill>
+                      <a:srgbClr val="141B24"/>
+                    </a:solidFill>
+                  </a:tcPr>
+                </a:tc>
+              </a:tr>
+              <a:tr h="384048">
+                <a:tc>
+                  <a:txBody>
+                    <a:bodyPr/>
+                    <a:lstStyle/>
+                    <a:p>
+                      <a:pPr indent="0" marL="0">
+                        <a:buNone/>
+                      </a:pPr>
+                      <a:r>
+                        <a:rPr lang="en-US" sz="1300" dirty="0">
+                          <a:solidFill>
+                            <a:srgbClr val="E6EDF3"/>
+                          </a:solidFill>
+                          <a:latin typeface="Calibri" pitchFamily="34" charset="0"/>
+                          <a:ea typeface="Calibri" pitchFamily="34" charset="-122"/>
+                          <a:cs typeface="Calibri" pitchFamily="34" charset="-120"/>
+                        </a:rPr>
+                        <a:t>TCP model (selective ACK)</a:t>
+                      </a:r>
+                      <a:endParaRPr lang="en-US" sz="1300" dirty="0">
+                        <a:latin typeface="Calibri" charset="0"/>
+                        <a:ea typeface="Calibri" charset="0"/>
+                        <a:cs typeface="Calibri" charset="0"/>
+                      </a:endParaRPr>
+                    </a:p>
+                  </a:txBody>
+                  <a:tcPr marL="91440" marR="91440" marT="45720" marB="45720">
+                    <a:lnL w="12700" cap="flat" cmpd="sng" algn="ctr">
+                      <a:solidFill>
+                        <a:srgbClr val="2A3441"/>
+                      </a:solidFill>
+                      <a:prstDash val="solid"/>
+                      <a:round/>
+                      <a:headEnd type="none" w="med" len="med"/>
+                      <a:tailEnd type="none" w="med" len="med"/>
+                    </a:lnL>
+                    <a:lnR w="12700" cap="flat" cmpd="sng" algn="ctr">
+                      <a:solidFill>
+                        <a:srgbClr val="2A3441"/>
+                      </a:solidFill>
+                      <a:prstDash val="solid"/>
+                      <a:round/>
+                      <a:headEnd type="none" w="med" len="med"/>
+                      <a:tailEnd type="none" w="med" len="med"/>
+                    </a:lnR>
+                    <a:lnT w="12700" cap="flat" cmpd="sng" algn="ctr">
+                      <a:solidFill>
+                        <a:srgbClr val="2A3441"/>
+                      </a:solidFill>
+                      <a:prstDash val="solid"/>
+                      <a:round/>
+                      <a:headEnd type="none" w="med" len="med"/>
+                      <a:tailEnd type="none" w="med" len="med"/>
+                    </a:lnT>
+                    <a:lnB w="12700" cap="flat" cmpd="sng" algn="ctr">
+                      <a:solidFill>
+                        <a:srgbClr val="2A3441"/>
+                      </a:solidFill>
+                      <a:prstDash val="solid"/>
+                      <a:round/>
+                      <a:headEnd type="none" w="med" len="med"/>
+                      <a:tailEnd type="none" w="med" len="med"/>
+                    </a:lnB>
+                    <a:solidFill>
+                      <a:srgbClr val="141B24"/>
+                    </a:solidFill>
+                  </a:tcPr>
+                </a:tc>
+                <a:tc>
+                  <a:txBody>
+                    <a:bodyPr/>
+                    <a:lstStyle/>
+                    <a:p>
+                      <a:pPr indent="0" marL="0">
+                        <a:buNone/>
+                      </a:pPr>
+                      <a:r>
+                        <a:rPr lang="en-US" sz="1300" dirty="0">
+                          <a:solidFill>
+                            <a:srgbClr val="E6EDF3"/>
+                          </a:solidFill>
+                          <a:latin typeface="Calibri" pitchFamily="34" charset="0"/>
+                          <a:ea typeface="Calibri" pitchFamily="34" charset="-122"/>
+                          <a:cs typeface="Calibri" pitchFamily="34" charset="-120"/>
+                        </a:rPr>
+                        <a:t>4.56 s</a:t>
+                      </a:r>
+                      <a:endParaRPr lang="en-US" sz="1300" dirty="0">
+                        <a:latin typeface="Calibri" charset="0"/>
+                        <a:ea typeface="Calibri" charset="0"/>
+                        <a:cs typeface="Calibri" charset="0"/>
+                      </a:endParaRPr>
+                    </a:p>
+                  </a:txBody>
+                  <a:tcPr marL="91440" marR="91440" marT="45720" marB="45720">
+                    <a:lnL w="12700" cap="flat" cmpd="sng" algn="ctr">
+                      <a:solidFill>
+                        <a:srgbClr val="2A3441"/>
+                      </a:solidFill>
+                      <a:prstDash val="solid"/>
+                      <a:round/>
+                      <a:headEnd type="none" w="med" len="med"/>
+                      <a:tailEnd type="none" w="med" len="med"/>
+                    </a:lnL>
+                    <a:lnR w="12700" cap="flat" cmpd="sng" algn="ctr">
+                      <a:solidFill>
+                        <a:srgbClr val="2A3441"/>
+                      </a:solidFill>
+                      <a:prstDash val="solid"/>
+                      <a:round/>
+                      <a:headEnd type="none" w="med" len="med"/>
+                      <a:tailEnd type="none" w="med" len="med"/>
+                    </a:lnR>
+                    <a:lnT w="12700" cap="flat" cmpd="sng" algn="ctr">
+                      <a:solidFill>
+                        <a:srgbClr val="2A3441"/>
+                      </a:solidFill>
+                      <a:prstDash val="solid"/>
+                      <a:round/>
+                      <a:headEnd type="none" w="med" len="med"/>
+                      <a:tailEnd type="none" w="med" len="med"/>
+                    </a:lnT>
+                    <a:lnB w="12700" cap="flat" cmpd="sng" algn="ctr">
+                      <a:solidFill>
+                        <a:srgbClr val="2A3441"/>
+                      </a:solidFill>
+                      <a:prstDash val="solid"/>
+                      <a:round/>
+                      <a:headEnd type="none" w="med" len="med"/>
+                      <a:tailEnd type="none" w="med" len="med"/>
+                    </a:lnB>
+                    <a:solidFill>
+                      <a:srgbClr val="141B24"/>
+                    </a:solidFill>
+                  </a:tcPr>
+                </a:tc>
+                <a:tc>
+                  <a:txBody>
+                    <a:bodyPr/>
+                    <a:lstStyle/>
+                    <a:p>
+                      <a:pPr indent="0" marL="0">
+                        <a:buNone/>
+                      </a:pPr>
+                      <a:r>
+                        <a:rPr lang="en-US" sz="1300" dirty="0">
+                          <a:solidFill>
+                            <a:srgbClr val="E6EDF3"/>
+                          </a:solidFill>
+                          <a:latin typeface="Calibri" pitchFamily="34" charset="0"/>
+                          <a:ea typeface="Calibri" pitchFamily="34" charset="-122"/>
+                          <a:cs typeface="Calibri" pitchFamily="34" charset="-120"/>
+                        </a:rPr>
+                        <a:t>1.48 s</a:t>
+                      </a:r>
+                      <a:endParaRPr lang="en-US" sz="1300" dirty="0">
+                        <a:latin typeface="Calibri" charset="0"/>
+                        <a:ea typeface="Calibri" charset="0"/>
+                        <a:cs typeface="Calibri" charset="0"/>
+                      </a:endParaRPr>
+                    </a:p>
+                  </a:txBody>
+                  <a:tcPr marL="91440" marR="91440" marT="45720" marB="45720">
+                    <a:lnL w="12700" cap="flat" cmpd="sng" algn="ctr">
+                      <a:solidFill>
+                        <a:srgbClr val="2A3441"/>
+                      </a:solidFill>
+                      <a:prstDash val="solid"/>
+                      <a:round/>
+                      <a:headEnd type="none" w="med" len="med"/>
+                      <a:tailEnd type="none" w="med" len="med"/>
+                    </a:lnL>
+                    <a:lnR w="12700" cap="flat" cmpd="sng" algn="ctr">
+                      <a:solidFill>
+                        <a:srgbClr val="2A3441"/>
+                      </a:solidFill>
+                      <a:prstDash val="solid"/>
+                      <a:round/>
+                      <a:headEnd type="none" w="med" len="med"/>
+                      <a:tailEnd type="none" w="med" len="med"/>
+                    </a:lnR>
+                    <a:lnT w="12700" cap="flat" cmpd="sng" algn="ctr">
+                      <a:solidFill>
+                        <a:srgbClr val="2A3441"/>
+                      </a:solidFill>
+                      <a:prstDash val="solid"/>
+                      <a:round/>
+                      <a:headEnd type="none" w="med" len="med"/>
+                      <a:tailEnd type="none" w="med" len="med"/>
+                    </a:lnT>
+                    <a:lnB w="12700" cap="flat" cmpd="sng" algn="ctr">
+                      <a:solidFill>
+                        <a:srgbClr val="2A3441"/>
+                      </a:solidFill>
+                      <a:prstDash val="solid"/>
+                      <a:round/>
+                      <a:headEnd type="none" w="med" len="med"/>
+                      <a:tailEnd type="none" w="med" len="med"/>
+                    </a:lnB>
+                    <a:solidFill>
+                      <a:srgbClr val="141B24"/>
+                    </a:solidFill>
+                  </a:tcPr>
+                </a:tc>
+              </a:tr>
+              <a:tr h="384048">
+                <a:tc>
+                  <a:txBody>
+                    <a:bodyPr/>
+                    <a:lstStyle/>
+                    <a:p>
+                      <a:pPr indent="0" marL="0">
+                        <a:buNone/>
+                      </a:pPr>
+                      <a:r>
+                        <a:rPr lang="en-US" sz="1300" dirty="0">
+                          <a:solidFill>
+                            <a:srgbClr val="E6EDF3"/>
+                          </a:solidFill>
+                          <a:latin typeface="Calibri" pitchFamily="34" charset="0"/>
+                          <a:ea typeface="Calibri" pitchFamily="34" charset="-122"/>
+                          <a:cs typeface="Calibri" pitchFamily="34" charset="-120"/>
+                        </a:rPr>
+                        <a:t>RUDP fixed window</a:t>
+                      </a:r>
+                      <a:endParaRPr lang="en-US" sz="1300" dirty="0">
+                        <a:latin typeface="Calibri" charset="0"/>
+                        <a:ea typeface="Calibri" charset="0"/>
+                        <a:cs typeface="Calibri" charset="0"/>
+                      </a:endParaRPr>
+                    </a:p>
+                  </a:txBody>
+                  <a:tcPr marL="91440" marR="91440" marT="45720" marB="45720">
+                    <a:lnL w="12700" cap="flat" cmpd="sng" algn="ctr">
+                      <a:solidFill>
+                        <a:srgbClr val="2A3441"/>
+                      </a:solidFill>
+                      <a:prstDash val="solid"/>
+                      <a:round/>
+                      <a:headEnd type="none" w="med" len="med"/>
+                      <a:tailEnd type="none" w="med" len="med"/>
+                    </a:lnL>
+                    <a:lnR w="12700" cap="flat" cmpd="sng" algn="ctr">
+                      <a:solidFill>
+                        <a:srgbClr val="2A3441"/>
+                      </a:solidFill>
+                      <a:prstDash val="solid"/>
+                      <a:round/>
+                      <a:headEnd type="none" w="med" len="med"/>
+                      <a:tailEnd type="none" w="med" len="med"/>
+                    </a:lnR>
+                    <a:lnT w="12700" cap="flat" cmpd="sng" algn="ctr">
+                      <a:solidFill>
+                        <a:srgbClr val="2A3441"/>
+                      </a:solidFill>
+                      <a:prstDash val="solid"/>
+                      <a:round/>
+                      <a:headEnd type="none" w="med" len="med"/>
+                      <a:tailEnd type="none" w="med" len="med"/>
+                    </a:lnT>
+                    <a:lnB w="12700" cap="flat" cmpd="sng" algn="ctr">
+                      <a:solidFill>
+                        <a:srgbClr val="2A3441"/>
+                      </a:solidFill>
+                      <a:prstDash val="solid"/>
+                      <a:round/>
+                      <a:headEnd type="none" w="med" len="med"/>
+                      <a:tailEnd type="none" w="med" len="med"/>
+                    </a:lnB>
+                    <a:solidFill>
+                      <a:srgbClr val="141B24"/>
+                    </a:solidFill>
+                  </a:tcPr>
+                </a:tc>
+                <a:tc>
+                  <a:txBody>
+                    <a:bodyPr/>
+                    <a:lstStyle/>
+                    <a:p>
+                      <a:pPr indent="0" marL="0">
+                        <a:buNone/>
+                      </a:pPr>
+                      <a:r>
+                        <a:rPr lang="en-US" sz="1300" dirty="0">
+                          <a:solidFill>
+                            <a:srgbClr val="E6EDF3"/>
+                          </a:solidFill>
+                          <a:latin typeface="Calibri" pitchFamily="34" charset="0"/>
+                          <a:ea typeface="Calibri" pitchFamily="34" charset="-122"/>
+                          <a:cs typeface="Calibri" pitchFamily="34" charset="-120"/>
+                        </a:rPr>
+                        <a:t>3.88 s</a:t>
+                      </a:r>
+                      <a:endParaRPr lang="en-US" sz="1300" dirty="0">
+                        <a:latin typeface="Calibri" charset="0"/>
+                        <a:ea typeface="Calibri" charset="0"/>
+                        <a:cs typeface="Calibri" charset="0"/>
+                      </a:endParaRPr>
+                    </a:p>
+                  </a:txBody>
+                  <a:tcPr marL="91440" marR="91440" marT="45720" marB="45720">
+                    <a:lnL w="12700" cap="flat" cmpd="sng" algn="ctr">
+                      <a:solidFill>
+                        <a:srgbClr val="2A3441"/>
+                      </a:solidFill>
+                      <a:prstDash val="solid"/>
+                      <a:round/>
+                      <a:headEnd type="none" w="med" len="med"/>
+                      <a:tailEnd type="none" w="med" len="med"/>
+                    </a:lnL>
+                    <a:lnR w="12700" cap="flat" cmpd="sng" algn="ctr">
+                      <a:solidFill>
+                        <a:srgbClr val="2A3441"/>
+                      </a:solidFill>
+                      <a:prstDash val="solid"/>
+                      <a:round/>
+                      <a:headEnd type="none" w="med" len="med"/>
+                      <a:tailEnd type="none" w="med" len="med"/>
+                    </a:lnR>
+                    <a:lnT w="12700" cap="flat" cmpd="sng" algn="ctr">
+                      <a:solidFill>
+                        <a:srgbClr val="2A3441"/>
+                      </a:solidFill>
+                      <a:prstDash val="solid"/>
+                      <a:round/>
+                      <a:headEnd type="none" w="med" len="med"/>
+                      <a:tailEnd type="none" w="med" len="med"/>
+                    </a:lnT>
+                    <a:lnB w="12700" cap="flat" cmpd="sng" algn="ctr">
+                      <a:solidFill>
+                        <a:srgbClr val="2A3441"/>
+                      </a:solidFill>
+                      <a:prstDash val="solid"/>
+                      <a:round/>
+                      <a:headEnd type="none" w="med" len="med"/>
+                      <a:tailEnd type="none" w="med" len="med"/>
+                    </a:lnB>
+                    <a:solidFill>
+                      <a:srgbClr val="141B24"/>
+                    </a:solidFill>
+                  </a:tcPr>
+                </a:tc>
+                <a:tc>
+                  <a:txBody>
+                    <a:bodyPr/>
+                    <a:lstStyle/>
+                    <a:p>
+                      <a:pPr indent="0" marL="0">
+                        <a:buNone/>
+                      </a:pPr>
+                      <a:r>
+                        <a:rPr lang="en-US" sz="1300" dirty="0">
+                          <a:solidFill>
+                            <a:srgbClr val="E6EDF3"/>
+                          </a:solidFill>
+                          <a:latin typeface="Calibri" pitchFamily="34" charset="0"/>
+                          <a:ea typeface="Calibri" pitchFamily="34" charset="-122"/>
+                          <a:cs typeface="Calibri" pitchFamily="34" charset="-120"/>
+                        </a:rPr>
+                        <a:t>2.00 s</a:t>
+                      </a:r>
+                      <a:endParaRPr lang="en-US" sz="1300" dirty="0">
+                        <a:latin typeface="Calibri" charset="0"/>
+                        <a:ea typeface="Calibri" charset="0"/>
+                        <a:cs typeface="Calibri" charset="0"/>
+                      </a:endParaRPr>
+                    </a:p>
+                  </a:txBody>
+                  <a:tcPr marL="91440" marR="91440" marT="45720" marB="45720">
+                    <a:lnL w="12700" cap="flat" cmpd="sng" algn="ctr">
+                      <a:solidFill>
+                        <a:srgbClr val="2A3441"/>
+                      </a:solidFill>
+                      <a:prstDash val="solid"/>
+                      <a:round/>
+                      <a:headEnd type="none" w="med" len="med"/>
+                      <a:tailEnd type="none" w="med" len="med"/>
+                    </a:lnL>
+                    <a:lnR w="12700" cap="flat" cmpd="sng" algn="ctr">
+                      <a:solidFill>
+                        <a:srgbClr val="2A3441"/>
+                      </a:solidFill>
+                      <a:prstDash val="solid"/>
+                      <a:round/>
+                      <a:headEnd type="none" w="med" len="med"/>
+                      <a:tailEnd type="none" w="med" len="med"/>
+                    </a:lnR>
+                    <a:lnT w="12700" cap="flat" cmpd="sng" algn="ctr">
+                      <a:solidFill>
+                        <a:srgbClr val="2A3441"/>
+                      </a:solidFill>
+                      <a:prstDash val="solid"/>
+                      <a:round/>
+                      <a:headEnd type="none" w="med" len="med"/>
+                      <a:tailEnd type="none" w="med" len="med"/>
+                    </a:lnT>
+                    <a:lnB w="12700" cap="flat" cmpd="sng" algn="ctr">
+                      <a:solidFill>
+                        <a:srgbClr val="2A3441"/>
+                      </a:solidFill>
+                      <a:prstDash val="solid"/>
+                      <a:round/>
+                      <a:headEnd type="none" w="med" len="med"/>
+                      <a:tailEnd type="none" w="med" len="med"/>
+                    </a:lnB>
+                    <a:solidFill>
+                      <a:srgbClr val="141B24"/>
+                    </a:solidFill>
+                  </a:tcPr>
+                </a:tc>
+              </a:tr>
+              <a:tr h="384048">
+                <a:tc>
+                  <a:txBody>
+                    <a:bodyPr/>
+                    <a:lstStyle/>
+                    <a:p>
+                      <a:pPr indent="0" marL="0">
+                        <a:buNone/>
+                      </a:pPr>
+                      <a:r>
+                        <a:rPr lang="en-US" sz="1300" dirty="0">
+                          <a:solidFill>
+                            <a:srgbClr val="E6EDF3"/>
+                          </a:solidFill>
+                          <a:latin typeface="Calibri" pitchFamily="34" charset="0"/>
+                          <a:ea typeface="Calibri" pitchFamily="34" charset="-122"/>
+                          <a:cs typeface="Calibri" pitchFamily="34" charset="-120"/>
+                        </a:rPr>
+                        <a:t>RUDP AIMD</a:t>
+                      </a:r>
+                      <a:endParaRPr lang="en-US" sz="1300" dirty="0">
+                        <a:latin typeface="Calibri" charset="0"/>
+                        <a:ea typeface="Calibri" charset="0"/>
+                        <a:cs typeface="Calibri" charset="0"/>
+                      </a:endParaRPr>
+                    </a:p>
+                  </a:txBody>
+                  <a:tcPr marL="91440" marR="91440" marT="45720" marB="45720">
+                    <a:lnL w="12700" cap="flat" cmpd="sng" algn="ctr">
+                      <a:solidFill>
+                        <a:srgbClr val="2A3441"/>
+                      </a:solidFill>
+                      <a:prstDash val="solid"/>
+                      <a:round/>
+                      <a:headEnd type="none" w="med" len="med"/>
+                      <a:tailEnd type="none" w="med" len="med"/>
+                    </a:lnL>
+                    <a:lnR w="12700" cap="flat" cmpd="sng" algn="ctr">
+                      <a:solidFill>
+                        <a:srgbClr val="2A3441"/>
+                      </a:solidFill>
+                      <a:prstDash val="solid"/>
+                      <a:round/>
+                      <a:headEnd type="none" w="med" len="med"/>
+                      <a:tailEnd type="none" w="med" len="med"/>
+                    </a:lnR>
+                    <a:lnT w="12700" cap="flat" cmpd="sng" algn="ctr">
+                      <a:solidFill>
+                        <a:srgbClr val="2A3441"/>
+                      </a:solidFill>
+                      <a:prstDash val="solid"/>
+                      <a:round/>
+                      <a:headEnd type="none" w="med" len="med"/>
+                      <a:tailEnd type="none" w="med" len="med"/>
+                    </a:lnT>
+                    <a:lnB w="12700" cap="flat" cmpd="sng" algn="ctr">
+                      <a:solidFill>
+                        <a:srgbClr val="2A3441"/>
+                      </a:solidFill>
+                      <a:prstDash val="solid"/>
+                      <a:round/>
+                      <a:headEnd type="none" w="med" len="med"/>
+                      <a:tailEnd type="none" w="med" len="med"/>
+                    </a:lnB>
+                    <a:solidFill>
+                      <a:srgbClr val="141B24"/>
+                    </a:solidFill>
+                  </a:tcPr>
+                </a:tc>
+                <a:tc>
+                  <a:txBody>
+                    <a:bodyPr/>
+                    <a:lstStyle/>
+                    <a:p>
+                      <a:pPr indent="0" marL="0">
+                        <a:buNone/>
+                      </a:pPr>
+                      <a:r>
+                        <a:rPr lang="en-US" sz="1300" dirty="0">
+                          <a:solidFill>
+                            <a:srgbClr val="E6EDF3"/>
+                          </a:solidFill>
+                          <a:latin typeface="Calibri" pitchFamily="34" charset="0"/>
+                          <a:ea typeface="Calibri" pitchFamily="34" charset="-122"/>
+                          <a:cs typeface="Calibri" pitchFamily="34" charset="-120"/>
+                        </a:rPr>
+                        <a:t>7.16 s</a:t>
+                      </a:r>
+                      <a:endParaRPr lang="en-US" sz="1300" dirty="0">
+                        <a:latin typeface="Calibri" charset="0"/>
+                        <a:ea typeface="Calibri" charset="0"/>
+                        <a:cs typeface="Calibri" charset="0"/>
+                      </a:endParaRPr>
+                    </a:p>
+                  </a:txBody>
+                  <a:tcPr marL="91440" marR="91440" marT="45720" marB="45720">
+                    <a:lnL w="12700" cap="flat" cmpd="sng" algn="ctr">
+                      <a:solidFill>
+                        <a:srgbClr val="2A3441"/>
+                      </a:solidFill>
+                      <a:prstDash val="solid"/>
+                      <a:round/>
+                      <a:headEnd type="none" w="med" len="med"/>
+                      <a:tailEnd type="none" w="med" len="med"/>
+                    </a:lnL>
+                    <a:lnR w="12700" cap="flat" cmpd="sng" algn="ctr">
+                      <a:solidFill>
+                        <a:srgbClr val="2A3441"/>
+                      </a:solidFill>
+                      <a:prstDash val="solid"/>
+                      <a:round/>
+                      <a:headEnd type="none" w="med" len="med"/>
+                      <a:tailEnd type="none" w="med" len="med"/>
+                    </a:lnR>
+                    <a:lnT w="12700" cap="flat" cmpd="sng" algn="ctr">
+                      <a:solidFill>
+                        <a:srgbClr val="2A3441"/>
+                      </a:solidFill>
+                      <a:prstDash val="solid"/>
+                      <a:round/>
+                      <a:headEnd type="none" w="med" len="med"/>
+                      <a:tailEnd type="none" w="med" len="med"/>
+                    </a:lnT>
+                    <a:lnB w="12700" cap="flat" cmpd="sng" algn="ctr">
+                      <a:solidFill>
+                        <a:srgbClr val="2A3441"/>
+                      </a:solidFill>
+                      <a:prstDash val="solid"/>
+                      <a:round/>
+                      <a:headEnd type="none" w="med" len="med"/>
+                      <a:tailEnd type="none" w="med" len="med"/>
+                    </a:lnB>
+                    <a:solidFill>
+                      <a:srgbClr val="141B24"/>
+                    </a:solidFill>
+                  </a:tcPr>
+                </a:tc>
+                <a:tc>
+                  <a:txBody>
+                    <a:bodyPr/>
+                    <a:lstStyle/>
+                    <a:p>
+                      <a:pPr indent="0" marL="0">
+                        <a:buNone/>
+                      </a:pPr>
+                      <a:r>
+                        <a:rPr lang="en-US" sz="1300" dirty="0">
+                          <a:solidFill>
+                            <a:srgbClr val="E6EDF3"/>
+                          </a:solidFill>
+                          <a:latin typeface="Calibri" pitchFamily="34" charset="0"/>
+                          <a:ea typeface="Calibri" pitchFamily="34" charset="-122"/>
+                          <a:cs typeface="Calibri" pitchFamily="34" charset="-120"/>
+                        </a:rPr>
+                        <a:t>2.72 s</a:t>
+                      </a:r>
+                      <a:endParaRPr lang="en-US" sz="1300" dirty="0">
+                        <a:latin typeface="Calibri" charset="0"/>
+                        <a:ea typeface="Calibri" charset="0"/>
+                        <a:cs typeface="Calibri" charset="0"/>
+                      </a:endParaRPr>
+                    </a:p>
+                  </a:txBody>
+                  <a:tcPr marL="91440" marR="91440" marT="45720" marB="45720">
+                    <a:lnL w="12700" cap="flat" cmpd="sng" algn="ctr">
+                      <a:solidFill>
+                        <a:srgbClr val="2A3441"/>
+                      </a:solidFill>
+                      <a:prstDash val="solid"/>
+                      <a:round/>
+                      <a:headEnd type="none" w="med" len="med"/>
+                      <a:tailEnd type="none" w="med" len="med"/>
+                    </a:lnL>
+                    <a:lnR w="12700" cap="flat" cmpd="sng" algn="ctr">
+                      <a:solidFill>
+                        <a:srgbClr val="2A3441"/>
+                      </a:solidFill>
+                      <a:prstDash val="solid"/>
+                      <a:round/>
+                      <a:headEnd type="none" w="med" len="med"/>
+                      <a:tailEnd type="none" w="med" len="med"/>
+                    </a:lnR>
+                    <a:lnT w="12700" cap="flat" cmpd="sng" algn="ctr">
+                      <a:solidFill>
+                        <a:srgbClr val="2A3441"/>
+                      </a:solidFill>
+                      <a:prstDash val="solid"/>
+                      <a:round/>
+                      <a:headEnd type="none" w="med" len="med"/>
+                      <a:tailEnd type="none" w="med" len="med"/>
+                    </a:lnT>
+                    <a:lnB w="12700" cap="flat" cmpd="sng" algn="ctr">
+                      <a:solidFill>
+                        <a:srgbClr val="2A3441"/>
+                      </a:solidFill>
+                      <a:prstDash val="solid"/>
+                      <a:round/>
+                      <a:headEnd type="none" w="med" len="med"/>
+                      <a:tailEnd type="none" w="med" len="med"/>
+                    </a:lnB>
+                    <a:solidFill>
+                      <a:srgbClr val="141B24"/>
+                    </a:solidFill>
+                  </a:tcPr>
+                </a:tc>
+              </a:tr>
+              <a:tr h="384048">
+                <a:tc>
+                  <a:txBody>
+                    <a:bodyPr/>
+                    <a:lstStyle/>
+                    <a:p>
+                      <a:pPr indent="0" marL="0">
+                        <a:buNone/>
+                      </a:pPr>
+                      <a:r>
+                        <a:rPr lang="en-US" sz="1300" dirty="0">
+                          <a:solidFill>
+                            <a:srgbClr val="E6EDF3"/>
+                          </a:solidFill>
+                          <a:latin typeface="Calibri" pitchFamily="34" charset="0"/>
+                          <a:ea typeface="Calibri" pitchFamily="34" charset="-122"/>
+                          <a:cs typeface="Calibri" pitchFamily="34" charset="-120"/>
+                        </a:rPr>
+                        <a:t>Smart-RUDP, table</a:t>
+                      </a:r>
+                      <a:endParaRPr lang="en-US" sz="1300" dirty="0">
+                        <a:latin typeface="Calibri" charset="0"/>
+                        <a:ea typeface="Calibri" charset="0"/>
+                        <a:cs typeface="Calibri" charset="0"/>
+                      </a:endParaRPr>
+                    </a:p>
+                  </a:txBody>
+                  <a:tcPr marL="91440" marR="91440" marT="45720" marB="45720">
+                    <a:lnL w="12700" cap="flat" cmpd="sng" algn="ctr">
+                      <a:solidFill>
+                        <a:srgbClr val="2A3441"/>
+                      </a:solidFill>
+                      <a:prstDash val="solid"/>
+                      <a:round/>
+                      <a:headEnd type="none" w="med" len="med"/>
+                      <a:tailEnd type="none" w="med" len="med"/>
+                    </a:lnL>
+                    <a:lnR w="12700" cap="flat" cmpd="sng" algn="ctr">
+                      <a:solidFill>
+                        <a:srgbClr val="2A3441"/>
+                      </a:solidFill>
+                      <a:prstDash val="solid"/>
+                      <a:round/>
+                      <a:headEnd type="none" w="med" len="med"/>
+                      <a:tailEnd type="none" w="med" len="med"/>
+                    </a:lnR>
+                    <a:lnT w="12700" cap="flat" cmpd="sng" algn="ctr">
+                      <a:solidFill>
+                        <a:srgbClr val="2A3441"/>
+                      </a:solidFill>
+                      <a:prstDash val="solid"/>
+                      <a:round/>
+                      <a:headEnd type="none" w="med" len="med"/>
+                      <a:tailEnd type="none" w="med" len="med"/>
+                    </a:lnT>
+                    <a:lnB w="12700" cap="flat" cmpd="sng" algn="ctr">
+                      <a:solidFill>
+                        <a:srgbClr val="2A3441"/>
+                      </a:solidFill>
+                      <a:prstDash val="solid"/>
+                      <a:round/>
+                      <a:headEnd type="none" w="med" len="med"/>
+                      <a:tailEnd type="none" w="med" len="med"/>
+                    </a:lnB>
+                    <a:solidFill>
+                      <a:srgbClr val="141B24"/>
+                    </a:solidFill>
+                  </a:tcPr>
+                </a:tc>
+                <a:tc>
+                  <a:txBody>
+                    <a:bodyPr/>
+                    <a:lstStyle/>
+                    <a:p>
+                      <a:pPr indent="0" marL="0">
+                        <a:buNone/>
+                      </a:pPr>
+                      <a:r>
+                        <a:rPr lang="en-US" sz="1300" dirty="0">
+                          <a:solidFill>
+                            <a:srgbClr val="E6EDF3"/>
+                          </a:solidFill>
+                          <a:latin typeface="Calibri" pitchFamily="34" charset="0"/>
+                          <a:ea typeface="Calibri" pitchFamily="34" charset="-122"/>
+                          <a:cs typeface="Calibri" pitchFamily="34" charset="-120"/>
+                        </a:rPr>
+                        <a:t>3.73 s</a:t>
+                      </a:r>
+                      <a:endParaRPr lang="en-US" sz="1300" dirty="0">
+                        <a:latin typeface="Calibri" charset="0"/>
+                        <a:ea typeface="Calibri" charset="0"/>
+                        <a:cs typeface="Calibri" charset="0"/>
+                      </a:endParaRPr>
+                    </a:p>
+                  </a:txBody>
+                  <a:tcPr marL="91440" marR="91440" marT="45720" marB="45720">
+                    <a:lnL w="12700" cap="flat" cmpd="sng" algn="ctr">
+                      <a:solidFill>
+                        <a:srgbClr val="2A3441"/>
+                      </a:solidFill>
+                      <a:prstDash val="solid"/>
+                      <a:round/>
+                      <a:headEnd type="none" w="med" len="med"/>
+                      <a:tailEnd type="none" w="med" len="med"/>
+                    </a:lnL>
+                    <a:lnR w="12700" cap="flat" cmpd="sng" algn="ctr">
+                      <a:solidFill>
+                        <a:srgbClr val="2A3441"/>
+                      </a:solidFill>
+                      <a:prstDash val="solid"/>
+                      <a:round/>
+                      <a:headEnd type="none" w="med" len="med"/>
+                      <a:tailEnd type="none" w="med" len="med"/>
+                    </a:lnR>
+                    <a:lnT w="12700" cap="flat" cmpd="sng" algn="ctr">
+                      <a:solidFill>
+                        <a:srgbClr val="2A3441"/>
+                      </a:solidFill>
+                      <a:prstDash val="solid"/>
+                      <a:round/>
+                      <a:headEnd type="none" w="med" len="med"/>
+                      <a:tailEnd type="none" w="med" len="med"/>
+                    </a:lnT>
+                    <a:lnB w="12700" cap="flat" cmpd="sng" algn="ctr">
+                      <a:solidFill>
+                        <a:srgbClr val="2A3441"/>
+                      </a:solidFill>
+                      <a:prstDash val="solid"/>
+                      <a:round/>
+                      <a:headEnd type="none" w="med" len="med"/>
+                      <a:tailEnd type="none" w="med" len="med"/>
+                    </a:lnB>
+                    <a:solidFill>
+                      <a:srgbClr val="141B24"/>
+                    </a:solidFill>
+                  </a:tcPr>
+                </a:tc>
+                <a:tc>
+                  <a:txBody>
+                    <a:bodyPr/>
+                    <a:lstStyle/>
+                    <a:p>
+                      <a:pPr indent="0" marL="0">
+                        <a:buNone/>
+                      </a:pPr>
+                      <a:r>
+                        <a:rPr lang="en-US" sz="1300" dirty="0">
+                          <a:solidFill>
+                            <a:srgbClr val="E6EDF3"/>
+                          </a:solidFill>
+                          <a:latin typeface="Calibri" pitchFamily="34" charset="0"/>
+                          <a:ea typeface="Calibri" pitchFamily="34" charset="-122"/>
+                          <a:cs typeface="Calibri" pitchFamily="34" charset="-120"/>
+                        </a:rPr>
+                        <a:t>1.99 s</a:t>
+                      </a:r>
+                      <a:endParaRPr lang="en-US" sz="1300" dirty="0">
+                        <a:latin typeface="Calibri" charset="0"/>
+                        <a:ea typeface="Calibri" charset="0"/>
+                        <a:cs typeface="Calibri" charset="0"/>
+                      </a:endParaRPr>
+                    </a:p>
+                  </a:txBody>
+                  <a:tcPr marL="91440" marR="91440" marT="45720" marB="45720">
+                    <a:lnL w="12700" cap="flat" cmpd="sng" algn="ctr">
+                      <a:solidFill>
+                        <a:srgbClr val="2A3441"/>
+                      </a:solidFill>
+                      <a:prstDash val="solid"/>
+                      <a:round/>
+                      <a:headEnd type="none" w="med" len="med"/>
+                      <a:tailEnd type="none" w="med" len="med"/>
+                    </a:lnL>
+                    <a:lnR w="12700" cap="flat" cmpd="sng" algn="ctr">
+                      <a:solidFill>
+                        <a:srgbClr val="2A3441"/>
+                      </a:solidFill>
+                      <a:prstDash val="solid"/>
+                      <a:round/>
+                      <a:headEnd type="none" w="med" len="med"/>
+                      <a:tailEnd type="none" w="med" len="med"/>
+                    </a:lnR>
+                    <a:lnT w="12700" cap="flat" cmpd="sng" algn="ctr">
+                      <a:solidFill>
+                        <a:srgbClr val="2A3441"/>
+                      </a:solidFill>
+                      <a:prstDash val="solid"/>
+                      <a:round/>
+                      <a:headEnd type="none" w="med" len="med"/>
+                      <a:tailEnd type="none" w="med" len="med"/>
+                    </a:lnT>
+                    <a:lnB w="12700" cap="flat" cmpd="sng" algn="ctr">
+                      <a:solidFill>
+                        <a:srgbClr val="2A3441"/>
+                      </a:solidFill>
+                      <a:prstDash val="solid"/>
+                      <a:round/>
+                      <a:headEnd type="none" w="med" len="med"/>
+                      <a:tailEnd type="none" w="med" len="med"/>
+                    </a:lnB>
+                    <a:solidFill>
+                      <a:srgbClr val="141B24"/>
+                    </a:solidFill>
+                  </a:tcPr>
+                </a:tc>
+              </a:tr>
+              <a:tr h="384048">
+                <a:tc>
+                  <a:txBody>
+                    <a:bodyPr/>
+                    <a:lstStyle/>
+                    <a:p>
+                      <a:pPr indent="0" marL="0">
+                        <a:buNone/>
+                      </a:pPr>
+                      <a:r>
+                        <a:rPr lang="en-US" sz="1300" dirty="0">
+                          <a:solidFill>
+                            <a:srgbClr val="E6EDF3"/>
+                          </a:solidFill>
+                          <a:latin typeface="Calibri" pitchFamily="34" charset="0"/>
+                          <a:ea typeface="Calibri" pitchFamily="34" charset="-122"/>
+                          <a:cs typeface="Calibri" pitchFamily="34" charset="-120"/>
+                        </a:rPr>
+                        <a:t>Smart-RUDP, deep</a:t>
+                      </a:r>
+                      <a:endParaRPr lang="en-US" sz="1300" dirty="0">
+                        <a:latin typeface="Calibri" charset="0"/>
+                        <a:ea typeface="Calibri" charset="0"/>
+                        <a:cs typeface="Calibri" charset="0"/>
+                      </a:endParaRPr>
+                    </a:p>
+                  </a:txBody>
+                  <a:tcPr marL="91440" marR="91440" marT="45720" marB="45720">
+                    <a:lnL w="12700" cap="flat" cmpd="sng" algn="ctr">
+                      <a:solidFill>
+                        <a:srgbClr val="2A3441"/>
+                      </a:solidFill>
+                      <a:prstDash val="solid"/>
+                      <a:round/>
+                      <a:headEnd type="none" w="med" len="med"/>
+                      <a:tailEnd type="none" w="med" len="med"/>
+                    </a:lnL>
+                    <a:lnR w="12700" cap="flat" cmpd="sng" algn="ctr">
+                      <a:solidFill>
+                        <a:srgbClr val="2A3441"/>
+                      </a:solidFill>
+                      <a:prstDash val="solid"/>
+                      <a:round/>
+                      <a:headEnd type="none" w="med" len="med"/>
+                      <a:tailEnd type="none" w="med" len="med"/>
+                    </a:lnR>
+                    <a:lnT w="12700" cap="flat" cmpd="sng" algn="ctr">
+                      <a:solidFill>
+                        <a:srgbClr val="2A3441"/>
+                      </a:solidFill>
+                      <a:prstDash val="solid"/>
+                      <a:round/>
+                      <a:headEnd type="none" w="med" len="med"/>
+                      <a:tailEnd type="none" w="med" len="med"/>
+                    </a:lnT>
+                    <a:lnB w="12700" cap="flat" cmpd="sng" algn="ctr">
+                      <a:solidFill>
+                        <a:srgbClr val="2A3441"/>
+                      </a:solidFill>
+                      <a:prstDash val="solid"/>
+                      <a:round/>
+                      <a:headEnd type="none" w="med" len="med"/>
+                      <a:tailEnd type="none" w="med" len="med"/>
+                    </a:lnB>
+                    <a:solidFill>
+                      <a:srgbClr val="141B24"/>
+                    </a:solidFill>
+                  </a:tcPr>
+                </a:tc>
+                <a:tc>
+                  <a:txBody>
+                    <a:bodyPr/>
+                    <a:lstStyle/>
+                    <a:p>
+                      <a:pPr indent="0" marL="0">
+                        <a:buNone/>
+                      </a:pPr>
+                      <a:r>
+                        <a:rPr lang="en-US" sz="1300" dirty="0">
+                          <a:solidFill>
+                            <a:srgbClr val="E6EDF3"/>
+                          </a:solidFill>
+                          <a:latin typeface="Calibri" pitchFamily="34" charset="0"/>
+                          <a:ea typeface="Calibri" pitchFamily="34" charset="-122"/>
+                          <a:cs typeface="Calibri" pitchFamily="34" charset="-120"/>
+                        </a:rPr>
+                        <a:t>3.20 s</a:t>
+                      </a:r>
+                      <a:endParaRPr lang="en-US" sz="1300" dirty="0">
+                        <a:latin typeface="Calibri" charset="0"/>
+                        <a:ea typeface="Calibri" charset="0"/>
+                        <a:cs typeface="Calibri" charset="0"/>
+                      </a:endParaRPr>
+                    </a:p>
+                  </a:txBody>
+                  <a:tcPr marL="91440" marR="91440" marT="45720" marB="45720">
+                    <a:lnL w="12700" cap="flat" cmpd="sng" algn="ctr">
+                      <a:solidFill>
+                        <a:srgbClr val="2A3441"/>
+                      </a:solidFill>
+                      <a:prstDash val="solid"/>
+                      <a:round/>
+                      <a:headEnd type="none" w="med" len="med"/>
+                      <a:tailEnd type="none" w="med" len="med"/>
+                    </a:lnL>
+                    <a:lnR w="12700" cap="flat" cmpd="sng" algn="ctr">
+                      <a:solidFill>
+                        <a:srgbClr val="2A3441"/>
+                      </a:solidFill>
+                      <a:prstDash val="solid"/>
+                      <a:round/>
+                      <a:headEnd type="none" w="med" len="med"/>
+                      <a:tailEnd type="none" w="med" len="med"/>
+                    </a:lnR>
+                    <a:lnT w="12700" cap="flat" cmpd="sng" algn="ctr">
+                      <a:solidFill>
+                        <a:srgbClr val="2A3441"/>
+                      </a:solidFill>
+                      <a:prstDash val="solid"/>
+                      <a:round/>
+                      <a:headEnd type="none" w="med" len="med"/>
+                      <a:tailEnd type="none" w="med" len="med"/>
+                    </a:lnT>
+                    <a:lnB w="12700" cap="flat" cmpd="sng" algn="ctr">
+                      <a:solidFill>
+                        <a:srgbClr val="2A3441"/>
+                      </a:solidFill>
+                      <a:prstDash val="solid"/>
+                      <a:round/>
+                      <a:headEnd type="none" w="med" len="med"/>
+                      <a:tailEnd type="none" w="med" len="med"/>
+                    </a:lnB>
+                    <a:solidFill>
+                      <a:srgbClr val="141B24"/>
+                    </a:solidFill>
+                  </a:tcPr>
+                </a:tc>
+                <a:tc>
+                  <a:txBody>
+                    <a:bodyPr/>
+                    <a:lstStyle/>
+                    <a:p>
+                      <a:pPr indent="0" marL="0">
+                        <a:buNone/>
+                      </a:pPr>
+                      <a:r>
+                        <a:rPr lang="en-US" sz="1300" dirty="0">
+                          <a:solidFill>
+                            <a:srgbClr val="E6EDF3"/>
+                          </a:solidFill>
+                          <a:latin typeface="Calibri" pitchFamily="34" charset="0"/>
+                          <a:ea typeface="Calibri" pitchFamily="34" charset="-122"/>
+                          <a:cs typeface="Calibri" pitchFamily="34" charset="-120"/>
+                        </a:rPr>
+                        <a:t>1.79 s</a:t>
+                      </a:r>
+                      <a:endParaRPr lang="en-US" sz="1300" dirty="0">
+                        <a:latin typeface="Calibri" charset="0"/>
+                        <a:ea typeface="Calibri" charset="0"/>
+                        <a:cs typeface="Calibri" charset="0"/>
+                      </a:endParaRPr>
+                    </a:p>
+                  </a:txBody>
+                  <a:tcPr marL="91440" marR="91440" marT="45720" marB="45720">
+                    <a:lnL w="12700" cap="flat" cmpd="sng" algn="ctr">
+                      <a:solidFill>
+                        <a:srgbClr val="2A3441"/>
+                      </a:solidFill>
+                      <a:prstDash val="solid"/>
+                      <a:round/>
+                      <a:headEnd type="none" w="med" len="med"/>
+                      <a:tailEnd type="none" w="med" len="med"/>
+                    </a:lnL>
+                    <a:lnR w="12700" cap="flat" cmpd="sng" algn="ctr">
+                      <a:solidFill>
+                        <a:srgbClr val="2A3441"/>
+                      </a:solidFill>
+                      <a:prstDash val="solid"/>
+                      <a:round/>
+                      <a:headEnd type="none" w="med" len="med"/>
+                      <a:tailEnd type="none" w="med" len="med"/>
+                    </a:lnR>
+                    <a:lnT w="12700" cap="flat" cmpd="sng" algn="ctr">
+                      <a:solidFill>
+                        <a:srgbClr val="2A3441"/>
+                      </a:solidFill>
+                      <a:prstDash val="solid"/>
+                      <a:round/>
+                      <a:headEnd type="none" w="med" len="med"/>
+                      <a:tailEnd type="none" w="med" len="med"/>
+                    </a:lnT>
+                    <a:lnB w="12700" cap="flat" cmpd="sng" algn="ctr">
+                      <a:solidFill>
+                        <a:srgbClr val="2A3441"/>
+                      </a:solidFill>
+                      <a:prstDash val="solid"/>
+                      <a:round/>
+                      <a:headEnd type="none" w="med" len="med"/>
+                      <a:tailEnd type="none" w="med" len="med"/>
+                    </a:lnB>
+                    <a:solidFill>
+                      <a:srgbClr val="141B24"/>
+                    </a:solidFill>
+                  </a:tcPr>
+                </a:tc>
+              </a:tr>
+            </a:tbl>
+          </a:graphicData>
+        </a:graphic>
+      </p:graphicFrame>
+      <p:sp>
+        <p:nvSpPr>
+          <p:cNvPr id="5" name="Text 2"/>
+          <p:cNvSpPr/>
+          <p:nvPr/>
+        </p:nvSpPr>
+        <p:spPr>
+          <a:xfrm>
+            <a:off x="6309360" y="1188720"/>
             <a:ext cx="5394960" cy="4206240"/>
-          </a:xfrm>
-          <a:prstGeom prst="rect">
-            <a:avLst/>
-          </a:prstGeom>
-          <a:solidFill>
-            <a:srgbClr val="141B24"/>
-          </a:solidFill>
-          <a:ln w="12700">
-            <a:solidFill>
-              <a:srgbClr val="39FF88"/>
-            </a:solidFill>
-            <a:prstDash val="solid"/>
-          </a:ln>
-        </p:spPr>
-      </p:sp>
-      <p:sp>
-        <p:nvSpPr>
-          <p:cNvPr id="5" name="Text 3"/>
-          <p:cNvSpPr/>
-          <p:nvPr/>
-        </p:nvSpPr>
-        <p:spPr>
-          <a:xfrm>
-            <a:off x="731520" y="1508760"/>
-            <a:ext cx="5029200" cy="457200"/>
           </a:xfrm>
           <a:prstGeom prst="rect">
             <a:avLst/>
@@ -7713,53 +9250,18 @@
           <a:ln/>
         </p:spPr>
         <p:txBody>
-          <a:bodyPr wrap="square" lIns="0" tIns="0" rIns="0" bIns="0" rtlCol="0" anchor="ctr"/>
-          <a:lstStyle/>
-          <a:p>
-            <a:pPr indent="0" marL="0">
-              <a:buNone/>
-            </a:pPr>
-            <a:r>
-              <a:rPr lang="en-US" sz="2000" b="1" dirty="0">
-                <a:solidFill>
-                  <a:srgbClr val="39FF88"/>
-                </a:solidFill>
-                <a:latin typeface="Courier New" pitchFamily="34" charset="0"/>
-                <a:ea typeface="Courier New" pitchFamily="34" charset="-122"/>
-                <a:cs typeface="Courier New" pitchFamily="34" charset="-120"/>
-              </a:rPr>
-              <a:t>Learned</a:t>
-            </a:r>
-            <a:endParaRPr lang="en-US" sz="2000" dirty="0"/>
-          </a:p>
-        </p:txBody>
-      </p:sp>
-      <p:sp>
-        <p:nvSpPr>
-          <p:cNvPr id="6" name="Text 4"/>
-          <p:cNvSpPr/>
-          <p:nvPr/>
-        </p:nvSpPr>
-        <p:spPr>
-          <a:xfrm>
-            <a:off x="731520" y="2011680"/>
-            <a:ext cx="5029200" cy="3429000"/>
-          </a:xfrm>
-          <a:prstGeom prst="rect">
-            <a:avLst/>
-          </a:prstGeom>
-          <a:noFill/>
-          <a:ln/>
-        </p:spPr>
-        <p:txBody>
           <a:bodyPr wrap="square" lIns="0" tIns="0" rIns="0" bIns="0" rtlCol="0" anchor="t"/>
           <a:lstStyle/>
           <a:p>
-            <a:pPr indent="0" marL="0">
-              <a:buNone/>
-            </a:pPr>
-            <a:r>
-              <a:rPr lang="en-US" sz="2000" dirty="0">
+            <a:pPr marL="342900" indent="-342900">
+              <a:spcAft>
+                <a:spcPts val="800"/>
+              </a:spcAft>
+              <a:buSzPct val="100000"/>
+              <a:buChar char="•"/>
+            </a:pPr>
+            <a:r>
+              <a:rPr lang="en-US" sz="1500" dirty="0">
                 <a:solidFill>
                   <a:srgbClr val="E6EDF3"/>
                 </a:solidFill>
@@ -7767,16 +9269,20 @@
                 <a:ea typeface="Calibri" pitchFamily="34" charset="-122"/>
                 <a:cs typeface="Calibri" pitchFamily="34" charset="-120"/>
               </a:rPr>
-              <a:t>Reliability is a set of simple rules working together.</a:t>
-            </a:r>
-            <a:endParaRPr lang="en-US" sz="2000" dirty="0"/>
-          </a:p>
-          <a:p>
-            <a:pPr indent="0" marL="0">
-              <a:buNone/>
-            </a:pPr>
-            <a:r>
-              <a:rPr lang="en-US" sz="2000" dirty="0">
+              <a:t>Selective ACK (simulated): AIMD mean 7.16 s to 4.90 s, median 2.72 s to 1.44 s; faster on 34 of 48 paths. Go-Back-N is the main weakness.</a:t>
+            </a:r>
+            <a:endParaRPr lang="en-US" sz="1500" dirty="0"/>
+          </a:p>
+          <a:p>
+            <a:pPr marL="342900" indent="-342900">
+              <a:spcAft>
+                <a:spcPts val="800"/>
+              </a:spcAft>
+              <a:buSzPct val="100000"/>
+              <a:buChar char="•"/>
+            </a:pPr>
+            <a:r>
+              <a:rPr lang="en-US" sz="1500" dirty="0">
                 <a:solidFill>
                   <a:srgbClr val="E6EDF3"/>
                 </a:solidFill>
@@ -7784,16 +9290,20 @@
                 <a:ea typeface="Calibri" pitchFamily="34" charset="-122"/>
                 <a:cs typeface="Calibri" pitchFamily="34" charset="-120"/>
               </a:rPr>
-              <a:t>Congestion control matters as much as retransmission.</a:t>
-            </a:r>
-            <a:endParaRPr lang="en-US" sz="2000" dirty="0"/>
-          </a:p>
-          <a:p>
-            <a:pPr indent="0" marL="0">
-              <a:buNone/>
-            </a:pPr>
-            <a:r>
-              <a:rPr lang="en-US" sz="2000" dirty="0">
+              <a:t>Reordering (20 ms jitter): AIMD 0.82 s to 6.79 s; deep agent 0.93 s; SACK removes most of the damage.</a:t>
+            </a:r>
+            <a:endParaRPr lang="en-US" sz="1500" dirty="0"/>
+          </a:p>
+          <a:p>
+            <a:pPr marL="342900" indent="-342900">
+              <a:spcAft>
+                <a:spcPts val="800"/>
+              </a:spcAft>
+              <a:buSzPct val="100000"/>
+              <a:buChar char="•"/>
+            </a:pPr>
+            <a:r>
+              <a:rPr lang="en-US" sz="1500" dirty="0">
                 <a:solidFill>
                   <a:srgbClr val="E6EDF3"/>
                 </a:solidFill>
@@ -7801,47 +9311,22 @@
                 <a:ea typeface="Calibri" pitchFamily="34" charset="-122"/>
                 <a:cs typeface="Calibri" pitchFamily="34" charset="-120"/>
               </a:rPr>
-              <a:t>Testing tools fail in surprising ways.</a:t>
-            </a:r>
-            <a:endParaRPr lang="en-US" sz="2000" dirty="0"/>
-          </a:p>
-        </p:txBody>
-      </p:sp>
-      <p:sp>
-        <p:nvSpPr>
-          <p:cNvPr id="7" name="Shape 5"/>
-          <p:cNvSpPr/>
-          <p:nvPr/>
-        </p:nvSpPr>
-        <p:spPr>
-          <a:xfrm>
-            <a:off x="6217920" y="1371600"/>
-            <a:ext cx="5394960" cy="4206240"/>
-          </a:xfrm>
-          <a:prstGeom prst="rect">
-            <a:avLst/>
-          </a:prstGeom>
-          <a:solidFill>
-            <a:srgbClr val="141B24"/>
-          </a:solidFill>
-          <a:ln w="12700">
-            <a:solidFill>
-              <a:srgbClr val="FFB000"/>
-            </a:solidFill>
-            <a:prstDash val="solid"/>
-          </a:ln>
-        </p:spPr>
-      </p:sp>
-      <p:sp>
-        <p:nvSpPr>
-          <p:cNvPr id="8" name="Text 6"/>
-          <p:cNvSpPr/>
-          <p:nvPr/>
-        </p:nvSpPr>
-        <p:spPr>
-          <a:xfrm>
-            <a:off x="6400800" y="1508760"/>
-            <a:ext cx="5029200" cy="457200"/>
+              <a:t>20-run intervals for the C experiments: Smart slower on 5G-like (+0.92 s) and satellite-like (+6.3 s), tie on lossy.</a:t>
+            </a:r>
+            <a:endParaRPr lang="en-US" sz="1500" dirty="0"/>
+          </a:p>
+        </p:txBody>
+      </p:sp>
+      <p:sp>
+        <p:nvSpPr>
+          <p:cNvPr id="6" name="Text 3"/>
+          <p:cNvSpPr/>
+          <p:nvPr/>
+        </p:nvSpPr>
+        <p:spPr>
+          <a:xfrm>
+            <a:off x="548640" y="5120640"/>
+            <a:ext cx="5486400" cy="731520"/>
           </a:xfrm>
           <a:prstGeom prst="rect">
             <a:avLst/>
@@ -7857,146 +9342,17 @@
               <a:buNone/>
             </a:pPr>
             <a:r>
-              <a:rPr lang="en-US" sz="2000" b="1" dirty="0">
-                <a:solidFill>
-                  <a:srgbClr val="FFB000"/>
-                </a:solidFill>
-                <a:latin typeface="Courier New" pitchFamily="34" charset="0"/>
-                <a:ea typeface="Courier New" pitchFamily="34" charset="-122"/>
-                <a:cs typeface="Courier New" pitchFamily="34" charset="-120"/>
-              </a:rPr>
-              <a:t>Next</a:t>
-            </a:r>
-            <a:endParaRPr lang="en-US" sz="2000" dirty="0"/>
-          </a:p>
-        </p:txBody>
-      </p:sp>
-      <p:sp>
-        <p:nvSpPr>
-          <p:cNvPr id="9" name="Text 7"/>
-          <p:cNvSpPr/>
-          <p:nvPr/>
-        </p:nvSpPr>
-        <p:spPr>
-          <a:xfrm>
-            <a:off x="6400800" y="2011680"/>
-            <a:ext cx="5029200" cy="3429000"/>
-          </a:xfrm>
-          <a:prstGeom prst="rect">
-            <a:avLst/>
-          </a:prstGeom>
-          <a:noFill/>
-          <a:ln/>
-        </p:spPr>
-        <p:txBody>
-          <a:bodyPr wrap="square" lIns="0" tIns="0" rIns="0" bIns="0" rtlCol="0" anchor="t"/>
-          <a:lstStyle/>
-          <a:p>
-            <a:pPr indent="0" marL="0">
-              <a:buNone/>
-            </a:pPr>
-            <a:r>
-              <a:rPr lang="en-US" sz="2000" dirty="0">
-                <a:solidFill>
-                  <a:srgbClr val="E6EDF3"/>
+              <a:rPr lang="en-US" sz="1300" dirty="0">
+                <a:solidFill>
+                  <a:srgbClr val="8B98A5"/>
                 </a:solidFill>
                 <a:latin typeface="Calibri" pitchFamily="34" charset="0"/>
                 <a:ea typeface="Calibri" pitchFamily="34" charset="-122"/>
                 <a:cs typeface="Calibri" pitchFamily="34" charset="-120"/>
               </a:rPr>
-              <a:t>Selective Repeat / SACK</a:t>
-            </a:r>
-            <a:endParaRPr lang="en-US" sz="2000" dirty="0"/>
-          </a:p>
-          <a:p>
-            <a:pPr indent="0" marL="0">
-              <a:buNone/>
-            </a:pPr>
-            <a:r>
-              <a:rPr lang="en-US" sz="2000" dirty="0">
-                <a:solidFill>
-                  <a:srgbClr val="E6EDF3"/>
-                </a:solidFill>
-                <a:latin typeface="Calibri" pitchFamily="34" charset="0"/>
-                <a:ea typeface="Calibri" pitchFamily="34" charset="-122"/>
-                <a:cs typeface="Calibri" pitchFamily="34" charset="-120"/>
-              </a:rPr>
-              <a:t>A stronger learning agent</a:t>
-            </a:r>
-            <a:endParaRPr lang="en-US" sz="2000" dirty="0"/>
-          </a:p>
-          <a:p>
-            <a:pPr indent="0" marL="0">
-              <a:buNone/>
-            </a:pPr>
-            <a:r>
-              <a:rPr lang="en-US" sz="2000" dirty="0">
-                <a:solidFill>
-                  <a:srgbClr val="E6EDF3"/>
-                </a:solidFill>
-                <a:latin typeface="Calibri" pitchFamily="34" charset="0"/>
-                <a:ea typeface="Calibri" pitchFamily="34" charset="-122"/>
-                <a:cs typeface="Calibri" pitchFamily="34" charset="-120"/>
-              </a:rPr>
-              <a:t>Kernel netem and real multi-machine tests</a:t>
-            </a:r>
-            <a:endParaRPr lang="en-US" sz="2000" dirty="0"/>
-          </a:p>
-          <a:p>
-            <a:pPr indent="0" marL="0">
-              <a:buNone/>
-            </a:pPr>
-            <a:r>
-              <a:rPr lang="en-US" sz="2000" dirty="0">
-                <a:solidFill>
-                  <a:srgbClr val="E6EDF3"/>
-                </a:solidFill>
-                <a:latin typeface="Calibri" pitchFamily="34" charset="0"/>
-                <a:ea typeface="Calibri" pitchFamily="34" charset="-122"/>
-                <a:cs typeface="Calibri" pitchFamily="34" charset="-120"/>
-              </a:rPr>
-              <a:t>Run RUDP across a real multi-machine network</a:t>
-            </a:r>
-            <a:endParaRPr lang="en-US" sz="2000" dirty="0"/>
-          </a:p>
-        </p:txBody>
-      </p:sp>
-      <p:sp>
-        <p:nvSpPr>
-          <p:cNvPr id="10" name="Text 8"/>
-          <p:cNvSpPr/>
-          <p:nvPr/>
-        </p:nvSpPr>
-        <p:spPr>
-          <a:xfrm>
-            <a:off x="548640" y="5852160"/>
-            <a:ext cx="10972800" cy="365760"/>
-          </a:xfrm>
-          <a:prstGeom prst="rect">
-            <a:avLst/>
-          </a:prstGeom>
-          <a:noFill/>
-          <a:ln/>
-        </p:spPr>
-        <p:txBody>
-          <a:bodyPr wrap="square" lIns="0" tIns="0" rIns="0" bIns="0" rtlCol="0" anchor="ctr"/>
-          <a:lstStyle/>
-          <a:p>
-            <a:pPr indent="0" marL="0">
-              <a:buNone/>
-            </a:pPr>
-            <a:r>
-              <a:rPr lang="en-US" sz="1400" dirty="0">
-                <a:solidFill>
-                  <a:srgbClr val="8B98A5"/>
-                </a:solidFill>
-                <a:latin typeface="Calibri" pitchFamily="34" charset="0"/>
-                <a:ea typeface="Calibri" pitchFamily="34" charset="-122"/>
-                <a:cs typeface="Calibri" pitchFamily="34" charset="-120"/>
-              </a:rPr>
-              <a:t>Limits: Go-Back-N wastes bandwidth; emulated (not kernel) paths; Smart-RUDP did not beat AIMD.</a:t>
-            </a:r>
-            <a:endParaRPr lang="en-US" sz="1400" dirty="0"/>
+              <a:t>The TCP row is a model, not kernel TCP. Real netem numbers need a Linux machine: netem_baselines.sh.</a:t>
+            </a:r>
+            <a:endParaRPr lang="en-US" sz="1300" dirty="0"/>
           </a:p>
         </p:txBody>
       </p:sp>
@@ -8040,8 +9396,8 @@
         </p:nvSpPr>
         <p:spPr>
           <a:xfrm>
-            <a:off x="731520" y="2103120"/>
-            <a:ext cx="10058400" cy="1097280"/>
+            <a:off x="548640" y="320040"/>
+            <a:ext cx="11064240" cy="731520"/>
           </a:xfrm>
           <a:prstGeom prst="rect">
             <a:avLst/>
@@ -8057,7 +9413,7 @@
               <a:buNone/>
             </a:pPr>
             <a:r>
-              <a:rPr lang="en-US" sz="6400" b="1" dirty="0">
+              <a:rPr lang="en-US" sz="3000" b="1" dirty="0">
                 <a:solidFill>
                   <a:srgbClr val="39FF88"/>
                 </a:solidFill>
@@ -8065,9 +9421,9 @@
                 <a:ea typeface="Courier New" pitchFamily="34" charset="-122"/>
                 <a:cs typeface="Courier New" pitchFamily="34" charset="-120"/>
               </a:rPr>
-              <a:t>Thank you</a:t>
-            </a:r>
-            <a:endParaRPr lang="en-US" sz="6400" dirty="0"/>
+              <a:t>Learnings and future work</a:t>
+            </a:r>
+            <a:endParaRPr lang="en-US" sz="3000" dirty="0"/>
           </a:p>
         </p:txBody>
       </p:sp>
@@ -8079,8 +9435,8 @@
         </p:nvSpPr>
         <p:spPr>
           <a:xfrm>
-            <a:off x="731520" y="3474720"/>
-            <a:ext cx="10058400" cy="548640"/>
+            <a:off x="9418320" y="6446520"/>
+            <a:ext cx="2377440" cy="274320"/>
           </a:xfrm>
           <a:prstGeom prst="rect">
             <a:avLst/>
@@ -8092,34 +9448,59 @@
           <a:bodyPr wrap="square" lIns="0" tIns="0" rIns="0" bIns="0" rtlCol="0" anchor="ctr"/>
           <a:lstStyle/>
           <a:p>
-            <a:pPr indent="0" marL="0">
-              <a:buNone/>
-            </a:pPr>
-            <a:r>
-              <a:rPr lang="en-US" sz="2600" dirty="0">
-                <a:solidFill>
-                  <a:srgbClr val="E6EDF3"/>
+            <a:pPr algn="r" indent="0" marL="0">
+              <a:buNone/>
+            </a:pPr>
+            <a:r>
+              <a:rPr lang="en-US" sz="1000" dirty="0">
+                <a:solidFill>
+                  <a:srgbClr val="8B98A5"/>
                 </a:solidFill>
                 <a:latin typeface="Courier New" pitchFamily="34" charset="0"/>
                 <a:ea typeface="Courier New" pitchFamily="34" charset="-122"/>
                 <a:cs typeface="Courier New" pitchFamily="34" charset="-120"/>
               </a:rPr>
-              <a:t>github.com/Capsturrrr/rudp</a:t>
-            </a:r>
-            <a:endParaRPr lang="en-US" sz="2600" dirty="0"/>
-          </a:p>
-        </p:txBody>
-      </p:sp>
-      <p:sp>
-        <p:nvSpPr>
-          <p:cNvPr id="4" name="Text 2"/>
-          <p:cNvSpPr/>
-          <p:nvPr/>
-        </p:nvSpPr>
-        <p:spPr>
-          <a:xfrm>
-            <a:off x="731520" y="4206240"/>
-            <a:ext cx="10058400" cy="457200"/>
+              <a:t>22 / 23   Smart-RUDP</a:t>
+            </a:r>
+            <a:endParaRPr lang="en-US" sz="1000" dirty="0"/>
+          </a:p>
+        </p:txBody>
+      </p:sp>
+      <p:sp>
+        <p:nvSpPr>
+          <p:cNvPr id="4" name="Shape 2"/>
+          <p:cNvSpPr/>
+          <p:nvPr/>
+        </p:nvSpPr>
+        <p:spPr>
+          <a:xfrm>
+            <a:off x="548640" y="1371600"/>
+            <a:ext cx="5394960" cy="4206240"/>
+          </a:xfrm>
+          <a:prstGeom prst="rect">
+            <a:avLst/>
+          </a:prstGeom>
+          <a:solidFill>
+            <a:srgbClr val="141B24"/>
+          </a:solidFill>
+          <a:ln w="12700">
+            <a:solidFill>
+              <a:srgbClr val="39FF88"/>
+            </a:solidFill>
+            <a:prstDash val="solid"/>
+          </a:ln>
+        </p:spPr>
+      </p:sp>
+      <p:sp>
+        <p:nvSpPr>
+          <p:cNvPr id="5" name="Text 3"/>
+          <p:cNvSpPr/>
+          <p:nvPr/>
+        </p:nvSpPr>
+        <p:spPr>
+          <a:xfrm>
+            <a:off x="731520" y="1508760"/>
+            <a:ext cx="5029200" cy="457200"/>
           </a:xfrm>
           <a:prstGeom prst="rect">
             <a:avLst/>
@@ -8135,17 +9516,266 @@
               <a:buNone/>
             </a:pPr>
             <a:r>
-              <a:rPr lang="en-US" sz="1800" dirty="0">
-                <a:solidFill>
-                  <a:srgbClr val="8B98A5"/>
+              <a:rPr lang="en-US" sz="2000" b="1" dirty="0">
+                <a:solidFill>
+                  <a:srgbClr val="39FF88"/>
+                </a:solidFill>
+                <a:latin typeface="Courier New" pitchFamily="34" charset="0"/>
+                <a:ea typeface="Courier New" pitchFamily="34" charset="-122"/>
+                <a:cs typeface="Courier New" pitchFamily="34" charset="-120"/>
+              </a:rPr>
+              <a:t>Learned</a:t>
+            </a:r>
+            <a:endParaRPr lang="en-US" sz="2000" dirty="0"/>
+          </a:p>
+        </p:txBody>
+      </p:sp>
+      <p:sp>
+        <p:nvSpPr>
+          <p:cNvPr id="6" name="Text 4"/>
+          <p:cNvSpPr/>
+          <p:nvPr/>
+        </p:nvSpPr>
+        <p:spPr>
+          <a:xfrm>
+            <a:off x="731520" y="2011680"/>
+            <a:ext cx="5029200" cy="3429000"/>
+          </a:xfrm>
+          <a:prstGeom prst="rect">
+            <a:avLst/>
+          </a:prstGeom>
+          <a:noFill/>
+          <a:ln/>
+        </p:spPr>
+        <p:txBody>
+          <a:bodyPr wrap="square" lIns="0" tIns="0" rIns="0" bIns="0" rtlCol="0" anchor="t"/>
+          <a:lstStyle/>
+          <a:p>
+            <a:pPr indent="0" marL="0">
+              <a:buNone/>
+            </a:pPr>
+            <a:r>
+              <a:rPr lang="en-US" sz="2000" dirty="0">
+                <a:solidFill>
+                  <a:srgbClr val="E6EDF3"/>
                 </a:solidFill>
                 <a:latin typeface="Calibri" pitchFamily="34" charset="0"/>
                 <a:ea typeface="Calibri" pitchFamily="34" charset="-122"/>
                 <a:cs typeface="Calibri" pitchFamily="34" charset="-120"/>
               </a:rPr>
-              <a:t>Harshavardhan Mallela   Rohit Arya   Shloak Sinha</a:t>
-            </a:r>
-            <a:endParaRPr lang="en-US" sz="1800" dirty="0"/>
+              <a:t>Reliability is a set of simple rules working together.</a:t>
+            </a:r>
+            <a:endParaRPr lang="en-US" sz="2000" dirty="0"/>
+          </a:p>
+          <a:p>
+            <a:pPr indent="0" marL="0">
+              <a:buNone/>
+            </a:pPr>
+            <a:r>
+              <a:rPr lang="en-US" sz="2000" dirty="0">
+                <a:solidFill>
+                  <a:srgbClr val="E6EDF3"/>
+                </a:solidFill>
+                <a:latin typeface="Calibri" pitchFamily="34" charset="0"/>
+                <a:ea typeface="Calibri" pitchFamily="34" charset="-122"/>
+                <a:cs typeface="Calibri" pitchFamily="34" charset="-120"/>
+              </a:rPr>
+              <a:t>Congestion control matters as much as retransmission.</a:t>
+            </a:r>
+            <a:endParaRPr lang="en-US" sz="2000" dirty="0"/>
+          </a:p>
+          <a:p>
+            <a:pPr indent="0" marL="0">
+              <a:buNone/>
+            </a:pPr>
+            <a:r>
+              <a:rPr lang="en-US" sz="2000" dirty="0">
+                <a:solidFill>
+                  <a:srgbClr val="E6EDF3"/>
+                </a:solidFill>
+                <a:latin typeface="Calibri" pitchFamily="34" charset="0"/>
+                <a:ea typeface="Calibri" pitchFamily="34" charset="-122"/>
+                <a:cs typeface="Calibri" pitchFamily="34" charset="-120"/>
+              </a:rPr>
+              <a:t>Testing tools fail in surprising ways.</a:t>
+            </a:r>
+            <a:endParaRPr lang="en-US" sz="2000" dirty="0"/>
+          </a:p>
+        </p:txBody>
+      </p:sp>
+      <p:sp>
+        <p:nvSpPr>
+          <p:cNvPr id="7" name="Shape 5"/>
+          <p:cNvSpPr/>
+          <p:nvPr/>
+        </p:nvSpPr>
+        <p:spPr>
+          <a:xfrm>
+            <a:off x="6217920" y="1371600"/>
+            <a:ext cx="5394960" cy="4206240"/>
+          </a:xfrm>
+          <a:prstGeom prst="rect">
+            <a:avLst/>
+          </a:prstGeom>
+          <a:solidFill>
+            <a:srgbClr val="141B24"/>
+          </a:solidFill>
+          <a:ln w="12700">
+            <a:solidFill>
+              <a:srgbClr val="FFB000"/>
+            </a:solidFill>
+            <a:prstDash val="solid"/>
+          </a:ln>
+        </p:spPr>
+      </p:sp>
+      <p:sp>
+        <p:nvSpPr>
+          <p:cNvPr id="8" name="Text 6"/>
+          <p:cNvSpPr/>
+          <p:nvPr/>
+        </p:nvSpPr>
+        <p:spPr>
+          <a:xfrm>
+            <a:off x="6400800" y="1508760"/>
+            <a:ext cx="5029200" cy="457200"/>
+          </a:xfrm>
+          <a:prstGeom prst="rect">
+            <a:avLst/>
+          </a:prstGeom>
+          <a:noFill/>
+          <a:ln/>
+        </p:spPr>
+        <p:txBody>
+          <a:bodyPr wrap="square" lIns="0" tIns="0" rIns="0" bIns="0" rtlCol="0" anchor="ctr"/>
+          <a:lstStyle/>
+          <a:p>
+            <a:pPr indent="0" marL="0">
+              <a:buNone/>
+            </a:pPr>
+            <a:r>
+              <a:rPr lang="en-US" sz="2000" b="1" dirty="0">
+                <a:solidFill>
+                  <a:srgbClr val="FFB000"/>
+                </a:solidFill>
+                <a:latin typeface="Courier New" pitchFamily="34" charset="0"/>
+                <a:ea typeface="Courier New" pitchFamily="34" charset="-122"/>
+                <a:cs typeface="Courier New" pitchFamily="34" charset="-120"/>
+              </a:rPr>
+              <a:t>Next</a:t>
+            </a:r>
+            <a:endParaRPr lang="en-US" sz="2000" dirty="0"/>
+          </a:p>
+        </p:txBody>
+      </p:sp>
+      <p:sp>
+        <p:nvSpPr>
+          <p:cNvPr id="9" name="Text 7"/>
+          <p:cNvSpPr/>
+          <p:nvPr/>
+        </p:nvSpPr>
+        <p:spPr>
+          <a:xfrm>
+            <a:off x="6400800" y="2011680"/>
+            <a:ext cx="5029200" cy="3429000"/>
+          </a:xfrm>
+          <a:prstGeom prst="rect">
+            <a:avLst/>
+          </a:prstGeom>
+          <a:noFill/>
+          <a:ln/>
+        </p:spPr>
+        <p:txBody>
+          <a:bodyPr wrap="square" lIns="0" tIns="0" rIns="0" bIns="0" rtlCol="0" anchor="t"/>
+          <a:lstStyle/>
+          <a:p>
+            <a:pPr indent="0" marL="0">
+              <a:buNone/>
+            </a:pPr>
+            <a:r>
+              <a:rPr lang="en-US" sz="2000" dirty="0">
+                <a:solidFill>
+                  <a:srgbClr val="E6EDF3"/>
+                </a:solidFill>
+                <a:latin typeface="Calibri" pitchFamily="34" charset="0"/>
+                <a:ea typeface="Calibri" pitchFamily="34" charset="-122"/>
+                <a:cs typeface="Calibri" pitchFamily="34" charset="-120"/>
+              </a:rPr>
+              <a:t>Selective ACK in the C code (largest gain in simulation)</a:t>
+            </a:r>
+            <a:endParaRPr lang="en-US" sz="2000" dirty="0"/>
+          </a:p>
+          <a:p>
+            <a:pPr indent="0" marL="0">
+              <a:buNone/>
+            </a:pPr>
+            <a:r>
+              <a:rPr lang="en-US" sz="2000" dirty="0">
+                <a:solidFill>
+                  <a:srgbClr val="E6EDF3"/>
+                </a:solidFill>
+                <a:latin typeface="Calibri" pitchFamily="34" charset="0"/>
+                <a:ea typeface="Calibri" pitchFamily="34" charset="-122"/>
+                <a:cs typeface="Calibri" pitchFamily="34" charset="-120"/>
+              </a:rPr>
+              <a:t>Deep agent in the C transport</a:t>
+            </a:r>
+            <a:endParaRPr lang="en-US" sz="2000" dirty="0"/>
+          </a:p>
+          <a:p>
+            <a:pPr indent="0" marL="0">
+              <a:buNone/>
+            </a:pPr>
+            <a:r>
+              <a:rPr lang="en-US" sz="2000" dirty="0">
+                <a:solidFill>
+                  <a:srgbClr val="E6EDF3"/>
+                </a:solidFill>
+                <a:latin typeface="Calibri" pitchFamily="34" charset="0"/>
+                <a:ea typeface="Calibri" pitchFamily="34" charset="-122"/>
+                <a:cs typeface="Calibri" pitchFamily="34" charset="-120"/>
+              </a:rPr>
+              <a:t>Kernel netem and real multi-machine tests</a:t>
+            </a:r>
+            <a:endParaRPr lang="en-US" sz="2000" dirty="0"/>
+          </a:p>
+        </p:txBody>
+      </p:sp>
+      <p:sp>
+        <p:nvSpPr>
+          <p:cNvPr id="10" name="Text 8"/>
+          <p:cNvSpPr/>
+          <p:nvPr/>
+        </p:nvSpPr>
+        <p:spPr>
+          <a:xfrm>
+            <a:off x="548640" y="5852160"/>
+            <a:ext cx="10972800" cy="365760"/>
+          </a:xfrm>
+          <a:prstGeom prst="rect">
+            <a:avLst/>
+          </a:prstGeom>
+          <a:noFill/>
+          <a:ln/>
+        </p:spPr>
+        <p:txBody>
+          <a:bodyPr wrap="square" lIns="0" tIns="0" rIns="0" bIns="0" rtlCol="0" anchor="ctr"/>
+          <a:lstStyle/>
+          <a:p>
+            <a:pPr indent="0" marL="0">
+              <a:buNone/>
+            </a:pPr>
+            <a:r>
+              <a:rPr lang="en-US" sz="1400" dirty="0">
+                <a:solidFill>
+                  <a:srgbClr val="8B98A5"/>
+                </a:solidFill>
+                <a:latin typeface="Calibri" pitchFamily="34" charset="0"/>
+                <a:ea typeface="Calibri" pitchFamily="34" charset="-122"/>
+                <a:cs typeface="Calibri" pitchFamily="34" charset="-120"/>
+              </a:rPr>
+              <a:t>Limits: Go-Back-N wastes bandwidth and suffers under reordering; C tests use an emulated path; the tabular agent did not beat AIMD in C.</a:t>
+            </a:r>
+            <a:endParaRPr lang="en-US" sz="1400" dirty="0"/>
           </a:p>
         </p:txBody>
       </p:sp>
@@ -8189,6 +9819,155 @@
         </p:nvSpPr>
         <p:spPr>
           <a:xfrm>
+            <a:off x="731520" y="2103120"/>
+            <a:ext cx="10058400" cy="1097280"/>
+          </a:xfrm>
+          <a:prstGeom prst="rect">
+            <a:avLst/>
+          </a:prstGeom>
+          <a:noFill/>
+          <a:ln/>
+        </p:spPr>
+        <p:txBody>
+          <a:bodyPr wrap="square" lIns="0" tIns="0" rIns="0" bIns="0" rtlCol="0" anchor="ctr"/>
+          <a:lstStyle/>
+          <a:p>
+            <a:pPr indent="0" marL="0">
+              <a:buNone/>
+            </a:pPr>
+            <a:r>
+              <a:rPr lang="en-US" sz="6400" b="1" dirty="0">
+                <a:solidFill>
+                  <a:srgbClr val="39FF88"/>
+                </a:solidFill>
+                <a:latin typeface="Courier New" pitchFamily="34" charset="0"/>
+                <a:ea typeface="Courier New" pitchFamily="34" charset="-122"/>
+                <a:cs typeface="Courier New" pitchFamily="34" charset="-120"/>
+              </a:rPr>
+              <a:t>Thank you</a:t>
+            </a:r>
+            <a:endParaRPr lang="en-US" sz="6400" dirty="0"/>
+          </a:p>
+        </p:txBody>
+      </p:sp>
+      <p:sp>
+        <p:nvSpPr>
+          <p:cNvPr id="3" name="Text 1"/>
+          <p:cNvSpPr/>
+          <p:nvPr/>
+        </p:nvSpPr>
+        <p:spPr>
+          <a:xfrm>
+            <a:off x="731520" y="3474720"/>
+            <a:ext cx="10058400" cy="548640"/>
+          </a:xfrm>
+          <a:prstGeom prst="rect">
+            <a:avLst/>
+          </a:prstGeom>
+          <a:noFill/>
+          <a:ln/>
+        </p:spPr>
+        <p:txBody>
+          <a:bodyPr wrap="square" lIns="0" tIns="0" rIns="0" bIns="0" rtlCol="0" anchor="ctr"/>
+          <a:lstStyle/>
+          <a:p>
+            <a:pPr indent="0" marL="0">
+              <a:buNone/>
+            </a:pPr>
+            <a:r>
+              <a:rPr lang="en-US" sz="2600" dirty="0">
+                <a:solidFill>
+                  <a:srgbClr val="E6EDF3"/>
+                </a:solidFill>
+                <a:latin typeface="Courier New" pitchFamily="34" charset="0"/>
+                <a:ea typeface="Courier New" pitchFamily="34" charset="-122"/>
+                <a:cs typeface="Courier New" pitchFamily="34" charset="-120"/>
+              </a:rPr>
+              <a:t>github.com/Capsturrrr/rudp</a:t>
+            </a:r>
+            <a:endParaRPr lang="en-US" sz="2600" dirty="0"/>
+          </a:p>
+        </p:txBody>
+      </p:sp>
+      <p:sp>
+        <p:nvSpPr>
+          <p:cNvPr id="4" name="Text 2"/>
+          <p:cNvSpPr/>
+          <p:nvPr/>
+        </p:nvSpPr>
+        <p:spPr>
+          <a:xfrm>
+            <a:off x="731520" y="4206240"/>
+            <a:ext cx="10058400" cy="457200"/>
+          </a:xfrm>
+          <a:prstGeom prst="rect">
+            <a:avLst/>
+          </a:prstGeom>
+          <a:noFill/>
+          <a:ln/>
+        </p:spPr>
+        <p:txBody>
+          <a:bodyPr wrap="square" lIns="0" tIns="0" rIns="0" bIns="0" rtlCol="0" anchor="ctr"/>
+          <a:lstStyle/>
+          <a:p>
+            <a:pPr indent="0" marL="0">
+              <a:buNone/>
+            </a:pPr>
+            <a:r>
+              <a:rPr lang="en-US" sz="1800" dirty="0">
+                <a:solidFill>
+                  <a:srgbClr val="8B98A5"/>
+                </a:solidFill>
+                <a:latin typeface="Calibri" pitchFamily="34" charset="0"/>
+                <a:ea typeface="Calibri" pitchFamily="34" charset="-122"/>
+                <a:cs typeface="Calibri" pitchFamily="34" charset="-120"/>
+              </a:rPr>
+              <a:t>Harshavardhan Mallela   Rohit Arya   Shloak Sinha</a:t>
+            </a:r>
+            <a:endParaRPr lang="en-US" sz="1800" dirty="0"/>
+          </a:p>
+        </p:txBody>
+      </p:sp>
+    </p:spTree>
+  </p:cSld>
+  <p:clrMapOvr>
+    <a:masterClrMapping/>
+  </p:clrMapOvr>
+</p:sld>
+</file>
+
+<file path=ppt/slides/slide24.xml><?xml version="1.0" encoding="utf-8"?>
+<p:sld xmlns:a="http://schemas.openxmlformats.org/drawingml/2006/main" xmlns:r="http://schemas.openxmlformats.org/officeDocument/2006/relationships" xmlns:p="http://schemas.openxmlformats.org/presentationml/2006/main">
+  <p:cSld name="Slide 24">
+    <p:bg>
+      <p:bgPr>
+        <a:solidFill>
+          <a:srgbClr val="0B0F14"/>
+        </a:solidFill>
+      </p:bgPr>
+    </p:bg>
+    <p:spTree>
+      <p:nvGrpSpPr>
+        <p:cNvPr id="1" name=""/>
+        <p:cNvGrpSpPr/>
+        <p:nvPr/>
+      </p:nvGrpSpPr>
+      <p:grpSpPr>
+        <a:xfrm>
+          <a:off x="0" y="0"/>
+          <a:ext cx="0" cy="0"/>
+          <a:chOff x="0" y="0"/>
+          <a:chExt cx="0" cy="0"/>
+        </a:xfrm>
+      </p:grpSpPr>
+      <p:sp>
+        <p:nvSpPr>
+          <p:cNvPr id="2" name="Text 0"/>
+          <p:cNvSpPr/>
+          <p:nvPr/>
+        </p:nvSpPr>
+        <p:spPr>
+          <a:xfrm>
             <a:off x="548640" y="320040"/>
             <a:ext cx="11064240" cy="731520"/>
           </a:xfrm>
@@ -8493,7 +10272,7 @@
                 <a:ea typeface="Courier New" pitchFamily="34" charset="-122"/>
                 <a:cs typeface="Courier New" pitchFamily="34" charset="-120"/>
               </a:rPr>
-              <a:t>3 / 22   Smart-RUDP</a:t>
+              <a:t>3 / 23   Smart-RUDP</a:t>
             </a:r>
             <a:endParaRPr lang="en-US" sz="1000" dirty="0"/>
           </a:p>
@@ -8887,7 +10666,7 @@
                 <a:ea typeface="Courier New" pitchFamily="34" charset="-122"/>
                 <a:cs typeface="Courier New" pitchFamily="34" charset="-120"/>
               </a:rPr>
-              <a:t>4 / 22   Smart-RUDP</a:t>
+              <a:t>4 / 23   Smart-RUDP</a:t>
             </a:r>
             <a:endParaRPr lang="en-US" sz="1000" dirty="0"/>
           </a:p>
@@ -9448,7 +11227,7 @@
                 <a:ea typeface="Courier New" pitchFamily="34" charset="-122"/>
                 <a:cs typeface="Courier New" pitchFamily="34" charset="-120"/>
               </a:rPr>
-              <a:t>5 / 22   Smart-RUDP</a:t>
+              <a:t>5 / 23   Smart-RUDP</a:t>
             </a:r>
             <a:endParaRPr lang="en-US" sz="1000" dirty="0"/>
           </a:p>
@@ -10887,7 +12666,7 @@
                 <a:ea typeface="Courier New" pitchFamily="34" charset="-122"/>
                 <a:cs typeface="Courier New" pitchFamily="34" charset="-120"/>
               </a:rPr>
-              <a:t>6 / 22   Smart-RUDP</a:t>
+              <a:t>6 / 23   Smart-RUDP</a:t>
             </a:r>
             <a:endParaRPr lang="en-US" sz="1000" dirty="0"/>
           </a:p>
@@ -12122,7 +13901,7 @@
                 <a:ea typeface="Courier New" pitchFamily="34" charset="-122"/>
                 <a:cs typeface="Courier New" pitchFamily="34" charset="-120"/>
               </a:rPr>
-              <a:t>7 / 22   Smart-RUDP</a:t>
+              <a:t>7 / 23   Smart-RUDP</a:t>
             </a:r>
             <a:endParaRPr lang="en-US" sz="1000" dirty="0"/>
           </a:p>
@@ -12565,7 +14344,7 @@
                 <a:ea typeface="Courier New" pitchFamily="34" charset="-122"/>
                 <a:cs typeface="Courier New" pitchFamily="34" charset="-120"/>
               </a:rPr>
-              <a:t>8 / 22   Smart-RUDP</a:t>
+              <a:t>8 / 23   Smart-RUDP</a:t>
             </a:r>
             <a:endParaRPr lang="en-US" sz="1000" dirty="0"/>
           </a:p>
@@ -12865,7 +14644,7 @@
                 <a:ea typeface="Courier New" pitchFamily="34" charset="-122"/>
                 <a:cs typeface="Courier New" pitchFamily="34" charset="-120"/>
               </a:rPr>
-              <a:t>9 / 22   Smart-RUDP</a:t>
+              <a:t>9 / 23   Smart-RUDP</a:t>
             </a:r>
             <a:endParaRPr lang="en-US" sz="1000" dirty="0"/>
           </a:p>

--- a/docs/RUDP_Presentation.pptx
+++ b/docs/RUDP_Presentation.pptx
@@ -29,9 +29,10 @@
     <p:sldId id="277" r:id="rId23"/>
     <p:sldId id="278" r:id="rId24"/>
     <p:sldId id="279" r:id="rId25"/>
+    <p:sldId id="280" r:id="rId26"/>
   </p:sldIdLst>
   <p:notesMasterIdLst>
-    <p:notesMasterId r:id="rId26"/>
+    <p:notesMasterId r:id="rId27"/>
   </p:notesMasterIdLst>
   <p:sldSz cx="12192000" cy="6858000"/>
   <p:notesSz cx="6858000" cy="12192000"/>
@@ -1957,6 +1958,94 @@
             <a:fld id="{F7021451-1387-4CA6-816F-3879F97B5CBC}" type="slidenum">
               <a:rPr lang="en-US"/>
               <a:t>24</a:t>
+            </a:fld>
+            <a:endParaRPr lang="en-US"/>
+          </a:p>
+        </p:txBody>
+      </p:sp>
+    </p:spTree>
+    <p:extLst>
+      <p:ext uri="{BB962C8B-B14F-4D97-AF65-F5344CB8AC3E}">
+        <p14:creationId xmlns:p14="http://schemas.microsoft.com/office/powerpoint/2010/main" val="1024086991"/>
+      </p:ext>
+    </p:extLst>
+  </p:cSld>
+  <p:clrMapOvr>
+    <a:masterClrMapping/>
+  </p:clrMapOvr>
+</p:notes>
+</file>
+
+<file path=ppt/notesSlides/notesSlide25.xml><?xml version="1.0" encoding="utf-8"?>
+<p:notes xmlns:a="http://schemas.openxmlformats.org/drawingml/2006/main" xmlns:r="http://schemas.openxmlformats.org/officeDocument/2006/relationships" xmlns:p="http://schemas.openxmlformats.org/presentationml/2006/main">
+  <p:cSld>
+    <p:spTree>
+      <p:nvGrpSpPr>
+        <p:cNvPr id="1" name=""/>
+        <p:cNvGrpSpPr/>
+        <p:nvPr/>
+      </p:nvGrpSpPr>
+      <p:grpSpPr>
+        <a:xfrm>
+          <a:off x="0" y="0"/>
+          <a:ext cx="0" cy="0"/>
+          <a:chOff x="0" y="0"/>
+          <a:chExt cx="0" cy="0"/>
+        </a:xfrm>
+      </p:grpSpPr>
+      <p:sp>
+        <p:nvSpPr>
+          <p:cNvPr id="2" name="Slide Image Placeholder 1"/>
+          <p:cNvSpPr>
+            <a:spLocks noGrp="1" noRot="1" noChangeAspect="1"/>
+          </p:cNvSpPr>
+          <p:nvPr>
+            <p:ph type="sldImg"/>
+          </p:nvPr>
+        </p:nvSpPr>
+        <p:spPr/>
+      </p:sp>
+      <p:sp>
+        <p:nvSpPr>
+          <p:cNvPr id="3" name="Notes Placeholder 2"/>
+          <p:cNvSpPr>
+            <a:spLocks noGrp="1"/>
+          </p:cNvSpPr>
+          <p:nvPr>
+            <p:ph type="body" idx="1"/>
+          </p:nvPr>
+        </p:nvSpPr>
+        <p:spPr/>
+        <p:txBody>
+          <a:bodyPr/>
+          <a:lstStyle/>
+          <a:p>
+            <a:r>
+              <a:rPr lang="en-US" dirty="0"/>
+              <a:t/>
+            </a:r>
+            <a:endParaRPr lang="en-US" dirty="0"/>
+          </a:p>
+        </p:txBody>
+      </p:sp>
+      <p:sp>
+        <p:nvSpPr>
+          <p:cNvPr id="4" name="Slide Number Placeholder 3"/>
+          <p:cNvSpPr>
+            <a:spLocks noGrp="1"/>
+          </p:cNvSpPr>
+          <p:nvPr>
+            <p:ph type="sldNum" sz="quarter" idx="10"/>
+          </p:nvPr>
+        </p:nvSpPr>
+        <p:spPr/>
+        <p:txBody>
+          <a:bodyPr/>
+          <a:lstStyle/>
+          <a:p>
+            <a:fld id="{F7021451-1387-4CA6-816F-3879F97B5CBC}" type="slidenum">
+              <a:rPr lang="en-US"/>
+              <a:t>25</a:t>
             </a:fld>
             <a:endParaRPr lang="en-US"/>
           </a:p>
@@ -3182,7 +3271,7 @@
                 <a:ea typeface="Courier New" pitchFamily="34" charset="-122"/>
                 <a:cs typeface="Courier New" pitchFamily="34" charset="-120"/>
               </a:rPr>
-              <a:t>10 / 23   Smart-RUDP</a:t>
+              <a:t>10 / 24   Smart-RUDP</a:t>
             </a:r>
             <a:endParaRPr lang="en-US" sz="1000" dirty="0"/>
           </a:p>
@@ -3379,7 +3468,7 @@
                 <a:ea typeface="Courier New" pitchFamily="34" charset="-122"/>
                 <a:cs typeface="Courier New" pitchFamily="34" charset="-120"/>
               </a:rPr>
-              <a:t>11 / 23   Smart-RUDP</a:t>
+              <a:t>11 / 24   Smart-RUDP</a:t>
             </a:r>
             <a:endParaRPr lang="en-US" sz="1000" dirty="0"/>
           </a:p>
@@ -4209,7 +4298,7 @@
                 <a:ea typeface="Courier New" pitchFamily="34" charset="-122"/>
                 <a:cs typeface="Courier New" pitchFamily="34" charset="-120"/>
               </a:rPr>
-              <a:t>12 / 23   Smart-RUDP</a:t>
+              <a:t>12 / 24   Smart-RUDP</a:t>
             </a:r>
             <a:endParaRPr lang="en-US" sz="1000" dirty="0"/>
           </a:p>
@@ -4506,7 +4595,7 @@
                 <a:ea typeface="Courier New" pitchFamily="34" charset="-122"/>
                 <a:cs typeface="Courier New" pitchFamily="34" charset="-120"/>
               </a:rPr>
-              <a:t>13 / 23   Smart-RUDP</a:t>
+              <a:t>13 / 24   Smart-RUDP</a:t>
             </a:r>
             <a:endParaRPr lang="en-US" sz="1000" dirty="0"/>
           </a:p>
@@ -4806,7 +4895,7 @@
                 <a:ea typeface="Courier New" pitchFamily="34" charset="-122"/>
                 <a:cs typeface="Courier New" pitchFamily="34" charset="-120"/>
               </a:rPr>
-              <a:t>14 / 23   Smart-RUDP</a:t>
+              <a:t>14 / 24   Smart-RUDP</a:t>
             </a:r>
             <a:endParaRPr lang="en-US" sz="1000" dirty="0"/>
           </a:p>
@@ -5190,7 +5279,7 @@
                 <a:ea typeface="Courier New" pitchFamily="34" charset="-122"/>
                 <a:cs typeface="Courier New" pitchFamily="34" charset="-120"/>
               </a:rPr>
-              <a:t>15 / 23   Smart-RUDP</a:t>
+              <a:t>15 / 24   Smart-RUDP</a:t>
             </a:r>
             <a:endParaRPr lang="en-US" sz="1000" dirty="0"/>
           </a:p>
@@ -5648,7 +5737,7 @@
                 <a:ea typeface="Courier New" pitchFamily="34" charset="-122"/>
                 <a:cs typeface="Courier New" pitchFamily="34" charset="-120"/>
               </a:rPr>
-              <a:t>16 / 23   Smart-RUDP</a:t>
+              <a:t>16 / 24   Smart-RUDP</a:t>
             </a:r>
             <a:endParaRPr lang="en-US" sz="1000" dirty="0"/>
           </a:p>
@@ -6333,7 +6422,7 @@
                 <a:ea typeface="Courier New" pitchFamily="34" charset="-122"/>
                 <a:cs typeface="Courier New" pitchFamily="34" charset="-120"/>
               </a:rPr>
-              <a:t>17 / 23   Smart-RUDP</a:t>
+              <a:t>17 / 24   Smart-RUDP</a:t>
             </a:r>
             <a:endParaRPr lang="en-US" sz="1000" dirty="0"/>
           </a:p>
@@ -6573,7 +6662,7 @@
                 <a:ea typeface="Courier New" pitchFamily="34" charset="-122"/>
                 <a:cs typeface="Courier New" pitchFamily="34" charset="-120"/>
               </a:rPr>
-              <a:t>18 / 23   Smart-RUDP</a:t>
+              <a:t>18 / 24   Smart-RUDP</a:t>
             </a:r>
             <a:endParaRPr lang="en-US" sz="1000" dirty="0"/>
           </a:p>
@@ -6813,7 +6902,7 @@
                 <a:ea typeface="Courier New" pitchFamily="34" charset="-122"/>
                 <a:cs typeface="Courier New" pitchFamily="34" charset="-120"/>
               </a:rPr>
-              <a:t>19 / 23   Smart-RUDP</a:t>
+              <a:t>19 / 24   Smart-RUDP</a:t>
             </a:r>
             <a:endParaRPr lang="en-US" sz="1000" dirty="0"/>
           </a:p>
@@ -7035,7 +7124,7 @@
                 <a:ea typeface="Courier New" pitchFamily="34" charset="-122"/>
                 <a:cs typeface="Courier New" pitchFamily="34" charset="-120"/>
               </a:rPr>
-              <a:t>2 / 23   Smart-RUDP</a:t>
+              <a:t>2 / 24   Smart-RUDP</a:t>
             </a:r>
             <a:endParaRPr lang="en-US" sz="1000" dirty="0"/>
           </a:p>
@@ -7429,7 +7518,7 @@
                 <a:ea typeface="Courier New" pitchFamily="34" charset="-122"/>
                 <a:cs typeface="Courier New" pitchFamily="34" charset="-120"/>
               </a:rPr>
-              <a:t>20 / 23   Smart-RUDP</a:t>
+              <a:t>20 / 24   Smart-RUDP</a:t>
             </a:r>
             <a:endParaRPr lang="en-US" sz="1000" dirty="0"/>
           </a:p>
@@ -7753,7 +7842,7 @@
                 <a:ea typeface="Courier New" pitchFamily="34" charset="-122"/>
                 <a:cs typeface="Courier New" pitchFamily="34" charset="-120"/>
               </a:rPr>
-              <a:t>21 / 23   Smart-RUDP</a:t>
+              <a:t>21 / 24   Smart-RUDP</a:t>
             </a:r>
             <a:endParaRPr lang="en-US" sz="1000" dirty="0"/>
           </a:p>
@@ -9421,7 +9510,7 @@
                 <a:ea typeface="Courier New" pitchFamily="34" charset="-122"/>
                 <a:cs typeface="Courier New" pitchFamily="34" charset="-120"/>
               </a:rPr>
-              <a:t>Learnings and future work</a:t>
+              <a:t>Neural agent in the C transport</a:t>
             </a:r>
             <a:endParaRPr lang="en-US" sz="3000" dirty="0"/>
           </a:p>
@@ -9460,47 +9549,1150 @@
                 <a:ea typeface="Courier New" pitchFamily="34" charset="-122"/>
                 <a:cs typeface="Courier New" pitchFamily="34" charset="-120"/>
               </a:rPr>
-              <a:t>22 / 23   Smart-RUDP</a:t>
+              <a:t>22 / 24   Smart-RUDP</a:t>
             </a:r>
             <a:endParaRPr lang="en-US" sz="1000" dirty="0"/>
           </a:p>
         </p:txBody>
       </p:sp>
-      <p:sp>
-        <p:nvSpPr>
-          <p:cNvPr id="4" name="Shape 2"/>
-          <p:cNvSpPr/>
-          <p:nvPr/>
-        </p:nvSpPr>
-        <p:spPr>
-          <a:xfrm>
-            <a:off x="548640" y="1371600"/>
-            <a:ext cx="5394960" cy="4206240"/>
-          </a:xfrm>
-          <a:prstGeom prst="rect">
-            <a:avLst/>
-          </a:prstGeom>
-          <a:solidFill>
-            <a:srgbClr val="141B24"/>
-          </a:solidFill>
-          <a:ln w="12700">
-            <a:solidFill>
-              <a:srgbClr val="39FF88"/>
-            </a:solidFill>
-            <a:prstDash val="solid"/>
-          </a:ln>
-        </p:spPr>
-      </p:sp>
-      <p:sp>
-        <p:nvSpPr>
-          <p:cNvPr id="5" name="Text 3"/>
-          <p:cNvSpPr/>
-          <p:nvPr/>
-        </p:nvSpPr>
-        <p:spPr>
-          <a:xfrm>
-            <a:off x="731520" y="1508760"/>
-            <a:ext cx="5029200" cy="457200"/>
+      <p:graphicFrame>
+        <p:nvGraphicFramePr>
+          <p:cNvPr id="23" name="Table 0"/>
+          <p:cNvGraphicFramePr>
+            <a:graphicFrameLocks noGrp="1"/>
+          </p:cNvGraphicFramePr>
+          <p:nvPr>
+            <p:extLst>
+              <p:ext uri="{D42A27DB-BD31-4B8C-83A1-F6EECF244321}">
+                <p14:modId xmlns:p14="http://schemas.microsoft.com/office/powerpoint/2010/main" val="1579011935"/>
+              </p:ext>
+            </p:extLst>
+          </p:nvPr>
+        </p:nvGraphicFramePr>
+        <p:xfrm>
+          <a:off x="548640" y="1188720"/>
+          <a:ext cx="6583680" cy="914400"/>
+        </p:xfrm>
+        <a:graphic>
+          <a:graphicData uri="http://schemas.openxmlformats.org/drawingml/2006/table">
+            <a:tbl>
+              <a:tblPr/>
+              <a:tblGrid>
+                <a:gridCol w="2468880"/>
+                <a:gridCol w="1280160"/>
+                <a:gridCol w="1463040"/>
+                <a:gridCol w="1371600"/>
+              </a:tblGrid>
+              <a:tr h="457200">
+                <a:tc>
+                  <a:txBody>
+                    <a:bodyPr/>
+                    <a:lstStyle/>
+                    <a:p>
+                      <a:pPr indent="0" marL="0">
+                        <a:buNone/>
+                      </a:pPr>
+                      <a:r>
+                        <a:rPr lang="en-US" sz="1300" b="1" dirty="0">
+                          <a:solidFill>
+                            <a:srgbClr val="0B0F14"/>
+                          </a:solidFill>
+                          <a:latin typeface="Courier New" pitchFamily="34" charset="0"/>
+                          <a:ea typeface="Courier New" pitchFamily="34" charset="-122"/>
+                          <a:cs typeface="Courier New" pitchFamily="34" charset="-120"/>
+                        </a:rPr>
+                        <a:t>1,200 packets, C transport</a:t>
+                      </a:r>
+                      <a:endParaRPr lang="en-US" sz="1300" dirty="0">
+                        <a:latin typeface="Courier New" charset="0"/>
+                        <a:ea typeface="Courier New" charset="0"/>
+                        <a:cs typeface="Courier New" charset="0"/>
+                      </a:endParaRPr>
+                    </a:p>
+                  </a:txBody>
+                  <a:tcPr marL="91440" marR="91440" marT="45720" marB="45720">
+                    <a:lnL w="12700" cap="flat" cmpd="sng" algn="ctr">
+                      <a:solidFill>
+                        <a:srgbClr val="2A3441"/>
+                      </a:solidFill>
+                      <a:prstDash val="solid"/>
+                      <a:round/>
+                      <a:headEnd type="none" w="med" len="med"/>
+                      <a:tailEnd type="none" w="med" len="med"/>
+                    </a:lnL>
+                    <a:lnR w="12700" cap="flat" cmpd="sng" algn="ctr">
+                      <a:solidFill>
+                        <a:srgbClr val="2A3441"/>
+                      </a:solidFill>
+                      <a:prstDash val="solid"/>
+                      <a:round/>
+                      <a:headEnd type="none" w="med" len="med"/>
+                      <a:tailEnd type="none" w="med" len="med"/>
+                    </a:lnR>
+                    <a:lnT w="12700" cap="flat" cmpd="sng" algn="ctr">
+                      <a:solidFill>
+                        <a:srgbClr val="2A3441"/>
+                      </a:solidFill>
+                      <a:prstDash val="solid"/>
+                      <a:round/>
+                      <a:headEnd type="none" w="med" len="med"/>
+                      <a:tailEnd type="none" w="med" len="med"/>
+                    </a:lnT>
+                    <a:lnB w="12700" cap="flat" cmpd="sng" algn="ctr">
+                      <a:solidFill>
+                        <a:srgbClr val="2A3441"/>
+                      </a:solidFill>
+                      <a:prstDash val="solid"/>
+                      <a:round/>
+                      <a:headEnd type="none" w="med" len="med"/>
+                      <a:tailEnd type="none" w="med" len="med"/>
+                    </a:lnB>
+                    <a:solidFill>
+                      <a:srgbClr val="39FF88"/>
+                    </a:solidFill>
+                  </a:tcPr>
+                </a:tc>
+                <a:tc>
+                  <a:txBody>
+                    <a:bodyPr/>
+                    <a:lstStyle/>
+                    <a:p>
+                      <a:pPr indent="0" marL="0">
+                        <a:buNone/>
+                      </a:pPr>
+                      <a:r>
+                        <a:rPr lang="en-US" sz="1300" b="1" dirty="0">
+                          <a:solidFill>
+                            <a:srgbClr val="0B0F14"/>
+                          </a:solidFill>
+                          <a:latin typeface="Courier New" pitchFamily="34" charset="0"/>
+                          <a:ea typeface="Courier New" pitchFamily="34" charset="-122"/>
+                          <a:cs typeface="Courier New" pitchFamily="34" charset="-120"/>
+                        </a:rPr>
+                        <a:t>AIMD</a:t>
+                      </a:r>
+                      <a:endParaRPr lang="en-US" sz="1300" dirty="0">
+                        <a:latin typeface="Courier New" charset="0"/>
+                        <a:ea typeface="Courier New" charset="0"/>
+                        <a:cs typeface="Courier New" charset="0"/>
+                      </a:endParaRPr>
+                    </a:p>
+                  </a:txBody>
+                  <a:tcPr marL="91440" marR="91440" marT="45720" marB="45720">
+                    <a:lnL w="12700" cap="flat" cmpd="sng" algn="ctr">
+                      <a:solidFill>
+                        <a:srgbClr val="2A3441"/>
+                      </a:solidFill>
+                      <a:prstDash val="solid"/>
+                      <a:round/>
+                      <a:headEnd type="none" w="med" len="med"/>
+                      <a:tailEnd type="none" w="med" len="med"/>
+                    </a:lnL>
+                    <a:lnR w="12700" cap="flat" cmpd="sng" algn="ctr">
+                      <a:solidFill>
+                        <a:srgbClr val="2A3441"/>
+                      </a:solidFill>
+                      <a:prstDash val="solid"/>
+                      <a:round/>
+                      <a:headEnd type="none" w="med" len="med"/>
+                      <a:tailEnd type="none" w="med" len="med"/>
+                    </a:lnR>
+                    <a:lnT w="12700" cap="flat" cmpd="sng" algn="ctr">
+                      <a:solidFill>
+                        <a:srgbClr val="2A3441"/>
+                      </a:solidFill>
+                      <a:prstDash val="solid"/>
+                      <a:round/>
+                      <a:headEnd type="none" w="med" len="med"/>
+                      <a:tailEnd type="none" w="med" len="med"/>
+                    </a:lnT>
+                    <a:lnB w="12700" cap="flat" cmpd="sng" algn="ctr">
+                      <a:solidFill>
+                        <a:srgbClr val="2A3441"/>
+                      </a:solidFill>
+                      <a:prstDash val="solid"/>
+                      <a:round/>
+                      <a:headEnd type="none" w="med" len="med"/>
+                      <a:tailEnd type="none" w="med" len="med"/>
+                    </a:lnB>
+                    <a:solidFill>
+                      <a:srgbClr val="39FF88"/>
+                    </a:solidFill>
+                  </a:tcPr>
+                </a:tc>
+                <a:tc>
+                  <a:txBody>
+                    <a:bodyPr/>
+                    <a:lstStyle/>
+                    <a:p>
+                      <a:pPr indent="0" marL="0">
+                        <a:buNone/>
+                      </a:pPr>
+                      <a:r>
+                        <a:rPr lang="en-US" sz="1300" b="1" dirty="0">
+                          <a:solidFill>
+                            <a:srgbClr val="0B0F14"/>
+                          </a:solidFill>
+                          <a:latin typeface="Courier New" pitchFamily="34" charset="0"/>
+                          <a:ea typeface="Courier New" pitchFamily="34" charset="-122"/>
+                          <a:cs typeface="Courier New" pitchFamily="34" charset="-120"/>
+                        </a:rPr>
+                        <a:t>Table (rl2)</a:t>
+                      </a:r>
+                      <a:endParaRPr lang="en-US" sz="1300" dirty="0">
+                        <a:latin typeface="Courier New" charset="0"/>
+                        <a:ea typeface="Courier New" charset="0"/>
+                        <a:cs typeface="Courier New" charset="0"/>
+                      </a:endParaRPr>
+                    </a:p>
+                  </a:txBody>
+                  <a:tcPr marL="91440" marR="91440" marT="45720" marB="45720">
+                    <a:lnL w="12700" cap="flat" cmpd="sng" algn="ctr">
+                      <a:solidFill>
+                        <a:srgbClr val="2A3441"/>
+                      </a:solidFill>
+                      <a:prstDash val="solid"/>
+                      <a:round/>
+                      <a:headEnd type="none" w="med" len="med"/>
+                      <a:tailEnd type="none" w="med" len="med"/>
+                    </a:lnL>
+                    <a:lnR w="12700" cap="flat" cmpd="sng" algn="ctr">
+                      <a:solidFill>
+                        <a:srgbClr val="2A3441"/>
+                      </a:solidFill>
+                      <a:prstDash val="solid"/>
+                      <a:round/>
+                      <a:headEnd type="none" w="med" len="med"/>
+                      <a:tailEnd type="none" w="med" len="med"/>
+                    </a:lnR>
+                    <a:lnT w="12700" cap="flat" cmpd="sng" algn="ctr">
+                      <a:solidFill>
+                        <a:srgbClr val="2A3441"/>
+                      </a:solidFill>
+                      <a:prstDash val="solid"/>
+                      <a:round/>
+                      <a:headEnd type="none" w="med" len="med"/>
+                      <a:tailEnd type="none" w="med" len="med"/>
+                    </a:lnT>
+                    <a:lnB w="12700" cap="flat" cmpd="sng" algn="ctr">
+                      <a:solidFill>
+                        <a:srgbClr val="2A3441"/>
+                      </a:solidFill>
+                      <a:prstDash val="solid"/>
+                      <a:round/>
+                      <a:headEnd type="none" w="med" len="med"/>
+                      <a:tailEnd type="none" w="med" len="med"/>
+                    </a:lnB>
+                    <a:solidFill>
+                      <a:srgbClr val="39FF88"/>
+                    </a:solidFill>
+                  </a:tcPr>
+                </a:tc>
+                <a:tc>
+                  <a:txBody>
+                    <a:bodyPr/>
+                    <a:lstStyle/>
+                    <a:p>
+                      <a:pPr indent="0" marL="0">
+                        <a:buNone/>
+                      </a:pPr>
+                      <a:r>
+                        <a:rPr lang="en-US" sz="1300" b="1" dirty="0">
+                          <a:solidFill>
+                            <a:srgbClr val="0B0F14"/>
+                          </a:solidFill>
+                          <a:latin typeface="Courier New" pitchFamily="34" charset="0"/>
+                          <a:ea typeface="Courier New" pitchFamily="34" charset="-122"/>
+                          <a:cs typeface="Courier New" pitchFamily="34" charset="-120"/>
+                        </a:rPr>
+                        <a:t>Neural</a:t>
+                      </a:r>
+                      <a:endParaRPr lang="en-US" sz="1300" dirty="0">
+                        <a:latin typeface="Courier New" charset="0"/>
+                        <a:ea typeface="Courier New" charset="0"/>
+                        <a:cs typeface="Courier New" charset="0"/>
+                      </a:endParaRPr>
+                    </a:p>
+                  </a:txBody>
+                  <a:tcPr marL="91440" marR="91440" marT="45720" marB="45720">
+                    <a:lnL w="12700" cap="flat" cmpd="sng" algn="ctr">
+                      <a:solidFill>
+                        <a:srgbClr val="2A3441"/>
+                      </a:solidFill>
+                      <a:prstDash val="solid"/>
+                      <a:round/>
+                      <a:headEnd type="none" w="med" len="med"/>
+                      <a:tailEnd type="none" w="med" len="med"/>
+                    </a:lnL>
+                    <a:lnR w="12700" cap="flat" cmpd="sng" algn="ctr">
+                      <a:solidFill>
+                        <a:srgbClr val="2A3441"/>
+                      </a:solidFill>
+                      <a:prstDash val="solid"/>
+                      <a:round/>
+                      <a:headEnd type="none" w="med" len="med"/>
+                      <a:tailEnd type="none" w="med" len="med"/>
+                    </a:lnR>
+                    <a:lnT w="12700" cap="flat" cmpd="sng" algn="ctr">
+                      <a:solidFill>
+                        <a:srgbClr val="2A3441"/>
+                      </a:solidFill>
+                      <a:prstDash val="solid"/>
+                      <a:round/>
+                      <a:headEnd type="none" w="med" len="med"/>
+                      <a:tailEnd type="none" w="med" len="med"/>
+                    </a:lnT>
+                    <a:lnB w="12700" cap="flat" cmpd="sng" algn="ctr">
+                      <a:solidFill>
+                        <a:srgbClr val="2A3441"/>
+                      </a:solidFill>
+                      <a:prstDash val="solid"/>
+                      <a:round/>
+                      <a:headEnd type="none" w="med" len="med"/>
+                      <a:tailEnd type="none" w="med" len="med"/>
+                    </a:lnB>
+                    <a:solidFill>
+                      <a:srgbClr val="39FF88"/>
+                    </a:solidFill>
+                  </a:tcPr>
+                </a:tc>
+              </a:tr>
+              <a:tr h="457200">
+                <a:tc>
+                  <a:txBody>
+                    <a:bodyPr/>
+                    <a:lstStyle/>
+                    <a:p>
+                      <a:pPr indent="0" marL="0">
+                        <a:buNone/>
+                      </a:pPr>
+                      <a:r>
+                        <a:rPr lang="en-US" sz="1300" dirty="0">
+                          <a:solidFill>
+                            <a:srgbClr val="E6EDF3"/>
+                          </a:solidFill>
+                          <a:latin typeface="Calibri" pitchFamily="34" charset="0"/>
+                          <a:ea typeface="Calibri" pitchFamily="34" charset="-122"/>
+                          <a:cs typeface="Calibri" pitchFamily="34" charset="-120"/>
+                        </a:rPr>
+                        <a:t>5G-like</a:t>
+                      </a:r>
+                      <a:endParaRPr lang="en-US" sz="1300" dirty="0">
+                        <a:latin typeface="Calibri" charset="0"/>
+                        <a:ea typeface="Calibri" charset="0"/>
+                        <a:cs typeface="Calibri" charset="0"/>
+                      </a:endParaRPr>
+                    </a:p>
+                  </a:txBody>
+                  <a:tcPr marL="91440" marR="91440" marT="45720" marB="45720">
+                    <a:lnL w="12700" cap="flat" cmpd="sng" algn="ctr">
+                      <a:solidFill>
+                        <a:srgbClr val="2A3441"/>
+                      </a:solidFill>
+                      <a:prstDash val="solid"/>
+                      <a:round/>
+                      <a:headEnd type="none" w="med" len="med"/>
+                      <a:tailEnd type="none" w="med" len="med"/>
+                    </a:lnL>
+                    <a:lnR w="12700" cap="flat" cmpd="sng" algn="ctr">
+                      <a:solidFill>
+                        <a:srgbClr val="2A3441"/>
+                      </a:solidFill>
+                      <a:prstDash val="solid"/>
+                      <a:round/>
+                      <a:headEnd type="none" w="med" len="med"/>
+                      <a:tailEnd type="none" w="med" len="med"/>
+                    </a:lnR>
+                    <a:lnT w="12700" cap="flat" cmpd="sng" algn="ctr">
+                      <a:solidFill>
+                        <a:srgbClr val="2A3441"/>
+                      </a:solidFill>
+                      <a:prstDash val="solid"/>
+                      <a:round/>
+                      <a:headEnd type="none" w="med" len="med"/>
+                      <a:tailEnd type="none" w="med" len="med"/>
+                    </a:lnT>
+                    <a:lnB w="12700" cap="flat" cmpd="sng" algn="ctr">
+                      <a:solidFill>
+                        <a:srgbClr val="2A3441"/>
+                      </a:solidFill>
+                      <a:prstDash val="solid"/>
+                      <a:round/>
+                      <a:headEnd type="none" w="med" len="med"/>
+                      <a:tailEnd type="none" w="med" len="med"/>
+                    </a:lnB>
+                    <a:solidFill>
+                      <a:srgbClr val="141B24"/>
+                    </a:solidFill>
+                  </a:tcPr>
+                </a:tc>
+                <a:tc>
+                  <a:txBody>
+                    <a:bodyPr/>
+                    <a:lstStyle/>
+                    <a:p>
+                      <a:pPr indent="0" marL="0">
+                        <a:buNone/>
+                      </a:pPr>
+                      <a:r>
+                        <a:rPr lang="en-US" sz="1300" dirty="0">
+                          <a:solidFill>
+                            <a:srgbClr val="E6EDF3"/>
+                          </a:solidFill>
+                          <a:latin typeface="Calibri" pitchFamily="34" charset="0"/>
+                          <a:ea typeface="Calibri" pitchFamily="34" charset="-122"/>
+                          <a:cs typeface="Calibri" pitchFamily="34" charset="-120"/>
+                        </a:rPr>
+                        <a:t>1.38 s</a:t>
+                      </a:r>
+                      <a:endParaRPr lang="en-US" sz="1300" dirty="0">
+                        <a:latin typeface="Calibri" charset="0"/>
+                        <a:ea typeface="Calibri" charset="0"/>
+                        <a:cs typeface="Calibri" charset="0"/>
+                      </a:endParaRPr>
+                    </a:p>
+                  </a:txBody>
+                  <a:tcPr marL="91440" marR="91440" marT="45720" marB="45720">
+                    <a:lnL w="12700" cap="flat" cmpd="sng" algn="ctr">
+                      <a:solidFill>
+                        <a:srgbClr val="2A3441"/>
+                      </a:solidFill>
+                      <a:prstDash val="solid"/>
+                      <a:round/>
+                      <a:headEnd type="none" w="med" len="med"/>
+                      <a:tailEnd type="none" w="med" len="med"/>
+                    </a:lnL>
+                    <a:lnR w="12700" cap="flat" cmpd="sng" algn="ctr">
+                      <a:solidFill>
+                        <a:srgbClr val="2A3441"/>
+                      </a:solidFill>
+                      <a:prstDash val="solid"/>
+                      <a:round/>
+                      <a:headEnd type="none" w="med" len="med"/>
+                      <a:tailEnd type="none" w="med" len="med"/>
+                    </a:lnR>
+                    <a:lnT w="12700" cap="flat" cmpd="sng" algn="ctr">
+                      <a:solidFill>
+                        <a:srgbClr val="2A3441"/>
+                      </a:solidFill>
+                      <a:prstDash val="solid"/>
+                      <a:round/>
+                      <a:headEnd type="none" w="med" len="med"/>
+                      <a:tailEnd type="none" w="med" len="med"/>
+                    </a:lnT>
+                    <a:lnB w="12700" cap="flat" cmpd="sng" algn="ctr">
+                      <a:solidFill>
+                        <a:srgbClr val="2A3441"/>
+                      </a:solidFill>
+                      <a:prstDash val="solid"/>
+                      <a:round/>
+                      <a:headEnd type="none" w="med" len="med"/>
+                      <a:tailEnd type="none" w="med" len="med"/>
+                    </a:lnB>
+                    <a:solidFill>
+                      <a:srgbClr val="141B24"/>
+                    </a:solidFill>
+                  </a:tcPr>
+                </a:tc>
+                <a:tc>
+                  <a:txBody>
+                    <a:bodyPr/>
+                    <a:lstStyle/>
+                    <a:p>
+                      <a:pPr indent="0" marL="0">
+                        <a:buNone/>
+                      </a:pPr>
+                      <a:r>
+                        <a:rPr lang="en-US" sz="1300" dirty="0">
+                          <a:solidFill>
+                            <a:srgbClr val="E6EDF3"/>
+                          </a:solidFill>
+                          <a:latin typeface="Calibri" pitchFamily="34" charset="0"/>
+                          <a:ea typeface="Calibri" pitchFamily="34" charset="-122"/>
+                          <a:cs typeface="Calibri" pitchFamily="34" charset="-120"/>
+                        </a:rPr>
+                        <a:t>2.64 s</a:t>
+                      </a:r>
+                      <a:endParaRPr lang="en-US" sz="1300" dirty="0">
+                        <a:latin typeface="Calibri" charset="0"/>
+                        <a:ea typeface="Calibri" charset="0"/>
+                        <a:cs typeface="Calibri" charset="0"/>
+                      </a:endParaRPr>
+                    </a:p>
+                  </a:txBody>
+                  <a:tcPr marL="91440" marR="91440" marT="45720" marB="45720">
+                    <a:lnL w="12700" cap="flat" cmpd="sng" algn="ctr">
+                      <a:solidFill>
+                        <a:srgbClr val="2A3441"/>
+                      </a:solidFill>
+                      <a:prstDash val="solid"/>
+                      <a:round/>
+                      <a:headEnd type="none" w="med" len="med"/>
+                      <a:tailEnd type="none" w="med" len="med"/>
+                    </a:lnL>
+                    <a:lnR w="12700" cap="flat" cmpd="sng" algn="ctr">
+                      <a:solidFill>
+                        <a:srgbClr val="2A3441"/>
+                      </a:solidFill>
+                      <a:prstDash val="solid"/>
+                      <a:round/>
+                      <a:headEnd type="none" w="med" len="med"/>
+                      <a:tailEnd type="none" w="med" len="med"/>
+                    </a:lnR>
+                    <a:lnT w="12700" cap="flat" cmpd="sng" algn="ctr">
+                      <a:solidFill>
+                        <a:srgbClr val="2A3441"/>
+                      </a:solidFill>
+                      <a:prstDash val="solid"/>
+                      <a:round/>
+                      <a:headEnd type="none" w="med" len="med"/>
+                      <a:tailEnd type="none" w="med" len="med"/>
+                    </a:lnT>
+                    <a:lnB w="12700" cap="flat" cmpd="sng" algn="ctr">
+                      <a:solidFill>
+                        <a:srgbClr val="2A3441"/>
+                      </a:solidFill>
+                      <a:prstDash val="solid"/>
+                      <a:round/>
+                      <a:headEnd type="none" w="med" len="med"/>
+                      <a:tailEnd type="none" w="med" len="med"/>
+                    </a:lnB>
+                    <a:solidFill>
+                      <a:srgbClr val="141B24"/>
+                    </a:solidFill>
+                  </a:tcPr>
+                </a:tc>
+                <a:tc>
+                  <a:txBody>
+                    <a:bodyPr/>
+                    <a:lstStyle/>
+                    <a:p>
+                      <a:pPr indent="0" marL="0">
+                        <a:buNone/>
+                      </a:pPr>
+                      <a:r>
+                        <a:rPr lang="en-US" sz="1300" dirty="0">
+                          <a:solidFill>
+                            <a:srgbClr val="E6EDF3"/>
+                          </a:solidFill>
+                          <a:latin typeface="Calibri" pitchFamily="34" charset="0"/>
+                          <a:ea typeface="Calibri" pitchFamily="34" charset="-122"/>
+                          <a:cs typeface="Calibri" pitchFamily="34" charset="-120"/>
+                        </a:rPr>
+                        <a:t>1.18 s</a:t>
+                      </a:r>
+                      <a:endParaRPr lang="en-US" sz="1300" dirty="0">
+                        <a:latin typeface="Calibri" charset="0"/>
+                        <a:ea typeface="Calibri" charset="0"/>
+                        <a:cs typeface="Calibri" charset="0"/>
+                      </a:endParaRPr>
+                    </a:p>
+                  </a:txBody>
+                  <a:tcPr marL="91440" marR="91440" marT="45720" marB="45720">
+                    <a:lnL w="12700" cap="flat" cmpd="sng" algn="ctr">
+                      <a:solidFill>
+                        <a:srgbClr val="2A3441"/>
+                      </a:solidFill>
+                      <a:prstDash val="solid"/>
+                      <a:round/>
+                      <a:headEnd type="none" w="med" len="med"/>
+                      <a:tailEnd type="none" w="med" len="med"/>
+                    </a:lnL>
+                    <a:lnR w="12700" cap="flat" cmpd="sng" algn="ctr">
+                      <a:solidFill>
+                        <a:srgbClr val="2A3441"/>
+                      </a:solidFill>
+                      <a:prstDash val="solid"/>
+                      <a:round/>
+                      <a:headEnd type="none" w="med" len="med"/>
+                      <a:tailEnd type="none" w="med" len="med"/>
+                    </a:lnR>
+                    <a:lnT w="12700" cap="flat" cmpd="sng" algn="ctr">
+                      <a:solidFill>
+                        <a:srgbClr val="2A3441"/>
+                      </a:solidFill>
+                      <a:prstDash val="solid"/>
+                      <a:round/>
+                      <a:headEnd type="none" w="med" len="med"/>
+                      <a:tailEnd type="none" w="med" len="med"/>
+                    </a:lnT>
+                    <a:lnB w="12700" cap="flat" cmpd="sng" algn="ctr">
+                      <a:solidFill>
+                        <a:srgbClr val="2A3441"/>
+                      </a:solidFill>
+                      <a:prstDash val="solid"/>
+                      <a:round/>
+                      <a:headEnd type="none" w="med" len="med"/>
+                      <a:tailEnd type="none" w="med" len="med"/>
+                    </a:lnB>
+                    <a:solidFill>
+                      <a:srgbClr val="141B24"/>
+                    </a:solidFill>
+                  </a:tcPr>
+                </a:tc>
+              </a:tr>
+              <a:tr h="457200">
+                <a:tc>
+                  <a:txBody>
+                    <a:bodyPr/>
+                    <a:lstStyle/>
+                    <a:p>
+                      <a:pPr indent="0" marL="0">
+                        <a:buNone/>
+                      </a:pPr>
+                      <a:r>
+                        <a:rPr lang="en-US" sz="1300" dirty="0">
+                          <a:solidFill>
+                            <a:srgbClr val="E6EDF3"/>
+                          </a:solidFill>
+                          <a:latin typeface="Calibri" pitchFamily="34" charset="0"/>
+                          <a:ea typeface="Calibri" pitchFamily="34" charset="-122"/>
+                          <a:cs typeface="Calibri" pitchFamily="34" charset="-120"/>
+                        </a:rPr>
+                        <a:t>Lossy wireless</a:t>
+                      </a:r>
+                      <a:endParaRPr lang="en-US" sz="1300" dirty="0">
+                        <a:latin typeface="Calibri" charset="0"/>
+                        <a:ea typeface="Calibri" charset="0"/>
+                        <a:cs typeface="Calibri" charset="0"/>
+                      </a:endParaRPr>
+                    </a:p>
+                  </a:txBody>
+                  <a:tcPr marL="91440" marR="91440" marT="45720" marB="45720">
+                    <a:lnL w="12700" cap="flat" cmpd="sng" algn="ctr">
+                      <a:solidFill>
+                        <a:srgbClr val="2A3441"/>
+                      </a:solidFill>
+                      <a:prstDash val="solid"/>
+                      <a:round/>
+                      <a:headEnd type="none" w="med" len="med"/>
+                      <a:tailEnd type="none" w="med" len="med"/>
+                    </a:lnL>
+                    <a:lnR w="12700" cap="flat" cmpd="sng" algn="ctr">
+                      <a:solidFill>
+                        <a:srgbClr val="2A3441"/>
+                      </a:solidFill>
+                      <a:prstDash val="solid"/>
+                      <a:round/>
+                      <a:headEnd type="none" w="med" len="med"/>
+                      <a:tailEnd type="none" w="med" len="med"/>
+                    </a:lnR>
+                    <a:lnT w="12700" cap="flat" cmpd="sng" algn="ctr">
+                      <a:solidFill>
+                        <a:srgbClr val="2A3441"/>
+                      </a:solidFill>
+                      <a:prstDash val="solid"/>
+                      <a:round/>
+                      <a:headEnd type="none" w="med" len="med"/>
+                      <a:tailEnd type="none" w="med" len="med"/>
+                    </a:lnT>
+                    <a:lnB w="12700" cap="flat" cmpd="sng" algn="ctr">
+                      <a:solidFill>
+                        <a:srgbClr val="2A3441"/>
+                      </a:solidFill>
+                      <a:prstDash val="solid"/>
+                      <a:round/>
+                      <a:headEnd type="none" w="med" len="med"/>
+                      <a:tailEnd type="none" w="med" len="med"/>
+                    </a:lnB>
+                    <a:solidFill>
+                      <a:srgbClr val="141B24"/>
+                    </a:solidFill>
+                  </a:tcPr>
+                </a:tc>
+                <a:tc>
+                  <a:txBody>
+                    <a:bodyPr/>
+                    <a:lstStyle/>
+                    <a:p>
+                      <a:pPr indent="0" marL="0">
+                        <a:buNone/>
+                      </a:pPr>
+                      <a:r>
+                        <a:rPr lang="en-US" sz="1300" dirty="0">
+                          <a:solidFill>
+                            <a:srgbClr val="E6EDF3"/>
+                          </a:solidFill>
+                          <a:latin typeface="Calibri" pitchFamily="34" charset="0"/>
+                          <a:ea typeface="Calibri" pitchFamily="34" charset="-122"/>
+                          <a:cs typeface="Calibri" pitchFamily="34" charset="-120"/>
+                        </a:rPr>
+                        <a:t>9.13 s</a:t>
+                      </a:r>
+                      <a:endParaRPr lang="en-US" sz="1300" dirty="0">
+                        <a:latin typeface="Calibri" charset="0"/>
+                        <a:ea typeface="Calibri" charset="0"/>
+                        <a:cs typeface="Calibri" charset="0"/>
+                      </a:endParaRPr>
+                    </a:p>
+                  </a:txBody>
+                  <a:tcPr marL="91440" marR="91440" marT="45720" marB="45720">
+                    <a:lnL w="12700" cap="flat" cmpd="sng" algn="ctr">
+                      <a:solidFill>
+                        <a:srgbClr val="2A3441"/>
+                      </a:solidFill>
+                      <a:prstDash val="solid"/>
+                      <a:round/>
+                      <a:headEnd type="none" w="med" len="med"/>
+                      <a:tailEnd type="none" w="med" len="med"/>
+                    </a:lnL>
+                    <a:lnR w="12700" cap="flat" cmpd="sng" algn="ctr">
+                      <a:solidFill>
+                        <a:srgbClr val="2A3441"/>
+                      </a:solidFill>
+                      <a:prstDash val="solid"/>
+                      <a:round/>
+                      <a:headEnd type="none" w="med" len="med"/>
+                      <a:tailEnd type="none" w="med" len="med"/>
+                    </a:lnR>
+                    <a:lnT w="12700" cap="flat" cmpd="sng" algn="ctr">
+                      <a:solidFill>
+                        <a:srgbClr val="2A3441"/>
+                      </a:solidFill>
+                      <a:prstDash val="solid"/>
+                      <a:round/>
+                      <a:headEnd type="none" w="med" len="med"/>
+                      <a:tailEnd type="none" w="med" len="med"/>
+                    </a:lnT>
+                    <a:lnB w="12700" cap="flat" cmpd="sng" algn="ctr">
+                      <a:solidFill>
+                        <a:srgbClr val="2A3441"/>
+                      </a:solidFill>
+                      <a:prstDash val="solid"/>
+                      <a:round/>
+                      <a:headEnd type="none" w="med" len="med"/>
+                      <a:tailEnd type="none" w="med" len="med"/>
+                    </a:lnB>
+                    <a:solidFill>
+                      <a:srgbClr val="141B24"/>
+                    </a:solidFill>
+                  </a:tcPr>
+                </a:tc>
+                <a:tc>
+                  <a:txBody>
+                    <a:bodyPr/>
+                    <a:lstStyle/>
+                    <a:p>
+                      <a:pPr indent="0" marL="0">
+                        <a:buNone/>
+                      </a:pPr>
+                      <a:r>
+                        <a:rPr lang="en-US" sz="1300" dirty="0">
+                          <a:solidFill>
+                            <a:srgbClr val="E6EDF3"/>
+                          </a:solidFill>
+                          <a:latin typeface="Calibri" pitchFamily="34" charset="0"/>
+                          <a:ea typeface="Calibri" pitchFamily="34" charset="-122"/>
+                          <a:cs typeface="Calibri" pitchFamily="34" charset="-120"/>
+                        </a:rPr>
+                        <a:t>7.54 s</a:t>
+                      </a:r>
+                      <a:endParaRPr lang="en-US" sz="1300" dirty="0">
+                        <a:latin typeface="Calibri" charset="0"/>
+                        <a:ea typeface="Calibri" charset="0"/>
+                        <a:cs typeface="Calibri" charset="0"/>
+                      </a:endParaRPr>
+                    </a:p>
+                  </a:txBody>
+                  <a:tcPr marL="91440" marR="91440" marT="45720" marB="45720">
+                    <a:lnL w="12700" cap="flat" cmpd="sng" algn="ctr">
+                      <a:solidFill>
+                        <a:srgbClr val="2A3441"/>
+                      </a:solidFill>
+                      <a:prstDash val="solid"/>
+                      <a:round/>
+                      <a:headEnd type="none" w="med" len="med"/>
+                      <a:tailEnd type="none" w="med" len="med"/>
+                    </a:lnL>
+                    <a:lnR w="12700" cap="flat" cmpd="sng" algn="ctr">
+                      <a:solidFill>
+                        <a:srgbClr val="2A3441"/>
+                      </a:solidFill>
+                      <a:prstDash val="solid"/>
+                      <a:round/>
+                      <a:headEnd type="none" w="med" len="med"/>
+                      <a:tailEnd type="none" w="med" len="med"/>
+                    </a:lnR>
+                    <a:lnT w="12700" cap="flat" cmpd="sng" algn="ctr">
+                      <a:solidFill>
+                        <a:srgbClr val="2A3441"/>
+                      </a:solidFill>
+                      <a:prstDash val="solid"/>
+                      <a:round/>
+                      <a:headEnd type="none" w="med" len="med"/>
+                      <a:tailEnd type="none" w="med" len="med"/>
+                    </a:lnT>
+                    <a:lnB w="12700" cap="flat" cmpd="sng" algn="ctr">
+                      <a:solidFill>
+                        <a:srgbClr val="2A3441"/>
+                      </a:solidFill>
+                      <a:prstDash val="solid"/>
+                      <a:round/>
+                      <a:headEnd type="none" w="med" len="med"/>
+                      <a:tailEnd type="none" w="med" len="med"/>
+                    </a:lnB>
+                    <a:solidFill>
+                      <a:srgbClr val="141B24"/>
+                    </a:solidFill>
+                  </a:tcPr>
+                </a:tc>
+                <a:tc>
+                  <a:txBody>
+                    <a:bodyPr/>
+                    <a:lstStyle/>
+                    <a:p>
+                      <a:pPr indent="0" marL="0">
+                        <a:buNone/>
+                      </a:pPr>
+                      <a:r>
+                        <a:rPr lang="en-US" sz="1300" dirty="0">
+                          <a:solidFill>
+                            <a:srgbClr val="E6EDF3"/>
+                          </a:solidFill>
+                          <a:latin typeface="Calibri" pitchFamily="34" charset="0"/>
+                          <a:ea typeface="Calibri" pitchFamily="34" charset="-122"/>
+                          <a:cs typeface="Calibri" pitchFamily="34" charset="-120"/>
+                        </a:rPr>
+                        <a:t>6.63 s</a:t>
+                      </a:r>
+                      <a:endParaRPr lang="en-US" sz="1300" dirty="0">
+                        <a:latin typeface="Calibri" charset="0"/>
+                        <a:ea typeface="Calibri" charset="0"/>
+                        <a:cs typeface="Calibri" charset="0"/>
+                      </a:endParaRPr>
+                    </a:p>
+                  </a:txBody>
+                  <a:tcPr marL="91440" marR="91440" marT="45720" marB="45720">
+                    <a:lnL w="12700" cap="flat" cmpd="sng" algn="ctr">
+                      <a:solidFill>
+                        <a:srgbClr val="2A3441"/>
+                      </a:solidFill>
+                      <a:prstDash val="solid"/>
+                      <a:round/>
+                      <a:headEnd type="none" w="med" len="med"/>
+                      <a:tailEnd type="none" w="med" len="med"/>
+                    </a:lnL>
+                    <a:lnR w="12700" cap="flat" cmpd="sng" algn="ctr">
+                      <a:solidFill>
+                        <a:srgbClr val="2A3441"/>
+                      </a:solidFill>
+                      <a:prstDash val="solid"/>
+                      <a:round/>
+                      <a:headEnd type="none" w="med" len="med"/>
+                      <a:tailEnd type="none" w="med" len="med"/>
+                    </a:lnR>
+                    <a:lnT w="12700" cap="flat" cmpd="sng" algn="ctr">
+                      <a:solidFill>
+                        <a:srgbClr val="2A3441"/>
+                      </a:solidFill>
+                      <a:prstDash val="solid"/>
+                      <a:round/>
+                      <a:headEnd type="none" w="med" len="med"/>
+                      <a:tailEnd type="none" w="med" len="med"/>
+                    </a:lnT>
+                    <a:lnB w="12700" cap="flat" cmpd="sng" algn="ctr">
+                      <a:solidFill>
+                        <a:srgbClr val="2A3441"/>
+                      </a:solidFill>
+                      <a:prstDash val="solid"/>
+                      <a:round/>
+                      <a:headEnd type="none" w="med" len="med"/>
+                      <a:tailEnd type="none" w="med" len="med"/>
+                    </a:lnB>
+                    <a:solidFill>
+                      <a:srgbClr val="141B24"/>
+                    </a:solidFill>
+                  </a:tcPr>
+                </a:tc>
+              </a:tr>
+              <a:tr h="457200">
+                <a:tc>
+                  <a:txBody>
+                    <a:bodyPr/>
+                    <a:lstStyle/>
+                    <a:p>
+                      <a:pPr indent="0" marL="0">
+                        <a:buNone/>
+                      </a:pPr>
+                      <a:r>
+                        <a:rPr lang="en-US" sz="1300" dirty="0">
+                          <a:solidFill>
+                            <a:srgbClr val="E6EDF3"/>
+                          </a:solidFill>
+                          <a:latin typeface="Calibri" pitchFamily="34" charset="0"/>
+                          <a:ea typeface="Calibri" pitchFamily="34" charset="-122"/>
+                          <a:cs typeface="Calibri" pitchFamily="34" charset="-120"/>
+                        </a:rPr>
+                        <a:t>Satellite-like</a:t>
+                      </a:r>
+                      <a:endParaRPr lang="en-US" sz="1300" dirty="0">
+                        <a:latin typeface="Calibri" charset="0"/>
+                        <a:ea typeface="Calibri" charset="0"/>
+                        <a:cs typeface="Calibri" charset="0"/>
+                      </a:endParaRPr>
+                    </a:p>
+                  </a:txBody>
+                  <a:tcPr marL="91440" marR="91440" marT="45720" marB="45720">
+                    <a:lnL w="12700" cap="flat" cmpd="sng" algn="ctr">
+                      <a:solidFill>
+                        <a:srgbClr val="2A3441"/>
+                      </a:solidFill>
+                      <a:prstDash val="solid"/>
+                      <a:round/>
+                      <a:headEnd type="none" w="med" len="med"/>
+                      <a:tailEnd type="none" w="med" len="med"/>
+                    </a:lnL>
+                    <a:lnR w="12700" cap="flat" cmpd="sng" algn="ctr">
+                      <a:solidFill>
+                        <a:srgbClr val="2A3441"/>
+                      </a:solidFill>
+                      <a:prstDash val="solid"/>
+                      <a:round/>
+                      <a:headEnd type="none" w="med" len="med"/>
+                      <a:tailEnd type="none" w="med" len="med"/>
+                    </a:lnR>
+                    <a:lnT w="12700" cap="flat" cmpd="sng" algn="ctr">
+                      <a:solidFill>
+                        <a:srgbClr val="2A3441"/>
+                      </a:solidFill>
+                      <a:prstDash val="solid"/>
+                      <a:round/>
+                      <a:headEnd type="none" w="med" len="med"/>
+                      <a:tailEnd type="none" w="med" len="med"/>
+                    </a:lnT>
+                    <a:lnB w="12700" cap="flat" cmpd="sng" algn="ctr">
+                      <a:solidFill>
+                        <a:srgbClr val="2A3441"/>
+                      </a:solidFill>
+                      <a:prstDash val="solid"/>
+                      <a:round/>
+                      <a:headEnd type="none" w="med" len="med"/>
+                      <a:tailEnd type="none" w="med" len="med"/>
+                    </a:lnB>
+                    <a:solidFill>
+                      <a:srgbClr val="141B24"/>
+                    </a:solidFill>
+                  </a:tcPr>
+                </a:tc>
+                <a:tc>
+                  <a:txBody>
+                    <a:bodyPr/>
+                    <a:lstStyle/>
+                    <a:p>
+                      <a:pPr indent="0" marL="0">
+                        <a:buNone/>
+                      </a:pPr>
+                      <a:r>
+                        <a:rPr lang="en-US" sz="1300" dirty="0">
+                          <a:solidFill>
+                            <a:srgbClr val="E6EDF3"/>
+                          </a:solidFill>
+                          <a:latin typeface="Calibri" pitchFamily="34" charset="0"/>
+                          <a:ea typeface="Calibri" pitchFamily="34" charset="-122"/>
+                          <a:cs typeface="Calibri" pitchFamily="34" charset="-120"/>
+                        </a:rPr>
+                        <a:t>17.9 s</a:t>
+                      </a:r>
+                      <a:endParaRPr lang="en-US" sz="1300" dirty="0">
+                        <a:latin typeface="Calibri" charset="0"/>
+                        <a:ea typeface="Calibri" charset="0"/>
+                        <a:cs typeface="Calibri" charset="0"/>
+                      </a:endParaRPr>
+                    </a:p>
+                  </a:txBody>
+                  <a:tcPr marL="91440" marR="91440" marT="45720" marB="45720">
+                    <a:lnL w="12700" cap="flat" cmpd="sng" algn="ctr">
+                      <a:solidFill>
+                        <a:srgbClr val="2A3441"/>
+                      </a:solidFill>
+                      <a:prstDash val="solid"/>
+                      <a:round/>
+                      <a:headEnd type="none" w="med" len="med"/>
+                      <a:tailEnd type="none" w="med" len="med"/>
+                    </a:lnL>
+                    <a:lnR w="12700" cap="flat" cmpd="sng" algn="ctr">
+                      <a:solidFill>
+                        <a:srgbClr val="2A3441"/>
+                      </a:solidFill>
+                      <a:prstDash val="solid"/>
+                      <a:round/>
+                      <a:headEnd type="none" w="med" len="med"/>
+                      <a:tailEnd type="none" w="med" len="med"/>
+                    </a:lnR>
+                    <a:lnT w="12700" cap="flat" cmpd="sng" algn="ctr">
+                      <a:solidFill>
+                        <a:srgbClr val="2A3441"/>
+                      </a:solidFill>
+                      <a:prstDash val="solid"/>
+                      <a:round/>
+                      <a:headEnd type="none" w="med" len="med"/>
+                      <a:tailEnd type="none" w="med" len="med"/>
+                    </a:lnT>
+                    <a:lnB w="12700" cap="flat" cmpd="sng" algn="ctr">
+                      <a:solidFill>
+                        <a:srgbClr val="2A3441"/>
+                      </a:solidFill>
+                      <a:prstDash val="solid"/>
+                      <a:round/>
+                      <a:headEnd type="none" w="med" len="med"/>
+                      <a:tailEnd type="none" w="med" len="med"/>
+                    </a:lnB>
+                    <a:solidFill>
+                      <a:srgbClr val="141B24"/>
+                    </a:solidFill>
+                  </a:tcPr>
+                </a:tc>
+                <a:tc>
+                  <a:txBody>
+                    <a:bodyPr/>
+                    <a:lstStyle/>
+                    <a:p>
+                      <a:pPr indent="0" marL="0">
+                        <a:buNone/>
+                      </a:pPr>
+                      <a:r>
+                        <a:rPr lang="en-US" sz="1300" dirty="0">
+                          <a:solidFill>
+                            <a:srgbClr val="E6EDF3"/>
+                          </a:solidFill>
+                          <a:latin typeface="Calibri" pitchFamily="34" charset="0"/>
+                          <a:ea typeface="Calibri" pitchFamily="34" charset="-122"/>
+                          <a:cs typeface="Calibri" pitchFamily="34" charset="-120"/>
+                        </a:rPr>
+                        <a:t>38.1 s</a:t>
+                      </a:r>
+                      <a:endParaRPr lang="en-US" sz="1300" dirty="0">
+                        <a:latin typeface="Calibri" charset="0"/>
+                        <a:ea typeface="Calibri" charset="0"/>
+                        <a:cs typeface="Calibri" charset="0"/>
+                      </a:endParaRPr>
+                    </a:p>
+                  </a:txBody>
+                  <a:tcPr marL="91440" marR="91440" marT="45720" marB="45720">
+                    <a:lnL w="12700" cap="flat" cmpd="sng" algn="ctr">
+                      <a:solidFill>
+                        <a:srgbClr val="2A3441"/>
+                      </a:solidFill>
+                      <a:prstDash val="solid"/>
+                      <a:round/>
+                      <a:headEnd type="none" w="med" len="med"/>
+                      <a:tailEnd type="none" w="med" len="med"/>
+                    </a:lnL>
+                    <a:lnR w="12700" cap="flat" cmpd="sng" algn="ctr">
+                      <a:solidFill>
+                        <a:srgbClr val="2A3441"/>
+                      </a:solidFill>
+                      <a:prstDash val="solid"/>
+                      <a:round/>
+                      <a:headEnd type="none" w="med" len="med"/>
+                      <a:tailEnd type="none" w="med" len="med"/>
+                    </a:lnR>
+                    <a:lnT w="12700" cap="flat" cmpd="sng" algn="ctr">
+                      <a:solidFill>
+                        <a:srgbClr val="2A3441"/>
+                      </a:solidFill>
+                      <a:prstDash val="solid"/>
+                      <a:round/>
+                      <a:headEnd type="none" w="med" len="med"/>
+                      <a:tailEnd type="none" w="med" len="med"/>
+                    </a:lnT>
+                    <a:lnB w="12700" cap="flat" cmpd="sng" algn="ctr">
+                      <a:solidFill>
+                        <a:srgbClr val="2A3441"/>
+                      </a:solidFill>
+                      <a:prstDash val="solid"/>
+                      <a:round/>
+                      <a:headEnd type="none" w="med" len="med"/>
+                      <a:tailEnd type="none" w="med" len="med"/>
+                    </a:lnB>
+                    <a:solidFill>
+                      <a:srgbClr val="141B24"/>
+                    </a:solidFill>
+                  </a:tcPr>
+                </a:tc>
+                <a:tc>
+                  <a:txBody>
+                    <a:bodyPr/>
+                    <a:lstStyle/>
+                    <a:p>
+                      <a:pPr indent="0" marL="0">
+                        <a:buNone/>
+                      </a:pPr>
+                      <a:r>
+                        <a:rPr lang="en-US" sz="1300" dirty="0">
+                          <a:solidFill>
+                            <a:srgbClr val="E6EDF3"/>
+                          </a:solidFill>
+                          <a:latin typeface="Calibri" pitchFamily="34" charset="0"/>
+                          <a:ea typeface="Calibri" pitchFamily="34" charset="-122"/>
+                          <a:cs typeface="Calibri" pitchFamily="34" charset="-120"/>
+                        </a:rPr>
+                        <a:t>13.1 s</a:t>
+                      </a:r>
+                      <a:endParaRPr lang="en-US" sz="1300" dirty="0">
+                        <a:latin typeface="Calibri" charset="0"/>
+                        <a:ea typeface="Calibri" charset="0"/>
+                        <a:cs typeface="Calibri" charset="0"/>
+                      </a:endParaRPr>
+                    </a:p>
+                  </a:txBody>
+                  <a:tcPr marL="91440" marR="91440" marT="45720" marB="45720">
+                    <a:lnL w="12700" cap="flat" cmpd="sng" algn="ctr">
+                      <a:solidFill>
+                        <a:srgbClr val="2A3441"/>
+                      </a:solidFill>
+                      <a:prstDash val="solid"/>
+                      <a:round/>
+                      <a:headEnd type="none" w="med" len="med"/>
+                      <a:tailEnd type="none" w="med" len="med"/>
+                    </a:lnL>
+                    <a:lnR w="12700" cap="flat" cmpd="sng" algn="ctr">
+                      <a:solidFill>
+                        <a:srgbClr val="2A3441"/>
+                      </a:solidFill>
+                      <a:prstDash val="solid"/>
+                      <a:round/>
+                      <a:headEnd type="none" w="med" len="med"/>
+                      <a:tailEnd type="none" w="med" len="med"/>
+                    </a:lnR>
+                    <a:lnT w="12700" cap="flat" cmpd="sng" algn="ctr">
+                      <a:solidFill>
+                        <a:srgbClr val="2A3441"/>
+                      </a:solidFill>
+                      <a:prstDash val="solid"/>
+                      <a:round/>
+                      <a:headEnd type="none" w="med" len="med"/>
+                      <a:tailEnd type="none" w="med" len="med"/>
+                    </a:lnT>
+                    <a:lnB w="12700" cap="flat" cmpd="sng" algn="ctr">
+                      <a:solidFill>
+                        <a:srgbClr val="2A3441"/>
+                      </a:solidFill>
+                      <a:prstDash val="solid"/>
+                      <a:round/>
+                      <a:headEnd type="none" w="med" len="med"/>
+                      <a:tailEnd type="none" w="med" len="med"/>
+                    </a:lnB>
+                    <a:solidFill>
+                      <a:srgbClr val="141B24"/>
+                    </a:solidFill>
+                  </a:tcPr>
+                </a:tc>
+              </a:tr>
+            </a:tbl>
+          </a:graphicData>
+        </a:graphic>
+      </p:graphicFrame>
+      <p:sp>
+        <p:nvSpPr>
+          <p:cNvPr id="5" name="Text 2"/>
+          <p:cNvSpPr/>
+          <p:nvPr/>
+        </p:nvSpPr>
+        <p:spPr>
+          <a:xfrm>
+            <a:off x="7406640" y="1188720"/>
+            <a:ext cx="4297680" cy="4572000"/>
           </a:xfrm>
           <a:prstGeom prst="rect">
             <a:avLst/>
@@ -9509,53 +10701,18 @@
           <a:ln/>
         </p:spPr>
         <p:txBody>
-          <a:bodyPr wrap="square" lIns="0" tIns="0" rIns="0" bIns="0" rtlCol="0" anchor="ctr"/>
-          <a:lstStyle/>
-          <a:p>
-            <a:pPr indent="0" marL="0">
-              <a:buNone/>
-            </a:pPr>
-            <a:r>
-              <a:rPr lang="en-US" sz="2000" b="1" dirty="0">
-                <a:solidFill>
-                  <a:srgbClr val="39FF88"/>
-                </a:solidFill>
-                <a:latin typeface="Courier New" pitchFamily="34" charset="0"/>
-                <a:ea typeface="Courier New" pitchFamily="34" charset="-122"/>
-                <a:cs typeface="Courier New" pitchFamily="34" charset="-120"/>
-              </a:rPr>
-              <a:t>Learned</a:t>
-            </a:r>
-            <a:endParaRPr lang="en-US" sz="2000" dirty="0"/>
-          </a:p>
-        </p:txBody>
-      </p:sp>
-      <p:sp>
-        <p:nvSpPr>
-          <p:cNvPr id="6" name="Text 4"/>
-          <p:cNvSpPr/>
-          <p:nvPr/>
-        </p:nvSpPr>
-        <p:spPr>
-          <a:xfrm>
-            <a:off x="731520" y="2011680"/>
-            <a:ext cx="5029200" cy="3429000"/>
-          </a:xfrm>
-          <a:prstGeom prst="rect">
-            <a:avLst/>
-          </a:prstGeom>
-          <a:noFill/>
-          <a:ln/>
-        </p:spPr>
-        <p:txBody>
           <a:bodyPr wrap="square" lIns="0" tIns="0" rIns="0" bIns="0" rtlCol="0" anchor="t"/>
           <a:lstStyle/>
           <a:p>
-            <a:pPr indent="0" marL="0">
-              <a:buNone/>
-            </a:pPr>
-            <a:r>
-              <a:rPr lang="en-US" sz="2000" dirty="0">
+            <a:pPr marL="342900" indent="-342900">
+              <a:spcAft>
+                <a:spcPts val="800"/>
+              </a:spcAft>
+              <a:buSzPct val="100000"/>
+              <a:buChar char="•"/>
+            </a:pPr>
+            <a:r>
+              <a:rPr lang="en-US" sz="1500" dirty="0">
                 <a:solidFill>
                   <a:srgbClr val="E6EDF3"/>
                 </a:solidFill>
@@ -9563,16 +10720,20 @@
                 <a:ea typeface="Calibri" pitchFamily="34" charset="-122"/>
                 <a:cs typeface="Calibri" pitchFamily="34" charset="-120"/>
               </a:rPr>
-              <a:t>Reliability is a set of simple rules working together.</a:t>
-            </a:r>
-            <a:endParaRPr lang="en-US" sz="2000" dirty="0"/>
-          </a:p>
-          <a:p>
-            <a:pPr indent="0" marL="0">
-              <a:buNone/>
-            </a:pPr>
-            <a:r>
-              <a:rPr lang="en-US" sz="2000" dirty="0">
+              <a:t>Neural agent beats AIMD on all three paths: 15%, 27%, 24% faster (95% intervals exclude zero)</a:t>
+            </a:r>
+            <a:endParaRPr lang="en-US" sz="1500" dirty="0"/>
+          </a:p>
+          <a:p>
+            <a:pPr marL="342900" indent="-342900">
+              <a:spcAft>
+                <a:spcPts val="800"/>
+              </a:spcAft>
+              <a:buSzPct val="100000"/>
+              <a:buChar char="•"/>
+            </a:pPr>
+            <a:r>
+              <a:rPr lang="en-US" sz="1500" dirty="0">
                 <a:solidFill>
                   <a:srgbClr val="E6EDF3"/>
                 </a:solidFill>
@@ -9580,16 +10741,20 @@
                 <a:ea typeface="Calibri" pitchFamily="34" charset="-122"/>
                 <a:cs typeface="Calibri" pitchFamily="34" charset="-120"/>
               </a:rPr>
-              <a:t>Congestion control matters as much as retransmission.</a:t>
-            </a:r>
-            <a:endParaRPr lang="en-US" sz="2000" dirty="0"/>
-          </a:p>
-          <a:p>
-            <a:pPr indent="0" marL="0">
-              <a:buNone/>
-            </a:pPr>
-            <a:r>
-              <a:rPr lang="en-US" sz="2000" dirty="0">
+              <a:t>Table agent does not generalise: slower on 5G-like and satellite-like</a:t>
+            </a:r>
+            <a:endParaRPr lang="en-US" sz="1500" dirty="0"/>
+          </a:p>
+          <a:p>
+            <a:pPr marL="342900" indent="-342900">
+              <a:spcAft>
+                <a:spcPts val="800"/>
+              </a:spcAft>
+              <a:buSzPct val="100000"/>
+              <a:buChar char="•"/>
+            </a:pPr>
+            <a:r>
+              <a:rPr lang="en-US" sz="1500" dirty="0">
                 <a:solidFill>
                   <a:srgbClr val="E6EDF3"/>
                 </a:solidFill>
@@ -9597,102 +10762,20 @@
                 <a:ea typeface="Calibri" pitchFamily="34" charset="-122"/>
                 <a:cs typeface="Calibri" pitchFamily="34" charset="-120"/>
               </a:rPr>
-              <a:t>Testing tools fail in surprising ways.</a:t>
-            </a:r>
-            <a:endParaRPr lang="en-US" sz="2000" dirty="0"/>
-          </a:p>
-        </p:txBody>
-      </p:sp>
-      <p:sp>
-        <p:nvSpPr>
-          <p:cNvPr id="7" name="Shape 5"/>
-          <p:cNvSpPr/>
-          <p:nvPr/>
-        </p:nvSpPr>
-        <p:spPr>
-          <a:xfrm>
-            <a:off x="6217920" y="1371600"/>
-            <a:ext cx="5394960" cy="4206240"/>
-          </a:xfrm>
-          <a:prstGeom prst="rect">
-            <a:avLst/>
-          </a:prstGeom>
-          <a:solidFill>
-            <a:srgbClr val="141B24"/>
-          </a:solidFill>
-          <a:ln w="12700">
-            <a:solidFill>
-              <a:srgbClr val="FFB000"/>
-            </a:solidFill>
-            <a:prstDash val="solid"/>
-          </a:ln>
-        </p:spPr>
-      </p:sp>
-      <p:sp>
-        <p:nvSpPr>
-          <p:cNvPr id="8" name="Text 6"/>
-          <p:cNvSpPr/>
-          <p:nvPr/>
-        </p:nvSpPr>
-        <p:spPr>
-          <a:xfrm>
-            <a:off x="6400800" y="1508760"/>
-            <a:ext cx="5029200" cy="457200"/>
-          </a:xfrm>
-          <a:prstGeom prst="rect">
-            <a:avLst/>
-          </a:prstGeom>
-          <a:noFill/>
-          <a:ln/>
-        </p:spPr>
-        <p:txBody>
-          <a:bodyPr wrap="square" lIns="0" tIns="0" rIns="0" bIns="0" rtlCol="0" anchor="ctr"/>
-          <a:lstStyle/>
-          <a:p>
-            <a:pPr indent="0" marL="0">
-              <a:buNone/>
-            </a:pPr>
-            <a:r>
-              <a:rPr lang="en-US" sz="2000" b="1" dirty="0">
-                <a:solidFill>
-                  <a:srgbClr val="FFB000"/>
-                </a:solidFill>
-                <a:latin typeface="Courier New" pitchFamily="34" charset="0"/>
-                <a:ea typeface="Courier New" pitchFamily="34" charset="-122"/>
-                <a:cs typeface="Courier New" pitchFamily="34" charset="-120"/>
-              </a:rPr>
-              <a:t>Next</a:t>
-            </a:r>
-            <a:endParaRPr lang="en-US" sz="2000" dirty="0"/>
-          </a:p>
-        </p:txBody>
-      </p:sp>
-      <p:sp>
-        <p:nvSpPr>
-          <p:cNvPr id="9" name="Text 7"/>
-          <p:cNvSpPr/>
-          <p:nvPr/>
-        </p:nvSpPr>
-        <p:spPr>
-          <a:xfrm>
-            <a:off x="6400800" y="2011680"/>
-            <a:ext cx="5029200" cy="3429000"/>
-          </a:xfrm>
-          <a:prstGeom prst="rect">
-            <a:avLst/>
-          </a:prstGeom>
-          <a:noFill/>
-          <a:ln/>
-        </p:spPr>
-        <p:txBody>
-          <a:bodyPr wrap="square" lIns="0" tIns="0" rIns="0" bIns="0" rtlCol="0" anchor="t"/>
-          <a:lstStyle/>
-          <a:p>
-            <a:pPr indent="0" marL="0">
-              <a:buNone/>
-            </a:pPr>
-            <a:r>
-              <a:rPr lang="en-US" sz="2000" dirty="0">
+              <a:t>Selective ACK in C: about 10x fewer retransmissions, no significant time change here</a:t>
+            </a:r>
+            <a:endParaRPr lang="en-US" sz="1500" dirty="0"/>
+          </a:p>
+          <a:p>
+            <a:pPr marL="342900" indent="-342900">
+              <a:spcAft>
+                <a:spcPts val="800"/>
+              </a:spcAft>
+              <a:buSzPct val="100000"/>
+              <a:buChar char="•"/>
+            </a:pPr>
+            <a:r>
+              <a:rPr lang="en-US" sz="1500" dirty="0">
                 <a:solidFill>
                   <a:srgbClr val="E6EDF3"/>
                 </a:solidFill>
@@ -9700,82 +10783,48 @@
                 <a:ea typeface="Calibri" pitchFamily="34" charset="-122"/>
                 <a:cs typeface="Calibri" pitchFamily="34" charset="-120"/>
               </a:rPr>
-              <a:t>Selective ACK in the C code (largest gain in simulation)</a:t>
-            </a:r>
-            <a:endParaRPr lang="en-US" sz="2000" dirty="0"/>
-          </a:p>
+              <a:t>Caveats: trained in a simulator; emulated paths; AIMD cap 128 vs agents 32; agent retransmits more on random loss</a:t>
+            </a:r>
+            <a:endParaRPr lang="en-US" sz="1500" dirty="0"/>
+          </a:p>
+        </p:txBody>
+      </p:sp>
+      <p:sp>
+        <p:nvSpPr>
+          <p:cNvPr id="6" name="Text 3"/>
+          <p:cNvSpPr/>
+          <p:nvPr/>
+        </p:nvSpPr>
+        <p:spPr>
+          <a:xfrm>
+            <a:off x="548640" y="3840480"/>
+            <a:ext cx="6583680" cy="731520"/>
+          </a:xfrm>
+          <a:prstGeom prst="rect">
+            <a:avLst/>
+          </a:prstGeom>
+          <a:noFill/>
+          <a:ln/>
+        </p:spPr>
+        <p:txBody>
+          <a:bodyPr wrap="square" lIns="0" tIns="0" rIns="0" bIns="0" rtlCol="0" anchor="ctr"/>
+          <a:lstStyle/>
           <a:p>
             <a:pPr indent="0" marL="0">
               <a:buNone/>
             </a:pPr>
             <a:r>
-              <a:rPr lang="en-US" sz="2000" dirty="0">
-                <a:solidFill>
-                  <a:srgbClr val="E6EDF3"/>
+              <a:rPr lang="en-US" sz="1300" dirty="0">
+                <a:solidFill>
+                  <a:srgbClr val="8B98A5"/>
                 </a:solidFill>
                 <a:latin typeface="Calibri" pitchFamily="34" charset="0"/>
                 <a:ea typeface="Calibri" pitchFamily="34" charset="-122"/>
                 <a:cs typeface="Calibri" pitchFamily="34" charset="-120"/>
               </a:rPr>
-              <a:t>Deep agent in the C transport</a:t>
-            </a:r>
-            <a:endParaRPr lang="en-US" sz="2000" dirty="0"/>
-          </a:p>
-          <a:p>
-            <a:pPr indent="0" marL="0">
-              <a:buNone/>
-            </a:pPr>
-            <a:r>
-              <a:rPr lang="en-US" sz="2000" dirty="0">
-                <a:solidFill>
-                  <a:srgbClr val="E6EDF3"/>
-                </a:solidFill>
-                <a:latin typeface="Calibri" pitchFamily="34" charset="0"/>
-                <a:ea typeface="Calibri" pitchFamily="34" charset="-122"/>
-                <a:cs typeface="Calibri" pitchFamily="34" charset="-120"/>
-              </a:rPr>
-              <a:t>Kernel netem and real multi-machine tests</a:t>
-            </a:r>
-            <a:endParaRPr lang="en-US" sz="2000" dirty="0"/>
-          </a:p>
-        </p:txBody>
-      </p:sp>
-      <p:sp>
-        <p:nvSpPr>
-          <p:cNvPr id="10" name="Text 8"/>
-          <p:cNvSpPr/>
-          <p:nvPr/>
-        </p:nvSpPr>
-        <p:spPr>
-          <a:xfrm>
-            <a:off x="548640" y="5852160"/>
-            <a:ext cx="10972800" cy="365760"/>
-          </a:xfrm>
-          <a:prstGeom prst="rect">
-            <a:avLst/>
-          </a:prstGeom>
-          <a:noFill/>
-          <a:ln/>
-        </p:spPr>
-        <p:txBody>
-          <a:bodyPr wrap="square" lIns="0" tIns="0" rIns="0" bIns="0" rtlCol="0" anchor="ctr"/>
-          <a:lstStyle/>
-          <a:p>
-            <a:pPr indent="0" marL="0">
-              <a:buNone/>
-            </a:pPr>
-            <a:r>
-              <a:rPr lang="en-US" sz="1400" dirty="0">
-                <a:solidFill>
-                  <a:srgbClr val="8B98A5"/>
-                </a:solidFill>
-                <a:latin typeface="Calibri" pitchFamily="34" charset="0"/>
-                <a:ea typeface="Calibri" pitchFamily="34" charset="-122"/>
-                <a:cs typeface="Calibri" pitchFamily="34" charset="-120"/>
-              </a:rPr>
-              <a:t>Limits: Go-Back-N wastes bandwidth and suffers under reordering; C tests use an emulated path; the tabular agent did not beat AIMD in C.</a:t>
-            </a:r>
-            <a:endParaRPr lang="en-US" sz="1400" dirty="0"/>
+              <a:t>15 runs per cell (satellite: 8), 95% confidence intervals. Code: src/deep_cc.h, web/dqn.py, eval_ci2.sh.</a:t>
+            </a:r>
+            <a:endParaRPr lang="en-US" sz="1300" dirty="0"/>
           </a:p>
         </p:txBody>
       </p:sp>
@@ -9819,8 +10868,8 @@
         </p:nvSpPr>
         <p:spPr>
           <a:xfrm>
-            <a:off x="731520" y="2103120"/>
-            <a:ext cx="10058400" cy="1097280"/>
+            <a:off x="548640" y="320040"/>
+            <a:ext cx="11064240" cy="731520"/>
           </a:xfrm>
           <a:prstGeom prst="rect">
             <a:avLst/>
@@ -9836,7 +10885,7 @@
               <a:buNone/>
             </a:pPr>
             <a:r>
-              <a:rPr lang="en-US" sz="6400" b="1" dirty="0">
+              <a:rPr lang="en-US" sz="3000" b="1" dirty="0">
                 <a:solidFill>
                   <a:srgbClr val="39FF88"/>
                 </a:solidFill>
@@ -9844,9 +10893,9 @@
                 <a:ea typeface="Courier New" pitchFamily="34" charset="-122"/>
                 <a:cs typeface="Courier New" pitchFamily="34" charset="-120"/>
               </a:rPr>
-              <a:t>Thank you</a:t>
-            </a:r>
-            <a:endParaRPr lang="en-US" sz="6400" dirty="0"/>
+              <a:t>Learnings and future work</a:t>
+            </a:r>
+            <a:endParaRPr lang="en-US" sz="3000" dirty="0"/>
           </a:p>
         </p:txBody>
       </p:sp>
@@ -9858,8 +10907,8 @@
         </p:nvSpPr>
         <p:spPr>
           <a:xfrm>
-            <a:off x="731520" y="3474720"/>
-            <a:ext cx="10058400" cy="548640"/>
+            <a:off x="9418320" y="6446520"/>
+            <a:ext cx="2377440" cy="274320"/>
           </a:xfrm>
           <a:prstGeom prst="rect">
             <a:avLst/>
@@ -9871,34 +10920,59 @@
           <a:bodyPr wrap="square" lIns="0" tIns="0" rIns="0" bIns="0" rtlCol="0" anchor="ctr"/>
           <a:lstStyle/>
           <a:p>
-            <a:pPr indent="0" marL="0">
+            <a:pPr algn="r" indent="0" marL="0">
               <a:buNone/>
             </a:pPr>
             <a:r>
-              <a:rPr lang="en-US" sz="2600" dirty="0">
-                <a:solidFill>
-                  <a:srgbClr val="E6EDF3"/>
+              <a:rPr lang="en-US" sz="1000" dirty="0">
+                <a:solidFill>
+                  <a:srgbClr val="8B98A5"/>
                 </a:solidFill>
                 <a:latin typeface="Courier New" pitchFamily="34" charset="0"/>
                 <a:ea typeface="Courier New" pitchFamily="34" charset="-122"/>
                 <a:cs typeface="Courier New" pitchFamily="34" charset="-120"/>
               </a:rPr>
-              <a:t>github.com/Capsturrrr/rudp</a:t>
-            </a:r>
-            <a:endParaRPr lang="en-US" sz="2600" dirty="0"/>
-          </a:p>
-        </p:txBody>
-      </p:sp>
-      <p:sp>
-        <p:nvSpPr>
-          <p:cNvPr id="4" name="Text 2"/>
-          <p:cNvSpPr/>
-          <p:nvPr/>
-        </p:nvSpPr>
-        <p:spPr>
-          <a:xfrm>
-            <a:off x="731520" y="4206240"/>
-            <a:ext cx="10058400" cy="457200"/>
+              <a:t>23 / 24   Smart-RUDP</a:t>
+            </a:r>
+            <a:endParaRPr lang="en-US" sz="1000" dirty="0"/>
+          </a:p>
+        </p:txBody>
+      </p:sp>
+      <p:sp>
+        <p:nvSpPr>
+          <p:cNvPr id="4" name="Shape 2"/>
+          <p:cNvSpPr/>
+          <p:nvPr/>
+        </p:nvSpPr>
+        <p:spPr>
+          <a:xfrm>
+            <a:off x="548640" y="1371600"/>
+            <a:ext cx="5394960" cy="4206240"/>
+          </a:xfrm>
+          <a:prstGeom prst="rect">
+            <a:avLst/>
+          </a:prstGeom>
+          <a:solidFill>
+            <a:srgbClr val="141B24"/>
+          </a:solidFill>
+          <a:ln w="12700">
+            <a:solidFill>
+              <a:srgbClr val="39FF88"/>
+            </a:solidFill>
+            <a:prstDash val="solid"/>
+          </a:ln>
+        </p:spPr>
+      </p:sp>
+      <p:sp>
+        <p:nvSpPr>
+          <p:cNvPr id="5" name="Text 3"/>
+          <p:cNvSpPr/>
+          <p:nvPr/>
+        </p:nvSpPr>
+        <p:spPr>
+          <a:xfrm>
+            <a:off x="731520" y="1508760"/>
+            <a:ext cx="5029200" cy="457200"/>
           </a:xfrm>
           <a:prstGeom prst="rect">
             <a:avLst/>
@@ -9914,17 +10988,266 @@
               <a:buNone/>
             </a:pPr>
             <a:r>
-              <a:rPr lang="en-US" sz="1800" dirty="0">
-                <a:solidFill>
-                  <a:srgbClr val="8B98A5"/>
+              <a:rPr lang="en-US" sz="2000" b="1" dirty="0">
+                <a:solidFill>
+                  <a:srgbClr val="39FF88"/>
+                </a:solidFill>
+                <a:latin typeface="Courier New" pitchFamily="34" charset="0"/>
+                <a:ea typeface="Courier New" pitchFamily="34" charset="-122"/>
+                <a:cs typeface="Courier New" pitchFamily="34" charset="-120"/>
+              </a:rPr>
+              <a:t>Learned</a:t>
+            </a:r>
+            <a:endParaRPr lang="en-US" sz="2000" dirty="0"/>
+          </a:p>
+        </p:txBody>
+      </p:sp>
+      <p:sp>
+        <p:nvSpPr>
+          <p:cNvPr id="6" name="Text 4"/>
+          <p:cNvSpPr/>
+          <p:nvPr/>
+        </p:nvSpPr>
+        <p:spPr>
+          <a:xfrm>
+            <a:off x="731520" y="2011680"/>
+            <a:ext cx="5029200" cy="3429000"/>
+          </a:xfrm>
+          <a:prstGeom prst="rect">
+            <a:avLst/>
+          </a:prstGeom>
+          <a:noFill/>
+          <a:ln/>
+        </p:spPr>
+        <p:txBody>
+          <a:bodyPr wrap="square" lIns="0" tIns="0" rIns="0" bIns="0" rtlCol="0" anchor="t"/>
+          <a:lstStyle/>
+          <a:p>
+            <a:pPr indent="0" marL="0">
+              <a:buNone/>
+            </a:pPr>
+            <a:r>
+              <a:rPr lang="en-US" sz="2000" dirty="0">
+                <a:solidFill>
+                  <a:srgbClr val="E6EDF3"/>
                 </a:solidFill>
                 <a:latin typeface="Calibri" pitchFamily="34" charset="0"/>
                 <a:ea typeface="Calibri" pitchFamily="34" charset="-122"/>
                 <a:cs typeface="Calibri" pitchFamily="34" charset="-120"/>
               </a:rPr>
-              <a:t>Harshavardhan Mallela   Rohit Arya   Shloak Sinha</a:t>
-            </a:r>
-            <a:endParaRPr lang="en-US" sz="1800" dirty="0"/>
+              <a:t>Reliability is a set of simple rules working together.</a:t>
+            </a:r>
+            <a:endParaRPr lang="en-US" sz="2000" dirty="0"/>
+          </a:p>
+          <a:p>
+            <a:pPr indent="0" marL="0">
+              <a:buNone/>
+            </a:pPr>
+            <a:r>
+              <a:rPr lang="en-US" sz="2000" dirty="0">
+                <a:solidFill>
+                  <a:srgbClr val="E6EDF3"/>
+                </a:solidFill>
+                <a:latin typeface="Calibri" pitchFamily="34" charset="0"/>
+                <a:ea typeface="Calibri" pitchFamily="34" charset="-122"/>
+                <a:cs typeface="Calibri" pitchFamily="34" charset="-120"/>
+              </a:rPr>
+              <a:t>Congestion control matters as much as retransmission.</a:t>
+            </a:r>
+            <a:endParaRPr lang="en-US" sz="2000" dirty="0"/>
+          </a:p>
+          <a:p>
+            <a:pPr indent="0" marL="0">
+              <a:buNone/>
+            </a:pPr>
+            <a:r>
+              <a:rPr lang="en-US" sz="2000" dirty="0">
+                <a:solidFill>
+                  <a:srgbClr val="E6EDF3"/>
+                </a:solidFill>
+                <a:latin typeface="Calibri" pitchFamily="34" charset="0"/>
+                <a:ea typeface="Calibri" pitchFamily="34" charset="-122"/>
+                <a:cs typeface="Calibri" pitchFamily="34" charset="-120"/>
+              </a:rPr>
+              <a:t>Testing tools fail in surprising ways.</a:t>
+            </a:r>
+            <a:endParaRPr lang="en-US" sz="2000" dirty="0"/>
+          </a:p>
+        </p:txBody>
+      </p:sp>
+      <p:sp>
+        <p:nvSpPr>
+          <p:cNvPr id="7" name="Shape 5"/>
+          <p:cNvSpPr/>
+          <p:nvPr/>
+        </p:nvSpPr>
+        <p:spPr>
+          <a:xfrm>
+            <a:off x="6217920" y="1371600"/>
+            <a:ext cx="5394960" cy="4206240"/>
+          </a:xfrm>
+          <a:prstGeom prst="rect">
+            <a:avLst/>
+          </a:prstGeom>
+          <a:solidFill>
+            <a:srgbClr val="141B24"/>
+          </a:solidFill>
+          <a:ln w="12700">
+            <a:solidFill>
+              <a:srgbClr val="FFB000"/>
+            </a:solidFill>
+            <a:prstDash val="solid"/>
+          </a:ln>
+        </p:spPr>
+      </p:sp>
+      <p:sp>
+        <p:nvSpPr>
+          <p:cNvPr id="8" name="Text 6"/>
+          <p:cNvSpPr/>
+          <p:nvPr/>
+        </p:nvSpPr>
+        <p:spPr>
+          <a:xfrm>
+            <a:off x="6400800" y="1508760"/>
+            <a:ext cx="5029200" cy="457200"/>
+          </a:xfrm>
+          <a:prstGeom prst="rect">
+            <a:avLst/>
+          </a:prstGeom>
+          <a:noFill/>
+          <a:ln/>
+        </p:spPr>
+        <p:txBody>
+          <a:bodyPr wrap="square" lIns="0" tIns="0" rIns="0" bIns="0" rtlCol="0" anchor="ctr"/>
+          <a:lstStyle/>
+          <a:p>
+            <a:pPr indent="0" marL="0">
+              <a:buNone/>
+            </a:pPr>
+            <a:r>
+              <a:rPr lang="en-US" sz="2000" b="1" dirty="0">
+                <a:solidFill>
+                  <a:srgbClr val="FFB000"/>
+                </a:solidFill>
+                <a:latin typeface="Courier New" pitchFamily="34" charset="0"/>
+                <a:ea typeface="Courier New" pitchFamily="34" charset="-122"/>
+                <a:cs typeface="Courier New" pitchFamily="34" charset="-120"/>
+              </a:rPr>
+              <a:t>Next</a:t>
+            </a:r>
+            <a:endParaRPr lang="en-US" sz="2000" dirty="0"/>
+          </a:p>
+        </p:txBody>
+      </p:sp>
+      <p:sp>
+        <p:nvSpPr>
+          <p:cNvPr id="9" name="Text 7"/>
+          <p:cNvSpPr/>
+          <p:nvPr/>
+        </p:nvSpPr>
+        <p:spPr>
+          <a:xfrm>
+            <a:off x="6400800" y="2011680"/>
+            <a:ext cx="5029200" cy="3429000"/>
+          </a:xfrm>
+          <a:prstGeom prst="rect">
+            <a:avLst/>
+          </a:prstGeom>
+          <a:noFill/>
+          <a:ln/>
+        </p:spPr>
+        <p:txBody>
+          <a:bodyPr wrap="square" lIns="0" tIns="0" rIns="0" bIns="0" rtlCol="0" anchor="t"/>
+          <a:lstStyle/>
+          <a:p>
+            <a:pPr indent="0" marL="0">
+              <a:buNone/>
+            </a:pPr>
+            <a:r>
+              <a:rPr lang="en-US" sz="2000" dirty="0">
+                <a:solidFill>
+                  <a:srgbClr val="E6EDF3"/>
+                </a:solidFill>
+                <a:latin typeface="Calibri" pitchFamily="34" charset="0"/>
+                <a:ea typeface="Calibri" pitchFamily="34" charset="-122"/>
+                <a:cs typeface="Calibri" pitchFamily="34" charset="-120"/>
+              </a:rPr>
+              <a:t>Train the neural agent in C / on real netem</a:t>
+            </a:r>
+            <a:endParaRPr lang="en-US" sz="2000" dirty="0"/>
+          </a:p>
+          <a:p>
+            <a:pPr indent="0" marL="0">
+              <a:buNone/>
+            </a:pPr>
+            <a:r>
+              <a:rPr lang="en-US" sz="2000" dirty="0">
+                <a:solidFill>
+                  <a:srgbClr val="E6EDF3"/>
+                </a:solidFill>
+                <a:latin typeface="Calibri" pitchFamily="34" charset="0"/>
+                <a:ea typeface="Calibri" pitchFamily="34" charset="-122"/>
+                <a:cs typeface="Calibri" pitchFamily="34" charset="-120"/>
+              </a:rPr>
+              <a:t>Selective ACK where throughput limits the path</a:t>
+            </a:r>
+            <a:endParaRPr lang="en-US" sz="2000" dirty="0"/>
+          </a:p>
+          <a:p>
+            <a:pPr indent="0" marL="0">
+              <a:buNone/>
+            </a:pPr>
+            <a:r>
+              <a:rPr lang="en-US" sz="2000" dirty="0">
+                <a:solidFill>
+                  <a:srgbClr val="E6EDF3"/>
+                </a:solidFill>
+                <a:latin typeface="Calibri" pitchFamily="34" charset="0"/>
+                <a:ea typeface="Calibri" pitchFamily="34" charset="-122"/>
+                <a:cs typeface="Calibri" pitchFamily="34" charset="-120"/>
+              </a:rPr>
+              <a:t>Kernel netem and real multi-machine tests</a:t>
+            </a:r>
+            <a:endParaRPr lang="en-US" sz="2000" dirty="0"/>
+          </a:p>
+        </p:txBody>
+      </p:sp>
+      <p:sp>
+        <p:nvSpPr>
+          <p:cNvPr id="10" name="Text 8"/>
+          <p:cNvSpPr/>
+          <p:nvPr/>
+        </p:nvSpPr>
+        <p:spPr>
+          <a:xfrm>
+            <a:off x="548640" y="5852160"/>
+            <a:ext cx="10972800" cy="365760"/>
+          </a:xfrm>
+          <a:prstGeom prst="rect">
+            <a:avLst/>
+          </a:prstGeom>
+          <a:noFill/>
+          <a:ln/>
+        </p:spPr>
+        <p:txBody>
+          <a:bodyPr wrap="square" lIns="0" tIns="0" rIns="0" bIns="0" rtlCol="0" anchor="ctr"/>
+          <a:lstStyle/>
+          <a:p>
+            <a:pPr indent="0" marL="0">
+              <a:buNone/>
+            </a:pPr>
+            <a:r>
+              <a:rPr lang="en-US" sz="1400" dirty="0">
+                <a:solidFill>
+                  <a:srgbClr val="8B98A5"/>
+                </a:solidFill>
+                <a:latin typeface="Calibri" pitchFamily="34" charset="0"/>
+                <a:ea typeface="Calibri" pitchFamily="34" charset="-122"/>
+                <a:cs typeface="Calibri" pitchFamily="34" charset="-120"/>
+              </a:rPr>
+              <a:t>Limits: Go-Back-N wastes bandwidth and suffers under reordering; C tests use an emulated path; the tabular agent did not beat AIMD in C.</a:t>
+            </a:r>
+            <a:endParaRPr lang="en-US" sz="1400" dirty="0"/>
           </a:p>
         </p:txBody>
       </p:sp>
@@ -9968,6 +11291,155 @@
         </p:nvSpPr>
         <p:spPr>
           <a:xfrm>
+            <a:off x="731520" y="2103120"/>
+            <a:ext cx="10058400" cy="1097280"/>
+          </a:xfrm>
+          <a:prstGeom prst="rect">
+            <a:avLst/>
+          </a:prstGeom>
+          <a:noFill/>
+          <a:ln/>
+        </p:spPr>
+        <p:txBody>
+          <a:bodyPr wrap="square" lIns="0" tIns="0" rIns="0" bIns="0" rtlCol="0" anchor="ctr"/>
+          <a:lstStyle/>
+          <a:p>
+            <a:pPr indent="0" marL="0">
+              <a:buNone/>
+            </a:pPr>
+            <a:r>
+              <a:rPr lang="en-US" sz="6400" b="1" dirty="0">
+                <a:solidFill>
+                  <a:srgbClr val="39FF88"/>
+                </a:solidFill>
+                <a:latin typeface="Courier New" pitchFamily="34" charset="0"/>
+                <a:ea typeface="Courier New" pitchFamily="34" charset="-122"/>
+                <a:cs typeface="Courier New" pitchFamily="34" charset="-120"/>
+              </a:rPr>
+              <a:t>Thank you</a:t>
+            </a:r>
+            <a:endParaRPr lang="en-US" sz="6400" dirty="0"/>
+          </a:p>
+        </p:txBody>
+      </p:sp>
+      <p:sp>
+        <p:nvSpPr>
+          <p:cNvPr id="3" name="Text 1"/>
+          <p:cNvSpPr/>
+          <p:nvPr/>
+        </p:nvSpPr>
+        <p:spPr>
+          <a:xfrm>
+            <a:off x="731520" y="3474720"/>
+            <a:ext cx="10058400" cy="548640"/>
+          </a:xfrm>
+          <a:prstGeom prst="rect">
+            <a:avLst/>
+          </a:prstGeom>
+          <a:noFill/>
+          <a:ln/>
+        </p:spPr>
+        <p:txBody>
+          <a:bodyPr wrap="square" lIns="0" tIns="0" rIns="0" bIns="0" rtlCol="0" anchor="ctr"/>
+          <a:lstStyle/>
+          <a:p>
+            <a:pPr indent="0" marL="0">
+              <a:buNone/>
+            </a:pPr>
+            <a:r>
+              <a:rPr lang="en-US" sz="2600" dirty="0">
+                <a:solidFill>
+                  <a:srgbClr val="E6EDF3"/>
+                </a:solidFill>
+                <a:latin typeface="Courier New" pitchFamily="34" charset="0"/>
+                <a:ea typeface="Courier New" pitchFamily="34" charset="-122"/>
+                <a:cs typeface="Courier New" pitchFamily="34" charset="-120"/>
+              </a:rPr>
+              <a:t>github.com/Capsturrrr/rudp</a:t>
+            </a:r>
+            <a:endParaRPr lang="en-US" sz="2600" dirty="0"/>
+          </a:p>
+        </p:txBody>
+      </p:sp>
+      <p:sp>
+        <p:nvSpPr>
+          <p:cNvPr id="4" name="Text 2"/>
+          <p:cNvSpPr/>
+          <p:nvPr/>
+        </p:nvSpPr>
+        <p:spPr>
+          <a:xfrm>
+            <a:off x="731520" y="4206240"/>
+            <a:ext cx="10058400" cy="457200"/>
+          </a:xfrm>
+          <a:prstGeom prst="rect">
+            <a:avLst/>
+          </a:prstGeom>
+          <a:noFill/>
+          <a:ln/>
+        </p:spPr>
+        <p:txBody>
+          <a:bodyPr wrap="square" lIns="0" tIns="0" rIns="0" bIns="0" rtlCol="0" anchor="ctr"/>
+          <a:lstStyle/>
+          <a:p>
+            <a:pPr indent="0" marL="0">
+              <a:buNone/>
+            </a:pPr>
+            <a:r>
+              <a:rPr lang="en-US" sz="1800" dirty="0">
+                <a:solidFill>
+                  <a:srgbClr val="8B98A5"/>
+                </a:solidFill>
+                <a:latin typeface="Calibri" pitchFamily="34" charset="0"/>
+                <a:ea typeface="Calibri" pitchFamily="34" charset="-122"/>
+                <a:cs typeface="Calibri" pitchFamily="34" charset="-120"/>
+              </a:rPr>
+              <a:t>Harshavardhan Mallela   Rohit Arya   Shloak Sinha</a:t>
+            </a:r>
+            <a:endParaRPr lang="en-US" sz="1800" dirty="0"/>
+          </a:p>
+        </p:txBody>
+      </p:sp>
+    </p:spTree>
+  </p:cSld>
+  <p:clrMapOvr>
+    <a:masterClrMapping/>
+  </p:clrMapOvr>
+</p:sld>
+</file>
+
+<file path=ppt/slides/slide25.xml><?xml version="1.0" encoding="utf-8"?>
+<p:sld xmlns:a="http://schemas.openxmlformats.org/drawingml/2006/main" xmlns:r="http://schemas.openxmlformats.org/officeDocument/2006/relationships" xmlns:p="http://schemas.openxmlformats.org/presentationml/2006/main">
+  <p:cSld name="Slide 25">
+    <p:bg>
+      <p:bgPr>
+        <a:solidFill>
+          <a:srgbClr val="0B0F14"/>
+        </a:solidFill>
+      </p:bgPr>
+    </p:bg>
+    <p:spTree>
+      <p:nvGrpSpPr>
+        <p:cNvPr id="1" name=""/>
+        <p:cNvGrpSpPr/>
+        <p:nvPr/>
+      </p:nvGrpSpPr>
+      <p:grpSpPr>
+        <a:xfrm>
+          <a:off x="0" y="0"/>
+          <a:ext cx="0" cy="0"/>
+          <a:chOff x="0" y="0"/>
+          <a:chExt cx="0" cy="0"/>
+        </a:xfrm>
+      </p:grpSpPr>
+      <p:sp>
+        <p:nvSpPr>
+          <p:cNvPr id="2" name="Text 0"/>
+          <p:cNvSpPr/>
+          <p:nvPr/>
+        </p:nvSpPr>
+        <p:spPr>
+          <a:xfrm>
             <a:off x="548640" y="320040"/>
             <a:ext cx="11064240" cy="731520"/>
           </a:xfrm>
@@ -10272,7 +11744,7 @@
                 <a:ea typeface="Courier New" pitchFamily="34" charset="-122"/>
                 <a:cs typeface="Courier New" pitchFamily="34" charset="-120"/>
               </a:rPr>
-              <a:t>3 / 23   Smart-RUDP</a:t>
+              <a:t>3 / 24   Smart-RUDP</a:t>
             </a:r>
             <a:endParaRPr lang="en-US" sz="1000" dirty="0"/>
           </a:p>
@@ -10666,7 +12138,7 @@
                 <a:ea typeface="Courier New" pitchFamily="34" charset="-122"/>
                 <a:cs typeface="Courier New" pitchFamily="34" charset="-120"/>
               </a:rPr>
-              <a:t>4 / 23   Smart-RUDP</a:t>
+              <a:t>4 / 24   Smart-RUDP</a:t>
             </a:r>
             <a:endParaRPr lang="en-US" sz="1000" dirty="0"/>
           </a:p>
@@ -11227,7 +12699,7 @@
                 <a:ea typeface="Courier New" pitchFamily="34" charset="-122"/>
                 <a:cs typeface="Courier New" pitchFamily="34" charset="-120"/>
               </a:rPr>
-              <a:t>5 / 23   Smart-RUDP</a:t>
+              <a:t>5 / 24   Smart-RUDP</a:t>
             </a:r>
             <a:endParaRPr lang="en-US" sz="1000" dirty="0"/>
           </a:p>
@@ -12666,7 +14138,7 @@
                 <a:ea typeface="Courier New" pitchFamily="34" charset="-122"/>
                 <a:cs typeface="Courier New" pitchFamily="34" charset="-120"/>
               </a:rPr>
-              <a:t>6 / 23   Smart-RUDP</a:t>
+              <a:t>6 / 24   Smart-RUDP</a:t>
             </a:r>
             <a:endParaRPr lang="en-US" sz="1000" dirty="0"/>
           </a:p>
@@ -13901,7 +15373,7 @@
                 <a:ea typeface="Courier New" pitchFamily="34" charset="-122"/>
                 <a:cs typeface="Courier New" pitchFamily="34" charset="-120"/>
               </a:rPr>
-              <a:t>7 / 23   Smart-RUDP</a:t>
+              <a:t>7 / 24   Smart-RUDP</a:t>
             </a:r>
             <a:endParaRPr lang="en-US" sz="1000" dirty="0"/>
           </a:p>
@@ -14344,7 +15816,7 @@
                 <a:ea typeface="Courier New" pitchFamily="34" charset="-122"/>
                 <a:cs typeface="Courier New" pitchFamily="34" charset="-120"/>
               </a:rPr>
-              <a:t>8 / 23   Smart-RUDP</a:t>
+              <a:t>8 / 24   Smart-RUDP</a:t>
             </a:r>
             <a:endParaRPr lang="en-US" sz="1000" dirty="0"/>
           </a:p>
@@ -14644,7 +16116,7 @@
                 <a:ea typeface="Courier New" pitchFamily="34" charset="-122"/>
                 <a:cs typeface="Courier New" pitchFamily="34" charset="-120"/>
               </a:rPr>
-              <a:t>9 / 23   Smart-RUDP</a:t>
+              <a:t>9 / 24   Smart-RUDP</a:t>
             </a:r>
             <a:endParaRPr lang="en-US" sz="1000" dirty="0"/>
           </a:p>

--- a/docs/RUDP_Presentation.pptx
+++ b/docs/RUDP_Presentation.pptx
@@ -30,9 +30,10 @@
     <p:sldId id="278" r:id="rId24"/>
     <p:sldId id="279" r:id="rId25"/>
     <p:sldId id="280" r:id="rId26"/>
+    <p:sldId id="281" r:id="rId27"/>
   </p:sldIdLst>
   <p:notesMasterIdLst>
-    <p:notesMasterId r:id="rId27"/>
+    <p:notesMasterId r:id="rId28"/>
   </p:notesMasterIdLst>
   <p:sldSz cx="12192000" cy="6858000"/>
   <p:notesSz cx="6858000" cy="12192000"/>
@@ -2046,6 +2047,94 @@
             <a:fld id="{F7021451-1387-4CA6-816F-3879F97B5CBC}" type="slidenum">
               <a:rPr lang="en-US"/>
               <a:t>25</a:t>
+            </a:fld>
+            <a:endParaRPr lang="en-US"/>
+          </a:p>
+        </p:txBody>
+      </p:sp>
+    </p:spTree>
+    <p:extLst>
+      <p:ext uri="{BB962C8B-B14F-4D97-AF65-F5344CB8AC3E}">
+        <p14:creationId xmlns:p14="http://schemas.microsoft.com/office/powerpoint/2010/main" val="1024086991"/>
+      </p:ext>
+    </p:extLst>
+  </p:cSld>
+  <p:clrMapOvr>
+    <a:masterClrMapping/>
+  </p:clrMapOvr>
+</p:notes>
+</file>
+
+<file path=ppt/notesSlides/notesSlide26.xml><?xml version="1.0" encoding="utf-8"?>
+<p:notes xmlns:a="http://schemas.openxmlformats.org/drawingml/2006/main" xmlns:r="http://schemas.openxmlformats.org/officeDocument/2006/relationships" xmlns:p="http://schemas.openxmlformats.org/presentationml/2006/main">
+  <p:cSld>
+    <p:spTree>
+      <p:nvGrpSpPr>
+        <p:cNvPr id="1" name=""/>
+        <p:cNvGrpSpPr/>
+        <p:nvPr/>
+      </p:nvGrpSpPr>
+      <p:grpSpPr>
+        <a:xfrm>
+          <a:off x="0" y="0"/>
+          <a:ext cx="0" cy="0"/>
+          <a:chOff x="0" y="0"/>
+          <a:chExt cx="0" cy="0"/>
+        </a:xfrm>
+      </p:grpSpPr>
+      <p:sp>
+        <p:nvSpPr>
+          <p:cNvPr id="2" name="Slide Image Placeholder 1"/>
+          <p:cNvSpPr>
+            <a:spLocks noGrp="1" noRot="1" noChangeAspect="1"/>
+          </p:cNvSpPr>
+          <p:nvPr>
+            <p:ph type="sldImg"/>
+          </p:nvPr>
+        </p:nvSpPr>
+        <p:spPr/>
+      </p:sp>
+      <p:sp>
+        <p:nvSpPr>
+          <p:cNvPr id="3" name="Notes Placeholder 2"/>
+          <p:cNvSpPr>
+            <a:spLocks noGrp="1"/>
+          </p:cNvSpPr>
+          <p:nvPr>
+            <p:ph type="body" idx="1"/>
+          </p:nvPr>
+        </p:nvSpPr>
+        <p:spPr/>
+        <p:txBody>
+          <a:bodyPr/>
+          <a:lstStyle/>
+          <a:p>
+            <a:r>
+              <a:rPr lang="en-US" dirty="0"/>
+              <a:t/>
+            </a:r>
+            <a:endParaRPr lang="en-US" dirty="0"/>
+          </a:p>
+        </p:txBody>
+      </p:sp>
+      <p:sp>
+        <p:nvSpPr>
+          <p:cNvPr id="4" name="Slide Number Placeholder 3"/>
+          <p:cNvSpPr>
+            <a:spLocks noGrp="1"/>
+          </p:cNvSpPr>
+          <p:nvPr>
+            <p:ph type="sldNum" sz="quarter" idx="10"/>
+          </p:nvPr>
+        </p:nvSpPr>
+        <p:spPr/>
+        <p:txBody>
+          <a:bodyPr/>
+          <a:lstStyle/>
+          <a:p>
+            <a:fld id="{F7021451-1387-4CA6-816F-3879F97B5CBC}" type="slidenum">
+              <a:rPr lang="en-US"/>
+              <a:t>26</a:t>
             </a:fld>
             <a:endParaRPr lang="en-US"/>
           </a:p>
@@ -3271,7 +3360,7 @@
                 <a:ea typeface="Courier New" pitchFamily="34" charset="-122"/>
                 <a:cs typeface="Courier New" pitchFamily="34" charset="-120"/>
               </a:rPr>
-              <a:t>10 / 24   Smart-RUDP</a:t>
+              <a:t>10 / 25   Smart-RUDP</a:t>
             </a:r>
             <a:endParaRPr lang="en-US" sz="1000" dirty="0"/>
           </a:p>
@@ -3468,7 +3557,7 @@
                 <a:ea typeface="Courier New" pitchFamily="34" charset="-122"/>
                 <a:cs typeface="Courier New" pitchFamily="34" charset="-120"/>
               </a:rPr>
-              <a:t>11 / 24   Smart-RUDP</a:t>
+              <a:t>11 / 25   Smart-RUDP</a:t>
             </a:r>
             <a:endParaRPr lang="en-US" sz="1000" dirty="0"/>
           </a:p>
@@ -4298,7 +4387,7 @@
                 <a:ea typeface="Courier New" pitchFamily="34" charset="-122"/>
                 <a:cs typeface="Courier New" pitchFamily="34" charset="-120"/>
               </a:rPr>
-              <a:t>12 / 24   Smart-RUDP</a:t>
+              <a:t>12 / 25   Smart-RUDP</a:t>
             </a:r>
             <a:endParaRPr lang="en-US" sz="1000" dirty="0"/>
           </a:p>
@@ -4595,7 +4684,7 @@
                 <a:ea typeface="Courier New" pitchFamily="34" charset="-122"/>
                 <a:cs typeface="Courier New" pitchFamily="34" charset="-120"/>
               </a:rPr>
-              <a:t>13 / 24   Smart-RUDP</a:t>
+              <a:t>13 / 25   Smart-RUDP</a:t>
             </a:r>
             <a:endParaRPr lang="en-US" sz="1000" dirty="0"/>
           </a:p>
@@ -4895,7 +4984,7 @@
                 <a:ea typeface="Courier New" pitchFamily="34" charset="-122"/>
                 <a:cs typeface="Courier New" pitchFamily="34" charset="-120"/>
               </a:rPr>
-              <a:t>14 / 24   Smart-RUDP</a:t>
+              <a:t>14 / 25   Smart-RUDP</a:t>
             </a:r>
             <a:endParaRPr lang="en-US" sz="1000" dirty="0"/>
           </a:p>
@@ -5279,7 +5368,7 @@
                 <a:ea typeface="Courier New" pitchFamily="34" charset="-122"/>
                 <a:cs typeface="Courier New" pitchFamily="34" charset="-120"/>
               </a:rPr>
-              <a:t>15 / 24   Smart-RUDP</a:t>
+              <a:t>15 / 25   Smart-RUDP</a:t>
             </a:r>
             <a:endParaRPr lang="en-US" sz="1000" dirty="0"/>
           </a:p>
@@ -5737,7 +5826,7 @@
                 <a:ea typeface="Courier New" pitchFamily="34" charset="-122"/>
                 <a:cs typeface="Courier New" pitchFamily="34" charset="-120"/>
               </a:rPr>
-              <a:t>16 / 24   Smart-RUDP</a:t>
+              <a:t>16 / 25   Smart-RUDP</a:t>
             </a:r>
             <a:endParaRPr lang="en-US" sz="1000" dirty="0"/>
           </a:p>
@@ -6422,7 +6511,7 @@
                 <a:ea typeface="Courier New" pitchFamily="34" charset="-122"/>
                 <a:cs typeface="Courier New" pitchFamily="34" charset="-120"/>
               </a:rPr>
-              <a:t>17 / 24   Smart-RUDP</a:t>
+              <a:t>17 / 25   Smart-RUDP</a:t>
             </a:r>
             <a:endParaRPr lang="en-US" sz="1000" dirty="0"/>
           </a:p>
@@ -6662,7 +6751,7 @@
                 <a:ea typeface="Courier New" pitchFamily="34" charset="-122"/>
                 <a:cs typeface="Courier New" pitchFamily="34" charset="-120"/>
               </a:rPr>
-              <a:t>18 / 24   Smart-RUDP</a:t>
+              <a:t>18 / 25   Smart-RUDP</a:t>
             </a:r>
             <a:endParaRPr lang="en-US" sz="1000" dirty="0"/>
           </a:p>
@@ -6902,7 +6991,7 @@
                 <a:ea typeface="Courier New" pitchFamily="34" charset="-122"/>
                 <a:cs typeface="Courier New" pitchFamily="34" charset="-120"/>
               </a:rPr>
-              <a:t>19 / 24   Smart-RUDP</a:t>
+              <a:t>19 / 25   Smart-RUDP</a:t>
             </a:r>
             <a:endParaRPr lang="en-US" sz="1000" dirty="0"/>
           </a:p>
@@ -7124,7 +7213,7 @@
                 <a:ea typeface="Courier New" pitchFamily="34" charset="-122"/>
                 <a:cs typeface="Courier New" pitchFamily="34" charset="-120"/>
               </a:rPr>
-              <a:t>2 / 24   Smart-RUDP</a:t>
+              <a:t>2 / 25   Smart-RUDP</a:t>
             </a:r>
             <a:endParaRPr lang="en-US" sz="1000" dirty="0"/>
           </a:p>
@@ -7518,7 +7607,7 @@
                 <a:ea typeface="Courier New" pitchFamily="34" charset="-122"/>
                 <a:cs typeface="Courier New" pitchFamily="34" charset="-120"/>
               </a:rPr>
-              <a:t>20 / 24   Smart-RUDP</a:t>
+              <a:t>20 / 25   Smart-RUDP</a:t>
             </a:r>
             <a:endParaRPr lang="en-US" sz="1000" dirty="0"/>
           </a:p>
@@ -7842,7 +7931,7 @@
                 <a:ea typeface="Courier New" pitchFamily="34" charset="-122"/>
                 <a:cs typeface="Courier New" pitchFamily="34" charset="-120"/>
               </a:rPr>
-              <a:t>21 / 24   Smart-RUDP</a:t>
+              <a:t>21 / 25   Smart-RUDP</a:t>
             </a:r>
             <a:endParaRPr lang="en-US" sz="1000" dirty="0"/>
           </a:p>
@@ -9549,7 +9638,7 @@
                 <a:ea typeface="Courier New" pitchFamily="34" charset="-122"/>
                 <a:cs typeface="Courier New" pitchFamily="34" charset="-120"/>
               </a:rPr>
-              <a:t>22 / 24   Smart-RUDP</a:t>
+              <a:t>22 / 25   Smart-RUDP</a:t>
             </a:r>
             <a:endParaRPr lang="en-US" sz="1000" dirty="0"/>
           </a:p>
@@ -10893,7 +10982,7 @@
                 <a:ea typeface="Courier New" pitchFamily="34" charset="-122"/>
                 <a:cs typeface="Courier New" pitchFamily="34" charset="-120"/>
               </a:rPr>
-              <a:t>Learnings and future work</a:t>
+              <a:t>Fairness, ablations, chat fixes</a:t>
             </a:r>
             <a:endParaRPr lang="en-US" sz="3000" dirty="0"/>
           </a:p>
@@ -10932,47 +11021,1289 @@
                 <a:ea typeface="Courier New" pitchFamily="34" charset="-122"/>
                 <a:cs typeface="Courier New" pitchFamily="34" charset="-120"/>
               </a:rPr>
-              <a:t>23 / 24   Smart-RUDP</a:t>
+              <a:t>23 / 25   Smart-RUDP</a:t>
             </a:r>
             <a:endParaRPr lang="en-US" sz="1000" dirty="0"/>
           </a:p>
         </p:txBody>
       </p:sp>
-      <p:sp>
-        <p:nvSpPr>
-          <p:cNvPr id="4" name="Shape 2"/>
+      <p:graphicFrame>
+        <p:nvGraphicFramePr>
+          <p:cNvPr id="24" name="Table 0"/>
+          <p:cNvGraphicFramePr>
+            <a:graphicFrameLocks noGrp="1"/>
+          </p:cNvGraphicFramePr>
+          <p:nvPr>
+            <p:extLst>
+              <p:ext uri="{D42A27DB-BD31-4B8C-83A1-F6EECF244321}">
+                <p14:modId xmlns:p14="http://schemas.microsoft.com/office/powerpoint/2010/main" val="1579011935"/>
+              </p:ext>
+            </p:extLst>
+          </p:nvPr>
+        </p:nvGraphicFramePr>
+        <p:xfrm>
+          <a:off x="548640" y="1188720"/>
+          <a:ext cx="5852160" cy="914400"/>
+        </p:xfrm>
+        <a:graphic>
+          <a:graphicData uri="http://schemas.openxmlformats.org/drawingml/2006/table">
+            <a:tbl>
+              <a:tblPr/>
+              <a:tblGrid>
+                <a:gridCol w="3291840"/>
+                <a:gridCol w="1280160"/>
+                <a:gridCol w="1280160"/>
+              </a:tblGrid>
+              <a:tr h="384048">
+                <a:tc>
+                  <a:txBody>
+                    <a:bodyPr/>
+                    <a:lstStyle/>
+                    <a:p>
+                      <a:pPr indent="0" marL="0">
+                        <a:buNone/>
+                      </a:pPr>
+                      <a:r>
+                        <a:rPr lang="en-US" sz="1300" b="1" dirty="0">
+                          <a:solidFill>
+                            <a:srgbClr val="0B0F14"/>
+                          </a:solidFill>
+                          <a:latin typeface="Courier New" pitchFamily="34" charset="0"/>
+                          <a:ea typeface="Courier New" pitchFamily="34" charset="-122"/>
+                          <a:cs typeface="Courier New" pitchFamily="34" charset="-120"/>
+                        </a:rPr>
+                        <a:t>Two flows, one bottleneck</a:t>
+                      </a:r>
+                      <a:endParaRPr lang="en-US" sz="1300" dirty="0">
+                        <a:latin typeface="Courier New" charset="0"/>
+                        <a:ea typeface="Courier New" charset="0"/>
+                        <a:cs typeface="Courier New" charset="0"/>
+                      </a:endParaRPr>
+                    </a:p>
+                  </a:txBody>
+                  <a:tcPr marL="91440" marR="91440" marT="45720" marB="45720">
+                    <a:lnL w="12700" cap="flat" cmpd="sng" algn="ctr">
+                      <a:solidFill>
+                        <a:srgbClr val="2A3441"/>
+                      </a:solidFill>
+                      <a:prstDash val="solid"/>
+                      <a:round/>
+                      <a:headEnd type="none" w="med" len="med"/>
+                      <a:tailEnd type="none" w="med" len="med"/>
+                    </a:lnL>
+                    <a:lnR w="12700" cap="flat" cmpd="sng" algn="ctr">
+                      <a:solidFill>
+                        <a:srgbClr val="2A3441"/>
+                      </a:solidFill>
+                      <a:prstDash val="solid"/>
+                      <a:round/>
+                      <a:headEnd type="none" w="med" len="med"/>
+                      <a:tailEnd type="none" w="med" len="med"/>
+                    </a:lnR>
+                    <a:lnT w="12700" cap="flat" cmpd="sng" algn="ctr">
+                      <a:solidFill>
+                        <a:srgbClr val="2A3441"/>
+                      </a:solidFill>
+                      <a:prstDash val="solid"/>
+                      <a:round/>
+                      <a:headEnd type="none" w="med" len="med"/>
+                      <a:tailEnd type="none" w="med" len="med"/>
+                    </a:lnT>
+                    <a:lnB w="12700" cap="flat" cmpd="sng" algn="ctr">
+                      <a:solidFill>
+                        <a:srgbClr val="2A3441"/>
+                      </a:solidFill>
+                      <a:prstDash val="solid"/>
+                      <a:round/>
+                      <a:headEnd type="none" w="med" len="med"/>
+                      <a:tailEnd type="none" w="med" len="med"/>
+                    </a:lnB>
+                    <a:solidFill>
+                      <a:srgbClr val="39FF88"/>
+                    </a:solidFill>
+                  </a:tcPr>
+                </a:tc>
+                <a:tc>
+                  <a:txBody>
+                    <a:bodyPr/>
+                    <a:lstStyle/>
+                    <a:p>
+                      <a:pPr indent="0" marL="0">
+                        <a:buNone/>
+                      </a:pPr>
+                      <a:r>
+                        <a:rPr lang="en-US" sz="1300" b="1" dirty="0">
+                          <a:solidFill>
+                            <a:srgbClr val="0B0F14"/>
+                          </a:solidFill>
+                          <a:latin typeface="Courier New" pitchFamily="34" charset="0"/>
+                          <a:ea typeface="Courier New" pitchFamily="34" charset="-122"/>
+                          <a:cs typeface="Courier New" pitchFamily="34" charset="-120"/>
+                        </a:rPr>
+                        <a:t>Share of A</a:t>
+                      </a:r>
+                      <a:endParaRPr lang="en-US" sz="1300" dirty="0">
+                        <a:latin typeface="Courier New" charset="0"/>
+                        <a:ea typeface="Courier New" charset="0"/>
+                        <a:cs typeface="Courier New" charset="0"/>
+                      </a:endParaRPr>
+                    </a:p>
+                  </a:txBody>
+                  <a:tcPr marL="91440" marR="91440" marT="45720" marB="45720">
+                    <a:lnL w="12700" cap="flat" cmpd="sng" algn="ctr">
+                      <a:solidFill>
+                        <a:srgbClr val="2A3441"/>
+                      </a:solidFill>
+                      <a:prstDash val="solid"/>
+                      <a:round/>
+                      <a:headEnd type="none" w="med" len="med"/>
+                      <a:tailEnd type="none" w="med" len="med"/>
+                    </a:lnL>
+                    <a:lnR w="12700" cap="flat" cmpd="sng" algn="ctr">
+                      <a:solidFill>
+                        <a:srgbClr val="2A3441"/>
+                      </a:solidFill>
+                      <a:prstDash val="solid"/>
+                      <a:round/>
+                      <a:headEnd type="none" w="med" len="med"/>
+                      <a:tailEnd type="none" w="med" len="med"/>
+                    </a:lnR>
+                    <a:lnT w="12700" cap="flat" cmpd="sng" algn="ctr">
+                      <a:solidFill>
+                        <a:srgbClr val="2A3441"/>
+                      </a:solidFill>
+                      <a:prstDash val="solid"/>
+                      <a:round/>
+                      <a:headEnd type="none" w="med" len="med"/>
+                      <a:tailEnd type="none" w="med" len="med"/>
+                    </a:lnT>
+                    <a:lnB w="12700" cap="flat" cmpd="sng" algn="ctr">
+                      <a:solidFill>
+                        <a:srgbClr val="2A3441"/>
+                      </a:solidFill>
+                      <a:prstDash val="solid"/>
+                      <a:round/>
+                      <a:headEnd type="none" w="med" len="med"/>
+                      <a:tailEnd type="none" w="med" len="med"/>
+                    </a:lnB>
+                    <a:solidFill>
+                      <a:srgbClr val="39FF88"/>
+                    </a:solidFill>
+                  </a:tcPr>
+                </a:tc>
+                <a:tc>
+                  <a:txBody>
+                    <a:bodyPr/>
+                    <a:lstStyle/>
+                    <a:p>
+                      <a:pPr indent="0" marL="0">
+                        <a:buNone/>
+                      </a:pPr>
+                      <a:r>
+                        <a:rPr lang="en-US" sz="1300" b="1" dirty="0">
+                          <a:solidFill>
+                            <a:srgbClr val="0B0F14"/>
+                          </a:solidFill>
+                          <a:latin typeface="Courier New" pitchFamily="34" charset="0"/>
+                          <a:ea typeface="Courier New" pitchFamily="34" charset="-122"/>
+                          <a:cs typeface="Courier New" pitchFamily="34" charset="-120"/>
+                        </a:rPr>
+                        <a:t>Jain</a:t>
+                      </a:r>
+                      <a:endParaRPr lang="en-US" sz="1300" dirty="0">
+                        <a:latin typeface="Courier New" charset="0"/>
+                        <a:ea typeface="Courier New" charset="0"/>
+                        <a:cs typeface="Courier New" charset="0"/>
+                      </a:endParaRPr>
+                    </a:p>
+                  </a:txBody>
+                  <a:tcPr marL="91440" marR="91440" marT="45720" marB="45720">
+                    <a:lnL w="12700" cap="flat" cmpd="sng" algn="ctr">
+                      <a:solidFill>
+                        <a:srgbClr val="2A3441"/>
+                      </a:solidFill>
+                      <a:prstDash val="solid"/>
+                      <a:round/>
+                      <a:headEnd type="none" w="med" len="med"/>
+                      <a:tailEnd type="none" w="med" len="med"/>
+                    </a:lnL>
+                    <a:lnR w="12700" cap="flat" cmpd="sng" algn="ctr">
+                      <a:solidFill>
+                        <a:srgbClr val="2A3441"/>
+                      </a:solidFill>
+                      <a:prstDash val="solid"/>
+                      <a:round/>
+                      <a:headEnd type="none" w="med" len="med"/>
+                      <a:tailEnd type="none" w="med" len="med"/>
+                    </a:lnR>
+                    <a:lnT w="12700" cap="flat" cmpd="sng" algn="ctr">
+                      <a:solidFill>
+                        <a:srgbClr val="2A3441"/>
+                      </a:solidFill>
+                      <a:prstDash val="solid"/>
+                      <a:round/>
+                      <a:headEnd type="none" w="med" len="med"/>
+                      <a:tailEnd type="none" w="med" len="med"/>
+                    </a:lnT>
+                    <a:lnB w="12700" cap="flat" cmpd="sng" algn="ctr">
+                      <a:solidFill>
+                        <a:srgbClr val="2A3441"/>
+                      </a:solidFill>
+                      <a:prstDash val="solid"/>
+                      <a:round/>
+                      <a:headEnd type="none" w="med" len="med"/>
+                      <a:tailEnd type="none" w="med" len="med"/>
+                    </a:lnB>
+                    <a:solidFill>
+                      <a:srgbClr val="39FF88"/>
+                    </a:solidFill>
+                  </a:tcPr>
+                </a:tc>
+              </a:tr>
+              <a:tr h="384048">
+                <a:tc>
+                  <a:txBody>
+                    <a:bodyPr/>
+                    <a:lstStyle/>
+                    <a:p>
+                      <a:pPr indent="0" marL="0">
+                        <a:buNone/>
+                      </a:pPr>
+                      <a:r>
+                        <a:rPr lang="en-US" sz="1300" dirty="0">
+                          <a:solidFill>
+                            <a:srgbClr val="E6EDF3"/>
+                          </a:solidFill>
+                          <a:latin typeface="Calibri" pitchFamily="34" charset="0"/>
+                          <a:ea typeface="Calibri" pitchFamily="34" charset="-122"/>
+                          <a:cs typeface="Calibri" pitchFamily="34" charset="-120"/>
+                        </a:rPr>
+                        <a:t>AIMD vs AIMD (long path)</a:t>
+                      </a:r>
+                      <a:endParaRPr lang="en-US" sz="1300" dirty="0">
+                        <a:latin typeface="Calibri" charset="0"/>
+                        <a:ea typeface="Calibri" charset="0"/>
+                        <a:cs typeface="Calibri" charset="0"/>
+                      </a:endParaRPr>
+                    </a:p>
+                  </a:txBody>
+                  <a:tcPr marL="91440" marR="91440" marT="45720" marB="45720">
+                    <a:lnL w="12700" cap="flat" cmpd="sng" algn="ctr">
+                      <a:solidFill>
+                        <a:srgbClr val="2A3441"/>
+                      </a:solidFill>
+                      <a:prstDash val="solid"/>
+                      <a:round/>
+                      <a:headEnd type="none" w="med" len="med"/>
+                      <a:tailEnd type="none" w="med" len="med"/>
+                    </a:lnL>
+                    <a:lnR w="12700" cap="flat" cmpd="sng" algn="ctr">
+                      <a:solidFill>
+                        <a:srgbClr val="2A3441"/>
+                      </a:solidFill>
+                      <a:prstDash val="solid"/>
+                      <a:round/>
+                      <a:headEnd type="none" w="med" len="med"/>
+                      <a:tailEnd type="none" w="med" len="med"/>
+                    </a:lnR>
+                    <a:lnT w="12700" cap="flat" cmpd="sng" algn="ctr">
+                      <a:solidFill>
+                        <a:srgbClr val="2A3441"/>
+                      </a:solidFill>
+                      <a:prstDash val="solid"/>
+                      <a:round/>
+                      <a:headEnd type="none" w="med" len="med"/>
+                      <a:tailEnd type="none" w="med" len="med"/>
+                    </a:lnT>
+                    <a:lnB w="12700" cap="flat" cmpd="sng" algn="ctr">
+                      <a:solidFill>
+                        <a:srgbClr val="2A3441"/>
+                      </a:solidFill>
+                      <a:prstDash val="solid"/>
+                      <a:round/>
+                      <a:headEnd type="none" w="med" len="med"/>
+                      <a:tailEnd type="none" w="med" len="med"/>
+                    </a:lnB>
+                    <a:solidFill>
+                      <a:srgbClr val="141B24"/>
+                    </a:solidFill>
+                  </a:tcPr>
+                </a:tc>
+                <a:tc>
+                  <a:txBody>
+                    <a:bodyPr/>
+                    <a:lstStyle/>
+                    <a:p>
+                      <a:pPr indent="0" marL="0">
+                        <a:buNone/>
+                      </a:pPr>
+                      <a:r>
+                        <a:rPr lang="en-US" sz="1300" dirty="0">
+                          <a:solidFill>
+                            <a:srgbClr val="E6EDF3"/>
+                          </a:solidFill>
+                          <a:latin typeface="Calibri" pitchFamily="34" charset="0"/>
+                          <a:ea typeface="Calibri" pitchFamily="34" charset="-122"/>
+                          <a:cs typeface="Calibri" pitchFamily="34" charset="-120"/>
+                        </a:rPr>
+                        <a:t>51%</a:t>
+                      </a:r>
+                      <a:endParaRPr lang="en-US" sz="1300" dirty="0">
+                        <a:latin typeface="Calibri" charset="0"/>
+                        <a:ea typeface="Calibri" charset="0"/>
+                        <a:cs typeface="Calibri" charset="0"/>
+                      </a:endParaRPr>
+                    </a:p>
+                  </a:txBody>
+                  <a:tcPr marL="91440" marR="91440" marT="45720" marB="45720">
+                    <a:lnL w="12700" cap="flat" cmpd="sng" algn="ctr">
+                      <a:solidFill>
+                        <a:srgbClr val="2A3441"/>
+                      </a:solidFill>
+                      <a:prstDash val="solid"/>
+                      <a:round/>
+                      <a:headEnd type="none" w="med" len="med"/>
+                      <a:tailEnd type="none" w="med" len="med"/>
+                    </a:lnL>
+                    <a:lnR w="12700" cap="flat" cmpd="sng" algn="ctr">
+                      <a:solidFill>
+                        <a:srgbClr val="2A3441"/>
+                      </a:solidFill>
+                      <a:prstDash val="solid"/>
+                      <a:round/>
+                      <a:headEnd type="none" w="med" len="med"/>
+                      <a:tailEnd type="none" w="med" len="med"/>
+                    </a:lnR>
+                    <a:lnT w="12700" cap="flat" cmpd="sng" algn="ctr">
+                      <a:solidFill>
+                        <a:srgbClr val="2A3441"/>
+                      </a:solidFill>
+                      <a:prstDash val="solid"/>
+                      <a:round/>
+                      <a:headEnd type="none" w="med" len="med"/>
+                      <a:tailEnd type="none" w="med" len="med"/>
+                    </a:lnT>
+                    <a:lnB w="12700" cap="flat" cmpd="sng" algn="ctr">
+                      <a:solidFill>
+                        <a:srgbClr val="2A3441"/>
+                      </a:solidFill>
+                      <a:prstDash val="solid"/>
+                      <a:round/>
+                      <a:headEnd type="none" w="med" len="med"/>
+                      <a:tailEnd type="none" w="med" len="med"/>
+                    </a:lnB>
+                    <a:solidFill>
+                      <a:srgbClr val="141B24"/>
+                    </a:solidFill>
+                  </a:tcPr>
+                </a:tc>
+                <a:tc>
+                  <a:txBody>
+                    <a:bodyPr/>
+                    <a:lstStyle/>
+                    <a:p>
+                      <a:pPr indent="0" marL="0">
+                        <a:buNone/>
+                      </a:pPr>
+                      <a:r>
+                        <a:rPr lang="en-US" sz="1300" dirty="0">
+                          <a:solidFill>
+                            <a:srgbClr val="E6EDF3"/>
+                          </a:solidFill>
+                          <a:latin typeface="Calibri" pitchFamily="34" charset="0"/>
+                          <a:ea typeface="Calibri" pitchFamily="34" charset="-122"/>
+                          <a:cs typeface="Calibri" pitchFamily="34" charset="-120"/>
+                        </a:rPr>
+                        <a:t>0.999</a:t>
+                      </a:r>
+                      <a:endParaRPr lang="en-US" sz="1300" dirty="0">
+                        <a:latin typeface="Calibri" charset="0"/>
+                        <a:ea typeface="Calibri" charset="0"/>
+                        <a:cs typeface="Calibri" charset="0"/>
+                      </a:endParaRPr>
+                    </a:p>
+                  </a:txBody>
+                  <a:tcPr marL="91440" marR="91440" marT="45720" marB="45720">
+                    <a:lnL w="12700" cap="flat" cmpd="sng" algn="ctr">
+                      <a:solidFill>
+                        <a:srgbClr val="2A3441"/>
+                      </a:solidFill>
+                      <a:prstDash val="solid"/>
+                      <a:round/>
+                      <a:headEnd type="none" w="med" len="med"/>
+                      <a:tailEnd type="none" w="med" len="med"/>
+                    </a:lnL>
+                    <a:lnR w="12700" cap="flat" cmpd="sng" algn="ctr">
+                      <a:solidFill>
+                        <a:srgbClr val="2A3441"/>
+                      </a:solidFill>
+                      <a:prstDash val="solid"/>
+                      <a:round/>
+                      <a:headEnd type="none" w="med" len="med"/>
+                      <a:tailEnd type="none" w="med" len="med"/>
+                    </a:lnR>
+                    <a:lnT w="12700" cap="flat" cmpd="sng" algn="ctr">
+                      <a:solidFill>
+                        <a:srgbClr val="2A3441"/>
+                      </a:solidFill>
+                      <a:prstDash val="solid"/>
+                      <a:round/>
+                      <a:headEnd type="none" w="med" len="med"/>
+                      <a:tailEnd type="none" w="med" len="med"/>
+                    </a:lnT>
+                    <a:lnB w="12700" cap="flat" cmpd="sng" algn="ctr">
+                      <a:solidFill>
+                        <a:srgbClr val="2A3441"/>
+                      </a:solidFill>
+                      <a:prstDash val="solid"/>
+                      <a:round/>
+                      <a:headEnd type="none" w="med" len="med"/>
+                      <a:tailEnd type="none" w="med" len="med"/>
+                    </a:lnB>
+                    <a:solidFill>
+                      <a:srgbClr val="141B24"/>
+                    </a:solidFill>
+                  </a:tcPr>
+                </a:tc>
+              </a:tr>
+              <a:tr h="384048">
+                <a:tc>
+                  <a:txBody>
+                    <a:bodyPr/>
+                    <a:lstStyle/>
+                    <a:p>
+                      <a:pPr indent="0" marL="0">
+                        <a:buNone/>
+                      </a:pPr>
+                      <a:r>
+                        <a:rPr lang="en-US" sz="1300" dirty="0">
+                          <a:solidFill>
+                            <a:srgbClr val="E6EDF3"/>
+                          </a:solidFill>
+                          <a:latin typeface="Calibri" pitchFamily="34" charset="0"/>
+                          <a:ea typeface="Calibri" pitchFamily="34" charset="-122"/>
+                          <a:cs typeface="Calibri" pitchFamily="34" charset="-120"/>
+                        </a:rPr>
+                        <a:t>Deep vs deep (long path)</a:t>
+                      </a:r>
+                      <a:endParaRPr lang="en-US" sz="1300" dirty="0">
+                        <a:latin typeface="Calibri" charset="0"/>
+                        <a:ea typeface="Calibri" charset="0"/>
+                        <a:cs typeface="Calibri" charset="0"/>
+                      </a:endParaRPr>
+                    </a:p>
+                  </a:txBody>
+                  <a:tcPr marL="91440" marR="91440" marT="45720" marB="45720">
+                    <a:lnL w="12700" cap="flat" cmpd="sng" algn="ctr">
+                      <a:solidFill>
+                        <a:srgbClr val="2A3441"/>
+                      </a:solidFill>
+                      <a:prstDash val="solid"/>
+                      <a:round/>
+                      <a:headEnd type="none" w="med" len="med"/>
+                      <a:tailEnd type="none" w="med" len="med"/>
+                    </a:lnL>
+                    <a:lnR w="12700" cap="flat" cmpd="sng" algn="ctr">
+                      <a:solidFill>
+                        <a:srgbClr val="2A3441"/>
+                      </a:solidFill>
+                      <a:prstDash val="solid"/>
+                      <a:round/>
+                      <a:headEnd type="none" w="med" len="med"/>
+                      <a:tailEnd type="none" w="med" len="med"/>
+                    </a:lnR>
+                    <a:lnT w="12700" cap="flat" cmpd="sng" algn="ctr">
+                      <a:solidFill>
+                        <a:srgbClr val="2A3441"/>
+                      </a:solidFill>
+                      <a:prstDash val="solid"/>
+                      <a:round/>
+                      <a:headEnd type="none" w="med" len="med"/>
+                      <a:tailEnd type="none" w="med" len="med"/>
+                    </a:lnT>
+                    <a:lnB w="12700" cap="flat" cmpd="sng" algn="ctr">
+                      <a:solidFill>
+                        <a:srgbClr val="2A3441"/>
+                      </a:solidFill>
+                      <a:prstDash val="solid"/>
+                      <a:round/>
+                      <a:headEnd type="none" w="med" len="med"/>
+                      <a:tailEnd type="none" w="med" len="med"/>
+                    </a:lnB>
+                    <a:solidFill>
+                      <a:srgbClr val="141B24"/>
+                    </a:solidFill>
+                  </a:tcPr>
+                </a:tc>
+                <a:tc>
+                  <a:txBody>
+                    <a:bodyPr/>
+                    <a:lstStyle/>
+                    <a:p>
+                      <a:pPr indent="0" marL="0">
+                        <a:buNone/>
+                      </a:pPr>
+                      <a:r>
+                        <a:rPr lang="en-US" sz="1300" dirty="0">
+                          <a:solidFill>
+                            <a:srgbClr val="E6EDF3"/>
+                          </a:solidFill>
+                          <a:latin typeface="Calibri" pitchFamily="34" charset="0"/>
+                          <a:ea typeface="Calibri" pitchFamily="34" charset="-122"/>
+                          <a:cs typeface="Calibri" pitchFamily="34" charset="-120"/>
+                        </a:rPr>
+                        <a:t>59%</a:t>
+                      </a:r>
+                      <a:endParaRPr lang="en-US" sz="1300" dirty="0">
+                        <a:latin typeface="Calibri" charset="0"/>
+                        <a:ea typeface="Calibri" charset="0"/>
+                        <a:cs typeface="Calibri" charset="0"/>
+                      </a:endParaRPr>
+                    </a:p>
+                  </a:txBody>
+                  <a:tcPr marL="91440" marR="91440" marT="45720" marB="45720">
+                    <a:lnL w="12700" cap="flat" cmpd="sng" algn="ctr">
+                      <a:solidFill>
+                        <a:srgbClr val="2A3441"/>
+                      </a:solidFill>
+                      <a:prstDash val="solid"/>
+                      <a:round/>
+                      <a:headEnd type="none" w="med" len="med"/>
+                      <a:tailEnd type="none" w="med" len="med"/>
+                    </a:lnL>
+                    <a:lnR w="12700" cap="flat" cmpd="sng" algn="ctr">
+                      <a:solidFill>
+                        <a:srgbClr val="2A3441"/>
+                      </a:solidFill>
+                      <a:prstDash val="solid"/>
+                      <a:round/>
+                      <a:headEnd type="none" w="med" len="med"/>
+                      <a:tailEnd type="none" w="med" len="med"/>
+                    </a:lnR>
+                    <a:lnT w="12700" cap="flat" cmpd="sng" algn="ctr">
+                      <a:solidFill>
+                        <a:srgbClr val="2A3441"/>
+                      </a:solidFill>
+                      <a:prstDash val="solid"/>
+                      <a:round/>
+                      <a:headEnd type="none" w="med" len="med"/>
+                      <a:tailEnd type="none" w="med" len="med"/>
+                    </a:lnT>
+                    <a:lnB w="12700" cap="flat" cmpd="sng" algn="ctr">
+                      <a:solidFill>
+                        <a:srgbClr val="2A3441"/>
+                      </a:solidFill>
+                      <a:prstDash val="solid"/>
+                      <a:round/>
+                      <a:headEnd type="none" w="med" len="med"/>
+                      <a:tailEnd type="none" w="med" len="med"/>
+                    </a:lnB>
+                    <a:solidFill>
+                      <a:srgbClr val="141B24"/>
+                    </a:solidFill>
+                  </a:tcPr>
+                </a:tc>
+                <a:tc>
+                  <a:txBody>
+                    <a:bodyPr/>
+                    <a:lstStyle/>
+                    <a:p>
+                      <a:pPr indent="0" marL="0">
+                        <a:buNone/>
+                      </a:pPr>
+                      <a:r>
+                        <a:rPr lang="en-US" sz="1300" dirty="0">
+                          <a:solidFill>
+                            <a:srgbClr val="E6EDF3"/>
+                          </a:solidFill>
+                          <a:latin typeface="Calibri" pitchFamily="34" charset="0"/>
+                          <a:ea typeface="Calibri" pitchFamily="34" charset="-122"/>
+                          <a:cs typeface="Calibri" pitchFamily="34" charset="-120"/>
+                        </a:rPr>
+                        <a:t>0.969</a:t>
+                      </a:r>
+                      <a:endParaRPr lang="en-US" sz="1300" dirty="0">
+                        <a:latin typeface="Calibri" charset="0"/>
+                        <a:ea typeface="Calibri" charset="0"/>
+                        <a:cs typeface="Calibri" charset="0"/>
+                      </a:endParaRPr>
+                    </a:p>
+                  </a:txBody>
+                  <a:tcPr marL="91440" marR="91440" marT="45720" marB="45720">
+                    <a:lnL w="12700" cap="flat" cmpd="sng" algn="ctr">
+                      <a:solidFill>
+                        <a:srgbClr val="2A3441"/>
+                      </a:solidFill>
+                      <a:prstDash val="solid"/>
+                      <a:round/>
+                      <a:headEnd type="none" w="med" len="med"/>
+                      <a:tailEnd type="none" w="med" len="med"/>
+                    </a:lnL>
+                    <a:lnR w="12700" cap="flat" cmpd="sng" algn="ctr">
+                      <a:solidFill>
+                        <a:srgbClr val="2A3441"/>
+                      </a:solidFill>
+                      <a:prstDash val="solid"/>
+                      <a:round/>
+                      <a:headEnd type="none" w="med" len="med"/>
+                      <a:tailEnd type="none" w="med" len="med"/>
+                    </a:lnR>
+                    <a:lnT w="12700" cap="flat" cmpd="sng" algn="ctr">
+                      <a:solidFill>
+                        <a:srgbClr val="2A3441"/>
+                      </a:solidFill>
+                      <a:prstDash val="solid"/>
+                      <a:round/>
+                      <a:headEnd type="none" w="med" len="med"/>
+                      <a:tailEnd type="none" w="med" len="med"/>
+                    </a:lnT>
+                    <a:lnB w="12700" cap="flat" cmpd="sng" algn="ctr">
+                      <a:solidFill>
+                        <a:srgbClr val="2A3441"/>
+                      </a:solidFill>
+                      <a:prstDash val="solid"/>
+                      <a:round/>
+                      <a:headEnd type="none" w="med" len="med"/>
+                      <a:tailEnd type="none" w="med" len="med"/>
+                    </a:lnB>
+                    <a:solidFill>
+                      <a:srgbClr val="141B24"/>
+                    </a:solidFill>
+                  </a:tcPr>
+                </a:tc>
+              </a:tr>
+              <a:tr h="384048">
+                <a:tc>
+                  <a:txBody>
+                    <a:bodyPr/>
+                    <a:lstStyle/>
+                    <a:p>
+                      <a:pPr indent="0" marL="0">
+                        <a:buNone/>
+                      </a:pPr>
+                      <a:r>
+                        <a:rPr lang="en-US" sz="1300" dirty="0">
+                          <a:solidFill>
+                            <a:srgbClr val="E6EDF3"/>
+                          </a:solidFill>
+                          <a:latin typeface="Calibri" pitchFamily="34" charset="0"/>
+                          <a:ea typeface="Calibri" pitchFamily="34" charset="-122"/>
+                          <a:cs typeface="Calibri" pitchFamily="34" charset="-120"/>
+                        </a:rPr>
+                        <a:t>Deep vs AIMD (no-loss path)</a:t>
+                      </a:r>
+                      <a:endParaRPr lang="en-US" sz="1300" dirty="0">
+                        <a:latin typeface="Calibri" charset="0"/>
+                        <a:ea typeface="Calibri" charset="0"/>
+                        <a:cs typeface="Calibri" charset="0"/>
+                      </a:endParaRPr>
+                    </a:p>
+                  </a:txBody>
+                  <a:tcPr marL="91440" marR="91440" marT="45720" marB="45720">
+                    <a:lnL w="12700" cap="flat" cmpd="sng" algn="ctr">
+                      <a:solidFill>
+                        <a:srgbClr val="2A3441"/>
+                      </a:solidFill>
+                      <a:prstDash val="solid"/>
+                      <a:round/>
+                      <a:headEnd type="none" w="med" len="med"/>
+                      <a:tailEnd type="none" w="med" len="med"/>
+                    </a:lnL>
+                    <a:lnR w="12700" cap="flat" cmpd="sng" algn="ctr">
+                      <a:solidFill>
+                        <a:srgbClr val="2A3441"/>
+                      </a:solidFill>
+                      <a:prstDash val="solid"/>
+                      <a:round/>
+                      <a:headEnd type="none" w="med" len="med"/>
+                      <a:tailEnd type="none" w="med" len="med"/>
+                    </a:lnR>
+                    <a:lnT w="12700" cap="flat" cmpd="sng" algn="ctr">
+                      <a:solidFill>
+                        <a:srgbClr val="2A3441"/>
+                      </a:solidFill>
+                      <a:prstDash val="solid"/>
+                      <a:round/>
+                      <a:headEnd type="none" w="med" len="med"/>
+                      <a:tailEnd type="none" w="med" len="med"/>
+                    </a:lnT>
+                    <a:lnB w="12700" cap="flat" cmpd="sng" algn="ctr">
+                      <a:solidFill>
+                        <a:srgbClr val="2A3441"/>
+                      </a:solidFill>
+                      <a:prstDash val="solid"/>
+                      <a:round/>
+                      <a:headEnd type="none" w="med" len="med"/>
+                      <a:tailEnd type="none" w="med" len="med"/>
+                    </a:lnB>
+                    <a:solidFill>
+                      <a:srgbClr val="141B24"/>
+                    </a:solidFill>
+                  </a:tcPr>
+                </a:tc>
+                <a:tc>
+                  <a:txBody>
+                    <a:bodyPr/>
+                    <a:lstStyle/>
+                    <a:p>
+                      <a:pPr indent="0" marL="0">
+                        <a:buNone/>
+                      </a:pPr>
+                      <a:r>
+                        <a:rPr lang="en-US" sz="1300" dirty="0">
+                          <a:solidFill>
+                            <a:srgbClr val="E6EDF3"/>
+                          </a:solidFill>
+                          <a:latin typeface="Calibri" pitchFamily="34" charset="0"/>
+                          <a:ea typeface="Calibri" pitchFamily="34" charset="-122"/>
+                          <a:cs typeface="Calibri" pitchFamily="34" charset="-120"/>
+                        </a:rPr>
+                        <a:t>44%</a:t>
+                      </a:r>
+                      <a:endParaRPr lang="en-US" sz="1300" dirty="0">
+                        <a:latin typeface="Calibri" charset="0"/>
+                        <a:ea typeface="Calibri" charset="0"/>
+                        <a:cs typeface="Calibri" charset="0"/>
+                      </a:endParaRPr>
+                    </a:p>
+                  </a:txBody>
+                  <a:tcPr marL="91440" marR="91440" marT="45720" marB="45720">
+                    <a:lnL w="12700" cap="flat" cmpd="sng" algn="ctr">
+                      <a:solidFill>
+                        <a:srgbClr val="2A3441"/>
+                      </a:solidFill>
+                      <a:prstDash val="solid"/>
+                      <a:round/>
+                      <a:headEnd type="none" w="med" len="med"/>
+                      <a:tailEnd type="none" w="med" len="med"/>
+                    </a:lnL>
+                    <a:lnR w="12700" cap="flat" cmpd="sng" algn="ctr">
+                      <a:solidFill>
+                        <a:srgbClr val="2A3441"/>
+                      </a:solidFill>
+                      <a:prstDash val="solid"/>
+                      <a:round/>
+                      <a:headEnd type="none" w="med" len="med"/>
+                      <a:tailEnd type="none" w="med" len="med"/>
+                    </a:lnR>
+                    <a:lnT w="12700" cap="flat" cmpd="sng" algn="ctr">
+                      <a:solidFill>
+                        <a:srgbClr val="2A3441"/>
+                      </a:solidFill>
+                      <a:prstDash val="solid"/>
+                      <a:round/>
+                      <a:headEnd type="none" w="med" len="med"/>
+                      <a:tailEnd type="none" w="med" len="med"/>
+                    </a:lnT>
+                    <a:lnB w="12700" cap="flat" cmpd="sng" algn="ctr">
+                      <a:solidFill>
+                        <a:srgbClr val="2A3441"/>
+                      </a:solidFill>
+                      <a:prstDash val="solid"/>
+                      <a:round/>
+                      <a:headEnd type="none" w="med" len="med"/>
+                      <a:tailEnd type="none" w="med" len="med"/>
+                    </a:lnB>
+                    <a:solidFill>
+                      <a:srgbClr val="141B24"/>
+                    </a:solidFill>
+                  </a:tcPr>
+                </a:tc>
+                <a:tc>
+                  <a:txBody>
+                    <a:bodyPr/>
+                    <a:lstStyle/>
+                    <a:p>
+                      <a:pPr indent="0" marL="0">
+                        <a:buNone/>
+                      </a:pPr>
+                      <a:r>
+                        <a:rPr lang="en-US" sz="1300" dirty="0">
+                          <a:solidFill>
+                            <a:srgbClr val="E6EDF3"/>
+                          </a:solidFill>
+                          <a:latin typeface="Calibri" pitchFamily="34" charset="0"/>
+                          <a:ea typeface="Calibri" pitchFamily="34" charset="-122"/>
+                          <a:cs typeface="Calibri" pitchFamily="34" charset="-120"/>
+                        </a:rPr>
+                        <a:t>0.987</a:t>
+                      </a:r>
+                      <a:endParaRPr lang="en-US" sz="1300" dirty="0">
+                        <a:latin typeface="Calibri" charset="0"/>
+                        <a:ea typeface="Calibri" charset="0"/>
+                        <a:cs typeface="Calibri" charset="0"/>
+                      </a:endParaRPr>
+                    </a:p>
+                  </a:txBody>
+                  <a:tcPr marL="91440" marR="91440" marT="45720" marB="45720">
+                    <a:lnL w="12700" cap="flat" cmpd="sng" algn="ctr">
+                      <a:solidFill>
+                        <a:srgbClr val="2A3441"/>
+                      </a:solidFill>
+                      <a:prstDash val="solid"/>
+                      <a:round/>
+                      <a:headEnd type="none" w="med" len="med"/>
+                      <a:tailEnd type="none" w="med" len="med"/>
+                    </a:lnL>
+                    <a:lnR w="12700" cap="flat" cmpd="sng" algn="ctr">
+                      <a:solidFill>
+                        <a:srgbClr val="2A3441"/>
+                      </a:solidFill>
+                      <a:prstDash val="solid"/>
+                      <a:round/>
+                      <a:headEnd type="none" w="med" len="med"/>
+                      <a:tailEnd type="none" w="med" len="med"/>
+                    </a:lnR>
+                    <a:lnT w="12700" cap="flat" cmpd="sng" algn="ctr">
+                      <a:solidFill>
+                        <a:srgbClr val="2A3441"/>
+                      </a:solidFill>
+                      <a:prstDash val="solid"/>
+                      <a:round/>
+                      <a:headEnd type="none" w="med" len="med"/>
+                      <a:tailEnd type="none" w="med" len="med"/>
+                    </a:lnT>
+                    <a:lnB w="12700" cap="flat" cmpd="sng" algn="ctr">
+                      <a:solidFill>
+                        <a:srgbClr val="2A3441"/>
+                      </a:solidFill>
+                      <a:prstDash val="solid"/>
+                      <a:round/>
+                      <a:headEnd type="none" w="med" len="med"/>
+                      <a:tailEnd type="none" w="med" len="med"/>
+                    </a:lnB>
+                    <a:solidFill>
+                      <a:srgbClr val="141B24"/>
+                    </a:solidFill>
+                  </a:tcPr>
+                </a:tc>
+              </a:tr>
+              <a:tr h="384048">
+                <a:tc>
+                  <a:txBody>
+                    <a:bodyPr/>
+                    <a:lstStyle/>
+                    <a:p>
+                      <a:pPr indent="0" marL="0">
+                        <a:buNone/>
+                      </a:pPr>
+                      <a:r>
+                        <a:rPr lang="en-US" sz="1300" dirty="0">
+                          <a:solidFill>
+                            <a:srgbClr val="E6EDF3"/>
+                          </a:solidFill>
+                          <a:latin typeface="Calibri" pitchFamily="34" charset="0"/>
+                          <a:ea typeface="Calibri" pitchFamily="34" charset="-122"/>
+                          <a:cs typeface="Calibri" pitchFamily="34" charset="-120"/>
+                        </a:rPr>
+                        <a:t>Deep vs AIMD (long path)</a:t>
+                      </a:r>
+                      <a:endParaRPr lang="en-US" sz="1300" dirty="0">
+                        <a:latin typeface="Calibri" charset="0"/>
+                        <a:ea typeface="Calibri" charset="0"/>
+                        <a:cs typeface="Calibri" charset="0"/>
+                      </a:endParaRPr>
+                    </a:p>
+                  </a:txBody>
+                  <a:tcPr marL="91440" marR="91440" marT="45720" marB="45720">
+                    <a:lnL w="12700" cap="flat" cmpd="sng" algn="ctr">
+                      <a:solidFill>
+                        <a:srgbClr val="2A3441"/>
+                      </a:solidFill>
+                      <a:prstDash val="solid"/>
+                      <a:round/>
+                      <a:headEnd type="none" w="med" len="med"/>
+                      <a:tailEnd type="none" w="med" len="med"/>
+                    </a:lnL>
+                    <a:lnR w="12700" cap="flat" cmpd="sng" algn="ctr">
+                      <a:solidFill>
+                        <a:srgbClr val="2A3441"/>
+                      </a:solidFill>
+                      <a:prstDash val="solid"/>
+                      <a:round/>
+                      <a:headEnd type="none" w="med" len="med"/>
+                      <a:tailEnd type="none" w="med" len="med"/>
+                    </a:lnR>
+                    <a:lnT w="12700" cap="flat" cmpd="sng" algn="ctr">
+                      <a:solidFill>
+                        <a:srgbClr val="2A3441"/>
+                      </a:solidFill>
+                      <a:prstDash val="solid"/>
+                      <a:round/>
+                      <a:headEnd type="none" w="med" len="med"/>
+                      <a:tailEnd type="none" w="med" len="med"/>
+                    </a:lnT>
+                    <a:lnB w="12700" cap="flat" cmpd="sng" algn="ctr">
+                      <a:solidFill>
+                        <a:srgbClr val="2A3441"/>
+                      </a:solidFill>
+                      <a:prstDash val="solid"/>
+                      <a:round/>
+                      <a:headEnd type="none" w="med" len="med"/>
+                      <a:tailEnd type="none" w="med" len="med"/>
+                    </a:lnB>
+                    <a:solidFill>
+                      <a:srgbClr val="141B24"/>
+                    </a:solidFill>
+                  </a:tcPr>
+                </a:tc>
+                <a:tc>
+                  <a:txBody>
+                    <a:bodyPr/>
+                    <a:lstStyle/>
+                    <a:p>
+                      <a:pPr indent="0" marL="0">
+                        <a:buNone/>
+                      </a:pPr>
+                      <a:r>
+                        <a:rPr lang="en-US" sz="1300" dirty="0">
+                          <a:solidFill>
+                            <a:srgbClr val="E6EDF3"/>
+                          </a:solidFill>
+                          <a:latin typeface="Calibri" pitchFamily="34" charset="0"/>
+                          <a:ea typeface="Calibri" pitchFamily="34" charset="-122"/>
+                          <a:cs typeface="Calibri" pitchFamily="34" charset="-120"/>
+                        </a:rPr>
+                        <a:t>74%</a:t>
+                      </a:r>
+                      <a:endParaRPr lang="en-US" sz="1300" dirty="0">
+                        <a:latin typeface="Calibri" charset="0"/>
+                        <a:ea typeface="Calibri" charset="0"/>
+                        <a:cs typeface="Calibri" charset="0"/>
+                      </a:endParaRPr>
+                    </a:p>
+                  </a:txBody>
+                  <a:tcPr marL="91440" marR="91440" marT="45720" marB="45720">
+                    <a:lnL w="12700" cap="flat" cmpd="sng" algn="ctr">
+                      <a:solidFill>
+                        <a:srgbClr val="2A3441"/>
+                      </a:solidFill>
+                      <a:prstDash val="solid"/>
+                      <a:round/>
+                      <a:headEnd type="none" w="med" len="med"/>
+                      <a:tailEnd type="none" w="med" len="med"/>
+                    </a:lnL>
+                    <a:lnR w="12700" cap="flat" cmpd="sng" algn="ctr">
+                      <a:solidFill>
+                        <a:srgbClr val="2A3441"/>
+                      </a:solidFill>
+                      <a:prstDash val="solid"/>
+                      <a:round/>
+                      <a:headEnd type="none" w="med" len="med"/>
+                      <a:tailEnd type="none" w="med" len="med"/>
+                    </a:lnR>
+                    <a:lnT w="12700" cap="flat" cmpd="sng" algn="ctr">
+                      <a:solidFill>
+                        <a:srgbClr val="2A3441"/>
+                      </a:solidFill>
+                      <a:prstDash val="solid"/>
+                      <a:round/>
+                      <a:headEnd type="none" w="med" len="med"/>
+                      <a:tailEnd type="none" w="med" len="med"/>
+                    </a:lnT>
+                    <a:lnB w="12700" cap="flat" cmpd="sng" algn="ctr">
+                      <a:solidFill>
+                        <a:srgbClr val="2A3441"/>
+                      </a:solidFill>
+                      <a:prstDash val="solid"/>
+                      <a:round/>
+                      <a:headEnd type="none" w="med" len="med"/>
+                      <a:tailEnd type="none" w="med" len="med"/>
+                    </a:lnB>
+                    <a:solidFill>
+                      <a:srgbClr val="141B24"/>
+                    </a:solidFill>
+                  </a:tcPr>
+                </a:tc>
+                <a:tc>
+                  <a:txBody>
+                    <a:bodyPr/>
+                    <a:lstStyle/>
+                    <a:p>
+                      <a:pPr indent="0" marL="0">
+                        <a:buNone/>
+                      </a:pPr>
+                      <a:r>
+                        <a:rPr lang="en-US" sz="1300" dirty="0">
+                          <a:solidFill>
+                            <a:srgbClr val="E6EDF3"/>
+                          </a:solidFill>
+                          <a:latin typeface="Calibri" pitchFamily="34" charset="0"/>
+                          <a:ea typeface="Calibri" pitchFamily="34" charset="-122"/>
+                          <a:cs typeface="Calibri" pitchFamily="34" charset="-120"/>
+                        </a:rPr>
+                        <a:t>0.819</a:t>
+                      </a:r>
+                      <a:endParaRPr lang="en-US" sz="1300" dirty="0">
+                        <a:latin typeface="Calibri" charset="0"/>
+                        <a:ea typeface="Calibri" charset="0"/>
+                        <a:cs typeface="Calibri" charset="0"/>
+                      </a:endParaRPr>
+                    </a:p>
+                  </a:txBody>
+                  <a:tcPr marL="91440" marR="91440" marT="45720" marB="45720">
+                    <a:lnL w="12700" cap="flat" cmpd="sng" algn="ctr">
+                      <a:solidFill>
+                        <a:srgbClr val="2A3441"/>
+                      </a:solidFill>
+                      <a:prstDash val="solid"/>
+                      <a:round/>
+                      <a:headEnd type="none" w="med" len="med"/>
+                      <a:tailEnd type="none" w="med" len="med"/>
+                    </a:lnL>
+                    <a:lnR w="12700" cap="flat" cmpd="sng" algn="ctr">
+                      <a:solidFill>
+                        <a:srgbClr val="2A3441"/>
+                      </a:solidFill>
+                      <a:prstDash val="solid"/>
+                      <a:round/>
+                      <a:headEnd type="none" w="med" len="med"/>
+                      <a:tailEnd type="none" w="med" len="med"/>
+                    </a:lnR>
+                    <a:lnT w="12700" cap="flat" cmpd="sng" algn="ctr">
+                      <a:solidFill>
+                        <a:srgbClr val="2A3441"/>
+                      </a:solidFill>
+                      <a:prstDash val="solid"/>
+                      <a:round/>
+                      <a:headEnd type="none" w="med" len="med"/>
+                      <a:tailEnd type="none" w="med" len="med"/>
+                    </a:lnT>
+                    <a:lnB w="12700" cap="flat" cmpd="sng" algn="ctr">
+                      <a:solidFill>
+                        <a:srgbClr val="2A3441"/>
+                      </a:solidFill>
+                      <a:prstDash val="solid"/>
+                      <a:round/>
+                      <a:headEnd type="none" w="med" len="med"/>
+                      <a:tailEnd type="none" w="med" len="med"/>
+                    </a:lnB>
+                    <a:solidFill>
+                      <a:srgbClr val="141B24"/>
+                    </a:solidFill>
+                  </a:tcPr>
+                </a:tc>
+              </a:tr>
+              <a:tr h="384048">
+                <a:tc>
+                  <a:txBody>
+                    <a:bodyPr/>
+                    <a:lstStyle/>
+                    <a:p>
+                      <a:pPr indent="0" marL="0">
+                        <a:buNone/>
+                      </a:pPr>
+                      <a:r>
+                        <a:rPr lang="en-US" sz="1300" dirty="0">
+                          <a:solidFill>
+                            <a:srgbClr val="E6EDF3"/>
+                          </a:solidFill>
+                          <a:latin typeface="Calibri" pitchFamily="34" charset="0"/>
+                          <a:ea typeface="Calibri" pitchFamily="34" charset="-122"/>
+                          <a:cs typeface="Calibri" pitchFamily="34" charset="-120"/>
+                        </a:rPr>
+                        <a:t>Fixed 8 vs AIMD (long path)</a:t>
+                      </a:r>
+                      <a:endParaRPr lang="en-US" sz="1300" dirty="0">
+                        <a:latin typeface="Calibri" charset="0"/>
+                        <a:ea typeface="Calibri" charset="0"/>
+                        <a:cs typeface="Calibri" charset="0"/>
+                      </a:endParaRPr>
+                    </a:p>
+                  </a:txBody>
+                  <a:tcPr marL="91440" marR="91440" marT="45720" marB="45720">
+                    <a:lnL w="12700" cap="flat" cmpd="sng" algn="ctr">
+                      <a:solidFill>
+                        <a:srgbClr val="2A3441"/>
+                      </a:solidFill>
+                      <a:prstDash val="solid"/>
+                      <a:round/>
+                      <a:headEnd type="none" w="med" len="med"/>
+                      <a:tailEnd type="none" w="med" len="med"/>
+                    </a:lnL>
+                    <a:lnR w="12700" cap="flat" cmpd="sng" algn="ctr">
+                      <a:solidFill>
+                        <a:srgbClr val="2A3441"/>
+                      </a:solidFill>
+                      <a:prstDash val="solid"/>
+                      <a:round/>
+                      <a:headEnd type="none" w="med" len="med"/>
+                      <a:tailEnd type="none" w="med" len="med"/>
+                    </a:lnR>
+                    <a:lnT w="12700" cap="flat" cmpd="sng" algn="ctr">
+                      <a:solidFill>
+                        <a:srgbClr val="2A3441"/>
+                      </a:solidFill>
+                      <a:prstDash val="solid"/>
+                      <a:round/>
+                      <a:headEnd type="none" w="med" len="med"/>
+                      <a:tailEnd type="none" w="med" len="med"/>
+                    </a:lnT>
+                    <a:lnB w="12700" cap="flat" cmpd="sng" algn="ctr">
+                      <a:solidFill>
+                        <a:srgbClr val="2A3441"/>
+                      </a:solidFill>
+                      <a:prstDash val="solid"/>
+                      <a:round/>
+                      <a:headEnd type="none" w="med" len="med"/>
+                      <a:tailEnd type="none" w="med" len="med"/>
+                    </a:lnB>
+                    <a:solidFill>
+                      <a:srgbClr val="141B24"/>
+                    </a:solidFill>
+                  </a:tcPr>
+                </a:tc>
+                <a:tc>
+                  <a:txBody>
+                    <a:bodyPr/>
+                    <a:lstStyle/>
+                    <a:p>
+                      <a:pPr indent="0" marL="0">
+                        <a:buNone/>
+                      </a:pPr>
+                      <a:r>
+                        <a:rPr lang="en-US" sz="1300" dirty="0">
+                          <a:solidFill>
+                            <a:srgbClr val="E6EDF3"/>
+                          </a:solidFill>
+                          <a:latin typeface="Calibri" pitchFamily="34" charset="0"/>
+                          <a:ea typeface="Calibri" pitchFamily="34" charset="-122"/>
+                          <a:cs typeface="Calibri" pitchFamily="34" charset="-120"/>
+                        </a:rPr>
+                        <a:t>72%</a:t>
+                      </a:r>
+                      <a:endParaRPr lang="en-US" sz="1300" dirty="0">
+                        <a:latin typeface="Calibri" charset="0"/>
+                        <a:ea typeface="Calibri" charset="0"/>
+                        <a:cs typeface="Calibri" charset="0"/>
+                      </a:endParaRPr>
+                    </a:p>
+                  </a:txBody>
+                  <a:tcPr marL="91440" marR="91440" marT="45720" marB="45720">
+                    <a:lnL w="12700" cap="flat" cmpd="sng" algn="ctr">
+                      <a:solidFill>
+                        <a:srgbClr val="2A3441"/>
+                      </a:solidFill>
+                      <a:prstDash val="solid"/>
+                      <a:round/>
+                      <a:headEnd type="none" w="med" len="med"/>
+                      <a:tailEnd type="none" w="med" len="med"/>
+                    </a:lnL>
+                    <a:lnR w="12700" cap="flat" cmpd="sng" algn="ctr">
+                      <a:solidFill>
+                        <a:srgbClr val="2A3441"/>
+                      </a:solidFill>
+                      <a:prstDash val="solid"/>
+                      <a:round/>
+                      <a:headEnd type="none" w="med" len="med"/>
+                      <a:tailEnd type="none" w="med" len="med"/>
+                    </a:lnR>
+                    <a:lnT w="12700" cap="flat" cmpd="sng" algn="ctr">
+                      <a:solidFill>
+                        <a:srgbClr val="2A3441"/>
+                      </a:solidFill>
+                      <a:prstDash val="solid"/>
+                      <a:round/>
+                      <a:headEnd type="none" w="med" len="med"/>
+                      <a:tailEnd type="none" w="med" len="med"/>
+                    </a:lnT>
+                    <a:lnB w="12700" cap="flat" cmpd="sng" algn="ctr">
+                      <a:solidFill>
+                        <a:srgbClr val="2A3441"/>
+                      </a:solidFill>
+                      <a:prstDash val="solid"/>
+                      <a:round/>
+                      <a:headEnd type="none" w="med" len="med"/>
+                      <a:tailEnd type="none" w="med" len="med"/>
+                    </a:lnB>
+                    <a:solidFill>
+                      <a:srgbClr val="141B24"/>
+                    </a:solidFill>
+                  </a:tcPr>
+                </a:tc>
+                <a:tc>
+                  <a:txBody>
+                    <a:bodyPr/>
+                    <a:lstStyle/>
+                    <a:p>
+                      <a:pPr indent="0" marL="0">
+                        <a:buNone/>
+                      </a:pPr>
+                      <a:r>
+                        <a:rPr lang="en-US" sz="1300" dirty="0">
+                          <a:solidFill>
+                            <a:srgbClr val="E6EDF3"/>
+                          </a:solidFill>
+                          <a:latin typeface="Calibri" pitchFamily="34" charset="0"/>
+                          <a:ea typeface="Calibri" pitchFamily="34" charset="-122"/>
+                          <a:cs typeface="Calibri" pitchFamily="34" charset="-120"/>
+                        </a:rPr>
+                        <a:t>0.843</a:t>
+                      </a:r>
+                      <a:endParaRPr lang="en-US" sz="1300" dirty="0">
+                        <a:latin typeface="Calibri" charset="0"/>
+                        <a:ea typeface="Calibri" charset="0"/>
+                        <a:cs typeface="Calibri" charset="0"/>
+                      </a:endParaRPr>
+                    </a:p>
+                  </a:txBody>
+                  <a:tcPr marL="91440" marR="91440" marT="45720" marB="45720">
+                    <a:lnL w="12700" cap="flat" cmpd="sng" algn="ctr">
+                      <a:solidFill>
+                        <a:srgbClr val="2A3441"/>
+                      </a:solidFill>
+                      <a:prstDash val="solid"/>
+                      <a:round/>
+                      <a:headEnd type="none" w="med" len="med"/>
+                      <a:tailEnd type="none" w="med" len="med"/>
+                    </a:lnL>
+                    <a:lnR w="12700" cap="flat" cmpd="sng" algn="ctr">
+                      <a:solidFill>
+                        <a:srgbClr val="2A3441"/>
+                      </a:solidFill>
+                      <a:prstDash val="solid"/>
+                      <a:round/>
+                      <a:headEnd type="none" w="med" len="med"/>
+                      <a:tailEnd type="none" w="med" len="med"/>
+                    </a:lnR>
+                    <a:lnT w="12700" cap="flat" cmpd="sng" algn="ctr">
+                      <a:solidFill>
+                        <a:srgbClr val="2A3441"/>
+                      </a:solidFill>
+                      <a:prstDash val="solid"/>
+                      <a:round/>
+                      <a:headEnd type="none" w="med" len="med"/>
+                      <a:tailEnd type="none" w="med" len="med"/>
+                    </a:lnT>
+                    <a:lnB w="12700" cap="flat" cmpd="sng" algn="ctr">
+                      <a:solidFill>
+                        <a:srgbClr val="2A3441"/>
+                      </a:solidFill>
+                      <a:prstDash val="solid"/>
+                      <a:round/>
+                      <a:headEnd type="none" w="med" len="med"/>
+                      <a:tailEnd type="none" w="med" len="med"/>
+                    </a:lnB>
+                    <a:solidFill>
+                      <a:srgbClr val="141B24"/>
+                    </a:solidFill>
+                  </a:tcPr>
+                </a:tc>
+              </a:tr>
+            </a:tbl>
+          </a:graphicData>
+        </a:graphic>
+      </p:graphicFrame>
+      <p:sp>
+        <p:nvSpPr>
+          <p:cNvPr id="5" name="Text 2"/>
           <p:cNvSpPr/>
           <p:nvPr/>
         </p:nvSpPr>
         <p:spPr>
           <a:xfrm>
-            <a:off x="548640" y="1371600"/>
-            <a:ext cx="5394960" cy="4206240"/>
-          </a:xfrm>
-          <a:prstGeom prst="rect">
-            <a:avLst/>
-          </a:prstGeom>
-          <a:solidFill>
-            <a:srgbClr val="141B24"/>
-          </a:solidFill>
-          <a:ln w="12700">
-            <a:solidFill>
-              <a:srgbClr val="39FF88"/>
-            </a:solidFill>
-            <a:prstDash val="solid"/>
-          </a:ln>
-        </p:spPr>
-      </p:sp>
-      <p:sp>
-        <p:nvSpPr>
-          <p:cNvPr id="5" name="Text 3"/>
-          <p:cNvSpPr/>
-          <p:nvPr/>
-        </p:nvSpPr>
-        <p:spPr>
-          <a:xfrm>
-            <a:off x="731520" y="1508760"/>
-            <a:ext cx="5029200" cy="457200"/>
+            <a:off x="6766560" y="1188720"/>
+            <a:ext cx="5029200" cy="4937760"/>
           </a:xfrm>
           <a:prstGeom prst="rect">
             <a:avLst/>
@@ -10981,53 +12312,18 @@
           <a:ln/>
         </p:spPr>
         <p:txBody>
-          <a:bodyPr wrap="square" lIns="0" tIns="0" rIns="0" bIns="0" rtlCol="0" anchor="ctr"/>
-          <a:lstStyle/>
-          <a:p>
-            <a:pPr indent="0" marL="0">
-              <a:buNone/>
-            </a:pPr>
-            <a:r>
-              <a:rPr lang="en-US" sz="2000" b="1" dirty="0">
-                <a:solidFill>
-                  <a:srgbClr val="39FF88"/>
-                </a:solidFill>
-                <a:latin typeface="Courier New" pitchFamily="34" charset="0"/>
-                <a:ea typeface="Courier New" pitchFamily="34" charset="-122"/>
-                <a:cs typeface="Courier New" pitchFamily="34" charset="-120"/>
-              </a:rPr>
-              <a:t>Learned</a:t>
-            </a:r>
-            <a:endParaRPr lang="en-US" sz="2000" dirty="0"/>
-          </a:p>
-        </p:txBody>
-      </p:sp>
-      <p:sp>
-        <p:nvSpPr>
-          <p:cNvPr id="6" name="Text 4"/>
-          <p:cNvSpPr/>
-          <p:nvPr/>
-        </p:nvSpPr>
-        <p:spPr>
-          <a:xfrm>
-            <a:off x="731520" y="2011680"/>
-            <a:ext cx="5029200" cy="3429000"/>
-          </a:xfrm>
-          <a:prstGeom prst="rect">
-            <a:avLst/>
-          </a:prstGeom>
-          <a:noFill/>
-          <a:ln/>
-        </p:spPr>
-        <p:txBody>
           <a:bodyPr wrap="square" lIns="0" tIns="0" rIns="0" bIns="0" rtlCol="0" anchor="t"/>
           <a:lstStyle/>
           <a:p>
-            <a:pPr indent="0" marL="0">
-              <a:buNone/>
-            </a:pPr>
-            <a:r>
-              <a:rPr lang="en-US" sz="2000" dirty="0">
+            <a:pPr marL="342900" indent="-342900">
+              <a:spcAft>
+                <a:spcPts val="800"/>
+              </a:spcAft>
+              <a:buSzPct val="100000"/>
+              <a:buChar char="•"/>
+            </a:pPr>
+            <a:r>
+              <a:rPr lang="en-US" sz="1400" dirty="0">
                 <a:solidFill>
                   <a:srgbClr val="E6EDF3"/>
                 </a:solidFill>
@@ -11035,16 +12331,20 @@
                 <a:ea typeface="Calibri" pitchFamily="34" charset="-122"/>
                 <a:cs typeface="Calibri" pitchFamily="34" charset="-120"/>
               </a:rPr>
-              <a:t>Reliability is a set of simple rules working together.</a:t>
-            </a:r>
-            <a:endParaRPr lang="en-US" sz="2000" dirty="0"/>
-          </a:p>
-          <a:p>
-            <a:pPr indent="0" marL="0">
-              <a:buNone/>
-            </a:pPr>
-            <a:r>
-              <a:rPr lang="en-US" sz="2000" dirty="0">
+              <a:t>Fair on short paths; takes 74% against AIMD on the 120 ms path, like a fixed window</a:t>
+            </a:r>
+            <a:endParaRPr lang="en-US" sz="1400" dirty="0"/>
+          </a:p>
+          <a:p>
+            <a:pPr marL="342900" indent="-342900">
+              <a:spcAft>
+                <a:spcPts val="800"/>
+              </a:spcAft>
+              <a:buSzPct val="100000"/>
+              <a:buChar char="•"/>
+            </a:pPr>
+            <a:r>
+              <a:rPr lang="en-US" sz="1400" dirty="0">
                 <a:solidFill>
                   <a:srgbClr val="E6EDF3"/>
                 </a:solidFill>
@@ -11052,16 +12352,20 @@
                 <a:ea typeface="Calibri" pitchFamily="34" charset="-122"/>
                 <a:cs typeface="Calibri" pitchFamily="34" charset="-120"/>
               </a:rPr>
-              <a:t>Congestion control matters as much as retransmission.</a:t>
-            </a:r>
-            <a:endParaRPr lang="en-US" sz="2000" dirty="0"/>
-          </a:p>
-          <a:p>
-            <a:pPr indent="0" marL="0">
-              <a:buNone/>
-            </a:pPr>
-            <a:r>
-              <a:rPr lang="en-US" sz="2000" dirty="0">
+              <a:t>Ablation: the no-shrink mask is what matters (6.54 s without it, about 3.3 s with it; AIMD 7.16 s)</a:t>
+            </a:r>
+            <a:endParaRPr lang="en-US" sz="1400" dirty="0"/>
+          </a:p>
+          <a:p>
+            <a:pPr marL="342900" indent="-342900">
+              <a:spcAft>
+                <a:spcPts val="800"/>
+              </a:spcAft>
+              <a:buSzPct val="100000"/>
+              <a:buChar char="•"/>
+            </a:pPr>
+            <a:r>
+              <a:rPr lang="en-US" sz="1400" dirty="0">
                 <a:solidFill>
                   <a:srgbClr val="E6EDF3"/>
                 </a:solidFill>
@@ -11069,102 +12373,20 @@
                 <a:ea typeface="Calibri" pitchFamily="34" charset="-122"/>
                 <a:cs typeface="Calibri" pitchFamily="34" charset="-120"/>
               </a:rPr>
-              <a:t>Testing tools fail in surprising ways.</a:t>
-            </a:r>
-            <a:endParaRPr lang="en-US" sz="2000" dirty="0"/>
-          </a:p>
-        </p:txBody>
-      </p:sp>
-      <p:sp>
-        <p:nvSpPr>
-          <p:cNvPr id="7" name="Shape 5"/>
-          <p:cNvSpPr/>
-          <p:nvPr/>
-        </p:nvSpPr>
-        <p:spPr>
-          <a:xfrm>
-            <a:off x="6217920" y="1371600"/>
-            <a:ext cx="5394960" cy="4206240"/>
-          </a:xfrm>
-          <a:prstGeom prst="rect">
-            <a:avLst/>
-          </a:prstGeom>
-          <a:solidFill>
-            <a:srgbClr val="141B24"/>
-          </a:solidFill>
-          <a:ln w="12700">
-            <a:solidFill>
-              <a:srgbClr val="FFB000"/>
-            </a:solidFill>
-            <a:prstDash val="solid"/>
-          </a:ln>
-        </p:spPr>
-      </p:sp>
-      <p:sp>
-        <p:nvSpPr>
-          <p:cNvPr id="8" name="Text 6"/>
-          <p:cNvSpPr/>
-          <p:nvPr/>
-        </p:nvSpPr>
-        <p:spPr>
-          <a:xfrm>
-            <a:off x="6400800" y="1508760"/>
-            <a:ext cx="5029200" cy="457200"/>
-          </a:xfrm>
-          <a:prstGeom prst="rect">
-            <a:avLst/>
-          </a:prstGeom>
-          <a:noFill/>
-          <a:ln/>
-        </p:spPr>
-        <p:txBody>
-          <a:bodyPr wrap="square" lIns="0" tIns="0" rIns="0" bIns="0" rtlCol="0" anchor="ctr"/>
-          <a:lstStyle/>
-          <a:p>
-            <a:pPr indent="0" marL="0">
-              <a:buNone/>
-            </a:pPr>
-            <a:r>
-              <a:rPr lang="en-US" sz="2000" b="1" dirty="0">
-                <a:solidFill>
-                  <a:srgbClr val="FFB000"/>
-                </a:solidFill>
-                <a:latin typeface="Courier New" pitchFamily="34" charset="0"/>
-                <a:ea typeface="Courier New" pitchFamily="34" charset="-122"/>
-                <a:cs typeface="Courier New" pitchFamily="34" charset="-120"/>
-              </a:rPr>
-              <a:t>Next</a:t>
-            </a:r>
-            <a:endParaRPr lang="en-US" sz="2000" dirty="0"/>
-          </a:p>
-        </p:txBody>
-      </p:sp>
-      <p:sp>
-        <p:nvSpPr>
-          <p:cNvPr id="9" name="Text 7"/>
-          <p:cNvSpPr/>
-          <p:nvPr/>
-        </p:nvSpPr>
-        <p:spPr>
-          <a:xfrm>
-            <a:off x="6400800" y="2011680"/>
-            <a:ext cx="5029200" cy="3429000"/>
-          </a:xfrm>
-          <a:prstGeom prst="rect">
-            <a:avLst/>
-          </a:prstGeom>
-          <a:noFill/>
-          <a:ln/>
-        </p:spPr>
-        <p:txBody>
-          <a:bodyPr wrap="square" lIns="0" tIns="0" rIns="0" bIns="0" rtlCol="0" anchor="t"/>
-          <a:lstStyle/>
-          <a:p>
-            <a:pPr indent="0" marL="0">
-              <a:buNone/>
-            </a:pPr>
-            <a:r>
-              <a:rPr lang="en-US" sz="2000" dirty="0">
+              <a:t>Other parts (delay penalty, last action, throughput input) showed no measurable value</a:t>
+            </a:r>
+            <a:endParaRPr lang="en-US" sz="1400" dirty="0"/>
+          </a:p>
+          <a:p>
+            <a:pPr marL="342900" indent="-342900">
+              <a:spcAft>
+                <a:spcPts val="800"/>
+              </a:spcAft>
+              <a:buSzPct val="100000"/>
+              <a:buChar char="•"/>
+            </a:pPr>
+            <a:r>
+              <a:rPr lang="en-US" sz="1400" dirty="0">
                 <a:solidFill>
                   <a:srgbClr val="E6EDF3"/>
                 </a:solidFill>
@@ -11172,16 +12394,20 @@
                 <a:ea typeface="Calibri" pitchFamily="34" charset="-122"/>
                 <a:cs typeface="Calibri" pitchFamily="34" charset="-120"/>
               </a:rPr>
-              <a:t>Train the neural agent in C / on real netem</a:t>
-            </a:r>
-            <a:endParaRPr lang="en-US" sz="2000" dirty="0"/>
-          </a:p>
-          <a:p>
-            <a:pPr indent="0" marL="0">
-              <a:buNone/>
-            </a:pPr>
-            <a:r>
-              <a:rPr lang="en-US" sz="2000" dirty="0">
+              <a:t>Same recipe gave 3.2 to 7.4 s across seeds: seed sensitivity is a real weakness</a:t>
+            </a:r>
+            <a:endParaRPr lang="en-US" sz="1400" dirty="0"/>
+          </a:p>
+          <a:p>
+            <a:pPr marL="342900" indent="-342900">
+              <a:spcAft>
+                <a:spcPts val="800"/>
+              </a:spcAft>
+              <a:buSzPct val="100000"/>
+              <a:buChar char="•"/>
+            </a:pPr>
+            <a:r>
+              <a:rPr lang="en-US" sz="1400" dirty="0">
                 <a:solidFill>
                   <a:srgbClr val="E6EDF3"/>
                 </a:solidFill>
@@ -11189,65 +12415,48 @@
                 <a:ea typeface="Calibri" pitchFamily="34" charset="-122"/>
                 <a:cs typeface="Calibri" pitchFamily="34" charset="-120"/>
               </a:rPr>
-              <a:t>Selective ACK where throughput limits the path</a:t>
-            </a:r>
-            <a:endParaRPr lang="en-US" sz="2000" dirty="0"/>
-          </a:p>
+              <a:t>Found and fixed a dup-ACK retransmission storm in the chat gateway; added a live dashboard and an adaptive RTO</a:t>
+            </a:r>
+            <a:endParaRPr lang="en-US" sz="1400" dirty="0"/>
+          </a:p>
+        </p:txBody>
+      </p:sp>
+      <p:sp>
+        <p:nvSpPr>
+          <p:cNvPr id="6" name="Text 3"/>
+          <p:cNvSpPr/>
+          <p:nvPr/>
+        </p:nvSpPr>
+        <p:spPr>
+          <a:xfrm>
+            <a:off x="548640" y="3840480"/>
+            <a:ext cx="5852160" cy="731520"/>
+          </a:xfrm>
+          <a:prstGeom prst="rect">
+            <a:avLst/>
+          </a:prstGeom>
+          <a:noFill/>
+          <a:ln/>
+        </p:spPr>
+        <p:txBody>
+          <a:bodyPr wrap="square" lIns="0" tIns="0" rIns="0" bIns="0" rtlCol="0" anchor="ctr"/>
+          <a:lstStyle/>
           <a:p>
             <a:pPr indent="0" marL="0">
               <a:buNone/>
             </a:pPr>
             <a:r>
-              <a:rPr lang="en-US" sz="2000" dirty="0">
-                <a:solidFill>
-                  <a:srgbClr val="E6EDF3"/>
+              <a:rPr lang="en-US" sz="1300" dirty="0">
+                <a:solidFill>
+                  <a:srgbClr val="8B98A5"/>
                 </a:solidFill>
                 <a:latin typeface="Calibri" pitchFamily="34" charset="0"/>
                 <a:ea typeface="Calibri" pitchFamily="34" charset="-122"/>
                 <a:cs typeface="Calibri" pitchFamily="34" charset="-120"/>
               </a:rPr>
-              <a:t>Kernel netem and real multi-machine tests</a:t>
-            </a:r>
-            <a:endParaRPr lang="en-US" sz="2000" dirty="0"/>
-          </a:p>
-        </p:txBody>
-      </p:sp>
-      <p:sp>
-        <p:nvSpPr>
-          <p:cNvPr id="10" name="Text 8"/>
-          <p:cNvSpPr/>
-          <p:nvPr/>
-        </p:nvSpPr>
-        <p:spPr>
-          <a:xfrm>
-            <a:off x="548640" y="5852160"/>
-            <a:ext cx="10972800" cy="365760"/>
-          </a:xfrm>
-          <a:prstGeom prst="rect">
-            <a:avLst/>
-          </a:prstGeom>
-          <a:noFill/>
-          <a:ln/>
-        </p:spPr>
-        <p:txBody>
-          <a:bodyPr wrap="square" lIns="0" tIns="0" rIns="0" bIns="0" rtlCol="0" anchor="ctr"/>
-          <a:lstStyle/>
-          <a:p>
-            <a:pPr indent="0" marL="0">
-              <a:buNone/>
-            </a:pPr>
-            <a:r>
-              <a:rPr lang="en-US" sz="1400" dirty="0">
-                <a:solidFill>
-                  <a:srgbClr val="8B98A5"/>
-                </a:solidFill>
-                <a:latin typeface="Calibri" pitchFamily="34" charset="0"/>
-                <a:ea typeface="Calibri" pitchFamily="34" charset="-122"/>
-                <a:cs typeface="Calibri" pitchFamily="34" charset="-120"/>
-              </a:rPr>
-              <a:t>Limits: Go-Back-N wastes bandwidth and suffers under reordering; C tests use an emulated path; the tabular agent did not beat AIMD in C.</a:t>
-            </a:r>
-            <a:endParaRPr lang="en-US" sz="1400" dirty="0"/>
+              <a:t>Simulator, 20 seeds; ablation on 48 stress paths. Code: web/fairness_test.py, web/ablate.py.</a:t>
+            </a:r>
+            <a:endParaRPr lang="en-US" sz="1300" dirty="0"/>
           </a:p>
         </p:txBody>
       </p:sp>
@@ -11291,8 +12500,8 @@
         </p:nvSpPr>
         <p:spPr>
           <a:xfrm>
-            <a:off x="731520" y="2103120"/>
-            <a:ext cx="10058400" cy="1097280"/>
+            <a:off x="548640" y="320040"/>
+            <a:ext cx="11064240" cy="731520"/>
           </a:xfrm>
           <a:prstGeom prst="rect">
             <a:avLst/>
@@ -11308,7 +12517,7 @@
               <a:buNone/>
             </a:pPr>
             <a:r>
-              <a:rPr lang="en-US" sz="6400" b="1" dirty="0">
+              <a:rPr lang="en-US" sz="3000" b="1" dirty="0">
                 <a:solidFill>
                   <a:srgbClr val="39FF88"/>
                 </a:solidFill>
@@ -11316,9 +12525,9 @@
                 <a:ea typeface="Courier New" pitchFamily="34" charset="-122"/>
                 <a:cs typeface="Courier New" pitchFamily="34" charset="-120"/>
               </a:rPr>
-              <a:t>Thank you</a:t>
-            </a:r>
-            <a:endParaRPr lang="en-US" sz="6400" dirty="0"/>
+              <a:t>Learnings and future work</a:t>
+            </a:r>
+            <a:endParaRPr lang="en-US" sz="3000" dirty="0"/>
           </a:p>
         </p:txBody>
       </p:sp>
@@ -11330,8 +12539,8 @@
         </p:nvSpPr>
         <p:spPr>
           <a:xfrm>
-            <a:off x="731520" y="3474720"/>
-            <a:ext cx="10058400" cy="548640"/>
+            <a:off x="9418320" y="6446520"/>
+            <a:ext cx="2377440" cy="274320"/>
           </a:xfrm>
           <a:prstGeom prst="rect">
             <a:avLst/>
@@ -11343,34 +12552,59 @@
           <a:bodyPr wrap="square" lIns="0" tIns="0" rIns="0" bIns="0" rtlCol="0" anchor="ctr"/>
           <a:lstStyle/>
           <a:p>
-            <a:pPr indent="0" marL="0">
+            <a:pPr algn="r" indent="0" marL="0">
               <a:buNone/>
             </a:pPr>
             <a:r>
-              <a:rPr lang="en-US" sz="2600" dirty="0">
-                <a:solidFill>
-                  <a:srgbClr val="E6EDF3"/>
+              <a:rPr lang="en-US" sz="1000" dirty="0">
+                <a:solidFill>
+                  <a:srgbClr val="8B98A5"/>
                 </a:solidFill>
                 <a:latin typeface="Courier New" pitchFamily="34" charset="0"/>
                 <a:ea typeface="Courier New" pitchFamily="34" charset="-122"/>
                 <a:cs typeface="Courier New" pitchFamily="34" charset="-120"/>
               </a:rPr>
-              <a:t>github.com/Capsturrrr/rudp</a:t>
-            </a:r>
-            <a:endParaRPr lang="en-US" sz="2600" dirty="0"/>
-          </a:p>
-        </p:txBody>
-      </p:sp>
-      <p:sp>
-        <p:nvSpPr>
-          <p:cNvPr id="4" name="Text 2"/>
+              <a:t>24 / 25   Smart-RUDP</a:t>
+            </a:r>
+            <a:endParaRPr lang="en-US" sz="1000" dirty="0"/>
+          </a:p>
+        </p:txBody>
+      </p:sp>
+      <p:sp>
+        <p:nvSpPr>
+          <p:cNvPr id="4" name="Shape 2"/>
           <p:cNvSpPr/>
           <p:nvPr/>
         </p:nvSpPr>
         <p:spPr>
           <a:xfrm>
-            <a:off x="731520" y="4206240"/>
-            <a:ext cx="10058400" cy="457200"/>
+            <a:off x="548640" y="1371600"/>
+            <a:ext cx="5394960" cy="4206240"/>
+          </a:xfrm>
+          <a:prstGeom prst="rect">
+            <a:avLst/>
+          </a:prstGeom>
+          <a:solidFill>
+            <a:srgbClr val="141B24"/>
+          </a:solidFill>
+          <a:ln w="12700">
+            <a:solidFill>
+              <a:srgbClr val="39FF88"/>
+            </a:solidFill>
+            <a:prstDash val="solid"/>
+          </a:ln>
+        </p:spPr>
+      </p:sp>
+      <p:sp>
+        <p:nvSpPr>
+          <p:cNvPr id="5" name="Text 3"/>
+          <p:cNvSpPr/>
+          <p:nvPr/>
+        </p:nvSpPr>
+        <p:spPr>
+          <a:xfrm>
+            <a:off x="731520" y="1508760"/>
+            <a:ext cx="5029200" cy="457200"/>
           </a:xfrm>
           <a:prstGeom prst="rect">
             <a:avLst/>
@@ -11386,17 +12620,266 @@
               <a:buNone/>
             </a:pPr>
             <a:r>
-              <a:rPr lang="en-US" sz="1800" dirty="0">
-                <a:solidFill>
-                  <a:srgbClr val="8B98A5"/>
+              <a:rPr lang="en-US" sz="2000" b="1" dirty="0">
+                <a:solidFill>
+                  <a:srgbClr val="39FF88"/>
+                </a:solidFill>
+                <a:latin typeface="Courier New" pitchFamily="34" charset="0"/>
+                <a:ea typeface="Courier New" pitchFamily="34" charset="-122"/>
+                <a:cs typeface="Courier New" pitchFamily="34" charset="-120"/>
+              </a:rPr>
+              <a:t>Learned</a:t>
+            </a:r>
+            <a:endParaRPr lang="en-US" sz="2000" dirty="0"/>
+          </a:p>
+        </p:txBody>
+      </p:sp>
+      <p:sp>
+        <p:nvSpPr>
+          <p:cNvPr id="6" name="Text 4"/>
+          <p:cNvSpPr/>
+          <p:nvPr/>
+        </p:nvSpPr>
+        <p:spPr>
+          <a:xfrm>
+            <a:off x="731520" y="2011680"/>
+            <a:ext cx="5029200" cy="3429000"/>
+          </a:xfrm>
+          <a:prstGeom prst="rect">
+            <a:avLst/>
+          </a:prstGeom>
+          <a:noFill/>
+          <a:ln/>
+        </p:spPr>
+        <p:txBody>
+          <a:bodyPr wrap="square" lIns="0" tIns="0" rIns="0" bIns="0" rtlCol="0" anchor="t"/>
+          <a:lstStyle/>
+          <a:p>
+            <a:pPr indent="0" marL="0">
+              <a:buNone/>
+            </a:pPr>
+            <a:r>
+              <a:rPr lang="en-US" sz="2000" dirty="0">
+                <a:solidFill>
+                  <a:srgbClr val="E6EDF3"/>
                 </a:solidFill>
                 <a:latin typeface="Calibri" pitchFamily="34" charset="0"/>
                 <a:ea typeface="Calibri" pitchFamily="34" charset="-122"/>
                 <a:cs typeface="Calibri" pitchFamily="34" charset="-120"/>
               </a:rPr>
-              <a:t>Harshavardhan Mallela   Rohit Arya   Shloak Sinha</a:t>
-            </a:r>
-            <a:endParaRPr lang="en-US" sz="1800" dirty="0"/>
+              <a:t>Reliability is a set of simple rules working together.</a:t>
+            </a:r>
+            <a:endParaRPr lang="en-US" sz="2000" dirty="0"/>
+          </a:p>
+          <a:p>
+            <a:pPr indent="0" marL="0">
+              <a:buNone/>
+            </a:pPr>
+            <a:r>
+              <a:rPr lang="en-US" sz="2000" dirty="0">
+                <a:solidFill>
+                  <a:srgbClr val="E6EDF3"/>
+                </a:solidFill>
+                <a:latin typeface="Calibri" pitchFamily="34" charset="0"/>
+                <a:ea typeface="Calibri" pitchFamily="34" charset="-122"/>
+                <a:cs typeface="Calibri" pitchFamily="34" charset="-120"/>
+              </a:rPr>
+              <a:t>Congestion control matters as much as retransmission.</a:t>
+            </a:r>
+            <a:endParaRPr lang="en-US" sz="2000" dirty="0"/>
+          </a:p>
+          <a:p>
+            <a:pPr indent="0" marL="0">
+              <a:buNone/>
+            </a:pPr>
+            <a:r>
+              <a:rPr lang="en-US" sz="2000" dirty="0">
+                <a:solidFill>
+                  <a:srgbClr val="E6EDF3"/>
+                </a:solidFill>
+                <a:latin typeface="Calibri" pitchFamily="34" charset="0"/>
+                <a:ea typeface="Calibri" pitchFamily="34" charset="-122"/>
+                <a:cs typeface="Calibri" pitchFamily="34" charset="-120"/>
+              </a:rPr>
+              <a:t>Testing tools fail in surprising ways.</a:t>
+            </a:r>
+            <a:endParaRPr lang="en-US" sz="2000" dirty="0"/>
+          </a:p>
+        </p:txBody>
+      </p:sp>
+      <p:sp>
+        <p:nvSpPr>
+          <p:cNvPr id="7" name="Shape 5"/>
+          <p:cNvSpPr/>
+          <p:nvPr/>
+        </p:nvSpPr>
+        <p:spPr>
+          <a:xfrm>
+            <a:off x="6217920" y="1371600"/>
+            <a:ext cx="5394960" cy="4206240"/>
+          </a:xfrm>
+          <a:prstGeom prst="rect">
+            <a:avLst/>
+          </a:prstGeom>
+          <a:solidFill>
+            <a:srgbClr val="141B24"/>
+          </a:solidFill>
+          <a:ln w="12700">
+            <a:solidFill>
+              <a:srgbClr val="FFB000"/>
+            </a:solidFill>
+            <a:prstDash val="solid"/>
+          </a:ln>
+        </p:spPr>
+      </p:sp>
+      <p:sp>
+        <p:nvSpPr>
+          <p:cNvPr id="8" name="Text 6"/>
+          <p:cNvSpPr/>
+          <p:nvPr/>
+        </p:nvSpPr>
+        <p:spPr>
+          <a:xfrm>
+            <a:off x="6400800" y="1508760"/>
+            <a:ext cx="5029200" cy="457200"/>
+          </a:xfrm>
+          <a:prstGeom prst="rect">
+            <a:avLst/>
+          </a:prstGeom>
+          <a:noFill/>
+          <a:ln/>
+        </p:spPr>
+        <p:txBody>
+          <a:bodyPr wrap="square" lIns="0" tIns="0" rIns="0" bIns="0" rtlCol="0" anchor="ctr"/>
+          <a:lstStyle/>
+          <a:p>
+            <a:pPr indent="0" marL="0">
+              <a:buNone/>
+            </a:pPr>
+            <a:r>
+              <a:rPr lang="en-US" sz="2000" b="1" dirty="0">
+                <a:solidFill>
+                  <a:srgbClr val="FFB000"/>
+                </a:solidFill>
+                <a:latin typeface="Courier New" pitchFamily="34" charset="0"/>
+                <a:ea typeface="Courier New" pitchFamily="34" charset="-122"/>
+                <a:cs typeface="Courier New" pitchFamily="34" charset="-120"/>
+              </a:rPr>
+              <a:t>Next</a:t>
+            </a:r>
+            <a:endParaRPr lang="en-US" sz="2000" dirty="0"/>
+          </a:p>
+        </p:txBody>
+      </p:sp>
+      <p:sp>
+        <p:nvSpPr>
+          <p:cNvPr id="9" name="Text 7"/>
+          <p:cNvSpPr/>
+          <p:nvPr/>
+        </p:nvSpPr>
+        <p:spPr>
+          <a:xfrm>
+            <a:off x="6400800" y="2011680"/>
+            <a:ext cx="5029200" cy="3429000"/>
+          </a:xfrm>
+          <a:prstGeom prst="rect">
+            <a:avLst/>
+          </a:prstGeom>
+          <a:noFill/>
+          <a:ln/>
+        </p:spPr>
+        <p:txBody>
+          <a:bodyPr wrap="square" lIns="0" tIns="0" rIns="0" bIns="0" rtlCol="0" anchor="t"/>
+          <a:lstStyle/>
+          <a:p>
+            <a:pPr indent="0" marL="0">
+              <a:buNone/>
+            </a:pPr>
+            <a:r>
+              <a:rPr lang="en-US" sz="2000" dirty="0">
+                <a:solidFill>
+                  <a:srgbClr val="E6EDF3"/>
+                </a:solidFill>
+                <a:latin typeface="Calibri" pitchFamily="34" charset="0"/>
+                <a:ea typeface="Calibri" pitchFamily="34" charset="-122"/>
+                <a:cs typeface="Calibri" pitchFamily="34" charset="-120"/>
+              </a:rPr>
+              <a:t>Train the neural agent in C / on real netem</a:t>
+            </a:r>
+            <a:endParaRPr lang="en-US" sz="2000" dirty="0"/>
+          </a:p>
+          <a:p>
+            <a:pPr indent="0" marL="0">
+              <a:buNone/>
+            </a:pPr>
+            <a:r>
+              <a:rPr lang="en-US" sz="2000" dirty="0">
+                <a:solidFill>
+                  <a:srgbClr val="E6EDF3"/>
+                </a:solidFill>
+                <a:latin typeface="Calibri" pitchFamily="34" charset="0"/>
+                <a:ea typeface="Calibri" pitchFamily="34" charset="-122"/>
+                <a:cs typeface="Calibri" pitchFamily="34" charset="-120"/>
+              </a:rPr>
+              <a:t>Selective ACK where throughput limits the path</a:t>
+            </a:r>
+            <a:endParaRPr lang="en-US" sz="2000" dirty="0"/>
+          </a:p>
+          <a:p>
+            <a:pPr indent="0" marL="0">
+              <a:buNone/>
+            </a:pPr>
+            <a:r>
+              <a:rPr lang="en-US" sz="2000" dirty="0">
+                <a:solidFill>
+                  <a:srgbClr val="E6EDF3"/>
+                </a:solidFill>
+                <a:latin typeface="Calibri" pitchFamily="34" charset="0"/>
+                <a:ea typeface="Calibri" pitchFamily="34" charset="-122"/>
+                <a:cs typeface="Calibri" pitchFamily="34" charset="-120"/>
+              </a:rPr>
+              <a:t>Kernel netem and real multi-machine tests</a:t>
+            </a:r>
+            <a:endParaRPr lang="en-US" sz="2000" dirty="0"/>
+          </a:p>
+        </p:txBody>
+      </p:sp>
+      <p:sp>
+        <p:nvSpPr>
+          <p:cNvPr id="10" name="Text 8"/>
+          <p:cNvSpPr/>
+          <p:nvPr/>
+        </p:nvSpPr>
+        <p:spPr>
+          <a:xfrm>
+            <a:off x="548640" y="5852160"/>
+            <a:ext cx="10972800" cy="365760"/>
+          </a:xfrm>
+          <a:prstGeom prst="rect">
+            <a:avLst/>
+          </a:prstGeom>
+          <a:noFill/>
+          <a:ln/>
+        </p:spPr>
+        <p:txBody>
+          <a:bodyPr wrap="square" lIns="0" tIns="0" rIns="0" bIns="0" rtlCol="0" anchor="ctr"/>
+          <a:lstStyle/>
+          <a:p>
+            <a:pPr indent="0" marL="0">
+              <a:buNone/>
+            </a:pPr>
+            <a:r>
+              <a:rPr lang="en-US" sz="1400" dirty="0">
+                <a:solidFill>
+                  <a:srgbClr val="8B98A5"/>
+                </a:solidFill>
+                <a:latin typeface="Calibri" pitchFamily="34" charset="0"/>
+                <a:ea typeface="Calibri" pitchFamily="34" charset="-122"/>
+                <a:cs typeface="Calibri" pitchFamily="34" charset="-120"/>
+              </a:rPr>
+              <a:t>Limits: Go-Back-N wastes bandwidth and suffers under reordering; C tests use an emulated path; the tabular agent did not beat AIMD in C.</a:t>
+            </a:r>
+            <a:endParaRPr lang="en-US" sz="1400" dirty="0"/>
           </a:p>
         </p:txBody>
       </p:sp>
@@ -11440,6 +12923,155 @@
         </p:nvSpPr>
         <p:spPr>
           <a:xfrm>
+            <a:off x="731520" y="2103120"/>
+            <a:ext cx="10058400" cy="1097280"/>
+          </a:xfrm>
+          <a:prstGeom prst="rect">
+            <a:avLst/>
+          </a:prstGeom>
+          <a:noFill/>
+          <a:ln/>
+        </p:spPr>
+        <p:txBody>
+          <a:bodyPr wrap="square" lIns="0" tIns="0" rIns="0" bIns="0" rtlCol="0" anchor="ctr"/>
+          <a:lstStyle/>
+          <a:p>
+            <a:pPr indent="0" marL="0">
+              <a:buNone/>
+            </a:pPr>
+            <a:r>
+              <a:rPr lang="en-US" sz="6400" b="1" dirty="0">
+                <a:solidFill>
+                  <a:srgbClr val="39FF88"/>
+                </a:solidFill>
+                <a:latin typeface="Courier New" pitchFamily="34" charset="0"/>
+                <a:ea typeface="Courier New" pitchFamily="34" charset="-122"/>
+                <a:cs typeface="Courier New" pitchFamily="34" charset="-120"/>
+              </a:rPr>
+              <a:t>Thank you</a:t>
+            </a:r>
+            <a:endParaRPr lang="en-US" sz="6400" dirty="0"/>
+          </a:p>
+        </p:txBody>
+      </p:sp>
+      <p:sp>
+        <p:nvSpPr>
+          <p:cNvPr id="3" name="Text 1"/>
+          <p:cNvSpPr/>
+          <p:nvPr/>
+        </p:nvSpPr>
+        <p:spPr>
+          <a:xfrm>
+            <a:off x="731520" y="3474720"/>
+            <a:ext cx="10058400" cy="548640"/>
+          </a:xfrm>
+          <a:prstGeom prst="rect">
+            <a:avLst/>
+          </a:prstGeom>
+          <a:noFill/>
+          <a:ln/>
+        </p:spPr>
+        <p:txBody>
+          <a:bodyPr wrap="square" lIns="0" tIns="0" rIns="0" bIns="0" rtlCol="0" anchor="ctr"/>
+          <a:lstStyle/>
+          <a:p>
+            <a:pPr indent="0" marL="0">
+              <a:buNone/>
+            </a:pPr>
+            <a:r>
+              <a:rPr lang="en-US" sz="2600" dirty="0">
+                <a:solidFill>
+                  <a:srgbClr val="E6EDF3"/>
+                </a:solidFill>
+                <a:latin typeface="Courier New" pitchFamily="34" charset="0"/>
+                <a:ea typeface="Courier New" pitchFamily="34" charset="-122"/>
+                <a:cs typeface="Courier New" pitchFamily="34" charset="-120"/>
+              </a:rPr>
+              <a:t>github.com/Capsturrrr/rudp</a:t>
+            </a:r>
+            <a:endParaRPr lang="en-US" sz="2600" dirty="0"/>
+          </a:p>
+        </p:txBody>
+      </p:sp>
+      <p:sp>
+        <p:nvSpPr>
+          <p:cNvPr id="4" name="Text 2"/>
+          <p:cNvSpPr/>
+          <p:nvPr/>
+        </p:nvSpPr>
+        <p:spPr>
+          <a:xfrm>
+            <a:off x="731520" y="4206240"/>
+            <a:ext cx="10058400" cy="457200"/>
+          </a:xfrm>
+          <a:prstGeom prst="rect">
+            <a:avLst/>
+          </a:prstGeom>
+          <a:noFill/>
+          <a:ln/>
+        </p:spPr>
+        <p:txBody>
+          <a:bodyPr wrap="square" lIns="0" tIns="0" rIns="0" bIns="0" rtlCol="0" anchor="ctr"/>
+          <a:lstStyle/>
+          <a:p>
+            <a:pPr indent="0" marL="0">
+              <a:buNone/>
+            </a:pPr>
+            <a:r>
+              <a:rPr lang="en-US" sz="1800" dirty="0">
+                <a:solidFill>
+                  <a:srgbClr val="8B98A5"/>
+                </a:solidFill>
+                <a:latin typeface="Calibri" pitchFamily="34" charset="0"/>
+                <a:ea typeface="Calibri" pitchFamily="34" charset="-122"/>
+                <a:cs typeface="Calibri" pitchFamily="34" charset="-120"/>
+              </a:rPr>
+              <a:t>Harshavardhan Mallela   Rohit Arya   Shloak Sinha</a:t>
+            </a:r>
+            <a:endParaRPr lang="en-US" sz="1800" dirty="0"/>
+          </a:p>
+        </p:txBody>
+      </p:sp>
+    </p:spTree>
+  </p:cSld>
+  <p:clrMapOvr>
+    <a:masterClrMapping/>
+  </p:clrMapOvr>
+</p:sld>
+</file>
+
+<file path=ppt/slides/slide26.xml><?xml version="1.0" encoding="utf-8"?>
+<p:sld xmlns:a="http://schemas.openxmlformats.org/drawingml/2006/main" xmlns:r="http://schemas.openxmlformats.org/officeDocument/2006/relationships" xmlns:p="http://schemas.openxmlformats.org/presentationml/2006/main">
+  <p:cSld name="Slide 26">
+    <p:bg>
+      <p:bgPr>
+        <a:solidFill>
+          <a:srgbClr val="0B0F14"/>
+        </a:solidFill>
+      </p:bgPr>
+    </p:bg>
+    <p:spTree>
+      <p:nvGrpSpPr>
+        <p:cNvPr id="1" name=""/>
+        <p:cNvGrpSpPr/>
+        <p:nvPr/>
+      </p:nvGrpSpPr>
+      <p:grpSpPr>
+        <a:xfrm>
+          <a:off x="0" y="0"/>
+          <a:ext cx="0" cy="0"/>
+          <a:chOff x="0" y="0"/>
+          <a:chExt cx="0" cy="0"/>
+        </a:xfrm>
+      </p:grpSpPr>
+      <p:sp>
+        <p:nvSpPr>
+          <p:cNvPr id="2" name="Text 0"/>
+          <p:cNvSpPr/>
+          <p:nvPr/>
+        </p:nvSpPr>
+        <p:spPr>
+          <a:xfrm>
             <a:off x="548640" y="320040"/>
             <a:ext cx="11064240" cy="731520"/>
           </a:xfrm>
@@ -11744,7 +13376,7 @@
                 <a:ea typeface="Courier New" pitchFamily="34" charset="-122"/>
                 <a:cs typeface="Courier New" pitchFamily="34" charset="-120"/>
               </a:rPr>
-              <a:t>3 / 24   Smart-RUDP</a:t>
+              <a:t>3 / 25   Smart-RUDP</a:t>
             </a:r>
             <a:endParaRPr lang="en-US" sz="1000" dirty="0"/>
           </a:p>
@@ -12138,7 +13770,7 @@
                 <a:ea typeface="Courier New" pitchFamily="34" charset="-122"/>
                 <a:cs typeface="Courier New" pitchFamily="34" charset="-120"/>
               </a:rPr>
-              <a:t>4 / 24   Smart-RUDP</a:t>
+              <a:t>4 / 25   Smart-RUDP</a:t>
             </a:r>
             <a:endParaRPr lang="en-US" sz="1000" dirty="0"/>
           </a:p>
@@ -12699,7 +14331,7 @@
                 <a:ea typeface="Courier New" pitchFamily="34" charset="-122"/>
                 <a:cs typeface="Courier New" pitchFamily="34" charset="-120"/>
               </a:rPr>
-              <a:t>5 / 24   Smart-RUDP</a:t>
+              <a:t>5 / 25   Smart-RUDP</a:t>
             </a:r>
             <a:endParaRPr lang="en-US" sz="1000" dirty="0"/>
           </a:p>
@@ -14138,7 +15770,7 @@
                 <a:ea typeface="Courier New" pitchFamily="34" charset="-122"/>
                 <a:cs typeface="Courier New" pitchFamily="34" charset="-120"/>
               </a:rPr>
-              <a:t>6 / 24   Smart-RUDP</a:t>
+              <a:t>6 / 25   Smart-RUDP</a:t>
             </a:r>
             <a:endParaRPr lang="en-US" sz="1000" dirty="0"/>
           </a:p>
@@ -15373,7 +17005,7 @@
                 <a:ea typeface="Courier New" pitchFamily="34" charset="-122"/>
                 <a:cs typeface="Courier New" pitchFamily="34" charset="-120"/>
               </a:rPr>
-              <a:t>7 / 24   Smart-RUDP</a:t>
+              <a:t>7 / 25   Smart-RUDP</a:t>
             </a:r>
             <a:endParaRPr lang="en-US" sz="1000" dirty="0"/>
           </a:p>
@@ -15816,7 +17448,7 @@
                 <a:ea typeface="Courier New" pitchFamily="34" charset="-122"/>
                 <a:cs typeface="Courier New" pitchFamily="34" charset="-120"/>
               </a:rPr>
-              <a:t>8 / 24   Smart-RUDP</a:t>
+              <a:t>8 / 25   Smart-RUDP</a:t>
             </a:r>
             <a:endParaRPr lang="en-US" sz="1000" dirty="0"/>
           </a:p>
@@ -16116,7 +17748,7 @@
                 <a:ea typeface="Courier New" pitchFamily="34" charset="-122"/>
                 <a:cs typeface="Courier New" pitchFamily="34" charset="-120"/>
               </a:rPr>
-              <a:t>9 / 24   Smart-RUDP</a:t>
+              <a:t>9 / 25   Smart-RUDP</a:t>
             </a:r>
             <a:endParaRPr lang="en-US" sz="1000" dirty="0"/>
           </a:p>

--- a/docs/RUDP_Presentation.pptx
+++ b/docs/RUDP_Presentation.pptx
@@ -7982,7 +7982,7 @@
                           <a:ea typeface="Courier New" pitchFamily="34" charset="-122"/>
                           <a:cs typeface="Courier New" pitchFamily="34" charset="-120"/>
                         </a:rPr>
-                        <a:t>48 unseen paths (simulated)</a:t>
+                        <a:t>48 paths, original simulator</a:t>
                       </a:r>
                       <a:endParaRPr lang="en-US" sz="1300" dirty="0">
                         <a:latin typeface="Courier New" charset="0"/>
@@ -9528,7 +9528,7 @@
                 <a:ea typeface="Calibri" pitchFamily="34" charset="-122"/>
                 <a:cs typeface="Calibri" pitchFamily="34" charset="-120"/>
               </a:rPr>
-              <a:t>The TCP row is a model, not kernel TCP. Real netem numbers need a Linux machine: netem_baselines.sh.</a:t>
+              <a:t>Caveat: this simulator allowed a dup-ACK retransmission storm. With the realistic rule, stress means are AIMD 7.75 s, neural 7.27 s: about level. The TCP row is a model, not kernel TCP.</a:t>
             </a:r>
             <a:endParaRPr lang="en-US" sz="1300" dirty="0"/>
           </a:p>
@@ -10872,7 +10872,7 @@
                 <a:ea typeface="Calibri" pitchFamily="34" charset="-122"/>
                 <a:cs typeface="Calibri" pitchFamily="34" charset="-120"/>
               </a:rPr>
-              <a:t>Caveats: trained in a simulator; emulated paths; AIMD cap 128 vs agents 32; agent retransmits more on random loss</a:t>
+              <a:t>Caveats: trained in a simulator; emulated paths (not real networks); agent retransmits more on random loss</a:t>
             </a:r>
             <a:endParaRPr lang="en-US" sz="1500" dirty="0"/>
           </a:p>
@@ -10911,7 +10911,7 @@
                 <a:ea typeface="Calibri" pitchFamily="34" charset="-122"/>
                 <a:cs typeface="Calibri" pitchFamily="34" charset="-120"/>
               </a:rPr>
-              <a:t>15 runs per cell (satellite: 8), 95% confidence intervals. Code: src/deep_cc.h, web/dqn.py, eval_ci2.sh.</a:t>
+              <a:t>15 runs per cell (satellite: 8), 95% intervals. Equal-cap check (AIMD capped at 32, 10 runs): neural still wins by 19%, 29%, 28%, all significant (eval_ci4.sh).</a:t>
             </a:r>
             <a:endParaRPr lang="en-US" sz="1300" dirty="0"/>
           </a:p>

--- a/docs/RUDP_Presentation.pptx
+++ b/docs/RUDP_Presentation.pptx
@@ -31,9 +31,10 @@
     <p:sldId id="279" r:id="rId25"/>
     <p:sldId id="280" r:id="rId26"/>
     <p:sldId id="281" r:id="rId27"/>
+    <p:sldId id="282" r:id="rId28"/>
   </p:sldIdLst>
   <p:notesMasterIdLst>
-    <p:notesMasterId r:id="rId28"/>
+    <p:notesMasterId r:id="rId29"/>
   </p:notesMasterIdLst>
   <p:sldSz cx="12192000" cy="6858000"/>
   <p:notesSz cx="6858000" cy="12192000"/>
@@ -2135,6 +2136,94 @@
             <a:fld id="{F7021451-1387-4CA6-816F-3879F97B5CBC}" type="slidenum">
               <a:rPr lang="en-US"/>
               <a:t>26</a:t>
+            </a:fld>
+            <a:endParaRPr lang="en-US"/>
+          </a:p>
+        </p:txBody>
+      </p:sp>
+    </p:spTree>
+    <p:extLst>
+      <p:ext uri="{BB962C8B-B14F-4D97-AF65-F5344CB8AC3E}">
+        <p14:creationId xmlns:p14="http://schemas.microsoft.com/office/powerpoint/2010/main" val="1024086991"/>
+      </p:ext>
+    </p:extLst>
+  </p:cSld>
+  <p:clrMapOvr>
+    <a:masterClrMapping/>
+  </p:clrMapOvr>
+</p:notes>
+</file>
+
+<file path=ppt/notesSlides/notesSlide27.xml><?xml version="1.0" encoding="utf-8"?>
+<p:notes xmlns:a="http://schemas.openxmlformats.org/drawingml/2006/main" xmlns:r="http://schemas.openxmlformats.org/officeDocument/2006/relationships" xmlns:p="http://schemas.openxmlformats.org/presentationml/2006/main">
+  <p:cSld>
+    <p:spTree>
+      <p:nvGrpSpPr>
+        <p:cNvPr id="1" name=""/>
+        <p:cNvGrpSpPr/>
+        <p:nvPr/>
+      </p:nvGrpSpPr>
+      <p:grpSpPr>
+        <a:xfrm>
+          <a:off x="0" y="0"/>
+          <a:ext cx="0" cy="0"/>
+          <a:chOff x="0" y="0"/>
+          <a:chExt cx="0" cy="0"/>
+        </a:xfrm>
+      </p:grpSpPr>
+      <p:sp>
+        <p:nvSpPr>
+          <p:cNvPr id="2" name="Slide Image Placeholder 1"/>
+          <p:cNvSpPr>
+            <a:spLocks noGrp="1" noRot="1" noChangeAspect="1"/>
+          </p:cNvSpPr>
+          <p:nvPr>
+            <p:ph type="sldImg"/>
+          </p:nvPr>
+        </p:nvSpPr>
+        <p:spPr/>
+      </p:sp>
+      <p:sp>
+        <p:nvSpPr>
+          <p:cNvPr id="3" name="Notes Placeholder 2"/>
+          <p:cNvSpPr>
+            <a:spLocks noGrp="1"/>
+          </p:cNvSpPr>
+          <p:nvPr>
+            <p:ph type="body" idx="1"/>
+          </p:nvPr>
+        </p:nvSpPr>
+        <p:spPr/>
+        <p:txBody>
+          <a:bodyPr/>
+          <a:lstStyle/>
+          <a:p>
+            <a:r>
+              <a:rPr lang="en-US" dirty="0"/>
+              <a:t/>
+            </a:r>
+            <a:endParaRPr lang="en-US" dirty="0"/>
+          </a:p>
+        </p:txBody>
+      </p:sp>
+      <p:sp>
+        <p:nvSpPr>
+          <p:cNvPr id="4" name="Slide Number Placeholder 3"/>
+          <p:cNvSpPr>
+            <a:spLocks noGrp="1"/>
+          </p:cNvSpPr>
+          <p:nvPr>
+            <p:ph type="sldNum" sz="quarter" idx="10"/>
+          </p:nvPr>
+        </p:nvSpPr>
+        <p:spPr/>
+        <p:txBody>
+          <a:bodyPr/>
+          <a:lstStyle/>
+          <a:p>
+            <a:fld id="{F7021451-1387-4CA6-816F-3879F97B5CBC}" type="slidenum">
+              <a:rPr lang="en-US"/>
+              <a:t>27</a:t>
             </a:fld>
             <a:endParaRPr lang="en-US"/>
           </a:p>
@@ -3360,7 +3449,7 @@
                 <a:ea typeface="Courier New" pitchFamily="34" charset="-122"/>
                 <a:cs typeface="Courier New" pitchFamily="34" charset="-120"/>
               </a:rPr>
-              <a:t>10 / 25   Smart-RUDP</a:t>
+              <a:t>10 / 26   Smart-RUDP</a:t>
             </a:r>
             <a:endParaRPr lang="en-US" sz="1000" dirty="0"/>
           </a:p>
@@ -3557,7 +3646,7 @@
                 <a:ea typeface="Courier New" pitchFamily="34" charset="-122"/>
                 <a:cs typeface="Courier New" pitchFamily="34" charset="-120"/>
               </a:rPr>
-              <a:t>11 / 25   Smart-RUDP</a:t>
+              <a:t>11 / 26   Smart-RUDP</a:t>
             </a:r>
             <a:endParaRPr lang="en-US" sz="1000" dirty="0"/>
           </a:p>
@@ -4387,7 +4476,7 @@
                 <a:ea typeface="Courier New" pitchFamily="34" charset="-122"/>
                 <a:cs typeface="Courier New" pitchFamily="34" charset="-120"/>
               </a:rPr>
-              <a:t>12 / 25   Smart-RUDP</a:t>
+              <a:t>12 / 26   Smart-RUDP</a:t>
             </a:r>
             <a:endParaRPr lang="en-US" sz="1000" dirty="0"/>
           </a:p>
@@ -4684,7 +4773,7 @@
                 <a:ea typeface="Courier New" pitchFamily="34" charset="-122"/>
                 <a:cs typeface="Courier New" pitchFamily="34" charset="-120"/>
               </a:rPr>
-              <a:t>13 / 25   Smart-RUDP</a:t>
+              <a:t>13 / 26   Smart-RUDP</a:t>
             </a:r>
             <a:endParaRPr lang="en-US" sz="1000" dirty="0"/>
           </a:p>
@@ -4984,7 +5073,7 @@
                 <a:ea typeface="Courier New" pitchFamily="34" charset="-122"/>
                 <a:cs typeface="Courier New" pitchFamily="34" charset="-120"/>
               </a:rPr>
-              <a:t>14 / 25   Smart-RUDP</a:t>
+              <a:t>14 / 26   Smart-RUDP</a:t>
             </a:r>
             <a:endParaRPr lang="en-US" sz="1000" dirty="0"/>
           </a:p>
@@ -5368,7 +5457,7 @@
                 <a:ea typeface="Courier New" pitchFamily="34" charset="-122"/>
                 <a:cs typeface="Courier New" pitchFamily="34" charset="-120"/>
               </a:rPr>
-              <a:t>15 / 25   Smart-RUDP</a:t>
+              <a:t>15 / 26   Smart-RUDP</a:t>
             </a:r>
             <a:endParaRPr lang="en-US" sz="1000" dirty="0"/>
           </a:p>
@@ -5826,7 +5915,7 @@
                 <a:ea typeface="Courier New" pitchFamily="34" charset="-122"/>
                 <a:cs typeface="Courier New" pitchFamily="34" charset="-120"/>
               </a:rPr>
-              <a:t>16 / 25   Smart-RUDP</a:t>
+              <a:t>16 / 26   Smart-RUDP</a:t>
             </a:r>
             <a:endParaRPr lang="en-US" sz="1000" dirty="0"/>
           </a:p>
@@ -6511,7 +6600,7 @@
                 <a:ea typeface="Courier New" pitchFamily="34" charset="-122"/>
                 <a:cs typeface="Courier New" pitchFamily="34" charset="-120"/>
               </a:rPr>
-              <a:t>17 / 25   Smart-RUDP</a:t>
+              <a:t>17 / 26   Smart-RUDP</a:t>
             </a:r>
             <a:endParaRPr lang="en-US" sz="1000" dirty="0"/>
           </a:p>
@@ -6751,7 +6840,7 @@
                 <a:ea typeface="Courier New" pitchFamily="34" charset="-122"/>
                 <a:cs typeface="Courier New" pitchFamily="34" charset="-120"/>
               </a:rPr>
-              <a:t>18 / 25   Smart-RUDP</a:t>
+              <a:t>18 / 26   Smart-RUDP</a:t>
             </a:r>
             <a:endParaRPr lang="en-US" sz="1000" dirty="0"/>
           </a:p>
@@ -6991,7 +7080,7 @@
                 <a:ea typeface="Courier New" pitchFamily="34" charset="-122"/>
                 <a:cs typeface="Courier New" pitchFamily="34" charset="-120"/>
               </a:rPr>
-              <a:t>19 / 25   Smart-RUDP</a:t>
+              <a:t>19 / 26   Smart-RUDP</a:t>
             </a:r>
             <a:endParaRPr lang="en-US" sz="1000" dirty="0"/>
           </a:p>
@@ -7213,7 +7302,7 @@
                 <a:ea typeface="Courier New" pitchFamily="34" charset="-122"/>
                 <a:cs typeface="Courier New" pitchFamily="34" charset="-120"/>
               </a:rPr>
-              <a:t>2 / 25   Smart-RUDP</a:t>
+              <a:t>2 / 26   Smart-RUDP</a:t>
             </a:r>
             <a:endParaRPr lang="en-US" sz="1000" dirty="0"/>
           </a:p>
@@ -7607,7 +7696,7 @@
                 <a:ea typeface="Courier New" pitchFamily="34" charset="-122"/>
                 <a:cs typeface="Courier New" pitchFamily="34" charset="-120"/>
               </a:rPr>
-              <a:t>20 / 25   Smart-RUDP</a:t>
+              <a:t>20 / 26   Smart-RUDP</a:t>
             </a:r>
             <a:endParaRPr lang="en-US" sz="1000" dirty="0"/>
           </a:p>
@@ -7931,7 +8020,7 @@
                 <a:ea typeface="Courier New" pitchFamily="34" charset="-122"/>
                 <a:cs typeface="Courier New" pitchFamily="34" charset="-120"/>
               </a:rPr>
-              <a:t>21 / 25   Smart-RUDP</a:t>
+              <a:t>21 / 26   Smart-RUDP</a:t>
             </a:r>
             <a:endParaRPr lang="en-US" sz="1000" dirty="0"/>
           </a:p>
@@ -9638,7 +9727,7 @@
                 <a:ea typeface="Courier New" pitchFamily="34" charset="-122"/>
                 <a:cs typeface="Courier New" pitchFamily="34" charset="-120"/>
               </a:rPr>
-              <a:t>22 / 25   Smart-RUDP</a:t>
+              <a:t>22 / 26   Smart-RUDP</a:t>
             </a:r>
             <a:endParaRPr lang="en-US" sz="1000" dirty="0"/>
           </a:p>
@@ -11021,7 +11110,7 @@
                 <a:ea typeface="Courier New" pitchFamily="34" charset="-122"/>
                 <a:cs typeface="Courier New" pitchFamily="34" charset="-120"/>
               </a:rPr>
-              <a:t>23 / 25   Smart-RUDP</a:t>
+              <a:t>23 / 26   Smart-RUDP</a:t>
             </a:r>
             <a:endParaRPr lang="en-US" sz="1000" dirty="0"/>
           </a:p>
@@ -12525,7 +12614,7 @@
                 <a:ea typeface="Courier New" pitchFamily="34" charset="-122"/>
                 <a:cs typeface="Courier New" pitchFamily="34" charset="-120"/>
               </a:rPr>
-              <a:t>Learnings and future work</a:t>
+              <a:t>Safety net: hand over to AIMD</a:t>
             </a:r>
             <a:endParaRPr lang="en-US" sz="3000" dirty="0"/>
           </a:p>
@@ -12564,47 +12653,1424 @@
                 <a:ea typeface="Courier New" pitchFamily="34" charset="-122"/>
                 <a:cs typeface="Courier New" pitchFamily="34" charset="-120"/>
               </a:rPr>
-              <a:t>24 / 25   Smart-RUDP</a:t>
+              <a:t>24 / 26   Smart-RUDP</a:t>
             </a:r>
             <a:endParaRPr lang="en-US" sz="1000" dirty="0"/>
           </a:p>
         </p:txBody>
       </p:sp>
-      <p:sp>
-        <p:nvSpPr>
-          <p:cNvPr id="4" name="Shape 2"/>
+      <p:graphicFrame>
+        <p:nvGraphicFramePr>
+          <p:cNvPr id="25" name="Table 0"/>
+          <p:cNvGraphicFramePr>
+            <a:graphicFrameLocks noGrp="1"/>
+          </p:cNvGraphicFramePr>
+          <p:nvPr>
+            <p:extLst>
+              <p:ext uri="{D42A27DB-BD31-4B8C-83A1-F6EECF244321}">
+                <p14:modId xmlns:p14="http://schemas.microsoft.com/office/powerpoint/2010/main" val="1579011935"/>
+              </p:ext>
+            </p:extLst>
+          </p:nvPr>
+        </p:nvGraphicFramePr>
+        <p:xfrm>
+          <a:off x="548640" y="1188720"/>
+          <a:ext cx="6035040" cy="914400"/>
+        </p:xfrm>
+        <a:graphic>
+          <a:graphicData uri="http://schemas.openxmlformats.org/drawingml/2006/table">
+            <a:tbl>
+              <a:tblPr/>
+              <a:tblGrid>
+                <a:gridCol w="2468880"/>
+                <a:gridCol w="1097280"/>
+                <a:gridCol w="1188720"/>
+                <a:gridCol w="1280160"/>
+              </a:tblGrid>
+              <a:tr h="420624">
+                <a:tc>
+                  <a:txBody>
+                    <a:bodyPr/>
+                    <a:lstStyle/>
+                    <a:p>
+                      <a:pPr indent="0" marL="0">
+                        <a:buNone/>
+                      </a:pPr>
+                      <a:r>
+                        <a:rPr lang="en-US" sz="1300" b="1" dirty="0">
+                          <a:solidFill>
+                            <a:srgbClr val="0B0F14"/>
+                          </a:solidFill>
+                          <a:latin typeface="Courier New" pitchFamily="34" charset="0"/>
+                          <a:ea typeface="Courier New" pitchFamily="34" charset="-122"/>
+                          <a:cs typeface="Courier New" pitchFamily="34" charset="-120"/>
+                        </a:rPr>
+                        <a:t>C transport, seconds</a:t>
+                      </a:r>
+                      <a:endParaRPr lang="en-US" sz="1300" dirty="0">
+                        <a:latin typeface="Courier New" charset="0"/>
+                        <a:ea typeface="Courier New" charset="0"/>
+                        <a:cs typeface="Courier New" charset="0"/>
+                      </a:endParaRPr>
+                    </a:p>
+                  </a:txBody>
+                  <a:tcPr marL="91440" marR="91440" marT="45720" marB="45720">
+                    <a:lnL w="12700" cap="flat" cmpd="sng" algn="ctr">
+                      <a:solidFill>
+                        <a:srgbClr val="2A3441"/>
+                      </a:solidFill>
+                      <a:prstDash val="solid"/>
+                      <a:round/>
+                      <a:headEnd type="none" w="med" len="med"/>
+                      <a:tailEnd type="none" w="med" len="med"/>
+                    </a:lnL>
+                    <a:lnR w="12700" cap="flat" cmpd="sng" algn="ctr">
+                      <a:solidFill>
+                        <a:srgbClr val="2A3441"/>
+                      </a:solidFill>
+                      <a:prstDash val="solid"/>
+                      <a:round/>
+                      <a:headEnd type="none" w="med" len="med"/>
+                      <a:tailEnd type="none" w="med" len="med"/>
+                    </a:lnR>
+                    <a:lnT w="12700" cap="flat" cmpd="sng" algn="ctr">
+                      <a:solidFill>
+                        <a:srgbClr val="2A3441"/>
+                      </a:solidFill>
+                      <a:prstDash val="solid"/>
+                      <a:round/>
+                      <a:headEnd type="none" w="med" len="med"/>
+                      <a:tailEnd type="none" w="med" len="med"/>
+                    </a:lnT>
+                    <a:lnB w="12700" cap="flat" cmpd="sng" algn="ctr">
+                      <a:solidFill>
+                        <a:srgbClr val="2A3441"/>
+                      </a:solidFill>
+                      <a:prstDash val="solid"/>
+                      <a:round/>
+                      <a:headEnd type="none" w="med" len="med"/>
+                      <a:tailEnd type="none" w="med" len="med"/>
+                    </a:lnB>
+                    <a:solidFill>
+                      <a:srgbClr val="39FF88"/>
+                    </a:solidFill>
+                  </a:tcPr>
+                </a:tc>
+                <a:tc>
+                  <a:txBody>
+                    <a:bodyPr/>
+                    <a:lstStyle/>
+                    <a:p>
+                      <a:pPr indent="0" marL="0">
+                        <a:buNone/>
+                      </a:pPr>
+                      <a:r>
+                        <a:rPr lang="en-US" sz="1300" b="1" dirty="0">
+                          <a:solidFill>
+                            <a:srgbClr val="0B0F14"/>
+                          </a:solidFill>
+                          <a:latin typeface="Courier New" pitchFamily="34" charset="0"/>
+                          <a:ea typeface="Courier New" pitchFamily="34" charset="-122"/>
+                          <a:cs typeface="Courier New" pitchFamily="34" charset="-120"/>
+                        </a:rPr>
+                        <a:t>AIMD 32</a:t>
+                      </a:r>
+                      <a:endParaRPr lang="en-US" sz="1300" dirty="0">
+                        <a:latin typeface="Courier New" charset="0"/>
+                        <a:ea typeface="Courier New" charset="0"/>
+                        <a:cs typeface="Courier New" charset="0"/>
+                      </a:endParaRPr>
+                    </a:p>
+                  </a:txBody>
+                  <a:tcPr marL="91440" marR="91440" marT="45720" marB="45720">
+                    <a:lnL w="12700" cap="flat" cmpd="sng" algn="ctr">
+                      <a:solidFill>
+                        <a:srgbClr val="2A3441"/>
+                      </a:solidFill>
+                      <a:prstDash val="solid"/>
+                      <a:round/>
+                      <a:headEnd type="none" w="med" len="med"/>
+                      <a:tailEnd type="none" w="med" len="med"/>
+                    </a:lnL>
+                    <a:lnR w="12700" cap="flat" cmpd="sng" algn="ctr">
+                      <a:solidFill>
+                        <a:srgbClr val="2A3441"/>
+                      </a:solidFill>
+                      <a:prstDash val="solid"/>
+                      <a:round/>
+                      <a:headEnd type="none" w="med" len="med"/>
+                      <a:tailEnd type="none" w="med" len="med"/>
+                    </a:lnR>
+                    <a:lnT w="12700" cap="flat" cmpd="sng" algn="ctr">
+                      <a:solidFill>
+                        <a:srgbClr val="2A3441"/>
+                      </a:solidFill>
+                      <a:prstDash val="solid"/>
+                      <a:round/>
+                      <a:headEnd type="none" w="med" len="med"/>
+                      <a:tailEnd type="none" w="med" len="med"/>
+                    </a:lnT>
+                    <a:lnB w="12700" cap="flat" cmpd="sng" algn="ctr">
+                      <a:solidFill>
+                        <a:srgbClr val="2A3441"/>
+                      </a:solidFill>
+                      <a:prstDash val="solid"/>
+                      <a:round/>
+                      <a:headEnd type="none" w="med" len="med"/>
+                      <a:tailEnd type="none" w="med" len="med"/>
+                    </a:lnB>
+                    <a:solidFill>
+                      <a:srgbClr val="39FF88"/>
+                    </a:solidFill>
+                  </a:tcPr>
+                </a:tc>
+                <a:tc>
+                  <a:txBody>
+                    <a:bodyPr/>
+                    <a:lstStyle/>
+                    <a:p>
+                      <a:pPr indent="0" marL="0">
+                        <a:buNone/>
+                      </a:pPr>
+                      <a:r>
+                        <a:rPr lang="en-US" sz="1300" b="1" dirty="0">
+                          <a:solidFill>
+                            <a:srgbClr val="0B0F14"/>
+                          </a:solidFill>
+                          <a:latin typeface="Courier New" pitchFamily="34" charset="0"/>
+                          <a:ea typeface="Courier New" pitchFamily="34" charset="-122"/>
+                          <a:cs typeface="Courier New" pitchFamily="34" charset="-120"/>
+                        </a:rPr>
+                        <a:t>Neural</a:t>
+                      </a:r>
+                      <a:endParaRPr lang="en-US" sz="1300" dirty="0">
+                        <a:latin typeface="Courier New" charset="0"/>
+                        <a:ea typeface="Courier New" charset="0"/>
+                        <a:cs typeface="Courier New" charset="0"/>
+                      </a:endParaRPr>
+                    </a:p>
+                  </a:txBody>
+                  <a:tcPr marL="91440" marR="91440" marT="45720" marB="45720">
+                    <a:lnL w="12700" cap="flat" cmpd="sng" algn="ctr">
+                      <a:solidFill>
+                        <a:srgbClr val="2A3441"/>
+                      </a:solidFill>
+                      <a:prstDash val="solid"/>
+                      <a:round/>
+                      <a:headEnd type="none" w="med" len="med"/>
+                      <a:tailEnd type="none" w="med" len="med"/>
+                    </a:lnL>
+                    <a:lnR w="12700" cap="flat" cmpd="sng" algn="ctr">
+                      <a:solidFill>
+                        <a:srgbClr val="2A3441"/>
+                      </a:solidFill>
+                      <a:prstDash val="solid"/>
+                      <a:round/>
+                      <a:headEnd type="none" w="med" len="med"/>
+                      <a:tailEnd type="none" w="med" len="med"/>
+                    </a:lnR>
+                    <a:lnT w="12700" cap="flat" cmpd="sng" algn="ctr">
+                      <a:solidFill>
+                        <a:srgbClr val="2A3441"/>
+                      </a:solidFill>
+                      <a:prstDash val="solid"/>
+                      <a:round/>
+                      <a:headEnd type="none" w="med" len="med"/>
+                      <a:tailEnd type="none" w="med" len="med"/>
+                    </a:lnT>
+                    <a:lnB w="12700" cap="flat" cmpd="sng" algn="ctr">
+                      <a:solidFill>
+                        <a:srgbClr val="2A3441"/>
+                      </a:solidFill>
+                      <a:prstDash val="solid"/>
+                      <a:round/>
+                      <a:headEnd type="none" w="med" len="med"/>
+                      <a:tailEnd type="none" w="med" len="med"/>
+                    </a:lnB>
+                    <a:solidFill>
+                      <a:srgbClr val="39FF88"/>
+                    </a:solidFill>
+                  </a:tcPr>
+                </a:tc>
+                <a:tc>
+                  <a:txBody>
+                    <a:bodyPr/>
+                    <a:lstStyle/>
+                    <a:p>
+                      <a:pPr indent="0" marL="0">
+                        <a:buNone/>
+                      </a:pPr>
+                      <a:r>
+                        <a:rPr lang="en-US" sz="1300" b="1" dirty="0">
+                          <a:solidFill>
+                            <a:srgbClr val="0B0F14"/>
+                          </a:solidFill>
+                          <a:latin typeface="Courier New" pitchFamily="34" charset="0"/>
+                          <a:ea typeface="Courier New" pitchFamily="34" charset="-122"/>
+                          <a:cs typeface="Courier New" pitchFamily="34" charset="-120"/>
+                        </a:rPr>
+                        <a:t>Hybrid</a:t>
+                      </a:r>
+                      <a:endParaRPr lang="en-US" sz="1300" dirty="0">
+                        <a:latin typeface="Courier New" charset="0"/>
+                        <a:ea typeface="Courier New" charset="0"/>
+                        <a:cs typeface="Courier New" charset="0"/>
+                      </a:endParaRPr>
+                    </a:p>
+                  </a:txBody>
+                  <a:tcPr marL="91440" marR="91440" marT="45720" marB="45720">
+                    <a:lnL w="12700" cap="flat" cmpd="sng" algn="ctr">
+                      <a:solidFill>
+                        <a:srgbClr val="2A3441"/>
+                      </a:solidFill>
+                      <a:prstDash val="solid"/>
+                      <a:round/>
+                      <a:headEnd type="none" w="med" len="med"/>
+                      <a:tailEnd type="none" w="med" len="med"/>
+                    </a:lnL>
+                    <a:lnR w="12700" cap="flat" cmpd="sng" algn="ctr">
+                      <a:solidFill>
+                        <a:srgbClr val="2A3441"/>
+                      </a:solidFill>
+                      <a:prstDash val="solid"/>
+                      <a:round/>
+                      <a:headEnd type="none" w="med" len="med"/>
+                      <a:tailEnd type="none" w="med" len="med"/>
+                    </a:lnR>
+                    <a:lnT w="12700" cap="flat" cmpd="sng" algn="ctr">
+                      <a:solidFill>
+                        <a:srgbClr val="2A3441"/>
+                      </a:solidFill>
+                      <a:prstDash val="solid"/>
+                      <a:round/>
+                      <a:headEnd type="none" w="med" len="med"/>
+                      <a:tailEnd type="none" w="med" len="med"/>
+                    </a:lnT>
+                    <a:lnB w="12700" cap="flat" cmpd="sng" algn="ctr">
+                      <a:solidFill>
+                        <a:srgbClr val="2A3441"/>
+                      </a:solidFill>
+                      <a:prstDash val="solid"/>
+                      <a:round/>
+                      <a:headEnd type="none" w="med" len="med"/>
+                      <a:tailEnd type="none" w="med" len="med"/>
+                    </a:lnB>
+                    <a:solidFill>
+                      <a:srgbClr val="39FF88"/>
+                    </a:solidFill>
+                  </a:tcPr>
+                </a:tc>
+              </a:tr>
+              <a:tr h="420624">
+                <a:tc>
+                  <a:txBody>
+                    <a:bodyPr/>
+                    <a:lstStyle/>
+                    <a:p>
+                      <a:pPr indent="0" marL="0">
+                        <a:buNone/>
+                      </a:pPr>
+                      <a:r>
+                        <a:rPr lang="en-US" sz="1300" dirty="0">
+                          <a:solidFill>
+                            <a:srgbClr val="E6EDF3"/>
+                          </a:solidFill>
+                          <a:latin typeface="Calibri" pitchFamily="34" charset="0"/>
+                          <a:ea typeface="Calibri" pitchFamily="34" charset="-122"/>
+                          <a:cs typeface="Calibri" pitchFamily="34" charset="-120"/>
+                        </a:rPr>
+                        <a:t>5G-like</a:t>
+                      </a:r>
+                      <a:endParaRPr lang="en-US" sz="1300" dirty="0">
+                        <a:latin typeface="Calibri" charset="0"/>
+                        <a:ea typeface="Calibri" charset="0"/>
+                        <a:cs typeface="Calibri" charset="0"/>
+                      </a:endParaRPr>
+                    </a:p>
+                  </a:txBody>
+                  <a:tcPr marL="91440" marR="91440" marT="45720" marB="45720">
+                    <a:lnL w="12700" cap="flat" cmpd="sng" algn="ctr">
+                      <a:solidFill>
+                        <a:srgbClr val="2A3441"/>
+                      </a:solidFill>
+                      <a:prstDash val="solid"/>
+                      <a:round/>
+                      <a:headEnd type="none" w="med" len="med"/>
+                      <a:tailEnd type="none" w="med" len="med"/>
+                    </a:lnL>
+                    <a:lnR w="12700" cap="flat" cmpd="sng" algn="ctr">
+                      <a:solidFill>
+                        <a:srgbClr val="2A3441"/>
+                      </a:solidFill>
+                      <a:prstDash val="solid"/>
+                      <a:round/>
+                      <a:headEnd type="none" w="med" len="med"/>
+                      <a:tailEnd type="none" w="med" len="med"/>
+                    </a:lnR>
+                    <a:lnT w="12700" cap="flat" cmpd="sng" algn="ctr">
+                      <a:solidFill>
+                        <a:srgbClr val="2A3441"/>
+                      </a:solidFill>
+                      <a:prstDash val="solid"/>
+                      <a:round/>
+                      <a:headEnd type="none" w="med" len="med"/>
+                      <a:tailEnd type="none" w="med" len="med"/>
+                    </a:lnT>
+                    <a:lnB w="12700" cap="flat" cmpd="sng" algn="ctr">
+                      <a:solidFill>
+                        <a:srgbClr val="2A3441"/>
+                      </a:solidFill>
+                      <a:prstDash val="solid"/>
+                      <a:round/>
+                      <a:headEnd type="none" w="med" len="med"/>
+                      <a:tailEnd type="none" w="med" len="med"/>
+                    </a:lnB>
+                    <a:solidFill>
+                      <a:srgbClr val="141B24"/>
+                    </a:solidFill>
+                  </a:tcPr>
+                </a:tc>
+                <a:tc>
+                  <a:txBody>
+                    <a:bodyPr/>
+                    <a:lstStyle/>
+                    <a:p>
+                      <a:pPr indent="0" marL="0">
+                        <a:buNone/>
+                      </a:pPr>
+                      <a:r>
+                        <a:rPr lang="en-US" sz="1300" dirty="0">
+                          <a:solidFill>
+                            <a:srgbClr val="E6EDF3"/>
+                          </a:solidFill>
+                          <a:latin typeface="Calibri" pitchFamily="34" charset="0"/>
+                          <a:ea typeface="Calibri" pitchFamily="34" charset="-122"/>
+                          <a:cs typeface="Calibri" pitchFamily="34" charset="-120"/>
+                        </a:rPr>
+                        <a:t>1.48</a:t>
+                      </a:r>
+                      <a:endParaRPr lang="en-US" sz="1300" dirty="0">
+                        <a:latin typeface="Calibri" charset="0"/>
+                        <a:ea typeface="Calibri" charset="0"/>
+                        <a:cs typeface="Calibri" charset="0"/>
+                      </a:endParaRPr>
+                    </a:p>
+                  </a:txBody>
+                  <a:tcPr marL="91440" marR="91440" marT="45720" marB="45720">
+                    <a:lnL w="12700" cap="flat" cmpd="sng" algn="ctr">
+                      <a:solidFill>
+                        <a:srgbClr val="2A3441"/>
+                      </a:solidFill>
+                      <a:prstDash val="solid"/>
+                      <a:round/>
+                      <a:headEnd type="none" w="med" len="med"/>
+                      <a:tailEnd type="none" w="med" len="med"/>
+                    </a:lnL>
+                    <a:lnR w="12700" cap="flat" cmpd="sng" algn="ctr">
+                      <a:solidFill>
+                        <a:srgbClr val="2A3441"/>
+                      </a:solidFill>
+                      <a:prstDash val="solid"/>
+                      <a:round/>
+                      <a:headEnd type="none" w="med" len="med"/>
+                      <a:tailEnd type="none" w="med" len="med"/>
+                    </a:lnR>
+                    <a:lnT w="12700" cap="flat" cmpd="sng" algn="ctr">
+                      <a:solidFill>
+                        <a:srgbClr val="2A3441"/>
+                      </a:solidFill>
+                      <a:prstDash val="solid"/>
+                      <a:round/>
+                      <a:headEnd type="none" w="med" len="med"/>
+                      <a:tailEnd type="none" w="med" len="med"/>
+                    </a:lnT>
+                    <a:lnB w="12700" cap="flat" cmpd="sng" algn="ctr">
+                      <a:solidFill>
+                        <a:srgbClr val="2A3441"/>
+                      </a:solidFill>
+                      <a:prstDash val="solid"/>
+                      <a:round/>
+                      <a:headEnd type="none" w="med" len="med"/>
+                      <a:tailEnd type="none" w="med" len="med"/>
+                    </a:lnB>
+                    <a:solidFill>
+                      <a:srgbClr val="141B24"/>
+                    </a:solidFill>
+                  </a:tcPr>
+                </a:tc>
+                <a:tc>
+                  <a:txBody>
+                    <a:bodyPr/>
+                    <a:lstStyle/>
+                    <a:p>
+                      <a:pPr indent="0" marL="0">
+                        <a:buNone/>
+                      </a:pPr>
+                      <a:r>
+                        <a:rPr lang="en-US" sz="1300" dirty="0">
+                          <a:solidFill>
+                            <a:srgbClr val="E6EDF3"/>
+                          </a:solidFill>
+                          <a:latin typeface="Calibri" pitchFamily="34" charset="0"/>
+                          <a:ea typeface="Calibri" pitchFamily="34" charset="-122"/>
+                          <a:cs typeface="Calibri" pitchFamily="34" charset="-120"/>
+                        </a:rPr>
+                        <a:t>1.17</a:t>
+                      </a:r>
+                      <a:endParaRPr lang="en-US" sz="1300" dirty="0">
+                        <a:latin typeface="Calibri" charset="0"/>
+                        <a:ea typeface="Calibri" charset="0"/>
+                        <a:cs typeface="Calibri" charset="0"/>
+                      </a:endParaRPr>
+                    </a:p>
+                  </a:txBody>
+                  <a:tcPr marL="91440" marR="91440" marT="45720" marB="45720">
+                    <a:lnL w="12700" cap="flat" cmpd="sng" algn="ctr">
+                      <a:solidFill>
+                        <a:srgbClr val="2A3441"/>
+                      </a:solidFill>
+                      <a:prstDash val="solid"/>
+                      <a:round/>
+                      <a:headEnd type="none" w="med" len="med"/>
+                      <a:tailEnd type="none" w="med" len="med"/>
+                    </a:lnL>
+                    <a:lnR w="12700" cap="flat" cmpd="sng" algn="ctr">
+                      <a:solidFill>
+                        <a:srgbClr val="2A3441"/>
+                      </a:solidFill>
+                      <a:prstDash val="solid"/>
+                      <a:round/>
+                      <a:headEnd type="none" w="med" len="med"/>
+                      <a:tailEnd type="none" w="med" len="med"/>
+                    </a:lnR>
+                    <a:lnT w="12700" cap="flat" cmpd="sng" algn="ctr">
+                      <a:solidFill>
+                        <a:srgbClr val="2A3441"/>
+                      </a:solidFill>
+                      <a:prstDash val="solid"/>
+                      <a:round/>
+                      <a:headEnd type="none" w="med" len="med"/>
+                      <a:tailEnd type="none" w="med" len="med"/>
+                    </a:lnT>
+                    <a:lnB w="12700" cap="flat" cmpd="sng" algn="ctr">
+                      <a:solidFill>
+                        <a:srgbClr val="2A3441"/>
+                      </a:solidFill>
+                      <a:prstDash val="solid"/>
+                      <a:round/>
+                      <a:headEnd type="none" w="med" len="med"/>
+                      <a:tailEnd type="none" w="med" len="med"/>
+                    </a:lnB>
+                    <a:solidFill>
+                      <a:srgbClr val="141B24"/>
+                    </a:solidFill>
+                  </a:tcPr>
+                </a:tc>
+                <a:tc>
+                  <a:txBody>
+                    <a:bodyPr/>
+                    <a:lstStyle/>
+                    <a:p>
+                      <a:pPr indent="0" marL="0">
+                        <a:buNone/>
+                      </a:pPr>
+                      <a:r>
+                        <a:rPr lang="en-US" sz="1300" dirty="0">
+                          <a:solidFill>
+                            <a:srgbClr val="E6EDF3"/>
+                          </a:solidFill>
+                          <a:latin typeface="Calibri" pitchFamily="34" charset="0"/>
+                          <a:ea typeface="Calibri" pitchFamily="34" charset="-122"/>
+                          <a:cs typeface="Calibri" pitchFamily="34" charset="-120"/>
+                        </a:rPr>
+                        <a:t>1.23</a:t>
+                      </a:r>
+                      <a:endParaRPr lang="en-US" sz="1300" dirty="0">
+                        <a:latin typeface="Calibri" charset="0"/>
+                        <a:ea typeface="Calibri" charset="0"/>
+                        <a:cs typeface="Calibri" charset="0"/>
+                      </a:endParaRPr>
+                    </a:p>
+                  </a:txBody>
+                  <a:tcPr marL="91440" marR="91440" marT="45720" marB="45720">
+                    <a:lnL w="12700" cap="flat" cmpd="sng" algn="ctr">
+                      <a:solidFill>
+                        <a:srgbClr val="2A3441"/>
+                      </a:solidFill>
+                      <a:prstDash val="solid"/>
+                      <a:round/>
+                      <a:headEnd type="none" w="med" len="med"/>
+                      <a:tailEnd type="none" w="med" len="med"/>
+                    </a:lnL>
+                    <a:lnR w="12700" cap="flat" cmpd="sng" algn="ctr">
+                      <a:solidFill>
+                        <a:srgbClr val="2A3441"/>
+                      </a:solidFill>
+                      <a:prstDash val="solid"/>
+                      <a:round/>
+                      <a:headEnd type="none" w="med" len="med"/>
+                      <a:tailEnd type="none" w="med" len="med"/>
+                    </a:lnR>
+                    <a:lnT w="12700" cap="flat" cmpd="sng" algn="ctr">
+                      <a:solidFill>
+                        <a:srgbClr val="2A3441"/>
+                      </a:solidFill>
+                      <a:prstDash val="solid"/>
+                      <a:round/>
+                      <a:headEnd type="none" w="med" len="med"/>
+                      <a:tailEnd type="none" w="med" len="med"/>
+                    </a:lnT>
+                    <a:lnB w="12700" cap="flat" cmpd="sng" algn="ctr">
+                      <a:solidFill>
+                        <a:srgbClr val="2A3441"/>
+                      </a:solidFill>
+                      <a:prstDash val="solid"/>
+                      <a:round/>
+                      <a:headEnd type="none" w="med" len="med"/>
+                      <a:tailEnd type="none" w="med" len="med"/>
+                    </a:lnB>
+                    <a:solidFill>
+                      <a:srgbClr val="141B24"/>
+                    </a:solidFill>
+                  </a:tcPr>
+                </a:tc>
+              </a:tr>
+              <a:tr h="420624">
+                <a:tc>
+                  <a:txBody>
+                    <a:bodyPr/>
+                    <a:lstStyle/>
+                    <a:p>
+                      <a:pPr indent="0" marL="0">
+                        <a:buNone/>
+                      </a:pPr>
+                      <a:r>
+                        <a:rPr lang="en-US" sz="1300" dirty="0">
+                          <a:solidFill>
+                            <a:srgbClr val="E6EDF3"/>
+                          </a:solidFill>
+                          <a:latin typeface="Calibri" pitchFamily="34" charset="0"/>
+                          <a:ea typeface="Calibri" pitchFamily="34" charset="-122"/>
+                          <a:cs typeface="Calibri" pitchFamily="34" charset="-120"/>
+                        </a:rPr>
+                        <a:t>Lossy 2%</a:t>
+                      </a:r>
+                      <a:endParaRPr lang="en-US" sz="1300" dirty="0">
+                        <a:latin typeface="Calibri" charset="0"/>
+                        <a:ea typeface="Calibri" charset="0"/>
+                        <a:cs typeface="Calibri" charset="0"/>
+                      </a:endParaRPr>
+                    </a:p>
+                  </a:txBody>
+                  <a:tcPr marL="91440" marR="91440" marT="45720" marB="45720">
+                    <a:lnL w="12700" cap="flat" cmpd="sng" algn="ctr">
+                      <a:solidFill>
+                        <a:srgbClr val="2A3441"/>
+                      </a:solidFill>
+                      <a:prstDash val="solid"/>
+                      <a:round/>
+                      <a:headEnd type="none" w="med" len="med"/>
+                      <a:tailEnd type="none" w="med" len="med"/>
+                    </a:lnL>
+                    <a:lnR w="12700" cap="flat" cmpd="sng" algn="ctr">
+                      <a:solidFill>
+                        <a:srgbClr val="2A3441"/>
+                      </a:solidFill>
+                      <a:prstDash val="solid"/>
+                      <a:round/>
+                      <a:headEnd type="none" w="med" len="med"/>
+                      <a:tailEnd type="none" w="med" len="med"/>
+                    </a:lnR>
+                    <a:lnT w="12700" cap="flat" cmpd="sng" algn="ctr">
+                      <a:solidFill>
+                        <a:srgbClr val="2A3441"/>
+                      </a:solidFill>
+                      <a:prstDash val="solid"/>
+                      <a:round/>
+                      <a:headEnd type="none" w="med" len="med"/>
+                      <a:tailEnd type="none" w="med" len="med"/>
+                    </a:lnT>
+                    <a:lnB w="12700" cap="flat" cmpd="sng" algn="ctr">
+                      <a:solidFill>
+                        <a:srgbClr val="2A3441"/>
+                      </a:solidFill>
+                      <a:prstDash val="solid"/>
+                      <a:round/>
+                      <a:headEnd type="none" w="med" len="med"/>
+                      <a:tailEnd type="none" w="med" len="med"/>
+                    </a:lnB>
+                    <a:solidFill>
+                      <a:srgbClr val="141B24"/>
+                    </a:solidFill>
+                  </a:tcPr>
+                </a:tc>
+                <a:tc>
+                  <a:txBody>
+                    <a:bodyPr/>
+                    <a:lstStyle/>
+                    <a:p>
+                      <a:pPr indent="0" marL="0">
+                        <a:buNone/>
+                      </a:pPr>
+                      <a:r>
+                        <a:rPr lang="en-US" sz="1300" dirty="0">
+                          <a:solidFill>
+                            <a:srgbClr val="E6EDF3"/>
+                          </a:solidFill>
+                          <a:latin typeface="Calibri" pitchFamily="34" charset="0"/>
+                          <a:ea typeface="Calibri" pitchFamily="34" charset="-122"/>
+                          <a:cs typeface="Calibri" pitchFamily="34" charset="-120"/>
+                        </a:rPr>
+                        <a:t>9.04</a:t>
+                      </a:r>
+                      <a:endParaRPr lang="en-US" sz="1300" dirty="0">
+                        <a:latin typeface="Calibri" charset="0"/>
+                        <a:ea typeface="Calibri" charset="0"/>
+                        <a:cs typeface="Calibri" charset="0"/>
+                      </a:endParaRPr>
+                    </a:p>
+                  </a:txBody>
+                  <a:tcPr marL="91440" marR="91440" marT="45720" marB="45720">
+                    <a:lnL w="12700" cap="flat" cmpd="sng" algn="ctr">
+                      <a:solidFill>
+                        <a:srgbClr val="2A3441"/>
+                      </a:solidFill>
+                      <a:prstDash val="solid"/>
+                      <a:round/>
+                      <a:headEnd type="none" w="med" len="med"/>
+                      <a:tailEnd type="none" w="med" len="med"/>
+                    </a:lnL>
+                    <a:lnR w="12700" cap="flat" cmpd="sng" algn="ctr">
+                      <a:solidFill>
+                        <a:srgbClr val="2A3441"/>
+                      </a:solidFill>
+                      <a:prstDash val="solid"/>
+                      <a:round/>
+                      <a:headEnd type="none" w="med" len="med"/>
+                      <a:tailEnd type="none" w="med" len="med"/>
+                    </a:lnR>
+                    <a:lnT w="12700" cap="flat" cmpd="sng" algn="ctr">
+                      <a:solidFill>
+                        <a:srgbClr val="2A3441"/>
+                      </a:solidFill>
+                      <a:prstDash val="solid"/>
+                      <a:round/>
+                      <a:headEnd type="none" w="med" len="med"/>
+                      <a:tailEnd type="none" w="med" len="med"/>
+                    </a:lnT>
+                    <a:lnB w="12700" cap="flat" cmpd="sng" algn="ctr">
+                      <a:solidFill>
+                        <a:srgbClr val="2A3441"/>
+                      </a:solidFill>
+                      <a:prstDash val="solid"/>
+                      <a:round/>
+                      <a:headEnd type="none" w="med" len="med"/>
+                      <a:tailEnd type="none" w="med" len="med"/>
+                    </a:lnB>
+                    <a:solidFill>
+                      <a:srgbClr val="141B24"/>
+                    </a:solidFill>
+                  </a:tcPr>
+                </a:tc>
+                <a:tc>
+                  <a:txBody>
+                    <a:bodyPr/>
+                    <a:lstStyle/>
+                    <a:p>
+                      <a:pPr indent="0" marL="0">
+                        <a:buNone/>
+                      </a:pPr>
+                      <a:r>
+                        <a:rPr lang="en-US" sz="1300" dirty="0">
+                          <a:solidFill>
+                            <a:srgbClr val="E6EDF3"/>
+                          </a:solidFill>
+                          <a:latin typeface="Calibri" pitchFamily="34" charset="0"/>
+                          <a:ea typeface="Calibri" pitchFamily="34" charset="-122"/>
+                          <a:cs typeface="Calibri" pitchFamily="34" charset="-120"/>
+                        </a:rPr>
+                        <a:t>7.53</a:t>
+                      </a:r>
+                      <a:endParaRPr lang="en-US" sz="1300" dirty="0">
+                        <a:latin typeface="Calibri" charset="0"/>
+                        <a:ea typeface="Calibri" charset="0"/>
+                        <a:cs typeface="Calibri" charset="0"/>
+                      </a:endParaRPr>
+                    </a:p>
+                  </a:txBody>
+                  <a:tcPr marL="91440" marR="91440" marT="45720" marB="45720">
+                    <a:lnL w="12700" cap="flat" cmpd="sng" algn="ctr">
+                      <a:solidFill>
+                        <a:srgbClr val="2A3441"/>
+                      </a:solidFill>
+                      <a:prstDash val="solid"/>
+                      <a:round/>
+                      <a:headEnd type="none" w="med" len="med"/>
+                      <a:tailEnd type="none" w="med" len="med"/>
+                    </a:lnL>
+                    <a:lnR w="12700" cap="flat" cmpd="sng" algn="ctr">
+                      <a:solidFill>
+                        <a:srgbClr val="2A3441"/>
+                      </a:solidFill>
+                      <a:prstDash val="solid"/>
+                      <a:round/>
+                      <a:headEnd type="none" w="med" len="med"/>
+                      <a:tailEnd type="none" w="med" len="med"/>
+                    </a:lnR>
+                    <a:lnT w="12700" cap="flat" cmpd="sng" algn="ctr">
+                      <a:solidFill>
+                        <a:srgbClr val="2A3441"/>
+                      </a:solidFill>
+                      <a:prstDash val="solid"/>
+                      <a:round/>
+                      <a:headEnd type="none" w="med" len="med"/>
+                      <a:tailEnd type="none" w="med" len="med"/>
+                    </a:lnT>
+                    <a:lnB w="12700" cap="flat" cmpd="sng" algn="ctr">
+                      <a:solidFill>
+                        <a:srgbClr val="2A3441"/>
+                      </a:solidFill>
+                      <a:prstDash val="solid"/>
+                      <a:round/>
+                      <a:headEnd type="none" w="med" len="med"/>
+                      <a:tailEnd type="none" w="med" len="med"/>
+                    </a:lnB>
+                    <a:solidFill>
+                      <a:srgbClr val="141B24"/>
+                    </a:solidFill>
+                  </a:tcPr>
+                </a:tc>
+                <a:tc>
+                  <a:txBody>
+                    <a:bodyPr/>
+                    <a:lstStyle/>
+                    <a:p>
+                      <a:pPr indent="0" marL="0">
+                        <a:buNone/>
+                      </a:pPr>
+                      <a:r>
+                        <a:rPr lang="en-US" sz="1300" dirty="0">
+                          <a:solidFill>
+                            <a:srgbClr val="E6EDF3"/>
+                          </a:solidFill>
+                          <a:latin typeface="Calibri" pitchFamily="34" charset="0"/>
+                          <a:ea typeface="Calibri" pitchFamily="34" charset="-122"/>
+                          <a:cs typeface="Calibri" pitchFamily="34" charset="-120"/>
+                        </a:rPr>
+                        <a:t>7.57</a:t>
+                      </a:r>
+                      <a:endParaRPr lang="en-US" sz="1300" dirty="0">
+                        <a:latin typeface="Calibri" charset="0"/>
+                        <a:ea typeface="Calibri" charset="0"/>
+                        <a:cs typeface="Calibri" charset="0"/>
+                      </a:endParaRPr>
+                    </a:p>
+                  </a:txBody>
+                  <a:tcPr marL="91440" marR="91440" marT="45720" marB="45720">
+                    <a:lnL w="12700" cap="flat" cmpd="sng" algn="ctr">
+                      <a:solidFill>
+                        <a:srgbClr val="2A3441"/>
+                      </a:solidFill>
+                      <a:prstDash val="solid"/>
+                      <a:round/>
+                      <a:headEnd type="none" w="med" len="med"/>
+                      <a:tailEnd type="none" w="med" len="med"/>
+                    </a:lnL>
+                    <a:lnR w="12700" cap="flat" cmpd="sng" algn="ctr">
+                      <a:solidFill>
+                        <a:srgbClr val="2A3441"/>
+                      </a:solidFill>
+                      <a:prstDash val="solid"/>
+                      <a:round/>
+                      <a:headEnd type="none" w="med" len="med"/>
+                      <a:tailEnd type="none" w="med" len="med"/>
+                    </a:lnR>
+                    <a:lnT w="12700" cap="flat" cmpd="sng" algn="ctr">
+                      <a:solidFill>
+                        <a:srgbClr val="2A3441"/>
+                      </a:solidFill>
+                      <a:prstDash val="solid"/>
+                      <a:round/>
+                      <a:headEnd type="none" w="med" len="med"/>
+                      <a:tailEnd type="none" w="med" len="med"/>
+                    </a:lnT>
+                    <a:lnB w="12700" cap="flat" cmpd="sng" algn="ctr">
+                      <a:solidFill>
+                        <a:srgbClr val="2A3441"/>
+                      </a:solidFill>
+                      <a:prstDash val="solid"/>
+                      <a:round/>
+                      <a:headEnd type="none" w="med" len="med"/>
+                      <a:tailEnd type="none" w="med" len="med"/>
+                    </a:lnB>
+                    <a:solidFill>
+                      <a:srgbClr val="141B24"/>
+                    </a:solidFill>
+                  </a:tcPr>
+                </a:tc>
+              </a:tr>
+              <a:tr h="420624">
+                <a:tc>
+                  <a:txBody>
+                    <a:bodyPr/>
+                    <a:lstStyle/>
+                    <a:p>
+                      <a:pPr indent="0" marL="0">
+                        <a:buNone/>
+                      </a:pPr>
+                      <a:r>
+                        <a:rPr lang="en-US" sz="1300" dirty="0">
+                          <a:solidFill>
+                            <a:srgbClr val="E6EDF3"/>
+                          </a:solidFill>
+                          <a:latin typeface="Calibri" pitchFamily="34" charset="0"/>
+                          <a:ea typeface="Calibri" pitchFamily="34" charset="-122"/>
+                          <a:cs typeface="Calibri" pitchFamily="34" charset="-120"/>
+                        </a:rPr>
+                        <a:t>Satellite-like</a:t>
+                      </a:r>
+                      <a:endParaRPr lang="en-US" sz="1300" dirty="0">
+                        <a:latin typeface="Calibri" charset="0"/>
+                        <a:ea typeface="Calibri" charset="0"/>
+                        <a:cs typeface="Calibri" charset="0"/>
+                      </a:endParaRPr>
+                    </a:p>
+                  </a:txBody>
+                  <a:tcPr marL="91440" marR="91440" marT="45720" marB="45720">
+                    <a:lnL w="12700" cap="flat" cmpd="sng" algn="ctr">
+                      <a:solidFill>
+                        <a:srgbClr val="2A3441"/>
+                      </a:solidFill>
+                      <a:prstDash val="solid"/>
+                      <a:round/>
+                      <a:headEnd type="none" w="med" len="med"/>
+                      <a:tailEnd type="none" w="med" len="med"/>
+                    </a:lnL>
+                    <a:lnR w="12700" cap="flat" cmpd="sng" algn="ctr">
+                      <a:solidFill>
+                        <a:srgbClr val="2A3441"/>
+                      </a:solidFill>
+                      <a:prstDash val="solid"/>
+                      <a:round/>
+                      <a:headEnd type="none" w="med" len="med"/>
+                      <a:tailEnd type="none" w="med" len="med"/>
+                    </a:lnR>
+                    <a:lnT w="12700" cap="flat" cmpd="sng" algn="ctr">
+                      <a:solidFill>
+                        <a:srgbClr val="2A3441"/>
+                      </a:solidFill>
+                      <a:prstDash val="solid"/>
+                      <a:round/>
+                      <a:headEnd type="none" w="med" len="med"/>
+                      <a:tailEnd type="none" w="med" len="med"/>
+                    </a:lnT>
+                    <a:lnB w="12700" cap="flat" cmpd="sng" algn="ctr">
+                      <a:solidFill>
+                        <a:srgbClr val="2A3441"/>
+                      </a:solidFill>
+                      <a:prstDash val="solid"/>
+                      <a:round/>
+                      <a:headEnd type="none" w="med" len="med"/>
+                      <a:tailEnd type="none" w="med" len="med"/>
+                    </a:lnB>
+                    <a:solidFill>
+                      <a:srgbClr val="141B24"/>
+                    </a:solidFill>
+                  </a:tcPr>
+                </a:tc>
+                <a:tc>
+                  <a:txBody>
+                    <a:bodyPr/>
+                    <a:lstStyle/>
+                    <a:p>
+                      <a:pPr indent="0" marL="0">
+                        <a:buNone/>
+                      </a:pPr>
+                      <a:r>
+                        <a:rPr lang="en-US" sz="1300" dirty="0">
+                          <a:solidFill>
+                            <a:srgbClr val="E6EDF3"/>
+                          </a:solidFill>
+                          <a:latin typeface="Calibri" pitchFamily="34" charset="0"/>
+                          <a:ea typeface="Calibri" pitchFamily="34" charset="-122"/>
+                          <a:cs typeface="Calibri" pitchFamily="34" charset="-120"/>
+                        </a:rPr>
+                        <a:t>19.7</a:t>
+                      </a:r>
+                      <a:endParaRPr lang="en-US" sz="1300" dirty="0">
+                        <a:latin typeface="Calibri" charset="0"/>
+                        <a:ea typeface="Calibri" charset="0"/>
+                        <a:cs typeface="Calibri" charset="0"/>
+                      </a:endParaRPr>
+                    </a:p>
+                  </a:txBody>
+                  <a:tcPr marL="91440" marR="91440" marT="45720" marB="45720">
+                    <a:lnL w="12700" cap="flat" cmpd="sng" algn="ctr">
+                      <a:solidFill>
+                        <a:srgbClr val="2A3441"/>
+                      </a:solidFill>
+                      <a:prstDash val="solid"/>
+                      <a:round/>
+                      <a:headEnd type="none" w="med" len="med"/>
+                      <a:tailEnd type="none" w="med" len="med"/>
+                    </a:lnL>
+                    <a:lnR w="12700" cap="flat" cmpd="sng" algn="ctr">
+                      <a:solidFill>
+                        <a:srgbClr val="2A3441"/>
+                      </a:solidFill>
+                      <a:prstDash val="solid"/>
+                      <a:round/>
+                      <a:headEnd type="none" w="med" len="med"/>
+                      <a:tailEnd type="none" w="med" len="med"/>
+                    </a:lnR>
+                    <a:lnT w="12700" cap="flat" cmpd="sng" algn="ctr">
+                      <a:solidFill>
+                        <a:srgbClr val="2A3441"/>
+                      </a:solidFill>
+                      <a:prstDash val="solid"/>
+                      <a:round/>
+                      <a:headEnd type="none" w="med" len="med"/>
+                      <a:tailEnd type="none" w="med" len="med"/>
+                    </a:lnT>
+                    <a:lnB w="12700" cap="flat" cmpd="sng" algn="ctr">
+                      <a:solidFill>
+                        <a:srgbClr val="2A3441"/>
+                      </a:solidFill>
+                      <a:prstDash val="solid"/>
+                      <a:round/>
+                      <a:headEnd type="none" w="med" len="med"/>
+                      <a:tailEnd type="none" w="med" len="med"/>
+                    </a:lnB>
+                    <a:solidFill>
+                      <a:srgbClr val="141B24"/>
+                    </a:solidFill>
+                  </a:tcPr>
+                </a:tc>
+                <a:tc>
+                  <a:txBody>
+                    <a:bodyPr/>
+                    <a:lstStyle/>
+                    <a:p>
+                      <a:pPr indent="0" marL="0">
+                        <a:buNone/>
+                      </a:pPr>
+                      <a:r>
+                        <a:rPr lang="en-US" sz="1300" dirty="0">
+                          <a:solidFill>
+                            <a:srgbClr val="E6EDF3"/>
+                          </a:solidFill>
+                          <a:latin typeface="Calibri" pitchFamily="34" charset="0"/>
+                          <a:ea typeface="Calibri" pitchFamily="34" charset="-122"/>
+                          <a:cs typeface="Calibri" pitchFamily="34" charset="-120"/>
+                        </a:rPr>
+                        <a:t>13.4</a:t>
+                      </a:r>
+                      <a:endParaRPr lang="en-US" sz="1300" dirty="0">
+                        <a:latin typeface="Calibri" charset="0"/>
+                        <a:ea typeface="Calibri" charset="0"/>
+                        <a:cs typeface="Calibri" charset="0"/>
+                      </a:endParaRPr>
+                    </a:p>
+                  </a:txBody>
+                  <a:tcPr marL="91440" marR="91440" marT="45720" marB="45720">
+                    <a:lnL w="12700" cap="flat" cmpd="sng" algn="ctr">
+                      <a:solidFill>
+                        <a:srgbClr val="2A3441"/>
+                      </a:solidFill>
+                      <a:prstDash val="solid"/>
+                      <a:round/>
+                      <a:headEnd type="none" w="med" len="med"/>
+                      <a:tailEnd type="none" w="med" len="med"/>
+                    </a:lnL>
+                    <a:lnR w="12700" cap="flat" cmpd="sng" algn="ctr">
+                      <a:solidFill>
+                        <a:srgbClr val="2A3441"/>
+                      </a:solidFill>
+                      <a:prstDash val="solid"/>
+                      <a:round/>
+                      <a:headEnd type="none" w="med" len="med"/>
+                      <a:tailEnd type="none" w="med" len="med"/>
+                    </a:lnR>
+                    <a:lnT w="12700" cap="flat" cmpd="sng" algn="ctr">
+                      <a:solidFill>
+                        <a:srgbClr val="2A3441"/>
+                      </a:solidFill>
+                      <a:prstDash val="solid"/>
+                      <a:round/>
+                      <a:headEnd type="none" w="med" len="med"/>
+                      <a:tailEnd type="none" w="med" len="med"/>
+                    </a:lnT>
+                    <a:lnB w="12700" cap="flat" cmpd="sng" algn="ctr">
+                      <a:solidFill>
+                        <a:srgbClr val="2A3441"/>
+                      </a:solidFill>
+                      <a:prstDash val="solid"/>
+                      <a:round/>
+                      <a:headEnd type="none" w="med" len="med"/>
+                      <a:tailEnd type="none" w="med" len="med"/>
+                    </a:lnB>
+                    <a:solidFill>
+                      <a:srgbClr val="141B24"/>
+                    </a:solidFill>
+                  </a:tcPr>
+                </a:tc>
+                <a:tc>
+                  <a:txBody>
+                    <a:bodyPr/>
+                    <a:lstStyle/>
+                    <a:p>
+                      <a:pPr indent="0" marL="0">
+                        <a:buNone/>
+                      </a:pPr>
+                      <a:r>
+                        <a:rPr lang="en-US" sz="1300" dirty="0">
+                          <a:solidFill>
+                            <a:srgbClr val="E6EDF3"/>
+                          </a:solidFill>
+                          <a:latin typeface="Calibri" pitchFamily="34" charset="0"/>
+                          <a:ea typeface="Calibri" pitchFamily="34" charset="-122"/>
+                          <a:cs typeface="Calibri" pitchFamily="34" charset="-120"/>
+                        </a:rPr>
+                        <a:t>13.7</a:t>
+                      </a:r>
+                      <a:endParaRPr lang="en-US" sz="1300" dirty="0">
+                        <a:latin typeface="Calibri" charset="0"/>
+                        <a:ea typeface="Calibri" charset="0"/>
+                        <a:cs typeface="Calibri" charset="0"/>
+                      </a:endParaRPr>
+                    </a:p>
+                  </a:txBody>
+                  <a:tcPr marL="91440" marR="91440" marT="45720" marB="45720">
+                    <a:lnL w="12700" cap="flat" cmpd="sng" algn="ctr">
+                      <a:solidFill>
+                        <a:srgbClr val="2A3441"/>
+                      </a:solidFill>
+                      <a:prstDash val="solid"/>
+                      <a:round/>
+                      <a:headEnd type="none" w="med" len="med"/>
+                      <a:tailEnd type="none" w="med" len="med"/>
+                    </a:lnL>
+                    <a:lnR w="12700" cap="flat" cmpd="sng" algn="ctr">
+                      <a:solidFill>
+                        <a:srgbClr val="2A3441"/>
+                      </a:solidFill>
+                      <a:prstDash val="solid"/>
+                      <a:round/>
+                      <a:headEnd type="none" w="med" len="med"/>
+                      <a:tailEnd type="none" w="med" len="med"/>
+                    </a:lnR>
+                    <a:lnT w="12700" cap="flat" cmpd="sng" algn="ctr">
+                      <a:solidFill>
+                        <a:srgbClr val="2A3441"/>
+                      </a:solidFill>
+                      <a:prstDash val="solid"/>
+                      <a:round/>
+                      <a:headEnd type="none" w="med" len="med"/>
+                      <a:tailEnd type="none" w="med" len="med"/>
+                    </a:lnT>
+                    <a:lnB w="12700" cap="flat" cmpd="sng" algn="ctr">
+                      <a:solidFill>
+                        <a:srgbClr val="2A3441"/>
+                      </a:solidFill>
+                      <a:prstDash val="solid"/>
+                      <a:round/>
+                      <a:headEnd type="none" w="med" len="med"/>
+                      <a:tailEnd type="none" w="med" len="med"/>
+                    </a:lnB>
+                    <a:solidFill>
+                      <a:srgbClr val="141B24"/>
+                    </a:solidFill>
+                  </a:tcPr>
+                </a:tc>
+              </a:tr>
+              <a:tr h="420624">
+                <a:tc>
+                  <a:txBody>
+                    <a:bodyPr/>
+                    <a:lstStyle/>
+                    <a:p>
+                      <a:pPr indent="0" marL="0">
+                        <a:buNone/>
+                      </a:pPr>
+                      <a:r>
+                        <a:rPr lang="en-US" sz="1300" dirty="0">
+                          <a:solidFill>
+                            <a:srgbClr val="E6EDF3"/>
+                          </a:solidFill>
+                          <a:latin typeface="Calibri" pitchFamily="34" charset="0"/>
+                          <a:ea typeface="Calibri" pitchFamily="34" charset="-122"/>
+                          <a:cs typeface="Calibri" pitchFamily="34" charset="-120"/>
+                        </a:rPr>
+                        <a:t>Hostile, 10% loss</a:t>
+                      </a:r>
+                      <a:endParaRPr lang="en-US" sz="1300" dirty="0">
+                        <a:latin typeface="Calibri" charset="0"/>
+                        <a:ea typeface="Calibri" charset="0"/>
+                        <a:cs typeface="Calibri" charset="0"/>
+                      </a:endParaRPr>
+                    </a:p>
+                  </a:txBody>
+                  <a:tcPr marL="91440" marR="91440" marT="45720" marB="45720">
+                    <a:lnL w="12700" cap="flat" cmpd="sng" algn="ctr">
+                      <a:solidFill>
+                        <a:srgbClr val="2A3441"/>
+                      </a:solidFill>
+                      <a:prstDash val="solid"/>
+                      <a:round/>
+                      <a:headEnd type="none" w="med" len="med"/>
+                      <a:tailEnd type="none" w="med" len="med"/>
+                    </a:lnL>
+                    <a:lnR w="12700" cap="flat" cmpd="sng" algn="ctr">
+                      <a:solidFill>
+                        <a:srgbClr val="2A3441"/>
+                      </a:solidFill>
+                      <a:prstDash val="solid"/>
+                      <a:round/>
+                      <a:headEnd type="none" w="med" len="med"/>
+                      <a:tailEnd type="none" w="med" len="med"/>
+                    </a:lnR>
+                    <a:lnT w="12700" cap="flat" cmpd="sng" algn="ctr">
+                      <a:solidFill>
+                        <a:srgbClr val="2A3441"/>
+                      </a:solidFill>
+                      <a:prstDash val="solid"/>
+                      <a:round/>
+                      <a:headEnd type="none" w="med" len="med"/>
+                      <a:tailEnd type="none" w="med" len="med"/>
+                    </a:lnT>
+                    <a:lnB w="12700" cap="flat" cmpd="sng" algn="ctr">
+                      <a:solidFill>
+                        <a:srgbClr val="2A3441"/>
+                      </a:solidFill>
+                      <a:prstDash val="solid"/>
+                      <a:round/>
+                      <a:headEnd type="none" w="med" len="med"/>
+                      <a:tailEnd type="none" w="med" len="med"/>
+                    </a:lnB>
+                    <a:solidFill>
+                      <a:srgbClr val="141B24"/>
+                    </a:solidFill>
+                  </a:tcPr>
+                </a:tc>
+                <a:tc>
+                  <a:txBody>
+                    <a:bodyPr/>
+                    <a:lstStyle/>
+                    <a:p>
+                      <a:pPr indent="0" marL="0">
+                        <a:buNone/>
+                      </a:pPr>
+                      <a:r>
+                        <a:rPr lang="en-US" sz="1300" dirty="0">
+                          <a:solidFill>
+                            <a:srgbClr val="E6EDF3"/>
+                          </a:solidFill>
+                          <a:latin typeface="Calibri" pitchFamily="34" charset="0"/>
+                          <a:ea typeface="Calibri" pitchFamily="34" charset="-122"/>
+                          <a:cs typeface="Calibri" pitchFamily="34" charset="-120"/>
+                        </a:rPr>
+                        <a:t>11.1</a:t>
+                      </a:r>
+                      <a:endParaRPr lang="en-US" sz="1300" dirty="0">
+                        <a:latin typeface="Calibri" charset="0"/>
+                        <a:ea typeface="Calibri" charset="0"/>
+                        <a:cs typeface="Calibri" charset="0"/>
+                      </a:endParaRPr>
+                    </a:p>
+                  </a:txBody>
+                  <a:tcPr marL="91440" marR="91440" marT="45720" marB="45720">
+                    <a:lnL w="12700" cap="flat" cmpd="sng" algn="ctr">
+                      <a:solidFill>
+                        <a:srgbClr val="2A3441"/>
+                      </a:solidFill>
+                      <a:prstDash val="solid"/>
+                      <a:round/>
+                      <a:headEnd type="none" w="med" len="med"/>
+                      <a:tailEnd type="none" w="med" len="med"/>
+                    </a:lnL>
+                    <a:lnR w="12700" cap="flat" cmpd="sng" algn="ctr">
+                      <a:solidFill>
+                        <a:srgbClr val="2A3441"/>
+                      </a:solidFill>
+                      <a:prstDash val="solid"/>
+                      <a:round/>
+                      <a:headEnd type="none" w="med" len="med"/>
+                      <a:tailEnd type="none" w="med" len="med"/>
+                    </a:lnR>
+                    <a:lnT w="12700" cap="flat" cmpd="sng" algn="ctr">
+                      <a:solidFill>
+                        <a:srgbClr val="2A3441"/>
+                      </a:solidFill>
+                      <a:prstDash val="solid"/>
+                      <a:round/>
+                      <a:headEnd type="none" w="med" len="med"/>
+                      <a:tailEnd type="none" w="med" len="med"/>
+                    </a:lnT>
+                    <a:lnB w="12700" cap="flat" cmpd="sng" algn="ctr">
+                      <a:solidFill>
+                        <a:srgbClr val="2A3441"/>
+                      </a:solidFill>
+                      <a:prstDash val="solid"/>
+                      <a:round/>
+                      <a:headEnd type="none" w="med" len="med"/>
+                      <a:tailEnd type="none" w="med" len="med"/>
+                    </a:lnB>
+                    <a:solidFill>
+                      <a:srgbClr val="141B24"/>
+                    </a:solidFill>
+                  </a:tcPr>
+                </a:tc>
+                <a:tc>
+                  <a:txBody>
+                    <a:bodyPr/>
+                    <a:lstStyle/>
+                    <a:p>
+                      <a:pPr indent="0" marL="0">
+                        <a:buNone/>
+                      </a:pPr>
+                      <a:r>
+                        <a:rPr lang="en-US" sz="1300" dirty="0">
+                          <a:solidFill>
+                            <a:srgbClr val="E6EDF3"/>
+                          </a:solidFill>
+                          <a:latin typeface="Calibri" pitchFamily="34" charset="0"/>
+                          <a:ea typeface="Calibri" pitchFamily="34" charset="-122"/>
+                          <a:cs typeface="Calibri" pitchFamily="34" charset="-120"/>
+                        </a:rPr>
+                        <a:t>84.9</a:t>
+                      </a:r>
+                      <a:endParaRPr lang="en-US" sz="1300" dirty="0">
+                        <a:latin typeface="Calibri" charset="0"/>
+                        <a:ea typeface="Calibri" charset="0"/>
+                        <a:cs typeface="Calibri" charset="0"/>
+                      </a:endParaRPr>
+                    </a:p>
+                  </a:txBody>
+                  <a:tcPr marL="91440" marR="91440" marT="45720" marB="45720">
+                    <a:lnL w="12700" cap="flat" cmpd="sng" algn="ctr">
+                      <a:solidFill>
+                        <a:srgbClr val="2A3441"/>
+                      </a:solidFill>
+                      <a:prstDash val="solid"/>
+                      <a:round/>
+                      <a:headEnd type="none" w="med" len="med"/>
+                      <a:tailEnd type="none" w="med" len="med"/>
+                    </a:lnL>
+                    <a:lnR w="12700" cap="flat" cmpd="sng" algn="ctr">
+                      <a:solidFill>
+                        <a:srgbClr val="2A3441"/>
+                      </a:solidFill>
+                      <a:prstDash val="solid"/>
+                      <a:round/>
+                      <a:headEnd type="none" w="med" len="med"/>
+                      <a:tailEnd type="none" w="med" len="med"/>
+                    </a:lnR>
+                    <a:lnT w="12700" cap="flat" cmpd="sng" algn="ctr">
+                      <a:solidFill>
+                        <a:srgbClr val="2A3441"/>
+                      </a:solidFill>
+                      <a:prstDash val="solid"/>
+                      <a:round/>
+                      <a:headEnd type="none" w="med" len="med"/>
+                      <a:tailEnd type="none" w="med" len="med"/>
+                    </a:lnT>
+                    <a:lnB w="12700" cap="flat" cmpd="sng" algn="ctr">
+                      <a:solidFill>
+                        <a:srgbClr val="2A3441"/>
+                      </a:solidFill>
+                      <a:prstDash val="solid"/>
+                      <a:round/>
+                      <a:headEnd type="none" w="med" len="med"/>
+                      <a:tailEnd type="none" w="med" len="med"/>
+                    </a:lnB>
+                    <a:solidFill>
+                      <a:srgbClr val="141B24"/>
+                    </a:solidFill>
+                  </a:tcPr>
+                </a:tc>
+                <a:tc>
+                  <a:txBody>
+                    <a:bodyPr/>
+                    <a:lstStyle/>
+                    <a:p>
+                      <a:pPr indent="0" marL="0">
+                        <a:buNone/>
+                      </a:pPr>
+                      <a:r>
+                        <a:rPr lang="en-US" sz="1300" dirty="0">
+                          <a:solidFill>
+                            <a:srgbClr val="E6EDF3"/>
+                          </a:solidFill>
+                          <a:latin typeface="Calibri" pitchFamily="34" charset="0"/>
+                          <a:ea typeface="Calibri" pitchFamily="34" charset="-122"/>
+                          <a:cs typeface="Calibri" pitchFamily="34" charset="-120"/>
+                        </a:rPr>
+                        <a:t>13.9</a:t>
+                      </a:r>
+                      <a:endParaRPr lang="en-US" sz="1300" dirty="0">
+                        <a:latin typeface="Calibri" charset="0"/>
+                        <a:ea typeface="Calibri" charset="0"/>
+                        <a:cs typeface="Calibri" charset="0"/>
+                      </a:endParaRPr>
+                    </a:p>
+                  </a:txBody>
+                  <a:tcPr marL="91440" marR="91440" marT="45720" marB="45720">
+                    <a:lnL w="12700" cap="flat" cmpd="sng" algn="ctr">
+                      <a:solidFill>
+                        <a:srgbClr val="2A3441"/>
+                      </a:solidFill>
+                      <a:prstDash val="solid"/>
+                      <a:round/>
+                      <a:headEnd type="none" w="med" len="med"/>
+                      <a:tailEnd type="none" w="med" len="med"/>
+                    </a:lnL>
+                    <a:lnR w="12700" cap="flat" cmpd="sng" algn="ctr">
+                      <a:solidFill>
+                        <a:srgbClr val="2A3441"/>
+                      </a:solidFill>
+                      <a:prstDash val="solid"/>
+                      <a:round/>
+                      <a:headEnd type="none" w="med" len="med"/>
+                      <a:tailEnd type="none" w="med" len="med"/>
+                    </a:lnR>
+                    <a:lnT w="12700" cap="flat" cmpd="sng" algn="ctr">
+                      <a:solidFill>
+                        <a:srgbClr val="2A3441"/>
+                      </a:solidFill>
+                      <a:prstDash val="solid"/>
+                      <a:round/>
+                      <a:headEnd type="none" w="med" len="med"/>
+                      <a:tailEnd type="none" w="med" len="med"/>
+                    </a:lnT>
+                    <a:lnB w="12700" cap="flat" cmpd="sng" algn="ctr">
+                      <a:solidFill>
+                        <a:srgbClr val="2A3441"/>
+                      </a:solidFill>
+                      <a:prstDash val="solid"/>
+                      <a:round/>
+                      <a:headEnd type="none" w="med" len="med"/>
+                      <a:tailEnd type="none" w="med" len="med"/>
+                    </a:lnB>
+                    <a:solidFill>
+                      <a:srgbClr val="141B24"/>
+                    </a:solidFill>
+                  </a:tcPr>
+                </a:tc>
+              </a:tr>
+            </a:tbl>
+          </a:graphicData>
+        </a:graphic>
+      </p:graphicFrame>
+      <p:sp>
+        <p:nvSpPr>
+          <p:cNvPr id="5" name="Text 2"/>
           <p:cNvSpPr/>
           <p:nvPr/>
         </p:nvSpPr>
         <p:spPr>
           <a:xfrm>
-            <a:off x="548640" y="1371600"/>
-            <a:ext cx="5394960" cy="4206240"/>
-          </a:xfrm>
-          <a:prstGeom prst="rect">
-            <a:avLst/>
-          </a:prstGeom>
-          <a:solidFill>
-            <a:srgbClr val="141B24"/>
-          </a:solidFill>
-          <a:ln w="12700">
-            <a:solidFill>
-              <a:srgbClr val="39FF88"/>
-            </a:solidFill>
-            <a:prstDash val="solid"/>
-          </a:ln>
-        </p:spPr>
-      </p:sp>
-      <p:sp>
-        <p:nvSpPr>
-          <p:cNvPr id="5" name="Text 3"/>
-          <p:cNvSpPr/>
-          <p:nvPr/>
-        </p:nvSpPr>
-        <p:spPr>
-          <a:xfrm>
-            <a:off x="731520" y="1508760"/>
-            <a:ext cx="5029200" cy="457200"/>
+            <a:off x="6949440" y="1188720"/>
+            <a:ext cx="4846320" cy="4937760"/>
           </a:xfrm>
           <a:prstGeom prst="rect">
             <a:avLst/>
@@ -12613,37 +14079,125 @@
           <a:ln/>
         </p:spPr>
         <p:txBody>
-          <a:bodyPr wrap="square" lIns="0" tIns="0" rIns="0" bIns="0" rtlCol="0" anchor="ctr"/>
-          <a:lstStyle/>
-          <a:p>
-            <a:pPr indent="0" marL="0">
-              <a:buNone/>
-            </a:pPr>
-            <a:r>
-              <a:rPr lang="en-US" sz="2000" b="1" dirty="0">
-                <a:solidFill>
-                  <a:srgbClr val="39FF88"/>
-                </a:solidFill>
-                <a:latin typeface="Courier New" pitchFamily="34" charset="0"/>
-                <a:ea typeface="Courier New" pitchFamily="34" charset="-122"/>
-                <a:cs typeface="Courier New" pitchFamily="34" charset="-120"/>
-              </a:rPr>
-              <a:t>Learned</a:t>
-            </a:r>
-            <a:endParaRPr lang="en-US" sz="2000" dirty="0"/>
-          </a:p>
-        </p:txBody>
-      </p:sp>
-      <p:sp>
-        <p:nvSpPr>
-          <p:cNvPr id="6" name="Text 4"/>
+          <a:bodyPr wrap="square" lIns="0" tIns="0" rIns="0" bIns="0" rtlCol="0" anchor="t"/>
+          <a:lstStyle/>
+          <a:p>
+            <a:pPr marL="342900" indent="-342900">
+              <a:spcAft>
+                <a:spcPts val="800"/>
+              </a:spcAft>
+              <a:buSzPct val="100000"/>
+              <a:buChar char="•"/>
+            </a:pPr>
+            <a:r>
+              <a:rPr lang="en-US" sz="1400" dirty="0">
+                <a:solidFill>
+                  <a:srgbClr val="E6EDF3"/>
+                </a:solidFill>
+                <a:latin typeface="Calibri" pitchFamily="34" charset="0"/>
+                <a:ea typeface="Calibri" pitchFamily="34" charset="-122"/>
+                <a:cs typeface="Calibri" pitchFamily="34" charset="-120"/>
+              </a:rPr>
+              <a:t>Problem found: at 10% loss the neural agent is 7x slower than AIMD</a:t>
+            </a:r>
+            <a:endParaRPr lang="en-US" sz="1400" dirty="0"/>
+          </a:p>
+          <a:p>
+            <a:pPr marL="342900" indent="-342900">
+              <a:spcAft>
+                <a:spcPts val="800"/>
+              </a:spcAft>
+              <a:buSzPct val="100000"/>
+              <a:buChar char="•"/>
+            </a:pPr>
+            <a:r>
+              <a:rPr lang="en-US" sz="1400" dirty="0">
+                <a:solidFill>
+                  <a:srgbClr val="E6EDF3"/>
+                </a:solidFill>
+                <a:latin typeface="Calibri" pitchFamily="34" charset="0"/>
+                <a:ea typeface="Calibri" pitchFamily="34" charset="-122"/>
+                <a:cs typeface="Calibri" pitchFamily="34" charset="-120"/>
+              </a:rPr>
+              <a:t>Fix: while a decision interval loses 10% or more, AIMD drives the window; after 3 clean intervals the agent resumes</a:t>
+            </a:r>
+            <a:endParaRPr lang="en-US" sz="1400" dirty="0"/>
+          </a:p>
+          <a:p>
+            <a:pPr marL="342900" indent="-342900">
+              <a:spcAft>
+                <a:spcPts val="800"/>
+              </a:spcAft>
+              <a:buSzPct val="100000"/>
+              <a:buChar char="•"/>
+            </a:pPr>
+            <a:r>
+              <a:rPr lang="en-US" sz="1400" dirty="0">
+                <a:solidFill>
+                  <a:srgbClr val="E6EDF3"/>
+                </a:solidFill>
+                <a:latin typeface="Calibri" pitchFamily="34" charset="0"/>
+                <a:ea typeface="Calibri" pitchFamily="34" charset="-122"/>
+                <a:cs typeface="Calibri" pitchFamily="34" charset="-120"/>
+              </a:rPr>
+              <a:t>Keeps the wins on the three benign paths, and the hostile path is no longer significantly different from AIMD</a:t>
+            </a:r>
+            <a:endParaRPr lang="en-US" sz="1400" dirty="0"/>
+          </a:p>
+          <a:p>
+            <a:pPr marL="342900" indent="-342900">
+              <a:spcAft>
+                <a:spcPts val="800"/>
+              </a:spcAft>
+              <a:buSzPct val="100000"/>
+              <a:buChar char="•"/>
+            </a:pPr>
+            <a:r>
+              <a:rPr lang="en-US" sz="1400" dirty="0">
+                <a:solidFill>
+                  <a:srgbClr val="E6EDF3"/>
+                </a:solidFill>
+                <a:latin typeface="Calibri" pitchFamily="34" charset="0"/>
+                <a:ea typeface="Calibri" pitchFamily="34" charset="-122"/>
+                <a:cs typeface="Calibri" pitchFamily="34" charset="-120"/>
+              </a:rPr>
+              <a:t>A timeout cut (x0.25) was tried and dropped: it helped the hostile path but hurt the 2% path (24 s vs 9 s)</a:t>
+            </a:r>
+            <a:endParaRPr lang="en-US" sz="1400" dirty="0"/>
+          </a:p>
+          <a:p>
+            <a:pPr marL="342900" indent="-342900">
+              <a:spcAft>
+                <a:spcPts val="800"/>
+              </a:spcAft>
+              <a:buSzPct val="100000"/>
+              <a:buChar char="•"/>
+            </a:pPr>
+            <a:r>
+              <a:rPr lang="en-US" sz="1400" dirty="0">
+                <a:solidFill>
+                  <a:srgbClr val="E6EDF3"/>
+                </a:solidFill>
+                <a:latin typeface="Calibri" pitchFamily="34" charset="0"/>
+                <a:ea typeface="Calibri" pitchFamily="34" charset="-122"/>
+                <a:cs typeface="Calibri" pitchFamily="34" charset="-120"/>
+              </a:rPr>
+              <a:t>Honest summary: the agent helps on clean-to-moderate paths; it needs a classical safety net elsewhere</a:t>
+            </a:r>
+            <a:endParaRPr lang="en-US" sz="1400" dirty="0"/>
+          </a:p>
+        </p:txBody>
+      </p:sp>
+      <p:sp>
+        <p:nvSpPr>
+          <p:cNvPr id="6" name="Text 3"/>
           <p:cNvSpPr/>
           <p:nvPr/>
         </p:nvSpPr>
         <p:spPr>
           <a:xfrm>
-            <a:off x="731520" y="2011680"/>
-            <a:ext cx="5029200" cy="3429000"/>
+            <a:off x="548640" y="3840480"/>
+            <a:ext cx="6035040" cy="731520"/>
           </a:xfrm>
           <a:prstGeom prst="rect">
             <a:avLst/>
@@ -12652,234 +14206,24 @@
           <a:ln/>
         </p:spPr>
         <p:txBody>
-          <a:bodyPr wrap="square" lIns="0" tIns="0" rIns="0" bIns="0" rtlCol="0" anchor="t"/>
+          <a:bodyPr wrap="square" lIns="0" tIns="0" rIns="0" bIns="0" rtlCol="0" anchor="ctr"/>
           <a:lstStyle/>
           <a:p>
             <a:pPr indent="0" marL="0">
               <a:buNone/>
             </a:pPr>
             <a:r>
-              <a:rPr lang="en-US" sz="2000" dirty="0">
-                <a:solidFill>
-                  <a:srgbClr val="E6EDF3"/>
+              <a:rPr lang="en-US" sz="1300" dirty="0">
+                <a:solidFill>
+                  <a:srgbClr val="8B98A5"/>
                 </a:solidFill>
                 <a:latin typeface="Calibri" pitchFamily="34" charset="0"/>
                 <a:ea typeface="Calibri" pitchFamily="34" charset="-122"/>
                 <a:cs typeface="Calibri" pitchFamily="34" charset="-120"/>
               </a:rPr>
-              <a:t>Reliability is a set of simple rules working together.</a:t>
-            </a:r>
-            <a:endParaRPr lang="en-US" sz="2000" dirty="0"/>
-          </a:p>
-          <a:p>
-            <a:pPr indent="0" marL="0">
-              <a:buNone/>
-            </a:pPr>
-            <a:r>
-              <a:rPr lang="en-US" sz="2000" dirty="0">
-                <a:solidFill>
-                  <a:srgbClr val="E6EDF3"/>
-                </a:solidFill>
-                <a:latin typeface="Calibri" pitchFamily="34" charset="0"/>
-                <a:ea typeface="Calibri" pitchFamily="34" charset="-122"/>
-                <a:cs typeface="Calibri" pitchFamily="34" charset="-120"/>
-              </a:rPr>
-              <a:t>Congestion control matters as much as retransmission.</a:t>
-            </a:r>
-            <a:endParaRPr lang="en-US" sz="2000" dirty="0"/>
-          </a:p>
-          <a:p>
-            <a:pPr indent="0" marL="0">
-              <a:buNone/>
-            </a:pPr>
-            <a:r>
-              <a:rPr lang="en-US" sz="2000" dirty="0">
-                <a:solidFill>
-                  <a:srgbClr val="E6EDF3"/>
-                </a:solidFill>
-                <a:latin typeface="Calibri" pitchFamily="34" charset="0"/>
-                <a:ea typeface="Calibri" pitchFamily="34" charset="-122"/>
-                <a:cs typeface="Calibri" pitchFamily="34" charset="-120"/>
-              </a:rPr>
-              <a:t>Testing tools fail in surprising ways.</a:t>
-            </a:r>
-            <a:endParaRPr lang="en-US" sz="2000" dirty="0"/>
-          </a:p>
-        </p:txBody>
-      </p:sp>
-      <p:sp>
-        <p:nvSpPr>
-          <p:cNvPr id="7" name="Shape 5"/>
-          <p:cNvSpPr/>
-          <p:nvPr/>
-        </p:nvSpPr>
-        <p:spPr>
-          <a:xfrm>
-            <a:off x="6217920" y="1371600"/>
-            <a:ext cx="5394960" cy="4206240"/>
-          </a:xfrm>
-          <a:prstGeom prst="rect">
-            <a:avLst/>
-          </a:prstGeom>
-          <a:solidFill>
-            <a:srgbClr val="141B24"/>
-          </a:solidFill>
-          <a:ln w="12700">
-            <a:solidFill>
-              <a:srgbClr val="FFB000"/>
-            </a:solidFill>
-            <a:prstDash val="solid"/>
-          </a:ln>
-        </p:spPr>
-      </p:sp>
-      <p:sp>
-        <p:nvSpPr>
-          <p:cNvPr id="8" name="Text 6"/>
-          <p:cNvSpPr/>
-          <p:nvPr/>
-        </p:nvSpPr>
-        <p:spPr>
-          <a:xfrm>
-            <a:off x="6400800" y="1508760"/>
-            <a:ext cx="5029200" cy="457200"/>
-          </a:xfrm>
-          <a:prstGeom prst="rect">
-            <a:avLst/>
-          </a:prstGeom>
-          <a:noFill/>
-          <a:ln/>
-        </p:spPr>
-        <p:txBody>
-          <a:bodyPr wrap="square" lIns="0" tIns="0" rIns="0" bIns="0" rtlCol="0" anchor="ctr"/>
-          <a:lstStyle/>
-          <a:p>
-            <a:pPr indent="0" marL="0">
-              <a:buNone/>
-            </a:pPr>
-            <a:r>
-              <a:rPr lang="en-US" sz="2000" b="1" dirty="0">
-                <a:solidFill>
-                  <a:srgbClr val="FFB000"/>
-                </a:solidFill>
-                <a:latin typeface="Courier New" pitchFamily="34" charset="0"/>
-                <a:ea typeface="Courier New" pitchFamily="34" charset="-122"/>
-                <a:cs typeface="Courier New" pitchFamily="34" charset="-120"/>
-              </a:rPr>
-              <a:t>Next</a:t>
-            </a:r>
-            <a:endParaRPr lang="en-US" sz="2000" dirty="0"/>
-          </a:p>
-        </p:txBody>
-      </p:sp>
-      <p:sp>
-        <p:nvSpPr>
-          <p:cNvPr id="9" name="Text 7"/>
-          <p:cNvSpPr/>
-          <p:nvPr/>
-        </p:nvSpPr>
-        <p:spPr>
-          <a:xfrm>
-            <a:off x="6400800" y="2011680"/>
-            <a:ext cx="5029200" cy="3429000"/>
-          </a:xfrm>
-          <a:prstGeom prst="rect">
-            <a:avLst/>
-          </a:prstGeom>
-          <a:noFill/>
-          <a:ln/>
-        </p:spPr>
-        <p:txBody>
-          <a:bodyPr wrap="square" lIns="0" tIns="0" rIns="0" bIns="0" rtlCol="0" anchor="t"/>
-          <a:lstStyle/>
-          <a:p>
-            <a:pPr indent="0" marL="0">
-              <a:buNone/>
-            </a:pPr>
-            <a:r>
-              <a:rPr lang="en-US" sz="2000" dirty="0">
-                <a:solidFill>
-                  <a:srgbClr val="E6EDF3"/>
-                </a:solidFill>
-                <a:latin typeface="Calibri" pitchFamily="34" charset="0"/>
-                <a:ea typeface="Calibri" pitchFamily="34" charset="-122"/>
-                <a:cs typeface="Calibri" pitchFamily="34" charset="-120"/>
-              </a:rPr>
-              <a:t>Train the neural agent in C / on real netem</a:t>
-            </a:r>
-            <a:endParaRPr lang="en-US" sz="2000" dirty="0"/>
-          </a:p>
-          <a:p>
-            <a:pPr indent="0" marL="0">
-              <a:buNone/>
-            </a:pPr>
-            <a:r>
-              <a:rPr lang="en-US" sz="2000" dirty="0">
-                <a:solidFill>
-                  <a:srgbClr val="E6EDF3"/>
-                </a:solidFill>
-                <a:latin typeface="Calibri" pitchFamily="34" charset="0"/>
-                <a:ea typeface="Calibri" pitchFamily="34" charset="-122"/>
-                <a:cs typeface="Calibri" pitchFamily="34" charset="-120"/>
-              </a:rPr>
-              <a:t>Selective ACK where throughput limits the path</a:t>
-            </a:r>
-            <a:endParaRPr lang="en-US" sz="2000" dirty="0"/>
-          </a:p>
-          <a:p>
-            <a:pPr indent="0" marL="0">
-              <a:buNone/>
-            </a:pPr>
-            <a:r>
-              <a:rPr lang="en-US" sz="2000" dirty="0">
-                <a:solidFill>
-                  <a:srgbClr val="E6EDF3"/>
-                </a:solidFill>
-                <a:latin typeface="Calibri" pitchFamily="34" charset="0"/>
-                <a:ea typeface="Calibri" pitchFamily="34" charset="-122"/>
-                <a:cs typeface="Calibri" pitchFamily="34" charset="-120"/>
-              </a:rPr>
-              <a:t>Kernel netem and real multi-machine tests</a:t>
-            </a:r>
-            <a:endParaRPr lang="en-US" sz="2000" dirty="0"/>
-          </a:p>
-        </p:txBody>
-      </p:sp>
-      <p:sp>
-        <p:nvSpPr>
-          <p:cNvPr id="10" name="Text 8"/>
-          <p:cNvSpPr/>
-          <p:nvPr/>
-        </p:nvSpPr>
-        <p:spPr>
-          <a:xfrm>
-            <a:off x="548640" y="5852160"/>
-            <a:ext cx="10972800" cy="365760"/>
-          </a:xfrm>
-          <a:prstGeom prst="rect">
-            <a:avLst/>
-          </a:prstGeom>
-          <a:noFill/>
-          <a:ln/>
-        </p:spPr>
-        <p:txBody>
-          <a:bodyPr wrap="square" lIns="0" tIns="0" rIns="0" bIns="0" rtlCol="0" anchor="ctr"/>
-          <a:lstStyle/>
-          <a:p>
-            <a:pPr indent="0" marL="0">
-              <a:buNone/>
-            </a:pPr>
-            <a:r>
-              <a:rPr lang="en-US" sz="1400" dirty="0">
-                <a:solidFill>
-                  <a:srgbClr val="8B98A5"/>
-                </a:solidFill>
-                <a:latin typeface="Calibri" pitchFamily="34" charset="0"/>
-                <a:ea typeface="Calibri" pitchFamily="34" charset="-122"/>
-                <a:cs typeface="Calibri" pitchFamily="34" charset="-120"/>
-              </a:rPr>
-              <a:t>Limits: Go-Back-N wastes bandwidth and suffers under reordering; C tests use an emulated path; the tabular agent did not beat AIMD in C.</a:t>
-            </a:r>
-            <a:endParaRPr lang="en-US" sz="1400" dirty="0"/>
+              <a:t>10 runs per cell (hostile: 5 runs, 300 packets), 95% intervals. Flag: --hybrid 0.10. Code: eval_ci6.sh.</a:t>
+            </a:r>
+            <a:endParaRPr lang="en-US" sz="1300" dirty="0"/>
           </a:p>
         </p:txBody>
       </p:sp>
@@ -12923,8 +14267,8 @@
         </p:nvSpPr>
         <p:spPr>
           <a:xfrm>
-            <a:off x="731520" y="2103120"/>
-            <a:ext cx="10058400" cy="1097280"/>
+            <a:off x="548640" y="320040"/>
+            <a:ext cx="11064240" cy="731520"/>
           </a:xfrm>
           <a:prstGeom prst="rect">
             <a:avLst/>
@@ -12940,7 +14284,7 @@
               <a:buNone/>
             </a:pPr>
             <a:r>
-              <a:rPr lang="en-US" sz="6400" b="1" dirty="0">
+              <a:rPr lang="en-US" sz="3000" b="1" dirty="0">
                 <a:solidFill>
                   <a:srgbClr val="39FF88"/>
                 </a:solidFill>
@@ -12948,9 +14292,9 @@
                 <a:ea typeface="Courier New" pitchFamily="34" charset="-122"/>
                 <a:cs typeface="Courier New" pitchFamily="34" charset="-120"/>
               </a:rPr>
-              <a:t>Thank you</a:t>
-            </a:r>
-            <a:endParaRPr lang="en-US" sz="6400" dirty="0"/>
+              <a:t>Learnings and future work</a:t>
+            </a:r>
+            <a:endParaRPr lang="en-US" sz="3000" dirty="0"/>
           </a:p>
         </p:txBody>
       </p:sp>
@@ -12962,8 +14306,8 @@
         </p:nvSpPr>
         <p:spPr>
           <a:xfrm>
-            <a:off x="731520" y="3474720"/>
-            <a:ext cx="10058400" cy="548640"/>
+            <a:off x="9418320" y="6446520"/>
+            <a:ext cx="2377440" cy="274320"/>
           </a:xfrm>
           <a:prstGeom prst="rect">
             <a:avLst/>
@@ -12975,34 +14319,59 @@
           <a:bodyPr wrap="square" lIns="0" tIns="0" rIns="0" bIns="0" rtlCol="0" anchor="ctr"/>
           <a:lstStyle/>
           <a:p>
-            <a:pPr indent="0" marL="0">
+            <a:pPr algn="r" indent="0" marL="0">
               <a:buNone/>
             </a:pPr>
             <a:r>
-              <a:rPr lang="en-US" sz="2600" dirty="0">
-                <a:solidFill>
-                  <a:srgbClr val="E6EDF3"/>
+              <a:rPr lang="en-US" sz="1000" dirty="0">
+                <a:solidFill>
+                  <a:srgbClr val="8B98A5"/>
                 </a:solidFill>
                 <a:latin typeface="Courier New" pitchFamily="34" charset="0"/>
                 <a:ea typeface="Courier New" pitchFamily="34" charset="-122"/>
                 <a:cs typeface="Courier New" pitchFamily="34" charset="-120"/>
               </a:rPr>
-              <a:t>github.com/Capsturrrr/rudp</a:t>
-            </a:r>
-            <a:endParaRPr lang="en-US" sz="2600" dirty="0"/>
-          </a:p>
-        </p:txBody>
-      </p:sp>
-      <p:sp>
-        <p:nvSpPr>
-          <p:cNvPr id="4" name="Text 2"/>
+              <a:t>25 / 26   Smart-RUDP</a:t>
+            </a:r>
+            <a:endParaRPr lang="en-US" sz="1000" dirty="0"/>
+          </a:p>
+        </p:txBody>
+      </p:sp>
+      <p:sp>
+        <p:nvSpPr>
+          <p:cNvPr id="4" name="Shape 2"/>
           <p:cNvSpPr/>
           <p:nvPr/>
         </p:nvSpPr>
         <p:spPr>
           <a:xfrm>
-            <a:off x="731520" y="4206240"/>
-            <a:ext cx="10058400" cy="457200"/>
+            <a:off x="548640" y="1371600"/>
+            <a:ext cx="5394960" cy="4206240"/>
+          </a:xfrm>
+          <a:prstGeom prst="rect">
+            <a:avLst/>
+          </a:prstGeom>
+          <a:solidFill>
+            <a:srgbClr val="141B24"/>
+          </a:solidFill>
+          <a:ln w="12700">
+            <a:solidFill>
+              <a:srgbClr val="39FF88"/>
+            </a:solidFill>
+            <a:prstDash val="solid"/>
+          </a:ln>
+        </p:spPr>
+      </p:sp>
+      <p:sp>
+        <p:nvSpPr>
+          <p:cNvPr id="5" name="Text 3"/>
+          <p:cNvSpPr/>
+          <p:nvPr/>
+        </p:nvSpPr>
+        <p:spPr>
+          <a:xfrm>
+            <a:off x="731520" y="1508760"/>
+            <a:ext cx="5029200" cy="457200"/>
           </a:xfrm>
           <a:prstGeom prst="rect">
             <a:avLst/>
@@ -13018,17 +14387,266 @@
               <a:buNone/>
             </a:pPr>
             <a:r>
-              <a:rPr lang="en-US" sz="1800" dirty="0">
-                <a:solidFill>
-                  <a:srgbClr val="8B98A5"/>
+              <a:rPr lang="en-US" sz="2000" b="1" dirty="0">
+                <a:solidFill>
+                  <a:srgbClr val="39FF88"/>
+                </a:solidFill>
+                <a:latin typeface="Courier New" pitchFamily="34" charset="0"/>
+                <a:ea typeface="Courier New" pitchFamily="34" charset="-122"/>
+                <a:cs typeface="Courier New" pitchFamily="34" charset="-120"/>
+              </a:rPr>
+              <a:t>Learned</a:t>
+            </a:r>
+            <a:endParaRPr lang="en-US" sz="2000" dirty="0"/>
+          </a:p>
+        </p:txBody>
+      </p:sp>
+      <p:sp>
+        <p:nvSpPr>
+          <p:cNvPr id="6" name="Text 4"/>
+          <p:cNvSpPr/>
+          <p:nvPr/>
+        </p:nvSpPr>
+        <p:spPr>
+          <a:xfrm>
+            <a:off x="731520" y="2011680"/>
+            <a:ext cx="5029200" cy="3429000"/>
+          </a:xfrm>
+          <a:prstGeom prst="rect">
+            <a:avLst/>
+          </a:prstGeom>
+          <a:noFill/>
+          <a:ln/>
+        </p:spPr>
+        <p:txBody>
+          <a:bodyPr wrap="square" lIns="0" tIns="0" rIns="0" bIns="0" rtlCol="0" anchor="t"/>
+          <a:lstStyle/>
+          <a:p>
+            <a:pPr indent="0" marL="0">
+              <a:buNone/>
+            </a:pPr>
+            <a:r>
+              <a:rPr lang="en-US" sz="2000" dirty="0">
+                <a:solidFill>
+                  <a:srgbClr val="E6EDF3"/>
                 </a:solidFill>
                 <a:latin typeface="Calibri" pitchFamily="34" charset="0"/>
                 <a:ea typeface="Calibri" pitchFamily="34" charset="-122"/>
                 <a:cs typeface="Calibri" pitchFamily="34" charset="-120"/>
               </a:rPr>
-              <a:t>Harshavardhan Mallela   Rohit Arya   Shloak Sinha</a:t>
-            </a:r>
-            <a:endParaRPr lang="en-US" sz="1800" dirty="0"/>
+              <a:t>Reliability is a set of simple rules working together.</a:t>
+            </a:r>
+            <a:endParaRPr lang="en-US" sz="2000" dirty="0"/>
+          </a:p>
+          <a:p>
+            <a:pPr indent="0" marL="0">
+              <a:buNone/>
+            </a:pPr>
+            <a:r>
+              <a:rPr lang="en-US" sz="2000" dirty="0">
+                <a:solidFill>
+                  <a:srgbClr val="E6EDF3"/>
+                </a:solidFill>
+                <a:latin typeface="Calibri" pitchFamily="34" charset="0"/>
+                <a:ea typeface="Calibri" pitchFamily="34" charset="-122"/>
+                <a:cs typeface="Calibri" pitchFamily="34" charset="-120"/>
+              </a:rPr>
+              <a:t>Congestion control matters as much as retransmission.</a:t>
+            </a:r>
+            <a:endParaRPr lang="en-US" sz="2000" dirty="0"/>
+          </a:p>
+          <a:p>
+            <a:pPr indent="0" marL="0">
+              <a:buNone/>
+            </a:pPr>
+            <a:r>
+              <a:rPr lang="en-US" sz="2000" dirty="0">
+                <a:solidFill>
+                  <a:srgbClr val="E6EDF3"/>
+                </a:solidFill>
+                <a:latin typeface="Calibri" pitchFamily="34" charset="0"/>
+                <a:ea typeface="Calibri" pitchFamily="34" charset="-122"/>
+                <a:cs typeface="Calibri" pitchFamily="34" charset="-120"/>
+              </a:rPr>
+              <a:t>Testing tools fail in surprising ways.</a:t>
+            </a:r>
+            <a:endParaRPr lang="en-US" sz="2000" dirty="0"/>
+          </a:p>
+        </p:txBody>
+      </p:sp>
+      <p:sp>
+        <p:nvSpPr>
+          <p:cNvPr id="7" name="Shape 5"/>
+          <p:cNvSpPr/>
+          <p:nvPr/>
+        </p:nvSpPr>
+        <p:spPr>
+          <a:xfrm>
+            <a:off x="6217920" y="1371600"/>
+            <a:ext cx="5394960" cy="4206240"/>
+          </a:xfrm>
+          <a:prstGeom prst="rect">
+            <a:avLst/>
+          </a:prstGeom>
+          <a:solidFill>
+            <a:srgbClr val="141B24"/>
+          </a:solidFill>
+          <a:ln w="12700">
+            <a:solidFill>
+              <a:srgbClr val="FFB000"/>
+            </a:solidFill>
+            <a:prstDash val="solid"/>
+          </a:ln>
+        </p:spPr>
+      </p:sp>
+      <p:sp>
+        <p:nvSpPr>
+          <p:cNvPr id="8" name="Text 6"/>
+          <p:cNvSpPr/>
+          <p:nvPr/>
+        </p:nvSpPr>
+        <p:spPr>
+          <a:xfrm>
+            <a:off x="6400800" y="1508760"/>
+            <a:ext cx="5029200" cy="457200"/>
+          </a:xfrm>
+          <a:prstGeom prst="rect">
+            <a:avLst/>
+          </a:prstGeom>
+          <a:noFill/>
+          <a:ln/>
+        </p:spPr>
+        <p:txBody>
+          <a:bodyPr wrap="square" lIns="0" tIns="0" rIns="0" bIns="0" rtlCol="0" anchor="ctr"/>
+          <a:lstStyle/>
+          <a:p>
+            <a:pPr indent="0" marL="0">
+              <a:buNone/>
+            </a:pPr>
+            <a:r>
+              <a:rPr lang="en-US" sz="2000" b="1" dirty="0">
+                <a:solidFill>
+                  <a:srgbClr val="FFB000"/>
+                </a:solidFill>
+                <a:latin typeface="Courier New" pitchFamily="34" charset="0"/>
+                <a:ea typeface="Courier New" pitchFamily="34" charset="-122"/>
+                <a:cs typeface="Courier New" pitchFamily="34" charset="-120"/>
+              </a:rPr>
+              <a:t>Next</a:t>
+            </a:r>
+            <a:endParaRPr lang="en-US" sz="2000" dirty="0"/>
+          </a:p>
+        </p:txBody>
+      </p:sp>
+      <p:sp>
+        <p:nvSpPr>
+          <p:cNvPr id="9" name="Text 7"/>
+          <p:cNvSpPr/>
+          <p:nvPr/>
+        </p:nvSpPr>
+        <p:spPr>
+          <a:xfrm>
+            <a:off x="6400800" y="2011680"/>
+            <a:ext cx="5029200" cy="3429000"/>
+          </a:xfrm>
+          <a:prstGeom prst="rect">
+            <a:avLst/>
+          </a:prstGeom>
+          <a:noFill/>
+          <a:ln/>
+        </p:spPr>
+        <p:txBody>
+          <a:bodyPr wrap="square" lIns="0" tIns="0" rIns="0" bIns="0" rtlCol="0" anchor="t"/>
+          <a:lstStyle/>
+          <a:p>
+            <a:pPr indent="0" marL="0">
+              <a:buNone/>
+            </a:pPr>
+            <a:r>
+              <a:rPr lang="en-US" sz="2000" dirty="0">
+                <a:solidFill>
+                  <a:srgbClr val="E6EDF3"/>
+                </a:solidFill>
+                <a:latin typeface="Calibri" pitchFamily="34" charset="0"/>
+                <a:ea typeface="Calibri" pitchFamily="34" charset="-122"/>
+                <a:cs typeface="Calibri" pitchFamily="34" charset="-120"/>
+              </a:rPr>
+              <a:t>Train the neural agent in C / on real netem</a:t>
+            </a:r>
+            <a:endParaRPr lang="en-US" sz="2000" dirty="0"/>
+          </a:p>
+          <a:p>
+            <a:pPr indent="0" marL="0">
+              <a:buNone/>
+            </a:pPr>
+            <a:r>
+              <a:rPr lang="en-US" sz="2000" dirty="0">
+                <a:solidFill>
+                  <a:srgbClr val="E6EDF3"/>
+                </a:solidFill>
+                <a:latin typeface="Calibri" pitchFamily="34" charset="0"/>
+                <a:ea typeface="Calibri" pitchFamily="34" charset="-122"/>
+                <a:cs typeface="Calibri" pitchFamily="34" charset="-120"/>
+              </a:rPr>
+              <a:t>Selective ACK where throughput limits the path</a:t>
+            </a:r>
+            <a:endParaRPr lang="en-US" sz="2000" dirty="0"/>
+          </a:p>
+          <a:p>
+            <a:pPr indent="0" marL="0">
+              <a:buNone/>
+            </a:pPr>
+            <a:r>
+              <a:rPr lang="en-US" sz="2000" dirty="0">
+                <a:solidFill>
+                  <a:srgbClr val="E6EDF3"/>
+                </a:solidFill>
+                <a:latin typeface="Calibri" pitchFamily="34" charset="0"/>
+                <a:ea typeface="Calibri" pitchFamily="34" charset="-122"/>
+                <a:cs typeface="Calibri" pitchFamily="34" charset="-120"/>
+              </a:rPr>
+              <a:t>Kernel netem and real multi-machine tests</a:t>
+            </a:r>
+            <a:endParaRPr lang="en-US" sz="2000" dirty="0"/>
+          </a:p>
+        </p:txBody>
+      </p:sp>
+      <p:sp>
+        <p:nvSpPr>
+          <p:cNvPr id="10" name="Text 8"/>
+          <p:cNvSpPr/>
+          <p:nvPr/>
+        </p:nvSpPr>
+        <p:spPr>
+          <a:xfrm>
+            <a:off x="548640" y="5852160"/>
+            <a:ext cx="10972800" cy="365760"/>
+          </a:xfrm>
+          <a:prstGeom prst="rect">
+            <a:avLst/>
+          </a:prstGeom>
+          <a:noFill/>
+          <a:ln/>
+        </p:spPr>
+        <p:txBody>
+          <a:bodyPr wrap="square" lIns="0" tIns="0" rIns="0" bIns="0" rtlCol="0" anchor="ctr"/>
+          <a:lstStyle/>
+          <a:p>
+            <a:pPr indent="0" marL="0">
+              <a:buNone/>
+            </a:pPr>
+            <a:r>
+              <a:rPr lang="en-US" sz="1400" dirty="0">
+                <a:solidFill>
+                  <a:srgbClr val="8B98A5"/>
+                </a:solidFill>
+                <a:latin typeface="Calibri" pitchFamily="34" charset="0"/>
+                <a:ea typeface="Calibri" pitchFamily="34" charset="-122"/>
+                <a:cs typeface="Calibri" pitchFamily="34" charset="-120"/>
+              </a:rPr>
+              <a:t>Limits: Go-Back-N wastes bandwidth and suffers under reordering; C tests use an emulated path; the tabular agent did not beat AIMD in C.</a:t>
+            </a:r>
+            <a:endParaRPr lang="en-US" sz="1400" dirty="0"/>
           </a:p>
         </p:txBody>
       </p:sp>
@@ -13072,6 +14690,155 @@
         </p:nvSpPr>
         <p:spPr>
           <a:xfrm>
+            <a:off x="731520" y="2103120"/>
+            <a:ext cx="10058400" cy="1097280"/>
+          </a:xfrm>
+          <a:prstGeom prst="rect">
+            <a:avLst/>
+          </a:prstGeom>
+          <a:noFill/>
+          <a:ln/>
+        </p:spPr>
+        <p:txBody>
+          <a:bodyPr wrap="square" lIns="0" tIns="0" rIns="0" bIns="0" rtlCol="0" anchor="ctr"/>
+          <a:lstStyle/>
+          <a:p>
+            <a:pPr indent="0" marL="0">
+              <a:buNone/>
+            </a:pPr>
+            <a:r>
+              <a:rPr lang="en-US" sz="6400" b="1" dirty="0">
+                <a:solidFill>
+                  <a:srgbClr val="39FF88"/>
+                </a:solidFill>
+                <a:latin typeface="Courier New" pitchFamily="34" charset="0"/>
+                <a:ea typeface="Courier New" pitchFamily="34" charset="-122"/>
+                <a:cs typeface="Courier New" pitchFamily="34" charset="-120"/>
+              </a:rPr>
+              <a:t>Thank you</a:t>
+            </a:r>
+            <a:endParaRPr lang="en-US" sz="6400" dirty="0"/>
+          </a:p>
+        </p:txBody>
+      </p:sp>
+      <p:sp>
+        <p:nvSpPr>
+          <p:cNvPr id="3" name="Text 1"/>
+          <p:cNvSpPr/>
+          <p:nvPr/>
+        </p:nvSpPr>
+        <p:spPr>
+          <a:xfrm>
+            <a:off x="731520" y="3474720"/>
+            <a:ext cx="10058400" cy="548640"/>
+          </a:xfrm>
+          <a:prstGeom prst="rect">
+            <a:avLst/>
+          </a:prstGeom>
+          <a:noFill/>
+          <a:ln/>
+        </p:spPr>
+        <p:txBody>
+          <a:bodyPr wrap="square" lIns="0" tIns="0" rIns="0" bIns="0" rtlCol="0" anchor="ctr"/>
+          <a:lstStyle/>
+          <a:p>
+            <a:pPr indent="0" marL="0">
+              <a:buNone/>
+            </a:pPr>
+            <a:r>
+              <a:rPr lang="en-US" sz="2600" dirty="0">
+                <a:solidFill>
+                  <a:srgbClr val="E6EDF3"/>
+                </a:solidFill>
+                <a:latin typeface="Courier New" pitchFamily="34" charset="0"/>
+                <a:ea typeface="Courier New" pitchFamily="34" charset="-122"/>
+                <a:cs typeface="Courier New" pitchFamily="34" charset="-120"/>
+              </a:rPr>
+              <a:t>github.com/Capsturrrr/rudp</a:t>
+            </a:r>
+            <a:endParaRPr lang="en-US" sz="2600" dirty="0"/>
+          </a:p>
+        </p:txBody>
+      </p:sp>
+      <p:sp>
+        <p:nvSpPr>
+          <p:cNvPr id="4" name="Text 2"/>
+          <p:cNvSpPr/>
+          <p:nvPr/>
+        </p:nvSpPr>
+        <p:spPr>
+          <a:xfrm>
+            <a:off x="731520" y="4206240"/>
+            <a:ext cx="10058400" cy="457200"/>
+          </a:xfrm>
+          <a:prstGeom prst="rect">
+            <a:avLst/>
+          </a:prstGeom>
+          <a:noFill/>
+          <a:ln/>
+        </p:spPr>
+        <p:txBody>
+          <a:bodyPr wrap="square" lIns="0" tIns="0" rIns="0" bIns="0" rtlCol="0" anchor="ctr"/>
+          <a:lstStyle/>
+          <a:p>
+            <a:pPr indent="0" marL="0">
+              <a:buNone/>
+            </a:pPr>
+            <a:r>
+              <a:rPr lang="en-US" sz="1800" dirty="0">
+                <a:solidFill>
+                  <a:srgbClr val="8B98A5"/>
+                </a:solidFill>
+                <a:latin typeface="Calibri" pitchFamily="34" charset="0"/>
+                <a:ea typeface="Calibri" pitchFamily="34" charset="-122"/>
+                <a:cs typeface="Calibri" pitchFamily="34" charset="-120"/>
+              </a:rPr>
+              <a:t>Harshavardhan Mallela   Rohit Arya   Shloak Sinha</a:t>
+            </a:r>
+            <a:endParaRPr lang="en-US" sz="1800" dirty="0"/>
+          </a:p>
+        </p:txBody>
+      </p:sp>
+    </p:spTree>
+  </p:cSld>
+  <p:clrMapOvr>
+    <a:masterClrMapping/>
+  </p:clrMapOvr>
+</p:sld>
+</file>
+
+<file path=ppt/slides/slide27.xml><?xml version="1.0" encoding="utf-8"?>
+<p:sld xmlns:a="http://schemas.openxmlformats.org/drawingml/2006/main" xmlns:r="http://schemas.openxmlformats.org/officeDocument/2006/relationships" xmlns:p="http://schemas.openxmlformats.org/presentationml/2006/main">
+  <p:cSld name="Slide 27">
+    <p:bg>
+      <p:bgPr>
+        <a:solidFill>
+          <a:srgbClr val="0B0F14"/>
+        </a:solidFill>
+      </p:bgPr>
+    </p:bg>
+    <p:spTree>
+      <p:nvGrpSpPr>
+        <p:cNvPr id="1" name=""/>
+        <p:cNvGrpSpPr/>
+        <p:nvPr/>
+      </p:nvGrpSpPr>
+      <p:grpSpPr>
+        <a:xfrm>
+          <a:off x="0" y="0"/>
+          <a:ext cx="0" cy="0"/>
+          <a:chOff x="0" y="0"/>
+          <a:chExt cx="0" cy="0"/>
+        </a:xfrm>
+      </p:grpSpPr>
+      <p:sp>
+        <p:nvSpPr>
+          <p:cNvPr id="2" name="Text 0"/>
+          <p:cNvSpPr/>
+          <p:nvPr/>
+        </p:nvSpPr>
+        <p:spPr>
+          <a:xfrm>
             <a:off x="548640" y="320040"/>
             <a:ext cx="11064240" cy="731520"/>
           </a:xfrm>
@@ -13376,7 +15143,7 @@
                 <a:ea typeface="Courier New" pitchFamily="34" charset="-122"/>
                 <a:cs typeface="Courier New" pitchFamily="34" charset="-120"/>
               </a:rPr>
-              <a:t>3 / 25   Smart-RUDP</a:t>
+              <a:t>3 / 26   Smart-RUDP</a:t>
             </a:r>
             <a:endParaRPr lang="en-US" sz="1000" dirty="0"/>
           </a:p>
@@ -13770,7 +15537,7 @@
                 <a:ea typeface="Courier New" pitchFamily="34" charset="-122"/>
                 <a:cs typeface="Courier New" pitchFamily="34" charset="-120"/>
               </a:rPr>
-              <a:t>4 / 25   Smart-RUDP</a:t>
+              <a:t>4 / 26   Smart-RUDP</a:t>
             </a:r>
             <a:endParaRPr lang="en-US" sz="1000" dirty="0"/>
           </a:p>
@@ -14331,7 +16098,7 @@
                 <a:ea typeface="Courier New" pitchFamily="34" charset="-122"/>
                 <a:cs typeface="Courier New" pitchFamily="34" charset="-120"/>
               </a:rPr>
-              <a:t>5 / 25   Smart-RUDP</a:t>
+              <a:t>5 / 26   Smart-RUDP</a:t>
             </a:r>
             <a:endParaRPr lang="en-US" sz="1000" dirty="0"/>
           </a:p>
@@ -15770,7 +17537,7 @@
                 <a:ea typeface="Courier New" pitchFamily="34" charset="-122"/>
                 <a:cs typeface="Courier New" pitchFamily="34" charset="-120"/>
               </a:rPr>
-              <a:t>6 / 25   Smart-RUDP</a:t>
+              <a:t>6 / 26   Smart-RUDP</a:t>
             </a:r>
             <a:endParaRPr lang="en-US" sz="1000" dirty="0"/>
           </a:p>
@@ -17005,7 +18772,7 @@
                 <a:ea typeface="Courier New" pitchFamily="34" charset="-122"/>
                 <a:cs typeface="Courier New" pitchFamily="34" charset="-120"/>
               </a:rPr>
-              <a:t>7 / 25   Smart-RUDP</a:t>
+              <a:t>7 / 26   Smart-RUDP</a:t>
             </a:r>
             <a:endParaRPr lang="en-US" sz="1000" dirty="0"/>
           </a:p>
@@ -17448,7 +19215,7 @@
                 <a:ea typeface="Courier New" pitchFamily="34" charset="-122"/>
                 <a:cs typeface="Courier New" pitchFamily="34" charset="-120"/>
               </a:rPr>
-              <a:t>8 / 25   Smart-RUDP</a:t>
+              <a:t>8 / 26   Smart-RUDP</a:t>
             </a:r>
             <a:endParaRPr lang="en-US" sz="1000" dirty="0"/>
           </a:p>
@@ -17748,7 +19515,7 @@
                 <a:ea typeface="Courier New" pitchFamily="34" charset="-122"/>
                 <a:cs typeface="Courier New" pitchFamily="34" charset="-120"/>
               </a:rPr>
-              <a:t>9 / 25   Smart-RUDP</a:t>
+              <a:t>9 / 26   Smart-RUDP</a:t>
             </a:r>
             <a:endParaRPr lang="en-US" sz="1000" dirty="0"/>
           </a:p>

--- a/docs/RUDP_Presentation.pptx
+++ b/docs/RUDP_Presentation.pptx
@@ -32,9 +32,10 @@
     <p:sldId id="280" r:id="rId26"/>
     <p:sldId id="281" r:id="rId27"/>
     <p:sldId id="282" r:id="rId28"/>
+    <p:sldId id="283" r:id="rId29"/>
   </p:sldIdLst>
   <p:notesMasterIdLst>
-    <p:notesMasterId r:id="rId29"/>
+    <p:notesMasterId r:id="rId30"/>
   </p:notesMasterIdLst>
   <p:sldSz cx="12192000" cy="6858000"/>
   <p:notesSz cx="6858000" cy="12192000"/>
@@ -2224,6 +2225,94 @@
             <a:fld id="{F7021451-1387-4CA6-816F-3879F97B5CBC}" type="slidenum">
               <a:rPr lang="en-US"/>
               <a:t>27</a:t>
+            </a:fld>
+            <a:endParaRPr lang="en-US"/>
+          </a:p>
+        </p:txBody>
+      </p:sp>
+    </p:spTree>
+    <p:extLst>
+      <p:ext uri="{BB962C8B-B14F-4D97-AF65-F5344CB8AC3E}">
+        <p14:creationId xmlns:p14="http://schemas.microsoft.com/office/powerpoint/2010/main" val="1024086991"/>
+      </p:ext>
+    </p:extLst>
+  </p:cSld>
+  <p:clrMapOvr>
+    <a:masterClrMapping/>
+  </p:clrMapOvr>
+</p:notes>
+</file>
+
+<file path=ppt/notesSlides/notesSlide28.xml><?xml version="1.0" encoding="utf-8"?>
+<p:notes xmlns:a="http://schemas.openxmlformats.org/drawingml/2006/main" xmlns:r="http://schemas.openxmlformats.org/officeDocument/2006/relationships" xmlns:p="http://schemas.openxmlformats.org/presentationml/2006/main">
+  <p:cSld>
+    <p:spTree>
+      <p:nvGrpSpPr>
+        <p:cNvPr id="1" name=""/>
+        <p:cNvGrpSpPr/>
+        <p:nvPr/>
+      </p:nvGrpSpPr>
+      <p:grpSpPr>
+        <a:xfrm>
+          <a:off x="0" y="0"/>
+          <a:ext cx="0" cy="0"/>
+          <a:chOff x="0" y="0"/>
+          <a:chExt cx="0" cy="0"/>
+        </a:xfrm>
+      </p:grpSpPr>
+      <p:sp>
+        <p:nvSpPr>
+          <p:cNvPr id="2" name="Slide Image Placeholder 1"/>
+          <p:cNvSpPr>
+            <a:spLocks noGrp="1" noRot="1" noChangeAspect="1"/>
+          </p:cNvSpPr>
+          <p:nvPr>
+            <p:ph type="sldImg"/>
+          </p:nvPr>
+        </p:nvSpPr>
+        <p:spPr/>
+      </p:sp>
+      <p:sp>
+        <p:nvSpPr>
+          <p:cNvPr id="3" name="Notes Placeholder 2"/>
+          <p:cNvSpPr>
+            <a:spLocks noGrp="1"/>
+          </p:cNvSpPr>
+          <p:nvPr>
+            <p:ph type="body" idx="1"/>
+          </p:nvPr>
+        </p:nvSpPr>
+        <p:spPr/>
+        <p:txBody>
+          <a:bodyPr/>
+          <a:lstStyle/>
+          <a:p>
+            <a:r>
+              <a:rPr lang="en-US" dirty="0"/>
+              <a:t/>
+            </a:r>
+            <a:endParaRPr lang="en-US" dirty="0"/>
+          </a:p>
+        </p:txBody>
+      </p:sp>
+      <p:sp>
+        <p:nvSpPr>
+          <p:cNvPr id="4" name="Slide Number Placeholder 3"/>
+          <p:cNvSpPr>
+            <a:spLocks noGrp="1"/>
+          </p:cNvSpPr>
+          <p:nvPr>
+            <p:ph type="sldNum" sz="quarter" idx="10"/>
+          </p:nvPr>
+        </p:nvSpPr>
+        <p:spPr/>
+        <p:txBody>
+          <a:bodyPr/>
+          <a:lstStyle/>
+          <a:p>
+            <a:fld id="{F7021451-1387-4CA6-816F-3879F97B5CBC}" type="slidenum">
+              <a:rPr lang="en-US"/>
+              <a:t>28</a:t>
             </a:fld>
             <a:endParaRPr lang="en-US"/>
           </a:p>
@@ -3449,7 +3538,7 @@
                 <a:ea typeface="Courier New" pitchFamily="34" charset="-122"/>
                 <a:cs typeface="Courier New" pitchFamily="34" charset="-120"/>
               </a:rPr>
-              <a:t>10 / 26   Smart-RUDP</a:t>
+              <a:t>10 / 27   Smart-RUDP</a:t>
             </a:r>
             <a:endParaRPr lang="en-US" sz="1000" dirty="0"/>
           </a:p>
@@ -3646,7 +3735,7 @@
                 <a:ea typeface="Courier New" pitchFamily="34" charset="-122"/>
                 <a:cs typeface="Courier New" pitchFamily="34" charset="-120"/>
               </a:rPr>
-              <a:t>11 / 26   Smart-RUDP</a:t>
+              <a:t>11 / 27   Smart-RUDP</a:t>
             </a:r>
             <a:endParaRPr lang="en-US" sz="1000" dirty="0"/>
           </a:p>
@@ -4476,7 +4565,7 @@
                 <a:ea typeface="Courier New" pitchFamily="34" charset="-122"/>
                 <a:cs typeface="Courier New" pitchFamily="34" charset="-120"/>
               </a:rPr>
-              <a:t>12 / 26   Smart-RUDP</a:t>
+              <a:t>12 / 27   Smart-RUDP</a:t>
             </a:r>
             <a:endParaRPr lang="en-US" sz="1000" dirty="0"/>
           </a:p>
@@ -4773,7 +4862,7 @@
                 <a:ea typeface="Courier New" pitchFamily="34" charset="-122"/>
                 <a:cs typeface="Courier New" pitchFamily="34" charset="-120"/>
               </a:rPr>
-              <a:t>13 / 26   Smart-RUDP</a:t>
+              <a:t>13 / 27   Smart-RUDP</a:t>
             </a:r>
             <a:endParaRPr lang="en-US" sz="1000" dirty="0"/>
           </a:p>
@@ -5073,7 +5162,7 @@
                 <a:ea typeface="Courier New" pitchFamily="34" charset="-122"/>
                 <a:cs typeface="Courier New" pitchFamily="34" charset="-120"/>
               </a:rPr>
-              <a:t>14 / 26   Smart-RUDP</a:t>
+              <a:t>14 / 27   Smart-RUDP</a:t>
             </a:r>
             <a:endParaRPr lang="en-US" sz="1000" dirty="0"/>
           </a:p>
@@ -5457,7 +5546,7 @@
                 <a:ea typeface="Courier New" pitchFamily="34" charset="-122"/>
                 <a:cs typeface="Courier New" pitchFamily="34" charset="-120"/>
               </a:rPr>
-              <a:t>15 / 26   Smart-RUDP</a:t>
+              <a:t>15 / 27   Smart-RUDP</a:t>
             </a:r>
             <a:endParaRPr lang="en-US" sz="1000" dirty="0"/>
           </a:p>
@@ -5915,7 +6004,7 @@
                 <a:ea typeface="Courier New" pitchFamily="34" charset="-122"/>
                 <a:cs typeface="Courier New" pitchFamily="34" charset="-120"/>
               </a:rPr>
-              <a:t>16 / 26   Smart-RUDP</a:t>
+              <a:t>16 / 27   Smart-RUDP</a:t>
             </a:r>
             <a:endParaRPr lang="en-US" sz="1000" dirty="0"/>
           </a:p>
@@ -6600,7 +6689,7 @@
                 <a:ea typeface="Courier New" pitchFamily="34" charset="-122"/>
                 <a:cs typeface="Courier New" pitchFamily="34" charset="-120"/>
               </a:rPr>
-              <a:t>17 / 26   Smart-RUDP</a:t>
+              <a:t>17 / 27   Smart-RUDP</a:t>
             </a:r>
             <a:endParaRPr lang="en-US" sz="1000" dirty="0"/>
           </a:p>
@@ -6840,7 +6929,7 @@
                 <a:ea typeface="Courier New" pitchFamily="34" charset="-122"/>
                 <a:cs typeface="Courier New" pitchFamily="34" charset="-120"/>
               </a:rPr>
-              <a:t>18 / 26   Smart-RUDP</a:t>
+              <a:t>18 / 27   Smart-RUDP</a:t>
             </a:r>
             <a:endParaRPr lang="en-US" sz="1000" dirty="0"/>
           </a:p>
@@ -7080,7 +7169,7 @@
                 <a:ea typeface="Courier New" pitchFamily="34" charset="-122"/>
                 <a:cs typeface="Courier New" pitchFamily="34" charset="-120"/>
               </a:rPr>
-              <a:t>19 / 26   Smart-RUDP</a:t>
+              <a:t>19 / 27   Smart-RUDP</a:t>
             </a:r>
             <a:endParaRPr lang="en-US" sz="1000" dirty="0"/>
           </a:p>
@@ -7302,7 +7391,7 @@
                 <a:ea typeface="Courier New" pitchFamily="34" charset="-122"/>
                 <a:cs typeface="Courier New" pitchFamily="34" charset="-120"/>
               </a:rPr>
-              <a:t>2 / 26   Smart-RUDP</a:t>
+              <a:t>2 / 27   Smart-RUDP</a:t>
             </a:r>
             <a:endParaRPr lang="en-US" sz="1000" dirty="0"/>
           </a:p>
@@ -7696,7 +7785,7 @@
                 <a:ea typeface="Courier New" pitchFamily="34" charset="-122"/>
                 <a:cs typeface="Courier New" pitchFamily="34" charset="-120"/>
               </a:rPr>
-              <a:t>20 / 26   Smart-RUDP</a:t>
+              <a:t>20 / 27   Smart-RUDP</a:t>
             </a:r>
             <a:endParaRPr lang="en-US" sz="1000" dirty="0"/>
           </a:p>
@@ -8020,7 +8109,7 @@
                 <a:ea typeface="Courier New" pitchFamily="34" charset="-122"/>
                 <a:cs typeface="Courier New" pitchFamily="34" charset="-120"/>
               </a:rPr>
-              <a:t>21 / 26   Smart-RUDP</a:t>
+              <a:t>21 / 27   Smart-RUDP</a:t>
             </a:r>
             <a:endParaRPr lang="en-US" sz="1000" dirty="0"/>
           </a:p>
@@ -9727,7 +9816,7 @@
                 <a:ea typeface="Courier New" pitchFamily="34" charset="-122"/>
                 <a:cs typeface="Courier New" pitchFamily="34" charset="-120"/>
               </a:rPr>
-              <a:t>22 / 26   Smart-RUDP</a:t>
+              <a:t>22 / 27   Smart-RUDP</a:t>
             </a:r>
             <a:endParaRPr lang="en-US" sz="1000" dirty="0"/>
           </a:p>
@@ -11110,7 +11199,7 @@
                 <a:ea typeface="Courier New" pitchFamily="34" charset="-122"/>
                 <a:cs typeface="Courier New" pitchFamily="34" charset="-120"/>
               </a:rPr>
-              <a:t>23 / 26   Smart-RUDP</a:t>
+              <a:t>23 / 27   Smart-RUDP</a:t>
             </a:r>
             <a:endParaRPr lang="en-US" sz="1000" dirty="0"/>
           </a:p>
@@ -12653,7 +12742,7 @@
                 <a:ea typeface="Courier New" pitchFamily="34" charset="-122"/>
                 <a:cs typeface="Courier New" pitchFamily="34" charset="-120"/>
               </a:rPr>
-              <a:t>24 / 26   Smart-RUDP</a:t>
+              <a:t>24 / 27   Smart-RUDP</a:t>
             </a:r>
             <a:endParaRPr lang="en-US" sz="1000" dirty="0"/>
           </a:p>
@@ -14292,7 +14381,7 @@
                 <a:ea typeface="Courier New" pitchFamily="34" charset="-122"/>
                 <a:cs typeface="Courier New" pitchFamily="34" charset="-120"/>
               </a:rPr>
-              <a:t>Learnings and future work</a:t>
+              <a:t>Selective Repeat is now the default</a:t>
             </a:r>
             <a:endParaRPr lang="en-US" sz="3000" dirty="0"/>
           </a:p>
@@ -14331,47 +14420,1424 @@
                 <a:ea typeface="Courier New" pitchFamily="34" charset="-122"/>
                 <a:cs typeface="Courier New" pitchFamily="34" charset="-120"/>
               </a:rPr>
-              <a:t>25 / 26   Smart-RUDP</a:t>
+              <a:t>25 / 27   Smart-RUDP</a:t>
             </a:r>
             <a:endParaRPr lang="en-US" sz="1000" dirty="0"/>
           </a:p>
         </p:txBody>
       </p:sp>
-      <p:sp>
-        <p:nvSpPr>
-          <p:cNvPr id="4" name="Shape 2"/>
+      <p:graphicFrame>
+        <p:nvGraphicFramePr>
+          <p:cNvPr id="26" name="Table 0"/>
+          <p:cNvGraphicFramePr>
+            <a:graphicFrameLocks noGrp="1"/>
+          </p:cNvGraphicFramePr>
+          <p:nvPr>
+            <p:extLst>
+              <p:ext uri="{D42A27DB-BD31-4B8C-83A1-F6EECF244321}">
+                <p14:modId xmlns:p14="http://schemas.microsoft.com/office/powerpoint/2010/main" val="1579011935"/>
+              </p:ext>
+            </p:extLst>
+          </p:nvPr>
+        </p:nvGraphicFramePr>
+        <p:xfrm>
+          <a:off x="548640" y="1188720"/>
+          <a:ext cx="6035040" cy="914400"/>
+        </p:xfrm>
+        <a:graphic>
+          <a:graphicData uri="http://schemas.openxmlformats.org/drawingml/2006/table">
+            <a:tbl>
+              <a:tblPr/>
+              <a:tblGrid>
+                <a:gridCol w="2468880"/>
+                <a:gridCol w="1188720"/>
+                <a:gridCol w="1188720"/>
+                <a:gridCol w="1188720"/>
+              </a:tblGrid>
+              <a:tr h="420624">
+                <a:tc>
+                  <a:txBody>
+                    <a:bodyPr/>
+                    <a:lstStyle/>
+                    <a:p>
+                      <a:pPr indent="0" marL="0">
+                        <a:buNone/>
+                      </a:pPr>
+                      <a:r>
+                        <a:rPr lang="en-US" sz="1300" b="1" dirty="0">
+                          <a:solidFill>
+                            <a:srgbClr val="0B0F14"/>
+                          </a:solidFill>
+                          <a:latin typeface="Courier New" pitchFamily="34" charset="0"/>
+                          <a:ea typeface="Courier New" pitchFamily="34" charset="-122"/>
+                          <a:cs typeface="Courier New" pitchFamily="34" charset="-120"/>
+                        </a:rPr>
+                        <a:t>C transport, seconds</a:t>
+                      </a:r>
+                      <a:endParaRPr lang="en-US" sz="1300" dirty="0">
+                        <a:latin typeface="Courier New" charset="0"/>
+                        <a:ea typeface="Courier New" charset="0"/>
+                        <a:cs typeface="Courier New" charset="0"/>
+                      </a:endParaRPr>
+                    </a:p>
+                  </a:txBody>
+                  <a:tcPr marL="91440" marR="91440" marT="45720" marB="45720">
+                    <a:lnL w="12700" cap="flat" cmpd="sng" algn="ctr">
+                      <a:solidFill>
+                        <a:srgbClr val="2A3441"/>
+                      </a:solidFill>
+                      <a:prstDash val="solid"/>
+                      <a:round/>
+                      <a:headEnd type="none" w="med" len="med"/>
+                      <a:tailEnd type="none" w="med" len="med"/>
+                    </a:lnL>
+                    <a:lnR w="12700" cap="flat" cmpd="sng" algn="ctr">
+                      <a:solidFill>
+                        <a:srgbClr val="2A3441"/>
+                      </a:solidFill>
+                      <a:prstDash val="solid"/>
+                      <a:round/>
+                      <a:headEnd type="none" w="med" len="med"/>
+                      <a:tailEnd type="none" w="med" len="med"/>
+                    </a:lnR>
+                    <a:lnT w="12700" cap="flat" cmpd="sng" algn="ctr">
+                      <a:solidFill>
+                        <a:srgbClr val="2A3441"/>
+                      </a:solidFill>
+                      <a:prstDash val="solid"/>
+                      <a:round/>
+                      <a:headEnd type="none" w="med" len="med"/>
+                      <a:tailEnd type="none" w="med" len="med"/>
+                    </a:lnT>
+                    <a:lnB w="12700" cap="flat" cmpd="sng" algn="ctr">
+                      <a:solidFill>
+                        <a:srgbClr val="2A3441"/>
+                      </a:solidFill>
+                      <a:prstDash val="solid"/>
+                      <a:round/>
+                      <a:headEnd type="none" w="med" len="med"/>
+                      <a:tailEnd type="none" w="med" len="med"/>
+                    </a:lnB>
+                    <a:solidFill>
+                      <a:srgbClr val="39FF88"/>
+                    </a:solidFill>
+                  </a:tcPr>
+                </a:tc>
+                <a:tc>
+                  <a:txBody>
+                    <a:bodyPr/>
+                    <a:lstStyle/>
+                    <a:p>
+                      <a:pPr indent="0" marL="0">
+                        <a:buNone/>
+                      </a:pPr>
+                      <a:r>
+                        <a:rPr lang="en-US" sz="1300" b="1" dirty="0">
+                          <a:solidFill>
+                            <a:srgbClr val="0B0F14"/>
+                          </a:solidFill>
+                          <a:latin typeface="Courier New" pitchFamily="34" charset="0"/>
+                          <a:ea typeface="Courier New" pitchFamily="34" charset="-122"/>
+                          <a:cs typeface="Courier New" pitchFamily="34" charset="-120"/>
+                        </a:rPr>
+                        <a:t>AIMD 32</a:t>
+                      </a:r>
+                      <a:endParaRPr lang="en-US" sz="1300" dirty="0">
+                        <a:latin typeface="Courier New" charset="0"/>
+                        <a:ea typeface="Courier New" charset="0"/>
+                        <a:cs typeface="Courier New" charset="0"/>
+                      </a:endParaRPr>
+                    </a:p>
+                  </a:txBody>
+                  <a:tcPr marL="91440" marR="91440" marT="45720" marB="45720">
+                    <a:lnL w="12700" cap="flat" cmpd="sng" algn="ctr">
+                      <a:solidFill>
+                        <a:srgbClr val="2A3441"/>
+                      </a:solidFill>
+                      <a:prstDash val="solid"/>
+                      <a:round/>
+                      <a:headEnd type="none" w="med" len="med"/>
+                      <a:tailEnd type="none" w="med" len="med"/>
+                    </a:lnL>
+                    <a:lnR w="12700" cap="flat" cmpd="sng" algn="ctr">
+                      <a:solidFill>
+                        <a:srgbClr val="2A3441"/>
+                      </a:solidFill>
+                      <a:prstDash val="solid"/>
+                      <a:round/>
+                      <a:headEnd type="none" w="med" len="med"/>
+                      <a:tailEnd type="none" w="med" len="med"/>
+                    </a:lnR>
+                    <a:lnT w="12700" cap="flat" cmpd="sng" algn="ctr">
+                      <a:solidFill>
+                        <a:srgbClr val="2A3441"/>
+                      </a:solidFill>
+                      <a:prstDash val="solid"/>
+                      <a:round/>
+                      <a:headEnd type="none" w="med" len="med"/>
+                      <a:tailEnd type="none" w="med" len="med"/>
+                    </a:lnT>
+                    <a:lnB w="12700" cap="flat" cmpd="sng" algn="ctr">
+                      <a:solidFill>
+                        <a:srgbClr val="2A3441"/>
+                      </a:solidFill>
+                      <a:prstDash val="solid"/>
+                      <a:round/>
+                      <a:headEnd type="none" w="med" len="med"/>
+                      <a:tailEnd type="none" w="med" len="med"/>
+                    </a:lnB>
+                    <a:solidFill>
+                      <a:srgbClr val="39FF88"/>
+                    </a:solidFill>
+                  </a:tcPr>
+                </a:tc>
+                <a:tc>
+                  <a:txBody>
+                    <a:bodyPr/>
+                    <a:lstStyle/>
+                    <a:p>
+                      <a:pPr indent="0" marL="0">
+                        <a:buNone/>
+                      </a:pPr>
+                      <a:r>
+                        <a:rPr lang="en-US" sz="1300" b="1" dirty="0">
+                          <a:solidFill>
+                            <a:srgbClr val="0B0F14"/>
+                          </a:solidFill>
+                          <a:latin typeface="Courier New" pitchFamily="34" charset="0"/>
+                          <a:ea typeface="Courier New" pitchFamily="34" charset="-122"/>
+                          <a:cs typeface="Courier New" pitchFamily="34" charset="-120"/>
+                        </a:rPr>
+                        <a:t>Neural</a:t>
+                      </a:r>
+                      <a:endParaRPr lang="en-US" sz="1300" dirty="0">
+                        <a:latin typeface="Courier New" charset="0"/>
+                        <a:ea typeface="Courier New" charset="0"/>
+                        <a:cs typeface="Courier New" charset="0"/>
+                      </a:endParaRPr>
+                    </a:p>
+                  </a:txBody>
+                  <a:tcPr marL="91440" marR="91440" marT="45720" marB="45720">
+                    <a:lnL w="12700" cap="flat" cmpd="sng" algn="ctr">
+                      <a:solidFill>
+                        <a:srgbClr val="2A3441"/>
+                      </a:solidFill>
+                      <a:prstDash val="solid"/>
+                      <a:round/>
+                      <a:headEnd type="none" w="med" len="med"/>
+                      <a:tailEnd type="none" w="med" len="med"/>
+                    </a:lnL>
+                    <a:lnR w="12700" cap="flat" cmpd="sng" algn="ctr">
+                      <a:solidFill>
+                        <a:srgbClr val="2A3441"/>
+                      </a:solidFill>
+                      <a:prstDash val="solid"/>
+                      <a:round/>
+                      <a:headEnd type="none" w="med" len="med"/>
+                      <a:tailEnd type="none" w="med" len="med"/>
+                    </a:lnR>
+                    <a:lnT w="12700" cap="flat" cmpd="sng" algn="ctr">
+                      <a:solidFill>
+                        <a:srgbClr val="2A3441"/>
+                      </a:solidFill>
+                      <a:prstDash val="solid"/>
+                      <a:round/>
+                      <a:headEnd type="none" w="med" len="med"/>
+                      <a:tailEnd type="none" w="med" len="med"/>
+                    </a:lnT>
+                    <a:lnB w="12700" cap="flat" cmpd="sng" algn="ctr">
+                      <a:solidFill>
+                        <a:srgbClr val="2A3441"/>
+                      </a:solidFill>
+                      <a:prstDash val="solid"/>
+                      <a:round/>
+                      <a:headEnd type="none" w="med" len="med"/>
+                      <a:tailEnd type="none" w="med" len="med"/>
+                    </a:lnB>
+                    <a:solidFill>
+                      <a:srgbClr val="39FF88"/>
+                    </a:solidFill>
+                  </a:tcPr>
+                </a:tc>
+                <a:tc>
+                  <a:txBody>
+                    <a:bodyPr/>
+                    <a:lstStyle/>
+                    <a:p>
+                      <a:pPr indent="0" marL="0">
+                        <a:buNone/>
+                      </a:pPr>
+                      <a:r>
+                        <a:rPr lang="en-US" sz="1300" b="1" dirty="0">
+                          <a:solidFill>
+                            <a:srgbClr val="0B0F14"/>
+                          </a:solidFill>
+                          <a:latin typeface="Courier New" pitchFamily="34" charset="0"/>
+                          <a:ea typeface="Courier New" pitchFamily="34" charset="-122"/>
+                          <a:cs typeface="Courier New" pitchFamily="34" charset="-120"/>
+                        </a:rPr>
+                        <a:t>Gain</a:t>
+                      </a:r>
+                      <a:endParaRPr lang="en-US" sz="1300" dirty="0">
+                        <a:latin typeface="Courier New" charset="0"/>
+                        <a:ea typeface="Courier New" charset="0"/>
+                        <a:cs typeface="Courier New" charset="0"/>
+                      </a:endParaRPr>
+                    </a:p>
+                  </a:txBody>
+                  <a:tcPr marL="91440" marR="91440" marT="45720" marB="45720">
+                    <a:lnL w="12700" cap="flat" cmpd="sng" algn="ctr">
+                      <a:solidFill>
+                        <a:srgbClr val="2A3441"/>
+                      </a:solidFill>
+                      <a:prstDash val="solid"/>
+                      <a:round/>
+                      <a:headEnd type="none" w="med" len="med"/>
+                      <a:tailEnd type="none" w="med" len="med"/>
+                    </a:lnL>
+                    <a:lnR w="12700" cap="flat" cmpd="sng" algn="ctr">
+                      <a:solidFill>
+                        <a:srgbClr val="2A3441"/>
+                      </a:solidFill>
+                      <a:prstDash val="solid"/>
+                      <a:round/>
+                      <a:headEnd type="none" w="med" len="med"/>
+                      <a:tailEnd type="none" w="med" len="med"/>
+                    </a:lnR>
+                    <a:lnT w="12700" cap="flat" cmpd="sng" algn="ctr">
+                      <a:solidFill>
+                        <a:srgbClr val="2A3441"/>
+                      </a:solidFill>
+                      <a:prstDash val="solid"/>
+                      <a:round/>
+                      <a:headEnd type="none" w="med" len="med"/>
+                      <a:tailEnd type="none" w="med" len="med"/>
+                    </a:lnT>
+                    <a:lnB w="12700" cap="flat" cmpd="sng" algn="ctr">
+                      <a:solidFill>
+                        <a:srgbClr val="2A3441"/>
+                      </a:solidFill>
+                      <a:prstDash val="solid"/>
+                      <a:round/>
+                      <a:headEnd type="none" w="med" len="med"/>
+                      <a:tailEnd type="none" w="med" len="med"/>
+                    </a:lnB>
+                    <a:solidFill>
+                      <a:srgbClr val="39FF88"/>
+                    </a:solidFill>
+                  </a:tcPr>
+                </a:tc>
+              </a:tr>
+              <a:tr h="420624">
+                <a:tc>
+                  <a:txBody>
+                    <a:bodyPr/>
+                    <a:lstStyle/>
+                    <a:p>
+                      <a:pPr indent="0" marL="0">
+                        <a:buNone/>
+                      </a:pPr>
+                      <a:r>
+                        <a:rPr lang="en-US" sz="1300" dirty="0">
+                          <a:solidFill>
+                            <a:srgbClr val="E6EDF3"/>
+                          </a:solidFill>
+                          <a:latin typeface="Calibri" pitchFamily="34" charset="0"/>
+                          <a:ea typeface="Calibri" pitchFamily="34" charset="-122"/>
+                          <a:cs typeface="Calibri" pitchFamily="34" charset="-120"/>
+                        </a:rPr>
+                        <a:t>5G-like</a:t>
+                      </a:r>
+                      <a:endParaRPr lang="en-US" sz="1300" dirty="0">
+                        <a:latin typeface="Calibri" charset="0"/>
+                        <a:ea typeface="Calibri" charset="0"/>
+                        <a:cs typeface="Calibri" charset="0"/>
+                      </a:endParaRPr>
+                    </a:p>
+                  </a:txBody>
+                  <a:tcPr marL="91440" marR="91440" marT="45720" marB="45720">
+                    <a:lnL w="12700" cap="flat" cmpd="sng" algn="ctr">
+                      <a:solidFill>
+                        <a:srgbClr val="2A3441"/>
+                      </a:solidFill>
+                      <a:prstDash val="solid"/>
+                      <a:round/>
+                      <a:headEnd type="none" w="med" len="med"/>
+                      <a:tailEnd type="none" w="med" len="med"/>
+                    </a:lnL>
+                    <a:lnR w="12700" cap="flat" cmpd="sng" algn="ctr">
+                      <a:solidFill>
+                        <a:srgbClr val="2A3441"/>
+                      </a:solidFill>
+                      <a:prstDash val="solid"/>
+                      <a:round/>
+                      <a:headEnd type="none" w="med" len="med"/>
+                      <a:tailEnd type="none" w="med" len="med"/>
+                    </a:lnR>
+                    <a:lnT w="12700" cap="flat" cmpd="sng" algn="ctr">
+                      <a:solidFill>
+                        <a:srgbClr val="2A3441"/>
+                      </a:solidFill>
+                      <a:prstDash val="solid"/>
+                      <a:round/>
+                      <a:headEnd type="none" w="med" len="med"/>
+                      <a:tailEnd type="none" w="med" len="med"/>
+                    </a:lnT>
+                    <a:lnB w="12700" cap="flat" cmpd="sng" algn="ctr">
+                      <a:solidFill>
+                        <a:srgbClr val="2A3441"/>
+                      </a:solidFill>
+                      <a:prstDash val="solid"/>
+                      <a:round/>
+                      <a:headEnd type="none" w="med" len="med"/>
+                      <a:tailEnd type="none" w="med" len="med"/>
+                    </a:lnB>
+                    <a:solidFill>
+                      <a:srgbClr val="141B24"/>
+                    </a:solidFill>
+                  </a:tcPr>
+                </a:tc>
+                <a:tc>
+                  <a:txBody>
+                    <a:bodyPr/>
+                    <a:lstStyle/>
+                    <a:p>
+                      <a:pPr indent="0" marL="0">
+                        <a:buNone/>
+                      </a:pPr>
+                      <a:r>
+                        <a:rPr lang="en-US" sz="1300" dirty="0">
+                          <a:solidFill>
+                            <a:srgbClr val="E6EDF3"/>
+                          </a:solidFill>
+                          <a:latin typeface="Calibri" pitchFamily="34" charset="0"/>
+                          <a:ea typeface="Calibri" pitchFamily="34" charset="-122"/>
+                          <a:cs typeface="Calibri" pitchFamily="34" charset="-120"/>
+                        </a:rPr>
+                        <a:t>1.27</a:t>
+                      </a:r>
+                      <a:endParaRPr lang="en-US" sz="1300" dirty="0">
+                        <a:latin typeface="Calibri" charset="0"/>
+                        <a:ea typeface="Calibri" charset="0"/>
+                        <a:cs typeface="Calibri" charset="0"/>
+                      </a:endParaRPr>
+                    </a:p>
+                  </a:txBody>
+                  <a:tcPr marL="91440" marR="91440" marT="45720" marB="45720">
+                    <a:lnL w="12700" cap="flat" cmpd="sng" algn="ctr">
+                      <a:solidFill>
+                        <a:srgbClr val="2A3441"/>
+                      </a:solidFill>
+                      <a:prstDash val="solid"/>
+                      <a:round/>
+                      <a:headEnd type="none" w="med" len="med"/>
+                      <a:tailEnd type="none" w="med" len="med"/>
+                    </a:lnL>
+                    <a:lnR w="12700" cap="flat" cmpd="sng" algn="ctr">
+                      <a:solidFill>
+                        <a:srgbClr val="2A3441"/>
+                      </a:solidFill>
+                      <a:prstDash val="solid"/>
+                      <a:round/>
+                      <a:headEnd type="none" w="med" len="med"/>
+                      <a:tailEnd type="none" w="med" len="med"/>
+                    </a:lnR>
+                    <a:lnT w="12700" cap="flat" cmpd="sng" algn="ctr">
+                      <a:solidFill>
+                        <a:srgbClr val="2A3441"/>
+                      </a:solidFill>
+                      <a:prstDash val="solid"/>
+                      <a:round/>
+                      <a:headEnd type="none" w="med" len="med"/>
+                      <a:tailEnd type="none" w="med" len="med"/>
+                    </a:lnT>
+                    <a:lnB w="12700" cap="flat" cmpd="sng" algn="ctr">
+                      <a:solidFill>
+                        <a:srgbClr val="2A3441"/>
+                      </a:solidFill>
+                      <a:prstDash val="solid"/>
+                      <a:round/>
+                      <a:headEnd type="none" w="med" len="med"/>
+                      <a:tailEnd type="none" w="med" len="med"/>
+                    </a:lnB>
+                    <a:solidFill>
+                      <a:srgbClr val="141B24"/>
+                    </a:solidFill>
+                  </a:tcPr>
+                </a:tc>
+                <a:tc>
+                  <a:txBody>
+                    <a:bodyPr/>
+                    <a:lstStyle/>
+                    <a:p>
+                      <a:pPr indent="0" marL="0">
+                        <a:buNone/>
+                      </a:pPr>
+                      <a:r>
+                        <a:rPr lang="en-US" sz="1300" dirty="0">
+                          <a:solidFill>
+                            <a:srgbClr val="E6EDF3"/>
+                          </a:solidFill>
+                          <a:latin typeface="Calibri" pitchFamily="34" charset="0"/>
+                          <a:ea typeface="Calibri" pitchFamily="34" charset="-122"/>
+                          <a:cs typeface="Calibri" pitchFamily="34" charset="-120"/>
+                        </a:rPr>
+                        <a:t>1.16</a:t>
+                      </a:r>
+                      <a:endParaRPr lang="en-US" sz="1300" dirty="0">
+                        <a:latin typeface="Calibri" charset="0"/>
+                        <a:ea typeface="Calibri" charset="0"/>
+                        <a:cs typeface="Calibri" charset="0"/>
+                      </a:endParaRPr>
+                    </a:p>
+                  </a:txBody>
+                  <a:tcPr marL="91440" marR="91440" marT="45720" marB="45720">
+                    <a:lnL w="12700" cap="flat" cmpd="sng" algn="ctr">
+                      <a:solidFill>
+                        <a:srgbClr val="2A3441"/>
+                      </a:solidFill>
+                      <a:prstDash val="solid"/>
+                      <a:round/>
+                      <a:headEnd type="none" w="med" len="med"/>
+                      <a:tailEnd type="none" w="med" len="med"/>
+                    </a:lnL>
+                    <a:lnR w="12700" cap="flat" cmpd="sng" algn="ctr">
+                      <a:solidFill>
+                        <a:srgbClr val="2A3441"/>
+                      </a:solidFill>
+                      <a:prstDash val="solid"/>
+                      <a:round/>
+                      <a:headEnd type="none" w="med" len="med"/>
+                      <a:tailEnd type="none" w="med" len="med"/>
+                    </a:lnR>
+                    <a:lnT w="12700" cap="flat" cmpd="sng" algn="ctr">
+                      <a:solidFill>
+                        <a:srgbClr val="2A3441"/>
+                      </a:solidFill>
+                      <a:prstDash val="solid"/>
+                      <a:round/>
+                      <a:headEnd type="none" w="med" len="med"/>
+                      <a:tailEnd type="none" w="med" len="med"/>
+                    </a:lnT>
+                    <a:lnB w="12700" cap="flat" cmpd="sng" algn="ctr">
+                      <a:solidFill>
+                        <a:srgbClr val="2A3441"/>
+                      </a:solidFill>
+                      <a:prstDash val="solid"/>
+                      <a:round/>
+                      <a:headEnd type="none" w="med" len="med"/>
+                      <a:tailEnd type="none" w="med" len="med"/>
+                    </a:lnB>
+                    <a:solidFill>
+                      <a:srgbClr val="141B24"/>
+                    </a:solidFill>
+                  </a:tcPr>
+                </a:tc>
+                <a:tc>
+                  <a:txBody>
+                    <a:bodyPr/>
+                    <a:lstStyle/>
+                    <a:p>
+                      <a:pPr indent="0" marL="0">
+                        <a:buNone/>
+                      </a:pPr>
+                      <a:r>
+                        <a:rPr lang="en-US" sz="1300" dirty="0">
+                          <a:solidFill>
+                            <a:srgbClr val="E6EDF3"/>
+                          </a:solidFill>
+                          <a:latin typeface="Calibri" pitchFamily="34" charset="0"/>
+                          <a:ea typeface="Calibri" pitchFamily="34" charset="-122"/>
+                          <a:cs typeface="Calibri" pitchFamily="34" charset="-120"/>
+                        </a:rPr>
+                        <a:t>9%</a:t>
+                      </a:r>
+                      <a:endParaRPr lang="en-US" sz="1300" dirty="0">
+                        <a:latin typeface="Calibri" charset="0"/>
+                        <a:ea typeface="Calibri" charset="0"/>
+                        <a:cs typeface="Calibri" charset="0"/>
+                      </a:endParaRPr>
+                    </a:p>
+                  </a:txBody>
+                  <a:tcPr marL="91440" marR="91440" marT="45720" marB="45720">
+                    <a:lnL w="12700" cap="flat" cmpd="sng" algn="ctr">
+                      <a:solidFill>
+                        <a:srgbClr val="2A3441"/>
+                      </a:solidFill>
+                      <a:prstDash val="solid"/>
+                      <a:round/>
+                      <a:headEnd type="none" w="med" len="med"/>
+                      <a:tailEnd type="none" w="med" len="med"/>
+                    </a:lnL>
+                    <a:lnR w="12700" cap="flat" cmpd="sng" algn="ctr">
+                      <a:solidFill>
+                        <a:srgbClr val="2A3441"/>
+                      </a:solidFill>
+                      <a:prstDash val="solid"/>
+                      <a:round/>
+                      <a:headEnd type="none" w="med" len="med"/>
+                      <a:tailEnd type="none" w="med" len="med"/>
+                    </a:lnR>
+                    <a:lnT w="12700" cap="flat" cmpd="sng" algn="ctr">
+                      <a:solidFill>
+                        <a:srgbClr val="2A3441"/>
+                      </a:solidFill>
+                      <a:prstDash val="solid"/>
+                      <a:round/>
+                      <a:headEnd type="none" w="med" len="med"/>
+                      <a:tailEnd type="none" w="med" len="med"/>
+                    </a:lnT>
+                    <a:lnB w="12700" cap="flat" cmpd="sng" algn="ctr">
+                      <a:solidFill>
+                        <a:srgbClr val="2A3441"/>
+                      </a:solidFill>
+                      <a:prstDash val="solid"/>
+                      <a:round/>
+                      <a:headEnd type="none" w="med" len="med"/>
+                      <a:tailEnd type="none" w="med" len="med"/>
+                    </a:lnB>
+                    <a:solidFill>
+                      <a:srgbClr val="141B24"/>
+                    </a:solidFill>
+                  </a:tcPr>
+                </a:tc>
+              </a:tr>
+              <a:tr h="420624">
+                <a:tc>
+                  <a:txBody>
+                    <a:bodyPr/>
+                    <a:lstStyle/>
+                    <a:p>
+                      <a:pPr indent="0" marL="0">
+                        <a:buNone/>
+                      </a:pPr>
+                      <a:r>
+                        <a:rPr lang="en-US" sz="1300" dirty="0">
+                          <a:solidFill>
+                            <a:srgbClr val="E6EDF3"/>
+                          </a:solidFill>
+                          <a:latin typeface="Calibri" pitchFamily="34" charset="0"/>
+                          <a:ea typeface="Calibri" pitchFamily="34" charset="-122"/>
+                          <a:cs typeface="Calibri" pitchFamily="34" charset="-120"/>
+                        </a:rPr>
+                        <a:t>Lossy 2%</a:t>
+                      </a:r>
+                      <a:endParaRPr lang="en-US" sz="1300" dirty="0">
+                        <a:latin typeface="Calibri" charset="0"/>
+                        <a:ea typeface="Calibri" charset="0"/>
+                        <a:cs typeface="Calibri" charset="0"/>
+                      </a:endParaRPr>
+                    </a:p>
+                  </a:txBody>
+                  <a:tcPr marL="91440" marR="91440" marT="45720" marB="45720">
+                    <a:lnL w="12700" cap="flat" cmpd="sng" algn="ctr">
+                      <a:solidFill>
+                        <a:srgbClr val="2A3441"/>
+                      </a:solidFill>
+                      <a:prstDash val="solid"/>
+                      <a:round/>
+                      <a:headEnd type="none" w="med" len="med"/>
+                      <a:tailEnd type="none" w="med" len="med"/>
+                    </a:lnL>
+                    <a:lnR w="12700" cap="flat" cmpd="sng" algn="ctr">
+                      <a:solidFill>
+                        <a:srgbClr val="2A3441"/>
+                      </a:solidFill>
+                      <a:prstDash val="solid"/>
+                      <a:round/>
+                      <a:headEnd type="none" w="med" len="med"/>
+                      <a:tailEnd type="none" w="med" len="med"/>
+                    </a:lnR>
+                    <a:lnT w="12700" cap="flat" cmpd="sng" algn="ctr">
+                      <a:solidFill>
+                        <a:srgbClr val="2A3441"/>
+                      </a:solidFill>
+                      <a:prstDash val="solid"/>
+                      <a:round/>
+                      <a:headEnd type="none" w="med" len="med"/>
+                      <a:tailEnd type="none" w="med" len="med"/>
+                    </a:lnT>
+                    <a:lnB w="12700" cap="flat" cmpd="sng" algn="ctr">
+                      <a:solidFill>
+                        <a:srgbClr val="2A3441"/>
+                      </a:solidFill>
+                      <a:prstDash val="solid"/>
+                      <a:round/>
+                      <a:headEnd type="none" w="med" len="med"/>
+                      <a:tailEnd type="none" w="med" len="med"/>
+                    </a:lnB>
+                    <a:solidFill>
+                      <a:srgbClr val="141B24"/>
+                    </a:solidFill>
+                  </a:tcPr>
+                </a:tc>
+                <a:tc>
+                  <a:txBody>
+                    <a:bodyPr/>
+                    <a:lstStyle/>
+                    <a:p>
+                      <a:pPr indent="0" marL="0">
+                        <a:buNone/>
+                      </a:pPr>
+                      <a:r>
+                        <a:rPr lang="en-US" sz="1300" dirty="0">
+                          <a:solidFill>
+                            <a:srgbClr val="E6EDF3"/>
+                          </a:solidFill>
+                          <a:latin typeface="Calibri" pitchFamily="34" charset="0"/>
+                          <a:ea typeface="Calibri" pitchFamily="34" charset="-122"/>
+                          <a:cs typeface="Calibri" pitchFamily="34" charset="-120"/>
+                        </a:rPr>
+                        <a:t>7.99</a:t>
+                      </a:r>
+                      <a:endParaRPr lang="en-US" sz="1300" dirty="0">
+                        <a:latin typeface="Calibri" charset="0"/>
+                        <a:ea typeface="Calibri" charset="0"/>
+                        <a:cs typeface="Calibri" charset="0"/>
+                      </a:endParaRPr>
+                    </a:p>
+                  </a:txBody>
+                  <a:tcPr marL="91440" marR="91440" marT="45720" marB="45720">
+                    <a:lnL w="12700" cap="flat" cmpd="sng" algn="ctr">
+                      <a:solidFill>
+                        <a:srgbClr val="2A3441"/>
+                      </a:solidFill>
+                      <a:prstDash val="solid"/>
+                      <a:round/>
+                      <a:headEnd type="none" w="med" len="med"/>
+                      <a:tailEnd type="none" w="med" len="med"/>
+                    </a:lnL>
+                    <a:lnR w="12700" cap="flat" cmpd="sng" algn="ctr">
+                      <a:solidFill>
+                        <a:srgbClr val="2A3441"/>
+                      </a:solidFill>
+                      <a:prstDash val="solid"/>
+                      <a:round/>
+                      <a:headEnd type="none" w="med" len="med"/>
+                      <a:tailEnd type="none" w="med" len="med"/>
+                    </a:lnR>
+                    <a:lnT w="12700" cap="flat" cmpd="sng" algn="ctr">
+                      <a:solidFill>
+                        <a:srgbClr val="2A3441"/>
+                      </a:solidFill>
+                      <a:prstDash val="solid"/>
+                      <a:round/>
+                      <a:headEnd type="none" w="med" len="med"/>
+                      <a:tailEnd type="none" w="med" len="med"/>
+                    </a:lnT>
+                    <a:lnB w="12700" cap="flat" cmpd="sng" algn="ctr">
+                      <a:solidFill>
+                        <a:srgbClr val="2A3441"/>
+                      </a:solidFill>
+                      <a:prstDash val="solid"/>
+                      <a:round/>
+                      <a:headEnd type="none" w="med" len="med"/>
+                      <a:tailEnd type="none" w="med" len="med"/>
+                    </a:lnB>
+                    <a:solidFill>
+                      <a:srgbClr val="141B24"/>
+                    </a:solidFill>
+                  </a:tcPr>
+                </a:tc>
+                <a:tc>
+                  <a:txBody>
+                    <a:bodyPr/>
+                    <a:lstStyle/>
+                    <a:p>
+                      <a:pPr indent="0" marL="0">
+                        <a:buNone/>
+                      </a:pPr>
+                      <a:r>
+                        <a:rPr lang="en-US" sz="1300" dirty="0">
+                          <a:solidFill>
+                            <a:srgbClr val="E6EDF3"/>
+                          </a:solidFill>
+                          <a:latin typeface="Calibri" pitchFamily="34" charset="0"/>
+                          <a:ea typeface="Calibri" pitchFamily="34" charset="-122"/>
+                          <a:cs typeface="Calibri" pitchFamily="34" charset="-120"/>
+                        </a:rPr>
+                        <a:t>4.29</a:t>
+                      </a:r>
+                      <a:endParaRPr lang="en-US" sz="1300" dirty="0">
+                        <a:latin typeface="Calibri" charset="0"/>
+                        <a:ea typeface="Calibri" charset="0"/>
+                        <a:cs typeface="Calibri" charset="0"/>
+                      </a:endParaRPr>
+                    </a:p>
+                  </a:txBody>
+                  <a:tcPr marL="91440" marR="91440" marT="45720" marB="45720">
+                    <a:lnL w="12700" cap="flat" cmpd="sng" algn="ctr">
+                      <a:solidFill>
+                        <a:srgbClr val="2A3441"/>
+                      </a:solidFill>
+                      <a:prstDash val="solid"/>
+                      <a:round/>
+                      <a:headEnd type="none" w="med" len="med"/>
+                      <a:tailEnd type="none" w="med" len="med"/>
+                    </a:lnL>
+                    <a:lnR w="12700" cap="flat" cmpd="sng" algn="ctr">
+                      <a:solidFill>
+                        <a:srgbClr val="2A3441"/>
+                      </a:solidFill>
+                      <a:prstDash val="solid"/>
+                      <a:round/>
+                      <a:headEnd type="none" w="med" len="med"/>
+                      <a:tailEnd type="none" w="med" len="med"/>
+                    </a:lnR>
+                    <a:lnT w="12700" cap="flat" cmpd="sng" algn="ctr">
+                      <a:solidFill>
+                        <a:srgbClr val="2A3441"/>
+                      </a:solidFill>
+                      <a:prstDash val="solid"/>
+                      <a:round/>
+                      <a:headEnd type="none" w="med" len="med"/>
+                      <a:tailEnd type="none" w="med" len="med"/>
+                    </a:lnT>
+                    <a:lnB w="12700" cap="flat" cmpd="sng" algn="ctr">
+                      <a:solidFill>
+                        <a:srgbClr val="2A3441"/>
+                      </a:solidFill>
+                      <a:prstDash val="solid"/>
+                      <a:round/>
+                      <a:headEnd type="none" w="med" len="med"/>
+                      <a:tailEnd type="none" w="med" len="med"/>
+                    </a:lnB>
+                    <a:solidFill>
+                      <a:srgbClr val="141B24"/>
+                    </a:solidFill>
+                  </a:tcPr>
+                </a:tc>
+                <a:tc>
+                  <a:txBody>
+                    <a:bodyPr/>
+                    <a:lstStyle/>
+                    <a:p>
+                      <a:pPr indent="0" marL="0">
+                        <a:buNone/>
+                      </a:pPr>
+                      <a:r>
+                        <a:rPr lang="en-US" sz="1300" dirty="0">
+                          <a:solidFill>
+                            <a:srgbClr val="E6EDF3"/>
+                          </a:solidFill>
+                          <a:latin typeface="Calibri" pitchFamily="34" charset="0"/>
+                          <a:ea typeface="Calibri" pitchFamily="34" charset="-122"/>
+                          <a:cs typeface="Calibri" pitchFamily="34" charset="-120"/>
+                        </a:rPr>
+                        <a:t>46%</a:t>
+                      </a:r>
+                      <a:endParaRPr lang="en-US" sz="1300" dirty="0">
+                        <a:latin typeface="Calibri" charset="0"/>
+                        <a:ea typeface="Calibri" charset="0"/>
+                        <a:cs typeface="Calibri" charset="0"/>
+                      </a:endParaRPr>
+                    </a:p>
+                  </a:txBody>
+                  <a:tcPr marL="91440" marR="91440" marT="45720" marB="45720">
+                    <a:lnL w="12700" cap="flat" cmpd="sng" algn="ctr">
+                      <a:solidFill>
+                        <a:srgbClr val="2A3441"/>
+                      </a:solidFill>
+                      <a:prstDash val="solid"/>
+                      <a:round/>
+                      <a:headEnd type="none" w="med" len="med"/>
+                      <a:tailEnd type="none" w="med" len="med"/>
+                    </a:lnL>
+                    <a:lnR w="12700" cap="flat" cmpd="sng" algn="ctr">
+                      <a:solidFill>
+                        <a:srgbClr val="2A3441"/>
+                      </a:solidFill>
+                      <a:prstDash val="solid"/>
+                      <a:round/>
+                      <a:headEnd type="none" w="med" len="med"/>
+                      <a:tailEnd type="none" w="med" len="med"/>
+                    </a:lnR>
+                    <a:lnT w="12700" cap="flat" cmpd="sng" algn="ctr">
+                      <a:solidFill>
+                        <a:srgbClr val="2A3441"/>
+                      </a:solidFill>
+                      <a:prstDash val="solid"/>
+                      <a:round/>
+                      <a:headEnd type="none" w="med" len="med"/>
+                      <a:tailEnd type="none" w="med" len="med"/>
+                    </a:lnT>
+                    <a:lnB w="12700" cap="flat" cmpd="sng" algn="ctr">
+                      <a:solidFill>
+                        <a:srgbClr val="2A3441"/>
+                      </a:solidFill>
+                      <a:prstDash val="solid"/>
+                      <a:round/>
+                      <a:headEnd type="none" w="med" len="med"/>
+                      <a:tailEnd type="none" w="med" len="med"/>
+                    </a:lnB>
+                    <a:solidFill>
+                      <a:srgbClr val="141B24"/>
+                    </a:solidFill>
+                  </a:tcPr>
+                </a:tc>
+              </a:tr>
+              <a:tr h="420624">
+                <a:tc>
+                  <a:txBody>
+                    <a:bodyPr/>
+                    <a:lstStyle/>
+                    <a:p>
+                      <a:pPr indent="0" marL="0">
+                        <a:buNone/>
+                      </a:pPr>
+                      <a:r>
+                        <a:rPr lang="en-US" sz="1300" dirty="0">
+                          <a:solidFill>
+                            <a:srgbClr val="E6EDF3"/>
+                          </a:solidFill>
+                          <a:latin typeface="Calibri" pitchFamily="34" charset="0"/>
+                          <a:ea typeface="Calibri" pitchFamily="34" charset="-122"/>
+                          <a:cs typeface="Calibri" pitchFamily="34" charset="-120"/>
+                        </a:rPr>
+                        <a:t>Satellite-like</a:t>
+                      </a:r>
+                      <a:endParaRPr lang="en-US" sz="1300" dirty="0">
+                        <a:latin typeface="Calibri" charset="0"/>
+                        <a:ea typeface="Calibri" charset="0"/>
+                        <a:cs typeface="Calibri" charset="0"/>
+                      </a:endParaRPr>
+                    </a:p>
+                  </a:txBody>
+                  <a:tcPr marL="91440" marR="91440" marT="45720" marB="45720">
+                    <a:lnL w="12700" cap="flat" cmpd="sng" algn="ctr">
+                      <a:solidFill>
+                        <a:srgbClr val="2A3441"/>
+                      </a:solidFill>
+                      <a:prstDash val="solid"/>
+                      <a:round/>
+                      <a:headEnd type="none" w="med" len="med"/>
+                      <a:tailEnd type="none" w="med" len="med"/>
+                    </a:lnL>
+                    <a:lnR w="12700" cap="flat" cmpd="sng" algn="ctr">
+                      <a:solidFill>
+                        <a:srgbClr val="2A3441"/>
+                      </a:solidFill>
+                      <a:prstDash val="solid"/>
+                      <a:round/>
+                      <a:headEnd type="none" w="med" len="med"/>
+                      <a:tailEnd type="none" w="med" len="med"/>
+                    </a:lnR>
+                    <a:lnT w="12700" cap="flat" cmpd="sng" algn="ctr">
+                      <a:solidFill>
+                        <a:srgbClr val="2A3441"/>
+                      </a:solidFill>
+                      <a:prstDash val="solid"/>
+                      <a:round/>
+                      <a:headEnd type="none" w="med" len="med"/>
+                      <a:tailEnd type="none" w="med" len="med"/>
+                    </a:lnT>
+                    <a:lnB w="12700" cap="flat" cmpd="sng" algn="ctr">
+                      <a:solidFill>
+                        <a:srgbClr val="2A3441"/>
+                      </a:solidFill>
+                      <a:prstDash val="solid"/>
+                      <a:round/>
+                      <a:headEnd type="none" w="med" len="med"/>
+                      <a:tailEnd type="none" w="med" len="med"/>
+                    </a:lnB>
+                    <a:solidFill>
+                      <a:srgbClr val="141B24"/>
+                    </a:solidFill>
+                  </a:tcPr>
+                </a:tc>
+                <a:tc>
+                  <a:txBody>
+                    <a:bodyPr/>
+                    <a:lstStyle/>
+                    <a:p>
+                      <a:pPr indent="0" marL="0">
+                        <a:buNone/>
+                      </a:pPr>
+                      <a:r>
+                        <a:rPr lang="en-US" sz="1300" dirty="0">
+                          <a:solidFill>
+                            <a:srgbClr val="E6EDF3"/>
+                          </a:solidFill>
+                          <a:latin typeface="Calibri" pitchFamily="34" charset="0"/>
+                          <a:ea typeface="Calibri" pitchFamily="34" charset="-122"/>
+                          <a:cs typeface="Calibri" pitchFamily="34" charset="-120"/>
+                        </a:rPr>
+                        <a:t>25.7</a:t>
+                      </a:r>
+                      <a:endParaRPr lang="en-US" sz="1300" dirty="0">
+                        <a:latin typeface="Calibri" charset="0"/>
+                        <a:ea typeface="Calibri" charset="0"/>
+                        <a:cs typeface="Calibri" charset="0"/>
+                      </a:endParaRPr>
+                    </a:p>
+                  </a:txBody>
+                  <a:tcPr marL="91440" marR="91440" marT="45720" marB="45720">
+                    <a:lnL w="12700" cap="flat" cmpd="sng" algn="ctr">
+                      <a:solidFill>
+                        <a:srgbClr val="2A3441"/>
+                      </a:solidFill>
+                      <a:prstDash val="solid"/>
+                      <a:round/>
+                      <a:headEnd type="none" w="med" len="med"/>
+                      <a:tailEnd type="none" w="med" len="med"/>
+                    </a:lnL>
+                    <a:lnR w="12700" cap="flat" cmpd="sng" algn="ctr">
+                      <a:solidFill>
+                        <a:srgbClr val="2A3441"/>
+                      </a:solidFill>
+                      <a:prstDash val="solid"/>
+                      <a:round/>
+                      <a:headEnd type="none" w="med" len="med"/>
+                      <a:tailEnd type="none" w="med" len="med"/>
+                    </a:lnR>
+                    <a:lnT w="12700" cap="flat" cmpd="sng" algn="ctr">
+                      <a:solidFill>
+                        <a:srgbClr val="2A3441"/>
+                      </a:solidFill>
+                      <a:prstDash val="solid"/>
+                      <a:round/>
+                      <a:headEnd type="none" w="med" len="med"/>
+                      <a:tailEnd type="none" w="med" len="med"/>
+                    </a:lnT>
+                    <a:lnB w="12700" cap="flat" cmpd="sng" algn="ctr">
+                      <a:solidFill>
+                        <a:srgbClr val="2A3441"/>
+                      </a:solidFill>
+                      <a:prstDash val="solid"/>
+                      <a:round/>
+                      <a:headEnd type="none" w="med" len="med"/>
+                      <a:tailEnd type="none" w="med" len="med"/>
+                    </a:lnB>
+                    <a:solidFill>
+                      <a:srgbClr val="141B24"/>
+                    </a:solidFill>
+                  </a:tcPr>
+                </a:tc>
+                <a:tc>
+                  <a:txBody>
+                    <a:bodyPr/>
+                    <a:lstStyle/>
+                    <a:p>
+                      <a:pPr indent="0" marL="0">
+                        <a:buNone/>
+                      </a:pPr>
+                      <a:r>
+                        <a:rPr lang="en-US" sz="1300" dirty="0">
+                          <a:solidFill>
+                            <a:srgbClr val="E6EDF3"/>
+                          </a:solidFill>
+                          <a:latin typeface="Calibri" pitchFamily="34" charset="0"/>
+                          <a:ea typeface="Calibri" pitchFamily="34" charset="-122"/>
+                          <a:cs typeface="Calibri" pitchFamily="34" charset="-120"/>
+                        </a:rPr>
+                        <a:t>12.9</a:t>
+                      </a:r>
+                      <a:endParaRPr lang="en-US" sz="1300" dirty="0">
+                        <a:latin typeface="Calibri" charset="0"/>
+                        <a:ea typeface="Calibri" charset="0"/>
+                        <a:cs typeface="Calibri" charset="0"/>
+                      </a:endParaRPr>
+                    </a:p>
+                  </a:txBody>
+                  <a:tcPr marL="91440" marR="91440" marT="45720" marB="45720">
+                    <a:lnL w="12700" cap="flat" cmpd="sng" algn="ctr">
+                      <a:solidFill>
+                        <a:srgbClr val="2A3441"/>
+                      </a:solidFill>
+                      <a:prstDash val="solid"/>
+                      <a:round/>
+                      <a:headEnd type="none" w="med" len="med"/>
+                      <a:tailEnd type="none" w="med" len="med"/>
+                    </a:lnL>
+                    <a:lnR w="12700" cap="flat" cmpd="sng" algn="ctr">
+                      <a:solidFill>
+                        <a:srgbClr val="2A3441"/>
+                      </a:solidFill>
+                      <a:prstDash val="solid"/>
+                      <a:round/>
+                      <a:headEnd type="none" w="med" len="med"/>
+                      <a:tailEnd type="none" w="med" len="med"/>
+                    </a:lnR>
+                    <a:lnT w="12700" cap="flat" cmpd="sng" algn="ctr">
+                      <a:solidFill>
+                        <a:srgbClr val="2A3441"/>
+                      </a:solidFill>
+                      <a:prstDash val="solid"/>
+                      <a:round/>
+                      <a:headEnd type="none" w="med" len="med"/>
+                      <a:tailEnd type="none" w="med" len="med"/>
+                    </a:lnT>
+                    <a:lnB w="12700" cap="flat" cmpd="sng" algn="ctr">
+                      <a:solidFill>
+                        <a:srgbClr val="2A3441"/>
+                      </a:solidFill>
+                      <a:prstDash val="solid"/>
+                      <a:round/>
+                      <a:headEnd type="none" w="med" len="med"/>
+                      <a:tailEnd type="none" w="med" len="med"/>
+                    </a:lnB>
+                    <a:solidFill>
+                      <a:srgbClr val="141B24"/>
+                    </a:solidFill>
+                  </a:tcPr>
+                </a:tc>
+                <a:tc>
+                  <a:txBody>
+                    <a:bodyPr/>
+                    <a:lstStyle/>
+                    <a:p>
+                      <a:pPr indent="0" marL="0">
+                        <a:buNone/>
+                      </a:pPr>
+                      <a:r>
+                        <a:rPr lang="en-US" sz="1300" dirty="0">
+                          <a:solidFill>
+                            <a:srgbClr val="E6EDF3"/>
+                          </a:solidFill>
+                          <a:latin typeface="Calibri" pitchFamily="34" charset="0"/>
+                          <a:ea typeface="Calibri" pitchFamily="34" charset="-122"/>
+                          <a:cs typeface="Calibri" pitchFamily="34" charset="-120"/>
+                        </a:rPr>
+                        <a:t>50%</a:t>
+                      </a:r>
+                      <a:endParaRPr lang="en-US" sz="1300" dirty="0">
+                        <a:latin typeface="Calibri" charset="0"/>
+                        <a:ea typeface="Calibri" charset="0"/>
+                        <a:cs typeface="Calibri" charset="0"/>
+                      </a:endParaRPr>
+                    </a:p>
+                  </a:txBody>
+                  <a:tcPr marL="91440" marR="91440" marT="45720" marB="45720">
+                    <a:lnL w="12700" cap="flat" cmpd="sng" algn="ctr">
+                      <a:solidFill>
+                        <a:srgbClr val="2A3441"/>
+                      </a:solidFill>
+                      <a:prstDash val="solid"/>
+                      <a:round/>
+                      <a:headEnd type="none" w="med" len="med"/>
+                      <a:tailEnd type="none" w="med" len="med"/>
+                    </a:lnL>
+                    <a:lnR w="12700" cap="flat" cmpd="sng" algn="ctr">
+                      <a:solidFill>
+                        <a:srgbClr val="2A3441"/>
+                      </a:solidFill>
+                      <a:prstDash val="solid"/>
+                      <a:round/>
+                      <a:headEnd type="none" w="med" len="med"/>
+                      <a:tailEnd type="none" w="med" len="med"/>
+                    </a:lnR>
+                    <a:lnT w="12700" cap="flat" cmpd="sng" algn="ctr">
+                      <a:solidFill>
+                        <a:srgbClr val="2A3441"/>
+                      </a:solidFill>
+                      <a:prstDash val="solid"/>
+                      <a:round/>
+                      <a:headEnd type="none" w="med" len="med"/>
+                      <a:tailEnd type="none" w="med" len="med"/>
+                    </a:lnT>
+                    <a:lnB w="12700" cap="flat" cmpd="sng" algn="ctr">
+                      <a:solidFill>
+                        <a:srgbClr val="2A3441"/>
+                      </a:solidFill>
+                      <a:prstDash val="solid"/>
+                      <a:round/>
+                      <a:headEnd type="none" w="med" len="med"/>
+                      <a:tailEnd type="none" w="med" len="med"/>
+                    </a:lnB>
+                    <a:solidFill>
+                      <a:srgbClr val="141B24"/>
+                    </a:solidFill>
+                  </a:tcPr>
+                </a:tc>
+              </a:tr>
+              <a:tr h="420624">
+                <a:tc>
+                  <a:txBody>
+                    <a:bodyPr/>
+                    <a:lstStyle/>
+                    <a:p>
+                      <a:pPr indent="0" marL="0">
+                        <a:buNone/>
+                      </a:pPr>
+                      <a:r>
+                        <a:rPr lang="en-US" sz="1300" dirty="0">
+                          <a:solidFill>
+                            <a:srgbClr val="E6EDF3"/>
+                          </a:solidFill>
+                          <a:latin typeface="Calibri" pitchFamily="34" charset="0"/>
+                          <a:ea typeface="Calibri" pitchFamily="34" charset="-122"/>
+                          <a:cs typeface="Calibri" pitchFamily="34" charset="-120"/>
+                        </a:rPr>
+                        <a:t>Hostile, 10% loss</a:t>
+                      </a:r>
+                      <a:endParaRPr lang="en-US" sz="1300" dirty="0">
+                        <a:latin typeface="Calibri" charset="0"/>
+                        <a:ea typeface="Calibri" charset="0"/>
+                        <a:cs typeface="Calibri" charset="0"/>
+                      </a:endParaRPr>
+                    </a:p>
+                  </a:txBody>
+                  <a:tcPr marL="91440" marR="91440" marT="45720" marB="45720">
+                    <a:lnL w="12700" cap="flat" cmpd="sng" algn="ctr">
+                      <a:solidFill>
+                        <a:srgbClr val="2A3441"/>
+                      </a:solidFill>
+                      <a:prstDash val="solid"/>
+                      <a:round/>
+                      <a:headEnd type="none" w="med" len="med"/>
+                      <a:tailEnd type="none" w="med" len="med"/>
+                    </a:lnL>
+                    <a:lnR w="12700" cap="flat" cmpd="sng" algn="ctr">
+                      <a:solidFill>
+                        <a:srgbClr val="2A3441"/>
+                      </a:solidFill>
+                      <a:prstDash val="solid"/>
+                      <a:round/>
+                      <a:headEnd type="none" w="med" len="med"/>
+                      <a:tailEnd type="none" w="med" len="med"/>
+                    </a:lnR>
+                    <a:lnT w="12700" cap="flat" cmpd="sng" algn="ctr">
+                      <a:solidFill>
+                        <a:srgbClr val="2A3441"/>
+                      </a:solidFill>
+                      <a:prstDash val="solid"/>
+                      <a:round/>
+                      <a:headEnd type="none" w="med" len="med"/>
+                      <a:tailEnd type="none" w="med" len="med"/>
+                    </a:lnT>
+                    <a:lnB w="12700" cap="flat" cmpd="sng" algn="ctr">
+                      <a:solidFill>
+                        <a:srgbClr val="2A3441"/>
+                      </a:solidFill>
+                      <a:prstDash val="solid"/>
+                      <a:round/>
+                      <a:headEnd type="none" w="med" len="med"/>
+                      <a:tailEnd type="none" w="med" len="med"/>
+                    </a:lnB>
+                    <a:solidFill>
+                      <a:srgbClr val="141B24"/>
+                    </a:solidFill>
+                  </a:tcPr>
+                </a:tc>
+                <a:tc>
+                  <a:txBody>
+                    <a:bodyPr/>
+                    <a:lstStyle/>
+                    <a:p>
+                      <a:pPr indent="0" marL="0">
+                        <a:buNone/>
+                      </a:pPr>
+                      <a:r>
+                        <a:rPr lang="en-US" sz="1300" dirty="0">
+                          <a:solidFill>
+                            <a:srgbClr val="E6EDF3"/>
+                          </a:solidFill>
+                          <a:latin typeface="Calibri" pitchFamily="34" charset="0"/>
+                          <a:ea typeface="Calibri" pitchFamily="34" charset="-122"/>
+                          <a:cs typeface="Calibri" pitchFamily="34" charset="-120"/>
+                        </a:rPr>
+                        <a:t>7.3</a:t>
+                      </a:r>
+                      <a:endParaRPr lang="en-US" sz="1300" dirty="0">
+                        <a:latin typeface="Calibri" charset="0"/>
+                        <a:ea typeface="Calibri" charset="0"/>
+                        <a:cs typeface="Calibri" charset="0"/>
+                      </a:endParaRPr>
+                    </a:p>
+                  </a:txBody>
+                  <a:tcPr marL="91440" marR="91440" marT="45720" marB="45720">
+                    <a:lnL w="12700" cap="flat" cmpd="sng" algn="ctr">
+                      <a:solidFill>
+                        <a:srgbClr val="2A3441"/>
+                      </a:solidFill>
+                      <a:prstDash val="solid"/>
+                      <a:round/>
+                      <a:headEnd type="none" w="med" len="med"/>
+                      <a:tailEnd type="none" w="med" len="med"/>
+                    </a:lnL>
+                    <a:lnR w="12700" cap="flat" cmpd="sng" algn="ctr">
+                      <a:solidFill>
+                        <a:srgbClr val="2A3441"/>
+                      </a:solidFill>
+                      <a:prstDash val="solid"/>
+                      <a:round/>
+                      <a:headEnd type="none" w="med" len="med"/>
+                      <a:tailEnd type="none" w="med" len="med"/>
+                    </a:lnR>
+                    <a:lnT w="12700" cap="flat" cmpd="sng" algn="ctr">
+                      <a:solidFill>
+                        <a:srgbClr val="2A3441"/>
+                      </a:solidFill>
+                      <a:prstDash val="solid"/>
+                      <a:round/>
+                      <a:headEnd type="none" w="med" len="med"/>
+                      <a:tailEnd type="none" w="med" len="med"/>
+                    </a:lnT>
+                    <a:lnB w="12700" cap="flat" cmpd="sng" algn="ctr">
+                      <a:solidFill>
+                        <a:srgbClr val="2A3441"/>
+                      </a:solidFill>
+                      <a:prstDash val="solid"/>
+                      <a:round/>
+                      <a:headEnd type="none" w="med" len="med"/>
+                      <a:tailEnd type="none" w="med" len="med"/>
+                    </a:lnB>
+                    <a:solidFill>
+                      <a:srgbClr val="141B24"/>
+                    </a:solidFill>
+                  </a:tcPr>
+                </a:tc>
+                <a:tc>
+                  <a:txBody>
+                    <a:bodyPr/>
+                    <a:lstStyle/>
+                    <a:p>
+                      <a:pPr indent="0" marL="0">
+                        <a:buNone/>
+                      </a:pPr>
+                      <a:r>
+                        <a:rPr lang="en-US" sz="1300" dirty="0">
+                          <a:solidFill>
+                            <a:srgbClr val="E6EDF3"/>
+                          </a:solidFill>
+                          <a:latin typeface="Calibri" pitchFamily="34" charset="0"/>
+                          <a:ea typeface="Calibri" pitchFamily="34" charset="-122"/>
+                          <a:cs typeface="Calibri" pitchFamily="34" charset="-120"/>
+                        </a:rPr>
+                        <a:t>8.1</a:t>
+                      </a:r>
+                      <a:endParaRPr lang="en-US" sz="1300" dirty="0">
+                        <a:latin typeface="Calibri" charset="0"/>
+                        <a:ea typeface="Calibri" charset="0"/>
+                        <a:cs typeface="Calibri" charset="0"/>
+                      </a:endParaRPr>
+                    </a:p>
+                  </a:txBody>
+                  <a:tcPr marL="91440" marR="91440" marT="45720" marB="45720">
+                    <a:lnL w="12700" cap="flat" cmpd="sng" algn="ctr">
+                      <a:solidFill>
+                        <a:srgbClr val="2A3441"/>
+                      </a:solidFill>
+                      <a:prstDash val="solid"/>
+                      <a:round/>
+                      <a:headEnd type="none" w="med" len="med"/>
+                      <a:tailEnd type="none" w="med" len="med"/>
+                    </a:lnL>
+                    <a:lnR w="12700" cap="flat" cmpd="sng" algn="ctr">
+                      <a:solidFill>
+                        <a:srgbClr val="2A3441"/>
+                      </a:solidFill>
+                      <a:prstDash val="solid"/>
+                      <a:round/>
+                      <a:headEnd type="none" w="med" len="med"/>
+                      <a:tailEnd type="none" w="med" len="med"/>
+                    </a:lnR>
+                    <a:lnT w="12700" cap="flat" cmpd="sng" algn="ctr">
+                      <a:solidFill>
+                        <a:srgbClr val="2A3441"/>
+                      </a:solidFill>
+                      <a:prstDash val="solid"/>
+                      <a:round/>
+                      <a:headEnd type="none" w="med" len="med"/>
+                      <a:tailEnd type="none" w="med" len="med"/>
+                    </a:lnT>
+                    <a:lnB w="12700" cap="flat" cmpd="sng" algn="ctr">
+                      <a:solidFill>
+                        <a:srgbClr val="2A3441"/>
+                      </a:solidFill>
+                      <a:prstDash val="solid"/>
+                      <a:round/>
+                      <a:headEnd type="none" w="med" len="med"/>
+                      <a:tailEnd type="none" w="med" len="med"/>
+                    </a:lnB>
+                    <a:solidFill>
+                      <a:srgbClr val="141B24"/>
+                    </a:solidFill>
+                  </a:tcPr>
+                </a:tc>
+                <a:tc>
+                  <a:txBody>
+                    <a:bodyPr/>
+                    <a:lstStyle/>
+                    <a:p>
+                      <a:pPr indent="0" marL="0">
+                        <a:buNone/>
+                      </a:pPr>
+                      <a:r>
+                        <a:rPr lang="en-US" sz="1300" dirty="0">
+                          <a:solidFill>
+                            <a:srgbClr val="E6EDF3"/>
+                          </a:solidFill>
+                          <a:latin typeface="Calibri" pitchFamily="34" charset="0"/>
+                          <a:ea typeface="Calibri" pitchFamily="34" charset="-122"/>
+                          <a:cs typeface="Calibri" pitchFamily="34" charset="-120"/>
+                        </a:rPr>
+                        <a:t>tie</a:t>
+                      </a:r>
+                      <a:endParaRPr lang="en-US" sz="1300" dirty="0">
+                        <a:latin typeface="Calibri" charset="0"/>
+                        <a:ea typeface="Calibri" charset="0"/>
+                        <a:cs typeface="Calibri" charset="0"/>
+                      </a:endParaRPr>
+                    </a:p>
+                  </a:txBody>
+                  <a:tcPr marL="91440" marR="91440" marT="45720" marB="45720">
+                    <a:lnL w="12700" cap="flat" cmpd="sng" algn="ctr">
+                      <a:solidFill>
+                        <a:srgbClr val="2A3441"/>
+                      </a:solidFill>
+                      <a:prstDash val="solid"/>
+                      <a:round/>
+                      <a:headEnd type="none" w="med" len="med"/>
+                      <a:tailEnd type="none" w="med" len="med"/>
+                    </a:lnL>
+                    <a:lnR w="12700" cap="flat" cmpd="sng" algn="ctr">
+                      <a:solidFill>
+                        <a:srgbClr val="2A3441"/>
+                      </a:solidFill>
+                      <a:prstDash val="solid"/>
+                      <a:round/>
+                      <a:headEnd type="none" w="med" len="med"/>
+                      <a:tailEnd type="none" w="med" len="med"/>
+                    </a:lnR>
+                    <a:lnT w="12700" cap="flat" cmpd="sng" algn="ctr">
+                      <a:solidFill>
+                        <a:srgbClr val="2A3441"/>
+                      </a:solidFill>
+                      <a:prstDash val="solid"/>
+                      <a:round/>
+                      <a:headEnd type="none" w="med" len="med"/>
+                      <a:tailEnd type="none" w="med" len="med"/>
+                    </a:lnT>
+                    <a:lnB w="12700" cap="flat" cmpd="sng" algn="ctr">
+                      <a:solidFill>
+                        <a:srgbClr val="2A3441"/>
+                      </a:solidFill>
+                      <a:prstDash val="solid"/>
+                      <a:round/>
+                      <a:headEnd type="none" w="med" len="med"/>
+                      <a:tailEnd type="none" w="med" len="med"/>
+                    </a:lnB>
+                    <a:solidFill>
+                      <a:srgbClr val="141B24"/>
+                    </a:solidFill>
+                  </a:tcPr>
+                </a:tc>
+              </a:tr>
+            </a:tbl>
+          </a:graphicData>
+        </a:graphic>
+      </p:graphicFrame>
+      <p:sp>
+        <p:nvSpPr>
+          <p:cNvPr id="5" name="Text 2"/>
           <p:cNvSpPr/>
           <p:nvPr/>
         </p:nvSpPr>
         <p:spPr>
           <a:xfrm>
-            <a:off x="548640" y="1371600"/>
-            <a:ext cx="5394960" cy="4206240"/>
-          </a:xfrm>
-          <a:prstGeom prst="rect">
-            <a:avLst/>
-          </a:prstGeom>
-          <a:solidFill>
-            <a:srgbClr val="141B24"/>
-          </a:solidFill>
-          <a:ln w="12700">
-            <a:solidFill>
-              <a:srgbClr val="39FF88"/>
-            </a:solidFill>
-            <a:prstDash val="solid"/>
-          </a:ln>
-        </p:spPr>
-      </p:sp>
-      <p:sp>
-        <p:nvSpPr>
-          <p:cNvPr id="5" name="Text 3"/>
-          <p:cNvSpPr/>
-          <p:nvPr/>
-        </p:nvSpPr>
-        <p:spPr>
-          <a:xfrm>
-            <a:off x="731520" y="1508760"/>
-            <a:ext cx="5029200" cy="457200"/>
+            <a:off x="6949440" y="1188720"/>
+            <a:ext cx="4846320" cy="4937760"/>
           </a:xfrm>
           <a:prstGeom prst="rect">
             <a:avLst/>
@@ -14380,37 +15846,125 @@
           <a:ln/>
         </p:spPr>
         <p:txBody>
-          <a:bodyPr wrap="square" lIns="0" tIns="0" rIns="0" bIns="0" rtlCol="0" anchor="ctr"/>
+          <a:bodyPr wrap="square" lIns="0" tIns="0" rIns="0" bIns="0" rtlCol="0" anchor="t"/>
           <a:lstStyle/>
           <a:p>
-            <a:pPr indent="0" marL="0">
-              <a:buNone/>
-            </a:pPr>
-            <a:r>
-              <a:rPr lang="en-US" sz="2000" b="1" dirty="0">
-                <a:solidFill>
-                  <a:srgbClr val="39FF88"/>
-                </a:solidFill>
-                <a:latin typeface="Courier New" pitchFamily="34" charset="0"/>
-                <a:ea typeface="Courier New" pitchFamily="34" charset="-122"/>
-                <a:cs typeface="Courier New" pitchFamily="34" charset="-120"/>
-              </a:rPr>
-              <a:t>Learned</a:t>
-            </a:r>
-            <a:endParaRPr lang="en-US" sz="2000" dirty="0"/>
-          </a:p>
-        </p:txBody>
-      </p:sp>
-      <p:sp>
-        <p:nvSpPr>
-          <p:cNvPr id="6" name="Text 4"/>
+            <a:pPr marL="342900" indent="-342900">
+              <a:spcAft>
+                <a:spcPts val="800"/>
+              </a:spcAft>
+              <a:buSzPct val="100000"/>
+              <a:buChar char="•"/>
+            </a:pPr>
+            <a:r>
+              <a:rPr lang="en-US" sz="1400" dirty="0">
+                <a:solidFill>
+                  <a:srgbClr val="E6EDF3"/>
+                </a:solidFill>
+                <a:latin typeface="Calibri" pitchFamily="34" charset="0"/>
+                <a:ea typeface="Calibri" pitchFamily="34" charset="-122"/>
+                <a:cs typeface="Calibri" pitchFamily="34" charset="-120"/>
+              </a:rPr>
+              <a:t>Receiver buffers out-of-order packets (64 window) and reports them in a bitmap in every ACK</a:t>
+            </a:r>
+            <a:endParaRPr lang="en-US" sz="1400" dirty="0"/>
+          </a:p>
+          <a:p>
+            <a:pPr marL="342900" indent="-342900">
+              <a:spcAft>
+                <a:spcPts val="800"/>
+              </a:spcAft>
+              <a:buSzPct val="100000"/>
+              <a:buChar char="•"/>
+            </a:pPr>
+            <a:r>
+              <a:rPr lang="en-US" sz="1400" dirty="0">
+                <a:solidFill>
+                  <a:srgbClr val="E6EDF3"/>
+                </a:solidFill>
+                <a:latin typeface="Calibri" pitchFamily="34" charset="0"/>
+                <a:ea typeface="Calibri" pitchFamily="34" charset="-122"/>
+                <a:cs typeface="Calibri" pitchFamily="34" charset="-120"/>
+              </a:rPr>
+              <a:t>Sender: one timer per packet; resends only the missing ones</a:t>
+            </a:r>
+            <a:endParaRPr lang="en-US" sz="1400" dirty="0"/>
+          </a:p>
+          <a:p>
+            <a:pPr marL="342900" indent="-342900">
+              <a:spcAft>
+                <a:spcPts val="800"/>
+              </a:spcAft>
+              <a:buSzPct val="100000"/>
+              <a:buChar char="•"/>
+            </a:pPr>
+            <a:r>
+              <a:rPr lang="en-US" sz="1400" dirty="0">
+                <a:solidFill>
+                  <a:srgbClr val="E6EDF3"/>
+                </a:solidFill>
+                <a:latin typeface="Calibri" pitchFamily="34" charset="0"/>
+                <a:ea typeface="Calibri" pitchFamily="34" charset="-122"/>
+                <a:cs typeface="Calibri" pitchFamily="34" charset="-120"/>
+              </a:rPr>
+              <a:t>Retransmissions drop about 10x; web chat 200 messages: 6.4 s vs 11.9 s (AIMD)</a:t>
+            </a:r>
+            <a:endParaRPr lang="en-US" sz="1400" dirty="0"/>
+          </a:p>
+          <a:p>
+            <a:pPr marL="342900" indent="-342900">
+              <a:spcAft>
+                <a:spcPts val="800"/>
+              </a:spcAft>
+              <a:buSzPct val="100000"/>
+              <a:buChar char="•"/>
+            </a:pPr>
+            <a:r>
+              <a:rPr lang="en-US" sz="1400" dirty="0">
+                <a:solidFill>
+                  <a:srgbClr val="E6EDF3"/>
+                </a:solidFill>
+                <a:latin typeface="Calibri" pitchFamily="34" charset="0"/>
+                <a:ea typeface="Calibri" pitchFamily="34" charset="-122"/>
+                <a:cs typeface="Calibri" pitchFamily="34" charset="-120"/>
+              </a:rPr>
+              <a:t>The neural agent now wins by more, and the 10% loss failure was mostly a Go-Back-N effect</a:t>
+            </a:r>
+            <a:endParaRPr lang="en-US" sz="1400" dirty="0"/>
+          </a:p>
+          <a:p>
+            <a:pPr marL="342900" indent="-342900">
+              <a:spcAft>
+                <a:spcPts val="800"/>
+              </a:spcAft>
+              <a:buSzPct val="100000"/>
+              <a:buChar char="•"/>
+            </a:pPr>
+            <a:r>
+              <a:rPr lang="en-US" sz="1400" dirty="0">
+                <a:solidFill>
+                  <a:srgbClr val="E6EDF3"/>
+                </a:solidFill>
+                <a:latin typeface="Calibri" pitchFamily="34" charset="0"/>
+                <a:ea typeface="Calibri" pitchFamily="34" charset="-122"/>
+                <a:cs typeface="Calibri" pitchFamily="34" charset="-120"/>
+              </a:rPr>
+              <a:t>Go-Back-N kept for comparison: --gbn / RUDP_GBN</a:t>
+            </a:r>
+            <a:endParaRPr lang="en-US" sz="1400" dirty="0"/>
+          </a:p>
+        </p:txBody>
+      </p:sp>
+      <p:sp>
+        <p:nvSpPr>
+          <p:cNvPr id="6" name="Text 3"/>
           <p:cNvSpPr/>
           <p:nvPr/>
         </p:nvSpPr>
         <p:spPr>
           <a:xfrm>
-            <a:off x="731520" y="2011680"/>
-            <a:ext cx="5029200" cy="3429000"/>
+            <a:off x="548640" y="3840480"/>
+            <a:ext cx="6035040" cy="731520"/>
           </a:xfrm>
           <a:prstGeom prst="rect">
             <a:avLst/>
@@ -14419,234 +15973,24 @@
           <a:ln/>
         </p:spPr>
         <p:txBody>
-          <a:bodyPr wrap="square" lIns="0" tIns="0" rIns="0" bIns="0" rtlCol="0" anchor="t"/>
+          <a:bodyPr wrap="square" lIns="0" tIns="0" rIns="0" bIns="0" rtlCol="0" anchor="ctr"/>
           <a:lstStyle/>
           <a:p>
             <a:pPr indent="0" marL="0">
               <a:buNone/>
             </a:pPr>
             <a:r>
-              <a:rPr lang="en-US" sz="2000" dirty="0">
-                <a:solidFill>
-                  <a:srgbClr val="E6EDF3"/>
+              <a:rPr lang="en-US" sz="1300" dirty="0">
+                <a:solidFill>
+                  <a:srgbClr val="8B98A5"/>
                 </a:solidFill>
                 <a:latin typeface="Calibri" pitchFamily="34" charset="0"/>
                 <a:ea typeface="Calibri" pitchFamily="34" charset="-122"/>
                 <a:cs typeface="Calibri" pitchFamily="34" charset="-120"/>
               </a:rPr>
-              <a:t>Reliability is a set of simple rules working together.</a:t>
-            </a:r>
-            <a:endParaRPr lang="en-US" sz="2000" dirty="0"/>
-          </a:p>
-          <a:p>
-            <a:pPr indent="0" marL="0">
-              <a:buNone/>
-            </a:pPr>
-            <a:r>
-              <a:rPr lang="en-US" sz="2000" dirty="0">
-                <a:solidFill>
-                  <a:srgbClr val="E6EDF3"/>
-                </a:solidFill>
-                <a:latin typeface="Calibri" pitchFamily="34" charset="0"/>
-                <a:ea typeface="Calibri" pitchFamily="34" charset="-122"/>
-                <a:cs typeface="Calibri" pitchFamily="34" charset="-120"/>
-              </a:rPr>
-              <a:t>Congestion control matters as much as retransmission.</a:t>
-            </a:r>
-            <a:endParaRPr lang="en-US" sz="2000" dirty="0"/>
-          </a:p>
-          <a:p>
-            <a:pPr indent="0" marL="0">
-              <a:buNone/>
-            </a:pPr>
-            <a:r>
-              <a:rPr lang="en-US" sz="2000" dirty="0">
-                <a:solidFill>
-                  <a:srgbClr val="E6EDF3"/>
-                </a:solidFill>
-                <a:latin typeface="Calibri" pitchFamily="34" charset="0"/>
-                <a:ea typeface="Calibri" pitchFamily="34" charset="-122"/>
-                <a:cs typeface="Calibri" pitchFamily="34" charset="-120"/>
-              </a:rPr>
-              <a:t>Testing tools fail in surprising ways.</a:t>
-            </a:r>
-            <a:endParaRPr lang="en-US" sz="2000" dirty="0"/>
-          </a:p>
-        </p:txBody>
-      </p:sp>
-      <p:sp>
-        <p:nvSpPr>
-          <p:cNvPr id="7" name="Shape 5"/>
-          <p:cNvSpPr/>
-          <p:nvPr/>
-        </p:nvSpPr>
-        <p:spPr>
-          <a:xfrm>
-            <a:off x="6217920" y="1371600"/>
-            <a:ext cx="5394960" cy="4206240"/>
-          </a:xfrm>
-          <a:prstGeom prst="rect">
-            <a:avLst/>
-          </a:prstGeom>
-          <a:solidFill>
-            <a:srgbClr val="141B24"/>
-          </a:solidFill>
-          <a:ln w="12700">
-            <a:solidFill>
-              <a:srgbClr val="FFB000"/>
-            </a:solidFill>
-            <a:prstDash val="solid"/>
-          </a:ln>
-        </p:spPr>
-      </p:sp>
-      <p:sp>
-        <p:nvSpPr>
-          <p:cNvPr id="8" name="Text 6"/>
-          <p:cNvSpPr/>
-          <p:nvPr/>
-        </p:nvSpPr>
-        <p:spPr>
-          <a:xfrm>
-            <a:off x="6400800" y="1508760"/>
-            <a:ext cx="5029200" cy="457200"/>
-          </a:xfrm>
-          <a:prstGeom prst="rect">
-            <a:avLst/>
-          </a:prstGeom>
-          <a:noFill/>
-          <a:ln/>
-        </p:spPr>
-        <p:txBody>
-          <a:bodyPr wrap="square" lIns="0" tIns="0" rIns="0" bIns="0" rtlCol="0" anchor="ctr"/>
-          <a:lstStyle/>
-          <a:p>
-            <a:pPr indent="0" marL="0">
-              <a:buNone/>
-            </a:pPr>
-            <a:r>
-              <a:rPr lang="en-US" sz="2000" b="1" dirty="0">
-                <a:solidFill>
-                  <a:srgbClr val="FFB000"/>
-                </a:solidFill>
-                <a:latin typeface="Courier New" pitchFamily="34" charset="0"/>
-                <a:ea typeface="Courier New" pitchFamily="34" charset="-122"/>
-                <a:cs typeface="Courier New" pitchFamily="34" charset="-120"/>
-              </a:rPr>
-              <a:t>Next</a:t>
-            </a:r>
-            <a:endParaRPr lang="en-US" sz="2000" dirty="0"/>
-          </a:p>
-        </p:txBody>
-      </p:sp>
-      <p:sp>
-        <p:nvSpPr>
-          <p:cNvPr id="9" name="Text 7"/>
-          <p:cNvSpPr/>
-          <p:nvPr/>
-        </p:nvSpPr>
-        <p:spPr>
-          <a:xfrm>
-            <a:off x="6400800" y="2011680"/>
-            <a:ext cx="5029200" cy="3429000"/>
-          </a:xfrm>
-          <a:prstGeom prst="rect">
-            <a:avLst/>
-          </a:prstGeom>
-          <a:noFill/>
-          <a:ln/>
-        </p:spPr>
-        <p:txBody>
-          <a:bodyPr wrap="square" lIns="0" tIns="0" rIns="0" bIns="0" rtlCol="0" anchor="t"/>
-          <a:lstStyle/>
-          <a:p>
-            <a:pPr indent="0" marL="0">
-              <a:buNone/>
-            </a:pPr>
-            <a:r>
-              <a:rPr lang="en-US" sz="2000" dirty="0">
-                <a:solidFill>
-                  <a:srgbClr val="E6EDF3"/>
-                </a:solidFill>
-                <a:latin typeface="Calibri" pitchFamily="34" charset="0"/>
-                <a:ea typeface="Calibri" pitchFamily="34" charset="-122"/>
-                <a:cs typeface="Calibri" pitchFamily="34" charset="-120"/>
-              </a:rPr>
-              <a:t>Train the neural agent in C / on real netem</a:t>
-            </a:r>
-            <a:endParaRPr lang="en-US" sz="2000" dirty="0"/>
-          </a:p>
-          <a:p>
-            <a:pPr indent="0" marL="0">
-              <a:buNone/>
-            </a:pPr>
-            <a:r>
-              <a:rPr lang="en-US" sz="2000" dirty="0">
-                <a:solidFill>
-                  <a:srgbClr val="E6EDF3"/>
-                </a:solidFill>
-                <a:latin typeface="Calibri" pitchFamily="34" charset="0"/>
-                <a:ea typeface="Calibri" pitchFamily="34" charset="-122"/>
-                <a:cs typeface="Calibri" pitchFamily="34" charset="-120"/>
-              </a:rPr>
-              <a:t>Selective ACK where throughput limits the path</a:t>
-            </a:r>
-            <a:endParaRPr lang="en-US" sz="2000" dirty="0"/>
-          </a:p>
-          <a:p>
-            <a:pPr indent="0" marL="0">
-              <a:buNone/>
-            </a:pPr>
-            <a:r>
-              <a:rPr lang="en-US" sz="2000" dirty="0">
-                <a:solidFill>
-                  <a:srgbClr val="E6EDF3"/>
-                </a:solidFill>
-                <a:latin typeface="Calibri" pitchFamily="34" charset="0"/>
-                <a:ea typeface="Calibri" pitchFamily="34" charset="-122"/>
-                <a:cs typeface="Calibri" pitchFamily="34" charset="-120"/>
-              </a:rPr>
-              <a:t>Kernel netem and real multi-machine tests</a:t>
-            </a:r>
-            <a:endParaRPr lang="en-US" sz="2000" dirty="0"/>
-          </a:p>
-        </p:txBody>
-      </p:sp>
-      <p:sp>
-        <p:nvSpPr>
-          <p:cNvPr id="10" name="Text 8"/>
-          <p:cNvSpPr/>
-          <p:nvPr/>
-        </p:nvSpPr>
-        <p:spPr>
-          <a:xfrm>
-            <a:off x="548640" y="5852160"/>
-            <a:ext cx="10972800" cy="365760"/>
-          </a:xfrm>
-          <a:prstGeom prst="rect">
-            <a:avLst/>
-          </a:prstGeom>
-          <a:noFill/>
-          <a:ln/>
-        </p:spPr>
-        <p:txBody>
-          <a:bodyPr wrap="square" lIns="0" tIns="0" rIns="0" bIns="0" rtlCol="0" anchor="ctr"/>
-          <a:lstStyle/>
-          <a:p>
-            <a:pPr indent="0" marL="0">
-              <a:buNone/>
-            </a:pPr>
-            <a:r>
-              <a:rPr lang="en-US" sz="1400" dirty="0">
-                <a:solidFill>
-                  <a:srgbClr val="8B98A5"/>
-                </a:solidFill>
-                <a:latin typeface="Calibri" pitchFamily="34" charset="0"/>
-                <a:ea typeface="Calibri" pitchFamily="34" charset="-122"/>
-                <a:cs typeface="Calibri" pitchFamily="34" charset="-120"/>
-              </a:rPr>
-              <a:t>Limits: Go-Back-N wastes bandwidth and suffers under reordering; C tests use an emulated path; the tabular agent did not beat AIMD in C.</a:t>
-            </a:r>
-            <a:endParaRPr lang="en-US" sz="1400" dirty="0"/>
+              <a:t>10 runs per cell (hostile: 5), 95% intervals, all gains significant except the hostile row. Code: eval_ci7.sh.</a:t>
+            </a:r>
+            <a:endParaRPr lang="en-US" sz="1300" dirty="0"/>
           </a:p>
         </p:txBody>
       </p:sp>
@@ -14690,8 +16034,8 @@
         </p:nvSpPr>
         <p:spPr>
           <a:xfrm>
-            <a:off x="731520" y="2103120"/>
-            <a:ext cx="10058400" cy="1097280"/>
+            <a:off x="548640" y="320040"/>
+            <a:ext cx="11064240" cy="731520"/>
           </a:xfrm>
           <a:prstGeom prst="rect">
             <a:avLst/>
@@ -14707,7 +16051,7 @@
               <a:buNone/>
             </a:pPr>
             <a:r>
-              <a:rPr lang="en-US" sz="6400" b="1" dirty="0">
+              <a:rPr lang="en-US" sz="3000" b="1" dirty="0">
                 <a:solidFill>
                   <a:srgbClr val="39FF88"/>
                 </a:solidFill>
@@ -14715,9 +16059,9 @@
                 <a:ea typeface="Courier New" pitchFamily="34" charset="-122"/>
                 <a:cs typeface="Courier New" pitchFamily="34" charset="-120"/>
               </a:rPr>
-              <a:t>Thank you</a:t>
-            </a:r>
-            <a:endParaRPr lang="en-US" sz="6400" dirty="0"/>
+              <a:t>Learnings and future work</a:t>
+            </a:r>
+            <a:endParaRPr lang="en-US" sz="3000" dirty="0"/>
           </a:p>
         </p:txBody>
       </p:sp>
@@ -14729,8 +16073,8 @@
         </p:nvSpPr>
         <p:spPr>
           <a:xfrm>
-            <a:off x="731520" y="3474720"/>
-            <a:ext cx="10058400" cy="548640"/>
+            <a:off x="9418320" y="6446520"/>
+            <a:ext cx="2377440" cy="274320"/>
           </a:xfrm>
           <a:prstGeom prst="rect">
             <a:avLst/>
@@ -14742,34 +16086,59 @@
           <a:bodyPr wrap="square" lIns="0" tIns="0" rIns="0" bIns="0" rtlCol="0" anchor="ctr"/>
           <a:lstStyle/>
           <a:p>
-            <a:pPr indent="0" marL="0">
+            <a:pPr algn="r" indent="0" marL="0">
               <a:buNone/>
             </a:pPr>
             <a:r>
-              <a:rPr lang="en-US" sz="2600" dirty="0">
-                <a:solidFill>
-                  <a:srgbClr val="E6EDF3"/>
+              <a:rPr lang="en-US" sz="1000" dirty="0">
+                <a:solidFill>
+                  <a:srgbClr val="8B98A5"/>
                 </a:solidFill>
                 <a:latin typeface="Courier New" pitchFamily="34" charset="0"/>
                 <a:ea typeface="Courier New" pitchFamily="34" charset="-122"/>
                 <a:cs typeface="Courier New" pitchFamily="34" charset="-120"/>
               </a:rPr>
-              <a:t>github.com/Capsturrrr/rudp</a:t>
-            </a:r>
-            <a:endParaRPr lang="en-US" sz="2600" dirty="0"/>
-          </a:p>
-        </p:txBody>
-      </p:sp>
-      <p:sp>
-        <p:nvSpPr>
-          <p:cNvPr id="4" name="Text 2"/>
+              <a:t>26 / 27   Smart-RUDP</a:t>
+            </a:r>
+            <a:endParaRPr lang="en-US" sz="1000" dirty="0"/>
+          </a:p>
+        </p:txBody>
+      </p:sp>
+      <p:sp>
+        <p:nvSpPr>
+          <p:cNvPr id="4" name="Shape 2"/>
           <p:cNvSpPr/>
           <p:nvPr/>
         </p:nvSpPr>
         <p:spPr>
           <a:xfrm>
-            <a:off x="731520" y="4206240"/>
-            <a:ext cx="10058400" cy="457200"/>
+            <a:off x="548640" y="1371600"/>
+            <a:ext cx="5394960" cy="4206240"/>
+          </a:xfrm>
+          <a:prstGeom prst="rect">
+            <a:avLst/>
+          </a:prstGeom>
+          <a:solidFill>
+            <a:srgbClr val="141B24"/>
+          </a:solidFill>
+          <a:ln w="12700">
+            <a:solidFill>
+              <a:srgbClr val="39FF88"/>
+            </a:solidFill>
+            <a:prstDash val="solid"/>
+          </a:ln>
+        </p:spPr>
+      </p:sp>
+      <p:sp>
+        <p:nvSpPr>
+          <p:cNvPr id="5" name="Text 3"/>
+          <p:cNvSpPr/>
+          <p:nvPr/>
+        </p:nvSpPr>
+        <p:spPr>
+          <a:xfrm>
+            <a:off x="731520" y="1508760"/>
+            <a:ext cx="5029200" cy="457200"/>
           </a:xfrm>
           <a:prstGeom prst="rect">
             <a:avLst/>
@@ -14785,17 +16154,266 @@
               <a:buNone/>
             </a:pPr>
             <a:r>
-              <a:rPr lang="en-US" sz="1800" dirty="0">
-                <a:solidFill>
-                  <a:srgbClr val="8B98A5"/>
+              <a:rPr lang="en-US" sz="2000" b="1" dirty="0">
+                <a:solidFill>
+                  <a:srgbClr val="39FF88"/>
+                </a:solidFill>
+                <a:latin typeface="Courier New" pitchFamily="34" charset="0"/>
+                <a:ea typeface="Courier New" pitchFamily="34" charset="-122"/>
+                <a:cs typeface="Courier New" pitchFamily="34" charset="-120"/>
+              </a:rPr>
+              <a:t>Learned</a:t>
+            </a:r>
+            <a:endParaRPr lang="en-US" sz="2000" dirty="0"/>
+          </a:p>
+        </p:txBody>
+      </p:sp>
+      <p:sp>
+        <p:nvSpPr>
+          <p:cNvPr id="6" name="Text 4"/>
+          <p:cNvSpPr/>
+          <p:nvPr/>
+        </p:nvSpPr>
+        <p:spPr>
+          <a:xfrm>
+            <a:off x="731520" y="2011680"/>
+            <a:ext cx="5029200" cy="3429000"/>
+          </a:xfrm>
+          <a:prstGeom prst="rect">
+            <a:avLst/>
+          </a:prstGeom>
+          <a:noFill/>
+          <a:ln/>
+        </p:spPr>
+        <p:txBody>
+          <a:bodyPr wrap="square" lIns="0" tIns="0" rIns="0" bIns="0" rtlCol="0" anchor="t"/>
+          <a:lstStyle/>
+          <a:p>
+            <a:pPr indent="0" marL="0">
+              <a:buNone/>
+            </a:pPr>
+            <a:r>
+              <a:rPr lang="en-US" sz="2000" dirty="0">
+                <a:solidFill>
+                  <a:srgbClr val="E6EDF3"/>
                 </a:solidFill>
                 <a:latin typeface="Calibri" pitchFamily="34" charset="0"/>
                 <a:ea typeface="Calibri" pitchFamily="34" charset="-122"/>
                 <a:cs typeface="Calibri" pitchFamily="34" charset="-120"/>
               </a:rPr>
-              <a:t>Harshavardhan Mallela   Rohit Arya   Shloak Sinha</a:t>
-            </a:r>
-            <a:endParaRPr lang="en-US" sz="1800" dirty="0"/>
+              <a:t>Reliability is a set of simple rules working together.</a:t>
+            </a:r>
+            <a:endParaRPr lang="en-US" sz="2000" dirty="0"/>
+          </a:p>
+          <a:p>
+            <a:pPr indent="0" marL="0">
+              <a:buNone/>
+            </a:pPr>
+            <a:r>
+              <a:rPr lang="en-US" sz="2000" dirty="0">
+                <a:solidFill>
+                  <a:srgbClr val="E6EDF3"/>
+                </a:solidFill>
+                <a:latin typeface="Calibri" pitchFamily="34" charset="0"/>
+                <a:ea typeface="Calibri" pitchFamily="34" charset="-122"/>
+                <a:cs typeface="Calibri" pitchFamily="34" charset="-120"/>
+              </a:rPr>
+              <a:t>Congestion control matters as much as retransmission.</a:t>
+            </a:r>
+            <a:endParaRPr lang="en-US" sz="2000" dirty="0"/>
+          </a:p>
+          <a:p>
+            <a:pPr indent="0" marL="0">
+              <a:buNone/>
+            </a:pPr>
+            <a:r>
+              <a:rPr lang="en-US" sz="2000" dirty="0">
+                <a:solidFill>
+                  <a:srgbClr val="E6EDF3"/>
+                </a:solidFill>
+                <a:latin typeface="Calibri" pitchFamily="34" charset="0"/>
+                <a:ea typeface="Calibri" pitchFamily="34" charset="-122"/>
+                <a:cs typeface="Calibri" pitchFamily="34" charset="-120"/>
+              </a:rPr>
+              <a:t>Testing tools fail in surprising ways.</a:t>
+            </a:r>
+            <a:endParaRPr lang="en-US" sz="2000" dirty="0"/>
+          </a:p>
+        </p:txBody>
+      </p:sp>
+      <p:sp>
+        <p:nvSpPr>
+          <p:cNvPr id="7" name="Shape 5"/>
+          <p:cNvSpPr/>
+          <p:nvPr/>
+        </p:nvSpPr>
+        <p:spPr>
+          <a:xfrm>
+            <a:off x="6217920" y="1371600"/>
+            <a:ext cx="5394960" cy="4206240"/>
+          </a:xfrm>
+          <a:prstGeom prst="rect">
+            <a:avLst/>
+          </a:prstGeom>
+          <a:solidFill>
+            <a:srgbClr val="141B24"/>
+          </a:solidFill>
+          <a:ln w="12700">
+            <a:solidFill>
+              <a:srgbClr val="FFB000"/>
+            </a:solidFill>
+            <a:prstDash val="solid"/>
+          </a:ln>
+        </p:spPr>
+      </p:sp>
+      <p:sp>
+        <p:nvSpPr>
+          <p:cNvPr id="8" name="Text 6"/>
+          <p:cNvSpPr/>
+          <p:nvPr/>
+        </p:nvSpPr>
+        <p:spPr>
+          <a:xfrm>
+            <a:off x="6400800" y="1508760"/>
+            <a:ext cx="5029200" cy="457200"/>
+          </a:xfrm>
+          <a:prstGeom prst="rect">
+            <a:avLst/>
+          </a:prstGeom>
+          <a:noFill/>
+          <a:ln/>
+        </p:spPr>
+        <p:txBody>
+          <a:bodyPr wrap="square" lIns="0" tIns="0" rIns="0" bIns="0" rtlCol="0" anchor="ctr"/>
+          <a:lstStyle/>
+          <a:p>
+            <a:pPr indent="0" marL="0">
+              <a:buNone/>
+            </a:pPr>
+            <a:r>
+              <a:rPr lang="en-US" sz="2000" b="1" dirty="0">
+                <a:solidFill>
+                  <a:srgbClr val="FFB000"/>
+                </a:solidFill>
+                <a:latin typeface="Courier New" pitchFamily="34" charset="0"/>
+                <a:ea typeface="Courier New" pitchFamily="34" charset="-122"/>
+                <a:cs typeface="Courier New" pitchFamily="34" charset="-120"/>
+              </a:rPr>
+              <a:t>Next</a:t>
+            </a:r>
+            <a:endParaRPr lang="en-US" sz="2000" dirty="0"/>
+          </a:p>
+        </p:txBody>
+      </p:sp>
+      <p:sp>
+        <p:nvSpPr>
+          <p:cNvPr id="9" name="Text 7"/>
+          <p:cNvSpPr/>
+          <p:nvPr/>
+        </p:nvSpPr>
+        <p:spPr>
+          <a:xfrm>
+            <a:off x="6400800" y="2011680"/>
+            <a:ext cx="5029200" cy="3429000"/>
+          </a:xfrm>
+          <a:prstGeom prst="rect">
+            <a:avLst/>
+          </a:prstGeom>
+          <a:noFill/>
+          <a:ln/>
+        </p:spPr>
+        <p:txBody>
+          <a:bodyPr wrap="square" lIns="0" tIns="0" rIns="0" bIns="0" rtlCol="0" anchor="t"/>
+          <a:lstStyle/>
+          <a:p>
+            <a:pPr indent="0" marL="0">
+              <a:buNone/>
+            </a:pPr>
+            <a:r>
+              <a:rPr lang="en-US" sz="2000" dirty="0">
+                <a:solidFill>
+                  <a:srgbClr val="E6EDF3"/>
+                </a:solidFill>
+                <a:latin typeface="Calibri" pitchFamily="34" charset="0"/>
+                <a:ea typeface="Calibri" pitchFamily="34" charset="-122"/>
+                <a:cs typeface="Calibri" pitchFamily="34" charset="-120"/>
+              </a:rPr>
+              <a:t>Train the neural agent in C / on real netem</a:t>
+            </a:r>
+            <a:endParaRPr lang="en-US" sz="2000" dirty="0"/>
+          </a:p>
+          <a:p>
+            <a:pPr indent="0" marL="0">
+              <a:buNone/>
+            </a:pPr>
+            <a:r>
+              <a:rPr lang="en-US" sz="2000" dirty="0">
+                <a:solidFill>
+                  <a:srgbClr val="E6EDF3"/>
+                </a:solidFill>
+                <a:latin typeface="Calibri" pitchFamily="34" charset="0"/>
+                <a:ea typeface="Calibri" pitchFamily="34" charset="-122"/>
+                <a:cs typeface="Calibri" pitchFamily="34" charset="-120"/>
+              </a:rPr>
+              <a:t>Selective ACK where throughput limits the path</a:t>
+            </a:r>
+            <a:endParaRPr lang="en-US" sz="2000" dirty="0"/>
+          </a:p>
+          <a:p>
+            <a:pPr indent="0" marL="0">
+              <a:buNone/>
+            </a:pPr>
+            <a:r>
+              <a:rPr lang="en-US" sz="2000" dirty="0">
+                <a:solidFill>
+                  <a:srgbClr val="E6EDF3"/>
+                </a:solidFill>
+                <a:latin typeface="Calibri" pitchFamily="34" charset="0"/>
+                <a:ea typeface="Calibri" pitchFamily="34" charset="-122"/>
+                <a:cs typeface="Calibri" pitchFamily="34" charset="-120"/>
+              </a:rPr>
+              <a:t>Kernel netem and real multi-machine tests</a:t>
+            </a:r>
+            <a:endParaRPr lang="en-US" sz="2000" dirty="0"/>
+          </a:p>
+        </p:txBody>
+      </p:sp>
+      <p:sp>
+        <p:nvSpPr>
+          <p:cNvPr id="10" name="Text 8"/>
+          <p:cNvSpPr/>
+          <p:nvPr/>
+        </p:nvSpPr>
+        <p:spPr>
+          <a:xfrm>
+            <a:off x="548640" y="5852160"/>
+            <a:ext cx="10972800" cy="365760"/>
+          </a:xfrm>
+          <a:prstGeom prst="rect">
+            <a:avLst/>
+          </a:prstGeom>
+          <a:noFill/>
+          <a:ln/>
+        </p:spPr>
+        <p:txBody>
+          <a:bodyPr wrap="square" lIns="0" tIns="0" rIns="0" bIns="0" rtlCol="0" anchor="ctr"/>
+          <a:lstStyle/>
+          <a:p>
+            <a:pPr indent="0" marL="0">
+              <a:buNone/>
+            </a:pPr>
+            <a:r>
+              <a:rPr lang="en-US" sz="1400" dirty="0">
+                <a:solidFill>
+                  <a:srgbClr val="8B98A5"/>
+                </a:solidFill>
+                <a:latin typeface="Calibri" pitchFamily="34" charset="0"/>
+                <a:ea typeface="Calibri" pitchFamily="34" charset="-122"/>
+                <a:cs typeface="Calibri" pitchFamily="34" charset="-120"/>
+              </a:rPr>
+              <a:t>Limits: Go-Back-N wastes bandwidth and suffers under reordering; C tests use an emulated path; the tabular agent did not beat AIMD in C.</a:t>
+            </a:r>
+            <a:endParaRPr lang="en-US" sz="1400" dirty="0"/>
           </a:p>
         </p:txBody>
       </p:sp>
@@ -14839,6 +16457,155 @@
         </p:nvSpPr>
         <p:spPr>
           <a:xfrm>
+            <a:off x="731520" y="2103120"/>
+            <a:ext cx="10058400" cy="1097280"/>
+          </a:xfrm>
+          <a:prstGeom prst="rect">
+            <a:avLst/>
+          </a:prstGeom>
+          <a:noFill/>
+          <a:ln/>
+        </p:spPr>
+        <p:txBody>
+          <a:bodyPr wrap="square" lIns="0" tIns="0" rIns="0" bIns="0" rtlCol="0" anchor="ctr"/>
+          <a:lstStyle/>
+          <a:p>
+            <a:pPr indent="0" marL="0">
+              <a:buNone/>
+            </a:pPr>
+            <a:r>
+              <a:rPr lang="en-US" sz="6400" b="1" dirty="0">
+                <a:solidFill>
+                  <a:srgbClr val="39FF88"/>
+                </a:solidFill>
+                <a:latin typeface="Courier New" pitchFamily="34" charset="0"/>
+                <a:ea typeface="Courier New" pitchFamily="34" charset="-122"/>
+                <a:cs typeface="Courier New" pitchFamily="34" charset="-120"/>
+              </a:rPr>
+              <a:t>Thank you</a:t>
+            </a:r>
+            <a:endParaRPr lang="en-US" sz="6400" dirty="0"/>
+          </a:p>
+        </p:txBody>
+      </p:sp>
+      <p:sp>
+        <p:nvSpPr>
+          <p:cNvPr id="3" name="Text 1"/>
+          <p:cNvSpPr/>
+          <p:nvPr/>
+        </p:nvSpPr>
+        <p:spPr>
+          <a:xfrm>
+            <a:off x="731520" y="3474720"/>
+            <a:ext cx="10058400" cy="548640"/>
+          </a:xfrm>
+          <a:prstGeom prst="rect">
+            <a:avLst/>
+          </a:prstGeom>
+          <a:noFill/>
+          <a:ln/>
+        </p:spPr>
+        <p:txBody>
+          <a:bodyPr wrap="square" lIns="0" tIns="0" rIns="0" bIns="0" rtlCol="0" anchor="ctr"/>
+          <a:lstStyle/>
+          <a:p>
+            <a:pPr indent="0" marL="0">
+              <a:buNone/>
+            </a:pPr>
+            <a:r>
+              <a:rPr lang="en-US" sz="2600" dirty="0">
+                <a:solidFill>
+                  <a:srgbClr val="E6EDF3"/>
+                </a:solidFill>
+                <a:latin typeface="Courier New" pitchFamily="34" charset="0"/>
+                <a:ea typeface="Courier New" pitchFamily="34" charset="-122"/>
+                <a:cs typeface="Courier New" pitchFamily="34" charset="-120"/>
+              </a:rPr>
+              <a:t>github.com/Capsturrrr/rudp</a:t>
+            </a:r>
+            <a:endParaRPr lang="en-US" sz="2600" dirty="0"/>
+          </a:p>
+        </p:txBody>
+      </p:sp>
+      <p:sp>
+        <p:nvSpPr>
+          <p:cNvPr id="4" name="Text 2"/>
+          <p:cNvSpPr/>
+          <p:nvPr/>
+        </p:nvSpPr>
+        <p:spPr>
+          <a:xfrm>
+            <a:off x="731520" y="4206240"/>
+            <a:ext cx="10058400" cy="457200"/>
+          </a:xfrm>
+          <a:prstGeom prst="rect">
+            <a:avLst/>
+          </a:prstGeom>
+          <a:noFill/>
+          <a:ln/>
+        </p:spPr>
+        <p:txBody>
+          <a:bodyPr wrap="square" lIns="0" tIns="0" rIns="0" bIns="0" rtlCol="0" anchor="ctr"/>
+          <a:lstStyle/>
+          <a:p>
+            <a:pPr indent="0" marL="0">
+              <a:buNone/>
+            </a:pPr>
+            <a:r>
+              <a:rPr lang="en-US" sz="1800" dirty="0">
+                <a:solidFill>
+                  <a:srgbClr val="8B98A5"/>
+                </a:solidFill>
+                <a:latin typeface="Calibri" pitchFamily="34" charset="0"/>
+                <a:ea typeface="Calibri" pitchFamily="34" charset="-122"/>
+                <a:cs typeface="Calibri" pitchFamily="34" charset="-120"/>
+              </a:rPr>
+              <a:t>Harshavardhan Mallela   Rohit Arya   Shloak Sinha</a:t>
+            </a:r>
+            <a:endParaRPr lang="en-US" sz="1800" dirty="0"/>
+          </a:p>
+        </p:txBody>
+      </p:sp>
+    </p:spTree>
+  </p:cSld>
+  <p:clrMapOvr>
+    <a:masterClrMapping/>
+  </p:clrMapOvr>
+</p:sld>
+</file>
+
+<file path=ppt/slides/slide28.xml><?xml version="1.0" encoding="utf-8"?>
+<p:sld xmlns:a="http://schemas.openxmlformats.org/drawingml/2006/main" xmlns:r="http://schemas.openxmlformats.org/officeDocument/2006/relationships" xmlns:p="http://schemas.openxmlformats.org/presentationml/2006/main">
+  <p:cSld name="Slide 28">
+    <p:bg>
+      <p:bgPr>
+        <a:solidFill>
+          <a:srgbClr val="0B0F14"/>
+        </a:solidFill>
+      </p:bgPr>
+    </p:bg>
+    <p:spTree>
+      <p:nvGrpSpPr>
+        <p:cNvPr id="1" name=""/>
+        <p:cNvGrpSpPr/>
+        <p:nvPr/>
+      </p:nvGrpSpPr>
+      <p:grpSpPr>
+        <a:xfrm>
+          <a:off x="0" y="0"/>
+          <a:ext cx="0" cy="0"/>
+          <a:chOff x="0" y="0"/>
+          <a:chExt cx="0" cy="0"/>
+        </a:xfrm>
+      </p:grpSpPr>
+      <p:sp>
+        <p:nvSpPr>
+          <p:cNvPr id="2" name="Text 0"/>
+          <p:cNvSpPr/>
+          <p:nvPr/>
+        </p:nvSpPr>
+        <p:spPr>
+          <a:xfrm>
             <a:off x="548640" y="320040"/>
             <a:ext cx="11064240" cy="731520"/>
           </a:xfrm>
@@ -15143,7 +16910,7 @@
                 <a:ea typeface="Courier New" pitchFamily="34" charset="-122"/>
                 <a:cs typeface="Courier New" pitchFamily="34" charset="-120"/>
               </a:rPr>
-              <a:t>3 / 26   Smart-RUDP</a:t>
+              <a:t>3 / 27   Smart-RUDP</a:t>
             </a:r>
             <a:endParaRPr lang="en-US" sz="1000" dirty="0"/>
           </a:p>
@@ -15537,7 +17304,7 @@
                 <a:ea typeface="Courier New" pitchFamily="34" charset="-122"/>
                 <a:cs typeface="Courier New" pitchFamily="34" charset="-120"/>
               </a:rPr>
-              <a:t>4 / 26   Smart-RUDP</a:t>
+              <a:t>4 / 27   Smart-RUDP</a:t>
             </a:r>
             <a:endParaRPr lang="en-US" sz="1000" dirty="0"/>
           </a:p>
@@ -16098,7 +17865,7 @@
                 <a:ea typeface="Courier New" pitchFamily="34" charset="-122"/>
                 <a:cs typeface="Courier New" pitchFamily="34" charset="-120"/>
               </a:rPr>
-              <a:t>5 / 26   Smart-RUDP</a:t>
+              <a:t>5 / 27   Smart-RUDP</a:t>
             </a:r>
             <a:endParaRPr lang="en-US" sz="1000" dirty="0"/>
           </a:p>
@@ -17537,7 +19304,7 @@
                 <a:ea typeface="Courier New" pitchFamily="34" charset="-122"/>
                 <a:cs typeface="Courier New" pitchFamily="34" charset="-120"/>
               </a:rPr>
-              <a:t>6 / 26   Smart-RUDP</a:t>
+              <a:t>6 / 27   Smart-RUDP</a:t>
             </a:r>
             <a:endParaRPr lang="en-US" sz="1000" dirty="0"/>
           </a:p>
@@ -18772,7 +20539,7 @@
                 <a:ea typeface="Courier New" pitchFamily="34" charset="-122"/>
                 <a:cs typeface="Courier New" pitchFamily="34" charset="-120"/>
               </a:rPr>
-              <a:t>7 / 26   Smart-RUDP</a:t>
+              <a:t>7 / 27   Smart-RUDP</a:t>
             </a:r>
             <a:endParaRPr lang="en-US" sz="1000" dirty="0"/>
           </a:p>
@@ -19215,7 +20982,7 @@
                 <a:ea typeface="Courier New" pitchFamily="34" charset="-122"/>
                 <a:cs typeface="Courier New" pitchFamily="34" charset="-120"/>
               </a:rPr>
-              <a:t>8 / 26   Smart-RUDP</a:t>
+              <a:t>8 / 27   Smart-RUDP</a:t>
             </a:r>
             <a:endParaRPr lang="en-US" sz="1000" dirty="0"/>
           </a:p>
@@ -19515,7 +21282,7 @@
                 <a:ea typeface="Courier New" pitchFamily="34" charset="-122"/>
                 <a:cs typeface="Courier New" pitchFamily="34" charset="-120"/>
               </a:rPr>
-              <a:t>9 / 26   Smart-RUDP</a:t>
+              <a:t>9 / 27   Smart-RUDP</a:t>
             </a:r>
             <a:endParaRPr lang="en-US" sz="1000" dirty="0"/>
           </a:p>

--- a/docs/RUDP_Presentation.pptx
+++ b/docs/RUDP_Presentation.pptx
@@ -33,9 +33,10 @@
     <p:sldId id="281" r:id="rId27"/>
     <p:sldId id="282" r:id="rId28"/>
     <p:sldId id="283" r:id="rId29"/>
+    <p:sldId id="284" r:id="rId30"/>
   </p:sldIdLst>
   <p:notesMasterIdLst>
-    <p:notesMasterId r:id="rId30"/>
+    <p:notesMasterId r:id="rId31"/>
   </p:notesMasterIdLst>
   <p:sldSz cx="12192000" cy="6858000"/>
   <p:notesSz cx="6858000" cy="12192000"/>
@@ -2313,6 +2314,94 @@
             <a:fld id="{F7021451-1387-4CA6-816F-3879F97B5CBC}" type="slidenum">
               <a:rPr lang="en-US"/>
               <a:t>28</a:t>
+            </a:fld>
+            <a:endParaRPr lang="en-US"/>
+          </a:p>
+        </p:txBody>
+      </p:sp>
+    </p:spTree>
+    <p:extLst>
+      <p:ext uri="{BB962C8B-B14F-4D97-AF65-F5344CB8AC3E}">
+        <p14:creationId xmlns:p14="http://schemas.microsoft.com/office/powerpoint/2010/main" val="1024086991"/>
+      </p:ext>
+    </p:extLst>
+  </p:cSld>
+  <p:clrMapOvr>
+    <a:masterClrMapping/>
+  </p:clrMapOvr>
+</p:notes>
+</file>
+
+<file path=ppt/notesSlides/notesSlide29.xml><?xml version="1.0" encoding="utf-8"?>
+<p:notes xmlns:a="http://schemas.openxmlformats.org/drawingml/2006/main" xmlns:r="http://schemas.openxmlformats.org/officeDocument/2006/relationships" xmlns:p="http://schemas.openxmlformats.org/presentationml/2006/main">
+  <p:cSld>
+    <p:spTree>
+      <p:nvGrpSpPr>
+        <p:cNvPr id="1" name=""/>
+        <p:cNvGrpSpPr/>
+        <p:nvPr/>
+      </p:nvGrpSpPr>
+      <p:grpSpPr>
+        <a:xfrm>
+          <a:off x="0" y="0"/>
+          <a:ext cx="0" cy="0"/>
+          <a:chOff x="0" y="0"/>
+          <a:chExt cx="0" cy="0"/>
+        </a:xfrm>
+      </p:grpSpPr>
+      <p:sp>
+        <p:nvSpPr>
+          <p:cNvPr id="2" name="Slide Image Placeholder 1"/>
+          <p:cNvSpPr>
+            <a:spLocks noGrp="1" noRot="1" noChangeAspect="1"/>
+          </p:cNvSpPr>
+          <p:nvPr>
+            <p:ph type="sldImg"/>
+          </p:nvPr>
+        </p:nvSpPr>
+        <p:spPr/>
+      </p:sp>
+      <p:sp>
+        <p:nvSpPr>
+          <p:cNvPr id="3" name="Notes Placeholder 2"/>
+          <p:cNvSpPr>
+            <a:spLocks noGrp="1"/>
+          </p:cNvSpPr>
+          <p:nvPr>
+            <p:ph type="body" idx="1"/>
+          </p:nvPr>
+        </p:nvSpPr>
+        <p:spPr/>
+        <p:txBody>
+          <a:bodyPr/>
+          <a:lstStyle/>
+          <a:p>
+            <a:r>
+              <a:rPr lang="en-US" dirty="0"/>
+              <a:t/>
+            </a:r>
+            <a:endParaRPr lang="en-US" dirty="0"/>
+          </a:p>
+        </p:txBody>
+      </p:sp>
+      <p:sp>
+        <p:nvSpPr>
+          <p:cNvPr id="4" name="Slide Number Placeholder 3"/>
+          <p:cNvSpPr>
+            <a:spLocks noGrp="1"/>
+          </p:cNvSpPr>
+          <p:nvPr>
+            <p:ph type="sldNum" sz="quarter" idx="10"/>
+          </p:nvPr>
+        </p:nvSpPr>
+        <p:spPr/>
+        <p:txBody>
+          <a:bodyPr/>
+          <a:lstStyle/>
+          <a:p>
+            <a:fld id="{F7021451-1387-4CA6-816F-3879F97B5CBC}" type="slidenum">
+              <a:rPr lang="en-US"/>
+              <a:t>29</a:t>
             </a:fld>
             <a:endParaRPr lang="en-US"/>
           </a:p>
@@ -3538,7 +3627,7 @@
                 <a:ea typeface="Courier New" pitchFamily="34" charset="-122"/>
                 <a:cs typeface="Courier New" pitchFamily="34" charset="-120"/>
               </a:rPr>
-              <a:t>10 / 27   Smart-RUDP</a:t>
+              <a:t>10 / 28   Smart-RUDP</a:t>
             </a:r>
             <a:endParaRPr lang="en-US" sz="1000" dirty="0"/>
           </a:p>
@@ -3735,7 +3824,7 @@
                 <a:ea typeface="Courier New" pitchFamily="34" charset="-122"/>
                 <a:cs typeface="Courier New" pitchFamily="34" charset="-120"/>
               </a:rPr>
-              <a:t>11 / 27   Smart-RUDP</a:t>
+              <a:t>11 / 28   Smart-RUDP</a:t>
             </a:r>
             <a:endParaRPr lang="en-US" sz="1000" dirty="0"/>
           </a:p>
@@ -4565,7 +4654,7 @@
                 <a:ea typeface="Courier New" pitchFamily="34" charset="-122"/>
                 <a:cs typeface="Courier New" pitchFamily="34" charset="-120"/>
               </a:rPr>
-              <a:t>12 / 27   Smart-RUDP</a:t>
+              <a:t>12 / 28   Smart-RUDP</a:t>
             </a:r>
             <a:endParaRPr lang="en-US" sz="1000" dirty="0"/>
           </a:p>
@@ -4862,7 +4951,7 @@
                 <a:ea typeface="Courier New" pitchFamily="34" charset="-122"/>
                 <a:cs typeface="Courier New" pitchFamily="34" charset="-120"/>
               </a:rPr>
-              <a:t>13 / 27   Smart-RUDP</a:t>
+              <a:t>13 / 28   Smart-RUDP</a:t>
             </a:r>
             <a:endParaRPr lang="en-US" sz="1000" dirty="0"/>
           </a:p>
@@ -5162,7 +5251,7 @@
                 <a:ea typeface="Courier New" pitchFamily="34" charset="-122"/>
                 <a:cs typeface="Courier New" pitchFamily="34" charset="-120"/>
               </a:rPr>
-              <a:t>14 / 27   Smart-RUDP</a:t>
+              <a:t>14 / 28   Smart-RUDP</a:t>
             </a:r>
             <a:endParaRPr lang="en-US" sz="1000" dirty="0"/>
           </a:p>
@@ -5546,7 +5635,7 @@
                 <a:ea typeface="Courier New" pitchFamily="34" charset="-122"/>
                 <a:cs typeface="Courier New" pitchFamily="34" charset="-120"/>
               </a:rPr>
-              <a:t>15 / 27   Smart-RUDP</a:t>
+              <a:t>15 / 28   Smart-RUDP</a:t>
             </a:r>
             <a:endParaRPr lang="en-US" sz="1000" dirty="0"/>
           </a:p>
@@ -6004,7 +6093,7 @@
                 <a:ea typeface="Courier New" pitchFamily="34" charset="-122"/>
                 <a:cs typeface="Courier New" pitchFamily="34" charset="-120"/>
               </a:rPr>
-              <a:t>16 / 27   Smart-RUDP</a:t>
+              <a:t>16 / 28   Smart-RUDP</a:t>
             </a:r>
             <a:endParaRPr lang="en-US" sz="1000" dirty="0"/>
           </a:p>
@@ -6689,7 +6778,7 @@
                 <a:ea typeface="Courier New" pitchFamily="34" charset="-122"/>
                 <a:cs typeface="Courier New" pitchFamily="34" charset="-120"/>
               </a:rPr>
-              <a:t>17 / 27   Smart-RUDP</a:t>
+              <a:t>17 / 28   Smart-RUDP</a:t>
             </a:r>
             <a:endParaRPr lang="en-US" sz="1000" dirty="0"/>
           </a:p>
@@ -6929,7 +7018,7 @@
                 <a:ea typeface="Courier New" pitchFamily="34" charset="-122"/>
                 <a:cs typeface="Courier New" pitchFamily="34" charset="-120"/>
               </a:rPr>
-              <a:t>18 / 27   Smart-RUDP</a:t>
+              <a:t>18 / 28   Smart-RUDP</a:t>
             </a:r>
             <a:endParaRPr lang="en-US" sz="1000" dirty="0"/>
           </a:p>
@@ -7169,7 +7258,7 @@
                 <a:ea typeface="Courier New" pitchFamily="34" charset="-122"/>
                 <a:cs typeface="Courier New" pitchFamily="34" charset="-120"/>
               </a:rPr>
-              <a:t>19 / 27   Smart-RUDP</a:t>
+              <a:t>19 / 28   Smart-RUDP</a:t>
             </a:r>
             <a:endParaRPr lang="en-US" sz="1000" dirty="0"/>
           </a:p>
@@ -7391,7 +7480,7 @@
                 <a:ea typeface="Courier New" pitchFamily="34" charset="-122"/>
                 <a:cs typeface="Courier New" pitchFamily="34" charset="-120"/>
               </a:rPr>
-              <a:t>2 / 27   Smart-RUDP</a:t>
+              <a:t>2 / 28   Smart-RUDP</a:t>
             </a:r>
             <a:endParaRPr lang="en-US" sz="1000" dirty="0"/>
           </a:p>
@@ -7785,7 +7874,7 @@
                 <a:ea typeface="Courier New" pitchFamily="34" charset="-122"/>
                 <a:cs typeface="Courier New" pitchFamily="34" charset="-120"/>
               </a:rPr>
-              <a:t>20 / 27   Smart-RUDP</a:t>
+              <a:t>20 / 28   Smart-RUDP</a:t>
             </a:r>
             <a:endParaRPr lang="en-US" sz="1000" dirty="0"/>
           </a:p>
@@ -8109,7 +8198,7 @@
                 <a:ea typeface="Courier New" pitchFamily="34" charset="-122"/>
                 <a:cs typeface="Courier New" pitchFamily="34" charset="-120"/>
               </a:rPr>
-              <a:t>21 / 27   Smart-RUDP</a:t>
+              <a:t>21 / 28   Smart-RUDP</a:t>
             </a:r>
             <a:endParaRPr lang="en-US" sz="1000" dirty="0"/>
           </a:p>
@@ -9816,7 +9905,7 @@
                 <a:ea typeface="Courier New" pitchFamily="34" charset="-122"/>
                 <a:cs typeface="Courier New" pitchFamily="34" charset="-120"/>
               </a:rPr>
-              <a:t>22 / 27   Smart-RUDP</a:t>
+              <a:t>22 / 28   Smart-RUDP</a:t>
             </a:r>
             <a:endParaRPr lang="en-US" sz="1000" dirty="0"/>
           </a:p>
@@ -11199,7 +11288,7 @@
                 <a:ea typeface="Courier New" pitchFamily="34" charset="-122"/>
                 <a:cs typeface="Courier New" pitchFamily="34" charset="-120"/>
               </a:rPr>
-              <a:t>23 / 27   Smart-RUDP</a:t>
+              <a:t>23 / 28   Smart-RUDP</a:t>
             </a:r>
             <a:endParaRPr lang="en-US" sz="1000" dirty="0"/>
           </a:p>
@@ -12742,7 +12831,7 @@
                 <a:ea typeface="Courier New" pitchFamily="34" charset="-122"/>
                 <a:cs typeface="Courier New" pitchFamily="34" charset="-120"/>
               </a:rPr>
-              <a:t>24 / 27   Smart-RUDP</a:t>
+              <a:t>24 / 28   Smart-RUDP</a:t>
             </a:r>
             <a:endParaRPr lang="en-US" sz="1000" dirty="0"/>
           </a:p>
@@ -14420,7 +14509,7 @@
                 <a:ea typeface="Courier New" pitchFamily="34" charset="-122"/>
                 <a:cs typeface="Courier New" pitchFamily="34" charset="-120"/>
               </a:rPr>
-              <a:t>25 / 27   Smart-RUDP</a:t>
+              <a:t>25 / 28   Smart-RUDP</a:t>
             </a:r>
             <a:endParaRPr lang="en-US" sz="1000" dirty="0"/>
           </a:p>
@@ -16059,7 +16148,7 @@
                 <a:ea typeface="Courier New" pitchFamily="34" charset="-122"/>
                 <a:cs typeface="Courier New" pitchFamily="34" charset="-120"/>
               </a:rPr>
-              <a:t>Learnings and future work</a:t>
+              <a:t>Performance: bigger windows, tuned baseline</a:t>
             </a:r>
             <a:endParaRPr lang="en-US" sz="3000" dirty="0"/>
           </a:p>
@@ -16098,47 +16187,1825 @@
                 <a:ea typeface="Courier New" pitchFamily="34" charset="-122"/>
                 <a:cs typeface="Courier New" pitchFamily="34" charset="-120"/>
               </a:rPr>
-              <a:t>26 / 27   Smart-RUDP</a:t>
+              <a:t>26 / 28   Smart-RUDP</a:t>
             </a:r>
             <a:endParaRPr lang="en-US" sz="1000" dirty="0"/>
           </a:p>
         </p:txBody>
       </p:sp>
-      <p:sp>
-        <p:nvSpPr>
-          <p:cNvPr id="4" name="Shape 2"/>
+      <p:graphicFrame>
+        <p:nvGraphicFramePr>
+          <p:cNvPr id="27" name="Table 0"/>
+          <p:cNvGraphicFramePr>
+            <a:graphicFrameLocks noGrp="1"/>
+          </p:cNvGraphicFramePr>
+          <p:nvPr>
+            <p:extLst>
+              <p:ext uri="{D42A27DB-BD31-4B8C-83A1-F6EECF244321}">
+                <p14:modId xmlns:p14="http://schemas.microsoft.com/office/powerpoint/2010/main" val="1579011935"/>
+              </p:ext>
+            </p:extLst>
+          </p:nvPr>
+        </p:nvGraphicFramePr>
+        <p:xfrm>
+          <a:off x="548640" y="1188720"/>
+          <a:ext cx="6217920" cy="914400"/>
+        </p:xfrm>
+        <a:graphic>
+          <a:graphicData uri="http://schemas.openxmlformats.org/drawingml/2006/table">
+            <a:tbl>
+              <a:tblPr/>
+              <a:tblGrid>
+                <a:gridCol w="2286000"/>
+                <a:gridCol w="1371600"/>
+                <a:gridCol w="1280160"/>
+                <a:gridCol w="1280160"/>
+              </a:tblGrid>
+              <a:tr h="402336">
+                <a:tc>
+                  <a:txBody>
+                    <a:bodyPr/>
+                    <a:lstStyle/>
+                    <a:p>
+                      <a:pPr indent="0" marL="0">
+                        <a:buNone/>
+                      </a:pPr>
+                      <a:r>
+                        <a:rPr lang="en-US" sz="1300" b="1" dirty="0">
+                          <a:solidFill>
+                            <a:srgbClr val="0B0F14"/>
+                          </a:solidFill>
+                          <a:latin typeface="Courier New" pitchFamily="34" charset="0"/>
+                          <a:ea typeface="Courier New" pitchFamily="34" charset="-122"/>
+                          <a:cs typeface="Courier New" pitchFamily="34" charset="-120"/>
+                        </a:rPr>
+                        <a:t>C transport, seconds</a:t>
+                      </a:r>
+                      <a:endParaRPr lang="en-US" sz="1300" dirty="0">
+                        <a:latin typeface="Courier New" charset="0"/>
+                        <a:ea typeface="Courier New" charset="0"/>
+                        <a:cs typeface="Courier New" charset="0"/>
+                      </a:endParaRPr>
+                    </a:p>
+                  </a:txBody>
+                  <a:tcPr marL="91440" marR="91440" marT="45720" marB="45720">
+                    <a:lnL w="12700" cap="flat" cmpd="sng" algn="ctr">
+                      <a:solidFill>
+                        <a:srgbClr val="2A3441"/>
+                      </a:solidFill>
+                      <a:prstDash val="solid"/>
+                      <a:round/>
+                      <a:headEnd type="none" w="med" len="med"/>
+                      <a:tailEnd type="none" w="med" len="med"/>
+                    </a:lnL>
+                    <a:lnR w="12700" cap="flat" cmpd="sng" algn="ctr">
+                      <a:solidFill>
+                        <a:srgbClr val="2A3441"/>
+                      </a:solidFill>
+                      <a:prstDash val="solid"/>
+                      <a:round/>
+                      <a:headEnd type="none" w="med" len="med"/>
+                      <a:tailEnd type="none" w="med" len="med"/>
+                    </a:lnR>
+                    <a:lnT w="12700" cap="flat" cmpd="sng" algn="ctr">
+                      <a:solidFill>
+                        <a:srgbClr val="2A3441"/>
+                      </a:solidFill>
+                      <a:prstDash val="solid"/>
+                      <a:round/>
+                      <a:headEnd type="none" w="med" len="med"/>
+                      <a:tailEnd type="none" w="med" len="med"/>
+                    </a:lnT>
+                    <a:lnB w="12700" cap="flat" cmpd="sng" algn="ctr">
+                      <a:solidFill>
+                        <a:srgbClr val="2A3441"/>
+                      </a:solidFill>
+                      <a:prstDash val="solid"/>
+                      <a:round/>
+                      <a:headEnd type="none" w="med" len="med"/>
+                      <a:tailEnd type="none" w="med" len="med"/>
+                    </a:lnB>
+                    <a:solidFill>
+                      <a:srgbClr val="39FF88"/>
+                    </a:solidFill>
+                  </a:tcPr>
+                </a:tc>
+                <a:tc>
+                  <a:txBody>
+                    <a:bodyPr/>
+                    <a:lstStyle/>
+                    <a:p>
+                      <a:pPr indent="0" marL="0">
+                        <a:buNone/>
+                      </a:pPr>
+                      <a:r>
+                        <a:rPr lang="en-US" sz="1300" b="1" dirty="0">
+                          <a:solidFill>
+                            <a:srgbClr val="0B0F14"/>
+                          </a:solidFill>
+                          <a:latin typeface="Courier New" pitchFamily="34" charset="0"/>
+                          <a:ea typeface="Courier New" pitchFamily="34" charset="-122"/>
+                          <a:cs typeface="Courier New" pitchFamily="34" charset="-120"/>
+                        </a:rPr>
+                        <a:t>AIMD cap 32</a:t>
+                      </a:r>
+                      <a:endParaRPr lang="en-US" sz="1300" dirty="0">
+                        <a:latin typeface="Courier New" charset="0"/>
+                        <a:ea typeface="Courier New" charset="0"/>
+                        <a:cs typeface="Courier New" charset="0"/>
+                      </a:endParaRPr>
+                    </a:p>
+                  </a:txBody>
+                  <a:tcPr marL="91440" marR="91440" marT="45720" marB="45720">
+                    <a:lnL w="12700" cap="flat" cmpd="sng" algn="ctr">
+                      <a:solidFill>
+                        <a:srgbClr val="2A3441"/>
+                      </a:solidFill>
+                      <a:prstDash val="solid"/>
+                      <a:round/>
+                      <a:headEnd type="none" w="med" len="med"/>
+                      <a:tailEnd type="none" w="med" len="med"/>
+                    </a:lnL>
+                    <a:lnR w="12700" cap="flat" cmpd="sng" algn="ctr">
+                      <a:solidFill>
+                        <a:srgbClr val="2A3441"/>
+                      </a:solidFill>
+                      <a:prstDash val="solid"/>
+                      <a:round/>
+                      <a:headEnd type="none" w="med" len="med"/>
+                      <a:tailEnd type="none" w="med" len="med"/>
+                    </a:lnR>
+                    <a:lnT w="12700" cap="flat" cmpd="sng" algn="ctr">
+                      <a:solidFill>
+                        <a:srgbClr val="2A3441"/>
+                      </a:solidFill>
+                      <a:prstDash val="solid"/>
+                      <a:round/>
+                      <a:headEnd type="none" w="med" len="med"/>
+                      <a:tailEnd type="none" w="med" len="med"/>
+                    </a:lnT>
+                    <a:lnB w="12700" cap="flat" cmpd="sng" algn="ctr">
+                      <a:solidFill>
+                        <a:srgbClr val="2A3441"/>
+                      </a:solidFill>
+                      <a:prstDash val="solid"/>
+                      <a:round/>
+                      <a:headEnd type="none" w="med" len="med"/>
+                      <a:tailEnd type="none" w="med" len="med"/>
+                    </a:lnB>
+                    <a:solidFill>
+                      <a:srgbClr val="39FF88"/>
+                    </a:solidFill>
+                  </a:tcPr>
+                </a:tc>
+                <a:tc>
+                  <a:txBody>
+                    <a:bodyPr/>
+                    <a:lstStyle/>
+                    <a:p>
+                      <a:pPr indent="0" marL="0">
+                        <a:buNone/>
+                      </a:pPr>
+                      <a:r>
+                        <a:rPr lang="en-US" sz="1300" b="1" dirty="0">
+                          <a:solidFill>
+                            <a:srgbClr val="0B0F14"/>
+                          </a:solidFill>
+                          <a:latin typeface="Courier New" pitchFamily="34" charset="0"/>
+                          <a:ea typeface="Courier New" pitchFamily="34" charset="-122"/>
+                          <a:cs typeface="Courier New" pitchFamily="34" charset="-120"/>
+                        </a:rPr>
+                        <a:t>AIMD tuned</a:t>
+                      </a:r>
+                      <a:endParaRPr lang="en-US" sz="1300" dirty="0">
+                        <a:latin typeface="Courier New" charset="0"/>
+                        <a:ea typeface="Courier New" charset="0"/>
+                        <a:cs typeface="Courier New" charset="0"/>
+                      </a:endParaRPr>
+                    </a:p>
+                  </a:txBody>
+                  <a:tcPr marL="91440" marR="91440" marT="45720" marB="45720">
+                    <a:lnL w="12700" cap="flat" cmpd="sng" algn="ctr">
+                      <a:solidFill>
+                        <a:srgbClr val="2A3441"/>
+                      </a:solidFill>
+                      <a:prstDash val="solid"/>
+                      <a:round/>
+                      <a:headEnd type="none" w="med" len="med"/>
+                      <a:tailEnd type="none" w="med" len="med"/>
+                    </a:lnL>
+                    <a:lnR w="12700" cap="flat" cmpd="sng" algn="ctr">
+                      <a:solidFill>
+                        <a:srgbClr val="2A3441"/>
+                      </a:solidFill>
+                      <a:prstDash val="solid"/>
+                      <a:round/>
+                      <a:headEnd type="none" w="med" len="med"/>
+                      <a:tailEnd type="none" w="med" len="med"/>
+                    </a:lnR>
+                    <a:lnT w="12700" cap="flat" cmpd="sng" algn="ctr">
+                      <a:solidFill>
+                        <a:srgbClr val="2A3441"/>
+                      </a:solidFill>
+                      <a:prstDash val="solid"/>
+                      <a:round/>
+                      <a:headEnd type="none" w="med" len="med"/>
+                      <a:tailEnd type="none" w="med" len="med"/>
+                    </a:lnT>
+                    <a:lnB w="12700" cap="flat" cmpd="sng" algn="ctr">
+                      <a:solidFill>
+                        <a:srgbClr val="2A3441"/>
+                      </a:solidFill>
+                      <a:prstDash val="solid"/>
+                      <a:round/>
+                      <a:headEnd type="none" w="med" len="med"/>
+                      <a:tailEnd type="none" w="med" len="med"/>
+                    </a:lnB>
+                    <a:solidFill>
+                      <a:srgbClr val="39FF88"/>
+                    </a:solidFill>
+                  </a:tcPr>
+                </a:tc>
+                <a:tc>
+                  <a:txBody>
+                    <a:bodyPr/>
+                    <a:lstStyle/>
+                    <a:p>
+                      <a:pPr indent="0" marL="0">
+                        <a:buNone/>
+                      </a:pPr>
+                      <a:r>
+                        <a:rPr lang="en-US" sz="1300" b="1" dirty="0">
+                          <a:solidFill>
+                            <a:srgbClr val="0B0F14"/>
+                          </a:solidFill>
+                          <a:latin typeface="Courier New" pitchFamily="34" charset="0"/>
+                          <a:ea typeface="Courier New" pitchFamily="34" charset="-122"/>
+                          <a:cs typeface="Courier New" pitchFamily="34" charset="-120"/>
+                        </a:rPr>
+                        <a:t>Neural</a:t>
+                      </a:r>
+                      <a:endParaRPr lang="en-US" sz="1300" dirty="0">
+                        <a:latin typeface="Courier New" charset="0"/>
+                        <a:ea typeface="Courier New" charset="0"/>
+                        <a:cs typeface="Courier New" charset="0"/>
+                      </a:endParaRPr>
+                    </a:p>
+                  </a:txBody>
+                  <a:tcPr marL="91440" marR="91440" marT="45720" marB="45720">
+                    <a:lnL w="12700" cap="flat" cmpd="sng" algn="ctr">
+                      <a:solidFill>
+                        <a:srgbClr val="2A3441"/>
+                      </a:solidFill>
+                      <a:prstDash val="solid"/>
+                      <a:round/>
+                      <a:headEnd type="none" w="med" len="med"/>
+                      <a:tailEnd type="none" w="med" len="med"/>
+                    </a:lnL>
+                    <a:lnR w="12700" cap="flat" cmpd="sng" algn="ctr">
+                      <a:solidFill>
+                        <a:srgbClr val="2A3441"/>
+                      </a:solidFill>
+                      <a:prstDash val="solid"/>
+                      <a:round/>
+                      <a:headEnd type="none" w="med" len="med"/>
+                      <a:tailEnd type="none" w="med" len="med"/>
+                    </a:lnR>
+                    <a:lnT w="12700" cap="flat" cmpd="sng" algn="ctr">
+                      <a:solidFill>
+                        <a:srgbClr val="2A3441"/>
+                      </a:solidFill>
+                      <a:prstDash val="solid"/>
+                      <a:round/>
+                      <a:headEnd type="none" w="med" len="med"/>
+                      <a:tailEnd type="none" w="med" len="med"/>
+                    </a:lnT>
+                    <a:lnB w="12700" cap="flat" cmpd="sng" algn="ctr">
+                      <a:solidFill>
+                        <a:srgbClr val="2A3441"/>
+                      </a:solidFill>
+                      <a:prstDash val="solid"/>
+                      <a:round/>
+                      <a:headEnd type="none" w="med" len="med"/>
+                      <a:tailEnd type="none" w="med" len="med"/>
+                    </a:lnB>
+                    <a:solidFill>
+                      <a:srgbClr val="39FF88"/>
+                    </a:solidFill>
+                  </a:tcPr>
+                </a:tc>
+              </a:tr>
+              <a:tr h="402336">
+                <a:tc>
+                  <a:txBody>
+                    <a:bodyPr/>
+                    <a:lstStyle/>
+                    <a:p>
+                      <a:pPr indent="0" marL="0">
+                        <a:buNone/>
+                      </a:pPr>
+                      <a:r>
+                        <a:rPr lang="en-US" sz="1300" dirty="0">
+                          <a:solidFill>
+                            <a:srgbClr val="E6EDF3"/>
+                          </a:solidFill>
+                          <a:latin typeface="Calibri" pitchFamily="34" charset="0"/>
+                          <a:ea typeface="Calibri" pitchFamily="34" charset="-122"/>
+                          <a:cs typeface="Calibri" pitchFamily="34" charset="-120"/>
+                        </a:rPr>
+                        <a:t>Lossy 2%</a:t>
+                      </a:r>
+                      <a:endParaRPr lang="en-US" sz="1300" dirty="0">
+                        <a:latin typeface="Calibri" charset="0"/>
+                        <a:ea typeface="Calibri" charset="0"/>
+                        <a:cs typeface="Calibri" charset="0"/>
+                      </a:endParaRPr>
+                    </a:p>
+                  </a:txBody>
+                  <a:tcPr marL="91440" marR="91440" marT="45720" marB="45720">
+                    <a:lnL w="12700" cap="flat" cmpd="sng" algn="ctr">
+                      <a:solidFill>
+                        <a:srgbClr val="2A3441"/>
+                      </a:solidFill>
+                      <a:prstDash val="solid"/>
+                      <a:round/>
+                      <a:headEnd type="none" w="med" len="med"/>
+                      <a:tailEnd type="none" w="med" len="med"/>
+                    </a:lnL>
+                    <a:lnR w="12700" cap="flat" cmpd="sng" algn="ctr">
+                      <a:solidFill>
+                        <a:srgbClr val="2A3441"/>
+                      </a:solidFill>
+                      <a:prstDash val="solid"/>
+                      <a:round/>
+                      <a:headEnd type="none" w="med" len="med"/>
+                      <a:tailEnd type="none" w="med" len="med"/>
+                    </a:lnR>
+                    <a:lnT w="12700" cap="flat" cmpd="sng" algn="ctr">
+                      <a:solidFill>
+                        <a:srgbClr val="2A3441"/>
+                      </a:solidFill>
+                      <a:prstDash val="solid"/>
+                      <a:round/>
+                      <a:headEnd type="none" w="med" len="med"/>
+                      <a:tailEnd type="none" w="med" len="med"/>
+                    </a:lnT>
+                    <a:lnB w="12700" cap="flat" cmpd="sng" algn="ctr">
+                      <a:solidFill>
+                        <a:srgbClr val="2A3441"/>
+                      </a:solidFill>
+                      <a:prstDash val="solid"/>
+                      <a:round/>
+                      <a:headEnd type="none" w="med" len="med"/>
+                      <a:tailEnd type="none" w="med" len="med"/>
+                    </a:lnB>
+                    <a:solidFill>
+                      <a:srgbClr val="141B24"/>
+                    </a:solidFill>
+                  </a:tcPr>
+                </a:tc>
+                <a:tc>
+                  <a:txBody>
+                    <a:bodyPr/>
+                    <a:lstStyle/>
+                    <a:p>
+                      <a:pPr indent="0" marL="0">
+                        <a:buNone/>
+                      </a:pPr>
+                      <a:r>
+                        <a:rPr lang="en-US" sz="1300" dirty="0">
+                          <a:solidFill>
+                            <a:srgbClr val="E6EDF3"/>
+                          </a:solidFill>
+                          <a:latin typeface="Calibri" pitchFamily="34" charset="0"/>
+                          <a:ea typeface="Calibri" pitchFamily="34" charset="-122"/>
+                          <a:cs typeface="Calibri" pitchFamily="34" charset="-120"/>
+                        </a:rPr>
+                        <a:t>8.4</a:t>
+                      </a:r>
+                      <a:endParaRPr lang="en-US" sz="1300" dirty="0">
+                        <a:latin typeface="Calibri" charset="0"/>
+                        <a:ea typeface="Calibri" charset="0"/>
+                        <a:cs typeface="Calibri" charset="0"/>
+                      </a:endParaRPr>
+                    </a:p>
+                  </a:txBody>
+                  <a:tcPr marL="91440" marR="91440" marT="45720" marB="45720">
+                    <a:lnL w="12700" cap="flat" cmpd="sng" algn="ctr">
+                      <a:solidFill>
+                        <a:srgbClr val="2A3441"/>
+                      </a:solidFill>
+                      <a:prstDash val="solid"/>
+                      <a:round/>
+                      <a:headEnd type="none" w="med" len="med"/>
+                      <a:tailEnd type="none" w="med" len="med"/>
+                    </a:lnL>
+                    <a:lnR w="12700" cap="flat" cmpd="sng" algn="ctr">
+                      <a:solidFill>
+                        <a:srgbClr val="2A3441"/>
+                      </a:solidFill>
+                      <a:prstDash val="solid"/>
+                      <a:round/>
+                      <a:headEnd type="none" w="med" len="med"/>
+                      <a:tailEnd type="none" w="med" len="med"/>
+                    </a:lnR>
+                    <a:lnT w="12700" cap="flat" cmpd="sng" algn="ctr">
+                      <a:solidFill>
+                        <a:srgbClr val="2A3441"/>
+                      </a:solidFill>
+                      <a:prstDash val="solid"/>
+                      <a:round/>
+                      <a:headEnd type="none" w="med" len="med"/>
+                      <a:tailEnd type="none" w="med" len="med"/>
+                    </a:lnT>
+                    <a:lnB w="12700" cap="flat" cmpd="sng" algn="ctr">
+                      <a:solidFill>
+                        <a:srgbClr val="2A3441"/>
+                      </a:solidFill>
+                      <a:prstDash val="solid"/>
+                      <a:round/>
+                      <a:headEnd type="none" w="med" len="med"/>
+                      <a:tailEnd type="none" w="med" len="med"/>
+                    </a:lnB>
+                    <a:solidFill>
+                      <a:srgbClr val="141B24"/>
+                    </a:solidFill>
+                  </a:tcPr>
+                </a:tc>
+                <a:tc>
+                  <a:txBody>
+                    <a:bodyPr/>
+                    <a:lstStyle/>
+                    <a:p>
+                      <a:pPr indent="0" marL="0">
+                        <a:buNone/>
+                      </a:pPr>
+                      <a:r>
+                        <a:rPr lang="en-US" sz="1300" dirty="0">
+                          <a:solidFill>
+                            <a:srgbClr val="E6EDF3"/>
+                          </a:solidFill>
+                          <a:latin typeface="Calibri" pitchFamily="34" charset="0"/>
+                          <a:ea typeface="Calibri" pitchFamily="34" charset="-122"/>
+                          <a:cs typeface="Calibri" pitchFamily="34" charset="-120"/>
+                        </a:rPr>
+                        <a:t>8.3</a:t>
+                      </a:r>
+                      <a:endParaRPr lang="en-US" sz="1300" dirty="0">
+                        <a:latin typeface="Calibri" charset="0"/>
+                        <a:ea typeface="Calibri" charset="0"/>
+                        <a:cs typeface="Calibri" charset="0"/>
+                      </a:endParaRPr>
+                    </a:p>
+                  </a:txBody>
+                  <a:tcPr marL="91440" marR="91440" marT="45720" marB="45720">
+                    <a:lnL w="12700" cap="flat" cmpd="sng" algn="ctr">
+                      <a:solidFill>
+                        <a:srgbClr val="2A3441"/>
+                      </a:solidFill>
+                      <a:prstDash val="solid"/>
+                      <a:round/>
+                      <a:headEnd type="none" w="med" len="med"/>
+                      <a:tailEnd type="none" w="med" len="med"/>
+                    </a:lnL>
+                    <a:lnR w="12700" cap="flat" cmpd="sng" algn="ctr">
+                      <a:solidFill>
+                        <a:srgbClr val="2A3441"/>
+                      </a:solidFill>
+                      <a:prstDash val="solid"/>
+                      <a:round/>
+                      <a:headEnd type="none" w="med" len="med"/>
+                      <a:tailEnd type="none" w="med" len="med"/>
+                    </a:lnR>
+                    <a:lnT w="12700" cap="flat" cmpd="sng" algn="ctr">
+                      <a:solidFill>
+                        <a:srgbClr val="2A3441"/>
+                      </a:solidFill>
+                      <a:prstDash val="solid"/>
+                      <a:round/>
+                      <a:headEnd type="none" w="med" len="med"/>
+                      <a:tailEnd type="none" w="med" len="med"/>
+                    </a:lnT>
+                    <a:lnB w="12700" cap="flat" cmpd="sng" algn="ctr">
+                      <a:solidFill>
+                        <a:srgbClr val="2A3441"/>
+                      </a:solidFill>
+                      <a:prstDash val="solid"/>
+                      <a:round/>
+                      <a:headEnd type="none" w="med" len="med"/>
+                      <a:tailEnd type="none" w="med" len="med"/>
+                    </a:lnB>
+                    <a:solidFill>
+                      <a:srgbClr val="141B24"/>
+                    </a:solidFill>
+                  </a:tcPr>
+                </a:tc>
+                <a:tc>
+                  <a:txBody>
+                    <a:bodyPr/>
+                    <a:lstStyle/>
+                    <a:p>
+                      <a:pPr indent="0" marL="0">
+                        <a:buNone/>
+                      </a:pPr>
+                      <a:r>
+                        <a:rPr lang="en-US" sz="1300" dirty="0">
+                          <a:solidFill>
+                            <a:srgbClr val="E6EDF3"/>
+                          </a:solidFill>
+                          <a:latin typeface="Calibri" pitchFamily="34" charset="0"/>
+                          <a:ea typeface="Calibri" pitchFamily="34" charset="-122"/>
+                          <a:cs typeface="Calibri" pitchFamily="34" charset="-120"/>
+                        </a:rPr>
+                        <a:t>4.5</a:t>
+                      </a:r>
+                      <a:endParaRPr lang="en-US" sz="1300" dirty="0">
+                        <a:latin typeface="Calibri" charset="0"/>
+                        <a:ea typeface="Calibri" charset="0"/>
+                        <a:cs typeface="Calibri" charset="0"/>
+                      </a:endParaRPr>
+                    </a:p>
+                  </a:txBody>
+                  <a:tcPr marL="91440" marR="91440" marT="45720" marB="45720">
+                    <a:lnL w="12700" cap="flat" cmpd="sng" algn="ctr">
+                      <a:solidFill>
+                        <a:srgbClr val="2A3441"/>
+                      </a:solidFill>
+                      <a:prstDash val="solid"/>
+                      <a:round/>
+                      <a:headEnd type="none" w="med" len="med"/>
+                      <a:tailEnd type="none" w="med" len="med"/>
+                    </a:lnL>
+                    <a:lnR w="12700" cap="flat" cmpd="sng" algn="ctr">
+                      <a:solidFill>
+                        <a:srgbClr val="2A3441"/>
+                      </a:solidFill>
+                      <a:prstDash val="solid"/>
+                      <a:round/>
+                      <a:headEnd type="none" w="med" len="med"/>
+                      <a:tailEnd type="none" w="med" len="med"/>
+                    </a:lnR>
+                    <a:lnT w="12700" cap="flat" cmpd="sng" algn="ctr">
+                      <a:solidFill>
+                        <a:srgbClr val="2A3441"/>
+                      </a:solidFill>
+                      <a:prstDash val="solid"/>
+                      <a:round/>
+                      <a:headEnd type="none" w="med" len="med"/>
+                      <a:tailEnd type="none" w="med" len="med"/>
+                    </a:lnT>
+                    <a:lnB w="12700" cap="flat" cmpd="sng" algn="ctr">
+                      <a:solidFill>
+                        <a:srgbClr val="2A3441"/>
+                      </a:solidFill>
+                      <a:prstDash val="solid"/>
+                      <a:round/>
+                      <a:headEnd type="none" w="med" len="med"/>
+                      <a:tailEnd type="none" w="med" len="med"/>
+                    </a:lnB>
+                    <a:solidFill>
+                      <a:srgbClr val="141B24"/>
+                    </a:solidFill>
+                  </a:tcPr>
+                </a:tc>
+              </a:tr>
+              <a:tr h="402336">
+                <a:tc>
+                  <a:txBody>
+                    <a:bodyPr/>
+                    <a:lstStyle/>
+                    <a:p>
+                      <a:pPr indent="0" marL="0">
+                        <a:buNone/>
+                      </a:pPr>
+                      <a:r>
+                        <a:rPr lang="en-US" sz="1300" dirty="0">
+                          <a:solidFill>
+                            <a:srgbClr val="E6EDF3"/>
+                          </a:solidFill>
+                          <a:latin typeface="Calibri" pitchFamily="34" charset="0"/>
+                          <a:ea typeface="Calibri" pitchFamily="34" charset="-122"/>
+                          <a:cs typeface="Calibri" pitchFamily="34" charset="-120"/>
+                        </a:rPr>
+                        <a:t>Satellite-like</a:t>
+                      </a:r>
+                      <a:endParaRPr lang="en-US" sz="1300" dirty="0">
+                        <a:latin typeface="Calibri" charset="0"/>
+                        <a:ea typeface="Calibri" charset="0"/>
+                        <a:cs typeface="Calibri" charset="0"/>
+                      </a:endParaRPr>
+                    </a:p>
+                  </a:txBody>
+                  <a:tcPr marL="91440" marR="91440" marT="45720" marB="45720">
+                    <a:lnL w="12700" cap="flat" cmpd="sng" algn="ctr">
+                      <a:solidFill>
+                        <a:srgbClr val="2A3441"/>
+                      </a:solidFill>
+                      <a:prstDash val="solid"/>
+                      <a:round/>
+                      <a:headEnd type="none" w="med" len="med"/>
+                      <a:tailEnd type="none" w="med" len="med"/>
+                    </a:lnL>
+                    <a:lnR w="12700" cap="flat" cmpd="sng" algn="ctr">
+                      <a:solidFill>
+                        <a:srgbClr val="2A3441"/>
+                      </a:solidFill>
+                      <a:prstDash val="solid"/>
+                      <a:round/>
+                      <a:headEnd type="none" w="med" len="med"/>
+                      <a:tailEnd type="none" w="med" len="med"/>
+                    </a:lnR>
+                    <a:lnT w="12700" cap="flat" cmpd="sng" algn="ctr">
+                      <a:solidFill>
+                        <a:srgbClr val="2A3441"/>
+                      </a:solidFill>
+                      <a:prstDash val="solid"/>
+                      <a:round/>
+                      <a:headEnd type="none" w="med" len="med"/>
+                      <a:tailEnd type="none" w="med" len="med"/>
+                    </a:lnT>
+                    <a:lnB w="12700" cap="flat" cmpd="sng" algn="ctr">
+                      <a:solidFill>
+                        <a:srgbClr val="2A3441"/>
+                      </a:solidFill>
+                      <a:prstDash val="solid"/>
+                      <a:round/>
+                      <a:headEnd type="none" w="med" len="med"/>
+                      <a:tailEnd type="none" w="med" len="med"/>
+                    </a:lnB>
+                    <a:solidFill>
+                      <a:srgbClr val="141B24"/>
+                    </a:solidFill>
+                  </a:tcPr>
+                </a:tc>
+                <a:tc>
+                  <a:txBody>
+                    <a:bodyPr/>
+                    <a:lstStyle/>
+                    <a:p>
+                      <a:pPr indent="0" marL="0">
+                        <a:buNone/>
+                      </a:pPr>
+                      <a:r>
+                        <a:rPr lang="en-US" sz="1300" dirty="0">
+                          <a:solidFill>
+                            <a:srgbClr val="E6EDF3"/>
+                          </a:solidFill>
+                          <a:latin typeface="Calibri" pitchFamily="34" charset="0"/>
+                          <a:ea typeface="Calibri" pitchFamily="34" charset="-122"/>
+                          <a:cs typeface="Calibri" pitchFamily="34" charset="-120"/>
+                        </a:rPr>
+                        <a:t>25.1</a:t>
+                      </a:r>
+                      <a:endParaRPr lang="en-US" sz="1300" dirty="0">
+                        <a:latin typeface="Calibri" charset="0"/>
+                        <a:ea typeface="Calibri" charset="0"/>
+                        <a:cs typeface="Calibri" charset="0"/>
+                      </a:endParaRPr>
+                    </a:p>
+                  </a:txBody>
+                  <a:tcPr marL="91440" marR="91440" marT="45720" marB="45720">
+                    <a:lnL w="12700" cap="flat" cmpd="sng" algn="ctr">
+                      <a:solidFill>
+                        <a:srgbClr val="2A3441"/>
+                      </a:solidFill>
+                      <a:prstDash val="solid"/>
+                      <a:round/>
+                      <a:headEnd type="none" w="med" len="med"/>
+                      <a:tailEnd type="none" w="med" len="med"/>
+                    </a:lnL>
+                    <a:lnR w="12700" cap="flat" cmpd="sng" algn="ctr">
+                      <a:solidFill>
+                        <a:srgbClr val="2A3441"/>
+                      </a:solidFill>
+                      <a:prstDash val="solid"/>
+                      <a:round/>
+                      <a:headEnd type="none" w="med" len="med"/>
+                      <a:tailEnd type="none" w="med" len="med"/>
+                    </a:lnR>
+                    <a:lnT w="12700" cap="flat" cmpd="sng" algn="ctr">
+                      <a:solidFill>
+                        <a:srgbClr val="2A3441"/>
+                      </a:solidFill>
+                      <a:prstDash val="solid"/>
+                      <a:round/>
+                      <a:headEnd type="none" w="med" len="med"/>
+                      <a:tailEnd type="none" w="med" len="med"/>
+                    </a:lnT>
+                    <a:lnB w="12700" cap="flat" cmpd="sng" algn="ctr">
+                      <a:solidFill>
+                        <a:srgbClr val="2A3441"/>
+                      </a:solidFill>
+                      <a:prstDash val="solid"/>
+                      <a:round/>
+                      <a:headEnd type="none" w="med" len="med"/>
+                      <a:tailEnd type="none" w="med" len="med"/>
+                    </a:lnB>
+                    <a:solidFill>
+                      <a:srgbClr val="141B24"/>
+                    </a:solidFill>
+                  </a:tcPr>
+                </a:tc>
+                <a:tc>
+                  <a:txBody>
+                    <a:bodyPr/>
+                    <a:lstStyle/>
+                    <a:p>
+                      <a:pPr indent="0" marL="0">
+                        <a:buNone/>
+                      </a:pPr>
+                      <a:r>
+                        <a:rPr lang="en-US" sz="1300" dirty="0">
+                          <a:solidFill>
+                            <a:srgbClr val="E6EDF3"/>
+                          </a:solidFill>
+                          <a:latin typeface="Calibri" pitchFamily="34" charset="0"/>
+                          <a:ea typeface="Calibri" pitchFamily="34" charset="-122"/>
+                          <a:cs typeface="Calibri" pitchFamily="34" charset="-120"/>
+                        </a:rPr>
+                        <a:t>20.0</a:t>
+                      </a:r>
+                      <a:endParaRPr lang="en-US" sz="1300" dirty="0">
+                        <a:latin typeface="Calibri" charset="0"/>
+                        <a:ea typeface="Calibri" charset="0"/>
+                        <a:cs typeface="Calibri" charset="0"/>
+                      </a:endParaRPr>
+                    </a:p>
+                  </a:txBody>
+                  <a:tcPr marL="91440" marR="91440" marT="45720" marB="45720">
+                    <a:lnL w="12700" cap="flat" cmpd="sng" algn="ctr">
+                      <a:solidFill>
+                        <a:srgbClr val="2A3441"/>
+                      </a:solidFill>
+                      <a:prstDash val="solid"/>
+                      <a:round/>
+                      <a:headEnd type="none" w="med" len="med"/>
+                      <a:tailEnd type="none" w="med" len="med"/>
+                    </a:lnL>
+                    <a:lnR w="12700" cap="flat" cmpd="sng" algn="ctr">
+                      <a:solidFill>
+                        <a:srgbClr val="2A3441"/>
+                      </a:solidFill>
+                      <a:prstDash val="solid"/>
+                      <a:round/>
+                      <a:headEnd type="none" w="med" len="med"/>
+                      <a:tailEnd type="none" w="med" len="med"/>
+                    </a:lnR>
+                    <a:lnT w="12700" cap="flat" cmpd="sng" algn="ctr">
+                      <a:solidFill>
+                        <a:srgbClr val="2A3441"/>
+                      </a:solidFill>
+                      <a:prstDash val="solid"/>
+                      <a:round/>
+                      <a:headEnd type="none" w="med" len="med"/>
+                      <a:tailEnd type="none" w="med" len="med"/>
+                    </a:lnT>
+                    <a:lnB w="12700" cap="flat" cmpd="sng" algn="ctr">
+                      <a:solidFill>
+                        <a:srgbClr val="2A3441"/>
+                      </a:solidFill>
+                      <a:prstDash val="solid"/>
+                      <a:round/>
+                      <a:headEnd type="none" w="med" len="med"/>
+                      <a:tailEnd type="none" w="med" len="med"/>
+                    </a:lnB>
+                    <a:solidFill>
+                      <a:srgbClr val="141B24"/>
+                    </a:solidFill>
+                  </a:tcPr>
+                </a:tc>
+                <a:tc>
+                  <a:txBody>
+                    <a:bodyPr/>
+                    <a:lstStyle/>
+                    <a:p>
+                      <a:pPr indent="0" marL="0">
+                        <a:buNone/>
+                      </a:pPr>
+                      <a:r>
+                        <a:rPr lang="en-US" sz="1300" dirty="0">
+                          <a:solidFill>
+                            <a:srgbClr val="E6EDF3"/>
+                          </a:solidFill>
+                          <a:latin typeface="Calibri" pitchFamily="34" charset="0"/>
+                          <a:ea typeface="Calibri" pitchFamily="34" charset="-122"/>
+                          <a:cs typeface="Calibri" pitchFamily="34" charset="-120"/>
+                        </a:rPr>
+                        <a:t>6.3</a:t>
+                      </a:r>
+                      <a:endParaRPr lang="en-US" sz="1300" dirty="0">
+                        <a:latin typeface="Calibri" charset="0"/>
+                        <a:ea typeface="Calibri" charset="0"/>
+                        <a:cs typeface="Calibri" charset="0"/>
+                      </a:endParaRPr>
+                    </a:p>
+                  </a:txBody>
+                  <a:tcPr marL="91440" marR="91440" marT="45720" marB="45720">
+                    <a:lnL w="12700" cap="flat" cmpd="sng" algn="ctr">
+                      <a:solidFill>
+                        <a:srgbClr val="2A3441"/>
+                      </a:solidFill>
+                      <a:prstDash val="solid"/>
+                      <a:round/>
+                      <a:headEnd type="none" w="med" len="med"/>
+                      <a:tailEnd type="none" w="med" len="med"/>
+                    </a:lnL>
+                    <a:lnR w="12700" cap="flat" cmpd="sng" algn="ctr">
+                      <a:solidFill>
+                        <a:srgbClr val="2A3441"/>
+                      </a:solidFill>
+                      <a:prstDash val="solid"/>
+                      <a:round/>
+                      <a:headEnd type="none" w="med" len="med"/>
+                      <a:tailEnd type="none" w="med" len="med"/>
+                    </a:lnR>
+                    <a:lnT w="12700" cap="flat" cmpd="sng" algn="ctr">
+                      <a:solidFill>
+                        <a:srgbClr val="2A3441"/>
+                      </a:solidFill>
+                      <a:prstDash val="solid"/>
+                      <a:round/>
+                      <a:headEnd type="none" w="med" len="med"/>
+                      <a:tailEnd type="none" w="med" len="med"/>
+                    </a:lnT>
+                    <a:lnB w="12700" cap="flat" cmpd="sng" algn="ctr">
+                      <a:solidFill>
+                        <a:srgbClr val="2A3441"/>
+                      </a:solidFill>
+                      <a:prstDash val="solid"/>
+                      <a:round/>
+                      <a:headEnd type="none" w="med" len="med"/>
+                      <a:tailEnd type="none" w="med" len="med"/>
+                    </a:lnB>
+                    <a:solidFill>
+                      <a:srgbClr val="141B24"/>
+                    </a:solidFill>
+                  </a:tcPr>
+                </a:tc>
+              </a:tr>
+              <a:tr h="402336">
+                <a:tc>
+                  <a:txBody>
+                    <a:bodyPr/>
+                    <a:lstStyle/>
+                    <a:p>
+                      <a:pPr indent="0" marL="0">
+                        <a:buNone/>
+                      </a:pPr>
+                      <a:r>
+                        <a:rPr lang="en-US" sz="1300" dirty="0">
+                          <a:solidFill>
+                            <a:srgbClr val="E6EDF3"/>
+                          </a:solidFill>
+                          <a:latin typeface="Calibri" pitchFamily="34" charset="0"/>
+                          <a:ea typeface="Calibri" pitchFamily="34" charset="-122"/>
+                          <a:cs typeface="Calibri" pitchFamily="34" charset="-120"/>
+                        </a:rPr>
+                        <a:t>Fast (3,000 pkts)</a:t>
+                      </a:r>
+                      <a:endParaRPr lang="en-US" sz="1300" dirty="0">
+                        <a:latin typeface="Calibri" charset="0"/>
+                        <a:ea typeface="Calibri" charset="0"/>
+                        <a:cs typeface="Calibri" charset="0"/>
+                      </a:endParaRPr>
+                    </a:p>
+                  </a:txBody>
+                  <a:tcPr marL="91440" marR="91440" marT="45720" marB="45720">
+                    <a:lnL w="12700" cap="flat" cmpd="sng" algn="ctr">
+                      <a:solidFill>
+                        <a:srgbClr val="2A3441"/>
+                      </a:solidFill>
+                      <a:prstDash val="solid"/>
+                      <a:round/>
+                      <a:headEnd type="none" w="med" len="med"/>
+                      <a:tailEnd type="none" w="med" len="med"/>
+                    </a:lnL>
+                    <a:lnR w="12700" cap="flat" cmpd="sng" algn="ctr">
+                      <a:solidFill>
+                        <a:srgbClr val="2A3441"/>
+                      </a:solidFill>
+                      <a:prstDash val="solid"/>
+                      <a:round/>
+                      <a:headEnd type="none" w="med" len="med"/>
+                      <a:tailEnd type="none" w="med" len="med"/>
+                    </a:lnR>
+                    <a:lnT w="12700" cap="flat" cmpd="sng" algn="ctr">
+                      <a:solidFill>
+                        <a:srgbClr val="2A3441"/>
+                      </a:solidFill>
+                      <a:prstDash val="solid"/>
+                      <a:round/>
+                      <a:headEnd type="none" w="med" len="med"/>
+                      <a:tailEnd type="none" w="med" len="med"/>
+                    </a:lnT>
+                    <a:lnB w="12700" cap="flat" cmpd="sng" algn="ctr">
+                      <a:solidFill>
+                        <a:srgbClr val="2A3441"/>
+                      </a:solidFill>
+                      <a:prstDash val="solid"/>
+                      <a:round/>
+                      <a:headEnd type="none" w="med" len="med"/>
+                      <a:tailEnd type="none" w="med" len="med"/>
+                    </a:lnB>
+                    <a:solidFill>
+                      <a:srgbClr val="141B24"/>
+                    </a:solidFill>
+                  </a:tcPr>
+                </a:tc>
+                <a:tc>
+                  <a:txBody>
+                    <a:bodyPr/>
+                    <a:lstStyle/>
+                    <a:p>
+                      <a:pPr indent="0" marL="0">
+                        <a:buNone/>
+                      </a:pPr>
+                      <a:r>
+                        <a:rPr lang="en-US" sz="1300" dirty="0">
+                          <a:solidFill>
+                            <a:srgbClr val="E6EDF3"/>
+                          </a:solidFill>
+                          <a:latin typeface="Calibri" pitchFamily="34" charset="0"/>
+                          <a:ea typeface="Calibri" pitchFamily="34" charset="-122"/>
+                          <a:cs typeface="Calibri" pitchFamily="34" charset="-120"/>
+                        </a:rPr>
+                        <a:t>19.8</a:t>
+                      </a:r>
+                      <a:endParaRPr lang="en-US" sz="1300" dirty="0">
+                        <a:latin typeface="Calibri" charset="0"/>
+                        <a:ea typeface="Calibri" charset="0"/>
+                        <a:cs typeface="Calibri" charset="0"/>
+                      </a:endParaRPr>
+                    </a:p>
+                  </a:txBody>
+                  <a:tcPr marL="91440" marR="91440" marT="45720" marB="45720">
+                    <a:lnL w="12700" cap="flat" cmpd="sng" algn="ctr">
+                      <a:solidFill>
+                        <a:srgbClr val="2A3441"/>
+                      </a:solidFill>
+                      <a:prstDash val="solid"/>
+                      <a:round/>
+                      <a:headEnd type="none" w="med" len="med"/>
+                      <a:tailEnd type="none" w="med" len="med"/>
+                    </a:lnL>
+                    <a:lnR w="12700" cap="flat" cmpd="sng" algn="ctr">
+                      <a:solidFill>
+                        <a:srgbClr val="2A3441"/>
+                      </a:solidFill>
+                      <a:prstDash val="solid"/>
+                      <a:round/>
+                      <a:headEnd type="none" w="med" len="med"/>
+                      <a:tailEnd type="none" w="med" len="med"/>
+                    </a:lnR>
+                    <a:lnT w="12700" cap="flat" cmpd="sng" algn="ctr">
+                      <a:solidFill>
+                        <a:srgbClr val="2A3441"/>
+                      </a:solidFill>
+                      <a:prstDash val="solid"/>
+                      <a:round/>
+                      <a:headEnd type="none" w="med" len="med"/>
+                      <a:tailEnd type="none" w="med" len="med"/>
+                    </a:lnT>
+                    <a:lnB w="12700" cap="flat" cmpd="sng" algn="ctr">
+                      <a:solidFill>
+                        <a:srgbClr val="2A3441"/>
+                      </a:solidFill>
+                      <a:prstDash val="solid"/>
+                      <a:round/>
+                      <a:headEnd type="none" w="med" len="med"/>
+                      <a:tailEnd type="none" w="med" len="med"/>
+                    </a:lnB>
+                    <a:solidFill>
+                      <a:srgbClr val="141B24"/>
+                    </a:solidFill>
+                  </a:tcPr>
+                </a:tc>
+                <a:tc>
+                  <a:txBody>
+                    <a:bodyPr/>
+                    <a:lstStyle/>
+                    <a:p>
+                      <a:pPr indent="0" marL="0">
+                        <a:buNone/>
+                      </a:pPr>
+                      <a:r>
+                        <a:rPr lang="en-US" sz="1300" dirty="0">
+                          <a:solidFill>
+                            <a:srgbClr val="E6EDF3"/>
+                          </a:solidFill>
+                          <a:latin typeface="Calibri" pitchFamily="34" charset="0"/>
+                          <a:ea typeface="Calibri" pitchFamily="34" charset="-122"/>
+                          <a:cs typeface="Calibri" pitchFamily="34" charset="-120"/>
+                        </a:rPr>
+                        <a:t>17.3</a:t>
+                      </a:r>
+                      <a:endParaRPr lang="en-US" sz="1300" dirty="0">
+                        <a:latin typeface="Calibri" charset="0"/>
+                        <a:ea typeface="Calibri" charset="0"/>
+                        <a:cs typeface="Calibri" charset="0"/>
+                      </a:endParaRPr>
+                    </a:p>
+                  </a:txBody>
+                  <a:tcPr marL="91440" marR="91440" marT="45720" marB="45720">
+                    <a:lnL w="12700" cap="flat" cmpd="sng" algn="ctr">
+                      <a:solidFill>
+                        <a:srgbClr val="2A3441"/>
+                      </a:solidFill>
+                      <a:prstDash val="solid"/>
+                      <a:round/>
+                      <a:headEnd type="none" w="med" len="med"/>
+                      <a:tailEnd type="none" w="med" len="med"/>
+                    </a:lnL>
+                    <a:lnR w="12700" cap="flat" cmpd="sng" algn="ctr">
+                      <a:solidFill>
+                        <a:srgbClr val="2A3441"/>
+                      </a:solidFill>
+                      <a:prstDash val="solid"/>
+                      <a:round/>
+                      <a:headEnd type="none" w="med" len="med"/>
+                      <a:tailEnd type="none" w="med" len="med"/>
+                    </a:lnR>
+                    <a:lnT w="12700" cap="flat" cmpd="sng" algn="ctr">
+                      <a:solidFill>
+                        <a:srgbClr val="2A3441"/>
+                      </a:solidFill>
+                      <a:prstDash val="solid"/>
+                      <a:round/>
+                      <a:headEnd type="none" w="med" len="med"/>
+                      <a:tailEnd type="none" w="med" len="med"/>
+                    </a:lnT>
+                    <a:lnB w="12700" cap="flat" cmpd="sng" algn="ctr">
+                      <a:solidFill>
+                        <a:srgbClr val="2A3441"/>
+                      </a:solidFill>
+                      <a:prstDash val="solid"/>
+                      <a:round/>
+                      <a:headEnd type="none" w="med" len="med"/>
+                      <a:tailEnd type="none" w="med" len="med"/>
+                    </a:lnB>
+                    <a:solidFill>
+                      <a:srgbClr val="141B24"/>
+                    </a:solidFill>
+                  </a:tcPr>
+                </a:tc>
+                <a:tc>
+                  <a:txBody>
+                    <a:bodyPr/>
+                    <a:lstStyle/>
+                    <a:p>
+                      <a:pPr indent="0" marL="0">
+                        <a:buNone/>
+                      </a:pPr>
+                      <a:r>
+                        <a:rPr lang="en-US" sz="1300" dirty="0">
+                          <a:solidFill>
+                            <a:srgbClr val="E6EDF3"/>
+                          </a:solidFill>
+                          <a:latin typeface="Calibri" pitchFamily="34" charset="0"/>
+                          <a:ea typeface="Calibri" pitchFamily="34" charset="-122"/>
+                          <a:cs typeface="Calibri" pitchFamily="34" charset="-120"/>
+                        </a:rPr>
+                        <a:t>4.0</a:t>
+                      </a:r>
+                      <a:endParaRPr lang="en-US" sz="1300" dirty="0">
+                        <a:latin typeface="Calibri" charset="0"/>
+                        <a:ea typeface="Calibri" charset="0"/>
+                        <a:cs typeface="Calibri" charset="0"/>
+                      </a:endParaRPr>
+                    </a:p>
+                  </a:txBody>
+                  <a:tcPr marL="91440" marR="91440" marT="45720" marB="45720">
+                    <a:lnL w="12700" cap="flat" cmpd="sng" algn="ctr">
+                      <a:solidFill>
+                        <a:srgbClr val="2A3441"/>
+                      </a:solidFill>
+                      <a:prstDash val="solid"/>
+                      <a:round/>
+                      <a:headEnd type="none" w="med" len="med"/>
+                      <a:tailEnd type="none" w="med" len="med"/>
+                    </a:lnL>
+                    <a:lnR w="12700" cap="flat" cmpd="sng" algn="ctr">
+                      <a:solidFill>
+                        <a:srgbClr val="2A3441"/>
+                      </a:solidFill>
+                      <a:prstDash val="solid"/>
+                      <a:round/>
+                      <a:headEnd type="none" w="med" len="med"/>
+                      <a:tailEnd type="none" w="med" len="med"/>
+                    </a:lnR>
+                    <a:lnT w="12700" cap="flat" cmpd="sng" algn="ctr">
+                      <a:solidFill>
+                        <a:srgbClr val="2A3441"/>
+                      </a:solidFill>
+                      <a:prstDash val="solid"/>
+                      <a:round/>
+                      <a:headEnd type="none" w="med" len="med"/>
+                      <a:tailEnd type="none" w="med" len="med"/>
+                    </a:lnT>
+                    <a:lnB w="12700" cap="flat" cmpd="sng" algn="ctr">
+                      <a:solidFill>
+                        <a:srgbClr val="2A3441"/>
+                      </a:solidFill>
+                      <a:prstDash val="solid"/>
+                      <a:round/>
+                      <a:headEnd type="none" w="med" len="med"/>
+                      <a:tailEnd type="none" w="med" len="med"/>
+                    </a:lnB>
+                    <a:solidFill>
+                      <a:srgbClr val="141B24"/>
+                    </a:solidFill>
+                  </a:tcPr>
+                </a:tc>
+              </a:tr>
+              <a:tr h="402336">
+                <a:tc>
+                  <a:txBody>
+                    <a:bodyPr/>
+                    <a:lstStyle/>
+                    <a:p>
+                      <a:pPr indent="0" marL="0">
+                        <a:buNone/>
+                      </a:pPr>
+                      <a:r>
+                        <a:rPr lang="en-US" sz="1300" dirty="0">
+                          <a:solidFill>
+                            <a:srgbClr val="E6EDF3"/>
+                          </a:solidFill>
+                          <a:latin typeface="Calibri" pitchFamily="34" charset="0"/>
+                          <a:ea typeface="Calibri" pitchFamily="34" charset="-122"/>
+                          <a:cs typeface="Calibri" pitchFamily="34" charset="-120"/>
+                        </a:rPr>
+                        <a:t>5G-like</a:t>
+                      </a:r>
+                      <a:endParaRPr lang="en-US" sz="1300" dirty="0">
+                        <a:latin typeface="Calibri" charset="0"/>
+                        <a:ea typeface="Calibri" charset="0"/>
+                        <a:cs typeface="Calibri" charset="0"/>
+                      </a:endParaRPr>
+                    </a:p>
+                  </a:txBody>
+                  <a:tcPr marL="91440" marR="91440" marT="45720" marB="45720">
+                    <a:lnL w="12700" cap="flat" cmpd="sng" algn="ctr">
+                      <a:solidFill>
+                        <a:srgbClr val="2A3441"/>
+                      </a:solidFill>
+                      <a:prstDash val="solid"/>
+                      <a:round/>
+                      <a:headEnd type="none" w="med" len="med"/>
+                      <a:tailEnd type="none" w="med" len="med"/>
+                    </a:lnL>
+                    <a:lnR w="12700" cap="flat" cmpd="sng" algn="ctr">
+                      <a:solidFill>
+                        <a:srgbClr val="2A3441"/>
+                      </a:solidFill>
+                      <a:prstDash val="solid"/>
+                      <a:round/>
+                      <a:headEnd type="none" w="med" len="med"/>
+                      <a:tailEnd type="none" w="med" len="med"/>
+                    </a:lnR>
+                    <a:lnT w="12700" cap="flat" cmpd="sng" algn="ctr">
+                      <a:solidFill>
+                        <a:srgbClr val="2A3441"/>
+                      </a:solidFill>
+                      <a:prstDash val="solid"/>
+                      <a:round/>
+                      <a:headEnd type="none" w="med" len="med"/>
+                      <a:tailEnd type="none" w="med" len="med"/>
+                    </a:lnT>
+                    <a:lnB w="12700" cap="flat" cmpd="sng" algn="ctr">
+                      <a:solidFill>
+                        <a:srgbClr val="2A3441"/>
+                      </a:solidFill>
+                      <a:prstDash val="solid"/>
+                      <a:round/>
+                      <a:headEnd type="none" w="med" len="med"/>
+                      <a:tailEnd type="none" w="med" len="med"/>
+                    </a:lnB>
+                    <a:solidFill>
+                      <a:srgbClr val="141B24"/>
+                    </a:solidFill>
+                  </a:tcPr>
+                </a:tc>
+                <a:tc>
+                  <a:txBody>
+                    <a:bodyPr/>
+                    <a:lstStyle/>
+                    <a:p>
+                      <a:pPr indent="0" marL="0">
+                        <a:buNone/>
+                      </a:pPr>
+                      <a:r>
+                        <a:rPr lang="en-US" sz="1300" dirty="0">
+                          <a:solidFill>
+                            <a:srgbClr val="E6EDF3"/>
+                          </a:solidFill>
+                          <a:latin typeface="Calibri" pitchFamily="34" charset="0"/>
+                          <a:ea typeface="Calibri" pitchFamily="34" charset="-122"/>
+                          <a:cs typeface="Calibri" pitchFamily="34" charset="-120"/>
+                        </a:rPr>
+                        <a:t>1.30</a:t>
+                      </a:r>
+                      <a:endParaRPr lang="en-US" sz="1300" dirty="0">
+                        <a:latin typeface="Calibri" charset="0"/>
+                        <a:ea typeface="Calibri" charset="0"/>
+                        <a:cs typeface="Calibri" charset="0"/>
+                      </a:endParaRPr>
+                    </a:p>
+                  </a:txBody>
+                  <a:tcPr marL="91440" marR="91440" marT="45720" marB="45720">
+                    <a:lnL w="12700" cap="flat" cmpd="sng" algn="ctr">
+                      <a:solidFill>
+                        <a:srgbClr val="2A3441"/>
+                      </a:solidFill>
+                      <a:prstDash val="solid"/>
+                      <a:round/>
+                      <a:headEnd type="none" w="med" len="med"/>
+                      <a:tailEnd type="none" w="med" len="med"/>
+                    </a:lnL>
+                    <a:lnR w="12700" cap="flat" cmpd="sng" algn="ctr">
+                      <a:solidFill>
+                        <a:srgbClr val="2A3441"/>
+                      </a:solidFill>
+                      <a:prstDash val="solid"/>
+                      <a:round/>
+                      <a:headEnd type="none" w="med" len="med"/>
+                      <a:tailEnd type="none" w="med" len="med"/>
+                    </a:lnR>
+                    <a:lnT w="12700" cap="flat" cmpd="sng" algn="ctr">
+                      <a:solidFill>
+                        <a:srgbClr val="2A3441"/>
+                      </a:solidFill>
+                      <a:prstDash val="solid"/>
+                      <a:round/>
+                      <a:headEnd type="none" w="med" len="med"/>
+                      <a:tailEnd type="none" w="med" len="med"/>
+                    </a:lnT>
+                    <a:lnB w="12700" cap="flat" cmpd="sng" algn="ctr">
+                      <a:solidFill>
+                        <a:srgbClr val="2A3441"/>
+                      </a:solidFill>
+                      <a:prstDash val="solid"/>
+                      <a:round/>
+                      <a:headEnd type="none" w="med" len="med"/>
+                      <a:tailEnd type="none" w="med" len="med"/>
+                    </a:lnB>
+                    <a:solidFill>
+                      <a:srgbClr val="141B24"/>
+                    </a:solidFill>
+                  </a:tcPr>
+                </a:tc>
+                <a:tc>
+                  <a:txBody>
+                    <a:bodyPr/>
+                    <a:lstStyle/>
+                    <a:p>
+                      <a:pPr indent="0" marL="0">
+                        <a:buNone/>
+                      </a:pPr>
+                      <a:r>
+                        <a:rPr lang="en-US" sz="1300" dirty="0">
+                          <a:solidFill>
+                            <a:srgbClr val="E6EDF3"/>
+                          </a:solidFill>
+                          <a:latin typeface="Calibri" pitchFamily="34" charset="0"/>
+                          <a:ea typeface="Calibri" pitchFamily="34" charset="-122"/>
+                          <a:cs typeface="Calibri" pitchFamily="34" charset="-120"/>
+                        </a:rPr>
+                        <a:t>1.09</a:t>
+                      </a:r>
+                      <a:endParaRPr lang="en-US" sz="1300" dirty="0">
+                        <a:latin typeface="Calibri" charset="0"/>
+                        <a:ea typeface="Calibri" charset="0"/>
+                        <a:cs typeface="Calibri" charset="0"/>
+                      </a:endParaRPr>
+                    </a:p>
+                  </a:txBody>
+                  <a:tcPr marL="91440" marR="91440" marT="45720" marB="45720">
+                    <a:lnL w="12700" cap="flat" cmpd="sng" algn="ctr">
+                      <a:solidFill>
+                        <a:srgbClr val="2A3441"/>
+                      </a:solidFill>
+                      <a:prstDash val="solid"/>
+                      <a:round/>
+                      <a:headEnd type="none" w="med" len="med"/>
+                      <a:tailEnd type="none" w="med" len="med"/>
+                    </a:lnL>
+                    <a:lnR w="12700" cap="flat" cmpd="sng" algn="ctr">
+                      <a:solidFill>
+                        <a:srgbClr val="2A3441"/>
+                      </a:solidFill>
+                      <a:prstDash val="solid"/>
+                      <a:round/>
+                      <a:headEnd type="none" w="med" len="med"/>
+                      <a:tailEnd type="none" w="med" len="med"/>
+                    </a:lnR>
+                    <a:lnT w="12700" cap="flat" cmpd="sng" algn="ctr">
+                      <a:solidFill>
+                        <a:srgbClr val="2A3441"/>
+                      </a:solidFill>
+                      <a:prstDash val="solid"/>
+                      <a:round/>
+                      <a:headEnd type="none" w="med" len="med"/>
+                      <a:tailEnd type="none" w="med" len="med"/>
+                    </a:lnT>
+                    <a:lnB w="12700" cap="flat" cmpd="sng" algn="ctr">
+                      <a:solidFill>
+                        <a:srgbClr val="2A3441"/>
+                      </a:solidFill>
+                      <a:prstDash val="solid"/>
+                      <a:round/>
+                      <a:headEnd type="none" w="med" len="med"/>
+                      <a:tailEnd type="none" w="med" len="med"/>
+                    </a:lnB>
+                    <a:solidFill>
+                      <a:srgbClr val="141B24"/>
+                    </a:solidFill>
+                  </a:tcPr>
+                </a:tc>
+                <a:tc>
+                  <a:txBody>
+                    <a:bodyPr/>
+                    <a:lstStyle/>
+                    <a:p>
+                      <a:pPr indent="0" marL="0">
+                        <a:buNone/>
+                      </a:pPr>
+                      <a:r>
+                        <a:rPr lang="en-US" sz="1300" dirty="0">
+                          <a:solidFill>
+                            <a:srgbClr val="E6EDF3"/>
+                          </a:solidFill>
+                          <a:latin typeface="Calibri" pitchFamily="34" charset="0"/>
+                          <a:ea typeface="Calibri" pitchFamily="34" charset="-122"/>
+                          <a:cs typeface="Calibri" pitchFamily="34" charset="-120"/>
+                        </a:rPr>
+                        <a:t>1.09</a:t>
+                      </a:r>
+                      <a:endParaRPr lang="en-US" sz="1300" dirty="0">
+                        <a:latin typeface="Calibri" charset="0"/>
+                        <a:ea typeface="Calibri" charset="0"/>
+                        <a:cs typeface="Calibri" charset="0"/>
+                      </a:endParaRPr>
+                    </a:p>
+                  </a:txBody>
+                  <a:tcPr marL="91440" marR="91440" marT="45720" marB="45720">
+                    <a:lnL w="12700" cap="flat" cmpd="sng" algn="ctr">
+                      <a:solidFill>
+                        <a:srgbClr val="2A3441"/>
+                      </a:solidFill>
+                      <a:prstDash val="solid"/>
+                      <a:round/>
+                      <a:headEnd type="none" w="med" len="med"/>
+                      <a:tailEnd type="none" w="med" len="med"/>
+                    </a:lnL>
+                    <a:lnR w="12700" cap="flat" cmpd="sng" algn="ctr">
+                      <a:solidFill>
+                        <a:srgbClr val="2A3441"/>
+                      </a:solidFill>
+                      <a:prstDash val="solid"/>
+                      <a:round/>
+                      <a:headEnd type="none" w="med" len="med"/>
+                      <a:tailEnd type="none" w="med" len="med"/>
+                    </a:lnR>
+                    <a:lnT w="12700" cap="flat" cmpd="sng" algn="ctr">
+                      <a:solidFill>
+                        <a:srgbClr val="2A3441"/>
+                      </a:solidFill>
+                      <a:prstDash val="solid"/>
+                      <a:round/>
+                      <a:headEnd type="none" w="med" len="med"/>
+                      <a:tailEnd type="none" w="med" len="med"/>
+                    </a:lnT>
+                    <a:lnB w="12700" cap="flat" cmpd="sng" algn="ctr">
+                      <a:solidFill>
+                        <a:srgbClr val="2A3441"/>
+                      </a:solidFill>
+                      <a:prstDash val="solid"/>
+                      <a:round/>
+                      <a:headEnd type="none" w="med" len="med"/>
+                      <a:tailEnd type="none" w="med" len="med"/>
+                    </a:lnB>
+                    <a:solidFill>
+                      <a:srgbClr val="141B24"/>
+                    </a:solidFill>
+                  </a:tcPr>
+                </a:tc>
+              </a:tr>
+              <a:tr h="402336">
+                <a:tc>
+                  <a:txBody>
+                    <a:bodyPr/>
+                    <a:lstStyle/>
+                    <a:p>
+                      <a:pPr indent="0" marL="0">
+                        <a:buNone/>
+                      </a:pPr>
+                      <a:r>
+                        <a:rPr lang="en-US" sz="1300" dirty="0">
+                          <a:solidFill>
+                            <a:srgbClr val="E6EDF3"/>
+                          </a:solidFill>
+                          <a:latin typeface="Calibri" pitchFamily="34" charset="0"/>
+                          <a:ea typeface="Calibri" pitchFamily="34" charset="-122"/>
+                          <a:cs typeface="Calibri" pitchFamily="34" charset="-120"/>
+                        </a:rPr>
+                        <a:t>Hostile, 10% loss</a:t>
+                      </a:r>
+                      <a:endParaRPr lang="en-US" sz="1300" dirty="0">
+                        <a:latin typeface="Calibri" charset="0"/>
+                        <a:ea typeface="Calibri" charset="0"/>
+                        <a:cs typeface="Calibri" charset="0"/>
+                      </a:endParaRPr>
+                    </a:p>
+                  </a:txBody>
+                  <a:tcPr marL="91440" marR="91440" marT="45720" marB="45720">
+                    <a:lnL w="12700" cap="flat" cmpd="sng" algn="ctr">
+                      <a:solidFill>
+                        <a:srgbClr val="2A3441"/>
+                      </a:solidFill>
+                      <a:prstDash val="solid"/>
+                      <a:round/>
+                      <a:headEnd type="none" w="med" len="med"/>
+                      <a:tailEnd type="none" w="med" len="med"/>
+                    </a:lnL>
+                    <a:lnR w="12700" cap="flat" cmpd="sng" algn="ctr">
+                      <a:solidFill>
+                        <a:srgbClr val="2A3441"/>
+                      </a:solidFill>
+                      <a:prstDash val="solid"/>
+                      <a:round/>
+                      <a:headEnd type="none" w="med" len="med"/>
+                      <a:tailEnd type="none" w="med" len="med"/>
+                    </a:lnR>
+                    <a:lnT w="12700" cap="flat" cmpd="sng" algn="ctr">
+                      <a:solidFill>
+                        <a:srgbClr val="2A3441"/>
+                      </a:solidFill>
+                      <a:prstDash val="solid"/>
+                      <a:round/>
+                      <a:headEnd type="none" w="med" len="med"/>
+                      <a:tailEnd type="none" w="med" len="med"/>
+                    </a:lnT>
+                    <a:lnB w="12700" cap="flat" cmpd="sng" algn="ctr">
+                      <a:solidFill>
+                        <a:srgbClr val="2A3441"/>
+                      </a:solidFill>
+                      <a:prstDash val="solid"/>
+                      <a:round/>
+                      <a:headEnd type="none" w="med" len="med"/>
+                      <a:tailEnd type="none" w="med" len="med"/>
+                    </a:lnB>
+                    <a:solidFill>
+                      <a:srgbClr val="141B24"/>
+                    </a:solidFill>
+                  </a:tcPr>
+                </a:tc>
+                <a:tc>
+                  <a:txBody>
+                    <a:bodyPr/>
+                    <a:lstStyle/>
+                    <a:p>
+                      <a:pPr indent="0" marL="0">
+                        <a:buNone/>
+                      </a:pPr>
+                      <a:r>
+                        <a:rPr lang="en-US" sz="1300" dirty="0">
+                          <a:solidFill>
+                            <a:srgbClr val="E6EDF3"/>
+                          </a:solidFill>
+                          <a:latin typeface="Calibri" pitchFamily="34" charset="0"/>
+                          <a:ea typeface="Calibri" pitchFamily="34" charset="-122"/>
+                          <a:cs typeface="Calibri" pitchFamily="34" charset="-120"/>
+                        </a:rPr>
+                        <a:t>7.5</a:t>
+                      </a:r>
+                      <a:endParaRPr lang="en-US" sz="1300" dirty="0">
+                        <a:latin typeface="Calibri" charset="0"/>
+                        <a:ea typeface="Calibri" charset="0"/>
+                        <a:cs typeface="Calibri" charset="0"/>
+                      </a:endParaRPr>
+                    </a:p>
+                  </a:txBody>
+                  <a:tcPr marL="91440" marR="91440" marT="45720" marB="45720">
+                    <a:lnL w="12700" cap="flat" cmpd="sng" algn="ctr">
+                      <a:solidFill>
+                        <a:srgbClr val="2A3441"/>
+                      </a:solidFill>
+                      <a:prstDash val="solid"/>
+                      <a:round/>
+                      <a:headEnd type="none" w="med" len="med"/>
+                      <a:tailEnd type="none" w="med" len="med"/>
+                    </a:lnL>
+                    <a:lnR w="12700" cap="flat" cmpd="sng" algn="ctr">
+                      <a:solidFill>
+                        <a:srgbClr val="2A3441"/>
+                      </a:solidFill>
+                      <a:prstDash val="solid"/>
+                      <a:round/>
+                      <a:headEnd type="none" w="med" len="med"/>
+                      <a:tailEnd type="none" w="med" len="med"/>
+                    </a:lnR>
+                    <a:lnT w="12700" cap="flat" cmpd="sng" algn="ctr">
+                      <a:solidFill>
+                        <a:srgbClr val="2A3441"/>
+                      </a:solidFill>
+                      <a:prstDash val="solid"/>
+                      <a:round/>
+                      <a:headEnd type="none" w="med" len="med"/>
+                      <a:tailEnd type="none" w="med" len="med"/>
+                    </a:lnT>
+                    <a:lnB w="12700" cap="flat" cmpd="sng" algn="ctr">
+                      <a:solidFill>
+                        <a:srgbClr val="2A3441"/>
+                      </a:solidFill>
+                      <a:prstDash val="solid"/>
+                      <a:round/>
+                      <a:headEnd type="none" w="med" len="med"/>
+                      <a:tailEnd type="none" w="med" len="med"/>
+                    </a:lnB>
+                    <a:solidFill>
+                      <a:srgbClr val="141B24"/>
+                    </a:solidFill>
+                  </a:tcPr>
+                </a:tc>
+                <a:tc>
+                  <a:txBody>
+                    <a:bodyPr/>
+                    <a:lstStyle/>
+                    <a:p>
+                      <a:pPr indent="0" marL="0">
+                        <a:buNone/>
+                      </a:pPr>
+                      <a:r>
+                        <a:rPr lang="en-US" sz="1300" dirty="0">
+                          <a:solidFill>
+                            <a:srgbClr val="E6EDF3"/>
+                          </a:solidFill>
+                          <a:latin typeface="Calibri" pitchFamily="34" charset="0"/>
+                          <a:ea typeface="Calibri" pitchFamily="34" charset="-122"/>
+                          <a:cs typeface="Calibri" pitchFamily="34" charset="-120"/>
+                        </a:rPr>
+                        <a:t>8.5</a:t>
+                      </a:r>
+                      <a:endParaRPr lang="en-US" sz="1300" dirty="0">
+                        <a:latin typeface="Calibri" charset="0"/>
+                        <a:ea typeface="Calibri" charset="0"/>
+                        <a:cs typeface="Calibri" charset="0"/>
+                      </a:endParaRPr>
+                    </a:p>
+                  </a:txBody>
+                  <a:tcPr marL="91440" marR="91440" marT="45720" marB="45720">
+                    <a:lnL w="12700" cap="flat" cmpd="sng" algn="ctr">
+                      <a:solidFill>
+                        <a:srgbClr val="2A3441"/>
+                      </a:solidFill>
+                      <a:prstDash val="solid"/>
+                      <a:round/>
+                      <a:headEnd type="none" w="med" len="med"/>
+                      <a:tailEnd type="none" w="med" len="med"/>
+                    </a:lnL>
+                    <a:lnR w="12700" cap="flat" cmpd="sng" algn="ctr">
+                      <a:solidFill>
+                        <a:srgbClr val="2A3441"/>
+                      </a:solidFill>
+                      <a:prstDash val="solid"/>
+                      <a:round/>
+                      <a:headEnd type="none" w="med" len="med"/>
+                      <a:tailEnd type="none" w="med" len="med"/>
+                    </a:lnR>
+                    <a:lnT w="12700" cap="flat" cmpd="sng" algn="ctr">
+                      <a:solidFill>
+                        <a:srgbClr val="2A3441"/>
+                      </a:solidFill>
+                      <a:prstDash val="solid"/>
+                      <a:round/>
+                      <a:headEnd type="none" w="med" len="med"/>
+                      <a:tailEnd type="none" w="med" len="med"/>
+                    </a:lnT>
+                    <a:lnB w="12700" cap="flat" cmpd="sng" algn="ctr">
+                      <a:solidFill>
+                        <a:srgbClr val="2A3441"/>
+                      </a:solidFill>
+                      <a:prstDash val="solid"/>
+                      <a:round/>
+                      <a:headEnd type="none" w="med" len="med"/>
+                      <a:tailEnd type="none" w="med" len="med"/>
+                    </a:lnB>
+                    <a:solidFill>
+                      <a:srgbClr val="141B24"/>
+                    </a:solidFill>
+                  </a:tcPr>
+                </a:tc>
+                <a:tc>
+                  <a:txBody>
+                    <a:bodyPr/>
+                    <a:lstStyle/>
+                    <a:p>
+                      <a:pPr indent="0" marL="0">
+                        <a:buNone/>
+                      </a:pPr>
+                      <a:r>
+                        <a:rPr lang="en-US" sz="1300" dirty="0">
+                          <a:solidFill>
+                            <a:srgbClr val="E6EDF3"/>
+                          </a:solidFill>
+                          <a:latin typeface="Calibri" pitchFamily="34" charset="0"/>
+                          <a:ea typeface="Calibri" pitchFamily="34" charset="-122"/>
+                          <a:cs typeface="Calibri" pitchFamily="34" charset="-120"/>
+                        </a:rPr>
+                        <a:t>5.9</a:t>
+                      </a:r>
+                      <a:endParaRPr lang="en-US" sz="1300" dirty="0">
+                        <a:latin typeface="Calibri" charset="0"/>
+                        <a:ea typeface="Calibri" charset="0"/>
+                        <a:cs typeface="Calibri" charset="0"/>
+                      </a:endParaRPr>
+                    </a:p>
+                  </a:txBody>
+                  <a:tcPr marL="91440" marR="91440" marT="45720" marB="45720">
+                    <a:lnL w="12700" cap="flat" cmpd="sng" algn="ctr">
+                      <a:solidFill>
+                        <a:srgbClr val="2A3441"/>
+                      </a:solidFill>
+                      <a:prstDash val="solid"/>
+                      <a:round/>
+                      <a:headEnd type="none" w="med" len="med"/>
+                      <a:tailEnd type="none" w="med" len="med"/>
+                    </a:lnL>
+                    <a:lnR w="12700" cap="flat" cmpd="sng" algn="ctr">
+                      <a:solidFill>
+                        <a:srgbClr val="2A3441"/>
+                      </a:solidFill>
+                      <a:prstDash val="solid"/>
+                      <a:round/>
+                      <a:headEnd type="none" w="med" len="med"/>
+                      <a:tailEnd type="none" w="med" len="med"/>
+                    </a:lnR>
+                    <a:lnT w="12700" cap="flat" cmpd="sng" algn="ctr">
+                      <a:solidFill>
+                        <a:srgbClr val="2A3441"/>
+                      </a:solidFill>
+                      <a:prstDash val="solid"/>
+                      <a:round/>
+                      <a:headEnd type="none" w="med" len="med"/>
+                      <a:tailEnd type="none" w="med" len="med"/>
+                    </a:lnT>
+                    <a:lnB w="12700" cap="flat" cmpd="sng" algn="ctr">
+                      <a:solidFill>
+                        <a:srgbClr val="2A3441"/>
+                      </a:solidFill>
+                      <a:prstDash val="solid"/>
+                      <a:round/>
+                      <a:headEnd type="none" w="med" len="med"/>
+                      <a:tailEnd type="none" w="med" len="med"/>
+                    </a:lnB>
+                    <a:solidFill>
+                      <a:srgbClr val="141B24"/>
+                    </a:solidFill>
+                  </a:tcPr>
+                </a:tc>
+              </a:tr>
+            </a:tbl>
+          </a:graphicData>
+        </a:graphic>
+      </p:graphicFrame>
+      <p:sp>
+        <p:nvSpPr>
+          <p:cNvPr id="5" name="Text 2"/>
           <p:cNvSpPr/>
           <p:nvPr/>
         </p:nvSpPr>
         <p:spPr>
           <a:xfrm>
-            <a:off x="548640" y="1371600"/>
-            <a:ext cx="5394960" cy="4206240"/>
+            <a:off x="7132320" y="1188720"/>
+            <a:ext cx="4663440" cy="4937760"/>
           </a:xfrm>
           <a:prstGeom prst="rect">
             <a:avLst/>
           </a:prstGeom>
-          <a:solidFill>
-            <a:srgbClr val="141B24"/>
-          </a:solidFill>
-          <a:ln w="12700">
-            <a:solidFill>
-              <a:srgbClr val="39FF88"/>
-            </a:solidFill>
-            <a:prstDash val="solid"/>
-          </a:ln>
+          <a:noFill/>
+          <a:ln/>
         </p:spPr>
-      </p:sp>
-      <p:sp>
-        <p:nvSpPr>
-          <p:cNvPr id="5" name="Text 3"/>
+        <p:txBody>
+          <a:bodyPr wrap="square" lIns="0" tIns="0" rIns="0" bIns="0" rtlCol="0" anchor="t"/>
+          <a:lstStyle/>
+          <a:p>
+            <a:pPr marL="342900" indent="-342900">
+              <a:spcAft>
+                <a:spcPts val="800"/>
+              </a:spcAft>
+              <a:buSzPct val="100000"/>
+              <a:buChar char="•"/>
+            </a:pPr>
+            <a:r>
+              <a:rPr lang="en-US" sz="1400" dirty="0">
+                <a:solidFill>
+                  <a:srgbClr val="E6EDF3"/>
+                </a:solidFill>
+                <a:latin typeface="Calibri" pitchFamily="34" charset="0"/>
+                <a:ea typeface="Calibri" pitchFamily="34" charset="-122"/>
+                <a:cs typeface="Calibri" pitchFamily="34" charset="-120"/>
+              </a:rPr>
+              <a:t>Limit found: window cap 32 caps the satellite path at about 107 packets/s; receive window raised to 256</a:t>
+            </a:r>
+            <a:endParaRPr lang="en-US" sz="1400" dirty="0"/>
+          </a:p>
+          <a:p>
+            <a:pPr marL="342900" indent="-342900">
+              <a:spcAft>
+                <a:spcPts val="800"/>
+              </a:spcAft>
+              <a:buSzPct val="100000"/>
+              <a:buChar char="•"/>
+            </a:pPr>
+            <a:r>
+              <a:rPr lang="en-US" sz="1400" dirty="0">
+                <a:solidFill>
+                  <a:srgbClr val="E6EDF3"/>
+                </a:solidFill>
+                <a:latin typeface="Calibri" pitchFamily="34" charset="0"/>
+                <a:ea typeface="Calibri" pitchFamily="34" charset="-122"/>
+                <a:cs typeface="Calibri" pitchFamily="34" charset="-120"/>
+              </a:rPr>
+              <a:t>Baseline tuned too: AIMD with cap 128 and a high start threshold</a:t>
+            </a:r>
+            <a:endParaRPr lang="en-US" sz="1400" dirty="0"/>
+          </a:p>
+          <a:p>
+            <a:pPr marL="342900" indent="-342900">
+              <a:spcAft>
+                <a:spcPts val="800"/>
+              </a:spcAft>
+              <a:buSzPct val="100000"/>
+              <a:buChar char="•"/>
+            </a:pPr>
+            <a:r>
+              <a:rPr lang="en-US" sz="1400" dirty="0">
+                <a:solidFill>
+                  <a:srgbClr val="E6EDF3"/>
+                </a:solidFill>
+                <a:latin typeface="Calibri" pitchFamily="34" charset="0"/>
+                <a:ea typeface="Calibri" pitchFamily="34" charset="-122"/>
+                <a:cs typeface="Calibri" pitchFamily="34" charset="-120"/>
+              </a:rPr>
+              <a:t>New default for the neural agent: cap 128 plus the AIMD hand-over</a:t>
+            </a:r>
+            <a:endParaRPr lang="en-US" sz="1400" dirty="0"/>
+          </a:p>
+          <a:p>
+            <a:pPr marL="342900" indent="-342900">
+              <a:spcAft>
+                <a:spcPts val="800"/>
+              </a:spcAft>
+              <a:buSzPct val="100000"/>
+              <a:buChar char="•"/>
+            </a:pPr>
+            <a:r>
+              <a:rPr lang="en-US" sz="1400" dirty="0">
+                <a:solidFill>
+                  <a:srgbClr val="E6EDF3"/>
+                </a:solidFill>
+                <a:latin typeface="Calibri" pitchFamily="34" charset="0"/>
+                <a:ea typeface="Calibri" pitchFamily="34" charset="-122"/>
+                <a:cs typeface="Calibri" pitchFamily="34" charset="-120"/>
+              </a:rPr>
+              <a:t>45 to 77% faster than tuned AIMD on lossy, satellite and fast paths; equal on 5G-like and hostile</a:t>
+            </a:r>
+            <a:endParaRPr lang="en-US" sz="1400" dirty="0"/>
+          </a:p>
+          <a:p>
+            <a:pPr marL="342900" indent="-342900">
+              <a:spcAft>
+                <a:spcPts val="800"/>
+              </a:spcAft>
+              <a:buSzPct val="100000"/>
+              <a:buChar char="•"/>
+            </a:pPr>
+            <a:r>
+              <a:rPr lang="en-US" sz="1400" dirty="0">
+                <a:solidFill>
+                  <a:srgbClr val="E6EDF3"/>
+                </a:solidFill>
+                <a:latin typeface="Calibri" pitchFamily="34" charset="0"/>
+                <a:ea typeface="Calibri" pitchFamily="34" charset="-122"/>
+                <a:cs typeface="Calibri" pitchFamily="34" charset="-120"/>
+              </a:rPr>
+              <a:t>CUBIC tried: mixed, never beat the agent. Cost of the agent: more retransmissions on the fast path</a:t>
+            </a:r>
+            <a:endParaRPr lang="en-US" sz="1400" dirty="0"/>
+          </a:p>
+        </p:txBody>
+      </p:sp>
+      <p:sp>
+        <p:nvSpPr>
+          <p:cNvPr id="6" name="Text 3"/>
           <p:cNvSpPr/>
           <p:nvPr/>
         </p:nvSpPr>
         <p:spPr>
           <a:xfrm>
-            <a:off x="731520" y="1508760"/>
-            <a:ext cx="5029200" cy="457200"/>
+            <a:off x="548640" y="4023360"/>
+            <a:ext cx="6217920" cy="731520"/>
           </a:xfrm>
           <a:prstGeom prst="rect">
             <a:avLst/>
@@ -16154,266 +18021,17 @@
               <a:buNone/>
             </a:pPr>
             <a:r>
-              <a:rPr lang="en-US" sz="2000" b="1" dirty="0">
-                <a:solidFill>
-                  <a:srgbClr val="39FF88"/>
-                </a:solidFill>
-                <a:latin typeface="Courier New" pitchFamily="34" charset="0"/>
-                <a:ea typeface="Courier New" pitchFamily="34" charset="-122"/>
-                <a:cs typeface="Courier New" pitchFamily="34" charset="-120"/>
-              </a:rPr>
-              <a:t>Learned</a:t>
-            </a:r>
-            <a:endParaRPr lang="en-US" sz="2000" dirty="0"/>
-          </a:p>
-        </p:txBody>
-      </p:sp>
-      <p:sp>
-        <p:nvSpPr>
-          <p:cNvPr id="6" name="Text 4"/>
-          <p:cNvSpPr/>
-          <p:nvPr/>
-        </p:nvSpPr>
-        <p:spPr>
-          <a:xfrm>
-            <a:off x="731520" y="2011680"/>
-            <a:ext cx="5029200" cy="3429000"/>
-          </a:xfrm>
-          <a:prstGeom prst="rect">
-            <a:avLst/>
-          </a:prstGeom>
-          <a:noFill/>
-          <a:ln/>
-        </p:spPr>
-        <p:txBody>
-          <a:bodyPr wrap="square" lIns="0" tIns="0" rIns="0" bIns="0" rtlCol="0" anchor="t"/>
-          <a:lstStyle/>
-          <a:p>
-            <a:pPr indent="0" marL="0">
-              <a:buNone/>
-            </a:pPr>
-            <a:r>
-              <a:rPr lang="en-US" sz="2000" dirty="0">
-                <a:solidFill>
-                  <a:srgbClr val="E6EDF3"/>
+              <a:rPr lang="en-US" sz="1300" dirty="0">
+                <a:solidFill>
+                  <a:srgbClr val="8B98A5"/>
                 </a:solidFill>
                 <a:latin typeface="Calibri" pitchFamily="34" charset="0"/>
                 <a:ea typeface="Calibri" pitchFamily="34" charset="-122"/>
                 <a:cs typeface="Calibri" pitchFamily="34" charset="-120"/>
               </a:rPr>
-              <a:t>Reliability is a set of simple rules working together.</a:t>
-            </a:r>
-            <a:endParaRPr lang="en-US" sz="2000" dirty="0"/>
-          </a:p>
-          <a:p>
-            <a:pPr indent="0" marL="0">
-              <a:buNone/>
-            </a:pPr>
-            <a:r>
-              <a:rPr lang="en-US" sz="2000" dirty="0">
-                <a:solidFill>
-                  <a:srgbClr val="E6EDF3"/>
-                </a:solidFill>
-                <a:latin typeface="Calibri" pitchFamily="34" charset="0"/>
-                <a:ea typeface="Calibri" pitchFamily="34" charset="-122"/>
-                <a:cs typeface="Calibri" pitchFamily="34" charset="-120"/>
-              </a:rPr>
-              <a:t>Congestion control matters as much as retransmission.</a:t>
-            </a:r>
-            <a:endParaRPr lang="en-US" sz="2000" dirty="0"/>
-          </a:p>
-          <a:p>
-            <a:pPr indent="0" marL="0">
-              <a:buNone/>
-            </a:pPr>
-            <a:r>
-              <a:rPr lang="en-US" sz="2000" dirty="0">
-                <a:solidFill>
-                  <a:srgbClr val="E6EDF3"/>
-                </a:solidFill>
-                <a:latin typeface="Calibri" pitchFamily="34" charset="0"/>
-                <a:ea typeface="Calibri" pitchFamily="34" charset="-122"/>
-                <a:cs typeface="Calibri" pitchFamily="34" charset="-120"/>
-              </a:rPr>
-              <a:t>Testing tools fail in surprising ways.</a:t>
-            </a:r>
-            <a:endParaRPr lang="en-US" sz="2000" dirty="0"/>
-          </a:p>
-        </p:txBody>
-      </p:sp>
-      <p:sp>
-        <p:nvSpPr>
-          <p:cNvPr id="7" name="Shape 5"/>
-          <p:cNvSpPr/>
-          <p:nvPr/>
-        </p:nvSpPr>
-        <p:spPr>
-          <a:xfrm>
-            <a:off x="6217920" y="1371600"/>
-            <a:ext cx="5394960" cy="4206240"/>
-          </a:xfrm>
-          <a:prstGeom prst="rect">
-            <a:avLst/>
-          </a:prstGeom>
-          <a:solidFill>
-            <a:srgbClr val="141B24"/>
-          </a:solidFill>
-          <a:ln w="12700">
-            <a:solidFill>
-              <a:srgbClr val="FFB000"/>
-            </a:solidFill>
-            <a:prstDash val="solid"/>
-          </a:ln>
-        </p:spPr>
-      </p:sp>
-      <p:sp>
-        <p:nvSpPr>
-          <p:cNvPr id="8" name="Text 6"/>
-          <p:cNvSpPr/>
-          <p:nvPr/>
-        </p:nvSpPr>
-        <p:spPr>
-          <a:xfrm>
-            <a:off x="6400800" y="1508760"/>
-            <a:ext cx="5029200" cy="457200"/>
-          </a:xfrm>
-          <a:prstGeom prst="rect">
-            <a:avLst/>
-          </a:prstGeom>
-          <a:noFill/>
-          <a:ln/>
-        </p:spPr>
-        <p:txBody>
-          <a:bodyPr wrap="square" lIns="0" tIns="0" rIns="0" bIns="0" rtlCol="0" anchor="ctr"/>
-          <a:lstStyle/>
-          <a:p>
-            <a:pPr indent="0" marL="0">
-              <a:buNone/>
-            </a:pPr>
-            <a:r>
-              <a:rPr lang="en-US" sz="2000" b="1" dirty="0">
-                <a:solidFill>
-                  <a:srgbClr val="FFB000"/>
-                </a:solidFill>
-                <a:latin typeface="Courier New" pitchFamily="34" charset="0"/>
-                <a:ea typeface="Courier New" pitchFamily="34" charset="-122"/>
-                <a:cs typeface="Courier New" pitchFamily="34" charset="-120"/>
-              </a:rPr>
-              <a:t>Next</a:t>
-            </a:r>
-            <a:endParaRPr lang="en-US" sz="2000" dirty="0"/>
-          </a:p>
-        </p:txBody>
-      </p:sp>
-      <p:sp>
-        <p:nvSpPr>
-          <p:cNvPr id="9" name="Text 7"/>
-          <p:cNvSpPr/>
-          <p:nvPr/>
-        </p:nvSpPr>
-        <p:spPr>
-          <a:xfrm>
-            <a:off x="6400800" y="2011680"/>
-            <a:ext cx="5029200" cy="3429000"/>
-          </a:xfrm>
-          <a:prstGeom prst="rect">
-            <a:avLst/>
-          </a:prstGeom>
-          <a:noFill/>
-          <a:ln/>
-        </p:spPr>
-        <p:txBody>
-          <a:bodyPr wrap="square" lIns="0" tIns="0" rIns="0" bIns="0" rtlCol="0" anchor="t"/>
-          <a:lstStyle/>
-          <a:p>
-            <a:pPr indent="0" marL="0">
-              <a:buNone/>
-            </a:pPr>
-            <a:r>
-              <a:rPr lang="en-US" sz="2000" dirty="0">
-                <a:solidFill>
-                  <a:srgbClr val="E6EDF3"/>
-                </a:solidFill>
-                <a:latin typeface="Calibri" pitchFamily="34" charset="0"/>
-                <a:ea typeface="Calibri" pitchFamily="34" charset="-122"/>
-                <a:cs typeface="Calibri" pitchFamily="34" charset="-120"/>
-              </a:rPr>
-              <a:t>Train the neural agent in C / on real netem</a:t>
-            </a:r>
-            <a:endParaRPr lang="en-US" sz="2000" dirty="0"/>
-          </a:p>
-          <a:p>
-            <a:pPr indent="0" marL="0">
-              <a:buNone/>
-            </a:pPr>
-            <a:r>
-              <a:rPr lang="en-US" sz="2000" dirty="0">
-                <a:solidFill>
-                  <a:srgbClr val="E6EDF3"/>
-                </a:solidFill>
-                <a:latin typeface="Calibri" pitchFamily="34" charset="0"/>
-                <a:ea typeface="Calibri" pitchFamily="34" charset="-122"/>
-                <a:cs typeface="Calibri" pitchFamily="34" charset="-120"/>
-              </a:rPr>
-              <a:t>Selective ACK where throughput limits the path</a:t>
-            </a:r>
-            <a:endParaRPr lang="en-US" sz="2000" dirty="0"/>
-          </a:p>
-          <a:p>
-            <a:pPr indent="0" marL="0">
-              <a:buNone/>
-            </a:pPr>
-            <a:r>
-              <a:rPr lang="en-US" sz="2000" dirty="0">
-                <a:solidFill>
-                  <a:srgbClr val="E6EDF3"/>
-                </a:solidFill>
-                <a:latin typeface="Calibri" pitchFamily="34" charset="0"/>
-                <a:ea typeface="Calibri" pitchFamily="34" charset="-122"/>
-                <a:cs typeface="Calibri" pitchFamily="34" charset="-120"/>
-              </a:rPr>
-              <a:t>Kernel netem and real multi-machine tests</a:t>
-            </a:r>
-            <a:endParaRPr lang="en-US" sz="2000" dirty="0"/>
-          </a:p>
-        </p:txBody>
-      </p:sp>
-      <p:sp>
-        <p:nvSpPr>
-          <p:cNvPr id="10" name="Text 8"/>
-          <p:cNvSpPr/>
-          <p:nvPr/>
-        </p:nvSpPr>
-        <p:spPr>
-          <a:xfrm>
-            <a:off x="548640" y="5852160"/>
-            <a:ext cx="10972800" cy="365760"/>
-          </a:xfrm>
-          <a:prstGeom prst="rect">
-            <a:avLst/>
-          </a:prstGeom>
-          <a:noFill/>
-          <a:ln/>
-        </p:spPr>
-        <p:txBody>
-          <a:bodyPr wrap="square" lIns="0" tIns="0" rIns="0" bIns="0" rtlCol="0" anchor="ctr"/>
-          <a:lstStyle/>
-          <a:p>
-            <a:pPr indent="0" marL="0">
-              <a:buNone/>
-            </a:pPr>
-            <a:r>
-              <a:rPr lang="en-US" sz="1400" dirty="0">
-                <a:solidFill>
-                  <a:srgbClr val="8B98A5"/>
-                </a:solidFill>
-                <a:latin typeface="Calibri" pitchFamily="34" charset="0"/>
-                <a:ea typeface="Calibri" pitchFamily="34" charset="-122"/>
-                <a:cs typeface="Calibri" pitchFamily="34" charset="-120"/>
-              </a:rPr>
-              <a:t>Limits: Go-Back-N wastes bandwidth and suffers under reordering; C tests use an emulated path; the tabular agent did not beat AIMD in C.</a:t>
-            </a:r>
-            <a:endParaRPr lang="en-US" sz="1400" dirty="0"/>
+              <a:t>10 runs per cell (hostile: 5), 95% intervals. Flags: --maxcwnd, --ssthresh, --hybrid, --mode cubic. Code: eval_perf*.sh.</a:t>
+            </a:r>
+            <a:endParaRPr lang="en-US" sz="1300" dirty="0"/>
           </a:p>
         </p:txBody>
       </p:sp>
@@ -16457,8 +18075,8 @@
         </p:nvSpPr>
         <p:spPr>
           <a:xfrm>
-            <a:off x="731520" y="2103120"/>
-            <a:ext cx="10058400" cy="1097280"/>
+            <a:off x="548640" y="320040"/>
+            <a:ext cx="11064240" cy="731520"/>
           </a:xfrm>
           <a:prstGeom prst="rect">
             <a:avLst/>
@@ -16474,7 +18092,7 @@
               <a:buNone/>
             </a:pPr>
             <a:r>
-              <a:rPr lang="en-US" sz="6400" b="1" dirty="0">
+              <a:rPr lang="en-US" sz="3000" b="1" dirty="0">
                 <a:solidFill>
                   <a:srgbClr val="39FF88"/>
                 </a:solidFill>
@@ -16482,9 +18100,9 @@
                 <a:ea typeface="Courier New" pitchFamily="34" charset="-122"/>
                 <a:cs typeface="Courier New" pitchFamily="34" charset="-120"/>
               </a:rPr>
-              <a:t>Thank you</a:t>
-            </a:r>
-            <a:endParaRPr lang="en-US" sz="6400" dirty="0"/>
+              <a:t>Learnings and future work</a:t>
+            </a:r>
+            <a:endParaRPr lang="en-US" sz="3000" dirty="0"/>
           </a:p>
         </p:txBody>
       </p:sp>
@@ -16496,8 +18114,8 @@
         </p:nvSpPr>
         <p:spPr>
           <a:xfrm>
-            <a:off x="731520" y="3474720"/>
-            <a:ext cx="10058400" cy="548640"/>
+            <a:off x="9418320" y="6446520"/>
+            <a:ext cx="2377440" cy="274320"/>
           </a:xfrm>
           <a:prstGeom prst="rect">
             <a:avLst/>
@@ -16509,34 +18127,59 @@
           <a:bodyPr wrap="square" lIns="0" tIns="0" rIns="0" bIns="0" rtlCol="0" anchor="ctr"/>
           <a:lstStyle/>
           <a:p>
-            <a:pPr indent="0" marL="0">
+            <a:pPr algn="r" indent="0" marL="0">
               <a:buNone/>
             </a:pPr>
             <a:r>
-              <a:rPr lang="en-US" sz="2600" dirty="0">
-                <a:solidFill>
-                  <a:srgbClr val="E6EDF3"/>
+              <a:rPr lang="en-US" sz="1000" dirty="0">
+                <a:solidFill>
+                  <a:srgbClr val="8B98A5"/>
                 </a:solidFill>
                 <a:latin typeface="Courier New" pitchFamily="34" charset="0"/>
                 <a:ea typeface="Courier New" pitchFamily="34" charset="-122"/>
                 <a:cs typeface="Courier New" pitchFamily="34" charset="-120"/>
               </a:rPr>
-              <a:t>github.com/Capsturrrr/rudp</a:t>
-            </a:r>
-            <a:endParaRPr lang="en-US" sz="2600" dirty="0"/>
+              <a:t>27 / 28   Smart-RUDP</a:t>
+            </a:r>
+            <a:endParaRPr lang="en-US" sz="1000" dirty="0"/>
           </a:p>
         </p:txBody>
       </p:sp>
       <p:sp>
         <p:nvSpPr>
-          <p:cNvPr id="4" name="Text 2"/>
+          <p:cNvPr id="4" name="Shape 2"/>
           <p:cNvSpPr/>
           <p:nvPr/>
         </p:nvSpPr>
         <p:spPr>
           <a:xfrm>
-            <a:off x="731520" y="4206240"/>
-            <a:ext cx="10058400" cy="457200"/>
+            <a:off x="548640" y="1371600"/>
+            <a:ext cx="5394960" cy="4206240"/>
+          </a:xfrm>
+          <a:prstGeom prst="rect">
+            <a:avLst/>
+          </a:prstGeom>
+          <a:solidFill>
+            <a:srgbClr val="141B24"/>
+          </a:solidFill>
+          <a:ln w="12700">
+            <a:solidFill>
+              <a:srgbClr val="39FF88"/>
+            </a:solidFill>
+            <a:prstDash val="solid"/>
+          </a:ln>
+        </p:spPr>
+      </p:sp>
+      <p:sp>
+        <p:nvSpPr>
+          <p:cNvPr id="5" name="Text 3"/>
+          <p:cNvSpPr/>
+          <p:nvPr/>
+        </p:nvSpPr>
+        <p:spPr>
+          <a:xfrm>
+            <a:off x="731520" y="1508760"/>
+            <a:ext cx="5029200" cy="457200"/>
           </a:xfrm>
           <a:prstGeom prst="rect">
             <a:avLst/>
@@ -16552,17 +18195,266 @@
               <a:buNone/>
             </a:pPr>
             <a:r>
-              <a:rPr lang="en-US" sz="1800" dirty="0">
-                <a:solidFill>
-                  <a:srgbClr val="8B98A5"/>
+              <a:rPr lang="en-US" sz="2000" b="1" dirty="0">
+                <a:solidFill>
+                  <a:srgbClr val="39FF88"/>
+                </a:solidFill>
+                <a:latin typeface="Courier New" pitchFamily="34" charset="0"/>
+                <a:ea typeface="Courier New" pitchFamily="34" charset="-122"/>
+                <a:cs typeface="Courier New" pitchFamily="34" charset="-120"/>
+              </a:rPr>
+              <a:t>Learned</a:t>
+            </a:r>
+            <a:endParaRPr lang="en-US" sz="2000" dirty="0"/>
+          </a:p>
+        </p:txBody>
+      </p:sp>
+      <p:sp>
+        <p:nvSpPr>
+          <p:cNvPr id="6" name="Text 4"/>
+          <p:cNvSpPr/>
+          <p:nvPr/>
+        </p:nvSpPr>
+        <p:spPr>
+          <a:xfrm>
+            <a:off x="731520" y="2011680"/>
+            <a:ext cx="5029200" cy="3429000"/>
+          </a:xfrm>
+          <a:prstGeom prst="rect">
+            <a:avLst/>
+          </a:prstGeom>
+          <a:noFill/>
+          <a:ln/>
+        </p:spPr>
+        <p:txBody>
+          <a:bodyPr wrap="square" lIns="0" tIns="0" rIns="0" bIns="0" rtlCol="0" anchor="t"/>
+          <a:lstStyle/>
+          <a:p>
+            <a:pPr indent="0" marL="0">
+              <a:buNone/>
+            </a:pPr>
+            <a:r>
+              <a:rPr lang="en-US" sz="2000" dirty="0">
+                <a:solidFill>
+                  <a:srgbClr val="E6EDF3"/>
                 </a:solidFill>
                 <a:latin typeface="Calibri" pitchFamily="34" charset="0"/>
                 <a:ea typeface="Calibri" pitchFamily="34" charset="-122"/>
                 <a:cs typeface="Calibri" pitchFamily="34" charset="-120"/>
               </a:rPr>
-              <a:t>Harshavardhan Mallela   Rohit Arya   Shloak Sinha</a:t>
-            </a:r>
-            <a:endParaRPr lang="en-US" sz="1800" dirty="0"/>
+              <a:t>Reliability is a set of simple rules working together.</a:t>
+            </a:r>
+            <a:endParaRPr lang="en-US" sz="2000" dirty="0"/>
+          </a:p>
+          <a:p>
+            <a:pPr indent="0" marL="0">
+              <a:buNone/>
+            </a:pPr>
+            <a:r>
+              <a:rPr lang="en-US" sz="2000" dirty="0">
+                <a:solidFill>
+                  <a:srgbClr val="E6EDF3"/>
+                </a:solidFill>
+                <a:latin typeface="Calibri" pitchFamily="34" charset="0"/>
+                <a:ea typeface="Calibri" pitchFamily="34" charset="-122"/>
+                <a:cs typeface="Calibri" pitchFamily="34" charset="-120"/>
+              </a:rPr>
+              <a:t>Congestion control matters as much as retransmission.</a:t>
+            </a:r>
+            <a:endParaRPr lang="en-US" sz="2000" dirty="0"/>
+          </a:p>
+          <a:p>
+            <a:pPr indent="0" marL="0">
+              <a:buNone/>
+            </a:pPr>
+            <a:r>
+              <a:rPr lang="en-US" sz="2000" dirty="0">
+                <a:solidFill>
+                  <a:srgbClr val="E6EDF3"/>
+                </a:solidFill>
+                <a:latin typeface="Calibri" pitchFamily="34" charset="0"/>
+                <a:ea typeface="Calibri" pitchFamily="34" charset="-122"/>
+                <a:cs typeface="Calibri" pitchFamily="34" charset="-120"/>
+              </a:rPr>
+              <a:t>Testing tools fail in surprising ways.</a:t>
+            </a:r>
+            <a:endParaRPr lang="en-US" sz="2000" dirty="0"/>
+          </a:p>
+        </p:txBody>
+      </p:sp>
+      <p:sp>
+        <p:nvSpPr>
+          <p:cNvPr id="7" name="Shape 5"/>
+          <p:cNvSpPr/>
+          <p:nvPr/>
+        </p:nvSpPr>
+        <p:spPr>
+          <a:xfrm>
+            <a:off x="6217920" y="1371600"/>
+            <a:ext cx="5394960" cy="4206240"/>
+          </a:xfrm>
+          <a:prstGeom prst="rect">
+            <a:avLst/>
+          </a:prstGeom>
+          <a:solidFill>
+            <a:srgbClr val="141B24"/>
+          </a:solidFill>
+          <a:ln w="12700">
+            <a:solidFill>
+              <a:srgbClr val="FFB000"/>
+            </a:solidFill>
+            <a:prstDash val="solid"/>
+          </a:ln>
+        </p:spPr>
+      </p:sp>
+      <p:sp>
+        <p:nvSpPr>
+          <p:cNvPr id="8" name="Text 6"/>
+          <p:cNvSpPr/>
+          <p:nvPr/>
+        </p:nvSpPr>
+        <p:spPr>
+          <a:xfrm>
+            <a:off x="6400800" y="1508760"/>
+            <a:ext cx="5029200" cy="457200"/>
+          </a:xfrm>
+          <a:prstGeom prst="rect">
+            <a:avLst/>
+          </a:prstGeom>
+          <a:noFill/>
+          <a:ln/>
+        </p:spPr>
+        <p:txBody>
+          <a:bodyPr wrap="square" lIns="0" tIns="0" rIns="0" bIns="0" rtlCol="0" anchor="ctr"/>
+          <a:lstStyle/>
+          <a:p>
+            <a:pPr indent="0" marL="0">
+              <a:buNone/>
+            </a:pPr>
+            <a:r>
+              <a:rPr lang="en-US" sz="2000" b="1" dirty="0">
+                <a:solidFill>
+                  <a:srgbClr val="FFB000"/>
+                </a:solidFill>
+                <a:latin typeface="Courier New" pitchFamily="34" charset="0"/>
+                <a:ea typeface="Courier New" pitchFamily="34" charset="-122"/>
+                <a:cs typeface="Courier New" pitchFamily="34" charset="-120"/>
+              </a:rPr>
+              <a:t>Next</a:t>
+            </a:r>
+            <a:endParaRPr lang="en-US" sz="2000" dirty="0"/>
+          </a:p>
+        </p:txBody>
+      </p:sp>
+      <p:sp>
+        <p:nvSpPr>
+          <p:cNvPr id="9" name="Text 7"/>
+          <p:cNvSpPr/>
+          <p:nvPr/>
+        </p:nvSpPr>
+        <p:spPr>
+          <a:xfrm>
+            <a:off x="6400800" y="2011680"/>
+            <a:ext cx="5029200" cy="3429000"/>
+          </a:xfrm>
+          <a:prstGeom prst="rect">
+            <a:avLst/>
+          </a:prstGeom>
+          <a:noFill/>
+          <a:ln/>
+        </p:spPr>
+        <p:txBody>
+          <a:bodyPr wrap="square" lIns="0" tIns="0" rIns="0" bIns="0" rtlCol="0" anchor="t"/>
+          <a:lstStyle/>
+          <a:p>
+            <a:pPr indent="0" marL="0">
+              <a:buNone/>
+            </a:pPr>
+            <a:r>
+              <a:rPr lang="en-US" sz="2000" dirty="0">
+                <a:solidFill>
+                  <a:srgbClr val="E6EDF3"/>
+                </a:solidFill>
+                <a:latin typeface="Calibri" pitchFamily="34" charset="0"/>
+                <a:ea typeface="Calibri" pitchFamily="34" charset="-122"/>
+                <a:cs typeface="Calibri" pitchFamily="34" charset="-120"/>
+              </a:rPr>
+              <a:t>Train the neural agent in C / on real netem</a:t>
+            </a:r>
+            <a:endParaRPr lang="en-US" sz="2000" dirty="0"/>
+          </a:p>
+          <a:p>
+            <a:pPr indent="0" marL="0">
+              <a:buNone/>
+            </a:pPr>
+            <a:r>
+              <a:rPr lang="en-US" sz="2000" dirty="0">
+                <a:solidFill>
+                  <a:srgbClr val="E6EDF3"/>
+                </a:solidFill>
+                <a:latin typeface="Calibri" pitchFamily="34" charset="0"/>
+                <a:ea typeface="Calibri" pitchFamily="34" charset="-122"/>
+                <a:cs typeface="Calibri" pitchFamily="34" charset="-120"/>
+              </a:rPr>
+              <a:t>Selective ACK where throughput limits the path</a:t>
+            </a:r>
+            <a:endParaRPr lang="en-US" sz="2000" dirty="0"/>
+          </a:p>
+          <a:p>
+            <a:pPr indent="0" marL="0">
+              <a:buNone/>
+            </a:pPr>
+            <a:r>
+              <a:rPr lang="en-US" sz="2000" dirty="0">
+                <a:solidFill>
+                  <a:srgbClr val="E6EDF3"/>
+                </a:solidFill>
+                <a:latin typeface="Calibri" pitchFamily="34" charset="0"/>
+                <a:ea typeface="Calibri" pitchFamily="34" charset="-122"/>
+                <a:cs typeface="Calibri" pitchFamily="34" charset="-120"/>
+              </a:rPr>
+              <a:t>Kernel netem and real multi-machine tests</a:t>
+            </a:r>
+            <a:endParaRPr lang="en-US" sz="2000" dirty="0"/>
+          </a:p>
+        </p:txBody>
+      </p:sp>
+      <p:sp>
+        <p:nvSpPr>
+          <p:cNvPr id="10" name="Text 8"/>
+          <p:cNvSpPr/>
+          <p:nvPr/>
+        </p:nvSpPr>
+        <p:spPr>
+          <a:xfrm>
+            <a:off x="548640" y="5852160"/>
+            <a:ext cx="10972800" cy="365760"/>
+          </a:xfrm>
+          <a:prstGeom prst="rect">
+            <a:avLst/>
+          </a:prstGeom>
+          <a:noFill/>
+          <a:ln/>
+        </p:spPr>
+        <p:txBody>
+          <a:bodyPr wrap="square" lIns="0" tIns="0" rIns="0" bIns="0" rtlCol="0" anchor="ctr"/>
+          <a:lstStyle/>
+          <a:p>
+            <a:pPr indent="0" marL="0">
+              <a:buNone/>
+            </a:pPr>
+            <a:r>
+              <a:rPr lang="en-US" sz="1400" dirty="0">
+                <a:solidFill>
+                  <a:srgbClr val="8B98A5"/>
+                </a:solidFill>
+                <a:latin typeface="Calibri" pitchFamily="34" charset="0"/>
+                <a:ea typeface="Calibri" pitchFamily="34" charset="-122"/>
+                <a:cs typeface="Calibri" pitchFamily="34" charset="-120"/>
+              </a:rPr>
+              <a:t>Limits: Go-Back-N wastes bandwidth and suffers under reordering; C tests use an emulated path; the tabular agent did not beat AIMD in C.</a:t>
+            </a:r>
+            <a:endParaRPr lang="en-US" sz="1400" dirty="0"/>
           </a:p>
         </p:txBody>
       </p:sp>
@@ -16606,6 +18498,155 @@
         </p:nvSpPr>
         <p:spPr>
           <a:xfrm>
+            <a:off x="731520" y="2103120"/>
+            <a:ext cx="10058400" cy="1097280"/>
+          </a:xfrm>
+          <a:prstGeom prst="rect">
+            <a:avLst/>
+          </a:prstGeom>
+          <a:noFill/>
+          <a:ln/>
+        </p:spPr>
+        <p:txBody>
+          <a:bodyPr wrap="square" lIns="0" tIns="0" rIns="0" bIns="0" rtlCol="0" anchor="ctr"/>
+          <a:lstStyle/>
+          <a:p>
+            <a:pPr indent="0" marL="0">
+              <a:buNone/>
+            </a:pPr>
+            <a:r>
+              <a:rPr lang="en-US" sz="6400" b="1" dirty="0">
+                <a:solidFill>
+                  <a:srgbClr val="39FF88"/>
+                </a:solidFill>
+                <a:latin typeface="Courier New" pitchFamily="34" charset="0"/>
+                <a:ea typeface="Courier New" pitchFamily="34" charset="-122"/>
+                <a:cs typeface="Courier New" pitchFamily="34" charset="-120"/>
+              </a:rPr>
+              <a:t>Thank you</a:t>
+            </a:r>
+            <a:endParaRPr lang="en-US" sz="6400" dirty="0"/>
+          </a:p>
+        </p:txBody>
+      </p:sp>
+      <p:sp>
+        <p:nvSpPr>
+          <p:cNvPr id="3" name="Text 1"/>
+          <p:cNvSpPr/>
+          <p:nvPr/>
+        </p:nvSpPr>
+        <p:spPr>
+          <a:xfrm>
+            <a:off x="731520" y="3474720"/>
+            <a:ext cx="10058400" cy="548640"/>
+          </a:xfrm>
+          <a:prstGeom prst="rect">
+            <a:avLst/>
+          </a:prstGeom>
+          <a:noFill/>
+          <a:ln/>
+        </p:spPr>
+        <p:txBody>
+          <a:bodyPr wrap="square" lIns="0" tIns="0" rIns="0" bIns="0" rtlCol="0" anchor="ctr"/>
+          <a:lstStyle/>
+          <a:p>
+            <a:pPr indent="0" marL="0">
+              <a:buNone/>
+            </a:pPr>
+            <a:r>
+              <a:rPr lang="en-US" sz="2600" dirty="0">
+                <a:solidFill>
+                  <a:srgbClr val="E6EDF3"/>
+                </a:solidFill>
+                <a:latin typeface="Courier New" pitchFamily="34" charset="0"/>
+                <a:ea typeface="Courier New" pitchFamily="34" charset="-122"/>
+                <a:cs typeface="Courier New" pitchFamily="34" charset="-120"/>
+              </a:rPr>
+              <a:t>github.com/Capsturrrr/rudp</a:t>
+            </a:r>
+            <a:endParaRPr lang="en-US" sz="2600" dirty="0"/>
+          </a:p>
+        </p:txBody>
+      </p:sp>
+      <p:sp>
+        <p:nvSpPr>
+          <p:cNvPr id="4" name="Text 2"/>
+          <p:cNvSpPr/>
+          <p:nvPr/>
+        </p:nvSpPr>
+        <p:spPr>
+          <a:xfrm>
+            <a:off x="731520" y="4206240"/>
+            <a:ext cx="10058400" cy="457200"/>
+          </a:xfrm>
+          <a:prstGeom prst="rect">
+            <a:avLst/>
+          </a:prstGeom>
+          <a:noFill/>
+          <a:ln/>
+        </p:spPr>
+        <p:txBody>
+          <a:bodyPr wrap="square" lIns="0" tIns="0" rIns="0" bIns="0" rtlCol="0" anchor="ctr"/>
+          <a:lstStyle/>
+          <a:p>
+            <a:pPr indent="0" marL="0">
+              <a:buNone/>
+            </a:pPr>
+            <a:r>
+              <a:rPr lang="en-US" sz="1800" dirty="0">
+                <a:solidFill>
+                  <a:srgbClr val="8B98A5"/>
+                </a:solidFill>
+                <a:latin typeface="Calibri" pitchFamily="34" charset="0"/>
+                <a:ea typeface="Calibri" pitchFamily="34" charset="-122"/>
+                <a:cs typeface="Calibri" pitchFamily="34" charset="-120"/>
+              </a:rPr>
+              <a:t>Harshavardhan Mallela   Rohit Arya   Shloak Sinha</a:t>
+            </a:r>
+            <a:endParaRPr lang="en-US" sz="1800" dirty="0"/>
+          </a:p>
+        </p:txBody>
+      </p:sp>
+    </p:spTree>
+  </p:cSld>
+  <p:clrMapOvr>
+    <a:masterClrMapping/>
+  </p:clrMapOvr>
+</p:sld>
+</file>
+
+<file path=ppt/slides/slide29.xml><?xml version="1.0" encoding="utf-8"?>
+<p:sld xmlns:a="http://schemas.openxmlformats.org/drawingml/2006/main" xmlns:r="http://schemas.openxmlformats.org/officeDocument/2006/relationships" xmlns:p="http://schemas.openxmlformats.org/presentationml/2006/main">
+  <p:cSld name="Slide 29">
+    <p:bg>
+      <p:bgPr>
+        <a:solidFill>
+          <a:srgbClr val="0B0F14"/>
+        </a:solidFill>
+      </p:bgPr>
+    </p:bg>
+    <p:spTree>
+      <p:nvGrpSpPr>
+        <p:cNvPr id="1" name=""/>
+        <p:cNvGrpSpPr/>
+        <p:nvPr/>
+      </p:nvGrpSpPr>
+      <p:grpSpPr>
+        <a:xfrm>
+          <a:off x="0" y="0"/>
+          <a:ext cx="0" cy="0"/>
+          <a:chOff x="0" y="0"/>
+          <a:chExt cx="0" cy="0"/>
+        </a:xfrm>
+      </p:grpSpPr>
+      <p:sp>
+        <p:nvSpPr>
+          <p:cNvPr id="2" name="Text 0"/>
+          <p:cNvSpPr/>
+          <p:nvPr/>
+        </p:nvSpPr>
+        <p:spPr>
+          <a:xfrm>
             <a:off x="548640" y="320040"/>
             <a:ext cx="11064240" cy="731520"/>
           </a:xfrm>
@@ -16910,7 +18951,7 @@
                 <a:ea typeface="Courier New" pitchFamily="34" charset="-122"/>
                 <a:cs typeface="Courier New" pitchFamily="34" charset="-120"/>
               </a:rPr>
-              <a:t>3 / 27   Smart-RUDP</a:t>
+              <a:t>3 / 28   Smart-RUDP</a:t>
             </a:r>
             <a:endParaRPr lang="en-US" sz="1000" dirty="0"/>
           </a:p>
@@ -17304,7 +19345,7 @@
                 <a:ea typeface="Courier New" pitchFamily="34" charset="-122"/>
                 <a:cs typeface="Courier New" pitchFamily="34" charset="-120"/>
               </a:rPr>
-              <a:t>4 / 27   Smart-RUDP</a:t>
+              <a:t>4 / 28   Smart-RUDP</a:t>
             </a:r>
             <a:endParaRPr lang="en-US" sz="1000" dirty="0"/>
           </a:p>
@@ -17865,7 +19906,7 @@
                 <a:ea typeface="Courier New" pitchFamily="34" charset="-122"/>
                 <a:cs typeface="Courier New" pitchFamily="34" charset="-120"/>
               </a:rPr>
-              <a:t>5 / 27   Smart-RUDP</a:t>
+              <a:t>5 / 28   Smart-RUDP</a:t>
             </a:r>
             <a:endParaRPr lang="en-US" sz="1000" dirty="0"/>
           </a:p>
@@ -19304,7 +21345,7 @@
                 <a:ea typeface="Courier New" pitchFamily="34" charset="-122"/>
                 <a:cs typeface="Courier New" pitchFamily="34" charset="-120"/>
               </a:rPr>
-              <a:t>6 / 27   Smart-RUDP</a:t>
+              <a:t>6 / 28   Smart-RUDP</a:t>
             </a:r>
             <a:endParaRPr lang="en-US" sz="1000" dirty="0"/>
           </a:p>
@@ -20539,7 +22580,7 @@
                 <a:ea typeface="Courier New" pitchFamily="34" charset="-122"/>
                 <a:cs typeface="Courier New" pitchFamily="34" charset="-120"/>
               </a:rPr>
-              <a:t>7 / 27   Smart-RUDP</a:t>
+              <a:t>7 / 28   Smart-RUDP</a:t>
             </a:r>
             <a:endParaRPr lang="en-US" sz="1000" dirty="0"/>
           </a:p>
@@ -20982,7 +23023,7 @@
                 <a:ea typeface="Courier New" pitchFamily="34" charset="-122"/>
                 <a:cs typeface="Courier New" pitchFamily="34" charset="-120"/>
               </a:rPr>
-              <a:t>8 / 27   Smart-RUDP</a:t>
+              <a:t>8 / 28   Smart-RUDP</a:t>
             </a:r>
             <a:endParaRPr lang="en-US" sz="1000" dirty="0"/>
           </a:p>
@@ -21282,7 +23323,7 @@
                 <a:ea typeface="Courier New" pitchFamily="34" charset="-122"/>
                 <a:cs typeface="Courier New" pitchFamily="34" charset="-120"/>
               </a:rPr>
-              <a:t>9 / 27   Smart-RUDP</a:t>
+              <a:t>9 / 28   Smart-RUDP</a:t>
             </a:r>
             <a:endParaRPr lang="en-US" sz="1000" dirty="0"/>
           </a:p>

--- a/docs/RUDP_Presentation.pptx
+++ b/docs/RUDP_Presentation.pptx
@@ -34,9 +34,12 @@
     <p:sldId id="282" r:id="rId28"/>
     <p:sldId id="283" r:id="rId29"/>
     <p:sldId id="284" r:id="rId30"/>
+    <p:sldId id="285" r:id="rId31"/>
+    <p:sldId id="286" r:id="rId32"/>
+    <p:sldId id="287" r:id="rId33"/>
   </p:sldIdLst>
   <p:notesMasterIdLst>
-    <p:notesMasterId r:id="rId31"/>
+    <p:notesMasterId r:id="rId34"/>
   </p:notesMasterIdLst>
   <p:sldSz cx="12192000" cy="6858000"/>
   <p:notesSz cx="6858000" cy="12192000"/>
@@ -133,6 +136,307 @@
     </a:lvl9pPr>
   </p:defaultTextStyle>
 </p:presentation>
+</file>
+
+<file path=ppt/charts/chart1.xml><?xml version="1.0" encoding="utf-8"?>
+<c:chartSpace xmlns:c="http://schemas.openxmlformats.org/drawingml/2006/chart" xmlns:a="http://schemas.openxmlformats.org/drawingml/2006/main" xmlns:r="http://schemas.openxmlformats.org/officeDocument/2006/relationships">
+  <c:date1904 val="0"/>
+  <c:roundedCorners val="1"/>
+  <c:chart>
+    <c:title>
+      <c:tx>
+        <c:rich>
+          <a:bodyPr/>
+          <a:lstStyle/>
+          <a:p>
+            <a:pPr>
+              <a:defRPr sz="1400" b="0" i="0" u="none" strike="noStrike">
+                <a:solidFill>
+                  <a:srgbClr val="E6EDF3"/>
+                </a:solidFill>
+                <a:latin typeface="Arial"/>
+              </a:defRPr>
+            </a:pPr>
+            <a:r>
+              <a:rPr sz="1400" b="0" i="0" u="none" strike="noStrike">
+                <a:solidFill>
+                  <a:srgbClr val="E6EDF3"/>
+                </a:solidFill>
+                <a:latin typeface="Arial"/>
+              </a:rPr>
+              <a:t>Ablation, 100 random held-out paths</a:t>
+            </a:r>
+          </a:p>
+        </c:rich>
+      </c:tx>
+      <c:layout/>
+      <c:overlay val="0"/>
+    </c:title>
+    <c:autoTitleDeleted val="0"/>
+    <c:plotArea>
+      <c:layout/>
+      <c:barChart>
+        <c:barDir val="bar"/>
+        <c:grouping val="clustered"/>
+        <c:varyColors val="0"/>
+        <c:ser>
+          <c:idx val="0"/>
+          <c:order val="0"/>
+          <c:tx>
+            <c:strRef>
+              <c:f>Sheet1!$B$1</c:f>
+              <c:strCache>
+                <c:ptCount val="1"/>
+                <c:pt idx="0">
+                  <c:v>Time relative to tuned AIMD (lower is better)</c:v>
+                </c:pt>
+              </c:strCache>
+            </c:strRef>
+          </c:tx>
+          <c:spPr>
+            <a:solidFill>
+              <a:srgbClr val="39FF88"/>
+            </a:solidFill>
+            <a:effectLst/>
+          </c:spPr>
+          <c:invertIfNegative val="0"/>
+          <c:dLbls>
+            <c:numFmt formatCode="0.00" sourceLinked="0"/>
+            <c:txPr>
+              <a:bodyPr/>
+              <a:lstStyle/>
+              <a:p>
+                <a:pPr>
+                  <a:defRPr b="0" i="0" strike="noStrike" sz="1100" u="none">
+                    <a:solidFill>
+                      <a:srgbClr val="E6EDF3"/>
+                    </a:solidFill>
+                    <a:latin typeface="Arial"/>
+                  </a:defRPr>
+                </a:pPr>
+              </a:p>
+            </c:txPr>
+            <c:showLegendKey val="0"/>
+            <c:showVal val="1"/>
+            <c:showCatName val="0"/>
+            <c:showSerName val="0"/>
+            <c:showPercent val="0"/>
+            <c:showBubbleSize val="0"/>
+            <c:showLeaderLines val="0"/>
+          </c:dLbls>
+          <c:cat>
+            <c:multiLvlStrRef>
+              <c:f>Sheet1!$A$2:$A$9</c:f>
+              <c:multiLvlStrCache>
+                <c:ptCount val="8"/>
+                <c:lvl>
+                  <c:pt idx="0">
+                    <c:v>Tuned AIMD</c:v>
+                  </c:pt>
+                  <c:pt idx="1">
+                    <c:v>Neural, final</c:v>
+                  </c:pt>
+                  <c:pt idx="2">
+                    <c:v>no slow start</c:v>
+                  </c:pt>
+                  <c:pt idx="3">
+                    <c:v>no pacing</c:v>
+                  </c:pt>
+                  <c:pt idx="4">
+                    <c:v>no hand-over</c:v>
+                  </c:pt>
+                  <c:pt idx="5">
+                    <c:v>cap 32</c:v>
+                  </c:pt>
+                  <c:pt idx="6">
+                    <c:v>no timer floor</c:v>
+                  </c:pt>
+                  <c:pt idx="7">
+                    <c:v>original settings</c:v>
+                  </c:pt>
+                </c:lvl>
+              </c:multiLvlStrCache>
+            </c:multiLvlStrRef>
+          </c:cat>
+          <c:val>
+            <c:numRef>
+              <c:f>Sheet1!$B$2:$B$9</c:f>
+              <c:numCache>
+                <c:formatCode>General</c:formatCode>
+                <c:ptCount val="8"/>
+                <c:pt idx="0">
+                  <c:v>1</c:v>
+                </c:pt>
+                <c:pt idx="1">
+                  <c:v>0.51</c:v>
+                </c:pt>
+                <c:pt idx="2">
+                  <c:v>0.527</c:v>
+                </c:pt>
+                <c:pt idx="3">
+                  <c:v>0.549</c:v>
+                </c:pt>
+                <c:pt idx="4">
+                  <c:v>0.506</c:v>
+                </c:pt>
+                <c:pt idx="5">
+                  <c:v>0.837</c:v>
+                </c:pt>
+                <c:pt idx="6">
+                  <c:v>0.519</c:v>
+                </c:pt>
+                <c:pt idx="7">
+                  <c:v>0.859</c:v>
+                </c:pt>
+              </c:numCache>
+            </c:numRef>
+          </c:val>
+        </c:ser>
+        <c:dLbls>
+          <c:numFmt formatCode="0.00" sourceLinked="0"/>
+          <c:txPr>
+            <a:bodyPr/>
+            <a:lstStyle/>
+            <a:p>
+              <a:pPr>
+                <a:defRPr b="0" i="0" strike="noStrike" sz="1100" u="none">
+                  <a:solidFill>
+                    <a:srgbClr val="E6EDF3"/>
+                  </a:solidFill>
+                  <a:latin typeface="Arial"/>
+                </a:defRPr>
+              </a:pPr>
+            </a:p>
+          </c:txPr>
+          <c:showLegendKey val="0"/>
+          <c:showVal val="1"/>
+          <c:showCatName val="0"/>
+          <c:showSerName val="0"/>
+          <c:showPercent val="0"/>
+          <c:showBubbleSize val="0"/>
+          <c:showLeaderLines val="0"/>
+        </c:dLbls>
+        <c:gapWidth val="150"/>
+        <c:overlap val="0"/>
+        <c:axId val="2094734554"/>
+        <c:axId val="2094734552"/>
+        <c:axId val="2094734556"/>
+      </c:barChart>
+      <c:catAx>
+        <c:axId val="2094734554"/>
+        <c:scaling>
+          <c:orientation val="maxMin"/>
+        </c:scaling>
+        <c:delete val="0"/>
+        <c:axPos val="l"/>
+        <c:numFmt formatCode="General" sourceLinked="1"/>
+        <c:majorTickMark val="out"/>
+        <c:minorTickMark val="none"/>
+        <c:tickLblPos val="nextTo"/>
+        <c:spPr>
+          <a:ln w="12700" cap="flat">
+            <a:solidFill>
+              <a:srgbClr val="888888"/>
+            </a:solidFill>
+            <a:prstDash val="solid"/>
+            <a:round/>
+          </a:ln>
+        </c:spPr>
+        <c:txPr>
+          <a:bodyPr/>
+          <a:lstStyle/>
+          <a:p>
+            <a:pPr>
+              <a:defRPr sz="1200" b="0" i="0" u="none" strike="noStrike">
+                <a:solidFill>
+                  <a:srgbClr val="E6EDF3"/>
+                </a:solidFill>
+                <a:latin typeface="Calibri"/>
+              </a:defRPr>
+            </a:pPr>
+            <a:endParaRPr lang="en-US"/>
+          </a:p>
+        </c:txPr>
+        <c:crossAx val="2094734552"/>
+        <c:crosses val="autoZero"/>
+        <c:auto val="1"/>
+        <c:lblAlgn val="ctr"/>
+        <c:noMultiLvlLbl val="1"/>
+      </c:catAx>
+      <c:valAx>
+        <c:axId val="2094734552"/>
+        <c:scaling>
+          <c:orientation val="minMax"/>
+          <c:max val="1.1"/>
+          <c:min val="0"/>
+        </c:scaling>
+        <c:delete val="0"/>
+        <c:axPos val="b"/>
+        <c:majorGridlines>
+          <c:spPr>
+            <a:ln w="6350" cap="flat">
+              <a:solidFill>
+                <a:srgbClr val="2A3441"/>
+              </a:solidFill>
+              <a:prstDash val="solid"/>
+              <a:round/>
+            </a:ln>
+          </c:spPr>
+        </c:majorGridlines>
+        <c:numFmt formatCode="General" sourceLinked="0"/>
+        <c:majorTickMark val="out"/>
+        <c:minorTickMark val="none"/>
+        <c:tickLblPos val="low"/>
+        <c:spPr>
+          <a:ln w="12700" cap="flat">
+            <a:solidFill>
+              <a:srgbClr val="888888"/>
+            </a:solidFill>
+            <a:prstDash val="solid"/>
+            <a:round/>
+          </a:ln>
+        </c:spPr>
+        <c:txPr>
+          <a:bodyPr/>
+          <a:lstStyle/>
+          <a:p>
+            <a:pPr>
+              <a:defRPr sz="1100" b="0" i="0" u="none" strike="noStrike">
+                <a:solidFill>
+                  <a:srgbClr val="8B98A5"/>
+                </a:solidFill>
+                <a:latin typeface="Arial"/>
+              </a:defRPr>
+            </a:pPr>
+            <a:endParaRPr lang="en-US"/>
+          </a:p>
+        </c:txPr>
+        <c:crossAx val="2094734554"/>
+        <c:crosses val="autoZero"/>
+        <c:crossBetween val="between"/>
+      </c:valAx>
+      <c:spPr>
+        <a:noFill/>
+        <a:ln>
+          <a:noFill/>
+        </a:ln>
+        <a:effectLst/>
+      </c:spPr>
+    </c:plotArea>
+    <c:plotVisOnly val="1"/>
+    <c:dispBlanksAs val="span"/>
+  </c:chart>
+  <c:spPr>
+    <a:noFill/>
+    <a:ln>
+      <a:noFill/>
+    </a:ln>
+    <a:effectLst/>
+  </c:spPr>
+  <c:externalData r:id="rId1">
+    <c:autoUpdate val="0"/>
+  </c:externalData>
+</c:chartSpace>
 </file>
 
 <file path=ppt/notesMasters/notesMaster1.xml><?xml version="1.0" encoding="utf-8"?>
@@ -2490,6 +2794,270 @@
             <a:fld id="{F7021451-1387-4CA6-816F-3879F97B5CBC}" type="slidenum">
               <a:rPr lang="en-US"/>
               <a:t>3</a:t>
+            </a:fld>
+            <a:endParaRPr lang="en-US"/>
+          </a:p>
+        </p:txBody>
+      </p:sp>
+    </p:spTree>
+    <p:extLst>
+      <p:ext uri="{BB962C8B-B14F-4D97-AF65-F5344CB8AC3E}">
+        <p14:creationId xmlns:p14="http://schemas.microsoft.com/office/powerpoint/2010/main" val="1024086991"/>
+      </p:ext>
+    </p:extLst>
+  </p:cSld>
+  <p:clrMapOvr>
+    <a:masterClrMapping/>
+  </p:clrMapOvr>
+</p:notes>
+</file>
+
+<file path=ppt/notesSlides/notesSlide30.xml><?xml version="1.0" encoding="utf-8"?>
+<p:notes xmlns:a="http://schemas.openxmlformats.org/drawingml/2006/main" xmlns:r="http://schemas.openxmlformats.org/officeDocument/2006/relationships" xmlns:p="http://schemas.openxmlformats.org/presentationml/2006/main">
+  <p:cSld>
+    <p:spTree>
+      <p:nvGrpSpPr>
+        <p:cNvPr id="1" name=""/>
+        <p:cNvGrpSpPr/>
+        <p:nvPr/>
+      </p:nvGrpSpPr>
+      <p:grpSpPr>
+        <a:xfrm>
+          <a:off x="0" y="0"/>
+          <a:ext cx="0" cy="0"/>
+          <a:chOff x="0" y="0"/>
+          <a:chExt cx="0" cy="0"/>
+        </a:xfrm>
+      </p:grpSpPr>
+      <p:sp>
+        <p:nvSpPr>
+          <p:cNvPr id="2" name="Slide Image Placeholder 1"/>
+          <p:cNvSpPr>
+            <a:spLocks noGrp="1" noRot="1" noChangeAspect="1"/>
+          </p:cNvSpPr>
+          <p:nvPr>
+            <p:ph type="sldImg"/>
+          </p:nvPr>
+        </p:nvSpPr>
+        <p:spPr/>
+      </p:sp>
+      <p:sp>
+        <p:nvSpPr>
+          <p:cNvPr id="3" name="Notes Placeholder 2"/>
+          <p:cNvSpPr>
+            <a:spLocks noGrp="1"/>
+          </p:cNvSpPr>
+          <p:nvPr>
+            <p:ph type="body" idx="1"/>
+          </p:nvPr>
+        </p:nvSpPr>
+        <p:spPr/>
+        <p:txBody>
+          <a:bodyPr/>
+          <a:lstStyle/>
+          <a:p>
+            <a:r>
+              <a:rPr lang="en-US" dirty="0"/>
+              <a:t/>
+            </a:r>
+            <a:endParaRPr lang="en-US" dirty="0"/>
+          </a:p>
+        </p:txBody>
+      </p:sp>
+      <p:sp>
+        <p:nvSpPr>
+          <p:cNvPr id="4" name="Slide Number Placeholder 3"/>
+          <p:cNvSpPr>
+            <a:spLocks noGrp="1"/>
+          </p:cNvSpPr>
+          <p:nvPr>
+            <p:ph type="sldNum" sz="quarter" idx="10"/>
+          </p:nvPr>
+        </p:nvSpPr>
+        <p:spPr/>
+        <p:txBody>
+          <a:bodyPr/>
+          <a:lstStyle/>
+          <a:p>
+            <a:fld id="{F7021451-1387-4CA6-816F-3879F97B5CBC}" type="slidenum">
+              <a:rPr lang="en-US"/>
+              <a:t>30</a:t>
+            </a:fld>
+            <a:endParaRPr lang="en-US"/>
+          </a:p>
+        </p:txBody>
+      </p:sp>
+    </p:spTree>
+    <p:extLst>
+      <p:ext uri="{BB962C8B-B14F-4D97-AF65-F5344CB8AC3E}">
+        <p14:creationId xmlns:p14="http://schemas.microsoft.com/office/powerpoint/2010/main" val="1024086991"/>
+      </p:ext>
+    </p:extLst>
+  </p:cSld>
+  <p:clrMapOvr>
+    <a:masterClrMapping/>
+  </p:clrMapOvr>
+</p:notes>
+</file>
+
+<file path=ppt/notesSlides/notesSlide31.xml><?xml version="1.0" encoding="utf-8"?>
+<p:notes xmlns:a="http://schemas.openxmlformats.org/drawingml/2006/main" xmlns:r="http://schemas.openxmlformats.org/officeDocument/2006/relationships" xmlns:p="http://schemas.openxmlformats.org/presentationml/2006/main">
+  <p:cSld>
+    <p:spTree>
+      <p:nvGrpSpPr>
+        <p:cNvPr id="1" name=""/>
+        <p:cNvGrpSpPr/>
+        <p:nvPr/>
+      </p:nvGrpSpPr>
+      <p:grpSpPr>
+        <a:xfrm>
+          <a:off x="0" y="0"/>
+          <a:ext cx="0" cy="0"/>
+          <a:chOff x="0" y="0"/>
+          <a:chExt cx="0" cy="0"/>
+        </a:xfrm>
+      </p:grpSpPr>
+      <p:sp>
+        <p:nvSpPr>
+          <p:cNvPr id="2" name="Slide Image Placeholder 1"/>
+          <p:cNvSpPr>
+            <a:spLocks noGrp="1" noRot="1" noChangeAspect="1"/>
+          </p:cNvSpPr>
+          <p:nvPr>
+            <p:ph type="sldImg"/>
+          </p:nvPr>
+        </p:nvSpPr>
+        <p:spPr/>
+      </p:sp>
+      <p:sp>
+        <p:nvSpPr>
+          <p:cNvPr id="3" name="Notes Placeholder 2"/>
+          <p:cNvSpPr>
+            <a:spLocks noGrp="1"/>
+          </p:cNvSpPr>
+          <p:nvPr>
+            <p:ph type="body" idx="1"/>
+          </p:nvPr>
+        </p:nvSpPr>
+        <p:spPr/>
+        <p:txBody>
+          <a:bodyPr/>
+          <a:lstStyle/>
+          <a:p>
+            <a:r>
+              <a:rPr lang="en-US" dirty="0"/>
+              <a:t/>
+            </a:r>
+            <a:endParaRPr lang="en-US" dirty="0"/>
+          </a:p>
+        </p:txBody>
+      </p:sp>
+      <p:sp>
+        <p:nvSpPr>
+          <p:cNvPr id="4" name="Slide Number Placeholder 3"/>
+          <p:cNvSpPr>
+            <a:spLocks noGrp="1"/>
+          </p:cNvSpPr>
+          <p:nvPr>
+            <p:ph type="sldNum" sz="quarter" idx="10"/>
+          </p:nvPr>
+        </p:nvSpPr>
+        <p:spPr/>
+        <p:txBody>
+          <a:bodyPr/>
+          <a:lstStyle/>
+          <a:p>
+            <a:fld id="{F7021451-1387-4CA6-816F-3879F97B5CBC}" type="slidenum">
+              <a:rPr lang="en-US"/>
+              <a:t>31</a:t>
+            </a:fld>
+            <a:endParaRPr lang="en-US"/>
+          </a:p>
+        </p:txBody>
+      </p:sp>
+    </p:spTree>
+    <p:extLst>
+      <p:ext uri="{BB962C8B-B14F-4D97-AF65-F5344CB8AC3E}">
+        <p14:creationId xmlns:p14="http://schemas.microsoft.com/office/powerpoint/2010/main" val="1024086991"/>
+      </p:ext>
+    </p:extLst>
+  </p:cSld>
+  <p:clrMapOvr>
+    <a:masterClrMapping/>
+  </p:clrMapOvr>
+</p:notes>
+</file>
+
+<file path=ppt/notesSlides/notesSlide32.xml><?xml version="1.0" encoding="utf-8"?>
+<p:notes xmlns:a="http://schemas.openxmlformats.org/drawingml/2006/main" xmlns:r="http://schemas.openxmlformats.org/officeDocument/2006/relationships" xmlns:p="http://schemas.openxmlformats.org/presentationml/2006/main">
+  <p:cSld>
+    <p:spTree>
+      <p:nvGrpSpPr>
+        <p:cNvPr id="1" name=""/>
+        <p:cNvGrpSpPr/>
+        <p:nvPr/>
+      </p:nvGrpSpPr>
+      <p:grpSpPr>
+        <a:xfrm>
+          <a:off x="0" y="0"/>
+          <a:ext cx="0" cy="0"/>
+          <a:chOff x="0" y="0"/>
+          <a:chExt cx="0" cy="0"/>
+        </a:xfrm>
+      </p:grpSpPr>
+      <p:sp>
+        <p:nvSpPr>
+          <p:cNvPr id="2" name="Slide Image Placeholder 1"/>
+          <p:cNvSpPr>
+            <a:spLocks noGrp="1" noRot="1" noChangeAspect="1"/>
+          </p:cNvSpPr>
+          <p:nvPr>
+            <p:ph type="sldImg"/>
+          </p:nvPr>
+        </p:nvSpPr>
+        <p:spPr/>
+      </p:sp>
+      <p:sp>
+        <p:nvSpPr>
+          <p:cNvPr id="3" name="Notes Placeholder 2"/>
+          <p:cNvSpPr>
+            <a:spLocks noGrp="1"/>
+          </p:cNvSpPr>
+          <p:nvPr>
+            <p:ph type="body" idx="1"/>
+          </p:nvPr>
+        </p:nvSpPr>
+        <p:spPr/>
+        <p:txBody>
+          <a:bodyPr/>
+          <a:lstStyle/>
+          <a:p>
+            <a:r>
+              <a:rPr lang="en-US" dirty="0"/>
+              <a:t/>
+            </a:r>
+            <a:endParaRPr lang="en-US" dirty="0"/>
+          </a:p>
+        </p:txBody>
+      </p:sp>
+      <p:sp>
+        <p:nvSpPr>
+          <p:cNvPr id="4" name="Slide Number Placeholder 3"/>
+          <p:cNvSpPr>
+            <a:spLocks noGrp="1"/>
+          </p:cNvSpPr>
+          <p:nvPr>
+            <p:ph type="sldNum" sz="quarter" idx="10"/>
+          </p:nvPr>
+        </p:nvSpPr>
+        <p:spPr/>
+        <p:txBody>
+          <a:bodyPr/>
+          <a:lstStyle/>
+          <a:p>
+            <a:fld id="{F7021451-1387-4CA6-816F-3879F97B5CBC}" type="slidenum">
+              <a:rPr lang="en-US"/>
+              <a:t>32</a:t>
             </a:fld>
             <a:endParaRPr lang="en-US"/>
           </a:p>
@@ -3627,7 +4195,7 @@
                 <a:ea typeface="Courier New" pitchFamily="34" charset="-122"/>
                 <a:cs typeface="Courier New" pitchFamily="34" charset="-120"/>
               </a:rPr>
-              <a:t>10 / 28   Smart-RUDP</a:t>
+              <a:t>10 / 32   Smart-RUDP</a:t>
             </a:r>
             <a:endParaRPr lang="en-US" sz="1000" dirty="0"/>
           </a:p>
@@ -3824,7 +4392,7 @@
                 <a:ea typeface="Courier New" pitchFamily="34" charset="-122"/>
                 <a:cs typeface="Courier New" pitchFamily="34" charset="-120"/>
               </a:rPr>
-              <a:t>11 / 28   Smart-RUDP</a:t>
+              <a:t>11 / 32   Smart-RUDP</a:t>
             </a:r>
             <a:endParaRPr lang="en-US" sz="1000" dirty="0"/>
           </a:p>
@@ -4654,7 +5222,7 @@
                 <a:ea typeface="Courier New" pitchFamily="34" charset="-122"/>
                 <a:cs typeface="Courier New" pitchFamily="34" charset="-120"/>
               </a:rPr>
-              <a:t>12 / 28   Smart-RUDP</a:t>
+              <a:t>12 / 32   Smart-RUDP</a:t>
             </a:r>
             <a:endParaRPr lang="en-US" sz="1000" dirty="0"/>
           </a:p>
@@ -4951,7 +5519,7 @@
                 <a:ea typeface="Courier New" pitchFamily="34" charset="-122"/>
                 <a:cs typeface="Courier New" pitchFamily="34" charset="-120"/>
               </a:rPr>
-              <a:t>13 / 28   Smart-RUDP</a:t>
+              <a:t>13 / 32   Smart-RUDP</a:t>
             </a:r>
             <a:endParaRPr lang="en-US" sz="1000" dirty="0"/>
           </a:p>
@@ -5251,7 +5819,7 @@
                 <a:ea typeface="Courier New" pitchFamily="34" charset="-122"/>
                 <a:cs typeface="Courier New" pitchFamily="34" charset="-120"/>
               </a:rPr>
-              <a:t>14 / 28   Smart-RUDP</a:t>
+              <a:t>14 / 32   Smart-RUDP</a:t>
             </a:r>
             <a:endParaRPr lang="en-US" sz="1000" dirty="0"/>
           </a:p>
@@ -5635,7 +6203,7 @@
                 <a:ea typeface="Courier New" pitchFamily="34" charset="-122"/>
                 <a:cs typeface="Courier New" pitchFamily="34" charset="-120"/>
               </a:rPr>
-              <a:t>15 / 28   Smart-RUDP</a:t>
+              <a:t>15 / 32   Smart-RUDP</a:t>
             </a:r>
             <a:endParaRPr lang="en-US" sz="1000" dirty="0"/>
           </a:p>
@@ -6093,7 +6661,7 @@
                 <a:ea typeface="Courier New" pitchFamily="34" charset="-122"/>
                 <a:cs typeface="Courier New" pitchFamily="34" charset="-120"/>
               </a:rPr>
-              <a:t>16 / 28   Smart-RUDP</a:t>
+              <a:t>16 / 32   Smart-RUDP</a:t>
             </a:r>
             <a:endParaRPr lang="en-US" sz="1000" dirty="0"/>
           </a:p>
@@ -6778,7 +7346,7 @@
                 <a:ea typeface="Courier New" pitchFamily="34" charset="-122"/>
                 <a:cs typeface="Courier New" pitchFamily="34" charset="-120"/>
               </a:rPr>
-              <a:t>17 / 28   Smart-RUDP</a:t>
+              <a:t>17 / 32   Smart-RUDP</a:t>
             </a:r>
             <a:endParaRPr lang="en-US" sz="1000" dirty="0"/>
           </a:p>
@@ -7018,7 +7586,7 @@
                 <a:ea typeface="Courier New" pitchFamily="34" charset="-122"/>
                 <a:cs typeface="Courier New" pitchFamily="34" charset="-120"/>
               </a:rPr>
-              <a:t>18 / 28   Smart-RUDP</a:t>
+              <a:t>18 / 32   Smart-RUDP</a:t>
             </a:r>
             <a:endParaRPr lang="en-US" sz="1000" dirty="0"/>
           </a:p>
@@ -7258,7 +7826,7 @@
                 <a:ea typeface="Courier New" pitchFamily="34" charset="-122"/>
                 <a:cs typeface="Courier New" pitchFamily="34" charset="-120"/>
               </a:rPr>
-              <a:t>19 / 28   Smart-RUDP</a:t>
+              <a:t>19 / 32   Smart-RUDP</a:t>
             </a:r>
             <a:endParaRPr lang="en-US" sz="1000" dirty="0"/>
           </a:p>
@@ -7480,7 +8048,7 @@
                 <a:ea typeface="Courier New" pitchFamily="34" charset="-122"/>
                 <a:cs typeface="Courier New" pitchFamily="34" charset="-120"/>
               </a:rPr>
-              <a:t>2 / 28   Smart-RUDP</a:t>
+              <a:t>2 / 32   Smart-RUDP</a:t>
             </a:r>
             <a:endParaRPr lang="en-US" sz="1000" dirty="0"/>
           </a:p>
@@ -7874,7 +8442,7 @@
                 <a:ea typeface="Courier New" pitchFamily="34" charset="-122"/>
                 <a:cs typeface="Courier New" pitchFamily="34" charset="-120"/>
               </a:rPr>
-              <a:t>20 / 28   Smart-RUDP</a:t>
+              <a:t>20 / 32   Smart-RUDP</a:t>
             </a:r>
             <a:endParaRPr lang="en-US" sz="1000" dirty="0"/>
           </a:p>
@@ -8198,7 +8766,7 @@
                 <a:ea typeface="Courier New" pitchFamily="34" charset="-122"/>
                 <a:cs typeface="Courier New" pitchFamily="34" charset="-120"/>
               </a:rPr>
-              <a:t>21 / 28   Smart-RUDP</a:t>
+              <a:t>21 / 32   Smart-RUDP</a:t>
             </a:r>
             <a:endParaRPr lang="en-US" sz="1000" dirty="0"/>
           </a:p>
@@ -9905,7 +10473,7 @@
                 <a:ea typeface="Courier New" pitchFamily="34" charset="-122"/>
                 <a:cs typeface="Courier New" pitchFamily="34" charset="-120"/>
               </a:rPr>
-              <a:t>22 / 28   Smart-RUDP</a:t>
+              <a:t>22 / 32   Smart-RUDP</a:t>
             </a:r>
             <a:endParaRPr lang="en-US" sz="1000" dirty="0"/>
           </a:p>
@@ -11288,7 +11856,7 @@
                 <a:ea typeface="Courier New" pitchFamily="34" charset="-122"/>
                 <a:cs typeface="Courier New" pitchFamily="34" charset="-120"/>
               </a:rPr>
-              <a:t>23 / 28   Smart-RUDP</a:t>
+              <a:t>23 / 32   Smart-RUDP</a:t>
             </a:r>
             <a:endParaRPr lang="en-US" sz="1000" dirty="0"/>
           </a:p>
@@ -12831,7 +13399,7 @@
                 <a:ea typeface="Courier New" pitchFamily="34" charset="-122"/>
                 <a:cs typeface="Courier New" pitchFamily="34" charset="-120"/>
               </a:rPr>
-              <a:t>24 / 28   Smart-RUDP</a:t>
+              <a:t>24 / 32   Smart-RUDP</a:t>
             </a:r>
             <a:endParaRPr lang="en-US" sz="1000" dirty="0"/>
           </a:p>
@@ -14509,7 +15077,7 @@
                 <a:ea typeface="Courier New" pitchFamily="34" charset="-122"/>
                 <a:cs typeface="Courier New" pitchFamily="34" charset="-120"/>
               </a:rPr>
-              <a:t>25 / 28   Smart-RUDP</a:t>
+              <a:t>25 / 32   Smart-RUDP</a:t>
             </a:r>
             <a:endParaRPr lang="en-US" sz="1000" dirty="0"/>
           </a:p>
@@ -16148,7 +16716,7 @@
                 <a:ea typeface="Courier New" pitchFamily="34" charset="-122"/>
                 <a:cs typeface="Courier New" pitchFamily="34" charset="-120"/>
               </a:rPr>
-              <a:t>Performance: bigger windows, tuned baseline</a:t>
+              <a:t>Final results: tuned baselines, real clock</a:t>
             </a:r>
             <a:endParaRPr lang="en-US" sz="3000" dirty="0"/>
           </a:p>
@@ -16187,7 +16755,7 @@
                 <a:ea typeface="Courier New" pitchFamily="34" charset="-122"/>
                 <a:cs typeface="Courier New" pitchFamily="34" charset="-120"/>
               </a:rPr>
-              <a:t>26 / 28   Smart-RUDP</a:t>
+              <a:t>26 / 32   Smart-RUDP</a:t>
             </a:r>
             <a:endParaRPr lang="en-US" sz="1000" dirty="0"/>
           </a:p>
@@ -16209,19 +16777,20 @@
         </p:nvGraphicFramePr>
         <p:xfrm>
           <a:off x="548640" y="1188720"/>
-          <a:ext cx="6217920" cy="914400"/>
+          <a:ext cx="6583680" cy="914400"/>
         </p:xfrm>
         <a:graphic>
           <a:graphicData uri="http://schemas.openxmlformats.org/drawingml/2006/table">
             <a:tbl>
               <a:tblPr/>
               <a:tblGrid>
-                <a:gridCol w="2286000"/>
-                <a:gridCol w="1371600"/>
-                <a:gridCol w="1280160"/>
-                <a:gridCol w="1280160"/>
+                <a:gridCol w="2194560"/>
+                <a:gridCol w="1097280"/>
+                <a:gridCol w="1097280"/>
+                <a:gridCol w="1097280"/>
+                <a:gridCol w="1097280"/>
               </a:tblGrid>
-              <a:tr h="402336">
+              <a:tr h="420624">
                 <a:tc>
                   <a:txBody>
                     <a:bodyPr/>
@@ -16239,7 +16808,7 @@
                           <a:ea typeface="Courier New" pitchFamily="34" charset="-122"/>
                           <a:cs typeface="Courier New" pitchFamily="34" charset="-120"/>
                         </a:rPr>
-                        <a:t>C transport, seconds</a:t>
+                        <a:t>Path (seconds)</a:t>
                       </a:r>
                       <a:endParaRPr lang="en-US" sz="1300" dirty="0">
                         <a:latin typeface="Courier New" charset="0"/>
@@ -16443,7 +17012,7 @@
                           <a:ea typeface="Courier New" pitchFamily="34" charset="-122"/>
                           <a:cs typeface="Courier New" pitchFamily="34" charset="-120"/>
                         </a:rPr>
-                        <a:t>Neural</a:t>
+                        <a:t>CUBIC tuned</a:t>
                       </a:r>
                       <a:endParaRPr lang="en-US" sz="1300" dirty="0">
                         <a:latin typeface="Courier New" charset="0"/>
@@ -16491,76 +17060,6 @@
                     </a:lnB>
                     <a:solidFill>
                       <a:srgbClr val="39FF88"/>
-                    </a:solidFill>
-                  </a:tcPr>
-                </a:tc>
-              </a:tr>
-              <a:tr h="402336">
-                <a:tc>
-                  <a:txBody>
-                    <a:bodyPr/>
-                    <a:lstStyle/>
-                    <a:p>
-                      <a:pPr indent="0" marL="0">
-                        <a:buNone/>
-                      </a:pPr>
-                      <a:r>
-                        <a:rPr lang="en-US" sz="1300" dirty="0">
-                          <a:solidFill>
-                            <a:srgbClr val="E6EDF3"/>
-                          </a:solidFill>
-                          <a:latin typeface="Calibri" pitchFamily="34" charset="0"/>
-                          <a:ea typeface="Calibri" pitchFamily="34" charset="-122"/>
-                          <a:cs typeface="Calibri" pitchFamily="34" charset="-120"/>
-                        </a:rPr>
-                        <a:t>Lossy 2%</a:t>
-                      </a:r>
-                      <a:endParaRPr lang="en-US" sz="1300" dirty="0">
-                        <a:latin typeface="Calibri" charset="0"/>
-                        <a:ea typeface="Calibri" charset="0"/>
-                        <a:cs typeface="Calibri" charset="0"/>
-                      </a:endParaRPr>
-                    </a:p>
-                  </a:txBody>
-                  <a:tcPr marL="91440" marR="91440" marT="45720" marB="45720">
-                    <a:lnL w="12700" cap="flat" cmpd="sng" algn="ctr">
-                      <a:solidFill>
-                        <a:srgbClr val="2A3441"/>
-                      </a:solidFill>
-                      <a:prstDash val="solid"/>
-                      <a:round/>
-                      <a:headEnd type="none" w="med" len="med"/>
-                      <a:tailEnd type="none" w="med" len="med"/>
-                    </a:lnL>
-                    <a:lnR w="12700" cap="flat" cmpd="sng" algn="ctr">
-                      <a:solidFill>
-                        <a:srgbClr val="2A3441"/>
-                      </a:solidFill>
-                      <a:prstDash val="solid"/>
-                      <a:round/>
-                      <a:headEnd type="none" w="med" len="med"/>
-                      <a:tailEnd type="none" w="med" len="med"/>
-                    </a:lnR>
-                    <a:lnT w="12700" cap="flat" cmpd="sng" algn="ctr">
-                      <a:solidFill>
-                        <a:srgbClr val="2A3441"/>
-                      </a:solidFill>
-                      <a:prstDash val="solid"/>
-                      <a:round/>
-                      <a:headEnd type="none" w="med" len="med"/>
-                      <a:tailEnd type="none" w="med" len="med"/>
-                    </a:lnT>
-                    <a:lnB w="12700" cap="flat" cmpd="sng" algn="ctr">
-                      <a:solidFill>
-                        <a:srgbClr val="2A3441"/>
-                      </a:solidFill>
-                      <a:prstDash val="solid"/>
-                      <a:round/>
-                      <a:headEnd type="none" w="med" len="med"/>
-                      <a:tailEnd type="none" w="med" len="med"/>
-                    </a:lnB>
-                    <a:solidFill>
-                      <a:srgbClr val="141B24"/>
                     </a:solidFill>
                   </a:tcPr>
                 </a:tc>
@@ -16573,20 +17072,20 @@
                         <a:buNone/>
                       </a:pPr>
                       <a:r>
-                        <a:rPr lang="en-US" sz="1300" dirty="0">
+                        <a:rPr lang="en-US" sz="1300" b="1" dirty="0">
                           <a:solidFill>
-                            <a:srgbClr val="E6EDF3"/>
+                            <a:srgbClr val="0B0F14"/>
                           </a:solidFill>
-                          <a:latin typeface="Calibri" pitchFamily="34" charset="0"/>
-                          <a:ea typeface="Calibri" pitchFamily="34" charset="-122"/>
-                          <a:cs typeface="Calibri" pitchFamily="34" charset="-120"/>
+                          <a:latin typeface="Courier New" pitchFamily="34" charset="0"/>
+                          <a:ea typeface="Courier New" pitchFamily="34" charset="-122"/>
+                          <a:cs typeface="Courier New" pitchFamily="34" charset="-120"/>
                         </a:rPr>
-                        <a:t>8.4</a:t>
+                        <a:t>Neural</a:t>
                       </a:r>
                       <a:endParaRPr lang="en-US" sz="1300" dirty="0">
-                        <a:latin typeface="Calibri" charset="0"/>
-                        <a:ea typeface="Calibri" charset="0"/>
-                        <a:cs typeface="Calibri" charset="0"/>
+                        <a:latin typeface="Courier New" charset="0"/>
+                        <a:ea typeface="Courier New" charset="0"/>
+                        <a:cs typeface="Courier New" charset="0"/>
                       </a:endParaRPr>
                     </a:p>
                   </a:txBody>
@@ -16628,696 +17127,12 @@
                       <a:tailEnd type="none" w="med" len="med"/>
                     </a:lnB>
                     <a:solidFill>
-                      <a:srgbClr val="141B24"/>
-                    </a:solidFill>
-                  </a:tcPr>
-                </a:tc>
-                <a:tc>
-                  <a:txBody>
-                    <a:bodyPr/>
-                    <a:lstStyle/>
-                    <a:p>
-                      <a:pPr indent="0" marL="0">
-                        <a:buNone/>
-                      </a:pPr>
-                      <a:r>
-                        <a:rPr lang="en-US" sz="1300" dirty="0">
-                          <a:solidFill>
-                            <a:srgbClr val="E6EDF3"/>
-                          </a:solidFill>
-                          <a:latin typeface="Calibri" pitchFamily="34" charset="0"/>
-                          <a:ea typeface="Calibri" pitchFamily="34" charset="-122"/>
-                          <a:cs typeface="Calibri" pitchFamily="34" charset="-120"/>
-                        </a:rPr>
-                        <a:t>8.3</a:t>
-                      </a:r>
-                      <a:endParaRPr lang="en-US" sz="1300" dirty="0">
-                        <a:latin typeface="Calibri" charset="0"/>
-                        <a:ea typeface="Calibri" charset="0"/>
-                        <a:cs typeface="Calibri" charset="0"/>
-                      </a:endParaRPr>
-                    </a:p>
-                  </a:txBody>
-                  <a:tcPr marL="91440" marR="91440" marT="45720" marB="45720">
-                    <a:lnL w="12700" cap="flat" cmpd="sng" algn="ctr">
-                      <a:solidFill>
-                        <a:srgbClr val="2A3441"/>
-                      </a:solidFill>
-                      <a:prstDash val="solid"/>
-                      <a:round/>
-                      <a:headEnd type="none" w="med" len="med"/>
-                      <a:tailEnd type="none" w="med" len="med"/>
-                    </a:lnL>
-                    <a:lnR w="12700" cap="flat" cmpd="sng" algn="ctr">
-                      <a:solidFill>
-                        <a:srgbClr val="2A3441"/>
-                      </a:solidFill>
-                      <a:prstDash val="solid"/>
-                      <a:round/>
-                      <a:headEnd type="none" w="med" len="med"/>
-                      <a:tailEnd type="none" w="med" len="med"/>
-                    </a:lnR>
-                    <a:lnT w="12700" cap="flat" cmpd="sng" algn="ctr">
-                      <a:solidFill>
-                        <a:srgbClr val="2A3441"/>
-                      </a:solidFill>
-                      <a:prstDash val="solid"/>
-                      <a:round/>
-                      <a:headEnd type="none" w="med" len="med"/>
-                      <a:tailEnd type="none" w="med" len="med"/>
-                    </a:lnT>
-                    <a:lnB w="12700" cap="flat" cmpd="sng" algn="ctr">
-                      <a:solidFill>
-                        <a:srgbClr val="2A3441"/>
-                      </a:solidFill>
-                      <a:prstDash val="solid"/>
-                      <a:round/>
-                      <a:headEnd type="none" w="med" len="med"/>
-                      <a:tailEnd type="none" w="med" len="med"/>
-                    </a:lnB>
-                    <a:solidFill>
-                      <a:srgbClr val="141B24"/>
-                    </a:solidFill>
-                  </a:tcPr>
-                </a:tc>
-                <a:tc>
-                  <a:txBody>
-                    <a:bodyPr/>
-                    <a:lstStyle/>
-                    <a:p>
-                      <a:pPr indent="0" marL="0">
-                        <a:buNone/>
-                      </a:pPr>
-                      <a:r>
-                        <a:rPr lang="en-US" sz="1300" dirty="0">
-                          <a:solidFill>
-                            <a:srgbClr val="E6EDF3"/>
-                          </a:solidFill>
-                          <a:latin typeface="Calibri" pitchFamily="34" charset="0"/>
-                          <a:ea typeface="Calibri" pitchFamily="34" charset="-122"/>
-                          <a:cs typeface="Calibri" pitchFamily="34" charset="-120"/>
-                        </a:rPr>
-                        <a:t>4.5</a:t>
-                      </a:r>
-                      <a:endParaRPr lang="en-US" sz="1300" dirty="0">
-                        <a:latin typeface="Calibri" charset="0"/>
-                        <a:ea typeface="Calibri" charset="0"/>
-                        <a:cs typeface="Calibri" charset="0"/>
-                      </a:endParaRPr>
-                    </a:p>
-                  </a:txBody>
-                  <a:tcPr marL="91440" marR="91440" marT="45720" marB="45720">
-                    <a:lnL w="12700" cap="flat" cmpd="sng" algn="ctr">
-                      <a:solidFill>
-                        <a:srgbClr val="2A3441"/>
-                      </a:solidFill>
-                      <a:prstDash val="solid"/>
-                      <a:round/>
-                      <a:headEnd type="none" w="med" len="med"/>
-                      <a:tailEnd type="none" w="med" len="med"/>
-                    </a:lnL>
-                    <a:lnR w="12700" cap="flat" cmpd="sng" algn="ctr">
-                      <a:solidFill>
-                        <a:srgbClr val="2A3441"/>
-                      </a:solidFill>
-                      <a:prstDash val="solid"/>
-                      <a:round/>
-                      <a:headEnd type="none" w="med" len="med"/>
-                      <a:tailEnd type="none" w="med" len="med"/>
-                    </a:lnR>
-                    <a:lnT w="12700" cap="flat" cmpd="sng" algn="ctr">
-                      <a:solidFill>
-                        <a:srgbClr val="2A3441"/>
-                      </a:solidFill>
-                      <a:prstDash val="solid"/>
-                      <a:round/>
-                      <a:headEnd type="none" w="med" len="med"/>
-                      <a:tailEnd type="none" w="med" len="med"/>
-                    </a:lnT>
-                    <a:lnB w="12700" cap="flat" cmpd="sng" algn="ctr">
-                      <a:solidFill>
-                        <a:srgbClr val="2A3441"/>
-                      </a:solidFill>
-                      <a:prstDash val="solid"/>
-                      <a:round/>
-                      <a:headEnd type="none" w="med" len="med"/>
-                      <a:tailEnd type="none" w="med" len="med"/>
-                    </a:lnB>
-                    <a:solidFill>
-                      <a:srgbClr val="141B24"/>
+                      <a:srgbClr val="39FF88"/>
                     </a:solidFill>
                   </a:tcPr>
                 </a:tc>
               </a:tr>
-              <a:tr h="402336">
-                <a:tc>
-                  <a:txBody>
-                    <a:bodyPr/>
-                    <a:lstStyle/>
-                    <a:p>
-                      <a:pPr indent="0" marL="0">
-                        <a:buNone/>
-                      </a:pPr>
-                      <a:r>
-                        <a:rPr lang="en-US" sz="1300" dirty="0">
-                          <a:solidFill>
-                            <a:srgbClr val="E6EDF3"/>
-                          </a:solidFill>
-                          <a:latin typeface="Calibri" pitchFamily="34" charset="0"/>
-                          <a:ea typeface="Calibri" pitchFamily="34" charset="-122"/>
-                          <a:cs typeface="Calibri" pitchFamily="34" charset="-120"/>
-                        </a:rPr>
-                        <a:t>Satellite-like</a:t>
-                      </a:r>
-                      <a:endParaRPr lang="en-US" sz="1300" dirty="0">
-                        <a:latin typeface="Calibri" charset="0"/>
-                        <a:ea typeface="Calibri" charset="0"/>
-                        <a:cs typeface="Calibri" charset="0"/>
-                      </a:endParaRPr>
-                    </a:p>
-                  </a:txBody>
-                  <a:tcPr marL="91440" marR="91440" marT="45720" marB="45720">
-                    <a:lnL w="12700" cap="flat" cmpd="sng" algn="ctr">
-                      <a:solidFill>
-                        <a:srgbClr val="2A3441"/>
-                      </a:solidFill>
-                      <a:prstDash val="solid"/>
-                      <a:round/>
-                      <a:headEnd type="none" w="med" len="med"/>
-                      <a:tailEnd type="none" w="med" len="med"/>
-                    </a:lnL>
-                    <a:lnR w="12700" cap="flat" cmpd="sng" algn="ctr">
-                      <a:solidFill>
-                        <a:srgbClr val="2A3441"/>
-                      </a:solidFill>
-                      <a:prstDash val="solid"/>
-                      <a:round/>
-                      <a:headEnd type="none" w="med" len="med"/>
-                      <a:tailEnd type="none" w="med" len="med"/>
-                    </a:lnR>
-                    <a:lnT w="12700" cap="flat" cmpd="sng" algn="ctr">
-                      <a:solidFill>
-                        <a:srgbClr val="2A3441"/>
-                      </a:solidFill>
-                      <a:prstDash val="solid"/>
-                      <a:round/>
-                      <a:headEnd type="none" w="med" len="med"/>
-                      <a:tailEnd type="none" w="med" len="med"/>
-                    </a:lnT>
-                    <a:lnB w="12700" cap="flat" cmpd="sng" algn="ctr">
-                      <a:solidFill>
-                        <a:srgbClr val="2A3441"/>
-                      </a:solidFill>
-                      <a:prstDash val="solid"/>
-                      <a:round/>
-                      <a:headEnd type="none" w="med" len="med"/>
-                      <a:tailEnd type="none" w="med" len="med"/>
-                    </a:lnB>
-                    <a:solidFill>
-                      <a:srgbClr val="141B24"/>
-                    </a:solidFill>
-                  </a:tcPr>
-                </a:tc>
-                <a:tc>
-                  <a:txBody>
-                    <a:bodyPr/>
-                    <a:lstStyle/>
-                    <a:p>
-                      <a:pPr indent="0" marL="0">
-                        <a:buNone/>
-                      </a:pPr>
-                      <a:r>
-                        <a:rPr lang="en-US" sz="1300" dirty="0">
-                          <a:solidFill>
-                            <a:srgbClr val="E6EDF3"/>
-                          </a:solidFill>
-                          <a:latin typeface="Calibri" pitchFamily="34" charset="0"/>
-                          <a:ea typeface="Calibri" pitchFamily="34" charset="-122"/>
-                          <a:cs typeface="Calibri" pitchFamily="34" charset="-120"/>
-                        </a:rPr>
-                        <a:t>25.1</a:t>
-                      </a:r>
-                      <a:endParaRPr lang="en-US" sz="1300" dirty="0">
-                        <a:latin typeface="Calibri" charset="0"/>
-                        <a:ea typeface="Calibri" charset="0"/>
-                        <a:cs typeface="Calibri" charset="0"/>
-                      </a:endParaRPr>
-                    </a:p>
-                  </a:txBody>
-                  <a:tcPr marL="91440" marR="91440" marT="45720" marB="45720">
-                    <a:lnL w="12700" cap="flat" cmpd="sng" algn="ctr">
-                      <a:solidFill>
-                        <a:srgbClr val="2A3441"/>
-                      </a:solidFill>
-                      <a:prstDash val="solid"/>
-                      <a:round/>
-                      <a:headEnd type="none" w="med" len="med"/>
-                      <a:tailEnd type="none" w="med" len="med"/>
-                    </a:lnL>
-                    <a:lnR w="12700" cap="flat" cmpd="sng" algn="ctr">
-                      <a:solidFill>
-                        <a:srgbClr val="2A3441"/>
-                      </a:solidFill>
-                      <a:prstDash val="solid"/>
-                      <a:round/>
-                      <a:headEnd type="none" w="med" len="med"/>
-                      <a:tailEnd type="none" w="med" len="med"/>
-                    </a:lnR>
-                    <a:lnT w="12700" cap="flat" cmpd="sng" algn="ctr">
-                      <a:solidFill>
-                        <a:srgbClr val="2A3441"/>
-                      </a:solidFill>
-                      <a:prstDash val="solid"/>
-                      <a:round/>
-                      <a:headEnd type="none" w="med" len="med"/>
-                      <a:tailEnd type="none" w="med" len="med"/>
-                    </a:lnT>
-                    <a:lnB w="12700" cap="flat" cmpd="sng" algn="ctr">
-                      <a:solidFill>
-                        <a:srgbClr val="2A3441"/>
-                      </a:solidFill>
-                      <a:prstDash val="solid"/>
-                      <a:round/>
-                      <a:headEnd type="none" w="med" len="med"/>
-                      <a:tailEnd type="none" w="med" len="med"/>
-                    </a:lnB>
-                    <a:solidFill>
-                      <a:srgbClr val="141B24"/>
-                    </a:solidFill>
-                  </a:tcPr>
-                </a:tc>
-                <a:tc>
-                  <a:txBody>
-                    <a:bodyPr/>
-                    <a:lstStyle/>
-                    <a:p>
-                      <a:pPr indent="0" marL="0">
-                        <a:buNone/>
-                      </a:pPr>
-                      <a:r>
-                        <a:rPr lang="en-US" sz="1300" dirty="0">
-                          <a:solidFill>
-                            <a:srgbClr val="E6EDF3"/>
-                          </a:solidFill>
-                          <a:latin typeface="Calibri" pitchFamily="34" charset="0"/>
-                          <a:ea typeface="Calibri" pitchFamily="34" charset="-122"/>
-                          <a:cs typeface="Calibri" pitchFamily="34" charset="-120"/>
-                        </a:rPr>
-                        <a:t>20.0</a:t>
-                      </a:r>
-                      <a:endParaRPr lang="en-US" sz="1300" dirty="0">
-                        <a:latin typeface="Calibri" charset="0"/>
-                        <a:ea typeface="Calibri" charset="0"/>
-                        <a:cs typeface="Calibri" charset="0"/>
-                      </a:endParaRPr>
-                    </a:p>
-                  </a:txBody>
-                  <a:tcPr marL="91440" marR="91440" marT="45720" marB="45720">
-                    <a:lnL w="12700" cap="flat" cmpd="sng" algn="ctr">
-                      <a:solidFill>
-                        <a:srgbClr val="2A3441"/>
-                      </a:solidFill>
-                      <a:prstDash val="solid"/>
-                      <a:round/>
-                      <a:headEnd type="none" w="med" len="med"/>
-                      <a:tailEnd type="none" w="med" len="med"/>
-                    </a:lnL>
-                    <a:lnR w="12700" cap="flat" cmpd="sng" algn="ctr">
-                      <a:solidFill>
-                        <a:srgbClr val="2A3441"/>
-                      </a:solidFill>
-                      <a:prstDash val="solid"/>
-                      <a:round/>
-                      <a:headEnd type="none" w="med" len="med"/>
-                      <a:tailEnd type="none" w="med" len="med"/>
-                    </a:lnR>
-                    <a:lnT w="12700" cap="flat" cmpd="sng" algn="ctr">
-                      <a:solidFill>
-                        <a:srgbClr val="2A3441"/>
-                      </a:solidFill>
-                      <a:prstDash val="solid"/>
-                      <a:round/>
-                      <a:headEnd type="none" w="med" len="med"/>
-                      <a:tailEnd type="none" w="med" len="med"/>
-                    </a:lnT>
-                    <a:lnB w="12700" cap="flat" cmpd="sng" algn="ctr">
-                      <a:solidFill>
-                        <a:srgbClr val="2A3441"/>
-                      </a:solidFill>
-                      <a:prstDash val="solid"/>
-                      <a:round/>
-                      <a:headEnd type="none" w="med" len="med"/>
-                      <a:tailEnd type="none" w="med" len="med"/>
-                    </a:lnB>
-                    <a:solidFill>
-                      <a:srgbClr val="141B24"/>
-                    </a:solidFill>
-                  </a:tcPr>
-                </a:tc>
-                <a:tc>
-                  <a:txBody>
-                    <a:bodyPr/>
-                    <a:lstStyle/>
-                    <a:p>
-                      <a:pPr indent="0" marL="0">
-                        <a:buNone/>
-                      </a:pPr>
-                      <a:r>
-                        <a:rPr lang="en-US" sz="1300" dirty="0">
-                          <a:solidFill>
-                            <a:srgbClr val="E6EDF3"/>
-                          </a:solidFill>
-                          <a:latin typeface="Calibri" pitchFamily="34" charset="0"/>
-                          <a:ea typeface="Calibri" pitchFamily="34" charset="-122"/>
-                          <a:cs typeface="Calibri" pitchFamily="34" charset="-120"/>
-                        </a:rPr>
-                        <a:t>6.3</a:t>
-                      </a:r>
-                      <a:endParaRPr lang="en-US" sz="1300" dirty="0">
-                        <a:latin typeface="Calibri" charset="0"/>
-                        <a:ea typeface="Calibri" charset="0"/>
-                        <a:cs typeface="Calibri" charset="0"/>
-                      </a:endParaRPr>
-                    </a:p>
-                  </a:txBody>
-                  <a:tcPr marL="91440" marR="91440" marT="45720" marB="45720">
-                    <a:lnL w="12700" cap="flat" cmpd="sng" algn="ctr">
-                      <a:solidFill>
-                        <a:srgbClr val="2A3441"/>
-                      </a:solidFill>
-                      <a:prstDash val="solid"/>
-                      <a:round/>
-                      <a:headEnd type="none" w="med" len="med"/>
-                      <a:tailEnd type="none" w="med" len="med"/>
-                    </a:lnL>
-                    <a:lnR w="12700" cap="flat" cmpd="sng" algn="ctr">
-                      <a:solidFill>
-                        <a:srgbClr val="2A3441"/>
-                      </a:solidFill>
-                      <a:prstDash val="solid"/>
-                      <a:round/>
-                      <a:headEnd type="none" w="med" len="med"/>
-                      <a:tailEnd type="none" w="med" len="med"/>
-                    </a:lnR>
-                    <a:lnT w="12700" cap="flat" cmpd="sng" algn="ctr">
-                      <a:solidFill>
-                        <a:srgbClr val="2A3441"/>
-                      </a:solidFill>
-                      <a:prstDash val="solid"/>
-                      <a:round/>
-                      <a:headEnd type="none" w="med" len="med"/>
-                      <a:tailEnd type="none" w="med" len="med"/>
-                    </a:lnT>
-                    <a:lnB w="12700" cap="flat" cmpd="sng" algn="ctr">
-                      <a:solidFill>
-                        <a:srgbClr val="2A3441"/>
-                      </a:solidFill>
-                      <a:prstDash val="solid"/>
-                      <a:round/>
-                      <a:headEnd type="none" w="med" len="med"/>
-                      <a:tailEnd type="none" w="med" len="med"/>
-                    </a:lnB>
-                    <a:solidFill>
-                      <a:srgbClr val="141B24"/>
-                    </a:solidFill>
-                  </a:tcPr>
-                </a:tc>
-              </a:tr>
-              <a:tr h="402336">
-                <a:tc>
-                  <a:txBody>
-                    <a:bodyPr/>
-                    <a:lstStyle/>
-                    <a:p>
-                      <a:pPr indent="0" marL="0">
-                        <a:buNone/>
-                      </a:pPr>
-                      <a:r>
-                        <a:rPr lang="en-US" sz="1300" dirty="0">
-                          <a:solidFill>
-                            <a:srgbClr val="E6EDF3"/>
-                          </a:solidFill>
-                          <a:latin typeface="Calibri" pitchFamily="34" charset="0"/>
-                          <a:ea typeface="Calibri" pitchFamily="34" charset="-122"/>
-                          <a:cs typeface="Calibri" pitchFamily="34" charset="-120"/>
-                        </a:rPr>
-                        <a:t>Fast (3,000 pkts)</a:t>
-                      </a:r>
-                      <a:endParaRPr lang="en-US" sz="1300" dirty="0">
-                        <a:latin typeface="Calibri" charset="0"/>
-                        <a:ea typeface="Calibri" charset="0"/>
-                        <a:cs typeface="Calibri" charset="0"/>
-                      </a:endParaRPr>
-                    </a:p>
-                  </a:txBody>
-                  <a:tcPr marL="91440" marR="91440" marT="45720" marB="45720">
-                    <a:lnL w="12700" cap="flat" cmpd="sng" algn="ctr">
-                      <a:solidFill>
-                        <a:srgbClr val="2A3441"/>
-                      </a:solidFill>
-                      <a:prstDash val="solid"/>
-                      <a:round/>
-                      <a:headEnd type="none" w="med" len="med"/>
-                      <a:tailEnd type="none" w="med" len="med"/>
-                    </a:lnL>
-                    <a:lnR w="12700" cap="flat" cmpd="sng" algn="ctr">
-                      <a:solidFill>
-                        <a:srgbClr val="2A3441"/>
-                      </a:solidFill>
-                      <a:prstDash val="solid"/>
-                      <a:round/>
-                      <a:headEnd type="none" w="med" len="med"/>
-                      <a:tailEnd type="none" w="med" len="med"/>
-                    </a:lnR>
-                    <a:lnT w="12700" cap="flat" cmpd="sng" algn="ctr">
-                      <a:solidFill>
-                        <a:srgbClr val="2A3441"/>
-                      </a:solidFill>
-                      <a:prstDash val="solid"/>
-                      <a:round/>
-                      <a:headEnd type="none" w="med" len="med"/>
-                      <a:tailEnd type="none" w="med" len="med"/>
-                    </a:lnT>
-                    <a:lnB w="12700" cap="flat" cmpd="sng" algn="ctr">
-                      <a:solidFill>
-                        <a:srgbClr val="2A3441"/>
-                      </a:solidFill>
-                      <a:prstDash val="solid"/>
-                      <a:round/>
-                      <a:headEnd type="none" w="med" len="med"/>
-                      <a:tailEnd type="none" w="med" len="med"/>
-                    </a:lnB>
-                    <a:solidFill>
-                      <a:srgbClr val="141B24"/>
-                    </a:solidFill>
-                  </a:tcPr>
-                </a:tc>
-                <a:tc>
-                  <a:txBody>
-                    <a:bodyPr/>
-                    <a:lstStyle/>
-                    <a:p>
-                      <a:pPr indent="0" marL="0">
-                        <a:buNone/>
-                      </a:pPr>
-                      <a:r>
-                        <a:rPr lang="en-US" sz="1300" dirty="0">
-                          <a:solidFill>
-                            <a:srgbClr val="E6EDF3"/>
-                          </a:solidFill>
-                          <a:latin typeface="Calibri" pitchFamily="34" charset="0"/>
-                          <a:ea typeface="Calibri" pitchFamily="34" charset="-122"/>
-                          <a:cs typeface="Calibri" pitchFamily="34" charset="-120"/>
-                        </a:rPr>
-                        <a:t>19.8</a:t>
-                      </a:r>
-                      <a:endParaRPr lang="en-US" sz="1300" dirty="0">
-                        <a:latin typeface="Calibri" charset="0"/>
-                        <a:ea typeface="Calibri" charset="0"/>
-                        <a:cs typeface="Calibri" charset="0"/>
-                      </a:endParaRPr>
-                    </a:p>
-                  </a:txBody>
-                  <a:tcPr marL="91440" marR="91440" marT="45720" marB="45720">
-                    <a:lnL w="12700" cap="flat" cmpd="sng" algn="ctr">
-                      <a:solidFill>
-                        <a:srgbClr val="2A3441"/>
-                      </a:solidFill>
-                      <a:prstDash val="solid"/>
-                      <a:round/>
-                      <a:headEnd type="none" w="med" len="med"/>
-                      <a:tailEnd type="none" w="med" len="med"/>
-                    </a:lnL>
-                    <a:lnR w="12700" cap="flat" cmpd="sng" algn="ctr">
-                      <a:solidFill>
-                        <a:srgbClr val="2A3441"/>
-                      </a:solidFill>
-                      <a:prstDash val="solid"/>
-                      <a:round/>
-                      <a:headEnd type="none" w="med" len="med"/>
-                      <a:tailEnd type="none" w="med" len="med"/>
-                    </a:lnR>
-                    <a:lnT w="12700" cap="flat" cmpd="sng" algn="ctr">
-                      <a:solidFill>
-                        <a:srgbClr val="2A3441"/>
-                      </a:solidFill>
-                      <a:prstDash val="solid"/>
-                      <a:round/>
-                      <a:headEnd type="none" w="med" len="med"/>
-                      <a:tailEnd type="none" w="med" len="med"/>
-                    </a:lnT>
-                    <a:lnB w="12700" cap="flat" cmpd="sng" algn="ctr">
-                      <a:solidFill>
-                        <a:srgbClr val="2A3441"/>
-                      </a:solidFill>
-                      <a:prstDash val="solid"/>
-                      <a:round/>
-                      <a:headEnd type="none" w="med" len="med"/>
-                      <a:tailEnd type="none" w="med" len="med"/>
-                    </a:lnB>
-                    <a:solidFill>
-                      <a:srgbClr val="141B24"/>
-                    </a:solidFill>
-                  </a:tcPr>
-                </a:tc>
-                <a:tc>
-                  <a:txBody>
-                    <a:bodyPr/>
-                    <a:lstStyle/>
-                    <a:p>
-                      <a:pPr indent="0" marL="0">
-                        <a:buNone/>
-                      </a:pPr>
-                      <a:r>
-                        <a:rPr lang="en-US" sz="1300" dirty="0">
-                          <a:solidFill>
-                            <a:srgbClr val="E6EDF3"/>
-                          </a:solidFill>
-                          <a:latin typeface="Calibri" pitchFamily="34" charset="0"/>
-                          <a:ea typeface="Calibri" pitchFamily="34" charset="-122"/>
-                          <a:cs typeface="Calibri" pitchFamily="34" charset="-120"/>
-                        </a:rPr>
-                        <a:t>17.3</a:t>
-                      </a:r>
-                      <a:endParaRPr lang="en-US" sz="1300" dirty="0">
-                        <a:latin typeface="Calibri" charset="0"/>
-                        <a:ea typeface="Calibri" charset="0"/>
-                        <a:cs typeface="Calibri" charset="0"/>
-                      </a:endParaRPr>
-                    </a:p>
-                  </a:txBody>
-                  <a:tcPr marL="91440" marR="91440" marT="45720" marB="45720">
-                    <a:lnL w="12700" cap="flat" cmpd="sng" algn="ctr">
-                      <a:solidFill>
-                        <a:srgbClr val="2A3441"/>
-                      </a:solidFill>
-                      <a:prstDash val="solid"/>
-                      <a:round/>
-                      <a:headEnd type="none" w="med" len="med"/>
-                      <a:tailEnd type="none" w="med" len="med"/>
-                    </a:lnL>
-                    <a:lnR w="12700" cap="flat" cmpd="sng" algn="ctr">
-                      <a:solidFill>
-                        <a:srgbClr val="2A3441"/>
-                      </a:solidFill>
-                      <a:prstDash val="solid"/>
-                      <a:round/>
-                      <a:headEnd type="none" w="med" len="med"/>
-                      <a:tailEnd type="none" w="med" len="med"/>
-                    </a:lnR>
-                    <a:lnT w="12700" cap="flat" cmpd="sng" algn="ctr">
-                      <a:solidFill>
-                        <a:srgbClr val="2A3441"/>
-                      </a:solidFill>
-                      <a:prstDash val="solid"/>
-                      <a:round/>
-                      <a:headEnd type="none" w="med" len="med"/>
-                      <a:tailEnd type="none" w="med" len="med"/>
-                    </a:lnT>
-                    <a:lnB w="12700" cap="flat" cmpd="sng" algn="ctr">
-                      <a:solidFill>
-                        <a:srgbClr val="2A3441"/>
-                      </a:solidFill>
-                      <a:prstDash val="solid"/>
-                      <a:round/>
-                      <a:headEnd type="none" w="med" len="med"/>
-                      <a:tailEnd type="none" w="med" len="med"/>
-                    </a:lnB>
-                    <a:solidFill>
-                      <a:srgbClr val="141B24"/>
-                    </a:solidFill>
-                  </a:tcPr>
-                </a:tc>
-                <a:tc>
-                  <a:txBody>
-                    <a:bodyPr/>
-                    <a:lstStyle/>
-                    <a:p>
-                      <a:pPr indent="0" marL="0">
-                        <a:buNone/>
-                      </a:pPr>
-                      <a:r>
-                        <a:rPr lang="en-US" sz="1300" dirty="0">
-                          <a:solidFill>
-                            <a:srgbClr val="E6EDF3"/>
-                          </a:solidFill>
-                          <a:latin typeface="Calibri" pitchFamily="34" charset="0"/>
-                          <a:ea typeface="Calibri" pitchFamily="34" charset="-122"/>
-                          <a:cs typeface="Calibri" pitchFamily="34" charset="-120"/>
-                        </a:rPr>
-                        <a:t>4.0</a:t>
-                      </a:r>
-                      <a:endParaRPr lang="en-US" sz="1300" dirty="0">
-                        <a:latin typeface="Calibri" charset="0"/>
-                        <a:ea typeface="Calibri" charset="0"/>
-                        <a:cs typeface="Calibri" charset="0"/>
-                      </a:endParaRPr>
-                    </a:p>
-                  </a:txBody>
-                  <a:tcPr marL="91440" marR="91440" marT="45720" marB="45720">
-                    <a:lnL w="12700" cap="flat" cmpd="sng" algn="ctr">
-                      <a:solidFill>
-                        <a:srgbClr val="2A3441"/>
-                      </a:solidFill>
-                      <a:prstDash val="solid"/>
-                      <a:round/>
-                      <a:headEnd type="none" w="med" len="med"/>
-                      <a:tailEnd type="none" w="med" len="med"/>
-                    </a:lnL>
-                    <a:lnR w="12700" cap="flat" cmpd="sng" algn="ctr">
-                      <a:solidFill>
-                        <a:srgbClr val="2A3441"/>
-                      </a:solidFill>
-                      <a:prstDash val="solid"/>
-                      <a:round/>
-                      <a:headEnd type="none" w="med" len="med"/>
-                      <a:tailEnd type="none" w="med" len="med"/>
-                    </a:lnR>
-                    <a:lnT w="12700" cap="flat" cmpd="sng" algn="ctr">
-                      <a:solidFill>
-                        <a:srgbClr val="2A3441"/>
-                      </a:solidFill>
-                      <a:prstDash val="solid"/>
-                      <a:round/>
-                      <a:headEnd type="none" w="med" len="med"/>
-                      <a:tailEnd type="none" w="med" len="med"/>
-                    </a:lnT>
-                    <a:lnB w="12700" cap="flat" cmpd="sng" algn="ctr">
-                      <a:solidFill>
-                        <a:srgbClr val="2A3441"/>
-                      </a:solidFill>
-                      <a:prstDash val="solid"/>
-                      <a:round/>
-                      <a:headEnd type="none" w="med" len="med"/>
-                      <a:tailEnd type="none" w="med" len="med"/>
-                    </a:lnB>
-                    <a:solidFill>
-                      <a:srgbClr val="141B24"/>
-                    </a:solidFill>
-                  </a:tcPr>
-                </a:tc>
-              </a:tr>
-              <a:tr h="402336">
+              <a:tr h="420624">
                 <a:tc>
                   <a:txBody>
                     <a:bodyPr/>
@@ -17403,7 +17218,7 @@
                           <a:ea typeface="Calibri" pitchFamily="34" charset="-122"/>
                           <a:cs typeface="Calibri" pitchFamily="34" charset="-120"/>
                         </a:rPr>
-                        <a:t>1.30</a:t>
+                        <a:t>1.41</a:t>
                       </a:r>
                       <a:endParaRPr lang="en-US" sz="1300" dirty="0">
                         <a:latin typeface="Calibri" charset="0"/>
@@ -17539,77 +17354,7 @@
                           <a:ea typeface="Calibri" pitchFamily="34" charset="-122"/>
                           <a:cs typeface="Calibri" pitchFamily="34" charset="-120"/>
                         </a:rPr>
-                        <a:t>1.09</a:t>
-                      </a:r>
-                      <a:endParaRPr lang="en-US" sz="1300" dirty="0">
-                        <a:latin typeface="Calibri" charset="0"/>
-                        <a:ea typeface="Calibri" charset="0"/>
-                        <a:cs typeface="Calibri" charset="0"/>
-                      </a:endParaRPr>
-                    </a:p>
-                  </a:txBody>
-                  <a:tcPr marL="91440" marR="91440" marT="45720" marB="45720">
-                    <a:lnL w="12700" cap="flat" cmpd="sng" algn="ctr">
-                      <a:solidFill>
-                        <a:srgbClr val="2A3441"/>
-                      </a:solidFill>
-                      <a:prstDash val="solid"/>
-                      <a:round/>
-                      <a:headEnd type="none" w="med" len="med"/>
-                      <a:tailEnd type="none" w="med" len="med"/>
-                    </a:lnL>
-                    <a:lnR w="12700" cap="flat" cmpd="sng" algn="ctr">
-                      <a:solidFill>
-                        <a:srgbClr val="2A3441"/>
-                      </a:solidFill>
-                      <a:prstDash val="solid"/>
-                      <a:round/>
-                      <a:headEnd type="none" w="med" len="med"/>
-                      <a:tailEnd type="none" w="med" len="med"/>
-                    </a:lnR>
-                    <a:lnT w="12700" cap="flat" cmpd="sng" algn="ctr">
-                      <a:solidFill>
-                        <a:srgbClr val="2A3441"/>
-                      </a:solidFill>
-                      <a:prstDash val="solid"/>
-                      <a:round/>
-                      <a:headEnd type="none" w="med" len="med"/>
-                      <a:tailEnd type="none" w="med" len="med"/>
-                    </a:lnT>
-                    <a:lnB w="12700" cap="flat" cmpd="sng" algn="ctr">
-                      <a:solidFill>
-                        <a:srgbClr val="2A3441"/>
-                      </a:solidFill>
-                      <a:prstDash val="solid"/>
-                      <a:round/>
-                      <a:headEnd type="none" w="med" len="med"/>
-                      <a:tailEnd type="none" w="med" len="med"/>
-                    </a:lnB>
-                    <a:solidFill>
-                      <a:srgbClr val="141B24"/>
-                    </a:solidFill>
-                  </a:tcPr>
-                </a:tc>
-              </a:tr>
-              <a:tr h="402336">
-                <a:tc>
-                  <a:txBody>
-                    <a:bodyPr/>
-                    <a:lstStyle/>
-                    <a:p>
-                      <a:pPr indent="0" marL="0">
-                        <a:buNone/>
-                      </a:pPr>
-                      <a:r>
-                        <a:rPr lang="en-US" sz="1300" dirty="0">
-                          <a:solidFill>
-                            <a:srgbClr val="E6EDF3"/>
-                          </a:solidFill>
-                          <a:latin typeface="Calibri" pitchFamily="34" charset="0"/>
-                          <a:ea typeface="Calibri" pitchFamily="34" charset="-122"/>
-                          <a:cs typeface="Calibri" pitchFamily="34" charset="-120"/>
-                        </a:rPr>
-                        <a:t>Hostile, 10% loss</a:t>
+                        <a:t>1.19</a:t>
                       </a:r>
                       <a:endParaRPr lang="en-US" sz="1300" dirty="0">
                         <a:latin typeface="Calibri" charset="0"/>
@@ -17677,7 +17422,77 @@
                           <a:ea typeface="Calibri" pitchFamily="34" charset="-122"/>
                           <a:cs typeface="Calibri" pitchFamily="34" charset="-120"/>
                         </a:rPr>
-                        <a:t>7.5</a:t>
+                        <a:t>0.92</a:t>
+                      </a:r>
+                      <a:endParaRPr lang="en-US" sz="1300" dirty="0">
+                        <a:latin typeface="Calibri" charset="0"/>
+                        <a:ea typeface="Calibri" charset="0"/>
+                        <a:cs typeface="Calibri" charset="0"/>
+                      </a:endParaRPr>
+                    </a:p>
+                  </a:txBody>
+                  <a:tcPr marL="91440" marR="91440" marT="45720" marB="45720">
+                    <a:lnL w="12700" cap="flat" cmpd="sng" algn="ctr">
+                      <a:solidFill>
+                        <a:srgbClr val="2A3441"/>
+                      </a:solidFill>
+                      <a:prstDash val="solid"/>
+                      <a:round/>
+                      <a:headEnd type="none" w="med" len="med"/>
+                      <a:tailEnd type="none" w="med" len="med"/>
+                    </a:lnL>
+                    <a:lnR w="12700" cap="flat" cmpd="sng" algn="ctr">
+                      <a:solidFill>
+                        <a:srgbClr val="2A3441"/>
+                      </a:solidFill>
+                      <a:prstDash val="solid"/>
+                      <a:round/>
+                      <a:headEnd type="none" w="med" len="med"/>
+                      <a:tailEnd type="none" w="med" len="med"/>
+                    </a:lnR>
+                    <a:lnT w="12700" cap="flat" cmpd="sng" algn="ctr">
+                      <a:solidFill>
+                        <a:srgbClr val="2A3441"/>
+                      </a:solidFill>
+                      <a:prstDash val="solid"/>
+                      <a:round/>
+                      <a:headEnd type="none" w="med" len="med"/>
+                      <a:tailEnd type="none" w="med" len="med"/>
+                    </a:lnT>
+                    <a:lnB w="12700" cap="flat" cmpd="sng" algn="ctr">
+                      <a:solidFill>
+                        <a:srgbClr val="2A3441"/>
+                      </a:solidFill>
+                      <a:prstDash val="solid"/>
+                      <a:round/>
+                      <a:headEnd type="none" w="med" len="med"/>
+                      <a:tailEnd type="none" w="med" len="med"/>
+                    </a:lnB>
+                    <a:solidFill>
+                      <a:srgbClr val="141B24"/>
+                    </a:solidFill>
+                  </a:tcPr>
+                </a:tc>
+              </a:tr>
+              <a:tr h="420624">
+                <a:tc>
+                  <a:txBody>
+                    <a:bodyPr/>
+                    <a:lstStyle/>
+                    <a:p>
+                      <a:pPr indent="0" marL="0">
+                        <a:buNone/>
+                      </a:pPr>
+                      <a:r>
+                        <a:rPr lang="en-US" sz="1300" dirty="0">
+                          <a:solidFill>
+                            <a:srgbClr val="E6EDF3"/>
+                          </a:solidFill>
+                          <a:latin typeface="Calibri" pitchFamily="34" charset="0"/>
+                          <a:ea typeface="Calibri" pitchFamily="34" charset="-122"/>
+                          <a:cs typeface="Calibri" pitchFamily="34" charset="-120"/>
+                        </a:rPr>
+                        <a:t>Lossy 2%</a:t>
                       </a:r>
                       <a:endParaRPr lang="en-US" sz="1300" dirty="0">
                         <a:latin typeface="Calibri" charset="0"/>
@@ -17745,7 +17560,7 @@
                           <a:ea typeface="Calibri" pitchFamily="34" charset="-122"/>
                           <a:cs typeface="Calibri" pitchFamily="34" charset="-120"/>
                         </a:rPr>
-                        <a:t>8.5</a:t>
+                        <a:t>7.98</a:t>
                       </a:r>
                       <a:endParaRPr lang="en-US" sz="1300" dirty="0">
                         <a:latin typeface="Calibri" charset="0"/>
@@ -17813,7 +17628,1169 @@
                           <a:ea typeface="Calibri" pitchFamily="34" charset="-122"/>
                           <a:cs typeface="Calibri" pitchFamily="34" charset="-120"/>
                         </a:rPr>
-                        <a:t>5.9</a:t>
+                        <a:t>7.05</a:t>
+                      </a:r>
+                      <a:endParaRPr lang="en-US" sz="1300" dirty="0">
+                        <a:latin typeface="Calibri" charset="0"/>
+                        <a:ea typeface="Calibri" charset="0"/>
+                        <a:cs typeface="Calibri" charset="0"/>
+                      </a:endParaRPr>
+                    </a:p>
+                  </a:txBody>
+                  <a:tcPr marL="91440" marR="91440" marT="45720" marB="45720">
+                    <a:lnL w="12700" cap="flat" cmpd="sng" algn="ctr">
+                      <a:solidFill>
+                        <a:srgbClr val="2A3441"/>
+                      </a:solidFill>
+                      <a:prstDash val="solid"/>
+                      <a:round/>
+                      <a:headEnd type="none" w="med" len="med"/>
+                      <a:tailEnd type="none" w="med" len="med"/>
+                    </a:lnL>
+                    <a:lnR w="12700" cap="flat" cmpd="sng" algn="ctr">
+                      <a:solidFill>
+                        <a:srgbClr val="2A3441"/>
+                      </a:solidFill>
+                      <a:prstDash val="solid"/>
+                      <a:round/>
+                      <a:headEnd type="none" w="med" len="med"/>
+                      <a:tailEnd type="none" w="med" len="med"/>
+                    </a:lnR>
+                    <a:lnT w="12700" cap="flat" cmpd="sng" algn="ctr">
+                      <a:solidFill>
+                        <a:srgbClr val="2A3441"/>
+                      </a:solidFill>
+                      <a:prstDash val="solid"/>
+                      <a:round/>
+                      <a:headEnd type="none" w="med" len="med"/>
+                      <a:tailEnd type="none" w="med" len="med"/>
+                    </a:lnT>
+                    <a:lnB w="12700" cap="flat" cmpd="sng" algn="ctr">
+                      <a:solidFill>
+                        <a:srgbClr val="2A3441"/>
+                      </a:solidFill>
+                      <a:prstDash val="solid"/>
+                      <a:round/>
+                      <a:headEnd type="none" w="med" len="med"/>
+                      <a:tailEnd type="none" w="med" len="med"/>
+                    </a:lnB>
+                    <a:solidFill>
+                      <a:srgbClr val="141B24"/>
+                    </a:solidFill>
+                  </a:tcPr>
+                </a:tc>
+                <a:tc>
+                  <a:txBody>
+                    <a:bodyPr/>
+                    <a:lstStyle/>
+                    <a:p>
+                      <a:pPr indent="0" marL="0">
+                        <a:buNone/>
+                      </a:pPr>
+                      <a:r>
+                        <a:rPr lang="en-US" sz="1300" dirty="0">
+                          <a:solidFill>
+                            <a:srgbClr val="E6EDF3"/>
+                          </a:solidFill>
+                          <a:latin typeface="Calibri" pitchFamily="34" charset="0"/>
+                          <a:ea typeface="Calibri" pitchFamily="34" charset="-122"/>
+                          <a:cs typeface="Calibri" pitchFamily="34" charset="-120"/>
+                        </a:rPr>
+                        <a:t>13.92</a:t>
+                      </a:r>
+                      <a:endParaRPr lang="en-US" sz="1300" dirty="0">
+                        <a:latin typeface="Calibri" charset="0"/>
+                        <a:ea typeface="Calibri" charset="0"/>
+                        <a:cs typeface="Calibri" charset="0"/>
+                      </a:endParaRPr>
+                    </a:p>
+                  </a:txBody>
+                  <a:tcPr marL="91440" marR="91440" marT="45720" marB="45720">
+                    <a:lnL w="12700" cap="flat" cmpd="sng" algn="ctr">
+                      <a:solidFill>
+                        <a:srgbClr val="2A3441"/>
+                      </a:solidFill>
+                      <a:prstDash val="solid"/>
+                      <a:round/>
+                      <a:headEnd type="none" w="med" len="med"/>
+                      <a:tailEnd type="none" w="med" len="med"/>
+                    </a:lnL>
+                    <a:lnR w="12700" cap="flat" cmpd="sng" algn="ctr">
+                      <a:solidFill>
+                        <a:srgbClr val="2A3441"/>
+                      </a:solidFill>
+                      <a:prstDash val="solid"/>
+                      <a:round/>
+                      <a:headEnd type="none" w="med" len="med"/>
+                      <a:tailEnd type="none" w="med" len="med"/>
+                    </a:lnR>
+                    <a:lnT w="12700" cap="flat" cmpd="sng" algn="ctr">
+                      <a:solidFill>
+                        <a:srgbClr val="2A3441"/>
+                      </a:solidFill>
+                      <a:prstDash val="solid"/>
+                      <a:round/>
+                      <a:headEnd type="none" w="med" len="med"/>
+                      <a:tailEnd type="none" w="med" len="med"/>
+                    </a:lnT>
+                    <a:lnB w="12700" cap="flat" cmpd="sng" algn="ctr">
+                      <a:solidFill>
+                        <a:srgbClr val="2A3441"/>
+                      </a:solidFill>
+                      <a:prstDash val="solid"/>
+                      <a:round/>
+                      <a:headEnd type="none" w="med" len="med"/>
+                      <a:tailEnd type="none" w="med" len="med"/>
+                    </a:lnB>
+                    <a:solidFill>
+                      <a:srgbClr val="141B24"/>
+                    </a:solidFill>
+                  </a:tcPr>
+                </a:tc>
+                <a:tc>
+                  <a:txBody>
+                    <a:bodyPr/>
+                    <a:lstStyle/>
+                    <a:p>
+                      <a:pPr indent="0" marL="0">
+                        <a:buNone/>
+                      </a:pPr>
+                      <a:r>
+                        <a:rPr lang="en-US" sz="1300" dirty="0">
+                          <a:solidFill>
+                            <a:srgbClr val="E6EDF3"/>
+                          </a:solidFill>
+                          <a:latin typeface="Calibri" pitchFamily="34" charset="0"/>
+                          <a:ea typeface="Calibri" pitchFamily="34" charset="-122"/>
+                          <a:cs typeface="Calibri" pitchFamily="34" charset="-120"/>
+                        </a:rPr>
+                        <a:t>3.62</a:t>
+                      </a:r>
+                      <a:endParaRPr lang="en-US" sz="1300" dirty="0">
+                        <a:latin typeface="Calibri" charset="0"/>
+                        <a:ea typeface="Calibri" charset="0"/>
+                        <a:cs typeface="Calibri" charset="0"/>
+                      </a:endParaRPr>
+                    </a:p>
+                  </a:txBody>
+                  <a:tcPr marL="91440" marR="91440" marT="45720" marB="45720">
+                    <a:lnL w="12700" cap="flat" cmpd="sng" algn="ctr">
+                      <a:solidFill>
+                        <a:srgbClr val="2A3441"/>
+                      </a:solidFill>
+                      <a:prstDash val="solid"/>
+                      <a:round/>
+                      <a:headEnd type="none" w="med" len="med"/>
+                      <a:tailEnd type="none" w="med" len="med"/>
+                    </a:lnL>
+                    <a:lnR w="12700" cap="flat" cmpd="sng" algn="ctr">
+                      <a:solidFill>
+                        <a:srgbClr val="2A3441"/>
+                      </a:solidFill>
+                      <a:prstDash val="solid"/>
+                      <a:round/>
+                      <a:headEnd type="none" w="med" len="med"/>
+                      <a:tailEnd type="none" w="med" len="med"/>
+                    </a:lnR>
+                    <a:lnT w="12700" cap="flat" cmpd="sng" algn="ctr">
+                      <a:solidFill>
+                        <a:srgbClr val="2A3441"/>
+                      </a:solidFill>
+                      <a:prstDash val="solid"/>
+                      <a:round/>
+                      <a:headEnd type="none" w="med" len="med"/>
+                      <a:tailEnd type="none" w="med" len="med"/>
+                    </a:lnT>
+                    <a:lnB w="12700" cap="flat" cmpd="sng" algn="ctr">
+                      <a:solidFill>
+                        <a:srgbClr val="2A3441"/>
+                      </a:solidFill>
+                      <a:prstDash val="solid"/>
+                      <a:round/>
+                      <a:headEnd type="none" w="med" len="med"/>
+                      <a:tailEnd type="none" w="med" len="med"/>
+                    </a:lnB>
+                    <a:solidFill>
+                      <a:srgbClr val="141B24"/>
+                    </a:solidFill>
+                  </a:tcPr>
+                </a:tc>
+              </a:tr>
+              <a:tr h="420624">
+                <a:tc>
+                  <a:txBody>
+                    <a:bodyPr/>
+                    <a:lstStyle/>
+                    <a:p>
+                      <a:pPr indent="0" marL="0">
+                        <a:buNone/>
+                      </a:pPr>
+                      <a:r>
+                        <a:rPr lang="en-US" sz="1300" dirty="0">
+                          <a:solidFill>
+                            <a:srgbClr val="E6EDF3"/>
+                          </a:solidFill>
+                          <a:latin typeface="Calibri" pitchFamily="34" charset="0"/>
+                          <a:ea typeface="Calibri" pitchFamily="34" charset="-122"/>
+                          <a:cs typeface="Calibri" pitchFamily="34" charset="-120"/>
+                        </a:rPr>
+                        <a:t>Satellite-like</a:t>
+                      </a:r>
+                      <a:endParaRPr lang="en-US" sz="1300" dirty="0">
+                        <a:latin typeface="Calibri" charset="0"/>
+                        <a:ea typeface="Calibri" charset="0"/>
+                        <a:cs typeface="Calibri" charset="0"/>
+                      </a:endParaRPr>
+                    </a:p>
+                  </a:txBody>
+                  <a:tcPr marL="91440" marR="91440" marT="45720" marB="45720">
+                    <a:lnL w="12700" cap="flat" cmpd="sng" algn="ctr">
+                      <a:solidFill>
+                        <a:srgbClr val="2A3441"/>
+                      </a:solidFill>
+                      <a:prstDash val="solid"/>
+                      <a:round/>
+                      <a:headEnd type="none" w="med" len="med"/>
+                      <a:tailEnd type="none" w="med" len="med"/>
+                    </a:lnL>
+                    <a:lnR w="12700" cap="flat" cmpd="sng" algn="ctr">
+                      <a:solidFill>
+                        <a:srgbClr val="2A3441"/>
+                      </a:solidFill>
+                      <a:prstDash val="solid"/>
+                      <a:round/>
+                      <a:headEnd type="none" w="med" len="med"/>
+                      <a:tailEnd type="none" w="med" len="med"/>
+                    </a:lnR>
+                    <a:lnT w="12700" cap="flat" cmpd="sng" algn="ctr">
+                      <a:solidFill>
+                        <a:srgbClr val="2A3441"/>
+                      </a:solidFill>
+                      <a:prstDash val="solid"/>
+                      <a:round/>
+                      <a:headEnd type="none" w="med" len="med"/>
+                      <a:tailEnd type="none" w="med" len="med"/>
+                    </a:lnT>
+                    <a:lnB w="12700" cap="flat" cmpd="sng" algn="ctr">
+                      <a:solidFill>
+                        <a:srgbClr val="2A3441"/>
+                      </a:solidFill>
+                      <a:prstDash val="solid"/>
+                      <a:round/>
+                      <a:headEnd type="none" w="med" len="med"/>
+                      <a:tailEnd type="none" w="med" len="med"/>
+                    </a:lnB>
+                    <a:solidFill>
+                      <a:srgbClr val="141B24"/>
+                    </a:solidFill>
+                  </a:tcPr>
+                </a:tc>
+                <a:tc>
+                  <a:txBody>
+                    <a:bodyPr/>
+                    <a:lstStyle/>
+                    <a:p>
+                      <a:pPr indent="0" marL="0">
+                        <a:buNone/>
+                      </a:pPr>
+                      <a:r>
+                        <a:rPr lang="en-US" sz="1300" dirty="0">
+                          <a:solidFill>
+                            <a:srgbClr val="E6EDF3"/>
+                          </a:solidFill>
+                          <a:latin typeface="Calibri" pitchFamily="34" charset="0"/>
+                          <a:ea typeface="Calibri" pitchFamily="34" charset="-122"/>
+                          <a:cs typeface="Calibri" pitchFamily="34" charset="-120"/>
+                        </a:rPr>
+                        <a:t>17.93</a:t>
+                      </a:r>
+                      <a:endParaRPr lang="en-US" sz="1300" dirty="0">
+                        <a:latin typeface="Calibri" charset="0"/>
+                        <a:ea typeface="Calibri" charset="0"/>
+                        <a:cs typeface="Calibri" charset="0"/>
+                      </a:endParaRPr>
+                    </a:p>
+                  </a:txBody>
+                  <a:tcPr marL="91440" marR="91440" marT="45720" marB="45720">
+                    <a:lnL w="12700" cap="flat" cmpd="sng" algn="ctr">
+                      <a:solidFill>
+                        <a:srgbClr val="2A3441"/>
+                      </a:solidFill>
+                      <a:prstDash val="solid"/>
+                      <a:round/>
+                      <a:headEnd type="none" w="med" len="med"/>
+                      <a:tailEnd type="none" w="med" len="med"/>
+                    </a:lnL>
+                    <a:lnR w="12700" cap="flat" cmpd="sng" algn="ctr">
+                      <a:solidFill>
+                        <a:srgbClr val="2A3441"/>
+                      </a:solidFill>
+                      <a:prstDash val="solid"/>
+                      <a:round/>
+                      <a:headEnd type="none" w="med" len="med"/>
+                      <a:tailEnd type="none" w="med" len="med"/>
+                    </a:lnR>
+                    <a:lnT w="12700" cap="flat" cmpd="sng" algn="ctr">
+                      <a:solidFill>
+                        <a:srgbClr val="2A3441"/>
+                      </a:solidFill>
+                      <a:prstDash val="solid"/>
+                      <a:round/>
+                      <a:headEnd type="none" w="med" len="med"/>
+                      <a:tailEnd type="none" w="med" len="med"/>
+                    </a:lnT>
+                    <a:lnB w="12700" cap="flat" cmpd="sng" algn="ctr">
+                      <a:solidFill>
+                        <a:srgbClr val="2A3441"/>
+                      </a:solidFill>
+                      <a:prstDash val="solid"/>
+                      <a:round/>
+                      <a:headEnd type="none" w="med" len="med"/>
+                      <a:tailEnd type="none" w="med" len="med"/>
+                    </a:lnB>
+                    <a:solidFill>
+                      <a:srgbClr val="141B24"/>
+                    </a:solidFill>
+                  </a:tcPr>
+                </a:tc>
+                <a:tc>
+                  <a:txBody>
+                    <a:bodyPr/>
+                    <a:lstStyle/>
+                    <a:p>
+                      <a:pPr indent="0" marL="0">
+                        <a:buNone/>
+                      </a:pPr>
+                      <a:r>
+                        <a:rPr lang="en-US" sz="1300" dirty="0">
+                          <a:solidFill>
+                            <a:srgbClr val="E6EDF3"/>
+                          </a:solidFill>
+                          <a:latin typeface="Calibri" pitchFamily="34" charset="0"/>
+                          <a:ea typeface="Calibri" pitchFamily="34" charset="-122"/>
+                          <a:cs typeface="Calibri" pitchFamily="34" charset="-120"/>
+                        </a:rPr>
+                        <a:t>11.36</a:t>
+                      </a:r>
+                      <a:endParaRPr lang="en-US" sz="1300" dirty="0">
+                        <a:latin typeface="Calibri" charset="0"/>
+                        <a:ea typeface="Calibri" charset="0"/>
+                        <a:cs typeface="Calibri" charset="0"/>
+                      </a:endParaRPr>
+                    </a:p>
+                  </a:txBody>
+                  <a:tcPr marL="91440" marR="91440" marT="45720" marB="45720">
+                    <a:lnL w="12700" cap="flat" cmpd="sng" algn="ctr">
+                      <a:solidFill>
+                        <a:srgbClr val="2A3441"/>
+                      </a:solidFill>
+                      <a:prstDash val="solid"/>
+                      <a:round/>
+                      <a:headEnd type="none" w="med" len="med"/>
+                      <a:tailEnd type="none" w="med" len="med"/>
+                    </a:lnL>
+                    <a:lnR w="12700" cap="flat" cmpd="sng" algn="ctr">
+                      <a:solidFill>
+                        <a:srgbClr val="2A3441"/>
+                      </a:solidFill>
+                      <a:prstDash val="solid"/>
+                      <a:round/>
+                      <a:headEnd type="none" w="med" len="med"/>
+                      <a:tailEnd type="none" w="med" len="med"/>
+                    </a:lnR>
+                    <a:lnT w="12700" cap="flat" cmpd="sng" algn="ctr">
+                      <a:solidFill>
+                        <a:srgbClr val="2A3441"/>
+                      </a:solidFill>
+                      <a:prstDash val="solid"/>
+                      <a:round/>
+                      <a:headEnd type="none" w="med" len="med"/>
+                      <a:tailEnd type="none" w="med" len="med"/>
+                    </a:lnT>
+                    <a:lnB w="12700" cap="flat" cmpd="sng" algn="ctr">
+                      <a:solidFill>
+                        <a:srgbClr val="2A3441"/>
+                      </a:solidFill>
+                      <a:prstDash val="solid"/>
+                      <a:round/>
+                      <a:headEnd type="none" w="med" len="med"/>
+                      <a:tailEnd type="none" w="med" len="med"/>
+                    </a:lnB>
+                    <a:solidFill>
+                      <a:srgbClr val="141B24"/>
+                    </a:solidFill>
+                  </a:tcPr>
+                </a:tc>
+                <a:tc>
+                  <a:txBody>
+                    <a:bodyPr/>
+                    <a:lstStyle/>
+                    <a:p>
+                      <a:pPr indent="0" marL="0">
+                        <a:buNone/>
+                      </a:pPr>
+                      <a:r>
+                        <a:rPr lang="en-US" sz="1300" dirty="0">
+                          <a:solidFill>
+                            <a:srgbClr val="E6EDF3"/>
+                          </a:solidFill>
+                          <a:latin typeface="Calibri" pitchFamily="34" charset="0"/>
+                          <a:ea typeface="Calibri" pitchFamily="34" charset="-122"/>
+                          <a:cs typeface="Calibri" pitchFamily="34" charset="-120"/>
+                        </a:rPr>
+                        <a:t>8.26</a:t>
+                      </a:r>
+                      <a:endParaRPr lang="en-US" sz="1300" dirty="0">
+                        <a:latin typeface="Calibri" charset="0"/>
+                        <a:ea typeface="Calibri" charset="0"/>
+                        <a:cs typeface="Calibri" charset="0"/>
+                      </a:endParaRPr>
+                    </a:p>
+                  </a:txBody>
+                  <a:tcPr marL="91440" marR="91440" marT="45720" marB="45720">
+                    <a:lnL w="12700" cap="flat" cmpd="sng" algn="ctr">
+                      <a:solidFill>
+                        <a:srgbClr val="2A3441"/>
+                      </a:solidFill>
+                      <a:prstDash val="solid"/>
+                      <a:round/>
+                      <a:headEnd type="none" w="med" len="med"/>
+                      <a:tailEnd type="none" w="med" len="med"/>
+                    </a:lnL>
+                    <a:lnR w="12700" cap="flat" cmpd="sng" algn="ctr">
+                      <a:solidFill>
+                        <a:srgbClr val="2A3441"/>
+                      </a:solidFill>
+                      <a:prstDash val="solid"/>
+                      <a:round/>
+                      <a:headEnd type="none" w="med" len="med"/>
+                      <a:tailEnd type="none" w="med" len="med"/>
+                    </a:lnR>
+                    <a:lnT w="12700" cap="flat" cmpd="sng" algn="ctr">
+                      <a:solidFill>
+                        <a:srgbClr val="2A3441"/>
+                      </a:solidFill>
+                      <a:prstDash val="solid"/>
+                      <a:round/>
+                      <a:headEnd type="none" w="med" len="med"/>
+                      <a:tailEnd type="none" w="med" len="med"/>
+                    </a:lnT>
+                    <a:lnB w="12700" cap="flat" cmpd="sng" algn="ctr">
+                      <a:solidFill>
+                        <a:srgbClr val="2A3441"/>
+                      </a:solidFill>
+                      <a:prstDash val="solid"/>
+                      <a:round/>
+                      <a:headEnd type="none" w="med" len="med"/>
+                      <a:tailEnd type="none" w="med" len="med"/>
+                    </a:lnB>
+                    <a:solidFill>
+                      <a:srgbClr val="141B24"/>
+                    </a:solidFill>
+                  </a:tcPr>
+                </a:tc>
+                <a:tc>
+                  <a:txBody>
+                    <a:bodyPr/>
+                    <a:lstStyle/>
+                    <a:p>
+                      <a:pPr indent="0" marL="0">
+                        <a:buNone/>
+                      </a:pPr>
+                      <a:r>
+                        <a:rPr lang="en-US" sz="1300" dirty="0">
+                          <a:solidFill>
+                            <a:srgbClr val="E6EDF3"/>
+                          </a:solidFill>
+                          <a:latin typeface="Calibri" pitchFamily="34" charset="0"/>
+                          <a:ea typeface="Calibri" pitchFamily="34" charset="-122"/>
+                          <a:cs typeface="Calibri" pitchFamily="34" charset="-120"/>
+                        </a:rPr>
+                        <a:t>5.46</a:t>
+                      </a:r>
+                      <a:endParaRPr lang="en-US" sz="1300" dirty="0">
+                        <a:latin typeface="Calibri" charset="0"/>
+                        <a:ea typeface="Calibri" charset="0"/>
+                        <a:cs typeface="Calibri" charset="0"/>
+                      </a:endParaRPr>
+                    </a:p>
+                  </a:txBody>
+                  <a:tcPr marL="91440" marR="91440" marT="45720" marB="45720">
+                    <a:lnL w="12700" cap="flat" cmpd="sng" algn="ctr">
+                      <a:solidFill>
+                        <a:srgbClr val="2A3441"/>
+                      </a:solidFill>
+                      <a:prstDash val="solid"/>
+                      <a:round/>
+                      <a:headEnd type="none" w="med" len="med"/>
+                      <a:tailEnd type="none" w="med" len="med"/>
+                    </a:lnL>
+                    <a:lnR w="12700" cap="flat" cmpd="sng" algn="ctr">
+                      <a:solidFill>
+                        <a:srgbClr val="2A3441"/>
+                      </a:solidFill>
+                      <a:prstDash val="solid"/>
+                      <a:round/>
+                      <a:headEnd type="none" w="med" len="med"/>
+                      <a:tailEnd type="none" w="med" len="med"/>
+                    </a:lnR>
+                    <a:lnT w="12700" cap="flat" cmpd="sng" algn="ctr">
+                      <a:solidFill>
+                        <a:srgbClr val="2A3441"/>
+                      </a:solidFill>
+                      <a:prstDash val="solid"/>
+                      <a:round/>
+                      <a:headEnd type="none" w="med" len="med"/>
+                      <a:tailEnd type="none" w="med" len="med"/>
+                    </a:lnT>
+                    <a:lnB w="12700" cap="flat" cmpd="sng" algn="ctr">
+                      <a:solidFill>
+                        <a:srgbClr val="2A3441"/>
+                      </a:solidFill>
+                      <a:prstDash val="solid"/>
+                      <a:round/>
+                      <a:headEnd type="none" w="med" len="med"/>
+                      <a:tailEnd type="none" w="med" len="med"/>
+                    </a:lnB>
+                    <a:solidFill>
+                      <a:srgbClr val="141B24"/>
+                    </a:solidFill>
+                  </a:tcPr>
+                </a:tc>
+              </a:tr>
+              <a:tr h="420624">
+                <a:tc>
+                  <a:txBody>
+                    <a:bodyPr/>
+                    <a:lstStyle/>
+                    <a:p>
+                      <a:pPr indent="0" marL="0">
+                        <a:buNone/>
+                      </a:pPr>
+                      <a:r>
+                        <a:rPr lang="en-US" sz="1300" dirty="0">
+                          <a:solidFill>
+                            <a:srgbClr val="E6EDF3"/>
+                          </a:solidFill>
+                          <a:latin typeface="Calibri" pitchFamily="34" charset="0"/>
+                          <a:ea typeface="Calibri" pitchFamily="34" charset="-122"/>
+                          <a:cs typeface="Calibri" pitchFamily="34" charset="-120"/>
+                        </a:rPr>
+                        <a:t>Fast (3,000 pkts)</a:t>
+                      </a:r>
+                      <a:endParaRPr lang="en-US" sz="1300" dirty="0">
+                        <a:latin typeface="Calibri" charset="0"/>
+                        <a:ea typeface="Calibri" charset="0"/>
+                        <a:cs typeface="Calibri" charset="0"/>
+                      </a:endParaRPr>
+                    </a:p>
+                  </a:txBody>
+                  <a:tcPr marL="91440" marR="91440" marT="45720" marB="45720">
+                    <a:lnL w="12700" cap="flat" cmpd="sng" algn="ctr">
+                      <a:solidFill>
+                        <a:srgbClr val="2A3441"/>
+                      </a:solidFill>
+                      <a:prstDash val="solid"/>
+                      <a:round/>
+                      <a:headEnd type="none" w="med" len="med"/>
+                      <a:tailEnd type="none" w="med" len="med"/>
+                    </a:lnL>
+                    <a:lnR w="12700" cap="flat" cmpd="sng" algn="ctr">
+                      <a:solidFill>
+                        <a:srgbClr val="2A3441"/>
+                      </a:solidFill>
+                      <a:prstDash val="solid"/>
+                      <a:round/>
+                      <a:headEnd type="none" w="med" len="med"/>
+                      <a:tailEnd type="none" w="med" len="med"/>
+                    </a:lnR>
+                    <a:lnT w="12700" cap="flat" cmpd="sng" algn="ctr">
+                      <a:solidFill>
+                        <a:srgbClr val="2A3441"/>
+                      </a:solidFill>
+                      <a:prstDash val="solid"/>
+                      <a:round/>
+                      <a:headEnd type="none" w="med" len="med"/>
+                      <a:tailEnd type="none" w="med" len="med"/>
+                    </a:lnT>
+                    <a:lnB w="12700" cap="flat" cmpd="sng" algn="ctr">
+                      <a:solidFill>
+                        <a:srgbClr val="2A3441"/>
+                      </a:solidFill>
+                      <a:prstDash val="solid"/>
+                      <a:round/>
+                      <a:headEnd type="none" w="med" len="med"/>
+                      <a:tailEnd type="none" w="med" len="med"/>
+                    </a:lnB>
+                    <a:solidFill>
+                      <a:srgbClr val="141B24"/>
+                    </a:solidFill>
+                  </a:tcPr>
+                </a:tc>
+                <a:tc>
+                  <a:txBody>
+                    <a:bodyPr/>
+                    <a:lstStyle/>
+                    <a:p>
+                      <a:pPr indent="0" marL="0">
+                        <a:buNone/>
+                      </a:pPr>
+                      <a:r>
+                        <a:rPr lang="en-US" sz="1300" dirty="0">
+                          <a:solidFill>
+                            <a:srgbClr val="E6EDF3"/>
+                          </a:solidFill>
+                          <a:latin typeface="Calibri" pitchFamily="34" charset="0"/>
+                          <a:ea typeface="Calibri" pitchFamily="34" charset="-122"/>
+                          <a:cs typeface="Calibri" pitchFamily="34" charset="-120"/>
+                        </a:rPr>
+                        <a:t>14.55</a:t>
+                      </a:r>
+                      <a:endParaRPr lang="en-US" sz="1300" dirty="0">
+                        <a:latin typeface="Calibri" charset="0"/>
+                        <a:ea typeface="Calibri" charset="0"/>
+                        <a:cs typeface="Calibri" charset="0"/>
+                      </a:endParaRPr>
+                    </a:p>
+                  </a:txBody>
+                  <a:tcPr marL="91440" marR="91440" marT="45720" marB="45720">
+                    <a:lnL w="12700" cap="flat" cmpd="sng" algn="ctr">
+                      <a:solidFill>
+                        <a:srgbClr val="2A3441"/>
+                      </a:solidFill>
+                      <a:prstDash val="solid"/>
+                      <a:round/>
+                      <a:headEnd type="none" w="med" len="med"/>
+                      <a:tailEnd type="none" w="med" len="med"/>
+                    </a:lnL>
+                    <a:lnR w="12700" cap="flat" cmpd="sng" algn="ctr">
+                      <a:solidFill>
+                        <a:srgbClr val="2A3441"/>
+                      </a:solidFill>
+                      <a:prstDash val="solid"/>
+                      <a:round/>
+                      <a:headEnd type="none" w="med" len="med"/>
+                      <a:tailEnd type="none" w="med" len="med"/>
+                    </a:lnR>
+                    <a:lnT w="12700" cap="flat" cmpd="sng" algn="ctr">
+                      <a:solidFill>
+                        <a:srgbClr val="2A3441"/>
+                      </a:solidFill>
+                      <a:prstDash val="solid"/>
+                      <a:round/>
+                      <a:headEnd type="none" w="med" len="med"/>
+                      <a:tailEnd type="none" w="med" len="med"/>
+                    </a:lnT>
+                    <a:lnB w="12700" cap="flat" cmpd="sng" algn="ctr">
+                      <a:solidFill>
+                        <a:srgbClr val="2A3441"/>
+                      </a:solidFill>
+                      <a:prstDash val="solid"/>
+                      <a:round/>
+                      <a:headEnd type="none" w="med" len="med"/>
+                      <a:tailEnd type="none" w="med" len="med"/>
+                    </a:lnB>
+                    <a:solidFill>
+                      <a:srgbClr val="141B24"/>
+                    </a:solidFill>
+                  </a:tcPr>
+                </a:tc>
+                <a:tc>
+                  <a:txBody>
+                    <a:bodyPr/>
+                    <a:lstStyle/>
+                    <a:p>
+                      <a:pPr indent="0" marL="0">
+                        <a:buNone/>
+                      </a:pPr>
+                      <a:r>
+                        <a:rPr lang="en-US" sz="1300" dirty="0">
+                          <a:solidFill>
+                            <a:srgbClr val="E6EDF3"/>
+                          </a:solidFill>
+                          <a:latin typeface="Calibri" pitchFamily="34" charset="0"/>
+                          <a:ea typeface="Calibri" pitchFamily="34" charset="-122"/>
+                          <a:cs typeface="Calibri" pitchFamily="34" charset="-120"/>
+                        </a:rPr>
+                        <a:t>8.20</a:t>
+                      </a:r>
+                      <a:endParaRPr lang="en-US" sz="1300" dirty="0">
+                        <a:latin typeface="Calibri" charset="0"/>
+                        <a:ea typeface="Calibri" charset="0"/>
+                        <a:cs typeface="Calibri" charset="0"/>
+                      </a:endParaRPr>
+                    </a:p>
+                  </a:txBody>
+                  <a:tcPr marL="91440" marR="91440" marT="45720" marB="45720">
+                    <a:lnL w="12700" cap="flat" cmpd="sng" algn="ctr">
+                      <a:solidFill>
+                        <a:srgbClr val="2A3441"/>
+                      </a:solidFill>
+                      <a:prstDash val="solid"/>
+                      <a:round/>
+                      <a:headEnd type="none" w="med" len="med"/>
+                      <a:tailEnd type="none" w="med" len="med"/>
+                    </a:lnL>
+                    <a:lnR w="12700" cap="flat" cmpd="sng" algn="ctr">
+                      <a:solidFill>
+                        <a:srgbClr val="2A3441"/>
+                      </a:solidFill>
+                      <a:prstDash val="solid"/>
+                      <a:round/>
+                      <a:headEnd type="none" w="med" len="med"/>
+                      <a:tailEnd type="none" w="med" len="med"/>
+                    </a:lnR>
+                    <a:lnT w="12700" cap="flat" cmpd="sng" algn="ctr">
+                      <a:solidFill>
+                        <a:srgbClr val="2A3441"/>
+                      </a:solidFill>
+                      <a:prstDash val="solid"/>
+                      <a:round/>
+                      <a:headEnd type="none" w="med" len="med"/>
+                      <a:tailEnd type="none" w="med" len="med"/>
+                    </a:lnT>
+                    <a:lnB w="12700" cap="flat" cmpd="sng" algn="ctr">
+                      <a:solidFill>
+                        <a:srgbClr val="2A3441"/>
+                      </a:solidFill>
+                      <a:prstDash val="solid"/>
+                      <a:round/>
+                      <a:headEnd type="none" w="med" len="med"/>
+                      <a:tailEnd type="none" w="med" len="med"/>
+                    </a:lnB>
+                    <a:solidFill>
+                      <a:srgbClr val="141B24"/>
+                    </a:solidFill>
+                  </a:tcPr>
+                </a:tc>
+                <a:tc>
+                  <a:txBody>
+                    <a:bodyPr/>
+                    <a:lstStyle/>
+                    <a:p>
+                      <a:pPr indent="0" marL="0">
+                        <a:buNone/>
+                      </a:pPr>
+                      <a:r>
+                        <a:rPr lang="en-US" sz="1300" dirty="0">
+                          <a:solidFill>
+                            <a:srgbClr val="E6EDF3"/>
+                          </a:solidFill>
+                          <a:latin typeface="Calibri" pitchFamily="34" charset="0"/>
+                          <a:ea typeface="Calibri" pitchFamily="34" charset="-122"/>
+                          <a:cs typeface="Calibri" pitchFamily="34" charset="-120"/>
+                        </a:rPr>
+                        <a:t>6.52</a:t>
+                      </a:r>
+                      <a:endParaRPr lang="en-US" sz="1300" dirty="0">
+                        <a:latin typeface="Calibri" charset="0"/>
+                        <a:ea typeface="Calibri" charset="0"/>
+                        <a:cs typeface="Calibri" charset="0"/>
+                      </a:endParaRPr>
+                    </a:p>
+                  </a:txBody>
+                  <a:tcPr marL="91440" marR="91440" marT="45720" marB="45720">
+                    <a:lnL w="12700" cap="flat" cmpd="sng" algn="ctr">
+                      <a:solidFill>
+                        <a:srgbClr val="2A3441"/>
+                      </a:solidFill>
+                      <a:prstDash val="solid"/>
+                      <a:round/>
+                      <a:headEnd type="none" w="med" len="med"/>
+                      <a:tailEnd type="none" w="med" len="med"/>
+                    </a:lnL>
+                    <a:lnR w="12700" cap="flat" cmpd="sng" algn="ctr">
+                      <a:solidFill>
+                        <a:srgbClr val="2A3441"/>
+                      </a:solidFill>
+                      <a:prstDash val="solid"/>
+                      <a:round/>
+                      <a:headEnd type="none" w="med" len="med"/>
+                      <a:tailEnd type="none" w="med" len="med"/>
+                    </a:lnR>
+                    <a:lnT w="12700" cap="flat" cmpd="sng" algn="ctr">
+                      <a:solidFill>
+                        <a:srgbClr val="2A3441"/>
+                      </a:solidFill>
+                      <a:prstDash val="solid"/>
+                      <a:round/>
+                      <a:headEnd type="none" w="med" len="med"/>
+                      <a:tailEnd type="none" w="med" len="med"/>
+                    </a:lnT>
+                    <a:lnB w="12700" cap="flat" cmpd="sng" algn="ctr">
+                      <a:solidFill>
+                        <a:srgbClr val="2A3441"/>
+                      </a:solidFill>
+                      <a:prstDash val="solid"/>
+                      <a:round/>
+                      <a:headEnd type="none" w="med" len="med"/>
+                      <a:tailEnd type="none" w="med" len="med"/>
+                    </a:lnB>
+                    <a:solidFill>
+                      <a:srgbClr val="141B24"/>
+                    </a:solidFill>
+                  </a:tcPr>
+                </a:tc>
+                <a:tc>
+                  <a:txBody>
+                    <a:bodyPr/>
+                    <a:lstStyle/>
+                    <a:p>
+                      <a:pPr indent="0" marL="0">
+                        <a:buNone/>
+                      </a:pPr>
+                      <a:r>
+                        <a:rPr lang="en-US" sz="1300" dirty="0">
+                          <a:solidFill>
+                            <a:srgbClr val="E6EDF3"/>
+                          </a:solidFill>
+                          <a:latin typeface="Calibri" pitchFamily="34" charset="0"/>
+                          <a:ea typeface="Calibri" pitchFamily="34" charset="-122"/>
+                          <a:cs typeface="Calibri" pitchFamily="34" charset="-120"/>
+                        </a:rPr>
+                        <a:t>3.92</a:t>
+                      </a:r>
+                      <a:endParaRPr lang="en-US" sz="1300" dirty="0">
+                        <a:latin typeface="Calibri" charset="0"/>
+                        <a:ea typeface="Calibri" charset="0"/>
+                        <a:cs typeface="Calibri" charset="0"/>
+                      </a:endParaRPr>
+                    </a:p>
+                  </a:txBody>
+                  <a:tcPr marL="91440" marR="91440" marT="45720" marB="45720">
+                    <a:lnL w="12700" cap="flat" cmpd="sng" algn="ctr">
+                      <a:solidFill>
+                        <a:srgbClr val="2A3441"/>
+                      </a:solidFill>
+                      <a:prstDash val="solid"/>
+                      <a:round/>
+                      <a:headEnd type="none" w="med" len="med"/>
+                      <a:tailEnd type="none" w="med" len="med"/>
+                    </a:lnL>
+                    <a:lnR w="12700" cap="flat" cmpd="sng" algn="ctr">
+                      <a:solidFill>
+                        <a:srgbClr val="2A3441"/>
+                      </a:solidFill>
+                      <a:prstDash val="solid"/>
+                      <a:round/>
+                      <a:headEnd type="none" w="med" len="med"/>
+                      <a:tailEnd type="none" w="med" len="med"/>
+                    </a:lnR>
+                    <a:lnT w="12700" cap="flat" cmpd="sng" algn="ctr">
+                      <a:solidFill>
+                        <a:srgbClr val="2A3441"/>
+                      </a:solidFill>
+                      <a:prstDash val="solid"/>
+                      <a:round/>
+                      <a:headEnd type="none" w="med" len="med"/>
+                      <a:tailEnd type="none" w="med" len="med"/>
+                    </a:lnT>
+                    <a:lnB w="12700" cap="flat" cmpd="sng" algn="ctr">
+                      <a:solidFill>
+                        <a:srgbClr val="2A3441"/>
+                      </a:solidFill>
+                      <a:prstDash val="solid"/>
+                      <a:round/>
+                      <a:headEnd type="none" w="med" len="med"/>
+                      <a:tailEnd type="none" w="med" len="med"/>
+                    </a:lnB>
+                    <a:solidFill>
+                      <a:srgbClr val="141B24"/>
+                    </a:solidFill>
+                  </a:tcPr>
+                </a:tc>
+              </a:tr>
+              <a:tr h="420624">
+                <a:tc>
+                  <a:txBody>
+                    <a:bodyPr/>
+                    <a:lstStyle/>
+                    <a:p>
+                      <a:pPr indent="0" marL="0">
+                        <a:buNone/>
+                      </a:pPr>
+                      <a:r>
+                        <a:rPr lang="en-US" sz="1300" dirty="0">
+                          <a:solidFill>
+                            <a:srgbClr val="E6EDF3"/>
+                          </a:solidFill>
+                          <a:latin typeface="Calibri" pitchFamily="34" charset="0"/>
+                          <a:ea typeface="Calibri" pitchFamily="34" charset="-122"/>
+                          <a:cs typeface="Calibri" pitchFamily="34" charset="-120"/>
+                        </a:rPr>
+                        <a:t>Hostile 10% loss</a:t>
+                      </a:r>
+                      <a:endParaRPr lang="en-US" sz="1300" dirty="0">
+                        <a:latin typeface="Calibri" charset="0"/>
+                        <a:ea typeface="Calibri" charset="0"/>
+                        <a:cs typeface="Calibri" charset="0"/>
+                      </a:endParaRPr>
+                    </a:p>
+                  </a:txBody>
+                  <a:tcPr marL="91440" marR="91440" marT="45720" marB="45720">
+                    <a:lnL w="12700" cap="flat" cmpd="sng" algn="ctr">
+                      <a:solidFill>
+                        <a:srgbClr val="2A3441"/>
+                      </a:solidFill>
+                      <a:prstDash val="solid"/>
+                      <a:round/>
+                      <a:headEnd type="none" w="med" len="med"/>
+                      <a:tailEnd type="none" w="med" len="med"/>
+                    </a:lnL>
+                    <a:lnR w="12700" cap="flat" cmpd="sng" algn="ctr">
+                      <a:solidFill>
+                        <a:srgbClr val="2A3441"/>
+                      </a:solidFill>
+                      <a:prstDash val="solid"/>
+                      <a:round/>
+                      <a:headEnd type="none" w="med" len="med"/>
+                      <a:tailEnd type="none" w="med" len="med"/>
+                    </a:lnR>
+                    <a:lnT w="12700" cap="flat" cmpd="sng" algn="ctr">
+                      <a:solidFill>
+                        <a:srgbClr val="2A3441"/>
+                      </a:solidFill>
+                      <a:prstDash val="solid"/>
+                      <a:round/>
+                      <a:headEnd type="none" w="med" len="med"/>
+                      <a:tailEnd type="none" w="med" len="med"/>
+                    </a:lnT>
+                    <a:lnB w="12700" cap="flat" cmpd="sng" algn="ctr">
+                      <a:solidFill>
+                        <a:srgbClr val="2A3441"/>
+                      </a:solidFill>
+                      <a:prstDash val="solid"/>
+                      <a:round/>
+                      <a:headEnd type="none" w="med" len="med"/>
+                      <a:tailEnd type="none" w="med" len="med"/>
+                    </a:lnB>
+                    <a:solidFill>
+                      <a:srgbClr val="141B24"/>
+                    </a:solidFill>
+                  </a:tcPr>
+                </a:tc>
+                <a:tc>
+                  <a:txBody>
+                    <a:bodyPr/>
+                    <a:lstStyle/>
+                    <a:p>
+                      <a:pPr indent="0" marL="0">
+                        <a:buNone/>
+                      </a:pPr>
+                      <a:r>
+                        <a:rPr lang="en-US" sz="1300" dirty="0">
+                          <a:solidFill>
+                            <a:srgbClr val="E6EDF3"/>
+                          </a:solidFill>
+                          <a:latin typeface="Calibri" pitchFamily="34" charset="0"/>
+                          <a:ea typeface="Calibri" pitchFamily="34" charset="-122"/>
+                          <a:cs typeface="Calibri" pitchFamily="34" charset="-120"/>
+                        </a:rPr>
+                        <a:t>7.54</a:t>
+                      </a:r>
+                      <a:endParaRPr lang="en-US" sz="1300" dirty="0">
+                        <a:latin typeface="Calibri" charset="0"/>
+                        <a:ea typeface="Calibri" charset="0"/>
+                        <a:cs typeface="Calibri" charset="0"/>
+                      </a:endParaRPr>
+                    </a:p>
+                  </a:txBody>
+                  <a:tcPr marL="91440" marR="91440" marT="45720" marB="45720">
+                    <a:lnL w="12700" cap="flat" cmpd="sng" algn="ctr">
+                      <a:solidFill>
+                        <a:srgbClr val="2A3441"/>
+                      </a:solidFill>
+                      <a:prstDash val="solid"/>
+                      <a:round/>
+                      <a:headEnd type="none" w="med" len="med"/>
+                      <a:tailEnd type="none" w="med" len="med"/>
+                    </a:lnL>
+                    <a:lnR w="12700" cap="flat" cmpd="sng" algn="ctr">
+                      <a:solidFill>
+                        <a:srgbClr val="2A3441"/>
+                      </a:solidFill>
+                      <a:prstDash val="solid"/>
+                      <a:round/>
+                      <a:headEnd type="none" w="med" len="med"/>
+                      <a:tailEnd type="none" w="med" len="med"/>
+                    </a:lnR>
+                    <a:lnT w="12700" cap="flat" cmpd="sng" algn="ctr">
+                      <a:solidFill>
+                        <a:srgbClr val="2A3441"/>
+                      </a:solidFill>
+                      <a:prstDash val="solid"/>
+                      <a:round/>
+                      <a:headEnd type="none" w="med" len="med"/>
+                      <a:tailEnd type="none" w="med" len="med"/>
+                    </a:lnT>
+                    <a:lnB w="12700" cap="flat" cmpd="sng" algn="ctr">
+                      <a:solidFill>
+                        <a:srgbClr val="2A3441"/>
+                      </a:solidFill>
+                      <a:prstDash val="solid"/>
+                      <a:round/>
+                      <a:headEnd type="none" w="med" len="med"/>
+                      <a:tailEnd type="none" w="med" len="med"/>
+                    </a:lnB>
+                    <a:solidFill>
+                      <a:srgbClr val="141B24"/>
+                    </a:solidFill>
+                  </a:tcPr>
+                </a:tc>
+                <a:tc>
+                  <a:txBody>
+                    <a:bodyPr/>
+                    <a:lstStyle/>
+                    <a:p>
+                      <a:pPr indent="0" marL="0">
+                        <a:buNone/>
+                      </a:pPr>
+                      <a:r>
+                        <a:rPr lang="en-US" sz="1300" dirty="0">
+                          <a:solidFill>
+                            <a:srgbClr val="E6EDF3"/>
+                          </a:solidFill>
+                          <a:latin typeface="Calibri" pitchFamily="34" charset="0"/>
+                          <a:ea typeface="Calibri" pitchFamily="34" charset="-122"/>
+                          <a:cs typeface="Calibri" pitchFamily="34" charset="-120"/>
+                        </a:rPr>
+                        <a:t>8.34</a:t>
+                      </a:r>
+                      <a:endParaRPr lang="en-US" sz="1300" dirty="0">
+                        <a:latin typeface="Calibri" charset="0"/>
+                        <a:ea typeface="Calibri" charset="0"/>
+                        <a:cs typeface="Calibri" charset="0"/>
+                      </a:endParaRPr>
+                    </a:p>
+                  </a:txBody>
+                  <a:tcPr marL="91440" marR="91440" marT="45720" marB="45720">
+                    <a:lnL w="12700" cap="flat" cmpd="sng" algn="ctr">
+                      <a:solidFill>
+                        <a:srgbClr val="2A3441"/>
+                      </a:solidFill>
+                      <a:prstDash val="solid"/>
+                      <a:round/>
+                      <a:headEnd type="none" w="med" len="med"/>
+                      <a:tailEnd type="none" w="med" len="med"/>
+                    </a:lnL>
+                    <a:lnR w="12700" cap="flat" cmpd="sng" algn="ctr">
+                      <a:solidFill>
+                        <a:srgbClr val="2A3441"/>
+                      </a:solidFill>
+                      <a:prstDash val="solid"/>
+                      <a:round/>
+                      <a:headEnd type="none" w="med" len="med"/>
+                      <a:tailEnd type="none" w="med" len="med"/>
+                    </a:lnR>
+                    <a:lnT w="12700" cap="flat" cmpd="sng" algn="ctr">
+                      <a:solidFill>
+                        <a:srgbClr val="2A3441"/>
+                      </a:solidFill>
+                      <a:prstDash val="solid"/>
+                      <a:round/>
+                      <a:headEnd type="none" w="med" len="med"/>
+                      <a:tailEnd type="none" w="med" len="med"/>
+                    </a:lnT>
+                    <a:lnB w="12700" cap="flat" cmpd="sng" algn="ctr">
+                      <a:solidFill>
+                        <a:srgbClr val="2A3441"/>
+                      </a:solidFill>
+                      <a:prstDash val="solid"/>
+                      <a:round/>
+                      <a:headEnd type="none" w="med" len="med"/>
+                      <a:tailEnd type="none" w="med" len="med"/>
+                    </a:lnB>
+                    <a:solidFill>
+                      <a:srgbClr val="141B24"/>
+                    </a:solidFill>
+                  </a:tcPr>
+                </a:tc>
+                <a:tc>
+                  <a:txBody>
+                    <a:bodyPr/>
+                    <a:lstStyle/>
+                    <a:p>
+                      <a:pPr indent="0" marL="0">
+                        <a:buNone/>
+                      </a:pPr>
+                      <a:r>
+                        <a:rPr lang="en-US" sz="1300" dirty="0">
+                          <a:solidFill>
+                            <a:srgbClr val="E6EDF3"/>
+                          </a:solidFill>
+                          <a:latin typeface="Calibri" pitchFamily="34" charset="0"/>
+                          <a:ea typeface="Calibri" pitchFamily="34" charset="-122"/>
+                          <a:cs typeface="Calibri" pitchFamily="34" charset="-120"/>
+                        </a:rPr>
+                        <a:t>12.32</a:t>
+                      </a:r>
+                      <a:endParaRPr lang="en-US" sz="1300" dirty="0">
+                        <a:latin typeface="Calibri" charset="0"/>
+                        <a:ea typeface="Calibri" charset="0"/>
+                        <a:cs typeface="Calibri" charset="0"/>
+                      </a:endParaRPr>
+                    </a:p>
+                  </a:txBody>
+                  <a:tcPr marL="91440" marR="91440" marT="45720" marB="45720">
+                    <a:lnL w="12700" cap="flat" cmpd="sng" algn="ctr">
+                      <a:solidFill>
+                        <a:srgbClr val="2A3441"/>
+                      </a:solidFill>
+                      <a:prstDash val="solid"/>
+                      <a:round/>
+                      <a:headEnd type="none" w="med" len="med"/>
+                      <a:tailEnd type="none" w="med" len="med"/>
+                    </a:lnL>
+                    <a:lnR w="12700" cap="flat" cmpd="sng" algn="ctr">
+                      <a:solidFill>
+                        <a:srgbClr val="2A3441"/>
+                      </a:solidFill>
+                      <a:prstDash val="solid"/>
+                      <a:round/>
+                      <a:headEnd type="none" w="med" len="med"/>
+                      <a:tailEnd type="none" w="med" len="med"/>
+                    </a:lnR>
+                    <a:lnT w="12700" cap="flat" cmpd="sng" algn="ctr">
+                      <a:solidFill>
+                        <a:srgbClr val="2A3441"/>
+                      </a:solidFill>
+                      <a:prstDash val="solid"/>
+                      <a:round/>
+                      <a:headEnd type="none" w="med" len="med"/>
+                      <a:tailEnd type="none" w="med" len="med"/>
+                    </a:lnT>
+                    <a:lnB w="12700" cap="flat" cmpd="sng" algn="ctr">
+                      <a:solidFill>
+                        <a:srgbClr val="2A3441"/>
+                      </a:solidFill>
+                      <a:prstDash val="solid"/>
+                      <a:round/>
+                      <a:headEnd type="none" w="med" len="med"/>
+                      <a:tailEnd type="none" w="med" len="med"/>
+                    </a:lnB>
+                    <a:solidFill>
+                      <a:srgbClr val="141B24"/>
+                    </a:solidFill>
+                  </a:tcPr>
+                </a:tc>
+                <a:tc>
+                  <a:txBody>
+                    <a:bodyPr/>
+                    <a:lstStyle/>
+                    <a:p>
+                      <a:pPr indent="0" marL="0">
+                        <a:buNone/>
+                      </a:pPr>
+                      <a:r>
+                        <a:rPr lang="en-US" sz="1300" dirty="0">
+                          <a:solidFill>
+                            <a:srgbClr val="E6EDF3"/>
+                          </a:solidFill>
+                          <a:latin typeface="Calibri" pitchFamily="34" charset="0"/>
+                          <a:ea typeface="Calibri" pitchFamily="34" charset="-122"/>
+                          <a:cs typeface="Calibri" pitchFamily="34" charset="-120"/>
+                        </a:rPr>
+                        <a:t>8.93</a:t>
                       </a:r>
                       <a:endParaRPr lang="en-US" sz="1300" dirty="0">
                         <a:latin typeface="Calibri" charset="0"/>
@@ -17877,8 +18854,8 @@
         </p:nvSpPr>
         <p:spPr>
           <a:xfrm>
-            <a:off x="7132320" y="1188720"/>
-            <a:ext cx="4663440" cy="4937760"/>
+            <a:off x="7406640" y="1188720"/>
+            <a:ext cx="4389120" cy="4937760"/>
           </a:xfrm>
           <a:prstGeom prst="rect">
             <a:avLst/>
@@ -17906,7 +18883,7 @@
                 <a:ea typeface="Calibri" pitchFamily="34" charset="-122"/>
                 <a:cs typeface="Calibri" pitchFamily="34" charset="-120"/>
               </a:rPr>
-              <a:t>Limit found: window cap 32 caps the satellite path at about 107 packets/s; receive window raised to 256</a:t>
+              <a:t>Neural agent fastest on 4 of 5 paths; significantly faster than tuned AIMD on all four: -15%, -49%, -52%, -52%</a:t>
             </a:r>
             <a:endParaRPr lang="en-US" sz="1400" dirty="0"/>
           </a:p>
@@ -17927,7 +18904,7 @@
                 <a:ea typeface="Calibri" pitchFamily="34" charset="-122"/>
                 <a:cs typeface="Calibri" pitchFamily="34" charset="-120"/>
               </a:rPr>
-              <a:t>Baseline tuned too: AIMD with cap 128 and a high start threshold</a:t>
+              <a:t>Faster than tuned CUBIC on lossy (-74%) and satellite (-34%); equal on 5G-like and fast; CUBIC is 2x slower than AIMD at 2% loss</a:t>
             </a:r>
             <a:endParaRPr lang="en-US" sz="1400" dirty="0"/>
           </a:p>
@@ -17948,7 +18925,7 @@
                 <a:ea typeface="Calibri" pitchFamily="34" charset="-122"/>
                 <a:cs typeface="Calibri" pitchFamily="34" charset="-120"/>
               </a:rPr>
-              <a:t>New default for the neural agent: cap 128 plus the AIMD hand-over</a:t>
+              <a:t>Hostile 10% loss: no significant difference between any two policies</a:t>
             </a:r>
             <a:endParaRPr lang="en-US" sz="1400" dirty="0"/>
           </a:p>
@@ -17969,28 +18946,7 @@
                 <a:ea typeface="Calibri" pitchFamily="34" charset="-122"/>
                 <a:cs typeface="Calibri" pitchFamily="34" charset="-120"/>
               </a:rPr>
-              <a:t>45 to 77% faster than tuned AIMD on lossy, satellite and fast paths; equal on 5G-like and hostile</a:t>
-            </a:r>
-            <a:endParaRPr lang="en-US" sz="1400" dirty="0"/>
-          </a:p>
-          <a:p>
-            <a:pPr marL="342900" indent="-342900">
-              <a:spcAft>
-                <a:spcPts val="800"/>
-              </a:spcAft>
-              <a:buSzPct val="100000"/>
-              <a:buChar char="•"/>
-            </a:pPr>
-            <a:r>
-              <a:rPr lang="en-US" sz="1400" dirty="0">
-                <a:solidFill>
-                  <a:srgbClr val="E6EDF3"/>
-                </a:solidFill>
-                <a:latin typeface="Calibri" pitchFamily="34" charset="0"/>
-                <a:ea typeface="Calibri" pitchFamily="34" charset="-122"/>
-                <a:cs typeface="Calibri" pitchFamily="34" charset="-120"/>
-              </a:rPr>
-              <a:t>CUBIC tried: mixed, never beat the agent. Cost of the agent: more retransmissions on the fast path</a:t>
+              <a:t>Retransmissions now low (3, 6, 4 packets): the old 262 were spurious timeouts, fixed with a timer floor that AIMD also benefits from</a:t>
             </a:r>
             <a:endParaRPr lang="en-US" sz="1400" dirty="0"/>
           </a:p>
@@ -18004,8 +18960,8 @@
         </p:nvSpPr>
         <p:spPr>
           <a:xfrm>
-            <a:off x="548640" y="4023360"/>
-            <a:ext cx="6217920" cy="731520"/>
+            <a:off x="548640" y="4206240"/>
+            <a:ext cx="6583680" cy="822960"/>
           </a:xfrm>
           <a:prstGeom prst="rect">
             <a:avLst/>
@@ -18029,7 +18985,7 @@
                 <a:ea typeface="Calibri" pitchFamily="34" charset="-122"/>
                 <a:cs typeface="Calibri" pitchFamily="34" charset="-120"/>
               </a:rPr>
-              <a:t>10 runs per cell (hostile: 5), 95% intervals. Flags: --maxcwnd, --ssthresh, --hybrid, --mode cubic. Code: eval_perf*.sh.</a:t>
+              <a:t>Real clock, real server process, 10 paired runs per path (hostile: 5), 95% intervals. eval_final.sh. Every policy uses the same timer, window cap rules and Selective Repeat.</a:t>
             </a:r>
             <a:endParaRPr lang="en-US" sz="1300" dirty="0"/>
           </a:p>
@@ -18100,7 +19056,7 @@
                 <a:ea typeface="Courier New" pitchFamily="34" charset="-122"/>
                 <a:cs typeface="Courier New" pitchFamily="34" charset="-120"/>
               </a:rPr>
-              <a:t>Learnings and future work</a:t>
+              <a:t>Real sockets found what the emulator could not</a:t>
             </a:r>
             <a:endParaRPr lang="en-US" sz="3000" dirty="0"/>
           </a:p>
@@ -18139,7 +19095,7 @@
                 <a:ea typeface="Courier New" pitchFamily="34" charset="-122"/>
                 <a:cs typeface="Courier New" pitchFamily="34" charset="-120"/>
               </a:rPr>
-              <a:t>27 / 28   Smart-RUDP</a:t>
+              <a:t>27 / 32   Smart-RUDP</a:t>
             </a:r>
             <a:endParaRPr lang="en-US" sz="1000" dirty="0"/>
           </a:p>
@@ -18153,8 +19109,8 @@
         </p:nvSpPr>
         <p:spPr>
           <a:xfrm>
-            <a:off x="548640" y="1371600"/>
-            <a:ext cx="5394960" cy="4206240"/>
+            <a:off x="548640" y="1280160"/>
+            <a:ext cx="3611880" cy="3291840"/>
           </a:xfrm>
           <a:prstGeom prst="rect">
             <a:avLst/>
@@ -18178,8 +19134,8 @@
         </p:nvSpPr>
         <p:spPr>
           <a:xfrm>
-            <a:off x="731520" y="1508760"/>
-            <a:ext cx="5029200" cy="457200"/>
+            <a:off x="731520" y="1417320"/>
+            <a:ext cx="3246120" cy="457200"/>
           </a:xfrm>
           <a:prstGeom prst="rect">
             <a:avLst/>
@@ -18203,7 +19159,7 @@
                 <a:ea typeface="Courier New" pitchFamily="34" charset="-122"/>
                 <a:cs typeface="Courier New" pitchFamily="34" charset="-120"/>
               </a:rPr>
-              <a:t>Learned</a:t>
+              <a:t>Lost handshake ACK</a:t>
             </a:r>
             <a:endParaRPr lang="en-US" sz="2000" dirty="0"/>
           </a:p>
@@ -18217,8 +19173,8 @@
         </p:nvSpPr>
         <p:spPr>
           <a:xfrm>
-            <a:off x="731520" y="2011680"/>
-            <a:ext cx="5029200" cy="3429000"/>
+            <a:off x="731520" y="1920240"/>
+            <a:ext cx="3246120" cy="2514600"/>
           </a:xfrm>
           <a:prstGeom prst="rect">
             <a:avLst/>
@@ -18242,41 +19198,7 @@
                 <a:ea typeface="Calibri" pitchFamily="34" charset="-122"/>
                 <a:cs typeface="Calibri" pitchFamily="34" charset="-120"/>
               </a:rPr>
-              <a:t>Reliability is a set of simple rules working together.</a:t>
-            </a:r>
-            <a:endParaRPr lang="en-US" sz="2000" dirty="0"/>
-          </a:p>
-          <a:p>
-            <a:pPr indent="0" marL="0">
-              <a:buNone/>
-            </a:pPr>
-            <a:r>
-              <a:rPr lang="en-US" sz="2000" dirty="0">
-                <a:solidFill>
-                  <a:srgbClr val="E6EDF3"/>
-                </a:solidFill>
-                <a:latin typeface="Calibri" pitchFamily="34" charset="0"/>
-                <a:ea typeface="Calibri" pitchFamily="34" charset="-122"/>
-                <a:cs typeface="Calibri" pitchFamily="34" charset="-120"/>
-              </a:rPr>
-              <a:t>Congestion control matters as much as retransmission.</a:t>
-            </a:r>
-            <a:endParaRPr lang="en-US" sz="2000" dirty="0"/>
-          </a:p>
-          <a:p>
-            <a:pPr indent="0" marL="0">
-              <a:buNone/>
-            </a:pPr>
-            <a:r>
-              <a:rPr lang="en-US" sz="2000" dirty="0">
-                <a:solidFill>
-                  <a:srgbClr val="E6EDF3"/>
-                </a:solidFill>
-                <a:latin typeface="Calibri" pitchFamily="34" charset="0"/>
-                <a:ea typeface="Calibri" pitchFamily="34" charset="-122"/>
-                <a:cs typeface="Calibri" pitchFamily="34" charset="-120"/>
-              </a:rPr>
-              <a:t>Testing tools fail in surprising ways.</a:t>
+              <a:t>Server ignored all data after a lost final ACK: transfers hung (2 of 4 runs at 10% loss). Fixed as in TCP; regression test added.</a:t>
             </a:r>
             <a:endParaRPr lang="en-US" sz="2000" dirty="0"/>
           </a:p>
@@ -18290,8 +19212,8 @@
         </p:nvSpPr>
         <p:spPr>
           <a:xfrm>
-            <a:off x="6217920" y="1371600"/>
-            <a:ext cx="5394960" cy="4206240"/>
+            <a:off x="4297680" y="1280160"/>
+            <a:ext cx="3611880" cy="3291840"/>
           </a:xfrm>
           <a:prstGeom prst="rect">
             <a:avLst/>
@@ -18315,8 +19237,8 @@
         </p:nvSpPr>
         <p:spPr>
           <a:xfrm>
-            <a:off x="6400800" y="1508760"/>
-            <a:ext cx="5029200" cy="457200"/>
+            <a:off x="4480560" y="1417320"/>
+            <a:ext cx="3246120" cy="457200"/>
           </a:xfrm>
           <a:prstGeom prst="rect">
             <a:avLst/>
@@ -18340,7 +19262,7 @@
                 <a:ea typeface="Courier New" pitchFamily="34" charset="-122"/>
                 <a:cs typeface="Courier New" pitchFamily="34" charset="-120"/>
               </a:rPr>
-              <a:t>Next</a:t>
+              <a:t>Spurious timeouts</a:t>
             </a:r>
             <a:endParaRPr lang="en-US" sz="2000" dirty="0"/>
           </a:p>
@@ -18354,8 +19276,8 @@
         </p:nvSpPr>
         <p:spPr>
           <a:xfrm>
-            <a:off x="6400800" y="2011680"/>
-            <a:ext cx="5029200" cy="3429000"/>
+            <a:off x="4480560" y="1920240"/>
+            <a:ext cx="3246120" cy="2514600"/>
           </a:xfrm>
           <a:prstGeom prst="rect">
             <a:avLst/>
@@ -18379,56 +19301,47 @@
                 <a:ea typeface="Calibri" pitchFamily="34" charset="-122"/>
                 <a:cs typeface="Calibri" pitchFamily="34" charset="-120"/>
               </a:rPr>
-              <a:t>Train the neural agent in C / on real netem</a:t>
+              <a:t>Timer too tight for window bursts: 262 retransmissions for ~3 losses. Floor of 1.3 x srtt. It also made AIMD 41% faster, so the old margins were too big.</a:t>
             </a:r>
             <a:endParaRPr lang="en-US" sz="2000" dirty="0"/>
           </a:p>
-          <a:p>
-            <a:pPr indent="0" marL="0">
-              <a:buNone/>
-            </a:pPr>
-            <a:r>
-              <a:rPr lang="en-US" sz="2000" dirty="0">
-                <a:solidFill>
-                  <a:srgbClr val="E6EDF3"/>
-                </a:solidFill>
-                <a:latin typeface="Calibri" pitchFamily="34" charset="0"/>
-                <a:ea typeface="Calibri" pitchFamily="34" charset="-122"/>
-                <a:cs typeface="Calibri" pitchFamily="34" charset="-120"/>
-              </a:rPr>
-              <a:t>Selective ACK where throughput limits the path</a:t>
-            </a:r>
-            <a:endParaRPr lang="en-US" sz="2000" dirty="0"/>
-          </a:p>
-          <a:p>
-            <a:pPr indent="0" marL="0">
-              <a:buNone/>
-            </a:pPr>
-            <a:r>
-              <a:rPr lang="en-US" sz="2000" dirty="0">
-                <a:solidFill>
-                  <a:srgbClr val="E6EDF3"/>
-                </a:solidFill>
-                <a:latin typeface="Calibri" pitchFamily="34" charset="0"/>
-                <a:ea typeface="Calibri" pitchFamily="34" charset="-122"/>
-                <a:cs typeface="Calibri" pitchFamily="34" charset="-120"/>
-              </a:rPr>
-              <a:t>Kernel netem and real multi-machine tests</a:t>
-            </a:r>
-            <a:endParaRPr lang="en-US" sz="2000" dirty="0"/>
-          </a:p>
         </p:txBody>
       </p:sp>
       <p:sp>
         <p:nvSpPr>
-          <p:cNvPr id="10" name="Text 8"/>
+          <p:cNvPr id="10" name="Shape 8"/>
           <p:cNvSpPr/>
           <p:nvPr/>
         </p:nvSpPr>
         <p:spPr>
           <a:xfrm>
-            <a:off x="548640" y="5852160"/>
-            <a:ext cx="10972800" cy="365760"/>
+            <a:off x="8046720" y="1280160"/>
+            <a:ext cx="3611880" cy="3291840"/>
+          </a:xfrm>
+          <a:prstGeom prst="rect">
+            <a:avLst/>
+          </a:prstGeom>
+          <a:solidFill>
+            <a:srgbClr val="141B24"/>
+          </a:solidFill>
+          <a:ln w="12700">
+            <a:solidFill>
+              <a:srgbClr val="39FF88"/>
+            </a:solidFill>
+            <a:prstDash val="solid"/>
+          </a:ln>
+        </p:spPr>
+      </p:sp>
+      <p:sp>
+        <p:nvSpPr>
+          <p:cNvPr id="11" name="Text 9"/>
+          <p:cNvSpPr/>
+          <p:nvPr/>
+        </p:nvSpPr>
+        <p:spPr>
+          <a:xfrm>
+            <a:off x="8229600" y="1417320"/>
+            <a:ext cx="3246120" cy="457200"/>
           </a:xfrm>
           <a:prstGeom prst="rect">
             <a:avLst/>
@@ -18444,17 +19357,95 @@
               <a:buNone/>
             </a:pPr>
             <a:r>
-              <a:rPr lang="en-US" sz="1400" dirty="0">
+              <a:rPr lang="en-US" sz="2000" b="1" dirty="0">
                 <a:solidFill>
-                  <a:srgbClr val="8B98A5"/>
+                  <a:srgbClr val="39FF88"/>
+                </a:solidFill>
+                <a:latin typeface="Courier New" pitchFamily="34" charset="0"/>
+                <a:ea typeface="Courier New" pitchFamily="34" charset="-122"/>
+                <a:cs typeface="Courier New" pitchFamily="34" charset="-120"/>
+              </a:rPr>
+              <a:t>Weak checksum</a:t>
+            </a:r>
+            <a:endParaRPr lang="en-US" sz="2000" dirty="0"/>
+          </a:p>
+        </p:txBody>
+      </p:sp>
+      <p:sp>
+        <p:nvSpPr>
+          <p:cNvPr id="12" name="Text 10"/>
+          <p:cNvSpPr/>
+          <p:nvPr/>
+        </p:nvSpPr>
+        <p:spPr>
+          <a:xfrm>
+            <a:off x="8229600" y="1920240"/>
+            <a:ext cx="3246120" cy="2514600"/>
+          </a:xfrm>
+          <a:prstGeom prst="rect">
+            <a:avLst/>
+          </a:prstGeom>
+          <a:noFill/>
+          <a:ln/>
+        </p:spPr>
+        <p:txBody>
+          <a:bodyPr wrap="square" lIns="0" tIns="0" rIns="0" bIns="0" rtlCol="0" anchor="t"/>
+          <a:lstStyle/>
+          <a:p>
+            <a:pPr indent="0" marL="0">
+              <a:buNone/>
+            </a:pPr>
+            <a:r>
+              <a:rPr lang="en-US" sz="2000" dirty="0">
+                <a:solidFill>
+                  <a:srgbClr val="E6EDF3"/>
                 </a:solidFill>
                 <a:latin typeface="Calibri" pitchFamily="34" charset="0"/>
                 <a:ea typeface="Calibri" pitchFamily="34" charset="-122"/>
                 <a:cs typeface="Calibri" pitchFamily="34" charset="-120"/>
               </a:rPr>
-              <a:t>Limits: Go-Back-N wastes bandwidth and suffers under reordering; C tests use an emulated path; the tabular agent did not beat AIMD in C.</a:t>
-            </a:r>
-            <a:endParaRPr lang="en-US" sz="1400" dirty="0"/>
+              <a:t>Byte-sum checksum let 2% of corrupted packets through (fuzzer). Now CRC-16: 0 of 333k accepted, sanitizers clean.</a:t>
+            </a:r>
+            <a:endParaRPr lang="en-US" sz="2000" dirty="0"/>
+          </a:p>
+        </p:txBody>
+      </p:sp>
+      <p:sp>
+        <p:nvSpPr>
+          <p:cNvPr id="13" name="Text 11"/>
+          <p:cNvSpPr/>
+          <p:nvPr/>
+        </p:nvSpPr>
+        <p:spPr>
+          <a:xfrm>
+            <a:off x="548640" y="4892040"/>
+            <a:ext cx="11064240" cy="914400"/>
+          </a:xfrm>
+          <a:prstGeom prst="rect">
+            <a:avLst/>
+          </a:prstGeom>
+          <a:noFill/>
+          <a:ln/>
+        </p:spPr>
+        <p:txBody>
+          <a:bodyPr wrap="square" lIns="0" tIns="0" rIns="0" bIns="0" rtlCol="0" anchor="ctr"/>
+          <a:lstStyle/>
+          <a:p>
+            <a:pPr indent="0" marL="0">
+              <a:buNone/>
+            </a:pPr>
+            <a:r>
+              <a:rPr lang="en-US" sz="1500" dirty="0">
+                <a:solidFill>
+                  <a:srgbClr val="E6EDF3"/>
+                </a:solidFill>
+                <a:latin typeface="Calibri" pitchFamily="34" charset="0"/>
+                <a:ea typeface="Calibri" pitchFamily="34" charset="-122"/>
+                <a:cs typeface="Calibri" pitchFamily="34" charset="-120"/>
+              </a:rPr>
+              <a:t>Independent check on real UDP sockets through an impairment proxy (src/impair.c): neural agent -17% / -53% / -45% / -39% vs tuned AIMD on 5G / lossy / satellite / fast; hostile path a tie. eval_proxy.sh</a:t>
+            </a:r>
+            <a:endParaRPr lang="en-US" sz="1500" dirty="0"/>
           </a:p>
         </p:txBody>
       </p:sp>
@@ -18498,8 +19489,8 @@
         </p:nvSpPr>
         <p:spPr>
           <a:xfrm>
-            <a:off x="731520" y="2103120"/>
-            <a:ext cx="10058400" cy="1097280"/>
+            <a:off x="548640" y="320040"/>
+            <a:ext cx="11064240" cy="731520"/>
           </a:xfrm>
           <a:prstGeom prst="rect">
             <a:avLst/>
@@ -18515,7 +19506,7 @@
               <a:buNone/>
             </a:pPr>
             <a:r>
-              <a:rPr lang="en-US" sz="6400" b="1" dirty="0">
+              <a:rPr lang="en-US" sz="3000" b="1" dirty="0">
                 <a:solidFill>
                   <a:srgbClr val="39FF88"/>
                 </a:solidFill>
@@ -18523,9 +19514,9 @@
                 <a:ea typeface="Courier New" pitchFamily="34" charset="-122"/>
                 <a:cs typeface="Courier New" pitchFamily="34" charset="-120"/>
               </a:rPr>
-              <a:t>Thank you</a:t>
-            </a:r>
-            <a:endParaRPr lang="en-US" sz="6400" dirty="0"/>
+              <a:t>A fast, faithful C simulator, and what it showed</a:t>
+            </a:r>
+            <a:endParaRPr lang="en-US" sz="3000" dirty="0"/>
           </a:p>
         </p:txBody>
       </p:sp>
@@ -18537,8 +19528,8 @@
         </p:nvSpPr>
         <p:spPr>
           <a:xfrm>
-            <a:off x="731520" y="3474720"/>
-            <a:ext cx="10058400" cy="548640"/>
+            <a:off x="9418320" y="6446520"/>
+            <a:ext cx="2377440" cy="274320"/>
           </a:xfrm>
           <a:prstGeom prst="rect">
             <a:avLst/>
@@ -18550,34 +19541,50 @@
           <a:bodyPr wrap="square" lIns="0" tIns="0" rIns="0" bIns="0" rtlCol="0" anchor="ctr"/>
           <a:lstStyle/>
           <a:p>
-            <a:pPr indent="0" marL="0">
+            <a:pPr algn="r" indent="0" marL="0">
               <a:buNone/>
             </a:pPr>
             <a:r>
-              <a:rPr lang="en-US" sz="2600" dirty="0">
+              <a:rPr lang="en-US" sz="1000" dirty="0">
                 <a:solidFill>
-                  <a:srgbClr val="E6EDF3"/>
+                  <a:srgbClr val="8B98A5"/>
                 </a:solidFill>
                 <a:latin typeface="Courier New" pitchFamily="34" charset="0"/>
                 <a:ea typeface="Courier New" pitchFamily="34" charset="-122"/>
                 <a:cs typeface="Courier New" pitchFamily="34" charset="-120"/>
               </a:rPr>
-              <a:t>github.com/Capsturrrr/rudp</a:t>
-            </a:r>
-            <a:endParaRPr lang="en-US" sz="2600" dirty="0"/>
+              <a:t>28 / 32   Smart-RUDP</a:t>
+            </a:r>
+            <a:endParaRPr lang="en-US" sz="1000" dirty="0"/>
           </a:p>
         </p:txBody>
       </p:sp>
-      <p:sp>
-        <p:nvSpPr>
-          <p:cNvPr id="4" name="Text 2"/>
+      <p:graphicFrame>
+        <p:nvGraphicFramePr>
+          <p:cNvPr id="4" name="Chart 0" descr=""/>
+          <p:cNvGraphicFramePr/>
+          <p:nvPr/>
+        </p:nvGraphicFramePr>
+        <p:xfrm>
+          <a:off x="457200" y="1188720"/>
+          <a:ext cx="6766560" cy="4480560"/>
+        </p:xfrm>
+        <a:graphic xmlns:a="http://schemas.openxmlformats.org/drawingml/2006/main">
+          <a:graphicData uri="http://schemas.openxmlformats.org/drawingml/2006/chart">
+            <c:chart xmlns:c="http://schemas.openxmlformats.org/drawingml/2006/chart" r:id="rId1"/>
+          </a:graphicData>
+        </a:graphic>
+      </p:graphicFrame>
+      <p:sp>
+        <p:nvSpPr>
+          <p:cNvPr id="5" name="Text 2"/>
           <p:cNvSpPr/>
           <p:nvPr/>
         </p:nvSpPr>
         <p:spPr>
           <a:xfrm>
-            <a:off x="731520" y="4206240"/>
-            <a:ext cx="10058400" cy="457200"/>
+            <a:off x="7498080" y="1188720"/>
+            <a:ext cx="4206240" cy="4754880"/>
           </a:xfrm>
           <a:prstGeom prst="rect">
             <a:avLst/>
@@ -18586,24 +19593,91 @@
           <a:ln/>
         </p:spPr>
         <p:txBody>
-          <a:bodyPr wrap="square" lIns="0" tIns="0" rIns="0" bIns="0" rtlCol="0" anchor="ctr"/>
+          <a:bodyPr wrap="square" lIns="0" tIns="0" rIns="0" bIns="0" rtlCol="0" anchor="t"/>
           <a:lstStyle/>
           <a:p>
-            <a:pPr indent="0" marL="0">
-              <a:buNone/>
+            <a:pPr marL="342900" indent="-342900">
+              <a:spcAft>
+                <a:spcPts val="800"/>
+              </a:spcAft>
+              <a:buSzPct val="100000"/>
+              <a:buChar char="•"/>
             </a:pPr>
             <a:r>
-              <a:rPr lang="en-US" sz="1800" dirty="0">
+              <a:rPr lang="en-US" sz="1400" dirty="0">
                 <a:solidFill>
-                  <a:srgbClr val="8B98A5"/>
+                  <a:srgbClr val="E6EDF3"/>
                 </a:solidFill>
                 <a:latin typeface="Calibri" pitchFamily="34" charset="0"/>
                 <a:ea typeface="Calibri" pitchFamily="34" charset="-122"/>
                 <a:cs typeface="Calibri" pitchFamily="34" charset="-120"/>
               </a:rPr>
-              <a:t>Harshavardhan Mallela   Rohit Arya   Shloak Sinha</a:t>
-            </a:r>
-            <a:endParaRPr lang="en-US" sz="1800" dirty="0"/>
+              <a:t>--vt 1: the real C sender with a simulated receiver and clock, about 1000x faster; matches the real-clock runs in 15 of 15 cells</a:t>
+            </a:r>
+            <a:endParaRPr lang="en-US" sz="1400" dirty="0"/>
+          </a:p>
+          <a:p>
+            <a:pPr marL="342900" indent="-342900">
+              <a:spcAft>
+                <a:spcPts val="800"/>
+              </a:spcAft>
+              <a:buSzPct val="100000"/>
+              <a:buChar char="•"/>
+            </a:pPr>
+            <a:r>
+              <a:rPr lang="en-US" sz="1400" dirty="0">
+                <a:solidFill>
+                  <a:srgbClr val="E6EDF3"/>
+                </a:solidFill>
+                <a:latin typeface="Calibri" pitchFamily="34" charset="0"/>
+                <a:ea typeface="Calibri" pitchFamily="34" charset="-122"/>
+                <a:cs typeface="Calibri" pitchFamily="34" charset="-120"/>
+              </a:rPr>
+              <a:t>100 random held-out paths: neural agent 0.53x the time of tuned AIMD, faster on 89, never &gt;20% slower (tuned CUBIC: slower by &gt;20% on 27)</a:t>
+            </a:r>
+            <a:endParaRPr lang="en-US" sz="1400" dirty="0"/>
+          </a:p>
+          <a:p>
+            <a:pPr marL="342900" indent="-342900">
+              <a:spcAft>
+                <a:spcPts val="800"/>
+              </a:spcAft>
+              <a:buSzPct val="100000"/>
+              <a:buChar char="•"/>
+            </a:pPr>
+            <a:r>
+              <a:rPr lang="en-US" sz="1400" dirty="0">
+                <a:solidFill>
+                  <a:srgbClr val="E6EDF3"/>
+                </a:solidFill>
+                <a:latin typeface="Calibri" pitchFamily="34" charset="0"/>
+                <a:ea typeface="Calibri" pitchFamily="34" charset="-122"/>
+                <a:cs typeface="Calibri" pitchFamily="34" charset="-120"/>
+              </a:rPr>
+              <a:t>Biggest factors: window cap 128, pacing, timer floor, slow start</a:t>
+            </a:r>
+            <a:endParaRPr lang="en-US" sz="1400" dirty="0"/>
+          </a:p>
+          <a:p>
+            <a:pPr marL="342900" indent="-342900">
+              <a:spcAft>
+                <a:spcPts val="800"/>
+              </a:spcAft>
+              <a:buSzPct val="100000"/>
+              <a:buChar char="•"/>
+            </a:pPr>
+            <a:r>
+              <a:rPr lang="en-US" sz="1400" dirty="0">
+                <a:solidFill>
+                  <a:srgbClr val="E6EDF3"/>
+                </a:solidFill>
+                <a:latin typeface="Calibri" pitchFamily="34" charset="0"/>
+                <a:ea typeface="Calibri" pitchFamily="34" charset="-122"/>
+                <a:cs typeface="Calibri" pitchFamily="34" charset="-120"/>
+              </a:rPr>
+              <a:t>Evolution-strategy retraining in C: +2% only, not adopted</a:t>
+            </a:r>
+            <a:endParaRPr lang="en-US" sz="1400" dirty="0"/>
           </a:p>
         </p:txBody>
       </p:sp>
@@ -18672,7 +19746,7 @@
                 <a:ea typeface="Courier New" pitchFamily="34" charset="-122"/>
                 <a:cs typeface="Courier New" pitchFamily="34" charset="-120"/>
               </a:rPr>
-              <a:t>Appendix: slow start and congestion avoidance</a:t>
+              <a:t>Fairness and file transfer</a:t>
             </a:r>
             <a:endParaRPr lang="en-US" sz="3000" dirty="0"/>
           </a:p>
@@ -18711,46 +19785,2552 @@
                 <a:ea typeface="Courier New" pitchFamily="34" charset="-122"/>
                 <a:cs typeface="Courier New" pitchFamily="34" charset="-120"/>
               </a:rPr>
-              <a:t>Appendix   Smart-RUDP</a:t>
+              <a:t>29 / 32   Smart-RUDP</a:t>
             </a:r>
             <a:endParaRPr lang="en-US" sz="1000" dirty="0"/>
           </a:p>
         </p:txBody>
       </p:sp>
-      <p:pic>
-        <p:nvPicPr>
-          <p:cNvPr id="4" name="Image 0" descr="fig1_cwnd_no_loss.png">    </p:cNvPr>
-          <p:cNvPicPr>
-            <a:picLocks noChangeAspect="1"/>
-          </p:cNvPicPr>
+      <p:graphicFrame>
+        <p:nvGraphicFramePr>
+          <p:cNvPr id="30" name="Table 0"/>
+          <p:cNvGraphicFramePr>
+            <a:graphicFrameLocks noGrp="1"/>
+          </p:cNvGraphicFramePr>
+          <p:nvPr>
+            <p:extLst>
+              <p:ext uri="{D42A27DB-BD31-4B8C-83A1-F6EECF244321}">
+                <p14:modId xmlns:p14="http://schemas.microsoft.com/office/powerpoint/2010/main" val="1579011935"/>
+              </p:ext>
+            </p:extLst>
+          </p:nvPr>
+        </p:nvGraphicFramePr>
+        <p:xfrm>
+          <a:off x="548640" y="1188720"/>
+          <a:ext cx="5486400" cy="914400"/>
+        </p:xfrm>
+        <a:graphic>
+          <a:graphicData uri="http://schemas.openxmlformats.org/drawingml/2006/table">
+            <a:tbl>
+              <a:tblPr/>
+              <a:tblGrid>
+                <a:gridCol w="2651760"/>
+                <a:gridCol w="914400"/>
+                <a:gridCol w="914400"/>
+                <a:gridCol w="1005840"/>
+              </a:tblGrid>
+              <a:tr h="402336">
+                <a:tc>
+                  <a:txBody>
+                    <a:bodyPr/>
+                    <a:lstStyle/>
+                    <a:p>
+                      <a:pPr indent="0" marL="0">
+                        <a:buNone/>
+                      </a:pPr>
+                      <a:r>
+                        <a:rPr lang="en-US" sz="1300" b="1" dirty="0">
+                          <a:solidFill>
+                            <a:srgbClr val="0B0F14"/>
+                          </a:solidFill>
+                          <a:latin typeface="Courier New" pitchFamily="34" charset="0"/>
+                          <a:ea typeface="Courier New" pitchFamily="34" charset="-122"/>
+                          <a:cs typeface="Courier New" pitchFamily="34" charset="-120"/>
+                        </a:rPr>
+                        <a:t>Two flows, real sockets</a:t>
+                      </a:r>
+                      <a:endParaRPr lang="en-US" sz="1300" dirty="0">
+                        <a:latin typeface="Courier New" charset="0"/>
+                        <a:ea typeface="Courier New" charset="0"/>
+                        <a:cs typeface="Courier New" charset="0"/>
+                      </a:endParaRPr>
+                    </a:p>
+                  </a:txBody>
+                  <a:tcPr marL="91440" marR="91440" marT="45720" marB="45720">
+                    <a:lnL w="12700" cap="flat" cmpd="sng" algn="ctr">
+                      <a:solidFill>
+                        <a:srgbClr val="2A3441"/>
+                      </a:solidFill>
+                      <a:prstDash val="solid"/>
+                      <a:round/>
+                      <a:headEnd type="none" w="med" len="med"/>
+                      <a:tailEnd type="none" w="med" len="med"/>
+                    </a:lnL>
+                    <a:lnR w="12700" cap="flat" cmpd="sng" algn="ctr">
+                      <a:solidFill>
+                        <a:srgbClr val="2A3441"/>
+                      </a:solidFill>
+                      <a:prstDash val="solid"/>
+                      <a:round/>
+                      <a:headEnd type="none" w="med" len="med"/>
+                      <a:tailEnd type="none" w="med" len="med"/>
+                    </a:lnR>
+                    <a:lnT w="12700" cap="flat" cmpd="sng" algn="ctr">
+                      <a:solidFill>
+                        <a:srgbClr val="2A3441"/>
+                      </a:solidFill>
+                      <a:prstDash val="solid"/>
+                      <a:round/>
+                      <a:headEnd type="none" w="med" len="med"/>
+                      <a:tailEnd type="none" w="med" len="med"/>
+                    </a:lnT>
+                    <a:lnB w="12700" cap="flat" cmpd="sng" algn="ctr">
+                      <a:solidFill>
+                        <a:srgbClr val="2A3441"/>
+                      </a:solidFill>
+                      <a:prstDash val="solid"/>
+                      <a:round/>
+                      <a:headEnd type="none" w="med" len="med"/>
+                      <a:tailEnd type="none" w="med" len="med"/>
+                    </a:lnB>
+                    <a:solidFill>
+                      <a:srgbClr val="39FF88"/>
+                    </a:solidFill>
+                  </a:tcPr>
+                </a:tc>
+                <a:tc>
+                  <a:txBody>
+                    <a:bodyPr/>
+                    <a:lstStyle/>
+                    <a:p>
+                      <a:pPr indent="0" marL="0">
+                        <a:buNone/>
+                      </a:pPr>
+                      <a:r>
+                        <a:rPr lang="en-US" sz="1300" b="1" dirty="0">
+                          <a:solidFill>
+                            <a:srgbClr val="0B0F14"/>
+                          </a:solidFill>
+                          <a:latin typeface="Courier New" pitchFamily="34" charset="0"/>
+                          <a:ea typeface="Courier New" pitchFamily="34" charset="-122"/>
+                          <a:cs typeface="Courier New" pitchFamily="34" charset="-120"/>
+                        </a:rPr>
+                        <a:t>Share A</a:t>
+                      </a:r>
+                      <a:endParaRPr lang="en-US" sz="1300" dirty="0">
+                        <a:latin typeface="Courier New" charset="0"/>
+                        <a:ea typeface="Courier New" charset="0"/>
+                        <a:cs typeface="Courier New" charset="0"/>
+                      </a:endParaRPr>
+                    </a:p>
+                  </a:txBody>
+                  <a:tcPr marL="91440" marR="91440" marT="45720" marB="45720">
+                    <a:lnL w="12700" cap="flat" cmpd="sng" algn="ctr">
+                      <a:solidFill>
+                        <a:srgbClr val="2A3441"/>
+                      </a:solidFill>
+                      <a:prstDash val="solid"/>
+                      <a:round/>
+                      <a:headEnd type="none" w="med" len="med"/>
+                      <a:tailEnd type="none" w="med" len="med"/>
+                    </a:lnL>
+                    <a:lnR w="12700" cap="flat" cmpd="sng" algn="ctr">
+                      <a:solidFill>
+                        <a:srgbClr val="2A3441"/>
+                      </a:solidFill>
+                      <a:prstDash val="solid"/>
+                      <a:round/>
+                      <a:headEnd type="none" w="med" len="med"/>
+                      <a:tailEnd type="none" w="med" len="med"/>
+                    </a:lnR>
+                    <a:lnT w="12700" cap="flat" cmpd="sng" algn="ctr">
+                      <a:solidFill>
+                        <a:srgbClr val="2A3441"/>
+                      </a:solidFill>
+                      <a:prstDash val="solid"/>
+                      <a:round/>
+                      <a:headEnd type="none" w="med" len="med"/>
+                      <a:tailEnd type="none" w="med" len="med"/>
+                    </a:lnT>
+                    <a:lnB w="12700" cap="flat" cmpd="sng" algn="ctr">
+                      <a:solidFill>
+                        <a:srgbClr val="2A3441"/>
+                      </a:solidFill>
+                      <a:prstDash val="solid"/>
+                      <a:round/>
+                      <a:headEnd type="none" w="med" len="med"/>
+                      <a:tailEnd type="none" w="med" len="med"/>
+                    </a:lnB>
+                    <a:solidFill>
+                      <a:srgbClr val="39FF88"/>
+                    </a:solidFill>
+                  </a:tcPr>
+                </a:tc>
+                <a:tc>
+                  <a:txBody>
+                    <a:bodyPr/>
+                    <a:lstStyle/>
+                    <a:p>
+                      <a:pPr indent="0" marL="0">
+                        <a:buNone/>
+                      </a:pPr>
+                      <a:r>
+                        <a:rPr lang="en-US" sz="1300" b="1" dirty="0">
+                          <a:solidFill>
+                            <a:srgbClr val="0B0F14"/>
+                          </a:solidFill>
+                          <a:latin typeface="Courier New" pitchFamily="34" charset="0"/>
+                          <a:ea typeface="Courier New" pitchFamily="34" charset="-122"/>
+                          <a:cs typeface="Courier New" pitchFamily="34" charset="-120"/>
+                        </a:rPr>
+                        <a:t>Share B</a:t>
+                      </a:r>
+                      <a:endParaRPr lang="en-US" sz="1300" dirty="0">
+                        <a:latin typeface="Courier New" charset="0"/>
+                        <a:ea typeface="Courier New" charset="0"/>
+                        <a:cs typeface="Courier New" charset="0"/>
+                      </a:endParaRPr>
+                    </a:p>
+                  </a:txBody>
+                  <a:tcPr marL="91440" marR="91440" marT="45720" marB="45720">
+                    <a:lnL w="12700" cap="flat" cmpd="sng" algn="ctr">
+                      <a:solidFill>
+                        <a:srgbClr val="2A3441"/>
+                      </a:solidFill>
+                      <a:prstDash val="solid"/>
+                      <a:round/>
+                      <a:headEnd type="none" w="med" len="med"/>
+                      <a:tailEnd type="none" w="med" len="med"/>
+                    </a:lnL>
+                    <a:lnR w="12700" cap="flat" cmpd="sng" algn="ctr">
+                      <a:solidFill>
+                        <a:srgbClr val="2A3441"/>
+                      </a:solidFill>
+                      <a:prstDash val="solid"/>
+                      <a:round/>
+                      <a:headEnd type="none" w="med" len="med"/>
+                      <a:tailEnd type="none" w="med" len="med"/>
+                    </a:lnR>
+                    <a:lnT w="12700" cap="flat" cmpd="sng" algn="ctr">
+                      <a:solidFill>
+                        <a:srgbClr val="2A3441"/>
+                      </a:solidFill>
+                      <a:prstDash val="solid"/>
+                      <a:round/>
+                      <a:headEnd type="none" w="med" len="med"/>
+                      <a:tailEnd type="none" w="med" len="med"/>
+                    </a:lnT>
+                    <a:lnB w="12700" cap="flat" cmpd="sng" algn="ctr">
+                      <a:solidFill>
+                        <a:srgbClr val="2A3441"/>
+                      </a:solidFill>
+                      <a:prstDash val="solid"/>
+                      <a:round/>
+                      <a:headEnd type="none" w="med" len="med"/>
+                      <a:tailEnd type="none" w="med" len="med"/>
+                    </a:lnB>
+                    <a:solidFill>
+                      <a:srgbClr val="39FF88"/>
+                    </a:solidFill>
+                  </a:tcPr>
+                </a:tc>
+                <a:tc>
+                  <a:txBody>
+                    <a:bodyPr/>
+                    <a:lstStyle/>
+                    <a:p>
+                      <a:pPr indent="0" marL="0">
+                        <a:buNone/>
+                      </a:pPr>
+                      <a:r>
+                        <a:rPr lang="en-US" sz="1300" b="1" dirty="0">
+                          <a:solidFill>
+                            <a:srgbClr val="0B0F14"/>
+                          </a:solidFill>
+                          <a:latin typeface="Courier New" pitchFamily="34" charset="0"/>
+                          <a:ea typeface="Courier New" pitchFamily="34" charset="-122"/>
+                          <a:cs typeface="Courier New" pitchFamily="34" charset="-120"/>
+                        </a:rPr>
+                        <a:t>Jain</a:t>
+                      </a:r>
+                      <a:endParaRPr lang="en-US" sz="1300" dirty="0">
+                        <a:latin typeface="Courier New" charset="0"/>
+                        <a:ea typeface="Courier New" charset="0"/>
+                        <a:cs typeface="Courier New" charset="0"/>
+                      </a:endParaRPr>
+                    </a:p>
+                  </a:txBody>
+                  <a:tcPr marL="91440" marR="91440" marT="45720" marB="45720">
+                    <a:lnL w="12700" cap="flat" cmpd="sng" algn="ctr">
+                      <a:solidFill>
+                        <a:srgbClr val="2A3441"/>
+                      </a:solidFill>
+                      <a:prstDash val="solid"/>
+                      <a:round/>
+                      <a:headEnd type="none" w="med" len="med"/>
+                      <a:tailEnd type="none" w="med" len="med"/>
+                    </a:lnL>
+                    <a:lnR w="12700" cap="flat" cmpd="sng" algn="ctr">
+                      <a:solidFill>
+                        <a:srgbClr val="2A3441"/>
+                      </a:solidFill>
+                      <a:prstDash val="solid"/>
+                      <a:round/>
+                      <a:headEnd type="none" w="med" len="med"/>
+                      <a:tailEnd type="none" w="med" len="med"/>
+                    </a:lnR>
+                    <a:lnT w="12700" cap="flat" cmpd="sng" algn="ctr">
+                      <a:solidFill>
+                        <a:srgbClr val="2A3441"/>
+                      </a:solidFill>
+                      <a:prstDash val="solid"/>
+                      <a:round/>
+                      <a:headEnd type="none" w="med" len="med"/>
+                      <a:tailEnd type="none" w="med" len="med"/>
+                    </a:lnT>
+                    <a:lnB w="12700" cap="flat" cmpd="sng" algn="ctr">
+                      <a:solidFill>
+                        <a:srgbClr val="2A3441"/>
+                      </a:solidFill>
+                      <a:prstDash val="solid"/>
+                      <a:round/>
+                      <a:headEnd type="none" w="med" len="med"/>
+                      <a:tailEnd type="none" w="med" len="med"/>
+                    </a:lnB>
+                    <a:solidFill>
+                      <a:srgbClr val="39FF88"/>
+                    </a:solidFill>
+                  </a:tcPr>
+                </a:tc>
+              </a:tr>
+              <a:tr h="402336">
+                <a:tc>
+                  <a:txBody>
+                    <a:bodyPr/>
+                    <a:lstStyle/>
+                    <a:p>
+                      <a:pPr indent="0" marL="0">
+                        <a:buNone/>
+                      </a:pPr>
+                      <a:r>
+                        <a:rPr lang="en-US" sz="1300" dirty="0">
+                          <a:solidFill>
+                            <a:srgbClr val="E6EDF3"/>
+                          </a:solidFill>
+                          <a:latin typeface="Calibri" pitchFamily="34" charset="0"/>
+                          <a:ea typeface="Calibri" pitchFamily="34" charset="-122"/>
+                          <a:cs typeface="Calibri" pitchFamily="34" charset="-120"/>
+                        </a:rPr>
+                        <a:t>AIMD vs AIMD</a:t>
+                      </a:r>
+                      <a:endParaRPr lang="en-US" sz="1300" dirty="0">
+                        <a:latin typeface="Calibri" charset="0"/>
+                        <a:ea typeface="Calibri" charset="0"/>
+                        <a:cs typeface="Calibri" charset="0"/>
+                      </a:endParaRPr>
+                    </a:p>
+                  </a:txBody>
+                  <a:tcPr marL="91440" marR="91440" marT="45720" marB="45720">
+                    <a:lnL w="12700" cap="flat" cmpd="sng" algn="ctr">
+                      <a:solidFill>
+                        <a:srgbClr val="2A3441"/>
+                      </a:solidFill>
+                      <a:prstDash val="solid"/>
+                      <a:round/>
+                      <a:headEnd type="none" w="med" len="med"/>
+                      <a:tailEnd type="none" w="med" len="med"/>
+                    </a:lnL>
+                    <a:lnR w="12700" cap="flat" cmpd="sng" algn="ctr">
+                      <a:solidFill>
+                        <a:srgbClr val="2A3441"/>
+                      </a:solidFill>
+                      <a:prstDash val="solid"/>
+                      <a:round/>
+                      <a:headEnd type="none" w="med" len="med"/>
+                      <a:tailEnd type="none" w="med" len="med"/>
+                    </a:lnR>
+                    <a:lnT w="12700" cap="flat" cmpd="sng" algn="ctr">
+                      <a:solidFill>
+                        <a:srgbClr val="2A3441"/>
+                      </a:solidFill>
+                      <a:prstDash val="solid"/>
+                      <a:round/>
+                      <a:headEnd type="none" w="med" len="med"/>
+                      <a:tailEnd type="none" w="med" len="med"/>
+                    </a:lnT>
+                    <a:lnB w="12700" cap="flat" cmpd="sng" algn="ctr">
+                      <a:solidFill>
+                        <a:srgbClr val="2A3441"/>
+                      </a:solidFill>
+                      <a:prstDash val="solid"/>
+                      <a:round/>
+                      <a:headEnd type="none" w="med" len="med"/>
+                      <a:tailEnd type="none" w="med" len="med"/>
+                    </a:lnB>
+                    <a:solidFill>
+                      <a:srgbClr val="141B24"/>
+                    </a:solidFill>
+                  </a:tcPr>
+                </a:tc>
+                <a:tc>
+                  <a:txBody>
+                    <a:bodyPr/>
+                    <a:lstStyle/>
+                    <a:p>
+                      <a:pPr indent="0" marL="0">
+                        <a:buNone/>
+                      </a:pPr>
+                      <a:r>
+                        <a:rPr lang="en-US" sz="1300" dirty="0">
+                          <a:solidFill>
+                            <a:srgbClr val="E6EDF3"/>
+                          </a:solidFill>
+                          <a:latin typeface="Calibri" pitchFamily="34" charset="0"/>
+                          <a:ea typeface="Calibri" pitchFamily="34" charset="-122"/>
+                          <a:cs typeface="Calibri" pitchFamily="34" charset="-120"/>
+                        </a:rPr>
+                        <a:t>49%</a:t>
+                      </a:r>
+                      <a:endParaRPr lang="en-US" sz="1300" dirty="0">
+                        <a:latin typeface="Calibri" charset="0"/>
+                        <a:ea typeface="Calibri" charset="0"/>
+                        <a:cs typeface="Calibri" charset="0"/>
+                      </a:endParaRPr>
+                    </a:p>
+                  </a:txBody>
+                  <a:tcPr marL="91440" marR="91440" marT="45720" marB="45720">
+                    <a:lnL w="12700" cap="flat" cmpd="sng" algn="ctr">
+                      <a:solidFill>
+                        <a:srgbClr val="2A3441"/>
+                      </a:solidFill>
+                      <a:prstDash val="solid"/>
+                      <a:round/>
+                      <a:headEnd type="none" w="med" len="med"/>
+                      <a:tailEnd type="none" w="med" len="med"/>
+                    </a:lnL>
+                    <a:lnR w="12700" cap="flat" cmpd="sng" algn="ctr">
+                      <a:solidFill>
+                        <a:srgbClr val="2A3441"/>
+                      </a:solidFill>
+                      <a:prstDash val="solid"/>
+                      <a:round/>
+                      <a:headEnd type="none" w="med" len="med"/>
+                      <a:tailEnd type="none" w="med" len="med"/>
+                    </a:lnR>
+                    <a:lnT w="12700" cap="flat" cmpd="sng" algn="ctr">
+                      <a:solidFill>
+                        <a:srgbClr val="2A3441"/>
+                      </a:solidFill>
+                      <a:prstDash val="solid"/>
+                      <a:round/>
+                      <a:headEnd type="none" w="med" len="med"/>
+                      <a:tailEnd type="none" w="med" len="med"/>
+                    </a:lnT>
+                    <a:lnB w="12700" cap="flat" cmpd="sng" algn="ctr">
+                      <a:solidFill>
+                        <a:srgbClr val="2A3441"/>
+                      </a:solidFill>
+                      <a:prstDash val="solid"/>
+                      <a:round/>
+                      <a:headEnd type="none" w="med" len="med"/>
+                      <a:tailEnd type="none" w="med" len="med"/>
+                    </a:lnB>
+                    <a:solidFill>
+                      <a:srgbClr val="141B24"/>
+                    </a:solidFill>
+                  </a:tcPr>
+                </a:tc>
+                <a:tc>
+                  <a:txBody>
+                    <a:bodyPr/>
+                    <a:lstStyle/>
+                    <a:p>
+                      <a:pPr indent="0" marL="0">
+                        <a:buNone/>
+                      </a:pPr>
+                      <a:r>
+                        <a:rPr lang="en-US" sz="1300" dirty="0">
+                          <a:solidFill>
+                            <a:srgbClr val="E6EDF3"/>
+                          </a:solidFill>
+                          <a:latin typeface="Calibri" pitchFamily="34" charset="0"/>
+                          <a:ea typeface="Calibri" pitchFamily="34" charset="-122"/>
+                          <a:cs typeface="Calibri" pitchFamily="34" charset="-120"/>
+                        </a:rPr>
+                        <a:t>51%</a:t>
+                      </a:r>
+                      <a:endParaRPr lang="en-US" sz="1300" dirty="0">
+                        <a:latin typeface="Calibri" charset="0"/>
+                        <a:ea typeface="Calibri" charset="0"/>
+                        <a:cs typeface="Calibri" charset="0"/>
+                      </a:endParaRPr>
+                    </a:p>
+                  </a:txBody>
+                  <a:tcPr marL="91440" marR="91440" marT="45720" marB="45720">
+                    <a:lnL w="12700" cap="flat" cmpd="sng" algn="ctr">
+                      <a:solidFill>
+                        <a:srgbClr val="2A3441"/>
+                      </a:solidFill>
+                      <a:prstDash val="solid"/>
+                      <a:round/>
+                      <a:headEnd type="none" w="med" len="med"/>
+                      <a:tailEnd type="none" w="med" len="med"/>
+                    </a:lnL>
+                    <a:lnR w="12700" cap="flat" cmpd="sng" algn="ctr">
+                      <a:solidFill>
+                        <a:srgbClr val="2A3441"/>
+                      </a:solidFill>
+                      <a:prstDash val="solid"/>
+                      <a:round/>
+                      <a:headEnd type="none" w="med" len="med"/>
+                      <a:tailEnd type="none" w="med" len="med"/>
+                    </a:lnR>
+                    <a:lnT w="12700" cap="flat" cmpd="sng" algn="ctr">
+                      <a:solidFill>
+                        <a:srgbClr val="2A3441"/>
+                      </a:solidFill>
+                      <a:prstDash val="solid"/>
+                      <a:round/>
+                      <a:headEnd type="none" w="med" len="med"/>
+                      <a:tailEnd type="none" w="med" len="med"/>
+                    </a:lnT>
+                    <a:lnB w="12700" cap="flat" cmpd="sng" algn="ctr">
+                      <a:solidFill>
+                        <a:srgbClr val="2A3441"/>
+                      </a:solidFill>
+                      <a:prstDash val="solid"/>
+                      <a:round/>
+                      <a:headEnd type="none" w="med" len="med"/>
+                      <a:tailEnd type="none" w="med" len="med"/>
+                    </a:lnB>
+                    <a:solidFill>
+                      <a:srgbClr val="141B24"/>
+                    </a:solidFill>
+                  </a:tcPr>
+                </a:tc>
+                <a:tc>
+                  <a:txBody>
+                    <a:bodyPr/>
+                    <a:lstStyle/>
+                    <a:p>
+                      <a:pPr indent="0" marL="0">
+                        <a:buNone/>
+                      </a:pPr>
+                      <a:r>
+                        <a:rPr lang="en-US" sz="1300" dirty="0">
+                          <a:solidFill>
+                            <a:srgbClr val="E6EDF3"/>
+                          </a:solidFill>
+                          <a:latin typeface="Calibri" pitchFamily="34" charset="0"/>
+                          <a:ea typeface="Calibri" pitchFamily="34" charset="-122"/>
+                          <a:cs typeface="Calibri" pitchFamily="34" charset="-120"/>
+                        </a:rPr>
+                        <a:t>0.99</a:t>
+                      </a:r>
+                      <a:endParaRPr lang="en-US" sz="1300" dirty="0">
+                        <a:latin typeface="Calibri" charset="0"/>
+                        <a:ea typeface="Calibri" charset="0"/>
+                        <a:cs typeface="Calibri" charset="0"/>
+                      </a:endParaRPr>
+                    </a:p>
+                  </a:txBody>
+                  <a:tcPr marL="91440" marR="91440" marT="45720" marB="45720">
+                    <a:lnL w="12700" cap="flat" cmpd="sng" algn="ctr">
+                      <a:solidFill>
+                        <a:srgbClr val="2A3441"/>
+                      </a:solidFill>
+                      <a:prstDash val="solid"/>
+                      <a:round/>
+                      <a:headEnd type="none" w="med" len="med"/>
+                      <a:tailEnd type="none" w="med" len="med"/>
+                    </a:lnL>
+                    <a:lnR w="12700" cap="flat" cmpd="sng" algn="ctr">
+                      <a:solidFill>
+                        <a:srgbClr val="2A3441"/>
+                      </a:solidFill>
+                      <a:prstDash val="solid"/>
+                      <a:round/>
+                      <a:headEnd type="none" w="med" len="med"/>
+                      <a:tailEnd type="none" w="med" len="med"/>
+                    </a:lnR>
+                    <a:lnT w="12700" cap="flat" cmpd="sng" algn="ctr">
+                      <a:solidFill>
+                        <a:srgbClr val="2A3441"/>
+                      </a:solidFill>
+                      <a:prstDash val="solid"/>
+                      <a:round/>
+                      <a:headEnd type="none" w="med" len="med"/>
+                      <a:tailEnd type="none" w="med" len="med"/>
+                    </a:lnT>
+                    <a:lnB w="12700" cap="flat" cmpd="sng" algn="ctr">
+                      <a:solidFill>
+                        <a:srgbClr val="2A3441"/>
+                      </a:solidFill>
+                      <a:prstDash val="solid"/>
+                      <a:round/>
+                      <a:headEnd type="none" w="med" len="med"/>
+                      <a:tailEnd type="none" w="med" len="med"/>
+                    </a:lnB>
+                    <a:solidFill>
+                      <a:srgbClr val="141B24"/>
+                    </a:solidFill>
+                  </a:tcPr>
+                </a:tc>
+              </a:tr>
+              <a:tr h="402336">
+                <a:tc>
+                  <a:txBody>
+                    <a:bodyPr/>
+                    <a:lstStyle/>
+                    <a:p>
+                      <a:pPr indent="0" marL="0">
+                        <a:buNone/>
+                      </a:pPr>
+                      <a:r>
+                        <a:rPr lang="en-US" sz="1300" dirty="0">
+                          <a:solidFill>
+                            <a:srgbClr val="E6EDF3"/>
+                          </a:solidFill>
+                          <a:latin typeface="Calibri" pitchFamily="34" charset="0"/>
+                          <a:ea typeface="Calibri" pitchFamily="34" charset="-122"/>
+                          <a:cs typeface="Calibri" pitchFamily="34" charset="-120"/>
+                        </a:rPr>
+                        <a:t>Neural vs neural</a:t>
+                      </a:r>
+                      <a:endParaRPr lang="en-US" sz="1300" dirty="0">
+                        <a:latin typeface="Calibri" charset="0"/>
+                        <a:ea typeface="Calibri" charset="0"/>
+                        <a:cs typeface="Calibri" charset="0"/>
+                      </a:endParaRPr>
+                    </a:p>
+                  </a:txBody>
+                  <a:tcPr marL="91440" marR="91440" marT="45720" marB="45720">
+                    <a:lnL w="12700" cap="flat" cmpd="sng" algn="ctr">
+                      <a:solidFill>
+                        <a:srgbClr val="2A3441"/>
+                      </a:solidFill>
+                      <a:prstDash val="solid"/>
+                      <a:round/>
+                      <a:headEnd type="none" w="med" len="med"/>
+                      <a:tailEnd type="none" w="med" len="med"/>
+                    </a:lnL>
+                    <a:lnR w="12700" cap="flat" cmpd="sng" algn="ctr">
+                      <a:solidFill>
+                        <a:srgbClr val="2A3441"/>
+                      </a:solidFill>
+                      <a:prstDash val="solid"/>
+                      <a:round/>
+                      <a:headEnd type="none" w="med" len="med"/>
+                      <a:tailEnd type="none" w="med" len="med"/>
+                    </a:lnR>
+                    <a:lnT w="12700" cap="flat" cmpd="sng" algn="ctr">
+                      <a:solidFill>
+                        <a:srgbClr val="2A3441"/>
+                      </a:solidFill>
+                      <a:prstDash val="solid"/>
+                      <a:round/>
+                      <a:headEnd type="none" w="med" len="med"/>
+                      <a:tailEnd type="none" w="med" len="med"/>
+                    </a:lnT>
+                    <a:lnB w="12700" cap="flat" cmpd="sng" algn="ctr">
+                      <a:solidFill>
+                        <a:srgbClr val="2A3441"/>
+                      </a:solidFill>
+                      <a:prstDash val="solid"/>
+                      <a:round/>
+                      <a:headEnd type="none" w="med" len="med"/>
+                      <a:tailEnd type="none" w="med" len="med"/>
+                    </a:lnB>
+                    <a:solidFill>
+                      <a:srgbClr val="141B24"/>
+                    </a:solidFill>
+                  </a:tcPr>
+                </a:tc>
+                <a:tc>
+                  <a:txBody>
+                    <a:bodyPr/>
+                    <a:lstStyle/>
+                    <a:p>
+                      <a:pPr indent="0" marL="0">
+                        <a:buNone/>
+                      </a:pPr>
+                      <a:r>
+                        <a:rPr lang="en-US" sz="1300" dirty="0">
+                          <a:solidFill>
+                            <a:srgbClr val="E6EDF3"/>
+                          </a:solidFill>
+                          <a:latin typeface="Calibri" pitchFamily="34" charset="0"/>
+                          <a:ea typeface="Calibri" pitchFamily="34" charset="-122"/>
+                          <a:cs typeface="Calibri" pitchFamily="34" charset="-120"/>
+                        </a:rPr>
+                        <a:t>50%</a:t>
+                      </a:r>
+                      <a:endParaRPr lang="en-US" sz="1300" dirty="0">
+                        <a:latin typeface="Calibri" charset="0"/>
+                        <a:ea typeface="Calibri" charset="0"/>
+                        <a:cs typeface="Calibri" charset="0"/>
+                      </a:endParaRPr>
+                    </a:p>
+                  </a:txBody>
+                  <a:tcPr marL="91440" marR="91440" marT="45720" marB="45720">
+                    <a:lnL w="12700" cap="flat" cmpd="sng" algn="ctr">
+                      <a:solidFill>
+                        <a:srgbClr val="2A3441"/>
+                      </a:solidFill>
+                      <a:prstDash val="solid"/>
+                      <a:round/>
+                      <a:headEnd type="none" w="med" len="med"/>
+                      <a:tailEnd type="none" w="med" len="med"/>
+                    </a:lnL>
+                    <a:lnR w="12700" cap="flat" cmpd="sng" algn="ctr">
+                      <a:solidFill>
+                        <a:srgbClr val="2A3441"/>
+                      </a:solidFill>
+                      <a:prstDash val="solid"/>
+                      <a:round/>
+                      <a:headEnd type="none" w="med" len="med"/>
+                      <a:tailEnd type="none" w="med" len="med"/>
+                    </a:lnR>
+                    <a:lnT w="12700" cap="flat" cmpd="sng" algn="ctr">
+                      <a:solidFill>
+                        <a:srgbClr val="2A3441"/>
+                      </a:solidFill>
+                      <a:prstDash val="solid"/>
+                      <a:round/>
+                      <a:headEnd type="none" w="med" len="med"/>
+                      <a:tailEnd type="none" w="med" len="med"/>
+                    </a:lnT>
+                    <a:lnB w="12700" cap="flat" cmpd="sng" algn="ctr">
+                      <a:solidFill>
+                        <a:srgbClr val="2A3441"/>
+                      </a:solidFill>
+                      <a:prstDash val="solid"/>
+                      <a:round/>
+                      <a:headEnd type="none" w="med" len="med"/>
+                      <a:tailEnd type="none" w="med" len="med"/>
+                    </a:lnB>
+                    <a:solidFill>
+                      <a:srgbClr val="141B24"/>
+                    </a:solidFill>
+                  </a:tcPr>
+                </a:tc>
+                <a:tc>
+                  <a:txBody>
+                    <a:bodyPr/>
+                    <a:lstStyle/>
+                    <a:p>
+                      <a:pPr indent="0" marL="0">
+                        <a:buNone/>
+                      </a:pPr>
+                      <a:r>
+                        <a:rPr lang="en-US" sz="1300" dirty="0">
+                          <a:solidFill>
+                            <a:srgbClr val="E6EDF3"/>
+                          </a:solidFill>
+                          <a:latin typeface="Calibri" pitchFamily="34" charset="0"/>
+                          <a:ea typeface="Calibri" pitchFamily="34" charset="-122"/>
+                          <a:cs typeface="Calibri" pitchFamily="34" charset="-120"/>
+                        </a:rPr>
+                        <a:t>50%</a:t>
+                      </a:r>
+                      <a:endParaRPr lang="en-US" sz="1300" dirty="0">
+                        <a:latin typeface="Calibri" charset="0"/>
+                        <a:ea typeface="Calibri" charset="0"/>
+                        <a:cs typeface="Calibri" charset="0"/>
+                      </a:endParaRPr>
+                    </a:p>
+                  </a:txBody>
+                  <a:tcPr marL="91440" marR="91440" marT="45720" marB="45720">
+                    <a:lnL w="12700" cap="flat" cmpd="sng" algn="ctr">
+                      <a:solidFill>
+                        <a:srgbClr val="2A3441"/>
+                      </a:solidFill>
+                      <a:prstDash val="solid"/>
+                      <a:round/>
+                      <a:headEnd type="none" w="med" len="med"/>
+                      <a:tailEnd type="none" w="med" len="med"/>
+                    </a:lnL>
+                    <a:lnR w="12700" cap="flat" cmpd="sng" algn="ctr">
+                      <a:solidFill>
+                        <a:srgbClr val="2A3441"/>
+                      </a:solidFill>
+                      <a:prstDash val="solid"/>
+                      <a:round/>
+                      <a:headEnd type="none" w="med" len="med"/>
+                      <a:tailEnd type="none" w="med" len="med"/>
+                    </a:lnR>
+                    <a:lnT w="12700" cap="flat" cmpd="sng" algn="ctr">
+                      <a:solidFill>
+                        <a:srgbClr val="2A3441"/>
+                      </a:solidFill>
+                      <a:prstDash val="solid"/>
+                      <a:round/>
+                      <a:headEnd type="none" w="med" len="med"/>
+                      <a:tailEnd type="none" w="med" len="med"/>
+                    </a:lnT>
+                    <a:lnB w="12700" cap="flat" cmpd="sng" algn="ctr">
+                      <a:solidFill>
+                        <a:srgbClr val="2A3441"/>
+                      </a:solidFill>
+                      <a:prstDash val="solid"/>
+                      <a:round/>
+                      <a:headEnd type="none" w="med" len="med"/>
+                      <a:tailEnd type="none" w="med" len="med"/>
+                    </a:lnB>
+                    <a:solidFill>
+                      <a:srgbClr val="141B24"/>
+                    </a:solidFill>
+                  </a:tcPr>
+                </a:tc>
+                <a:tc>
+                  <a:txBody>
+                    <a:bodyPr/>
+                    <a:lstStyle/>
+                    <a:p>
+                      <a:pPr indent="0" marL="0">
+                        <a:buNone/>
+                      </a:pPr>
+                      <a:r>
+                        <a:rPr lang="en-US" sz="1300" dirty="0">
+                          <a:solidFill>
+                            <a:srgbClr val="E6EDF3"/>
+                          </a:solidFill>
+                          <a:latin typeface="Calibri" pitchFamily="34" charset="0"/>
+                          <a:ea typeface="Calibri" pitchFamily="34" charset="-122"/>
+                          <a:cs typeface="Calibri" pitchFamily="34" charset="-120"/>
+                        </a:rPr>
+                        <a:t>0.97</a:t>
+                      </a:r>
+                      <a:endParaRPr lang="en-US" sz="1300" dirty="0">
+                        <a:latin typeface="Calibri" charset="0"/>
+                        <a:ea typeface="Calibri" charset="0"/>
+                        <a:cs typeface="Calibri" charset="0"/>
+                      </a:endParaRPr>
+                    </a:p>
+                  </a:txBody>
+                  <a:tcPr marL="91440" marR="91440" marT="45720" marB="45720">
+                    <a:lnL w="12700" cap="flat" cmpd="sng" algn="ctr">
+                      <a:solidFill>
+                        <a:srgbClr val="2A3441"/>
+                      </a:solidFill>
+                      <a:prstDash val="solid"/>
+                      <a:round/>
+                      <a:headEnd type="none" w="med" len="med"/>
+                      <a:tailEnd type="none" w="med" len="med"/>
+                    </a:lnL>
+                    <a:lnR w="12700" cap="flat" cmpd="sng" algn="ctr">
+                      <a:solidFill>
+                        <a:srgbClr val="2A3441"/>
+                      </a:solidFill>
+                      <a:prstDash val="solid"/>
+                      <a:round/>
+                      <a:headEnd type="none" w="med" len="med"/>
+                      <a:tailEnd type="none" w="med" len="med"/>
+                    </a:lnR>
+                    <a:lnT w="12700" cap="flat" cmpd="sng" algn="ctr">
+                      <a:solidFill>
+                        <a:srgbClr val="2A3441"/>
+                      </a:solidFill>
+                      <a:prstDash val="solid"/>
+                      <a:round/>
+                      <a:headEnd type="none" w="med" len="med"/>
+                      <a:tailEnd type="none" w="med" len="med"/>
+                    </a:lnT>
+                    <a:lnB w="12700" cap="flat" cmpd="sng" algn="ctr">
+                      <a:solidFill>
+                        <a:srgbClr val="2A3441"/>
+                      </a:solidFill>
+                      <a:prstDash val="solid"/>
+                      <a:round/>
+                      <a:headEnd type="none" w="med" len="med"/>
+                      <a:tailEnd type="none" w="med" len="med"/>
+                    </a:lnB>
+                    <a:solidFill>
+                      <a:srgbClr val="141B24"/>
+                    </a:solidFill>
+                  </a:tcPr>
+                </a:tc>
+              </a:tr>
+              <a:tr h="402336">
+                <a:tc>
+                  <a:txBody>
+                    <a:bodyPr/>
+                    <a:lstStyle/>
+                    <a:p>
+                      <a:pPr indent="0" marL="0">
+                        <a:buNone/>
+                      </a:pPr>
+                      <a:r>
+                        <a:rPr lang="en-US" sz="1300" dirty="0">
+                          <a:solidFill>
+                            <a:srgbClr val="E6EDF3"/>
+                          </a:solidFill>
+                          <a:latin typeface="Calibri" pitchFamily="34" charset="0"/>
+                          <a:ea typeface="Calibri" pitchFamily="34" charset="-122"/>
+                          <a:cs typeface="Calibri" pitchFamily="34" charset="-120"/>
+                        </a:rPr>
+                        <a:t>Neural vs AIMD tuned</a:t>
+                      </a:r>
+                      <a:endParaRPr lang="en-US" sz="1300" dirty="0">
+                        <a:latin typeface="Calibri" charset="0"/>
+                        <a:ea typeface="Calibri" charset="0"/>
+                        <a:cs typeface="Calibri" charset="0"/>
+                      </a:endParaRPr>
+                    </a:p>
+                  </a:txBody>
+                  <a:tcPr marL="91440" marR="91440" marT="45720" marB="45720">
+                    <a:lnL w="12700" cap="flat" cmpd="sng" algn="ctr">
+                      <a:solidFill>
+                        <a:srgbClr val="2A3441"/>
+                      </a:solidFill>
+                      <a:prstDash val="solid"/>
+                      <a:round/>
+                      <a:headEnd type="none" w="med" len="med"/>
+                      <a:tailEnd type="none" w="med" len="med"/>
+                    </a:lnL>
+                    <a:lnR w="12700" cap="flat" cmpd="sng" algn="ctr">
+                      <a:solidFill>
+                        <a:srgbClr val="2A3441"/>
+                      </a:solidFill>
+                      <a:prstDash val="solid"/>
+                      <a:round/>
+                      <a:headEnd type="none" w="med" len="med"/>
+                      <a:tailEnd type="none" w="med" len="med"/>
+                    </a:lnR>
+                    <a:lnT w="12700" cap="flat" cmpd="sng" algn="ctr">
+                      <a:solidFill>
+                        <a:srgbClr val="2A3441"/>
+                      </a:solidFill>
+                      <a:prstDash val="solid"/>
+                      <a:round/>
+                      <a:headEnd type="none" w="med" len="med"/>
+                      <a:tailEnd type="none" w="med" len="med"/>
+                    </a:lnT>
+                    <a:lnB w="12700" cap="flat" cmpd="sng" algn="ctr">
+                      <a:solidFill>
+                        <a:srgbClr val="2A3441"/>
+                      </a:solidFill>
+                      <a:prstDash val="solid"/>
+                      <a:round/>
+                      <a:headEnd type="none" w="med" len="med"/>
+                      <a:tailEnd type="none" w="med" len="med"/>
+                    </a:lnB>
+                    <a:solidFill>
+                      <a:srgbClr val="141B24"/>
+                    </a:solidFill>
+                  </a:tcPr>
+                </a:tc>
+                <a:tc>
+                  <a:txBody>
+                    <a:bodyPr/>
+                    <a:lstStyle/>
+                    <a:p>
+                      <a:pPr indent="0" marL="0">
+                        <a:buNone/>
+                      </a:pPr>
+                      <a:r>
+                        <a:rPr lang="en-US" sz="1300" dirty="0">
+                          <a:solidFill>
+                            <a:srgbClr val="E6EDF3"/>
+                          </a:solidFill>
+                          <a:latin typeface="Calibri" pitchFamily="34" charset="0"/>
+                          <a:ea typeface="Calibri" pitchFamily="34" charset="-122"/>
+                          <a:cs typeface="Calibri" pitchFamily="34" charset="-120"/>
+                        </a:rPr>
+                        <a:t>68%</a:t>
+                      </a:r>
+                      <a:endParaRPr lang="en-US" sz="1300" dirty="0">
+                        <a:latin typeface="Calibri" charset="0"/>
+                        <a:ea typeface="Calibri" charset="0"/>
+                        <a:cs typeface="Calibri" charset="0"/>
+                      </a:endParaRPr>
+                    </a:p>
+                  </a:txBody>
+                  <a:tcPr marL="91440" marR="91440" marT="45720" marB="45720">
+                    <a:lnL w="12700" cap="flat" cmpd="sng" algn="ctr">
+                      <a:solidFill>
+                        <a:srgbClr val="2A3441"/>
+                      </a:solidFill>
+                      <a:prstDash val="solid"/>
+                      <a:round/>
+                      <a:headEnd type="none" w="med" len="med"/>
+                      <a:tailEnd type="none" w="med" len="med"/>
+                    </a:lnL>
+                    <a:lnR w="12700" cap="flat" cmpd="sng" algn="ctr">
+                      <a:solidFill>
+                        <a:srgbClr val="2A3441"/>
+                      </a:solidFill>
+                      <a:prstDash val="solid"/>
+                      <a:round/>
+                      <a:headEnd type="none" w="med" len="med"/>
+                      <a:tailEnd type="none" w="med" len="med"/>
+                    </a:lnR>
+                    <a:lnT w="12700" cap="flat" cmpd="sng" algn="ctr">
+                      <a:solidFill>
+                        <a:srgbClr val="2A3441"/>
+                      </a:solidFill>
+                      <a:prstDash val="solid"/>
+                      <a:round/>
+                      <a:headEnd type="none" w="med" len="med"/>
+                      <a:tailEnd type="none" w="med" len="med"/>
+                    </a:lnT>
+                    <a:lnB w="12700" cap="flat" cmpd="sng" algn="ctr">
+                      <a:solidFill>
+                        <a:srgbClr val="2A3441"/>
+                      </a:solidFill>
+                      <a:prstDash val="solid"/>
+                      <a:round/>
+                      <a:headEnd type="none" w="med" len="med"/>
+                      <a:tailEnd type="none" w="med" len="med"/>
+                    </a:lnB>
+                    <a:solidFill>
+                      <a:srgbClr val="141B24"/>
+                    </a:solidFill>
+                  </a:tcPr>
+                </a:tc>
+                <a:tc>
+                  <a:txBody>
+                    <a:bodyPr/>
+                    <a:lstStyle/>
+                    <a:p>
+                      <a:pPr indent="0" marL="0">
+                        <a:buNone/>
+                      </a:pPr>
+                      <a:r>
+                        <a:rPr lang="en-US" sz="1300" dirty="0">
+                          <a:solidFill>
+                            <a:srgbClr val="E6EDF3"/>
+                          </a:solidFill>
+                          <a:latin typeface="Calibri" pitchFamily="34" charset="0"/>
+                          <a:ea typeface="Calibri" pitchFamily="34" charset="-122"/>
+                          <a:cs typeface="Calibri" pitchFamily="34" charset="-120"/>
+                        </a:rPr>
+                        <a:t>32%</a:t>
+                      </a:r>
+                      <a:endParaRPr lang="en-US" sz="1300" dirty="0">
+                        <a:latin typeface="Calibri" charset="0"/>
+                        <a:ea typeface="Calibri" charset="0"/>
+                        <a:cs typeface="Calibri" charset="0"/>
+                      </a:endParaRPr>
+                    </a:p>
+                  </a:txBody>
+                  <a:tcPr marL="91440" marR="91440" marT="45720" marB="45720">
+                    <a:lnL w="12700" cap="flat" cmpd="sng" algn="ctr">
+                      <a:solidFill>
+                        <a:srgbClr val="2A3441"/>
+                      </a:solidFill>
+                      <a:prstDash val="solid"/>
+                      <a:round/>
+                      <a:headEnd type="none" w="med" len="med"/>
+                      <a:tailEnd type="none" w="med" len="med"/>
+                    </a:lnL>
+                    <a:lnR w="12700" cap="flat" cmpd="sng" algn="ctr">
+                      <a:solidFill>
+                        <a:srgbClr val="2A3441"/>
+                      </a:solidFill>
+                      <a:prstDash val="solid"/>
+                      <a:round/>
+                      <a:headEnd type="none" w="med" len="med"/>
+                      <a:tailEnd type="none" w="med" len="med"/>
+                    </a:lnR>
+                    <a:lnT w="12700" cap="flat" cmpd="sng" algn="ctr">
+                      <a:solidFill>
+                        <a:srgbClr val="2A3441"/>
+                      </a:solidFill>
+                      <a:prstDash val="solid"/>
+                      <a:round/>
+                      <a:headEnd type="none" w="med" len="med"/>
+                      <a:tailEnd type="none" w="med" len="med"/>
+                    </a:lnT>
+                    <a:lnB w="12700" cap="flat" cmpd="sng" algn="ctr">
+                      <a:solidFill>
+                        <a:srgbClr val="2A3441"/>
+                      </a:solidFill>
+                      <a:prstDash val="solid"/>
+                      <a:round/>
+                      <a:headEnd type="none" w="med" len="med"/>
+                      <a:tailEnd type="none" w="med" len="med"/>
+                    </a:lnB>
+                    <a:solidFill>
+                      <a:srgbClr val="141B24"/>
+                    </a:solidFill>
+                  </a:tcPr>
+                </a:tc>
+                <a:tc>
+                  <a:txBody>
+                    <a:bodyPr/>
+                    <a:lstStyle/>
+                    <a:p>
+                      <a:pPr indent="0" marL="0">
+                        <a:buNone/>
+                      </a:pPr>
+                      <a:r>
+                        <a:rPr lang="en-US" sz="1300" dirty="0">
+                          <a:solidFill>
+                            <a:srgbClr val="E6EDF3"/>
+                          </a:solidFill>
+                          <a:latin typeface="Calibri" pitchFamily="34" charset="0"/>
+                          <a:ea typeface="Calibri" pitchFamily="34" charset="-122"/>
+                          <a:cs typeface="Calibri" pitchFamily="34" charset="-120"/>
+                        </a:rPr>
+                        <a:t>0.88</a:t>
+                      </a:r>
+                      <a:endParaRPr lang="en-US" sz="1300" dirty="0">
+                        <a:latin typeface="Calibri" charset="0"/>
+                        <a:ea typeface="Calibri" charset="0"/>
+                        <a:cs typeface="Calibri" charset="0"/>
+                      </a:endParaRPr>
+                    </a:p>
+                  </a:txBody>
+                  <a:tcPr marL="91440" marR="91440" marT="45720" marB="45720">
+                    <a:lnL w="12700" cap="flat" cmpd="sng" algn="ctr">
+                      <a:solidFill>
+                        <a:srgbClr val="2A3441"/>
+                      </a:solidFill>
+                      <a:prstDash val="solid"/>
+                      <a:round/>
+                      <a:headEnd type="none" w="med" len="med"/>
+                      <a:tailEnd type="none" w="med" len="med"/>
+                    </a:lnL>
+                    <a:lnR w="12700" cap="flat" cmpd="sng" algn="ctr">
+                      <a:solidFill>
+                        <a:srgbClr val="2A3441"/>
+                      </a:solidFill>
+                      <a:prstDash val="solid"/>
+                      <a:round/>
+                      <a:headEnd type="none" w="med" len="med"/>
+                      <a:tailEnd type="none" w="med" len="med"/>
+                    </a:lnR>
+                    <a:lnT w="12700" cap="flat" cmpd="sng" algn="ctr">
+                      <a:solidFill>
+                        <a:srgbClr val="2A3441"/>
+                      </a:solidFill>
+                      <a:prstDash val="solid"/>
+                      <a:round/>
+                      <a:headEnd type="none" w="med" len="med"/>
+                      <a:tailEnd type="none" w="med" len="med"/>
+                    </a:lnT>
+                    <a:lnB w="12700" cap="flat" cmpd="sng" algn="ctr">
+                      <a:solidFill>
+                        <a:srgbClr val="2A3441"/>
+                      </a:solidFill>
+                      <a:prstDash val="solid"/>
+                      <a:round/>
+                      <a:headEnd type="none" w="med" len="med"/>
+                      <a:tailEnd type="none" w="med" len="med"/>
+                    </a:lnB>
+                    <a:solidFill>
+                      <a:srgbClr val="141B24"/>
+                    </a:solidFill>
+                  </a:tcPr>
+                </a:tc>
+              </a:tr>
+              <a:tr h="402336">
+                <a:tc>
+                  <a:txBody>
+                    <a:bodyPr/>
+                    <a:lstStyle/>
+                    <a:p>
+                      <a:pPr indent="0" marL="0">
+                        <a:buNone/>
+                      </a:pPr>
+                      <a:r>
+                        <a:rPr lang="en-US" sz="1300" dirty="0">
+                          <a:solidFill>
+                            <a:srgbClr val="E6EDF3"/>
+                          </a:solidFill>
+                          <a:latin typeface="Calibri" pitchFamily="34" charset="0"/>
+                          <a:ea typeface="Calibri" pitchFamily="34" charset="-122"/>
+                          <a:cs typeface="Calibri" pitchFamily="34" charset="-120"/>
+                        </a:rPr>
+                        <a:t>Neural vs AIMD cap 32</a:t>
+                      </a:r>
+                      <a:endParaRPr lang="en-US" sz="1300" dirty="0">
+                        <a:latin typeface="Calibri" charset="0"/>
+                        <a:ea typeface="Calibri" charset="0"/>
+                        <a:cs typeface="Calibri" charset="0"/>
+                      </a:endParaRPr>
+                    </a:p>
+                  </a:txBody>
+                  <a:tcPr marL="91440" marR="91440" marT="45720" marB="45720">
+                    <a:lnL w="12700" cap="flat" cmpd="sng" algn="ctr">
+                      <a:solidFill>
+                        <a:srgbClr val="2A3441"/>
+                      </a:solidFill>
+                      <a:prstDash val="solid"/>
+                      <a:round/>
+                      <a:headEnd type="none" w="med" len="med"/>
+                      <a:tailEnd type="none" w="med" len="med"/>
+                    </a:lnL>
+                    <a:lnR w="12700" cap="flat" cmpd="sng" algn="ctr">
+                      <a:solidFill>
+                        <a:srgbClr val="2A3441"/>
+                      </a:solidFill>
+                      <a:prstDash val="solid"/>
+                      <a:round/>
+                      <a:headEnd type="none" w="med" len="med"/>
+                      <a:tailEnd type="none" w="med" len="med"/>
+                    </a:lnR>
+                    <a:lnT w="12700" cap="flat" cmpd="sng" algn="ctr">
+                      <a:solidFill>
+                        <a:srgbClr val="2A3441"/>
+                      </a:solidFill>
+                      <a:prstDash val="solid"/>
+                      <a:round/>
+                      <a:headEnd type="none" w="med" len="med"/>
+                      <a:tailEnd type="none" w="med" len="med"/>
+                    </a:lnT>
+                    <a:lnB w="12700" cap="flat" cmpd="sng" algn="ctr">
+                      <a:solidFill>
+                        <a:srgbClr val="2A3441"/>
+                      </a:solidFill>
+                      <a:prstDash val="solid"/>
+                      <a:round/>
+                      <a:headEnd type="none" w="med" len="med"/>
+                      <a:tailEnd type="none" w="med" len="med"/>
+                    </a:lnB>
+                    <a:solidFill>
+                      <a:srgbClr val="141B24"/>
+                    </a:solidFill>
+                  </a:tcPr>
+                </a:tc>
+                <a:tc>
+                  <a:txBody>
+                    <a:bodyPr/>
+                    <a:lstStyle/>
+                    <a:p>
+                      <a:pPr indent="0" marL="0">
+                        <a:buNone/>
+                      </a:pPr>
+                      <a:r>
+                        <a:rPr lang="en-US" sz="1300" dirty="0">
+                          <a:solidFill>
+                            <a:srgbClr val="E6EDF3"/>
+                          </a:solidFill>
+                          <a:latin typeface="Calibri" pitchFamily="34" charset="0"/>
+                          <a:ea typeface="Calibri" pitchFamily="34" charset="-122"/>
+                          <a:cs typeface="Calibri" pitchFamily="34" charset="-120"/>
+                        </a:rPr>
+                        <a:t>76%</a:t>
+                      </a:r>
+                      <a:endParaRPr lang="en-US" sz="1300" dirty="0">
+                        <a:latin typeface="Calibri" charset="0"/>
+                        <a:ea typeface="Calibri" charset="0"/>
+                        <a:cs typeface="Calibri" charset="0"/>
+                      </a:endParaRPr>
+                    </a:p>
+                  </a:txBody>
+                  <a:tcPr marL="91440" marR="91440" marT="45720" marB="45720">
+                    <a:lnL w="12700" cap="flat" cmpd="sng" algn="ctr">
+                      <a:solidFill>
+                        <a:srgbClr val="2A3441"/>
+                      </a:solidFill>
+                      <a:prstDash val="solid"/>
+                      <a:round/>
+                      <a:headEnd type="none" w="med" len="med"/>
+                      <a:tailEnd type="none" w="med" len="med"/>
+                    </a:lnL>
+                    <a:lnR w="12700" cap="flat" cmpd="sng" algn="ctr">
+                      <a:solidFill>
+                        <a:srgbClr val="2A3441"/>
+                      </a:solidFill>
+                      <a:prstDash val="solid"/>
+                      <a:round/>
+                      <a:headEnd type="none" w="med" len="med"/>
+                      <a:tailEnd type="none" w="med" len="med"/>
+                    </a:lnR>
+                    <a:lnT w="12700" cap="flat" cmpd="sng" algn="ctr">
+                      <a:solidFill>
+                        <a:srgbClr val="2A3441"/>
+                      </a:solidFill>
+                      <a:prstDash val="solid"/>
+                      <a:round/>
+                      <a:headEnd type="none" w="med" len="med"/>
+                      <a:tailEnd type="none" w="med" len="med"/>
+                    </a:lnT>
+                    <a:lnB w="12700" cap="flat" cmpd="sng" algn="ctr">
+                      <a:solidFill>
+                        <a:srgbClr val="2A3441"/>
+                      </a:solidFill>
+                      <a:prstDash val="solid"/>
+                      <a:round/>
+                      <a:headEnd type="none" w="med" len="med"/>
+                      <a:tailEnd type="none" w="med" len="med"/>
+                    </a:lnB>
+                    <a:solidFill>
+                      <a:srgbClr val="141B24"/>
+                    </a:solidFill>
+                  </a:tcPr>
+                </a:tc>
+                <a:tc>
+                  <a:txBody>
+                    <a:bodyPr/>
+                    <a:lstStyle/>
+                    <a:p>
+                      <a:pPr indent="0" marL="0">
+                        <a:buNone/>
+                      </a:pPr>
+                      <a:r>
+                        <a:rPr lang="en-US" sz="1300" dirty="0">
+                          <a:solidFill>
+                            <a:srgbClr val="E6EDF3"/>
+                          </a:solidFill>
+                          <a:latin typeface="Calibri" pitchFamily="34" charset="0"/>
+                          <a:ea typeface="Calibri" pitchFamily="34" charset="-122"/>
+                          <a:cs typeface="Calibri" pitchFamily="34" charset="-120"/>
+                        </a:rPr>
+                        <a:t>24%</a:t>
+                      </a:r>
+                      <a:endParaRPr lang="en-US" sz="1300" dirty="0">
+                        <a:latin typeface="Calibri" charset="0"/>
+                        <a:ea typeface="Calibri" charset="0"/>
+                        <a:cs typeface="Calibri" charset="0"/>
+                      </a:endParaRPr>
+                    </a:p>
+                  </a:txBody>
+                  <a:tcPr marL="91440" marR="91440" marT="45720" marB="45720">
+                    <a:lnL w="12700" cap="flat" cmpd="sng" algn="ctr">
+                      <a:solidFill>
+                        <a:srgbClr val="2A3441"/>
+                      </a:solidFill>
+                      <a:prstDash val="solid"/>
+                      <a:round/>
+                      <a:headEnd type="none" w="med" len="med"/>
+                      <a:tailEnd type="none" w="med" len="med"/>
+                    </a:lnL>
+                    <a:lnR w="12700" cap="flat" cmpd="sng" algn="ctr">
+                      <a:solidFill>
+                        <a:srgbClr val="2A3441"/>
+                      </a:solidFill>
+                      <a:prstDash val="solid"/>
+                      <a:round/>
+                      <a:headEnd type="none" w="med" len="med"/>
+                      <a:tailEnd type="none" w="med" len="med"/>
+                    </a:lnR>
+                    <a:lnT w="12700" cap="flat" cmpd="sng" algn="ctr">
+                      <a:solidFill>
+                        <a:srgbClr val="2A3441"/>
+                      </a:solidFill>
+                      <a:prstDash val="solid"/>
+                      <a:round/>
+                      <a:headEnd type="none" w="med" len="med"/>
+                      <a:tailEnd type="none" w="med" len="med"/>
+                    </a:lnT>
+                    <a:lnB w="12700" cap="flat" cmpd="sng" algn="ctr">
+                      <a:solidFill>
+                        <a:srgbClr val="2A3441"/>
+                      </a:solidFill>
+                      <a:prstDash val="solid"/>
+                      <a:round/>
+                      <a:headEnd type="none" w="med" len="med"/>
+                      <a:tailEnd type="none" w="med" len="med"/>
+                    </a:lnB>
+                    <a:solidFill>
+                      <a:srgbClr val="141B24"/>
+                    </a:solidFill>
+                  </a:tcPr>
+                </a:tc>
+                <a:tc>
+                  <a:txBody>
+                    <a:bodyPr/>
+                    <a:lstStyle/>
+                    <a:p>
+                      <a:pPr indent="0" marL="0">
+                        <a:buNone/>
+                      </a:pPr>
+                      <a:r>
+                        <a:rPr lang="en-US" sz="1300" dirty="0">
+                          <a:solidFill>
+                            <a:srgbClr val="E6EDF3"/>
+                          </a:solidFill>
+                          <a:latin typeface="Calibri" pitchFamily="34" charset="0"/>
+                          <a:ea typeface="Calibri" pitchFamily="34" charset="-122"/>
+                          <a:cs typeface="Calibri" pitchFamily="34" charset="-120"/>
+                        </a:rPr>
+                        <a:t>0.78</a:t>
+                      </a:r>
+                      <a:endParaRPr lang="en-US" sz="1300" dirty="0">
+                        <a:latin typeface="Calibri" charset="0"/>
+                        <a:ea typeface="Calibri" charset="0"/>
+                        <a:cs typeface="Calibri" charset="0"/>
+                      </a:endParaRPr>
+                    </a:p>
+                  </a:txBody>
+                  <a:tcPr marL="91440" marR="91440" marT="45720" marB="45720">
+                    <a:lnL w="12700" cap="flat" cmpd="sng" algn="ctr">
+                      <a:solidFill>
+                        <a:srgbClr val="2A3441"/>
+                      </a:solidFill>
+                      <a:prstDash val="solid"/>
+                      <a:round/>
+                      <a:headEnd type="none" w="med" len="med"/>
+                      <a:tailEnd type="none" w="med" len="med"/>
+                    </a:lnL>
+                    <a:lnR w="12700" cap="flat" cmpd="sng" algn="ctr">
+                      <a:solidFill>
+                        <a:srgbClr val="2A3441"/>
+                      </a:solidFill>
+                      <a:prstDash val="solid"/>
+                      <a:round/>
+                      <a:headEnd type="none" w="med" len="med"/>
+                      <a:tailEnd type="none" w="med" len="med"/>
+                    </a:lnR>
+                    <a:lnT w="12700" cap="flat" cmpd="sng" algn="ctr">
+                      <a:solidFill>
+                        <a:srgbClr val="2A3441"/>
+                      </a:solidFill>
+                      <a:prstDash val="solid"/>
+                      <a:round/>
+                      <a:headEnd type="none" w="med" len="med"/>
+                      <a:tailEnd type="none" w="med" len="med"/>
+                    </a:lnT>
+                    <a:lnB w="12700" cap="flat" cmpd="sng" algn="ctr">
+                      <a:solidFill>
+                        <a:srgbClr val="2A3441"/>
+                      </a:solidFill>
+                      <a:prstDash val="solid"/>
+                      <a:round/>
+                      <a:headEnd type="none" w="med" len="med"/>
+                      <a:tailEnd type="none" w="med" len="med"/>
+                    </a:lnB>
+                    <a:solidFill>
+                      <a:srgbClr val="141B24"/>
+                    </a:solidFill>
+                  </a:tcPr>
+                </a:tc>
+              </a:tr>
+              <a:tr h="402336">
+                <a:tc>
+                  <a:txBody>
+                    <a:bodyPr/>
+                    <a:lstStyle/>
+                    <a:p>
+                      <a:pPr indent="0" marL="0">
+                        <a:buNone/>
+                      </a:pPr>
+                      <a:r>
+                        <a:rPr lang="en-US" sz="1300" dirty="0">
+                          <a:solidFill>
+                            <a:srgbClr val="E6EDF3"/>
+                          </a:solidFill>
+                          <a:latin typeface="Calibri" pitchFamily="34" charset="0"/>
+                          <a:ea typeface="Calibri" pitchFamily="34" charset="-122"/>
+                          <a:cs typeface="Calibri" pitchFamily="34" charset="-120"/>
+                        </a:rPr>
+                        <a:t>CUBIC vs AIMD tuned</a:t>
+                      </a:r>
+                      <a:endParaRPr lang="en-US" sz="1300" dirty="0">
+                        <a:latin typeface="Calibri" charset="0"/>
+                        <a:ea typeface="Calibri" charset="0"/>
+                        <a:cs typeface="Calibri" charset="0"/>
+                      </a:endParaRPr>
+                    </a:p>
+                  </a:txBody>
+                  <a:tcPr marL="91440" marR="91440" marT="45720" marB="45720">
+                    <a:lnL w="12700" cap="flat" cmpd="sng" algn="ctr">
+                      <a:solidFill>
+                        <a:srgbClr val="2A3441"/>
+                      </a:solidFill>
+                      <a:prstDash val="solid"/>
+                      <a:round/>
+                      <a:headEnd type="none" w="med" len="med"/>
+                      <a:tailEnd type="none" w="med" len="med"/>
+                    </a:lnL>
+                    <a:lnR w="12700" cap="flat" cmpd="sng" algn="ctr">
+                      <a:solidFill>
+                        <a:srgbClr val="2A3441"/>
+                      </a:solidFill>
+                      <a:prstDash val="solid"/>
+                      <a:round/>
+                      <a:headEnd type="none" w="med" len="med"/>
+                      <a:tailEnd type="none" w="med" len="med"/>
+                    </a:lnR>
+                    <a:lnT w="12700" cap="flat" cmpd="sng" algn="ctr">
+                      <a:solidFill>
+                        <a:srgbClr val="2A3441"/>
+                      </a:solidFill>
+                      <a:prstDash val="solid"/>
+                      <a:round/>
+                      <a:headEnd type="none" w="med" len="med"/>
+                      <a:tailEnd type="none" w="med" len="med"/>
+                    </a:lnT>
+                    <a:lnB w="12700" cap="flat" cmpd="sng" algn="ctr">
+                      <a:solidFill>
+                        <a:srgbClr val="2A3441"/>
+                      </a:solidFill>
+                      <a:prstDash val="solid"/>
+                      <a:round/>
+                      <a:headEnd type="none" w="med" len="med"/>
+                      <a:tailEnd type="none" w="med" len="med"/>
+                    </a:lnB>
+                    <a:solidFill>
+                      <a:srgbClr val="141B24"/>
+                    </a:solidFill>
+                  </a:tcPr>
+                </a:tc>
+                <a:tc>
+                  <a:txBody>
+                    <a:bodyPr/>
+                    <a:lstStyle/>
+                    <a:p>
+                      <a:pPr indent="0" marL="0">
+                        <a:buNone/>
+                      </a:pPr>
+                      <a:r>
+                        <a:rPr lang="en-US" sz="1300" dirty="0">
+                          <a:solidFill>
+                            <a:srgbClr val="E6EDF3"/>
+                          </a:solidFill>
+                          <a:latin typeface="Calibri" pitchFamily="34" charset="0"/>
+                          <a:ea typeface="Calibri" pitchFamily="34" charset="-122"/>
+                          <a:cs typeface="Calibri" pitchFamily="34" charset="-120"/>
+                        </a:rPr>
+                        <a:t>61%</a:t>
+                      </a:r>
+                      <a:endParaRPr lang="en-US" sz="1300" dirty="0">
+                        <a:latin typeface="Calibri" charset="0"/>
+                        <a:ea typeface="Calibri" charset="0"/>
+                        <a:cs typeface="Calibri" charset="0"/>
+                      </a:endParaRPr>
+                    </a:p>
+                  </a:txBody>
+                  <a:tcPr marL="91440" marR="91440" marT="45720" marB="45720">
+                    <a:lnL w="12700" cap="flat" cmpd="sng" algn="ctr">
+                      <a:solidFill>
+                        <a:srgbClr val="2A3441"/>
+                      </a:solidFill>
+                      <a:prstDash val="solid"/>
+                      <a:round/>
+                      <a:headEnd type="none" w="med" len="med"/>
+                      <a:tailEnd type="none" w="med" len="med"/>
+                    </a:lnL>
+                    <a:lnR w="12700" cap="flat" cmpd="sng" algn="ctr">
+                      <a:solidFill>
+                        <a:srgbClr val="2A3441"/>
+                      </a:solidFill>
+                      <a:prstDash val="solid"/>
+                      <a:round/>
+                      <a:headEnd type="none" w="med" len="med"/>
+                      <a:tailEnd type="none" w="med" len="med"/>
+                    </a:lnR>
+                    <a:lnT w="12700" cap="flat" cmpd="sng" algn="ctr">
+                      <a:solidFill>
+                        <a:srgbClr val="2A3441"/>
+                      </a:solidFill>
+                      <a:prstDash val="solid"/>
+                      <a:round/>
+                      <a:headEnd type="none" w="med" len="med"/>
+                      <a:tailEnd type="none" w="med" len="med"/>
+                    </a:lnT>
+                    <a:lnB w="12700" cap="flat" cmpd="sng" algn="ctr">
+                      <a:solidFill>
+                        <a:srgbClr val="2A3441"/>
+                      </a:solidFill>
+                      <a:prstDash val="solid"/>
+                      <a:round/>
+                      <a:headEnd type="none" w="med" len="med"/>
+                      <a:tailEnd type="none" w="med" len="med"/>
+                    </a:lnB>
+                    <a:solidFill>
+                      <a:srgbClr val="141B24"/>
+                    </a:solidFill>
+                  </a:tcPr>
+                </a:tc>
+                <a:tc>
+                  <a:txBody>
+                    <a:bodyPr/>
+                    <a:lstStyle/>
+                    <a:p>
+                      <a:pPr indent="0" marL="0">
+                        <a:buNone/>
+                      </a:pPr>
+                      <a:r>
+                        <a:rPr lang="en-US" sz="1300" dirty="0">
+                          <a:solidFill>
+                            <a:srgbClr val="E6EDF3"/>
+                          </a:solidFill>
+                          <a:latin typeface="Calibri" pitchFamily="34" charset="0"/>
+                          <a:ea typeface="Calibri" pitchFamily="34" charset="-122"/>
+                          <a:cs typeface="Calibri" pitchFamily="34" charset="-120"/>
+                        </a:rPr>
+                        <a:t>39%</a:t>
+                      </a:r>
+                      <a:endParaRPr lang="en-US" sz="1300" dirty="0">
+                        <a:latin typeface="Calibri" charset="0"/>
+                        <a:ea typeface="Calibri" charset="0"/>
+                        <a:cs typeface="Calibri" charset="0"/>
+                      </a:endParaRPr>
+                    </a:p>
+                  </a:txBody>
+                  <a:tcPr marL="91440" marR="91440" marT="45720" marB="45720">
+                    <a:lnL w="12700" cap="flat" cmpd="sng" algn="ctr">
+                      <a:solidFill>
+                        <a:srgbClr val="2A3441"/>
+                      </a:solidFill>
+                      <a:prstDash val="solid"/>
+                      <a:round/>
+                      <a:headEnd type="none" w="med" len="med"/>
+                      <a:tailEnd type="none" w="med" len="med"/>
+                    </a:lnL>
+                    <a:lnR w="12700" cap="flat" cmpd="sng" algn="ctr">
+                      <a:solidFill>
+                        <a:srgbClr val="2A3441"/>
+                      </a:solidFill>
+                      <a:prstDash val="solid"/>
+                      <a:round/>
+                      <a:headEnd type="none" w="med" len="med"/>
+                      <a:tailEnd type="none" w="med" len="med"/>
+                    </a:lnR>
+                    <a:lnT w="12700" cap="flat" cmpd="sng" algn="ctr">
+                      <a:solidFill>
+                        <a:srgbClr val="2A3441"/>
+                      </a:solidFill>
+                      <a:prstDash val="solid"/>
+                      <a:round/>
+                      <a:headEnd type="none" w="med" len="med"/>
+                      <a:tailEnd type="none" w="med" len="med"/>
+                    </a:lnT>
+                    <a:lnB w="12700" cap="flat" cmpd="sng" algn="ctr">
+                      <a:solidFill>
+                        <a:srgbClr val="2A3441"/>
+                      </a:solidFill>
+                      <a:prstDash val="solid"/>
+                      <a:round/>
+                      <a:headEnd type="none" w="med" len="med"/>
+                      <a:tailEnd type="none" w="med" len="med"/>
+                    </a:lnB>
+                    <a:solidFill>
+                      <a:srgbClr val="141B24"/>
+                    </a:solidFill>
+                  </a:tcPr>
+                </a:tc>
+                <a:tc>
+                  <a:txBody>
+                    <a:bodyPr/>
+                    <a:lstStyle/>
+                    <a:p>
+                      <a:pPr indent="0" marL="0">
+                        <a:buNone/>
+                      </a:pPr>
+                      <a:r>
+                        <a:rPr lang="en-US" sz="1300" dirty="0">
+                          <a:solidFill>
+                            <a:srgbClr val="E6EDF3"/>
+                          </a:solidFill>
+                          <a:latin typeface="Calibri" pitchFamily="34" charset="0"/>
+                          <a:ea typeface="Calibri" pitchFamily="34" charset="-122"/>
+                          <a:cs typeface="Calibri" pitchFamily="34" charset="-120"/>
+                        </a:rPr>
+                        <a:t>0.93</a:t>
+                      </a:r>
+                      <a:endParaRPr lang="en-US" sz="1300" dirty="0">
+                        <a:latin typeface="Calibri" charset="0"/>
+                        <a:ea typeface="Calibri" charset="0"/>
+                        <a:cs typeface="Calibri" charset="0"/>
+                      </a:endParaRPr>
+                    </a:p>
+                  </a:txBody>
+                  <a:tcPr marL="91440" marR="91440" marT="45720" marB="45720">
+                    <a:lnL w="12700" cap="flat" cmpd="sng" algn="ctr">
+                      <a:solidFill>
+                        <a:srgbClr val="2A3441"/>
+                      </a:solidFill>
+                      <a:prstDash val="solid"/>
+                      <a:round/>
+                      <a:headEnd type="none" w="med" len="med"/>
+                      <a:tailEnd type="none" w="med" len="med"/>
+                    </a:lnL>
+                    <a:lnR w="12700" cap="flat" cmpd="sng" algn="ctr">
+                      <a:solidFill>
+                        <a:srgbClr val="2A3441"/>
+                      </a:solidFill>
+                      <a:prstDash val="solid"/>
+                      <a:round/>
+                      <a:headEnd type="none" w="med" len="med"/>
+                      <a:tailEnd type="none" w="med" len="med"/>
+                    </a:lnR>
+                    <a:lnT w="12700" cap="flat" cmpd="sng" algn="ctr">
+                      <a:solidFill>
+                        <a:srgbClr val="2A3441"/>
+                      </a:solidFill>
+                      <a:prstDash val="solid"/>
+                      <a:round/>
+                      <a:headEnd type="none" w="med" len="med"/>
+                      <a:tailEnd type="none" w="med" len="med"/>
+                    </a:lnT>
+                    <a:lnB w="12700" cap="flat" cmpd="sng" algn="ctr">
+                      <a:solidFill>
+                        <a:srgbClr val="2A3441"/>
+                      </a:solidFill>
+                      <a:prstDash val="solid"/>
+                      <a:round/>
+                      <a:headEnd type="none" w="med" len="med"/>
+                      <a:tailEnd type="none" w="med" len="med"/>
+                    </a:lnB>
+                    <a:solidFill>
+                      <a:srgbClr val="141B24"/>
+                    </a:solidFill>
+                  </a:tcPr>
+                </a:tc>
+              </a:tr>
+            </a:tbl>
+          </a:graphicData>
+        </a:graphic>
+      </p:graphicFrame>
+      <p:graphicFrame>
+        <p:nvGraphicFramePr>
+          <p:cNvPr id="59" name="Table 1"/>
+          <p:cNvGraphicFramePr>
+            <a:graphicFrameLocks noGrp="1"/>
+          </p:cNvGraphicFramePr>
+          <p:nvPr>
+            <p:extLst>
+              <p:ext uri="{D42A27DB-BD31-4B8C-83A1-F6EECF244321}">
+                <p14:modId xmlns:p14="http://schemas.microsoft.com/office/powerpoint/2010/main" val="1579011935"/>
+              </p:ext>
+            </p:extLst>
+          </p:nvPr>
+        </p:nvGraphicFramePr>
+        <p:xfrm>
+          <a:off x="548640" y="3931920"/>
+          <a:ext cx="5486400" cy="914400"/>
+        </p:xfrm>
+        <a:graphic>
+          <a:graphicData uri="http://schemas.openxmlformats.org/drawingml/2006/table">
+            <a:tbl>
+              <a:tblPr/>
+              <a:tblGrid>
+                <a:gridCol w="2011680"/>
+                <a:gridCol w="1188720"/>
+                <a:gridCol w="1188720"/>
+                <a:gridCol w="1097280"/>
+              </a:tblGrid>
+              <a:tr h="402336">
+                <a:tc>
+                  <a:txBody>
+                    <a:bodyPr/>
+                    <a:lstStyle/>
+                    <a:p>
+                      <a:pPr indent="0" marL="0">
+                        <a:buNone/>
+                      </a:pPr>
+                      <a:r>
+                        <a:rPr lang="en-US" sz="1300" b="1" dirty="0">
+                          <a:solidFill>
+                            <a:srgbClr val="0B0F14"/>
+                          </a:solidFill>
+                          <a:latin typeface="Courier New" pitchFamily="34" charset="0"/>
+                          <a:ea typeface="Courier New" pitchFamily="34" charset="-122"/>
+                          <a:cs typeface="Courier New" pitchFamily="34" charset="-120"/>
+                        </a:rPr>
+                        <a:t>File transfer</a:t>
+                      </a:r>
+                      <a:endParaRPr lang="en-US" sz="1300" dirty="0">
+                        <a:latin typeface="Courier New" charset="0"/>
+                        <a:ea typeface="Courier New" charset="0"/>
+                        <a:cs typeface="Courier New" charset="0"/>
+                      </a:endParaRPr>
+                    </a:p>
+                  </a:txBody>
+                  <a:tcPr marL="91440" marR="91440" marT="45720" marB="45720">
+                    <a:lnL w="12700" cap="flat" cmpd="sng" algn="ctr">
+                      <a:solidFill>
+                        <a:srgbClr val="2A3441"/>
+                      </a:solidFill>
+                      <a:prstDash val="solid"/>
+                      <a:round/>
+                      <a:headEnd type="none" w="med" len="med"/>
+                      <a:tailEnd type="none" w="med" len="med"/>
+                    </a:lnL>
+                    <a:lnR w="12700" cap="flat" cmpd="sng" algn="ctr">
+                      <a:solidFill>
+                        <a:srgbClr val="2A3441"/>
+                      </a:solidFill>
+                      <a:prstDash val="solid"/>
+                      <a:round/>
+                      <a:headEnd type="none" w="med" len="med"/>
+                      <a:tailEnd type="none" w="med" len="med"/>
+                    </a:lnR>
+                    <a:lnT w="12700" cap="flat" cmpd="sng" algn="ctr">
+                      <a:solidFill>
+                        <a:srgbClr val="2A3441"/>
+                      </a:solidFill>
+                      <a:prstDash val="solid"/>
+                      <a:round/>
+                      <a:headEnd type="none" w="med" len="med"/>
+                      <a:tailEnd type="none" w="med" len="med"/>
+                    </a:lnT>
+                    <a:lnB w="12700" cap="flat" cmpd="sng" algn="ctr">
+                      <a:solidFill>
+                        <a:srgbClr val="2A3441"/>
+                      </a:solidFill>
+                      <a:prstDash val="solid"/>
+                      <a:round/>
+                      <a:headEnd type="none" w="med" len="med"/>
+                      <a:tailEnd type="none" w="med" len="med"/>
+                    </a:lnB>
+                    <a:solidFill>
+                      <a:srgbClr val="39FF88"/>
+                    </a:solidFill>
+                  </a:tcPr>
+                </a:tc>
+                <a:tc>
+                  <a:txBody>
+                    <a:bodyPr/>
+                    <a:lstStyle/>
+                    <a:p>
+                      <a:pPr indent="0" marL="0">
+                        <a:buNone/>
+                      </a:pPr>
+                      <a:r>
+                        <a:rPr lang="en-US" sz="1300" b="1" dirty="0">
+                          <a:solidFill>
+                            <a:srgbClr val="0B0F14"/>
+                          </a:solidFill>
+                          <a:latin typeface="Courier New" pitchFamily="34" charset="0"/>
+                          <a:ea typeface="Courier New" pitchFamily="34" charset="-122"/>
+                          <a:cs typeface="Courier New" pitchFamily="34" charset="-120"/>
+                        </a:rPr>
+                        <a:t>AIMD cap 32</a:t>
+                      </a:r>
+                      <a:endParaRPr lang="en-US" sz="1300" dirty="0">
+                        <a:latin typeface="Courier New" charset="0"/>
+                        <a:ea typeface="Courier New" charset="0"/>
+                        <a:cs typeface="Courier New" charset="0"/>
+                      </a:endParaRPr>
+                    </a:p>
+                  </a:txBody>
+                  <a:tcPr marL="91440" marR="91440" marT="45720" marB="45720">
+                    <a:lnL w="12700" cap="flat" cmpd="sng" algn="ctr">
+                      <a:solidFill>
+                        <a:srgbClr val="2A3441"/>
+                      </a:solidFill>
+                      <a:prstDash val="solid"/>
+                      <a:round/>
+                      <a:headEnd type="none" w="med" len="med"/>
+                      <a:tailEnd type="none" w="med" len="med"/>
+                    </a:lnL>
+                    <a:lnR w="12700" cap="flat" cmpd="sng" algn="ctr">
+                      <a:solidFill>
+                        <a:srgbClr val="2A3441"/>
+                      </a:solidFill>
+                      <a:prstDash val="solid"/>
+                      <a:round/>
+                      <a:headEnd type="none" w="med" len="med"/>
+                      <a:tailEnd type="none" w="med" len="med"/>
+                    </a:lnR>
+                    <a:lnT w="12700" cap="flat" cmpd="sng" algn="ctr">
+                      <a:solidFill>
+                        <a:srgbClr val="2A3441"/>
+                      </a:solidFill>
+                      <a:prstDash val="solid"/>
+                      <a:round/>
+                      <a:headEnd type="none" w="med" len="med"/>
+                      <a:tailEnd type="none" w="med" len="med"/>
+                    </a:lnT>
+                    <a:lnB w="12700" cap="flat" cmpd="sng" algn="ctr">
+                      <a:solidFill>
+                        <a:srgbClr val="2A3441"/>
+                      </a:solidFill>
+                      <a:prstDash val="solid"/>
+                      <a:round/>
+                      <a:headEnd type="none" w="med" len="med"/>
+                      <a:tailEnd type="none" w="med" len="med"/>
+                    </a:lnB>
+                    <a:solidFill>
+                      <a:srgbClr val="39FF88"/>
+                    </a:solidFill>
+                  </a:tcPr>
+                </a:tc>
+                <a:tc>
+                  <a:txBody>
+                    <a:bodyPr/>
+                    <a:lstStyle/>
+                    <a:p>
+                      <a:pPr indent="0" marL="0">
+                        <a:buNone/>
+                      </a:pPr>
+                      <a:r>
+                        <a:rPr lang="en-US" sz="1300" b="1" dirty="0">
+                          <a:solidFill>
+                            <a:srgbClr val="0B0F14"/>
+                          </a:solidFill>
+                          <a:latin typeface="Courier New" pitchFamily="34" charset="0"/>
+                          <a:ea typeface="Courier New" pitchFamily="34" charset="-122"/>
+                          <a:cs typeface="Courier New" pitchFamily="34" charset="-120"/>
+                        </a:rPr>
+                        <a:t>AIMD tuned</a:t>
+                      </a:r>
+                      <a:endParaRPr lang="en-US" sz="1300" dirty="0">
+                        <a:latin typeface="Courier New" charset="0"/>
+                        <a:ea typeface="Courier New" charset="0"/>
+                        <a:cs typeface="Courier New" charset="0"/>
+                      </a:endParaRPr>
+                    </a:p>
+                  </a:txBody>
+                  <a:tcPr marL="91440" marR="91440" marT="45720" marB="45720">
+                    <a:lnL w="12700" cap="flat" cmpd="sng" algn="ctr">
+                      <a:solidFill>
+                        <a:srgbClr val="2A3441"/>
+                      </a:solidFill>
+                      <a:prstDash val="solid"/>
+                      <a:round/>
+                      <a:headEnd type="none" w="med" len="med"/>
+                      <a:tailEnd type="none" w="med" len="med"/>
+                    </a:lnL>
+                    <a:lnR w="12700" cap="flat" cmpd="sng" algn="ctr">
+                      <a:solidFill>
+                        <a:srgbClr val="2A3441"/>
+                      </a:solidFill>
+                      <a:prstDash val="solid"/>
+                      <a:round/>
+                      <a:headEnd type="none" w="med" len="med"/>
+                      <a:tailEnd type="none" w="med" len="med"/>
+                    </a:lnR>
+                    <a:lnT w="12700" cap="flat" cmpd="sng" algn="ctr">
+                      <a:solidFill>
+                        <a:srgbClr val="2A3441"/>
+                      </a:solidFill>
+                      <a:prstDash val="solid"/>
+                      <a:round/>
+                      <a:headEnd type="none" w="med" len="med"/>
+                      <a:tailEnd type="none" w="med" len="med"/>
+                    </a:lnT>
+                    <a:lnB w="12700" cap="flat" cmpd="sng" algn="ctr">
+                      <a:solidFill>
+                        <a:srgbClr val="2A3441"/>
+                      </a:solidFill>
+                      <a:prstDash val="solid"/>
+                      <a:round/>
+                      <a:headEnd type="none" w="med" len="med"/>
+                      <a:tailEnd type="none" w="med" len="med"/>
+                    </a:lnB>
+                    <a:solidFill>
+                      <a:srgbClr val="39FF88"/>
+                    </a:solidFill>
+                  </a:tcPr>
+                </a:tc>
+                <a:tc>
+                  <a:txBody>
+                    <a:bodyPr/>
+                    <a:lstStyle/>
+                    <a:p>
+                      <a:pPr indent="0" marL="0">
+                        <a:buNone/>
+                      </a:pPr>
+                      <a:r>
+                        <a:rPr lang="en-US" sz="1300" b="1" dirty="0">
+                          <a:solidFill>
+                            <a:srgbClr val="0B0F14"/>
+                          </a:solidFill>
+                          <a:latin typeface="Courier New" pitchFamily="34" charset="0"/>
+                          <a:ea typeface="Courier New" pitchFamily="34" charset="-122"/>
+                          <a:cs typeface="Courier New" pitchFamily="34" charset="-120"/>
+                        </a:rPr>
+                        <a:t>Neural</a:t>
+                      </a:r>
+                      <a:endParaRPr lang="en-US" sz="1300" dirty="0">
+                        <a:latin typeface="Courier New" charset="0"/>
+                        <a:ea typeface="Courier New" charset="0"/>
+                        <a:cs typeface="Courier New" charset="0"/>
+                      </a:endParaRPr>
+                    </a:p>
+                  </a:txBody>
+                  <a:tcPr marL="91440" marR="91440" marT="45720" marB="45720">
+                    <a:lnL w="12700" cap="flat" cmpd="sng" algn="ctr">
+                      <a:solidFill>
+                        <a:srgbClr val="2A3441"/>
+                      </a:solidFill>
+                      <a:prstDash val="solid"/>
+                      <a:round/>
+                      <a:headEnd type="none" w="med" len="med"/>
+                      <a:tailEnd type="none" w="med" len="med"/>
+                    </a:lnL>
+                    <a:lnR w="12700" cap="flat" cmpd="sng" algn="ctr">
+                      <a:solidFill>
+                        <a:srgbClr val="2A3441"/>
+                      </a:solidFill>
+                      <a:prstDash val="solid"/>
+                      <a:round/>
+                      <a:headEnd type="none" w="med" len="med"/>
+                      <a:tailEnd type="none" w="med" len="med"/>
+                    </a:lnR>
+                    <a:lnT w="12700" cap="flat" cmpd="sng" algn="ctr">
+                      <a:solidFill>
+                        <a:srgbClr val="2A3441"/>
+                      </a:solidFill>
+                      <a:prstDash val="solid"/>
+                      <a:round/>
+                      <a:headEnd type="none" w="med" len="med"/>
+                      <a:tailEnd type="none" w="med" len="med"/>
+                    </a:lnT>
+                    <a:lnB w="12700" cap="flat" cmpd="sng" algn="ctr">
+                      <a:solidFill>
+                        <a:srgbClr val="2A3441"/>
+                      </a:solidFill>
+                      <a:prstDash val="solid"/>
+                      <a:round/>
+                      <a:headEnd type="none" w="med" len="med"/>
+                      <a:tailEnd type="none" w="med" len="med"/>
+                    </a:lnB>
+                    <a:solidFill>
+                      <a:srgbClr val="39FF88"/>
+                    </a:solidFill>
+                  </a:tcPr>
+                </a:tc>
+              </a:tr>
+              <a:tr h="402336">
+                <a:tc>
+                  <a:txBody>
+                    <a:bodyPr/>
+                    <a:lstStyle/>
+                    <a:p>
+                      <a:pPr indent="0" marL="0">
+                        <a:buNone/>
+                      </a:pPr>
+                      <a:r>
+                        <a:rPr lang="en-US" sz="1300" dirty="0">
+                          <a:solidFill>
+                            <a:srgbClr val="E6EDF3"/>
+                          </a:solidFill>
+                          <a:latin typeface="Calibri" pitchFamily="34" charset="0"/>
+                          <a:ea typeface="Calibri" pitchFamily="34" charset="-122"/>
+                          <a:cs typeface="Calibri" pitchFamily="34" charset="-120"/>
+                        </a:rPr>
+                        <a:t>2 MB, lossy 2%</a:t>
+                      </a:r>
+                      <a:endParaRPr lang="en-US" sz="1300" dirty="0">
+                        <a:latin typeface="Calibri" charset="0"/>
+                        <a:ea typeface="Calibri" charset="0"/>
+                        <a:cs typeface="Calibri" charset="0"/>
+                      </a:endParaRPr>
+                    </a:p>
+                  </a:txBody>
+                  <a:tcPr marL="91440" marR="91440" marT="45720" marB="45720">
+                    <a:lnL w="12700" cap="flat" cmpd="sng" algn="ctr">
+                      <a:solidFill>
+                        <a:srgbClr val="2A3441"/>
+                      </a:solidFill>
+                      <a:prstDash val="solid"/>
+                      <a:round/>
+                      <a:headEnd type="none" w="med" len="med"/>
+                      <a:tailEnd type="none" w="med" len="med"/>
+                    </a:lnL>
+                    <a:lnR w="12700" cap="flat" cmpd="sng" algn="ctr">
+                      <a:solidFill>
+                        <a:srgbClr val="2A3441"/>
+                      </a:solidFill>
+                      <a:prstDash val="solid"/>
+                      <a:round/>
+                      <a:headEnd type="none" w="med" len="med"/>
+                      <a:tailEnd type="none" w="med" len="med"/>
+                    </a:lnR>
+                    <a:lnT w="12700" cap="flat" cmpd="sng" algn="ctr">
+                      <a:solidFill>
+                        <a:srgbClr val="2A3441"/>
+                      </a:solidFill>
+                      <a:prstDash val="solid"/>
+                      <a:round/>
+                      <a:headEnd type="none" w="med" len="med"/>
+                      <a:tailEnd type="none" w="med" len="med"/>
+                    </a:lnT>
+                    <a:lnB w="12700" cap="flat" cmpd="sng" algn="ctr">
+                      <a:solidFill>
+                        <a:srgbClr val="2A3441"/>
+                      </a:solidFill>
+                      <a:prstDash val="solid"/>
+                      <a:round/>
+                      <a:headEnd type="none" w="med" len="med"/>
+                      <a:tailEnd type="none" w="med" len="med"/>
+                    </a:lnB>
+                    <a:solidFill>
+                      <a:srgbClr val="141B24"/>
+                    </a:solidFill>
+                  </a:tcPr>
+                </a:tc>
+                <a:tc>
+                  <a:txBody>
+                    <a:bodyPr/>
+                    <a:lstStyle/>
+                    <a:p>
+                      <a:pPr indent="0" marL="0">
+                        <a:buNone/>
+                      </a:pPr>
+                      <a:r>
+                        <a:rPr lang="en-US" sz="1300" dirty="0">
+                          <a:solidFill>
+                            <a:srgbClr val="E6EDF3"/>
+                          </a:solidFill>
+                          <a:latin typeface="Calibri" pitchFamily="34" charset="0"/>
+                          <a:ea typeface="Calibri" pitchFamily="34" charset="-122"/>
+                          <a:cs typeface="Calibri" pitchFamily="34" charset="-120"/>
+                        </a:rPr>
+                        <a:t>26.6 s</a:t>
+                      </a:r>
+                      <a:endParaRPr lang="en-US" sz="1300" dirty="0">
+                        <a:latin typeface="Calibri" charset="0"/>
+                        <a:ea typeface="Calibri" charset="0"/>
+                        <a:cs typeface="Calibri" charset="0"/>
+                      </a:endParaRPr>
+                    </a:p>
+                  </a:txBody>
+                  <a:tcPr marL="91440" marR="91440" marT="45720" marB="45720">
+                    <a:lnL w="12700" cap="flat" cmpd="sng" algn="ctr">
+                      <a:solidFill>
+                        <a:srgbClr val="2A3441"/>
+                      </a:solidFill>
+                      <a:prstDash val="solid"/>
+                      <a:round/>
+                      <a:headEnd type="none" w="med" len="med"/>
+                      <a:tailEnd type="none" w="med" len="med"/>
+                    </a:lnL>
+                    <a:lnR w="12700" cap="flat" cmpd="sng" algn="ctr">
+                      <a:solidFill>
+                        <a:srgbClr val="2A3441"/>
+                      </a:solidFill>
+                      <a:prstDash val="solid"/>
+                      <a:round/>
+                      <a:headEnd type="none" w="med" len="med"/>
+                      <a:tailEnd type="none" w="med" len="med"/>
+                    </a:lnR>
+                    <a:lnT w="12700" cap="flat" cmpd="sng" algn="ctr">
+                      <a:solidFill>
+                        <a:srgbClr val="2A3441"/>
+                      </a:solidFill>
+                      <a:prstDash val="solid"/>
+                      <a:round/>
+                      <a:headEnd type="none" w="med" len="med"/>
+                      <a:tailEnd type="none" w="med" len="med"/>
+                    </a:lnT>
+                    <a:lnB w="12700" cap="flat" cmpd="sng" algn="ctr">
+                      <a:solidFill>
+                        <a:srgbClr val="2A3441"/>
+                      </a:solidFill>
+                      <a:prstDash val="solid"/>
+                      <a:round/>
+                      <a:headEnd type="none" w="med" len="med"/>
+                      <a:tailEnd type="none" w="med" len="med"/>
+                    </a:lnB>
+                    <a:solidFill>
+                      <a:srgbClr val="141B24"/>
+                    </a:solidFill>
+                  </a:tcPr>
+                </a:tc>
+                <a:tc>
+                  <a:txBody>
+                    <a:bodyPr/>
+                    <a:lstStyle/>
+                    <a:p>
+                      <a:pPr indent="0" marL="0">
+                        <a:buNone/>
+                      </a:pPr>
+                      <a:r>
+                        <a:rPr lang="en-US" sz="1300" dirty="0">
+                          <a:solidFill>
+                            <a:srgbClr val="E6EDF3"/>
+                          </a:solidFill>
+                          <a:latin typeface="Calibri" pitchFamily="34" charset="0"/>
+                          <a:ea typeface="Calibri" pitchFamily="34" charset="-122"/>
+                          <a:cs typeface="Calibri" pitchFamily="34" charset="-120"/>
+                        </a:rPr>
+                        <a:t>24.2 s</a:t>
+                      </a:r>
+                      <a:endParaRPr lang="en-US" sz="1300" dirty="0">
+                        <a:latin typeface="Calibri" charset="0"/>
+                        <a:ea typeface="Calibri" charset="0"/>
+                        <a:cs typeface="Calibri" charset="0"/>
+                      </a:endParaRPr>
+                    </a:p>
+                  </a:txBody>
+                  <a:tcPr marL="91440" marR="91440" marT="45720" marB="45720">
+                    <a:lnL w="12700" cap="flat" cmpd="sng" algn="ctr">
+                      <a:solidFill>
+                        <a:srgbClr val="2A3441"/>
+                      </a:solidFill>
+                      <a:prstDash val="solid"/>
+                      <a:round/>
+                      <a:headEnd type="none" w="med" len="med"/>
+                      <a:tailEnd type="none" w="med" len="med"/>
+                    </a:lnL>
+                    <a:lnR w="12700" cap="flat" cmpd="sng" algn="ctr">
+                      <a:solidFill>
+                        <a:srgbClr val="2A3441"/>
+                      </a:solidFill>
+                      <a:prstDash val="solid"/>
+                      <a:round/>
+                      <a:headEnd type="none" w="med" len="med"/>
+                      <a:tailEnd type="none" w="med" len="med"/>
+                    </a:lnR>
+                    <a:lnT w="12700" cap="flat" cmpd="sng" algn="ctr">
+                      <a:solidFill>
+                        <a:srgbClr val="2A3441"/>
+                      </a:solidFill>
+                      <a:prstDash val="solid"/>
+                      <a:round/>
+                      <a:headEnd type="none" w="med" len="med"/>
+                      <a:tailEnd type="none" w="med" len="med"/>
+                    </a:lnT>
+                    <a:lnB w="12700" cap="flat" cmpd="sng" algn="ctr">
+                      <a:solidFill>
+                        <a:srgbClr val="2A3441"/>
+                      </a:solidFill>
+                      <a:prstDash val="solid"/>
+                      <a:round/>
+                      <a:headEnd type="none" w="med" len="med"/>
+                      <a:tailEnd type="none" w="med" len="med"/>
+                    </a:lnB>
+                    <a:solidFill>
+                      <a:srgbClr val="141B24"/>
+                    </a:solidFill>
+                  </a:tcPr>
+                </a:tc>
+                <a:tc>
+                  <a:txBody>
+                    <a:bodyPr/>
+                    <a:lstStyle/>
+                    <a:p>
+                      <a:pPr indent="0" marL="0">
+                        <a:buNone/>
+                      </a:pPr>
+                      <a:r>
+                        <a:rPr lang="en-US" sz="1300" dirty="0">
+                          <a:solidFill>
+                            <a:srgbClr val="E6EDF3"/>
+                          </a:solidFill>
+                          <a:latin typeface="Calibri" pitchFamily="34" charset="0"/>
+                          <a:ea typeface="Calibri" pitchFamily="34" charset="-122"/>
+                          <a:cs typeface="Calibri" pitchFamily="34" charset="-120"/>
+                        </a:rPr>
+                        <a:t>11.9 s</a:t>
+                      </a:r>
+                      <a:endParaRPr lang="en-US" sz="1300" dirty="0">
+                        <a:latin typeface="Calibri" charset="0"/>
+                        <a:ea typeface="Calibri" charset="0"/>
+                        <a:cs typeface="Calibri" charset="0"/>
+                      </a:endParaRPr>
+                    </a:p>
+                  </a:txBody>
+                  <a:tcPr marL="91440" marR="91440" marT="45720" marB="45720">
+                    <a:lnL w="12700" cap="flat" cmpd="sng" algn="ctr">
+                      <a:solidFill>
+                        <a:srgbClr val="2A3441"/>
+                      </a:solidFill>
+                      <a:prstDash val="solid"/>
+                      <a:round/>
+                      <a:headEnd type="none" w="med" len="med"/>
+                      <a:tailEnd type="none" w="med" len="med"/>
+                    </a:lnL>
+                    <a:lnR w="12700" cap="flat" cmpd="sng" algn="ctr">
+                      <a:solidFill>
+                        <a:srgbClr val="2A3441"/>
+                      </a:solidFill>
+                      <a:prstDash val="solid"/>
+                      <a:round/>
+                      <a:headEnd type="none" w="med" len="med"/>
+                      <a:tailEnd type="none" w="med" len="med"/>
+                    </a:lnR>
+                    <a:lnT w="12700" cap="flat" cmpd="sng" algn="ctr">
+                      <a:solidFill>
+                        <a:srgbClr val="2A3441"/>
+                      </a:solidFill>
+                      <a:prstDash val="solid"/>
+                      <a:round/>
+                      <a:headEnd type="none" w="med" len="med"/>
+                      <a:tailEnd type="none" w="med" len="med"/>
+                    </a:lnT>
+                    <a:lnB w="12700" cap="flat" cmpd="sng" algn="ctr">
+                      <a:solidFill>
+                        <a:srgbClr val="2A3441"/>
+                      </a:solidFill>
+                      <a:prstDash val="solid"/>
+                      <a:round/>
+                      <a:headEnd type="none" w="med" len="med"/>
+                      <a:tailEnd type="none" w="med" len="med"/>
+                    </a:lnB>
+                    <a:solidFill>
+                      <a:srgbClr val="141B24"/>
+                    </a:solidFill>
+                  </a:tcPr>
+                </a:tc>
+              </a:tr>
+              <a:tr h="402336">
+                <a:tc>
+                  <a:txBody>
+                    <a:bodyPr/>
+                    <a:lstStyle/>
+                    <a:p>
+                      <a:pPr indent="0" marL="0">
+                        <a:buNone/>
+                      </a:pPr>
+                      <a:r>
+                        <a:rPr lang="en-US" sz="1300" dirty="0">
+                          <a:solidFill>
+                            <a:srgbClr val="E6EDF3"/>
+                          </a:solidFill>
+                          <a:latin typeface="Calibri" pitchFamily="34" charset="0"/>
+                          <a:ea typeface="Calibri" pitchFamily="34" charset="-122"/>
+                          <a:cs typeface="Calibri" pitchFamily="34" charset="-120"/>
+                        </a:rPr>
+                        <a:t>4 MB, fast path</a:t>
+                      </a:r>
+                      <a:endParaRPr lang="en-US" sz="1300" dirty="0">
+                        <a:latin typeface="Calibri" charset="0"/>
+                        <a:ea typeface="Calibri" charset="0"/>
+                        <a:cs typeface="Calibri" charset="0"/>
+                      </a:endParaRPr>
+                    </a:p>
+                  </a:txBody>
+                  <a:tcPr marL="91440" marR="91440" marT="45720" marB="45720">
+                    <a:lnL w="12700" cap="flat" cmpd="sng" algn="ctr">
+                      <a:solidFill>
+                        <a:srgbClr val="2A3441"/>
+                      </a:solidFill>
+                      <a:prstDash val="solid"/>
+                      <a:round/>
+                      <a:headEnd type="none" w="med" len="med"/>
+                      <a:tailEnd type="none" w="med" len="med"/>
+                    </a:lnL>
+                    <a:lnR w="12700" cap="flat" cmpd="sng" algn="ctr">
+                      <a:solidFill>
+                        <a:srgbClr val="2A3441"/>
+                      </a:solidFill>
+                      <a:prstDash val="solid"/>
+                      <a:round/>
+                      <a:headEnd type="none" w="med" len="med"/>
+                      <a:tailEnd type="none" w="med" len="med"/>
+                    </a:lnR>
+                    <a:lnT w="12700" cap="flat" cmpd="sng" algn="ctr">
+                      <a:solidFill>
+                        <a:srgbClr val="2A3441"/>
+                      </a:solidFill>
+                      <a:prstDash val="solid"/>
+                      <a:round/>
+                      <a:headEnd type="none" w="med" len="med"/>
+                      <a:tailEnd type="none" w="med" len="med"/>
+                    </a:lnT>
+                    <a:lnB w="12700" cap="flat" cmpd="sng" algn="ctr">
+                      <a:solidFill>
+                        <a:srgbClr val="2A3441"/>
+                      </a:solidFill>
+                      <a:prstDash val="solid"/>
+                      <a:round/>
+                      <a:headEnd type="none" w="med" len="med"/>
+                      <a:tailEnd type="none" w="med" len="med"/>
+                    </a:lnB>
+                    <a:solidFill>
+                      <a:srgbClr val="141B24"/>
+                    </a:solidFill>
+                  </a:tcPr>
+                </a:tc>
+                <a:tc>
+                  <a:txBody>
+                    <a:bodyPr/>
+                    <a:lstStyle/>
+                    <a:p>
+                      <a:pPr indent="0" marL="0">
+                        <a:buNone/>
+                      </a:pPr>
+                      <a:r>
+                        <a:rPr lang="en-US" sz="1300" dirty="0">
+                          <a:solidFill>
+                            <a:srgbClr val="E6EDF3"/>
+                          </a:solidFill>
+                          <a:latin typeface="Calibri" pitchFamily="34" charset="0"/>
+                          <a:ea typeface="Calibri" pitchFamily="34" charset="-122"/>
+                          <a:cs typeface="Calibri" pitchFamily="34" charset="-120"/>
+                        </a:rPr>
+                        <a:t>34.6 s</a:t>
+                      </a:r>
+                      <a:endParaRPr lang="en-US" sz="1300" dirty="0">
+                        <a:latin typeface="Calibri" charset="0"/>
+                        <a:ea typeface="Calibri" charset="0"/>
+                        <a:cs typeface="Calibri" charset="0"/>
+                      </a:endParaRPr>
+                    </a:p>
+                  </a:txBody>
+                  <a:tcPr marL="91440" marR="91440" marT="45720" marB="45720">
+                    <a:lnL w="12700" cap="flat" cmpd="sng" algn="ctr">
+                      <a:solidFill>
+                        <a:srgbClr val="2A3441"/>
+                      </a:solidFill>
+                      <a:prstDash val="solid"/>
+                      <a:round/>
+                      <a:headEnd type="none" w="med" len="med"/>
+                      <a:tailEnd type="none" w="med" len="med"/>
+                    </a:lnL>
+                    <a:lnR w="12700" cap="flat" cmpd="sng" algn="ctr">
+                      <a:solidFill>
+                        <a:srgbClr val="2A3441"/>
+                      </a:solidFill>
+                      <a:prstDash val="solid"/>
+                      <a:round/>
+                      <a:headEnd type="none" w="med" len="med"/>
+                      <a:tailEnd type="none" w="med" len="med"/>
+                    </a:lnR>
+                    <a:lnT w="12700" cap="flat" cmpd="sng" algn="ctr">
+                      <a:solidFill>
+                        <a:srgbClr val="2A3441"/>
+                      </a:solidFill>
+                      <a:prstDash val="solid"/>
+                      <a:round/>
+                      <a:headEnd type="none" w="med" len="med"/>
+                      <a:tailEnd type="none" w="med" len="med"/>
+                    </a:lnT>
+                    <a:lnB w="12700" cap="flat" cmpd="sng" algn="ctr">
+                      <a:solidFill>
+                        <a:srgbClr val="2A3441"/>
+                      </a:solidFill>
+                      <a:prstDash val="solid"/>
+                      <a:round/>
+                      <a:headEnd type="none" w="med" len="med"/>
+                      <a:tailEnd type="none" w="med" len="med"/>
+                    </a:lnB>
+                    <a:solidFill>
+                      <a:srgbClr val="141B24"/>
+                    </a:solidFill>
+                  </a:tcPr>
+                </a:tc>
+                <a:tc>
+                  <a:txBody>
+                    <a:bodyPr/>
+                    <a:lstStyle/>
+                    <a:p>
+                      <a:pPr indent="0" marL="0">
+                        <a:buNone/>
+                      </a:pPr>
+                      <a:r>
+                        <a:rPr lang="en-US" sz="1300" dirty="0">
+                          <a:solidFill>
+                            <a:srgbClr val="E6EDF3"/>
+                          </a:solidFill>
+                          <a:latin typeface="Calibri" pitchFamily="34" charset="0"/>
+                          <a:ea typeface="Calibri" pitchFamily="34" charset="-122"/>
+                          <a:cs typeface="Calibri" pitchFamily="34" charset="-120"/>
+                        </a:rPr>
+                        <a:t>21.0 s</a:t>
+                      </a:r>
+                      <a:endParaRPr lang="en-US" sz="1300" dirty="0">
+                        <a:latin typeface="Calibri" charset="0"/>
+                        <a:ea typeface="Calibri" charset="0"/>
+                        <a:cs typeface="Calibri" charset="0"/>
+                      </a:endParaRPr>
+                    </a:p>
+                  </a:txBody>
+                  <a:tcPr marL="91440" marR="91440" marT="45720" marB="45720">
+                    <a:lnL w="12700" cap="flat" cmpd="sng" algn="ctr">
+                      <a:solidFill>
+                        <a:srgbClr val="2A3441"/>
+                      </a:solidFill>
+                      <a:prstDash val="solid"/>
+                      <a:round/>
+                      <a:headEnd type="none" w="med" len="med"/>
+                      <a:tailEnd type="none" w="med" len="med"/>
+                    </a:lnL>
+                    <a:lnR w="12700" cap="flat" cmpd="sng" algn="ctr">
+                      <a:solidFill>
+                        <a:srgbClr val="2A3441"/>
+                      </a:solidFill>
+                      <a:prstDash val="solid"/>
+                      <a:round/>
+                      <a:headEnd type="none" w="med" len="med"/>
+                      <a:tailEnd type="none" w="med" len="med"/>
+                    </a:lnR>
+                    <a:lnT w="12700" cap="flat" cmpd="sng" algn="ctr">
+                      <a:solidFill>
+                        <a:srgbClr val="2A3441"/>
+                      </a:solidFill>
+                      <a:prstDash val="solid"/>
+                      <a:round/>
+                      <a:headEnd type="none" w="med" len="med"/>
+                      <a:tailEnd type="none" w="med" len="med"/>
+                    </a:lnT>
+                    <a:lnB w="12700" cap="flat" cmpd="sng" algn="ctr">
+                      <a:solidFill>
+                        <a:srgbClr val="2A3441"/>
+                      </a:solidFill>
+                      <a:prstDash val="solid"/>
+                      <a:round/>
+                      <a:headEnd type="none" w="med" len="med"/>
+                      <a:tailEnd type="none" w="med" len="med"/>
+                    </a:lnB>
+                    <a:solidFill>
+                      <a:srgbClr val="141B24"/>
+                    </a:solidFill>
+                  </a:tcPr>
+                </a:tc>
+                <a:tc>
+                  <a:txBody>
+                    <a:bodyPr/>
+                    <a:lstStyle/>
+                    <a:p>
+                      <a:pPr indent="0" marL="0">
+                        <a:buNone/>
+                      </a:pPr>
+                      <a:r>
+                        <a:rPr lang="en-US" sz="1300" dirty="0">
+                          <a:solidFill>
+                            <a:srgbClr val="E6EDF3"/>
+                          </a:solidFill>
+                          <a:latin typeface="Calibri" pitchFamily="34" charset="0"/>
+                          <a:ea typeface="Calibri" pitchFamily="34" charset="-122"/>
+                          <a:cs typeface="Calibri" pitchFamily="34" charset="-120"/>
+                        </a:rPr>
+                        <a:t>8.9 s</a:t>
+                      </a:r>
+                      <a:endParaRPr lang="en-US" sz="1300" dirty="0">
+                        <a:latin typeface="Calibri" charset="0"/>
+                        <a:ea typeface="Calibri" charset="0"/>
+                        <a:cs typeface="Calibri" charset="0"/>
+                      </a:endParaRPr>
+                    </a:p>
+                  </a:txBody>
+                  <a:tcPr marL="91440" marR="91440" marT="45720" marB="45720">
+                    <a:lnL w="12700" cap="flat" cmpd="sng" algn="ctr">
+                      <a:solidFill>
+                        <a:srgbClr val="2A3441"/>
+                      </a:solidFill>
+                      <a:prstDash val="solid"/>
+                      <a:round/>
+                      <a:headEnd type="none" w="med" len="med"/>
+                      <a:tailEnd type="none" w="med" len="med"/>
+                    </a:lnL>
+                    <a:lnR w="12700" cap="flat" cmpd="sng" algn="ctr">
+                      <a:solidFill>
+                        <a:srgbClr val="2A3441"/>
+                      </a:solidFill>
+                      <a:prstDash val="solid"/>
+                      <a:round/>
+                      <a:headEnd type="none" w="med" len="med"/>
+                      <a:tailEnd type="none" w="med" len="med"/>
+                    </a:lnR>
+                    <a:lnT w="12700" cap="flat" cmpd="sng" algn="ctr">
+                      <a:solidFill>
+                        <a:srgbClr val="2A3441"/>
+                      </a:solidFill>
+                      <a:prstDash val="solid"/>
+                      <a:round/>
+                      <a:headEnd type="none" w="med" len="med"/>
+                      <a:tailEnd type="none" w="med" len="med"/>
+                    </a:lnT>
+                    <a:lnB w="12700" cap="flat" cmpd="sng" algn="ctr">
+                      <a:solidFill>
+                        <a:srgbClr val="2A3441"/>
+                      </a:solidFill>
+                      <a:prstDash val="solid"/>
+                      <a:round/>
+                      <a:headEnd type="none" w="med" len="med"/>
+                      <a:tailEnd type="none" w="med" len="med"/>
+                    </a:lnB>
+                    <a:solidFill>
+                      <a:srgbClr val="141B24"/>
+                    </a:solidFill>
+                  </a:tcPr>
+                </a:tc>
+              </a:tr>
+            </a:tbl>
+          </a:graphicData>
+        </a:graphic>
+      </p:graphicFrame>
+      <p:sp>
+        <p:nvSpPr>
+          <p:cNvPr id="6" name="Text 2"/>
+          <p:cNvSpPr/>
           <p:nvPr/>
-        </p:nvPicPr>
-        <p:blipFill>
-          <a:blip r:embed="rId1"/>
-          <a:stretch>
-            <a:fillRect/>
-          </a:stretch>
-        </p:blipFill>
+        </p:nvSpPr>
         <p:spPr>
           <a:xfrm>
-            <a:off x="731520" y="1188720"/>
-            <a:ext cx="7498080" cy="3998976"/>
-          </a:xfrm>
-          <a:prstGeom prst="rect">
-            <a:avLst/>
-          </a:prstGeom>
-        </p:spPr>
-      </p:pic>
-      <p:sp>
-        <p:nvSpPr>
-          <p:cNvPr id="5" name="Text 2"/>
-          <p:cNvSpPr/>
-          <p:nvPr/>
-        </p:nvSpPr>
-        <p:spPr>
-          <a:xfrm>
-            <a:off x="8503920" y="1463040"/>
-            <a:ext cx="3200400" cy="3200400"/>
+            <a:off x="6400800" y="1188720"/>
+            <a:ext cx="5303520" cy="4937760"/>
           </a:xfrm>
           <a:prstGeom prst="rect">
             <a:avLst/>
@@ -18770,7 +22350,7 @@
               <a:buChar char="•"/>
             </a:pPr>
             <a:r>
-              <a:rPr lang="en-US" sz="1700" dirty="0">
+              <a:rPr lang="en-US" sz="1400" dirty="0">
                 <a:solidFill>
                   <a:srgbClr val="E6EDF3"/>
                 </a:solidFill>
@@ -18778,9 +22358,9 @@
                 <a:ea typeface="Calibri" pitchFamily="34" charset="-122"/>
                 <a:cs typeface="Calibri" pitchFamily="34" charset="-120"/>
               </a:rPr>
-              <a:t>cwnd starts at 1</a:t>
-            </a:r>
-            <a:endParaRPr lang="en-US" sz="1700" dirty="0"/>
+              <a:t>The agent is a more aggressive neighbour than AIMD or CUBIC: no starvation, but not polite. Not trained for fairness; TCP coexistence untested</a:t>
+            </a:r>
+            <a:endParaRPr lang="en-US" sz="1400" dirty="0"/>
           </a:p>
           <a:p>
             <a:pPr marL="342900" indent="-342900">
@@ -18791,7 +22371,7 @@
               <a:buChar char="•"/>
             </a:pPr>
             <a:r>
-              <a:rPr lang="en-US" sz="1700" dirty="0">
+              <a:rPr lang="en-US" sz="1400" dirty="0">
                 <a:solidFill>
                   <a:srgbClr val="E6EDF3"/>
                 </a:solidFill>
@@ -18799,9 +22379,9 @@
                 <a:ea typeface="Calibri" pitchFamily="34" charset="-122"/>
                 <a:cs typeface="Calibri" pitchFamily="34" charset="-120"/>
               </a:rPr>
-              <a:t>+1 per ACK until ssthresh = 16</a:t>
-            </a:r>
-            <a:endParaRPr lang="en-US" sz="1700" dirty="0"/>
+              <a:t>smart_client --file sends a real file; the received file is byte-identical in every run (FNV-1a hash)</a:t>
+            </a:r>
+            <a:endParaRPr lang="en-US" sz="1400" dirty="0"/>
           </a:p>
           <a:p>
             <a:pPr marL="342900" indent="-342900">
@@ -18812,7 +22392,7 @@
               <a:buChar char="•"/>
             </a:pPr>
             <a:r>
-              <a:rPr lang="en-US" sz="1700" dirty="0">
+              <a:rPr lang="en-US" sz="1400" dirty="0">
                 <a:solidFill>
                   <a:srgbClr val="E6EDF3"/>
                 </a:solidFill>
@@ -18820,9 +22400,9 @@
                 <a:ea typeface="Calibri" pitchFamily="34" charset="-122"/>
                 <a:cs typeface="Calibri" pitchFamily="34" charset="-120"/>
               </a:rPr>
-              <a:t>Then +1/cwnd per ACK</a:t>
-            </a:r>
-            <a:endParaRPr lang="en-US" sz="1700" dirty="0"/>
+              <a:t>Terminal chat and web gateway now use the same 256-packet window and 32-byte bitmap as the C transport; interop test at 20% loss</a:t>
+            </a:r>
+            <a:endParaRPr lang="en-US" sz="1400" dirty="0"/>
           </a:p>
           <a:p>
             <a:pPr marL="342900" indent="-342900">
@@ -18833,7 +22413,7 @@
               <a:buChar char="•"/>
             </a:pPr>
             <a:r>
-              <a:rPr lang="en-US" sz="1700" dirty="0">
+              <a:rPr lang="en-US" sz="1400" dirty="0">
                 <a:solidFill>
                   <a:srgbClr val="E6EDF3"/>
                 </a:solidFill>
@@ -18841,9 +22421,9 @@
                 <a:ea typeface="Calibri" pitchFamily="34" charset="-122"/>
                 <a:cs typeface="Calibri" pitchFamily="34" charset="-120"/>
               </a:rPr>
-              <a:t>62 packets, final cwnd 18.71</a:t>
-            </a:r>
-            <a:endParaRPr lang="en-US" sz="1700" dirty="0"/>
+              <a:t>CI, fuzzing, MIT licence, architecture doc</a:t>
+            </a:r>
+            <a:endParaRPr lang="en-US" sz="1400" dirty="0"/>
           </a:p>
         </p:txBody>
       </p:sp>
@@ -18951,7 +22531,7 @@
                 <a:ea typeface="Courier New" pitchFamily="34" charset="-122"/>
                 <a:cs typeface="Courier New" pitchFamily="34" charset="-120"/>
               </a:rPr>
-              <a:t>3 / 28   Smart-RUDP</a:t>
+              <a:t>3 / 32   Smart-RUDP</a:t>
             </a:r>
             <a:endParaRPr lang="en-US" sz="1000" dirty="0"/>
           </a:p>
@@ -19238,6 +22818,818 @@
               <a:t>Validated: protocol tests and Smart-RUDP vs AIMD on emulated paths; network design built and tested in Packet Tracer; traffic analysed in Wireshark.</a:t>
             </a:r>
             <a:endParaRPr lang="en-US" sz="1600" dirty="0"/>
+          </a:p>
+        </p:txBody>
+      </p:sp>
+    </p:spTree>
+  </p:cSld>
+  <p:clrMapOvr>
+    <a:masterClrMapping/>
+  </p:clrMapOvr>
+</p:sld>
+</file>
+
+<file path=ppt/slides/slide30.xml><?xml version="1.0" encoding="utf-8"?>
+<p:sld xmlns:a="http://schemas.openxmlformats.org/drawingml/2006/main" xmlns:r="http://schemas.openxmlformats.org/officeDocument/2006/relationships" xmlns:p="http://schemas.openxmlformats.org/presentationml/2006/main">
+  <p:cSld name="Slide 30">
+    <p:bg>
+      <p:bgPr>
+        <a:solidFill>
+          <a:srgbClr val="0B0F14"/>
+        </a:solidFill>
+      </p:bgPr>
+    </p:bg>
+    <p:spTree>
+      <p:nvGrpSpPr>
+        <p:cNvPr id="1" name=""/>
+        <p:cNvGrpSpPr/>
+        <p:nvPr/>
+      </p:nvGrpSpPr>
+      <p:grpSpPr>
+        <a:xfrm>
+          <a:off x="0" y="0"/>
+          <a:ext cx="0" cy="0"/>
+          <a:chOff x="0" y="0"/>
+          <a:chExt cx="0" cy="0"/>
+        </a:xfrm>
+      </p:grpSpPr>
+      <p:sp>
+        <p:nvSpPr>
+          <p:cNvPr id="2" name="Text 0"/>
+          <p:cNvSpPr/>
+          <p:nvPr/>
+        </p:nvSpPr>
+        <p:spPr>
+          <a:xfrm>
+            <a:off x="548640" y="320040"/>
+            <a:ext cx="11064240" cy="731520"/>
+          </a:xfrm>
+          <a:prstGeom prst="rect">
+            <a:avLst/>
+          </a:prstGeom>
+          <a:noFill/>
+          <a:ln/>
+        </p:spPr>
+        <p:txBody>
+          <a:bodyPr wrap="square" lIns="0" tIns="0" rIns="0" bIns="0" rtlCol="0" anchor="ctr"/>
+          <a:lstStyle/>
+          <a:p>
+            <a:pPr indent="0" marL="0">
+              <a:buNone/>
+            </a:pPr>
+            <a:r>
+              <a:rPr lang="en-US" sz="3000" b="1" dirty="0">
+                <a:solidFill>
+                  <a:srgbClr val="39FF88"/>
+                </a:solidFill>
+                <a:latin typeface="Courier New" pitchFamily="34" charset="0"/>
+                <a:ea typeface="Courier New" pitchFamily="34" charset="-122"/>
+                <a:cs typeface="Courier New" pitchFamily="34" charset="-120"/>
+              </a:rPr>
+              <a:t>Learnings and future work</a:t>
+            </a:r>
+            <a:endParaRPr lang="en-US" sz="3000" dirty="0"/>
+          </a:p>
+        </p:txBody>
+      </p:sp>
+      <p:sp>
+        <p:nvSpPr>
+          <p:cNvPr id="3" name="Text 1"/>
+          <p:cNvSpPr/>
+          <p:nvPr/>
+        </p:nvSpPr>
+        <p:spPr>
+          <a:xfrm>
+            <a:off x="9418320" y="6446520"/>
+            <a:ext cx="2377440" cy="274320"/>
+          </a:xfrm>
+          <a:prstGeom prst="rect">
+            <a:avLst/>
+          </a:prstGeom>
+          <a:noFill/>
+          <a:ln/>
+        </p:spPr>
+        <p:txBody>
+          <a:bodyPr wrap="square" lIns="0" tIns="0" rIns="0" bIns="0" rtlCol="0" anchor="ctr"/>
+          <a:lstStyle/>
+          <a:p>
+            <a:pPr algn="r" indent="0" marL="0">
+              <a:buNone/>
+            </a:pPr>
+            <a:r>
+              <a:rPr lang="en-US" sz="1000" dirty="0">
+                <a:solidFill>
+                  <a:srgbClr val="8B98A5"/>
+                </a:solidFill>
+                <a:latin typeface="Courier New" pitchFamily="34" charset="0"/>
+                <a:ea typeface="Courier New" pitchFamily="34" charset="-122"/>
+                <a:cs typeface="Courier New" pitchFamily="34" charset="-120"/>
+              </a:rPr>
+              <a:t>30 / 32   Smart-RUDP</a:t>
+            </a:r>
+            <a:endParaRPr lang="en-US" sz="1000" dirty="0"/>
+          </a:p>
+        </p:txBody>
+      </p:sp>
+      <p:sp>
+        <p:nvSpPr>
+          <p:cNvPr id="4" name="Shape 2"/>
+          <p:cNvSpPr/>
+          <p:nvPr/>
+        </p:nvSpPr>
+        <p:spPr>
+          <a:xfrm>
+            <a:off x="548640" y="1371600"/>
+            <a:ext cx="5394960" cy="4206240"/>
+          </a:xfrm>
+          <a:prstGeom prst="rect">
+            <a:avLst/>
+          </a:prstGeom>
+          <a:solidFill>
+            <a:srgbClr val="141B24"/>
+          </a:solidFill>
+          <a:ln w="12700">
+            <a:solidFill>
+              <a:srgbClr val="39FF88"/>
+            </a:solidFill>
+            <a:prstDash val="solid"/>
+          </a:ln>
+        </p:spPr>
+      </p:sp>
+      <p:sp>
+        <p:nvSpPr>
+          <p:cNvPr id="5" name="Text 3"/>
+          <p:cNvSpPr/>
+          <p:nvPr/>
+        </p:nvSpPr>
+        <p:spPr>
+          <a:xfrm>
+            <a:off x="731520" y="1508760"/>
+            <a:ext cx="5029200" cy="457200"/>
+          </a:xfrm>
+          <a:prstGeom prst="rect">
+            <a:avLst/>
+          </a:prstGeom>
+          <a:noFill/>
+          <a:ln/>
+        </p:spPr>
+        <p:txBody>
+          <a:bodyPr wrap="square" lIns="0" tIns="0" rIns="0" bIns="0" rtlCol="0" anchor="ctr"/>
+          <a:lstStyle/>
+          <a:p>
+            <a:pPr indent="0" marL="0">
+              <a:buNone/>
+            </a:pPr>
+            <a:r>
+              <a:rPr lang="en-US" sz="2000" b="1" dirty="0">
+                <a:solidFill>
+                  <a:srgbClr val="39FF88"/>
+                </a:solidFill>
+                <a:latin typeface="Courier New" pitchFamily="34" charset="0"/>
+                <a:ea typeface="Courier New" pitchFamily="34" charset="-122"/>
+                <a:cs typeface="Courier New" pitchFamily="34" charset="-120"/>
+              </a:rPr>
+              <a:t>Learned</a:t>
+            </a:r>
+            <a:endParaRPr lang="en-US" sz="2000" dirty="0"/>
+          </a:p>
+        </p:txBody>
+      </p:sp>
+      <p:sp>
+        <p:nvSpPr>
+          <p:cNvPr id="6" name="Text 4"/>
+          <p:cNvSpPr/>
+          <p:nvPr/>
+        </p:nvSpPr>
+        <p:spPr>
+          <a:xfrm>
+            <a:off x="731520" y="2011680"/>
+            <a:ext cx="5029200" cy="3429000"/>
+          </a:xfrm>
+          <a:prstGeom prst="rect">
+            <a:avLst/>
+          </a:prstGeom>
+          <a:noFill/>
+          <a:ln/>
+        </p:spPr>
+        <p:txBody>
+          <a:bodyPr wrap="square" lIns="0" tIns="0" rIns="0" bIns="0" rtlCol="0" anchor="t"/>
+          <a:lstStyle/>
+          <a:p>
+            <a:pPr indent="0" marL="0">
+              <a:buNone/>
+            </a:pPr>
+            <a:r>
+              <a:rPr lang="en-US" sz="2000" dirty="0">
+                <a:solidFill>
+                  <a:srgbClr val="E6EDF3"/>
+                </a:solidFill>
+                <a:latin typeface="Calibri" pitchFamily="34" charset="0"/>
+                <a:ea typeface="Calibri" pitchFamily="34" charset="-122"/>
+                <a:cs typeface="Calibri" pitchFamily="34" charset="-120"/>
+              </a:rPr>
+              <a:t>Reliability is a set of simple rules working together.</a:t>
+            </a:r>
+            <a:endParaRPr lang="en-US" sz="2000" dirty="0"/>
+          </a:p>
+          <a:p>
+            <a:pPr indent="0" marL="0">
+              <a:buNone/>
+            </a:pPr>
+            <a:r>
+              <a:rPr lang="en-US" sz="2000" dirty="0">
+                <a:solidFill>
+                  <a:srgbClr val="E6EDF3"/>
+                </a:solidFill>
+                <a:latin typeface="Calibri" pitchFamily="34" charset="0"/>
+                <a:ea typeface="Calibri" pitchFamily="34" charset="-122"/>
+                <a:cs typeface="Calibri" pitchFamily="34" charset="-120"/>
+              </a:rPr>
+              <a:t>Congestion control matters as much as retransmission.</a:t>
+            </a:r>
+            <a:endParaRPr lang="en-US" sz="2000" dirty="0"/>
+          </a:p>
+          <a:p>
+            <a:pPr indent="0" marL="0">
+              <a:buNone/>
+            </a:pPr>
+            <a:r>
+              <a:rPr lang="en-US" sz="2000" dirty="0">
+                <a:solidFill>
+                  <a:srgbClr val="E6EDF3"/>
+                </a:solidFill>
+                <a:latin typeface="Calibri" pitchFamily="34" charset="0"/>
+                <a:ea typeface="Calibri" pitchFamily="34" charset="-122"/>
+                <a:cs typeface="Calibri" pitchFamily="34" charset="-120"/>
+              </a:rPr>
+              <a:t>Testing tools fail in surprising ways.</a:t>
+            </a:r>
+            <a:endParaRPr lang="en-US" sz="2000" dirty="0"/>
+          </a:p>
+        </p:txBody>
+      </p:sp>
+      <p:sp>
+        <p:nvSpPr>
+          <p:cNvPr id="7" name="Shape 5"/>
+          <p:cNvSpPr/>
+          <p:nvPr/>
+        </p:nvSpPr>
+        <p:spPr>
+          <a:xfrm>
+            <a:off x="6217920" y="1371600"/>
+            <a:ext cx="5394960" cy="4206240"/>
+          </a:xfrm>
+          <a:prstGeom prst="rect">
+            <a:avLst/>
+          </a:prstGeom>
+          <a:solidFill>
+            <a:srgbClr val="141B24"/>
+          </a:solidFill>
+          <a:ln w="12700">
+            <a:solidFill>
+              <a:srgbClr val="FFB000"/>
+            </a:solidFill>
+            <a:prstDash val="solid"/>
+          </a:ln>
+        </p:spPr>
+      </p:sp>
+      <p:sp>
+        <p:nvSpPr>
+          <p:cNvPr id="8" name="Text 6"/>
+          <p:cNvSpPr/>
+          <p:nvPr/>
+        </p:nvSpPr>
+        <p:spPr>
+          <a:xfrm>
+            <a:off x="6400800" y="1508760"/>
+            <a:ext cx="5029200" cy="457200"/>
+          </a:xfrm>
+          <a:prstGeom prst="rect">
+            <a:avLst/>
+          </a:prstGeom>
+          <a:noFill/>
+          <a:ln/>
+        </p:spPr>
+        <p:txBody>
+          <a:bodyPr wrap="square" lIns="0" tIns="0" rIns="0" bIns="0" rtlCol="0" anchor="ctr"/>
+          <a:lstStyle/>
+          <a:p>
+            <a:pPr indent="0" marL="0">
+              <a:buNone/>
+            </a:pPr>
+            <a:r>
+              <a:rPr lang="en-US" sz="2000" b="1" dirty="0">
+                <a:solidFill>
+                  <a:srgbClr val="FFB000"/>
+                </a:solidFill>
+                <a:latin typeface="Courier New" pitchFamily="34" charset="0"/>
+                <a:ea typeface="Courier New" pitchFamily="34" charset="-122"/>
+                <a:cs typeface="Courier New" pitchFamily="34" charset="-120"/>
+              </a:rPr>
+              <a:t>Next</a:t>
+            </a:r>
+            <a:endParaRPr lang="en-US" sz="2000" dirty="0"/>
+          </a:p>
+        </p:txBody>
+      </p:sp>
+      <p:sp>
+        <p:nvSpPr>
+          <p:cNvPr id="9" name="Text 7"/>
+          <p:cNvSpPr/>
+          <p:nvPr/>
+        </p:nvSpPr>
+        <p:spPr>
+          <a:xfrm>
+            <a:off x="6400800" y="2011680"/>
+            <a:ext cx="5029200" cy="3429000"/>
+          </a:xfrm>
+          <a:prstGeom prst="rect">
+            <a:avLst/>
+          </a:prstGeom>
+          <a:noFill/>
+          <a:ln/>
+        </p:spPr>
+        <p:txBody>
+          <a:bodyPr wrap="square" lIns="0" tIns="0" rIns="0" bIns="0" rtlCol="0" anchor="t"/>
+          <a:lstStyle/>
+          <a:p>
+            <a:pPr indent="0" marL="0">
+              <a:buNone/>
+            </a:pPr>
+            <a:r>
+              <a:rPr lang="en-US" sz="2000" dirty="0">
+                <a:solidFill>
+                  <a:srgbClr val="E6EDF3"/>
+                </a:solidFill>
+                <a:latin typeface="Calibri" pitchFamily="34" charset="0"/>
+                <a:ea typeface="Calibri" pitchFamily="34" charset="-122"/>
+                <a:cs typeface="Calibri" pitchFamily="34" charset="-120"/>
+              </a:rPr>
+              <a:t>Fairness-aware training, TCP coexistence</a:t>
+            </a:r>
+            <a:endParaRPr lang="en-US" sz="2000" dirty="0"/>
+          </a:p>
+          <a:p>
+            <a:pPr indent="0" marL="0">
+              <a:buNone/>
+            </a:pPr>
+            <a:r>
+              <a:rPr lang="en-US" sz="2000" dirty="0">
+                <a:solidFill>
+                  <a:srgbClr val="E6EDF3"/>
+                </a:solidFill>
+                <a:latin typeface="Calibri" pitchFamily="34" charset="0"/>
+                <a:ea typeface="Calibri" pitchFamily="34" charset="-122"/>
+                <a:cs typeface="Calibri" pitchFamily="34" charset="-120"/>
+              </a:rPr>
+              <a:t>Train on real traces with cross traffic</a:t>
+            </a:r>
+            <a:endParaRPr lang="en-US" sz="2000" dirty="0"/>
+          </a:p>
+          <a:p>
+            <a:pPr indent="0" marL="0">
+              <a:buNone/>
+            </a:pPr>
+            <a:r>
+              <a:rPr lang="en-US" sz="2000" dirty="0">
+                <a:solidFill>
+                  <a:srgbClr val="E6EDF3"/>
+                </a:solidFill>
+                <a:latin typeface="Calibri" pitchFamily="34" charset="0"/>
+                <a:ea typeface="Calibri" pitchFamily="34" charset="-122"/>
+                <a:cs typeface="Calibri" pitchFamily="34" charset="-120"/>
+              </a:rPr>
+              <a:t>Kernel netem and real multi-machine tests</a:t>
+            </a:r>
+            <a:endParaRPr lang="en-US" sz="2000" dirty="0"/>
+          </a:p>
+        </p:txBody>
+      </p:sp>
+      <p:sp>
+        <p:nvSpPr>
+          <p:cNvPr id="10" name="Text 8"/>
+          <p:cNvSpPr/>
+          <p:nvPr/>
+        </p:nvSpPr>
+        <p:spPr>
+          <a:xfrm>
+            <a:off x="548640" y="5852160"/>
+            <a:ext cx="10972800" cy="365760"/>
+          </a:xfrm>
+          <a:prstGeom prst="rect">
+            <a:avLst/>
+          </a:prstGeom>
+          <a:noFill/>
+          <a:ln/>
+        </p:spPr>
+        <p:txBody>
+          <a:bodyPr wrap="square" lIns="0" tIns="0" rIns="0" bIns="0" rtlCol="0" anchor="ctr"/>
+          <a:lstStyle/>
+          <a:p>
+            <a:pPr indent="0" marL="0">
+              <a:buNone/>
+            </a:pPr>
+            <a:r>
+              <a:rPr lang="en-US" sz="1400" dirty="0">
+                <a:solidFill>
+                  <a:srgbClr val="8B98A5"/>
+                </a:solidFill>
+                <a:latin typeface="Calibri" pitchFamily="34" charset="0"/>
+                <a:ea typeface="Calibri" pitchFamily="34" charset="-122"/>
+                <a:cs typeface="Calibri" pitchFamily="34" charset="-120"/>
+              </a:rPr>
+              <a:t>Limits: no kernel netem or multi-machine test; the agent is not a polite neighbour; no gain at 10% random loss; the tabular agent did not beat AIMD.</a:t>
+            </a:r>
+            <a:endParaRPr lang="en-US" sz="1400" dirty="0"/>
+          </a:p>
+        </p:txBody>
+      </p:sp>
+    </p:spTree>
+  </p:cSld>
+  <p:clrMapOvr>
+    <a:masterClrMapping/>
+  </p:clrMapOvr>
+</p:sld>
+</file>
+
+<file path=ppt/slides/slide31.xml><?xml version="1.0" encoding="utf-8"?>
+<p:sld xmlns:a="http://schemas.openxmlformats.org/drawingml/2006/main" xmlns:r="http://schemas.openxmlformats.org/officeDocument/2006/relationships" xmlns:p="http://schemas.openxmlformats.org/presentationml/2006/main">
+  <p:cSld name="Slide 31">
+    <p:bg>
+      <p:bgPr>
+        <a:solidFill>
+          <a:srgbClr val="0B0F14"/>
+        </a:solidFill>
+      </p:bgPr>
+    </p:bg>
+    <p:spTree>
+      <p:nvGrpSpPr>
+        <p:cNvPr id="1" name=""/>
+        <p:cNvGrpSpPr/>
+        <p:nvPr/>
+      </p:nvGrpSpPr>
+      <p:grpSpPr>
+        <a:xfrm>
+          <a:off x="0" y="0"/>
+          <a:ext cx="0" cy="0"/>
+          <a:chOff x="0" y="0"/>
+          <a:chExt cx="0" cy="0"/>
+        </a:xfrm>
+      </p:grpSpPr>
+      <p:sp>
+        <p:nvSpPr>
+          <p:cNvPr id="2" name="Text 0"/>
+          <p:cNvSpPr/>
+          <p:nvPr/>
+        </p:nvSpPr>
+        <p:spPr>
+          <a:xfrm>
+            <a:off x="731520" y="2103120"/>
+            <a:ext cx="10058400" cy="1097280"/>
+          </a:xfrm>
+          <a:prstGeom prst="rect">
+            <a:avLst/>
+          </a:prstGeom>
+          <a:noFill/>
+          <a:ln/>
+        </p:spPr>
+        <p:txBody>
+          <a:bodyPr wrap="square" lIns="0" tIns="0" rIns="0" bIns="0" rtlCol="0" anchor="ctr"/>
+          <a:lstStyle/>
+          <a:p>
+            <a:pPr indent="0" marL="0">
+              <a:buNone/>
+            </a:pPr>
+            <a:r>
+              <a:rPr lang="en-US" sz="6400" b="1" dirty="0">
+                <a:solidFill>
+                  <a:srgbClr val="39FF88"/>
+                </a:solidFill>
+                <a:latin typeface="Courier New" pitchFamily="34" charset="0"/>
+                <a:ea typeface="Courier New" pitchFamily="34" charset="-122"/>
+                <a:cs typeface="Courier New" pitchFamily="34" charset="-120"/>
+              </a:rPr>
+              <a:t>Thank you</a:t>
+            </a:r>
+            <a:endParaRPr lang="en-US" sz="6400" dirty="0"/>
+          </a:p>
+        </p:txBody>
+      </p:sp>
+      <p:sp>
+        <p:nvSpPr>
+          <p:cNvPr id="3" name="Text 1"/>
+          <p:cNvSpPr/>
+          <p:nvPr/>
+        </p:nvSpPr>
+        <p:spPr>
+          <a:xfrm>
+            <a:off x="731520" y="3474720"/>
+            <a:ext cx="10058400" cy="548640"/>
+          </a:xfrm>
+          <a:prstGeom prst="rect">
+            <a:avLst/>
+          </a:prstGeom>
+          <a:noFill/>
+          <a:ln/>
+        </p:spPr>
+        <p:txBody>
+          <a:bodyPr wrap="square" lIns="0" tIns="0" rIns="0" bIns="0" rtlCol="0" anchor="ctr"/>
+          <a:lstStyle/>
+          <a:p>
+            <a:pPr indent="0" marL="0">
+              <a:buNone/>
+            </a:pPr>
+            <a:r>
+              <a:rPr lang="en-US" sz="2600" dirty="0">
+                <a:solidFill>
+                  <a:srgbClr val="E6EDF3"/>
+                </a:solidFill>
+                <a:latin typeface="Courier New" pitchFamily="34" charset="0"/>
+                <a:ea typeface="Courier New" pitchFamily="34" charset="-122"/>
+                <a:cs typeface="Courier New" pitchFamily="34" charset="-120"/>
+              </a:rPr>
+              <a:t>github.com/Capsturrrr/rudp</a:t>
+            </a:r>
+            <a:endParaRPr lang="en-US" sz="2600" dirty="0"/>
+          </a:p>
+        </p:txBody>
+      </p:sp>
+      <p:sp>
+        <p:nvSpPr>
+          <p:cNvPr id="4" name="Text 2"/>
+          <p:cNvSpPr/>
+          <p:nvPr/>
+        </p:nvSpPr>
+        <p:spPr>
+          <a:xfrm>
+            <a:off x="731520" y="4206240"/>
+            <a:ext cx="10058400" cy="457200"/>
+          </a:xfrm>
+          <a:prstGeom prst="rect">
+            <a:avLst/>
+          </a:prstGeom>
+          <a:noFill/>
+          <a:ln/>
+        </p:spPr>
+        <p:txBody>
+          <a:bodyPr wrap="square" lIns="0" tIns="0" rIns="0" bIns="0" rtlCol="0" anchor="ctr"/>
+          <a:lstStyle/>
+          <a:p>
+            <a:pPr indent="0" marL="0">
+              <a:buNone/>
+            </a:pPr>
+            <a:r>
+              <a:rPr lang="en-US" sz="1800" dirty="0">
+                <a:solidFill>
+                  <a:srgbClr val="8B98A5"/>
+                </a:solidFill>
+                <a:latin typeface="Calibri" pitchFamily="34" charset="0"/>
+                <a:ea typeface="Calibri" pitchFamily="34" charset="-122"/>
+                <a:cs typeface="Calibri" pitchFamily="34" charset="-120"/>
+              </a:rPr>
+              <a:t>Harshavardhan Mallela   Rohit Arya   Shloak Sinha</a:t>
+            </a:r>
+            <a:endParaRPr lang="en-US" sz="1800" dirty="0"/>
+          </a:p>
+        </p:txBody>
+      </p:sp>
+    </p:spTree>
+  </p:cSld>
+  <p:clrMapOvr>
+    <a:masterClrMapping/>
+  </p:clrMapOvr>
+</p:sld>
+</file>
+
+<file path=ppt/slides/slide32.xml><?xml version="1.0" encoding="utf-8"?>
+<p:sld xmlns:a="http://schemas.openxmlformats.org/drawingml/2006/main" xmlns:r="http://schemas.openxmlformats.org/officeDocument/2006/relationships" xmlns:p="http://schemas.openxmlformats.org/presentationml/2006/main">
+  <p:cSld name="Slide 32">
+    <p:bg>
+      <p:bgPr>
+        <a:solidFill>
+          <a:srgbClr val="0B0F14"/>
+        </a:solidFill>
+      </p:bgPr>
+    </p:bg>
+    <p:spTree>
+      <p:nvGrpSpPr>
+        <p:cNvPr id="1" name=""/>
+        <p:cNvGrpSpPr/>
+        <p:nvPr/>
+      </p:nvGrpSpPr>
+      <p:grpSpPr>
+        <a:xfrm>
+          <a:off x="0" y="0"/>
+          <a:ext cx="0" cy="0"/>
+          <a:chOff x="0" y="0"/>
+          <a:chExt cx="0" cy="0"/>
+        </a:xfrm>
+      </p:grpSpPr>
+      <p:sp>
+        <p:nvSpPr>
+          <p:cNvPr id="2" name="Text 0"/>
+          <p:cNvSpPr/>
+          <p:nvPr/>
+        </p:nvSpPr>
+        <p:spPr>
+          <a:xfrm>
+            <a:off x="548640" y="320040"/>
+            <a:ext cx="11064240" cy="731520"/>
+          </a:xfrm>
+          <a:prstGeom prst="rect">
+            <a:avLst/>
+          </a:prstGeom>
+          <a:noFill/>
+          <a:ln/>
+        </p:spPr>
+        <p:txBody>
+          <a:bodyPr wrap="square" lIns="0" tIns="0" rIns="0" bIns="0" rtlCol="0" anchor="ctr"/>
+          <a:lstStyle/>
+          <a:p>
+            <a:pPr indent="0" marL="0">
+              <a:buNone/>
+            </a:pPr>
+            <a:r>
+              <a:rPr lang="en-US" sz="3000" b="1" dirty="0">
+                <a:solidFill>
+                  <a:srgbClr val="39FF88"/>
+                </a:solidFill>
+                <a:latin typeface="Courier New" pitchFamily="34" charset="0"/>
+                <a:ea typeface="Courier New" pitchFamily="34" charset="-122"/>
+                <a:cs typeface="Courier New" pitchFamily="34" charset="-120"/>
+              </a:rPr>
+              <a:t>Appendix: slow start and congestion avoidance</a:t>
+            </a:r>
+            <a:endParaRPr lang="en-US" sz="3000" dirty="0"/>
+          </a:p>
+        </p:txBody>
+      </p:sp>
+      <p:sp>
+        <p:nvSpPr>
+          <p:cNvPr id="3" name="Text 1"/>
+          <p:cNvSpPr/>
+          <p:nvPr/>
+        </p:nvSpPr>
+        <p:spPr>
+          <a:xfrm>
+            <a:off x="9418320" y="6446520"/>
+            <a:ext cx="2377440" cy="274320"/>
+          </a:xfrm>
+          <a:prstGeom prst="rect">
+            <a:avLst/>
+          </a:prstGeom>
+          <a:noFill/>
+          <a:ln/>
+        </p:spPr>
+        <p:txBody>
+          <a:bodyPr wrap="square" lIns="0" tIns="0" rIns="0" bIns="0" rtlCol="0" anchor="ctr"/>
+          <a:lstStyle/>
+          <a:p>
+            <a:pPr algn="r" indent="0" marL="0">
+              <a:buNone/>
+            </a:pPr>
+            <a:r>
+              <a:rPr lang="en-US" sz="1000" dirty="0">
+                <a:solidFill>
+                  <a:srgbClr val="8B98A5"/>
+                </a:solidFill>
+                <a:latin typeface="Courier New" pitchFamily="34" charset="0"/>
+                <a:ea typeface="Courier New" pitchFamily="34" charset="-122"/>
+                <a:cs typeface="Courier New" pitchFamily="34" charset="-120"/>
+              </a:rPr>
+              <a:t>Appendix   Smart-RUDP</a:t>
+            </a:r>
+            <a:endParaRPr lang="en-US" sz="1000" dirty="0"/>
+          </a:p>
+        </p:txBody>
+      </p:sp>
+      <p:pic>
+        <p:nvPicPr>
+          <p:cNvPr id="4" name="Image 0" descr="fig1_cwnd_no_loss.png">    </p:cNvPr>
+          <p:cNvPicPr>
+            <a:picLocks noChangeAspect="1"/>
+          </p:cNvPicPr>
+          <p:nvPr/>
+        </p:nvPicPr>
+        <p:blipFill>
+          <a:blip r:embed="rId1"/>
+          <a:stretch>
+            <a:fillRect/>
+          </a:stretch>
+        </p:blipFill>
+        <p:spPr>
+          <a:xfrm>
+            <a:off x="731520" y="1188720"/>
+            <a:ext cx="7498080" cy="3998976"/>
+          </a:xfrm>
+          <a:prstGeom prst="rect">
+            <a:avLst/>
+          </a:prstGeom>
+        </p:spPr>
+      </p:pic>
+      <p:sp>
+        <p:nvSpPr>
+          <p:cNvPr id="5" name="Text 2"/>
+          <p:cNvSpPr/>
+          <p:nvPr/>
+        </p:nvSpPr>
+        <p:spPr>
+          <a:xfrm>
+            <a:off x="8503920" y="1463040"/>
+            <a:ext cx="3200400" cy="3200400"/>
+          </a:xfrm>
+          <a:prstGeom prst="rect">
+            <a:avLst/>
+          </a:prstGeom>
+          <a:noFill/>
+          <a:ln/>
+        </p:spPr>
+        <p:txBody>
+          <a:bodyPr wrap="square" lIns="0" tIns="0" rIns="0" bIns="0" rtlCol="0" anchor="t"/>
+          <a:lstStyle/>
+          <a:p>
+            <a:pPr marL="342900" indent="-342900">
+              <a:spcAft>
+                <a:spcPts val="800"/>
+              </a:spcAft>
+              <a:buSzPct val="100000"/>
+              <a:buChar char="•"/>
+            </a:pPr>
+            <a:r>
+              <a:rPr lang="en-US" sz="1700" dirty="0">
+                <a:solidFill>
+                  <a:srgbClr val="E6EDF3"/>
+                </a:solidFill>
+                <a:latin typeface="Calibri" pitchFamily="34" charset="0"/>
+                <a:ea typeface="Calibri" pitchFamily="34" charset="-122"/>
+                <a:cs typeface="Calibri" pitchFamily="34" charset="-120"/>
+              </a:rPr>
+              <a:t>cwnd starts at 1</a:t>
+            </a:r>
+            <a:endParaRPr lang="en-US" sz="1700" dirty="0"/>
+          </a:p>
+          <a:p>
+            <a:pPr marL="342900" indent="-342900">
+              <a:spcAft>
+                <a:spcPts val="800"/>
+              </a:spcAft>
+              <a:buSzPct val="100000"/>
+              <a:buChar char="•"/>
+            </a:pPr>
+            <a:r>
+              <a:rPr lang="en-US" sz="1700" dirty="0">
+                <a:solidFill>
+                  <a:srgbClr val="E6EDF3"/>
+                </a:solidFill>
+                <a:latin typeface="Calibri" pitchFamily="34" charset="0"/>
+                <a:ea typeface="Calibri" pitchFamily="34" charset="-122"/>
+                <a:cs typeface="Calibri" pitchFamily="34" charset="-120"/>
+              </a:rPr>
+              <a:t>+1 per ACK until ssthresh = 16</a:t>
+            </a:r>
+            <a:endParaRPr lang="en-US" sz="1700" dirty="0"/>
+          </a:p>
+          <a:p>
+            <a:pPr marL="342900" indent="-342900">
+              <a:spcAft>
+                <a:spcPts val="800"/>
+              </a:spcAft>
+              <a:buSzPct val="100000"/>
+              <a:buChar char="•"/>
+            </a:pPr>
+            <a:r>
+              <a:rPr lang="en-US" sz="1700" dirty="0">
+                <a:solidFill>
+                  <a:srgbClr val="E6EDF3"/>
+                </a:solidFill>
+                <a:latin typeface="Calibri" pitchFamily="34" charset="0"/>
+                <a:ea typeface="Calibri" pitchFamily="34" charset="-122"/>
+                <a:cs typeface="Calibri" pitchFamily="34" charset="-120"/>
+              </a:rPr>
+              <a:t>Then +1/cwnd per ACK</a:t>
+            </a:r>
+            <a:endParaRPr lang="en-US" sz="1700" dirty="0"/>
+          </a:p>
+          <a:p>
+            <a:pPr marL="342900" indent="-342900">
+              <a:spcAft>
+                <a:spcPts val="800"/>
+              </a:spcAft>
+              <a:buSzPct val="100000"/>
+              <a:buChar char="•"/>
+            </a:pPr>
+            <a:r>
+              <a:rPr lang="en-US" sz="1700" dirty="0">
+                <a:solidFill>
+                  <a:srgbClr val="E6EDF3"/>
+                </a:solidFill>
+                <a:latin typeface="Calibri" pitchFamily="34" charset="0"/>
+                <a:ea typeface="Calibri" pitchFamily="34" charset="-122"/>
+                <a:cs typeface="Calibri" pitchFamily="34" charset="-120"/>
+              </a:rPr>
+              <a:t>62 packets, final cwnd 18.71</a:t>
+            </a:r>
+            <a:endParaRPr lang="en-US" sz="1700" dirty="0"/>
           </a:p>
         </p:txBody>
       </p:sp>
@@ -19345,7 +23737,7 @@
                 <a:ea typeface="Courier New" pitchFamily="34" charset="-122"/>
                 <a:cs typeface="Courier New" pitchFamily="34" charset="-120"/>
               </a:rPr>
-              <a:t>4 / 28   Smart-RUDP</a:t>
+              <a:t>4 / 32   Smart-RUDP</a:t>
             </a:r>
             <a:endParaRPr lang="en-US" sz="1000" dirty="0"/>
           </a:p>
@@ -19906,7 +24298,7 @@
                 <a:ea typeface="Courier New" pitchFamily="34" charset="-122"/>
                 <a:cs typeface="Courier New" pitchFamily="34" charset="-120"/>
               </a:rPr>
-              <a:t>5 / 28   Smart-RUDP</a:t>
+              <a:t>5 / 32   Smart-RUDP</a:t>
             </a:r>
             <a:endParaRPr lang="en-US" sz="1000" dirty="0"/>
           </a:p>
@@ -21345,7 +25737,7 @@
                 <a:ea typeface="Courier New" pitchFamily="34" charset="-122"/>
                 <a:cs typeface="Courier New" pitchFamily="34" charset="-120"/>
               </a:rPr>
-              <a:t>6 / 28   Smart-RUDP</a:t>
+              <a:t>6 / 32   Smart-RUDP</a:t>
             </a:r>
             <a:endParaRPr lang="en-US" sz="1000" dirty="0"/>
           </a:p>
@@ -22580,7 +26972,7 @@
                 <a:ea typeface="Courier New" pitchFamily="34" charset="-122"/>
                 <a:cs typeface="Courier New" pitchFamily="34" charset="-120"/>
               </a:rPr>
-              <a:t>7 / 28   Smart-RUDP</a:t>
+              <a:t>7 / 32   Smart-RUDP</a:t>
             </a:r>
             <a:endParaRPr lang="en-US" sz="1000" dirty="0"/>
           </a:p>
@@ -23023,7 +27415,7 @@
                 <a:ea typeface="Courier New" pitchFamily="34" charset="-122"/>
                 <a:cs typeface="Courier New" pitchFamily="34" charset="-120"/>
               </a:rPr>
-              <a:t>8 / 28   Smart-RUDP</a:t>
+              <a:t>8 / 32   Smart-RUDP</a:t>
             </a:r>
             <a:endParaRPr lang="en-US" sz="1000" dirty="0"/>
           </a:p>
@@ -23323,7 +27715,7 @@
                 <a:ea typeface="Courier New" pitchFamily="34" charset="-122"/>
                 <a:cs typeface="Courier New" pitchFamily="34" charset="-120"/>
               </a:rPr>
-              <a:t>9 / 28   Smart-RUDP</a:t>
+              <a:t>9 / 32   Smart-RUDP</a:t>
             </a:r>
             <a:endParaRPr lang="en-US" sz="1000" dirty="0"/>
           </a:p>
